--- a/docs/design/Sona_Care_Journey_Deck.pptx
+++ b/docs/design/Sona_Care_Journey_Deck.pptx
@@ -8,9 +8,8 @@
     <p:sldId id="256" r:id="rId7"/>
     <p:sldId id="257" r:id="rId8"/>
     <p:sldId id="258" r:id="rId9"/>
-    <p:sldId id="259" r:id="rId10"/>
   </p:sldIdLst>
-  <p:sldSz cx="12191695" cy="6858000" type="screen4x3"/>
+  <p:sldSz cx="12192000" cy="6858000" type="screen4x3"/>
   <p:notesSz cx="6858000" cy="9144000"/>
   <p:defaultTextStyle>
     <a:defPPr>
@@ -3100,7 +3099,7 @@
         <p:spPr>
           <a:xfrm>
             <a:off x="0" y="0"/>
-            <a:ext cx="12191695" cy="6858000"/>
+            <a:ext cx="12192000" cy="6858000"/>
           </a:xfrm>
           <a:prstGeom prst="rect">
             <a:avLst/>
@@ -3137,22 +3136,139 @@
       </p:sp>
       <p:sp>
         <p:nvSpPr>
-          <p:cNvPr id="3" name="Rounded Rectangle 2"/>
+          <p:cNvPr id="3" name="TextBox 2"/>
+          <p:cNvSpPr txBox="1"/>
+          <p:nvPr/>
+        </p:nvSpPr>
+        <p:spPr>
+          <a:xfrm>
+            <a:off x="571500" y="469899"/>
+            <a:ext cx="5715000" cy="165100"/>
+          </a:xfrm>
+          <a:prstGeom prst="rect">
+            <a:avLst/>
+          </a:prstGeom>
+          <a:noFill/>
+        </p:spPr>
+        <p:txBody>
+          <a:bodyPr wrap="square" anchor="t" lIns="25400" rIns="25400" tIns="12700" bIns="12700">
+            <a:spAutoFit/>
+          </a:bodyPr>
+          <a:lstStyle/>
+          <a:p>
+            <a:pPr algn="l">
+              <a:spcAft>
+                <a:spcPts val="0"/>
+              </a:spcAft>
+            </a:pPr>
+            <a:r>
+              <a:rPr sz="750" b="1">
+                <a:solidFill>
+                  <a:srgbClr val="8597A4"/>
+                </a:solidFill>
+                <a:latin typeface="Inter"/>
+              </a:rPr>
+              <a:t>OVERVIEW</a:t>
+            </a:r>
+          </a:p>
+        </p:txBody>
+      </p:sp>
+      <p:sp>
+        <p:nvSpPr>
+          <p:cNvPr id="4" name="TextBox 3"/>
+          <p:cNvSpPr txBox="1"/>
+          <p:nvPr/>
+        </p:nvSpPr>
+        <p:spPr>
+          <a:xfrm>
+            <a:off x="571500" y="635000"/>
+            <a:ext cx="11176000" cy="444500"/>
+          </a:xfrm>
+          <a:prstGeom prst="rect">
+            <a:avLst/>
+          </a:prstGeom>
+          <a:noFill/>
+        </p:spPr>
+        <p:txBody>
+          <a:bodyPr wrap="square" anchor="t" lIns="25400" rIns="25400" tIns="12700" bIns="12700">
+            <a:spAutoFit/>
+          </a:bodyPr>
+          <a:lstStyle/>
+          <a:p>
+            <a:pPr algn="l">
+              <a:spcAft>
+                <a:spcPts val="0"/>
+              </a:spcAft>
+            </a:pPr>
+            <a:r>
+              <a:rPr sz="2300" b="1">
+                <a:solidFill>
+                  <a:srgbClr val="2D6A6E"/>
+                </a:solidFill>
+                <a:latin typeface="Inter"/>
+              </a:rPr>
+              <a:t>Sona — Care Journey &amp; Product Overview</a:t>
+            </a:r>
+          </a:p>
+        </p:txBody>
+      </p:sp>
+      <p:sp>
+        <p:nvSpPr>
+          <p:cNvPr id="5" name="TextBox 4"/>
+          <p:cNvSpPr txBox="1"/>
+          <p:nvPr/>
+        </p:nvSpPr>
+        <p:spPr>
+          <a:xfrm>
+            <a:off x="571500" y="1143000"/>
+            <a:ext cx="9906000" cy="508000"/>
+          </a:xfrm>
+          <a:prstGeom prst="rect">
+            <a:avLst/>
+          </a:prstGeom>
+          <a:noFill/>
+        </p:spPr>
+        <p:txBody>
+          <a:bodyPr wrap="square" anchor="t" lIns="25400" rIns="25400" tIns="12700" bIns="12700">
+            <a:spAutoFit/>
+          </a:bodyPr>
+          <a:lstStyle/>
+          <a:p>
+            <a:pPr algn="l">
+              <a:spcAft>
+                <a:spcPts val="0"/>
+              </a:spcAft>
+            </a:pPr>
+            <a:r>
+              <a:rPr sz="1000" b="0">
+                <a:solidFill>
+                  <a:srgbClr val="4A5B6B"/>
+                </a:solidFill>
+                <a:latin typeface="Inter"/>
+              </a:rPr>
+              <a:t>An AI co-pilot that reduces admin burnout in UK private Speech &amp; Language Therapy (SLT) — giving clinicians more productive time for care across a client's first 30 days.</a:t>
+            </a:r>
+          </a:p>
+        </p:txBody>
+      </p:sp>
+      <p:sp>
+        <p:nvSpPr>
+          <p:cNvPr id="6" name="Rounded Rectangle 5"/>
           <p:cNvSpPr/>
           <p:nvPr/>
         </p:nvSpPr>
         <p:spPr>
           <a:xfrm>
-            <a:off x="411480" y="365760"/>
-            <a:ext cx="11365992" cy="1325880"/>
+            <a:off x="584200" y="1727200"/>
+            <a:ext cx="889000" cy="31750"/>
           </a:xfrm>
           <a:prstGeom prst="roundRect">
             <a:avLst>
-              <a:gd name="adj" fmla="val 4137"/>
+              <a:gd name="adj" fmla="val 40000"/>
             </a:avLst>
           </a:prstGeom>
           <a:solidFill>
-            <a:srgbClr val="2D6A6E"/>
+            <a:srgbClr val="F2A878"/>
           </a:solidFill>
           <a:ln>
             <a:noFill/>
@@ -3183,14 +3299,14 @@
       </p:sp>
       <p:sp>
         <p:nvSpPr>
-          <p:cNvPr id="4" name="TextBox 3"/>
+          <p:cNvPr id="7" name="TextBox 6"/>
           <p:cNvSpPr txBox="1"/>
           <p:nvPr/>
         </p:nvSpPr>
         <p:spPr>
           <a:xfrm>
-            <a:off x="411480" y="365760"/>
-            <a:ext cx="11365992" cy="1325880"/>
+            <a:off x="571500" y="2032000"/>
+            <a:ext cx="5207000" cy="177800"/>
           </a:xfrm>
           <a:prstGeom prst="rect">
             <a:avLst/>
@@ -3198,7 +3314,7 @@
           <a:noFill/>
         </p:spPr>
         <p:txBody>
-          <a:bodyPr wrap="square" anchor="ctr" lIns="64008" rIns="64008" tIns="27432" bIns="27432">
+          <a:bodyPr wrap="square" anchor="t" lIns="25400" rIns="25400" tIns="12700" bIns="12700">
             <a:spAutoFit/>
           </a:bodyPr>
           <a:lstStyle/>
@@ -3209,59 +3325,113 @@
               </a:spcAft>
             </a:pPr>
             <a:r>
-              <a:rPr sz="3000" b="1">
-                <a:solidFill>
-                  <a:srgbClr val="FFFFFF"/>
-                </a:solidFill>
-                <a:latin typeface="Calibri"/>
+              <a:rPr sz="800" b="1">
+                <a:solidFill>
+                  <a:srgbClr val="2D6A6E"/>
+                </a:solidFill>
+                <a:latin typeface="Inter"/>
               </a:rPr>
-              <a:t>Sona — Care Journey &amp; Product Overview</a:t>
+              <a:t>WHAT IS SONA?</a:t>
+            </a:r>
+          </a:p>
+        </p:txBody>
+      </p:sp>
+      <p:sp>
+        <p:nvSpPr>
+          <p:cNvPr id="8" name="TextBox 7"/>
+          <p:cNvSpPr txBox="1"/>
+          <p:nvPr/>
+        </p:nvSpPr>
+        <p:spPr>
+          <a:xfrm>
+            <a:off x="571500" y="2286000"/>
+            <a:ext cx="5143500" cy="2794000"/>
+          </a:xfrm>
+          <a:prstGeom prst="rect">
+            <a:avLst/>
+          </a:prstGeom>
+          <a:noFill/>
+        </p:spPr>
+        <p:txBody>
+          <a:bodyPr wrap="square" anchor="t" lIns="25400" rIns="25400" tIns="12700" bIns="12700">
+            <a:spAutoFit/>
+          </a:bodyPr>
+          <a:lstStyle/>
+          <a:p>
+            <a:pPr algn="l">
+              <a:spcAft>
+                <a:spcPts val="0"/>
+              </a:spcAft>
+            </a:pPr>
+            <a:r>
+              <a:rPr sz="900" b="0">
+                <a:solidFill>
+                  <a:srgbClr val="142433"/>
+                </a:solidFill>
+                <a:latin typeface="Inter"/>
+              </a:rPr>
+              <a:t>Sona is an AI co-pilot for UK private Speech &amp; Language Therapy (SLT) practices.</a:t>
             </a:r>
           </a:p>
           <a:p>
             <a:pPr algn="l">
               <a:spcBef>
-                <a:spcPts val="800"/>
+                <a:spcPts val="500"/>
               </a:spcBef>
               <a:spcAft>
                 <a:spcPts val="0"/>
               </a:spcAft>
             </a:pPr>
             <a:r>
-              <a:rPr sz="1300" b="0">
-                <a:solidFill>
-                  <a:srgbClr val="DCEDEC"/>
-                </a:solidFill>
-                <a:latin typeface="Calibri"/>
+              <a:rPr sz="900" b="0">
+                <a:solidFill>
+                  <a:srgbClr val="142433"/>
+                </a:solidFill>
+                <a:latin typeface="Inter"/>
               </a:rPr>
-              <a:t>An AI co-pilot that reduces admin burnout in UK private Speech &amp; Language Therapy (SLT) — giving clinicians more productive time for care across a client's first 30 days.</a:t>
-            </a:r>
-          </a:p>
-        </p:txBody>
-      </p:sp>
-      <p:sp>
-        <p:nvSpPr>
-          <p:cNvPr id="5" name="Rounded Rectangle 4"/>
+              <a:t>It does the repetitive admin alongside the clinician — capturing the enquiry, running a smart intake, prepping the consult, recording the triage decision, and drafting the first session plan and family summary, always as drafts for the clinician to review.</a:t>
+            </a:r>
+          </a:p>
+          <a:p>
+            <a:pPr algn="l">
+              <a:spcBef>
+                <a:spcPts val="500"/>
+              </a:spcBef>
+              <a:spcAft>
+                <a:spcPts val="0"/>
+              </a:spcAft>
+            </a:pPr>
+            <a:r>
+              <a:rPr sz="900" b="0">
+                <a:solidFill>
+                  <a:srgbClr val="142433"/>
+                </a:solidFill>
+                <a:latin typeface="Inter"/>
+              </a:rPr>
+              <a:t>Sona augments clinicians. Its purpose is to increase human productivity — less admin burnout, more time for care.</a:t>
+            </a:r>
+          </a:p>
+        </p:txBody>
+      </p:sp>
+      <p:sp>
+        <p:nvSpPr>
+          <p:cNvPr id="9" name="Rectangle 8"/>
           <p:cNvSpPr/>
           <p:nvPr/>
         </p:nvSpPr>
         <p:spPr>
           <a:xfrm>
-            <a:off x="411480" y="1920240"/>
-            <a:ext cx="5532120" cy="3154680"/>
-          </a:xfrm>
-          <a:prstGeom prst="roundRect">
-            <a:avLst>
-              <a:gd name="adj" fmla="val 2318"/>
-            </a:avLst>
+            <a:off x="6083300" y="2044700"/>
+            <a:ext cx="12700" cy="2984500"/>
+          </a:xfrm>
+          <a:prstGeom prst="rect">
+            <a:avLst/>
           </a:prstGeom>
           <a:solidFill>
-            <a:srgbClr val="FFFFFF"/>
+            <a:srgbClr val="E5E7EB"/>
           </a:solidFill>
-          <a:ln w="12700">
-            <a:solidFill>
-              <a:srgbClr val="D8E0DE"/>
-            </a:solidFill>
+          <a:ln>
+            <a:noFill/>
           </a:ln>
           <a:effectLst/>
         </p:spPr>
@@ -3289,14 +3459,14 @@
       </p:sp>
       <p:sp>
         <p:nvSpPr>
-          <p:cNvPr id="6" name="TextBox 5"/>
+          <p:cNvPr id="10" name="TextBox 9"/>
           <p:cNvSpPr txBox="1"/>
           <p:nvPr/>
         </p:nvSpPr>
         <p:spPr>
           <a:xfrm>
-            <a:off x="411480" y="1920240"/>
-            <a:ext cx="5532120" cy="3154680"/>
+            <a:off x="6388100" y="2032000"/>
+            <a:ext cx="5080000" cy="177800"/>
           </a:xfrm>
           <a:prstGeom prst="rect">
             <a:avLst/>
@@ -3304,7 +3474,7 @@
           <a:noFill/>
         </p:spPr>
         <p:txBody>
-          <a:bodyPr wrap="square" anchor="t" lIns="64008" rIns="64008" tIns="27432" bIns="27432">
+          <a:bodyPr wrap="square" anchor="t" lIns="25400" rIns="25400" tIns="12700" bIns="12700">
             <a:spAutoFit/>
           </a:bodyPr>
           <a:lstStyle/>
@@ -3315,97 +3485,115 @@
               </a:spcAft>
             </a:pPr>
             <a:r>
-              <a:rPr sz="1300" b="1">
+              <a:rPr sz="800" b="1">
                 <a:solidFill>
                   <a:srgbClr val="2D6A6E"/>
                 </a:solidFill>
-                <a:latin typeface="Calibri"/>
+                <a:latin typeface="Inter"/>
               </a:rPr>
-              <a:t>WHAT IS SONA?</a:t>
+              <a:t>HOW TO READ THIS BOARD</a:t>
+            </a:r>
+          </a:p>
+        </p:txBody>
+      </p:sp>
+      <p:sp>
+        <p:nvSpPr>
+          <p:cNvPr id="11" name="TextBox 10"/>
+          <p:cNvSpPr txBox="1"/>
+          <p:nvPr/>
+        </p:nvSpPr>
+        <p:spPr>
+          <a:xfrm>
+            <a:off x="6388100" y="2286000"/>
+            <a:ext cx="5080000" cy="2794000"/>
+          </a:xfrm>
+          <a:prstGeom prst="rect">
+            <a:avLst/>
+          </a:prstGeom>
+          <a:noFill/>
+        </p:spPr>
+        <p:txBody>
+          <a:bodyPr wrap="square" anchor="t" lIns="25400" rIns="25400" tIns="12700" bIns="12700">
+            <a:spAutoFit/>
+          </a:bodyPr>
+          <a:lstStyle/>
+          <a:p>
+            <a:pPr algn="l">
+              <a:spcAft>
+                <a:spcPts val="0"/>
+              </a:spcAft>
+            </a:pPr>
+            <a:r>
+              <a:rPr sz="900" b="0">
+                <a:solidFill>
+                  <a:srgbClr val="142433"/>
+                </a:solidFill>
+                <a:latin typeface="Inter"/>
+              </a:rPr>
+              <a:t>•  Two views follow — the Executive view (the journey and the value) and the Product view (the proposed solution, phase by phase).</a:t>
             </a:r>
           </a:p>
           <a:p>
             <a:pPr algn="l">
               <a:spcBef>
-                <a:spcPts val="1200"/>
+                <a:spcPts val="500"/>
               </a:spcBef>
               <a:spcAft>
                 <a:spcPts val="0"/>
               </a:spcAft>
             </a:pPr>
             <a:r>
-              <a:rPr sz="1250" b="0">
-                <a:solidFill>
-                  <a:srgbClr val="15302E"/>
-                </a:solidFill>
-                <a:latin typeface="Calibri"/>
+              <a:rPr sz="900" b="0">
+                <a:solidFill>
+                  <a:srgbClr val="142433"/>
+                </a:solidFill>
+                <a:latin typeface="Inter"/>
               </a:rPr>
-              <a:t>Sona is an AI co-pilot for UK private Speech &amp; Language Therapy (SLT) practices.</a:t>
+              <a:t>•  Read each view left → right: the client's journey across the first ~30 days of a new case.</a:t>
             </a:r>
           </a:p>
           <a:p>
             <a:pPr algn="l">
               <a:spcBef>
-                <a:spcPts val="1000"/>
+                <a:spcPts val="500"/>
               </a:spcBef>
               <a:spcAft>
                 <a:spcPts val="0"/>
               </a:spcAft>
             </a:pPr>
             <a:r>
-              <a:rPr sz="1250" b="0">
-                <a:solidFill>
-                  <a:srgbClr val="15302E"/>
-                </a:solidFill>
-                <a:latin typeface="Calibri"/>
+              <a:rPr sz="900" b="0">
+                <a:solidFill>
+                  <a:srgbClr val="142433"/>
+                </a:solidFill>
+                <a:latin typeface="Inter"/>
               </a:rPr>
-              <a:t>It does the repetitive admin alongside the clinician — capturing the enquiry, running a smart intake, prepping the consult, recording the triage decision, and drafting the first session plan and family summary — always as drafts for the clinician to review.</a:t>
-            </a:r>
-          </a:p>
-          <a:p>
-            <a:pPr algn="l">
-              <a:spcBef>
-                <a:spcPts val="1000"/>
-              </a:spcBef>
-              <a:spcAft>
-                <a:spcPts val="0"/>
-              </a:spcAft>
-            </a:pPr>
-            <a:r>
-              <a:rPr sz="1250" b="0">
-                <a:solidFill>
-                  <a:srgbClr val="15302E"/>
-                </a:solidFill>
-                <a:latin typeface="Calibri"/>
-              </a:rPr>
-              <a:t>Sona augments clinicians. Its purpose is to increase human productivity — less admin burnout, more time for care.</a:t>
-            </a:r>
-          </a:p>
-        </p:txBody>
-      </p:sp>
-      <p:sp>
-        <p:nvSpPr>
-          <p:cNvPr id="7" name="Rounded Rectangle 6"/>
+              <a:t>•  Who's who —  client / parent / carer: the family or adult client;  clinician / SLT: the therapist;  practice: the private clinic.</a:t>
+            </a:r>
+          </a:p>
+        </p:txBody>
+      </p:sp>
+      <p:sp>
+        <p:nvSpPr>
+          <p:cNvPr id="12" name="Rounded Rectangle 11"/>
           <p:cNvSpPr/>
           <p:nvPr/>
         </p:nvSpPr>
         <p:spPr>
           <a:xfrm>
-            <a:off x="6245352" y="1920240"/>
-            <a:ext cx="5532120" cy="3154680"/>
+            <a:off x="571500" y="5664200"/>
+            <a:ext cx="11049000" cy="812800"/>
           </a:xfrm>
           <a:prstGeom prst="roundRect">
             <a:avLst>
-              <a:gd name="adj" fmla="val 2318"/>
+              <a:gd name="adj" fmla="val 12500"/>
             </a:avLst>
           </a:prstGeom>
           <a:solidFill>
-            <a:srgbClr val="FFFFFF"/>
+            <a:srgbClr val="1E4A4D"/>
           </a:solidFill>
-          <a:ln w="12700">
-            <a:solidFill>
-              <a:srgbClr val="D8E0DE"/>
-            </a:solidFill>
+          <a:ln>
+            <a:noFill/>
           </a:ln>
           <a:effectLst/>
         </p:spPr>
@@ -3433,14 +3621,14 @@
       </p:sp>
       <p:sp>
         <p:nvSpPr>
-          <p:cNvPr id="8" name="TextBox 7"/>
+          <p:cNvPr id="13" name="TextBox 12"/>
           <p:cNvSpPr txBox="1"/>
           <p:nvPr/>
         </p:nvSpPr>
         <p:spPr>
           <a:xfrm>
-            <a:off x="6245352" y="1920240"/>
-            <a:ext cx="5532120" cy="3154680"/>
+            <a:off x="774700" y="5816600"/>
+            <a:ext cx="3810000" cy="152400"/>
           </a:xfrm>
           <a:prstGeom prst="rect">
             <a:avLst/>
@@ -3448,7 +3636,7 @@
           <a:noFill/>
         </p:spPr>
         <p:txBody>
-          <a:bodyPr wrap="square" anchor="t" lIns="64008" rIns="64008" tIns="27432" bIns="27432">
+          <a:bodyPr wrap="square" anchor="t" lIns="25400" rIns="25400" tIns="12700" bIns="12700">
             <a:spAutoFit/>
           </a:bodyPr>
           <a:lstStyle/>
@@ -3459,130 +3647,27 @@
               </a:spcAft>
             </a:pPr>
             <a:r>
-              <a:rPr sz="1300" b="1">
-                <a:solidFill>
-                  <a:srgbClr val="2D6A6E"/>
-                </a:solidFill>
-                <a:latin typeface="Calibri"/>
+              <a:rPr sz="700" b="1">
+                <a:solidFill>
+                  <a:srgbClr val="A9C7C7"/>
+                </a:solidFill>
+                <a:latin typeface="Inter"/>
               </a:rPr>
-              <a:t>HOW TO READ THIS BOARD</a:t>
-            </a:r>
-          </a:p>
-          <a:p>
-            <a:pPr algn="l">
-              <a:spcBef>
-                <a:spcPts val="1200"/>
-              </a:spcBef>
-              <a:spcAft>
-                <a:spcPts val="0"/>
-              </a:spcAft>
-            </a:pPr>
-            <a:r>
-              <a:rPr sz="1250" b="0">
-                <a:solidFill>
-                  <a:srgbClr val="15302E"/>
-                </a:solidFill>
-                <a:latin typeface="Calibri"/>
-              </a:rPr>
-              <a:t>•  Two views follow: the Executive view (the journey, the value, the bets) and the Product view (what we'll build, stage by stage).</a:t>
-            </a:r>
-          </a:p>
-          <a:p>
-            <a:pPr algn="l">
-              <a:spcBef>
-                <a:spcPts val="1000"/>
-              </a:spcBef>
-              <a:spcAft>
-                <a:spcPts val="0"/>
-              </a:spcAft>
-            </a:pPr>
-            <a:r>
-              <a:rPr sz="1250" b="0">
-                <a:solidFill>
-                  <a:srgbClr val="15302E"/>
-                </a:solidFill>
-                <a:latin typeface="Calibri"/>
-              </a:rPr>
-              <a:t>•  Read each view left → right — the client's journey across the first ~30 days of a new case.</a:t>
-            </a:r>
-          </a:p>
-          <a:p>
-            <a:pPr algn="l">
-              <a:spcBef>
-                <a:spcPts val="1000"/>
-              </a:spcBef>
-              <a:spcAft>
-                <a:spcPts val="0"/>
-              </a:spcAft>
-            </a:pPr>
-            <a:r>
-              <a:rPr sz="1250" b="0">
-                <a:solidFill>
-                  <a:srgbClr val="15302E"/>
-                </a:solidFill>
-                <a:latin typeface="Calibri"/>
-              </a:rPr>
-              <a:t>•  Who's who: client / parent / carer = the family or adult client · clinician / SLT = the therapist · practice = the private clinic.</a:t>
-            </a:r>
-          </a:p>
-        </p:txBody>
-      </p:sp>
-      <p:sp>
-        <p:nvSpPr>
-          <p:cNvPr id="9" name="Rounded Rectangle 8"/>
-          <p:cNvSpPr/>
-          <p:nvPr/>
-        </p:nvSpPr>
-        <p:spPr>
-          <a:xfrm>
-            <a:off x="411480" y="5257800"/>
-            <a:ext cx="11365992" cy="713232"/>
-          </a:xfrm>
-          <a:prstGeom prst="roundRect">
-            <a:avLst>
-              <a:gd name="adj" fmla="val 12820"/>
-            </a:avLst>
-          </a:prstGeom>
-          <a:solidFill>
-            <a:srgbClr val="234F52"/>
-          </a:solidFill>
-          <a:ln>
-            <a:noFill/>
-          </a:ln>
-          <a:effectLst/>
-        </p:spPr>
-        <p:style>
-          <a:lnRef idx="1">
-            <a:schemeClr val="accent1"/>
-          </a:lnRef>
-          <a:fillRef idx="3">
-            <a:schemeClr val="accent1"/>
-          </a:fillRef>
-          <a:effectRef idx="2">
-            <a:schemeClr val="accent1"/>
-          </a:effectRef>
-          <a:fontRef idx="minor">
-            <a:schemeClr val="lt1"/>
-          </a:fontRef>
-        </p:style>
-        <p:txBody>
-          <a:bodyPr rtlCol="0" anchor="ctr"/>
-          <a:lstStyle/>
-          <a:p>
-            <a:pPr algn="ctr"/>
-          </a:p>
-        </p:txBody>
-      </p:sp>
-      <p:sp>
-        <p:nvSpPr>
-          <p:cNvPr id="10" name="TextBox 9"/>
+              <a:t>ANCHOR PRINCIPLES</a:t>
+            </a:r>
+          </a:p>
+        </p:txBody>
+      </p:sp>
+      <p:sp>
+        <p:nvSpPr>
+          <p:cNvPr id="14" name="TextBox 13"/>
           <p:cNvSpPr txBox="1"/>
           <p:nvPr/>
         </p:nvSpPr>
         <p:spPr>
           <a:xfrm>
-            <a:off x="411480" y="5257800"/>
-            <a:ext cx="11365992" cy="713232"/>
+            <a:off x="774700" y="6083300"/>
+            <a:ext cx="2667000" cy="177800"/>
           </a:xfrm>
           <a:prstGeom prst="rect">
             <a:avLst/>
@@ -3590,46 +3675,7 @@
           <a:noFill/>
         </p:spPr>
         <p:txBody>
-          <a:bodyPr wrap="square" anchor="ctr" lIns="64008" rIns="64008" tIns="27432" bIns="27432">
-            <a:normAutofit/>
-          </a:bodyPr>
-          <a:lstStyle/>
-          <a:p>
-            <a:pPr algn="ctr">
-              <a:spcAft>
-                <a:spcPts val="0"/>
-              </a:spcAft>
-            </a:pPr>
-            <a:r>
-              <a:rPr sz="1150" b="1">
-                <a:solidFill>
-                  <a:srgbClr val="FFFFFF"/>
-                </a:solidFill>
-                <a:latin typeface="Calibri"/>
-              </a:rPr>
-              <a:t>ANCHOR PRINCIPLES      (1) AI drafts, clinician decides      (2) No screen time for children — all interfaces are adult-facing      (3) UK data residency + audit trail by construction      (4) Augment people, never replace them — increase human productivity</a:t>
-            </a:r>
-          </a:p>
-        </p:txBody>
-      </p:sp>
-      <p:sp>
-        <p:nvSpPr>
-          <p:cNvPr id="11" name="TextBox 10"/>
-          <p:cNvSpPr txBox="1"/>
-          <p:nvPr/>
-        </p:nvSpPr>
-        <p:spPr>
-          <a:xfrm>
-            <a:off x="411480" y="6035040"/>
-            <a:ext cx="11365992" cy="320040"/>
-          </a:xfrm>
-          <a:prstGeom prst="rect">
-            <a:avLst/>
-          </a:prstGeom>
-          <a:noFill/>
-        </p:spPr>
-        <p:txBody>
-          <a:bodyPr wrap="square" anchor="ctr" lIns="64008" rIns="64008" tIns="27432" bIns="27432">
+          <a:bodyPr wrap="square" anchor="t" lIns="25400" rIns="25400" tIns="12700" bIns="12700">
             <a:spAutoFit/>
           </a:bodyPr>
           <a:lstStyle/>
@@ -3640,13 +3686,208 @@
               </a:spcAft>
             </a:pPr>
             <a:r>
-              <a:rPr sz="1000" b="0">
-                <a:solidFill>
-                  <a:srgbClr val="8A938F"/>
-                </a:solidFill>
-                <a:latin typeface="Calibri"/>
+              <a:rPr sz="750" b="0">
+                <a:solidFill>
+                  <a:srgbClr val="FFFFFF"/>
+                </a:solidFill>
+                <a:latin typeface="Inter"/>
               </a:rPr>
-              <a:t>Generalized across SLTs (Pediatric &amp; Adult) · synthetic example persona · no PHI</a:t>
+              <a:t>(1)   AI drafts, clinician decides</a:t>
+            </a:r>
+          </a:p>
+        </p:txBody>
+      </p:sp>
+      <p:sp>
+        <p:nvSpPr>
+          <p:cNvPr id="15" name="TextBox 14"/>
+          <p:cNvSpPr txBox="1"/>
+          <p:nvPr/>
+        </p:nvSpPr>
+        <p:spPr>
+          <a:xfrm>
+            <a:off x="3530600" y="6083300"/>
+            <a:ext cx="2667000" cy="177800"/>
+          </a:xfrm>
+          <a:prstGeom prst="rect">
+            <a:avLst/>
+          </a:prstGeom>
+          <a:noFill/>
+        </p:spPr>
+        <p:txBody>
+          <a:bodyPr wrap="square" anchor="t" lIns="25400" rIns="25400" tIns="12700" bIns="12700">
+            <a:spAutoFit/>
+          </a:bodyPr>
+          <a:lstStyle/>
+          <a:p>
+            <a:pPr algn="l">
+              <a:spcAft>
+                <a:spcPts val="0"/>
+              </a:spcAft>
+            </a:pPr>
+            <a:r>
+              <a:rPr sz="750" b="0">
+                <a:solidFill>
+                  <a:srgbClr val="FFFFFF"/>
+                </a:solidFill>
+                <a:latin typeface="Inter"/>
+              </a:rPr>
+              <a:t>(2)   No screen time for children</a:t>
+            </a:r>
+          </a:p>
+        </p:txBody>
+      </p:sp>
+      <p:sp>
+        <p:nvSpPr>
+          <p:cNvPr id="16" name="TextBox 15"/>
+          <p:cNvSpPr txBox="1"/>
+          <p:nvPr/>
+        </p:nvSpPr>
+        <p:spPr>
+          <a:xfrm>
+            <a:off x="6286500" y="6083300"/>
+            <a:ext cx="2667000" cy="177800"/>
+          </a:xfrm>
+          <a:prstGeom prst="rect">
+            <a:avLst/>
+          </a:prstGeom>
+          <a:noFill/>
+        </p:spPr>
+        <p:txBody>
+          <a:bodyPr wrap="square" anchor="t" lIns="25400" rIns="25400" tIns="12700" bIns="12700">
+            <a:spAutoFit/>
+          </a:bodyPr>
+          <a:lstStyle/>
+          <a:p>
+            <a:pPr algn="l">
+              <a:spcAft>
+                <a:spcPts val="0"/>
+              </a:spcAft>
+            </a:pPr>
+            <a:r>
+              <a:rPr sz="750" b="0">
+                <a:solidFill>
+                  <a:srgbClr val="FFFFFF"/>
+                </a:solidFill>
+                <a:latin typeface="Inter"/>
+              </a:rPr>
+              <a:t>(3)   UK data residency + audit by construction</a:t>
+            </a:r>
+          </a:p>
+        </p:txBody>
+      </p:sp>
+      <p:sp>
+        <p:nvSpPr>
+          <p:cNvPr id="17" name="TextBox 16"/>
+          <p:cNvSpPr txBox="1"/>
+          <p:nvPr/>
+        </p:nvSpPr>
+        <p:spPr>
+          <a:xfrm>
+            <a:off x="8953500" y="6083300"/>
+            <a:ext cx="2667000" cy="177800"/>
+          </a:xfrm>
+          <a:prstGeom prst="rect">
+            <a:avLst/>
+          </a:prstGeom>
+          <a:noFill/>
+        </p:spPr>
+        <p:txBody>
+          <a:bodyPr wrap="square" anchor="t" lIns="25400" rIns="25400" tIns="12700" bIns="12700">
+            <a:spAutoFit/>
+          </a:bodyPr>
+          <a:lstStyle/>
+          <a:p>
+            <a:pPr algn="l">
+              <a:spcAft>
+                <a:spcPts val="0"/>
+              </a:spcAft>
+            </a:pPr>
+            <a:r>
+              <a:rPr sz="750" b="0">
+                <a:solidFill>
+                  <a:srgbClr val="FFFFFF"/>
+                </a:solidFill>
+                <a:latin typeface="Inter"/>
+              </a:rPr>
+              <a:t>(4)   Augment people, never replace them</a:t>
+            </a:r>
+          </a:p>
+        </p:txBody>
+      </p:sp>
+      <p:sp>
+        <p:nvSpPr>
+          <p:cNvPr id="18" name="TextBox 17"/>
+          <p:cNvSpPr txBox="1"/>
+          <p:nvPr/>
+        </p:nvSpPr>
+        <p:spPr>
+          <a:xfrm>
+            <a:off x="571500" y="6604000"/>
+            <a:ext cx="5715000" cy="139700"/>
+          </a:xfrm>
+          <a:prstGeom prst="rect">
+            <a:avLst/>
+          </a:prstGeom>
+          <a:noFill/>
+        </p:spPr>
+        <p:txBody>
+          <a:bodyPr wrap="square" anchor="t" lIns="25400" rIns="25400" tIns="12700" bIns="12700">
+            <a:spAutoFit/>
+          </a:bodyPr>
+          <a:lstStyle/>
+          <a:p>
+            <a:pPr algn="l">
+              <a:spcAft>
+                <a:spcPts val="0"/>
+              </a:spcAft>
+            </a:pPr>
+            <a:r>
+              <a:rPr sz="600" b="0">
+                <a:solidFill>
+                  <a:srgbClr val="8597A4"/>
+                </a:solidFill>
+                <a:latin typeface="Inter"/>
+              </a:rPr>
+              <a:t>Sona — Care Journey &amp; Product Overview</a:t>
+            </a:r>
+          </a:p>
+        </p:txBody>
+      </p:sp>
+      <p:sp>
+        <p:nvSpPr>
+          <p:cNvPr id="19" name="TextBox 18"/>
+          <p:cNvSpPr txBox="1"/>
+          <p:nvPr/>
+        </p:nvSpPr>
+        <p:spPr>
+          <a:xfrm>
+            <a:off x="10414000" y="6604000"/>
+            <a:ext cx="1206500" cy="139700"/>
+          </a:xfrm>
+          <a:prstGeom prst="rect">
+            <a:avLst/>
+          </a:prstGeom>
+          <a:noFill/>
+        </p:spPr>
+        <p:txBody>
+          <a:bodyPr wrap="square" anchor="t" lIns="25400" rIns="25400" tIns="12700" bIns="12700">
+            <a:spAutoFit/>
+          </a:bodyPr>
+          <a:lstStyle/>
+          <a:p>
+            <a:pPr algn="r">
+              <a:spcAft>
+                <a:spcPts val="0"/>
+              </a:spcAft>
+            </a:pPr>
+            <a:r>
+              <a:rPr sz="600" b="0">
+                <a:solidFill>
+                  <a:srgbClr val="8597A4"/>
+                </a:solidFill>
+                <a:latin typeface="Inter"/>
+              </a:rPr>
+              <a:t>1 / 3</a:t>
             </a:r>
           </a:p>
         </p:txBody>
@@ -3678,7 +3919,7 @@
         <p:spPr>
           <a:xfrm>
             <a:off x="0" y="0"/>
-            <a:ext cx="12191695" cy="6858000"/>
+            <a:ext cx="12192000" cy="6858000"/>
           </a:xfrm>
           <a:prstGeom prst="rect">
             <a:avLst/>
@@ -3721,8 +3962,8 @@
         </p:nvSpPr>
         <p:spPr>
           <a:xfrm>
-            <a:off x="411480" y="256032"/>
-            <a:ext cx="11365992" cy="502920"/>
+            <a:off x="571500" y="469899"/>
+            <a:ext cx="5715000" cy="165100"/>
           </a:xfrm>
           <a:prstGeom prst="rect">
             <a:avLst/>
@@ -3730,7 +3971,7 @@
           <a:noFill/>
         </p:spPr>
         <p:txBody>
-          <a:bodyPr wrap="square" anchor="ctr" lIns="64008" rIns="64008" tIns="27432" bIns="27432">
+          <a:bodyPr wrap="square" anchor="t" lIns="25400" rIns="25400" tIns="12700" bIns="12700">
             <a:spAutoFit/>
           </a:bodyPr>
           <a:lstStyle/>
@@ -3741,13 +3982,13 @@
               </a:spcAft>
             </a:pPr>
             <a:r>
-              <a:rPr sz="2400" b="1">
-                <a:solidFill>
-                  <a:srgbClr val="2D6A6E"/>
-                </a:solidFill>
-                <a:latin typeface="Calibri"/>
+              <a:rPr sz="750" b="1">
+                <a:solidFill>
+                  <a:srgbClr val="8597A4"/>
+                </a:solidFill>
+                <a:latin typeface="Inter"/>
               </a:rPr>
-              <a:t>Executive view — the care journey at a glance</a:t>
+              <a:t>EXECUTIVE VIEW</a:t>
             </a:r>
           </a:p>
         </p:txBody>
@@ -3760,8 +4001,8 @@
         </p:nvSpPr>
         <p:spPr>
           <a:xfrm>
-            <a:off x="411480" y="731520"/>
-            <a:ext cx="11365992" cy="292608"/>
+            <a:off x="571500" y="635000"/>
+            <a:ext cx="10160000" cy="381000"/>
           </a:xfrm>
           <a:prstGeom prst="rect">
             <a:avLst/>
@@ -3769,7 +4010,7 @@
           <a:noFill/>
         </p:spPr>
         <p:txBody>
-          <a:bodyPr wrap="square" anchor="ctr" lIns="64008" rIns="64008" tIns="27432" bIns="27432">
+          <a:bodyPr wrap="square" anchor="t" lIns="25400" rIns="25400" tIns="12700" bIns="12700">
             <a:spAutoFit/>
           </a:bodyPr>
           <a:lstStyle/>
@@ -3780,31 +4021,116 @@
               </a:spcAft>
             </a:pPr>
             <a:r>
-              <a:rPr sz="1250" b="0">
-                <a:solidFill>
-                  <a:srgbClr val="5A6A66"/>
-                </a:solidFill>
-                <a:latin typeface="Calibri"/>
+              <a:rPr sz="2000" b="1">
+                <a:solidFill>
+                  <a:srgbClr val="2D6A6E"/>
+                </a:solidFill>
+                <a:latin typeface="Inter"/>
               </a:rPr>
-              <a:t>How a new SLT case feels today, and where Sona reduces admin burnout and adds value — five phases.</a:t>
-            </a:r>
-          </a:p>
-        </p:txBody>
-      </p:sp>
-      <p:sp>
-        <p:nvSpPr>
-          <p:cNvPr id="5" name="Rounded Rectangle 4"/>
+              <a:t>The care journey at a glance</a:t>
+            </a:r>
+          </a:p>
+        </p:txBody>
+      </p:sp>
+      <p:sp>
+        <p:nvSpPr>
+          <p:cNvPr id="5" name="TextBox 4"/>
+          <p:cNvSpPr txBox="1"/>
+          <p:nvPr/>
+        </p:nvSpPr>
+        <p:spPr>
+          <a:xfrm>
+            <a:off x="571500" y="1066800"/>
+            <a:ext cx="10287000" cy="317500"/>
+          </a:xfrm>
+          <a:prstGeom prst="rect">
+            <a:avLst/>
+          </a:prstGeom>
+          <a:noFill/>
+        </p:spPr>
+        <p:txBody>
+          <a:bodyPr wrap="square" anchor="t" lIns="25400" rIns="25400" tIns="12700" bIns="12700">
+            <a:spAutoFit/>
+          </a:bodyPr>
+          <a:lstStyle/>
+          <a:p>
+            <a:pPr algn="l">
+              <a:spcAft>
+                <a:spcPts val="0"/>
+              </a:spcAft>
+            </a:pPr>
+            <a:r>
+              <a:rPr sz="950" b="0">
+                <a:solidFill>
+                  <a:srgbClr val="4A5B6B"/>
+                </a:solidFill>
+                <a:latin typeface="Inter"/>
+              </a:rPr>
+              <a:t>How a new SLT case feels today, and where Sona reduces admin burnout and adds value — across five phases.</a:t>
+            </a:r>
+          </a:p>
+        </p:txBody>
+      </p:sp>
+      <p:sp>
+        <p:nvSpPr>
+          <p:cNvPr id="6" name="Rounded Rectangle 5"/>
           <p:cNvSpPr/>
           <p:nvPr/>
         </p:nvSpPr>
         <p:spPr>
           <a:xfrm>
-            <a:off x="411480" y="1097280"/>
-            <a:ext cx="2148840" cy="658368"/>
+            <a:off x="584200" y="1422400"/>
+            <a:ext cx="889000" cy="31750"/>
           </a:xfrm>
           <a:prstGeom prst="roundRect">
             <a:avLst>
-              <a:gd name="adj" fmla="val 19444"/>
+              <a:gd name="adj" fmla="val 40000"/>
+            </a:avLst>
+          </a:prstGeom>
+          <a:solidFill>
+            <a:srgbClr val="F2A878"/>
+          </a:solidFill>
+          <a:ln>
+            <a:noFill/>
+          </a:ln>
+          <a:effectLst/>
+        </p:spPr>
+        <p:style>
+          <a:lnRef idx="1">
+            <a:schemeClr val="accent1"/>
+          </a:lnRef>
+          <a:fillRef idx="3">
+            <a:schemeClr val="accent1"/>
+          </a:fillRef>
+          <a:effectRef idx="2">
+            <a:schemeClr val="accent1"/>
+          </a:effectRef>
+          <a:fontRef idx="minor">
+            <a:schemeClr val="lt1"/>
+          </a:fontRef>
+        </p:style>
+        <p:txBody>
+          <a:bodyPr rtlCol="0" anchor="ctr"/>
+          <a:lstStyle/>
+          <a:p>
+            <a:pPr algn="ctr"/>
+          </a:p>
+        </p:txBody>
+      </p:sp>
+      <p:sp>
+        <p:nvSpPr>
+          <p:cNvPr id="7" name="Rounded Rectangle 6"/>
+          <p:cNvSpPr/>
+          <p:nvPr/>
+        </p:nvSpPr>
+        <p:spPr>
+          <a:xfrm>
+            <a:off x="571500" y="1663700"/>
+            <a:ext cx="2098040" cy="419100"/>
+          </a:xfrm>
+          <a:prstGeom prst="roundRect">
+            <a:avLst>
+              <a:gd name="adj" fmla="val 18181"/>
             </a:avLst>
           </a:prstGeom>
           <a:solidFill>
@@ -3839,14 +4165,14 @@
       </p:sp>
       <p:sp>
         <p:nvSpPr>
-          <p:cNvPr id="6" name="TextBox 5"/>
+          <p:cNvPr id="8" name="TextBox 7"/>
           <p:cNvSpPr txBox="1"/>
           <p:nvPr/>
         </p:nvSpPr>
         <p:spPr>
           <a:xfrm>
-            <a:off x="411480" y="1097280"/>
-            <a:ext cx="2148840" cy="658368"/>
+            <a:off x="647700" y="1663700"/>
+            <a:ext cx="1945640" cy="419100"/>
           </a:xfrm>
           <a:prstGeom prst="rect">
             <a:avLst/>
@@ -3854,7 +4180,7 @@
           <a:noFill/>
         </p:spPr>
         <p:txBody>
-          <a:bodyPr wrap="square" anchor="ctr" lIns="64008" rIns="64008" tIns="27432" bIns="27432">
+          <a:bodyPr wrap="square" anchor="ctr" lIns="25400" rIns="25400" tIns="12700" bIns="12700">
             <a:normAutofit/>
           </a:bodyPr>
           <a:lstStyle/>
@@ -3865,11 +4191,11 @@
               </a:spcAft>
             </a:pPr>
             <a:r>
-              <a:rPr sz="1300" b="1">
+              <a:rPr sz="900" b="1">
                 <a:solidFill>
                   <a:srgbClr val="FFFFFF"/>
                 </a:solidFill>
-                <a:latin typeface="Calibri"/>
+                <a:latin typeface="Inter"/>
               </a:rPr>
               <a:t>1 · Find &amp; enquire</a:t>
             </a:r>
@@ -3878,18 +4204,18 @@
       </p:sp>
       <p:sp>
         <p:nvSpPr>
-          <p:cNvPr id="7" name="Rounded Rectangle 6"/>
+          <p:cNvPr id="9" name="Rounded Rectangle 8"/>
           <p:cNvSpPr/>
           <p:nvPr/>
         </p:nvSpPr>
         <p:spPr>
           <a:xfrm>
-            <a:off x="2715768" y="1097280"/>
-            <a:ext cx="2148840" cy="658368"/>
+            <a:off x="2809239" y="1663700"/>
+            <a:ext cx="2098040" cy="419100"/>
           </a:xfrm>
           <a:prstGeom prst="roundRect">
             <a:avLst>
-              <a:gd name="adj" fmla="val 19444"/>
+              <a:gd name="adj" fmla="val 18181"/>
             </a:avLst>
           </a:prstGeom>
           <a:solidFill>
@@ -3924,14 +4250,14 @@
       </p:sp>
       <p:sp>
         <p:nvSpPr>
-          <p:cNvPr id="8" name="TextBox 7"/>
+          <p:cNvPr id="10" name="TextBox 9"/>
           <p:cNvSpPr txBox="1"/>
           <p:nvPr/>
         </p:nvSpPr>
         <p:spPr>
           <a:xfrm>
-            <a:off x="2715768" y="1097280"/>
-            <a:ext cx="2148840" cy="658368"/>
+            <a:off x="2885440" y="1663700"/>
+            <a:ext cx="1945640" cy="419100"/>
           </a:xfrm>
           <a:prstGeom prst="rect">
             <a:avLst/>
@@ -3939,7 +4265,7 @@
           <a:noFill/>
         </p:spPr>
         <p:txBody>
-          <a:bodyPr wrap="square" anchor="ctr" lIns="64008" rIns="64008" tIns="27432" bIns="27432">
+          <a:bodyPr wrap="square" anchor="ctr" lIns="25400" rIns="25400" tIns="12700" bIns="12700">
             <a:normAutofit/>
           </a:bodyPr>
           <a:lstStyle/>
@@ -3950,11 +4276,11 @@
               </a:spcAft>
             </a:pPr>
             <a:r>
-              <a:rPr sz="1300" b="1">
+              <a:rPr sz="900" b="1">
                 <a:solidFill>
                   <a:srgbClr val="FFFFFF"/>
                 </a:solidFill>
-                <a:latin typeface="Calibri"/>
+                <a:latin typeface="Inter"/>
               </a:rPr>
               <a:t>2 · Understand</a:t>
             </a:r>
@@ -3963,18 +4289,18 @@
       </p:sp>
       <p:sp>
         <p:nvSpPr>
-          <p:cNvPr id="9" name="Rounded Rectangle 8"/>
+          <p:cNvPr id="11" name="Rounded Rectangle 10"/>
           <p:cNvSpPr/>
           <p:nvPr/>
         </p:nvSpPr>
         <p:spPr>
           <a:xfrm>
-            <a:off x="5020056" y="1097280"/>
-            <a:ext cx="2148840" cy="658368"/>
+            <a:off x="5046979" y="1663700"/>
+            <a:ext cx="2098040" cy="419100"/>
           </a:xfrm>
           <a:prstGeom prst="roundRect">
             <a:avLst>
-              <a:gd name="adj" fmla="val 19444"/>
+              <a:gd name="adj" fmla="val 18181"/>
             </a:avLst>
           </a:prstGeom>
           <a:solidFill>
@@ -4009,14 +4335,14 @@
       </p:sp>
       <p:sp>
         <p:nvSpPr>
-          <p:cNvPr id="10" name="TextBox 9"/>
+          <p:cNvPr id="12" name="TextBox 11"/>
           <p:cNvSpPr txBox="1"/>
           <p:nvPr/>
         </p:nvSpPr>
         <p:spPr>
           <a:xfrm>
-            <a:off x="5020056" y="1097280"/>
-            <a:ext cx="2148840" cy="658368"/>
+            <a:off x="5123180" y="1663700"/>
+            <a:ext cx="1945640" cy="419100"/>
           </a:xfrm>
           <a:prstGeom prst="rect">
             <a:avLst/>
@@ -4024,7 +4350,7 @@
           <a:noFill/>
         </p:spPr>
         <p:txBody>
-          <a:bodyPr wrap="square" anchor="ctr" lIns="64008" rIns="64008" tIns="27432" bIns="27432">
+          <a:bodyPr wrap="square" anchor="ctr" lIns="25400" rIns="25400" tIns="12700" bIns="12700">
             <a:normAutofit/>
           </a:bodyPr>
           <a:lstStyle/>
@@ -4035,11 +4361,11 @@
               </a:spcAft>
             </a:pPr>
             <a:r>
-              <a:rPr sz="1300" b="1">
+              <a:rPr sz="900" b="1">
                 <a:solidFill>
                   <a:srgbClr val="FFFFFF"/>
                 </a:solidFill>
-                <a:latin typeface="Calibri"/>
+                <a:latin typeface="Inter"/>
               </a:rPr>
               <a:t>3 · Meet &amp; decide</a:t>
             </a:r>
@@ -4048,18 +4374,18 @@
       </p:sp>
       <p:sp>
         <p:nvSpPr>
-          <p:cNvPr id="11" name="Rounded Rectangle 10"/>
+          <p:cNvPr id="13" name="Rounded Rectangle 12"/>
           <p:cNvSpPr/>
           <p:nvPr/>
         </p:nvSpPr>
         <p:spPr>
           <a:xfrm>
-            <a:off x="7324344" y="1097280"/>
-            <a:ext cx="2148840" cy="658368"/>
+            <a:off x="7284719" y="1663700"/>
+            <a:ext cx="2098040" cy="419100"/>
           </a:xfrm>
           <a:prstGeom prst="roundRect">
             <a:avLst>
-              <a:gd name="adj" fmla="val 19444"/>
+              <a:gd name="adj" fmla="val 18181"/>
             </a:avLst>
           </a:prstGeom>
           <a:solidFill>
@@ -4094,14 +4420,14 @@
       </p:sp>
       <p:sp>
         <p:nvSpPr>
-          <p:cNvPr id="12" name="TextBox 11"/>
+          <p:cNvPr id="14" name="TextBox 13"/>
           <p:cNvSpPr txBox="1"/>
           <p:nvPr/>
         </p:nvSpPr>
         <p:spPr>
           <a:xfrm>
-            <a:off x="7324344" y="1097280"/>
-            <a:ext cx="2148840" cy="658368"/>
+            <a:off x="7360919" y="1663700"/>
+            <a:ext cx="1945640" cy="419100"/>
           </a:xfrm>
           <a:prstGeom prst="rect">
             <a:avLst/>
@@ -4109,7 +4435,7 @@
           <a:noFill/>
         </p:spPr>
         <p:txBody>
-          <a:bodyPr wrap="square" anchor="ctr" lIns="64008" rIns="64008" tIns="27432" bIns="27432">
+          <a:bodyPr wrap="square" anchor="ctr" lIns="25400" rIns="25400" tIns="12700" bIns="12700">
             <a:normAutofit/>
           </a:bodyPr>
           <a:lstStyle/>
@@ -4120,11 +4446,11 @@
               </a:spcAft>
             </a:pPr>
             <a:r>
-              <a:rPr sz="1300" b="1">
+              <a:rPr sz="900" b="1">
                 <a:solidFill>
                   <a:srgbClr val="FFFFFF"/>
                 </a:solidFill>
-                <a:latin typeface="Calibri"/>
+                <a:latin typeface="Inter"/>
               </a:rPr>
               <a:t>4 · Plan &amp; share</a:t>
             </a:r>
@@ -4133,18 +4459,18 @@
       </p:sp>
       <p:sp>
         <p:nvSpPr>
-          <p:cNvPr id="13" name="Rounded Rectangle 12"/>
+          <p:cNvPr id="15" name="Rounded Rectangle 14"/>
           <p:cNvSpPr/>
           <p:nvPr/>
         </p:nvSpPr>
         <p:spPr>
           <a:xfrm>
-            <a:off x="9628632" y="1097280"/>
-            <a:ext cx="2148840" cy="658368"/>
+            <a:off x="9522459" y="1663700"/>
+            <a:ext cx="2098040" cy="419100"/>
           </a:xfrm>
           <a:prstGeom prst="roundRect">
             <a:avLst>
-              <a:gd name="adj" fmla="val 19444"/>
+              <a:gd name="adj" fmla="val 18181"/>
             </a:avLst>
           </a:prstGeom>
           <a:solidFill>
@@ -4179,14 +4505,14 @@
       </p:sp>
       <p:sp>
         <p:nvSpPr>
-          <p:cNvPr id="14" name="TextBox 13"/>
+          <p:cNvPr id="16" name="TextBox 15"/>
           <p:cNvSpPr txBox="1"/>
           <p:nvPr/>
         </p:nvSpPr>
         <p:spPr>
           <a:xfrm>
-            <a:off x="9628632" y="1097280"/>
-            <a:ext cx="2148840" cy="658368"/>
+            <a:off x="9598660" y="1663700"/>
+            <a:ext cx="1945640" cy="419100"/>
           </a:xfrm>
           <a:prstGeom prst="rect">
             <a:avLst/>
@@ -4194,7 +4520,7 @@
           <a:noFill/>
         </p:spPr>
         <p:txBody>
-          <a:bodyPr wrap="square" anchor="ctr" lIns="64008" rIns="64008" tIns="27432" bIns="27432">
+          <a:bodyPr wrap="square" anchor="ctr" lIns="25400" rIns="25400" tIns="12700" bIns="12700">
             <a:normAutofit/>
           </a:bodyPr>
           <a:lstStyle/>
@@ -4205,11 +4531,11 @@
               </a:spcAft>
             </a:pPr>
             <a:r>
-              <a:rPr sz="1300" b="1">
+              <a:rPr sz="900" b="1">
                 <a:solidFill>
                   <a:srgbClr val="FFFFFF"/>
                 </a:solidFill>
-                <a:latin typeface="Calibri"/>
+                <a:latin typeface="Inter"/>
               </a:rPr>
               <a:t>5 · Progress together</a:t>
             </a:r>
@@ -4218,60 +4544,14 @@
       </p:sp>
       <p:sp>
         <p:nvSpPr>
-          <p:cNvPr id="15" name="Rounded Rectangle 14"/>
-          <p:cNvSpPr/>
-          <p:nvPr/>
-        </p:nvSpPr>
-        <p:spPr>
-          <a:xfrm>
-            <a:off x="411480" y="1920240"/>
-            <a:ext cx="11365992" cy="1325880"/>
-          </a:xfrm>
-          <a:prstGeom prst="roundRect">
-            <a:avLst>
-              <a:gd name="adj" fmla="val 2758"/>
-            </a:avLst>
-          </a:prstGeom>
-          <a:solidFill>
-            <a:srgbClr val="F6F4EF"/>
-          </a:solidFill>
-          <a:ln>
-            <a:noFill/>
-          </a:ln>
-          <a:effectLst/>
-        </p:spPr>
-        <p:style>
-          <a:lnRef idx="1">
-            <a:schemeClr val="accent1"/>
-          </a:lnRef>
-          <a:fillRef idx="3">
-            <a:schemeClr val="accent1"/>
-          </a:fillRef>
-          <a:effectRef idx="2">
-            <a:schemeClr val="accent1"/>
-          </a:effectRef>
-          <a:fontRef idx="minor">
-            <a:schemeClr val="lt1"/>
-          </a:fontRef>
-        </p:style>
-        <p:txBody>
-          <a:bodyPr rtlCol="0" anchor="ctr"/>
-          <a:lstStyle/>
-          <a:p>
-            <a:pPr algn="ctr"/>
-          </a:p>
-        </p:txBody>
-      </p:sp>
-      <p:sp>
-        <p:nvSpPr>
-          <p:cNvPr id="16" name="TextBox 15"/>
+          <p:cNvPr id="17" name="TextBox 16"/>
           <p:cNvSpPr txBox="1"/>
           <p:nvPr/>
         </p:nvSpPr>
         <p:spPr>
           <a:xfrm>
-            <a:off x="521208" y="1956816"/>
-            <a:ext cx="2743200" cy="228600"/>
+            <a:off x="571500" y="2286000"/>
+            <a:ext cx="5715000" cy="152400"/>
           </a:xfrm>
           <a:prstGeom prst="rect">
             <a:avLst/>
@@ -4279,7 +4559,7 @@
           <a:noFill/>
         </p:spPr>
         <p:txBody>
-          <a:bodyPr wrap="square" anchor="t" lIns="64008" rIns="64008" tIns="27432" bIns="27432">
+          <a:bodyPr wrap="square" anchor="t" lIns="25400" rIns="25400" tIns="12700" bIns="12700">
             <a:spAutoFit/>
           </a:bodyPr>
           <a:lstStyle/>
@@ -4290,53 +4570,17 @@
               </a:spcAft>
             </a:pPr>
             <a:r>
-              <a:rPr sz="1000" b="1">
-                <a:solidFill>
-                  <a:srgbClr val="8A938F"/>
-                </a:solidFill>
-                <a:latin typeface="Calibri"/>
+              <a:rPr sz="700" b="1">
+                <a:solidFill>
+                  <a:srgbClr val="8597A4"/>
+                </a:solidFill>
+                <a:latin typeface="Inter"/>
               </a:rPr>
-              <a:t>SENTIMENT — family + clinician</a:t>
-            </a:r>
-          </a:p>
-        </p:txBody>
-      </p:sp>
-      <p:cxnSp>
-        <p:nvCxnSpPr>
-          <p:cNvPr id="17" name="Connector 16"/>
-          <p:cNvCxnSpPr/>
-          <p:nvPr/>
-        </p:nvCxnSpPr>
-        <p:spPr>
-          <a:xfrm>
-            <a:off x="1485900" y="2825861"/>
-            <a:ext cx="2304288" cy="79004"/>
-          </a:xfrm>
-          <a:prstGeom prst="line">
-            <a:avLst/>
-          </a:prstGeom>
-          <a:ln w="31750">
-            <a:solidFill>
-              <a:srgbClr val="234F52"/>
-            </a:solidFill>
-          </a:ln>
-          <a:effectLst/>
-        </p:spPr>
-        <p:style>
-          <a:lnRef idx="2">
-            <a:schemeClr val="accent1"/>
-          </a:lnRef>
-          <a:fillRef idx="0">
-            <a:schemeClr val="accent1"/>
-          </a:fillRef>
-          <a:effectRef idx="1">
-            <a:schemeClr val="accent1"/>
-          </a:effectRef>
-          <a:fontRef idx="minor">
-            <a:schemeClr val="tx1"/>
-          </a:fontRef>
-        </p:style>
-      </p:cxnSp>
+              <a:t>SENTIMENT · FAMILY + CLINICIAN</a:t>
+            </a:r>
+          </a:p>
+        </p:txBody>
+      </p:sp>
       <p:cxnSp>
         <p:nvCxnSpPr>
           <p:cNvPr id="18" name="Connector 17"/>
@@ -4344,16 +4588,16 @@
           <p:nvPr/>
         </p:nvCxnSpPr>
         <p:spPr>
-          <a:xfrm flipV="1">
-            <a:off x="3790188" y="2615184"/>
-            <a:ext cx="2304288" cy="289681"/>
+          <a:xfrm>
+            <a:off x="1620520" y="3202940"/>
+            <a:ext cx="2237739" cy="91439"/>
           </a:xfrm>
           <a:prstGeom prst="line">
             <a:avLst/>
           </a:prstGeom>
-          <a:ln w="31750">
+          <a:ln w="19050">
             <a:solidFill>
-              <a:srgbClr val="234F52"/>
+              <a:srgbClr val="2D6A6E"/>
             </a:solidFill>
           </a:ln>
           <a:effectLst/>
@@ -4381,15 +4625,15 @@
         </p:nvCxnSpPr>
         <p:spPr>
           <a:xfrm flipV="1">
-            <a:off x="6094476" y="2430840"/>
-            <a:ext cx="2304288" cy="184344"/>
+            <a:off x="3858259" y="2959100"/>
+            <a:ext cx="2237741" cy="335279"/>
           </a:xfrm>
           <a:prstGeom prst="line">
             <a:avLst/>
           </a:prstGeom>
-          <a:ln w="31750">
+          <a:ln w="19050">
             <a:solidFill>
-              <a:srgbClr val="234F52"/>
+              <a:srgbClr val="2D6A6E"/>
             </a:solidFill>
           </a:ln>
           <a:effectLst/>
@@ -4417,15 +4661,15 @@
         </p:nvCxnSpPr>
         <p:spPr>
           <a:xfrm flipV="1">
-            <a:off x="8398764" y="2312334"/>
-            <a:ext cx="2304288" cy="118506"/>
+            <a:off x="6096000" y="2745740"/>
+            <a:ext cx="2237739" cy="213360"/>
           </a:xfrm>
           <a:prstGeom prst="line">
             <a:avLst/>
           </a:prstGeom>
-          <a:ln w="31750">
+          <a:ln w="19050">
             <a:solidFill>
-              <a:srgbClr val="234F52"/>
+              <a:srgbClr val="2D6A6E"/>
             </a:solidFill>
           </a:ln>
           <a:effectLst/>
@@ -4445,16 +4689,52 @@
           </a:fontRef>
         </p:style>
       </p:cxnSp>
-      <p:sp>
-        <p:nvSpPr>
-          <p:cNvPr id="21" name="Oval 20"/>
+      <p:cxnSp>
+        <p:nvCxnSpPr>
+          <p:cNvPr id="21" name="Connector 20"/>
+          <p:cNvCxnSpPr/>
+          <p:nvPr/>
+        </p:nvCxnSpPr>
+        <p:spPr>
+          <a:xfrm flipV="1">
+            <a:off x="8333739" y="2608580"/>
+            <a:ext cx="2237740" cy="137160"/>
+          </a:xfrm>
+          <a:prstGeom prst="line">
+            <a:avLst/>
+          </a:prstGeom>
+          <a:ln w="19050">
+            <a:solidFill>
+              <a:srgbClr val="2D6A6E"/>
+            </a:solidFill>
+          </a:ln>
+          <a:effectLst/>
+        </p:spPr>
+        <p:style>
+          <a:lnRef idx="2">
+            <a:schemeClr val="accent1"/>
+          </a:lnRef>
+          <a:fillRef idx="0">
+            <a:schemeClr val="accent1"/>
+          </a:fillRef>
+          <a:effectRef idx="1">
+            <a:schemeClr val="accent1"/>
+          </a:effectRef>
+          <a:fontRef idx="minor">
+            <a:schemeClr val="tx1"/>
+          </a:fontRef>
+        </p:style>
+      </p:cxnSp>
+      <p:sp>
+        <p:nvSpPr>
+          <p:cNvPr id="22" name="Oval 21"/>
           <p:cNvSpPr/>
           <p:nvPr/>
         </p:nvSpPr>
         <p:spPr>
           <a:xfrm>
-            <a:off x="1412748" y="2752709"/>
-            <a:ext cx="146304" cy="146304"/>
+            <a:off x="1569720" y="3152139"/>
+            <a:ext cx="101600" cy="101600"/>
           </a:xfrm>
           <a:prstGeom prst="ellipse">
             <a:avLst/>
@@ -4462,9 +4742,9 @@
           <a:solidFill>
             <a:srgbClr val="2D6A6E"/>
           </a:solidFill>
-          <a:ln w="25400">
+          <a:ln w="19050">
             <a:solidFill>
-              <a:srgbClr val="FFFFFF"/>
+              <a:srgbClr val="FAFAF7"/>
             </a:solidFill>
           </a:ln>
           <a:effectLst/>
@@ -4493,14 +4773,14 @@
       </p:sp>
       <p:sp>
         <p:nvSpPr>
-          <p:cNvPr id="22" name="TextBox 21"/>
+          <p:cNvPr id="23" name="TextBox 22"/>
           <p:cNvSpPr txBox="1"/>
           <p:nvPr/>
         </p:nvSpPr>
         <p:spPr>
           <a:xfrm>
-            <a:off x="571500" y="2935224"/>
-            <a:ext cx="1828800" cy="256032"/>
+            <a:off x="571500" y="3479800"/>
+            <a:ext cx="2098040" cy="165100"/>
           </a:xfrm>
           <a:prstGeom prst="rect">
             <a:avLst/>
@@ -4508,7 +4788,7 @@
           <a:noFill/>
         </p:spPr>
         <p:txBody>
-          <a:bodyPr wrap="square" anchor="ctr" lIns="64008" rIns="64008" tIns="27432" bIns="27432">
+          <a:bodyPr wrap="square" anchor="ctr" lIns="25400" rIns="25400" tIns="12700" bIns="12700">
             <a:spAutoFit/>
           </a:bodyPr>
           <a:lstStyle/>
@@ -4519,11 +4799,11 @@
               </a:spcAft>
             </a:pPr>
             <a:r>
-              <a:rPr sz="1100" b="1">
+              <a:rPr sz="800" b="1">
                 <a:solidFill>
                   <a:srgbClr val="2D6A6E"/>
                 </a:solidFill>
-                <a:latin typeface="Calibri"/>
+                <a:latin typeface="Inter"/>
               </a:rPr>
               <a:t>Anxious</a:t>
             </a:r>
@@ -4532,14 +4812,14 @@
       </p:sp>
       <p:sp>
         <p:nvSpPr>
-          <p:cNvPr id="23" name="Oval 22"/>
+          <p:cNvPr id="24" name="Oval 23"/>
           <p:cNvSpPr/>
           <p:nvPr/>
         </p:nvSpPr>
         <p:spPr>
           <a:xfrm>
-            <a:off x="3717036" y="2831713"/>
-            <a:ext cx="146304" cy="146304"/>
+            <a:off x="3807459" y="3243580"/>
+            <a:ext cx="101600" cy="101600"/>
           </a:xfrm>
           <a:prstGeom prst="ellipse">
             <a:avLst/>
@@ -4547,9 +4827,9 @@
           <a:solidFill>
             <a:srgbClr val="2D6A6E"/>
           </a:solidFill>
-          <a:ln w="25400">
+          <a:ln w="19050">
             <a:solidFill>
-              <a:srgbClr val="FFFFFF"/>
+              <a:srgbClr val="FAFAF7"/>
             </a:solidFill>
           </a:ln>
           <a:effectLst/>
@@ -4578,14 +4858,14 @@
       </p:sp>
       <p:sp>
         <p:nvSpPr>
-          <p:cNvPr id="24" name="TextBox 23"/>
+          <p:cNvPr id="25" name="TextBox 24"/>
           <p:cNvSpPr txBox="1"/>
           <p:nvPr/>
         </p:nvSpPr>
         <p:spPr>
           <a:xfrm>
-            <a:off x="2875788" y="2935224"/>
-            <a:ext cx="1828800" cy="256032"/>
+            <a:off x="2809239" y="3479800"/>
+            <a:ext cx="2098040" cy="165100"/>
           </a:xfrm>
           <a:prstGeom prst="rect">
             <a:avLst/>
@@ -4593,7 +4873,7 @@
           <a:noFill/>
         </p:spPr>
         <p:txBody>
-          <a:bodyPr wrap="square" anchor="ctr" lIns="64008" rIns="64008" tIns="27432" bIns="27432">
+          <a:bodyPr wrap="square" anchor="ctr" lIns="25400" rIns="25400" tIns="12700" bIns="12700">
             <a:spAutoFit/>
           </a:bodyPr>
           <a:lstStyle/>
@@ -4604,11 +4884,11 @@
               </a:spcAft>
             </a:pPr>
             <a:r>
-              <a:rPr sz="1100" b="1">
+              <a:rPr sz="800" b="1">
                 <a:solidFill>
                   <a:srgbClr val="2D6A6E"/>
                 </a:solidFill>
-                <a:latin typeface="Calibri"/>
+                <a:latin typeface="Inter"/>
               </a:rPr>
               <a:t>Overwhelmed</a:t>
             </a:r>
@@ -4617,14 +4897,14 @@
       </p:sp>
       <p:sp>
         <p:nvSpPr>
-          <p:cNvPr id="25" name="Oval 24"/>
+          <p:cNvPr id="26" name="Oval 25"/>
           <p:cNvSpPr/>
           <p:nvPr/>
         </p:nvSpPr>
         <p:spPr>
           <a:xfrm>
-            <a:off x="6021324" y="2542032"/>
-            <a:ext cx="146304" cy="146304"/>
+            <a:off x="6045200" y="2908300"/>
+            <a:ext cx="101600" cy="101600"/>
           </a:xfrm>
           <a:prstGeom prst="ellipse">
             <a:avLst/>
@@ -4632,9 +4912,9 @@
           <a:solidFill>
             <a:srgbClr val="2D6A6E"/>
           </a:solidFill>
-          <a:ln w="25400">
+          <a:ln w="19050">
             <a:solidFill>
-              <a:srgbClr val="FFFFFF"/>
+              <a:srgbClr val="FAFAF7"/>
             </a:solidFill>
           </a:ln>
           <a:effectLst/>
@@ -4663,14 +4943,14 @@
       </p:sp>
       <p:sp>
         <p:nvSpPr>
-          <p:cNvPr id="26" name="TextBox 25"/>
+          <p:cNvPr id="27" name="TextBox 26"/>
           <p:cNvSpPr txBox="1"/>
           <p:nvPr/>
         </p:nvSpPr>
         <p:spPr>
           <a:xfrm>
-            <a:off x="5180076" y="2935224"/>
-            <a:ext cx="1828800" cy="256032"/>
+            <a:off x="5046979" y="3479800"/>
+            <a:ext cx="2098040" cy="165100"/>
           </a:xfrm>
           <a:prstGeom prst="rect">
             <a:avLst/>
@@ -4678,7 +4958,7 @@
           <a:noFill/>
         </p:spPr>
         <p:txBody>
-          <a:bodyPr wrap="square" anchor="ctr" lIns="64008" rIns="64008" tIns="27432" bIns="27432">
+          <a:bodyPr wrap="square" anchor="ctr" lIns="25400" rIns="25400" tIns="12700" bIns="12700">
             <a:spAutoFit/>
           </a:bodyPr>
           <a:lstStyle/>
@@ -4689,11 +4969,11 @@
               </a:spcAft>
             </a:pPr>
             <a:r>
-              <a:rPr sz="1100" b="1">
+              <a:rPr sz="800" b="1">
                 <a:solidFill>
                   <a:srgbClr val="2D6A6E"/>
                 </a:solidFill>
-                <a:latin typeface="Calibri"/>
+                <a:latin typeface="Inter"/>
               </a:rPr>
               <a:t>Hopeful</a:t>
             </a:r>
@@ -4702,14 +4982,14 @@
       </p:sp>
       <p:sp>
         <p:nvSpPr>
-          <p:cNvPr id="27" name="Oval 26"/>
+          <p:cNvPr id="28" name="Oval 27"/>
           <p:cNvSpPr/>
           <p:nvPr/>
         </p:nvSpPr>
         <p:spPr>
           <a:xfrm>
-            <a:off x="8325612" y="2357688"/>
-            <a:ext cx="146304" cy="146304"/>
+            <a:off x="8282939" y="2694939"/>
+            <a:ext cx="101600" cy="101600"/>
           </a:xfrm>
           <a:prstGeom prst="ellipse">
             <a:avLst/>
@@ -4717,9 +4997,9 @@
           <a:solidFill>
             <a:srgbClr val="2D6A6E"/>
           </a:solidFill>
-          <a:ln w="25400">
+          <a:ln w="19050">
             <a:solidFill>
-              <a:srgbClr val="FFFFFF"/>
+              <a:srgbClr val="FAFAF7"/>
             </a:solidFill>
           </a:ln>
           <a:effectLst/>
@@ -4748,14 +5028,14 @@
       </p:sp>
       <p:sp>
         <p:nvSpPr>
-          <p:cNvPr id="28" name="TextBox 27"/>
+          <p:cNvPr id="29" name="TextBox 28"/>
           <p:cNvSpPr txBox="1"/>
           <p:nvPr/>
         </p:nvSpPr>
         <p:spPr>
           <a:xfrm>
-            <a:off x="7484364" y="2935224"/>
-            <a:ext cx="1828800" cy="256032"/>
+            <a:off x="7284719" y="3479800"/>
+            <a:ext cx="2098040" cy="165100"/>
           </a:xfrm>
           <a:prstGeom prst="rect">
             <a:avLst/>
@@ -4763,7 +5043,7 @@
           <a:noFill/>
         </p:spPr>
         <p:txBody>
-          <a:bodyPr wrap="square" anchor="ctr" lIns="64008" rIns="64008" tIns="27432" bIns="27432">
+          <a:bodyPr wrap="square" anchor="ctr" lIns="25400" rIns="25400" tIns="12700" bIns="12700">
             <a:spAutoFit/>
           </a:bodyPr>
           <a:lstStyle/>
@@ -4774,11 +5054,11 @@
               </a:spcAft>
             </a:pPr>
             <a:r>
-              <a:rPr sz="1100" b="1">
+              <a:rPr sz="800" b="1">
                 <a:solidFill>
                   <a:srgbClr val="2D6A6E"/>
                 </a:solidFill>
-                <a:latin typeface="Calibri"/>
+                <a:latin typeface="Inter"/>
               </a:rPr>
               <a:t>Reassured</a:t>
             </a:r>
@@ -4787,14 +5067,14 @@
       </p:sp>
       <p:sp>
         <p:nvSpPr>
-          <p:cNvPr id="29" name="Oval 28"/>
+          <p:cNvPr id="30" name="Oval 29"/>
           <p:cNvSpPr/>
           <p:nvPr/>
         </p:nvSpPr>
         <p:spPr>
           <a:xfrm>
-            <a:off x="10629900" y="2239182"/>
-            <a:ext cx="146304" cy="146304"/>
+            <a:off x="10520680" y="2557780"/>
+            <a:ext cx="101600" cy="101600"/>
           </a:xfrm>
           <a:prstGeom prst="ellipse">
             <a:avLst/>
@@ -4802,9 +5082,9 @@
           <a:solidFill>
             <a:srgbClr val="2D6A6E"/>
           </a:solidFill>
-          <a:ln w="25400">
+          <a:ln w="19050">
             <a:solidFill>
-              <a:srgbClr val="FFFFFF"/>
+              <a:srgbClr val="FAFAF7"/>
             </a:solidFill>
           </a:ln>
           <a:effectLst/>
@@ -4833,14 +5113,14 @@
       </p:sp>
       <p:sp>
         <p:nvSpPr>
-          <p:cNvPr id="30" name="TextBox 29"/>
+          <p:cNvPr id="31" name="TextBox 30"/>
           <p:cNvSpPr txBox="1"/>
           <p:nvPr/>
         </p:nvSpPr>
         <p:spPr>
           <a:xfrm>
-            <a:off x="9788652" y="2935224"/>
-            <a:ext cx="1828800" cy="256032"/>
+            <a:off x="9522459" y="3479800"/>
+            <a:ext cx="2098040" cy="165100"/>
           </a:xfrm>
           <a:prstGeom prst="rect">
             <a:avLst/>
@@ -4848,7 +5128,7 @@
           <a:noFill/>
         </p:spPr>
         <p:txBody>
-          <a:bodyPr wrap="square" anchor="ctr" lIns="64008" rIns="64008" tIns="27432" bIns="27432">
+          <a:bodyPr wrap="square" anchor="ctr" lIns="25400" rIns="25400" tIns="12700" bIns="12700">
             <a:spAutoFit/>
           </a:bodyPr>
           <a:lstStyle/>
@@ -4859,11 +5139,11 @@
               </a:spcAft>
             </a:pPr>
             <a:r>
-              <a:rPr sz="1100" b="1">
+              <a:rPr sz="800" b="1">
                 <a:solidFill>
                   <a:srgbClr val="2D6A6E"/>
                 </a:solidFill>
-                <a:latin typeface="Calibri"/>
+                <a:latin typeface="Inter"/>
               </a:rPr>
               <a:t>Confident</a:t>
             </a:r>
@@ -4872,14 +5152,14 @@
       </p:sp>
       <p:sp>
         <p:nvSpPr>
-          <p:cNvPr id="31" name="TextBox 30"/>
+          <p:cNvPr id="32" name="TextBox 31"/>
           <p:cNvSpPr txBox="1"/>
           <p:nvPr/>
         </p:nvSpPr>
         <p:spPr>
           <a:xfrm>
-            <a:off x="411480" y="3310128"/>
-            <a:ext cx="11365992" cy="228600"/>
+            <a:off x="571500" y="3835400"/>
+            <a:ext cx="5715000" cy="152400"/>
           </a:xfrm>
           <a:prstGeom prst="rect">
             <a:avLst/>
@@ -4887,7 +5167,7 @@
           <a:noFill/>
         </p:spPr>
         <p:txBody>
-          <a:bodyPr wrap="square" anchor="t" lIns="64008" rIns="64008" tIns="27432" bIns="27432">
+          <a:bodyPr wrap="square" anchor="t" lIns="25400" rIns="25400" tIns="12700" bIns="12700">
             <a:spAutoFit/>
           </a:bodyPr>
           <a:lstStyle/>
@@ -4898,38 +5178,40 @@
               </a:spcAft>
             </a:pPr>
             <a:r>
-              <a:rPr sz="1000" b="1">
-                <a:solidFill>
-                  <a:srgbClr val="8A938F"/>
-                </a:solidFill>
-                <a:latin typeface="Calibri"/>
+              <a:rPr sz="700" b="1">
+                <a:solidFill>
+                  <a:srgbClr val="8597A4"/>
+                </a:solidFill>
+                <a:latin typeface="Inter"/>
               </a:rPr>
-              <a:t>TOP PAINS TODAY</a:t>
-            </a:r>
-          </a:p>
-        </p:txBody>
-      </p:sp>
-      <p:sp>
-        <p:nvSpPr>
-          <p:cNvPr id="32" name="Rounded Rectangle 31"/>
+              <a:t>TODAY'S PAIN — BY PHASE</a:t>
+            </a:r>
+          </a:p>
+        </p:txBody>
+      </p:sp>
+      <p:sp>
+        <p:nvSpPr>
+          <p:cNvPr id="33" name="Rounded Rectangle 32"/>
           <p:cNvSpPr/>
           <p:nvPr/>
         </p:nvSpPr>
         <p:spPr>
           <a:xfrm>
-            <a:off x="411480" y="3547872"/>
-            <a:ext cx="2148840" cy="731520"/>
+            <a:off x="571500" y="4038600"/>
+            <a:ext cx="2098040" cy="749300"/>
           </a:xfrm>
           <a:prstGeom prst="roundRect">
             <a:avLst>
-              <a:gd name="adj" fmla="val 12500"/>
+              <a:gd name="adj" fmla="val 10169"/>
             </a:avLst>
           </a:prstGeom>
           <a:solidFill>
-            <a:srgbClr val="F1EEE9"/>
+            <a:srgbClr val="FBF7F1"/>
           </a:solidFill>
-          <a:ln>
-            <a:noFill/>
+          <a:ln w="12700">
+            <a:solidFill>
+              <a:srgbClr val="E5E7EB"/>
+            </a:solidFill>
           </a:ln>
           <a:effectLst/>
         </p:spPr>
@@ -4957,14 +5239,14 @@
       </p:sp>
       <p:sp>
         <p:nvSpPr>
-          <p:cNvPr id="33" name="TextBox 32"/>
+          <p:cNvPr id="34" name="TextBox 33"/>
           <p:cNvSpPr txBox="1"/>
           <p:nvPr/>
         </p:nvSpPr>
         <p:spPr>
           <a:xfrm>
-            <a:off x="411480" y="3547872"/>
-            <a:ext cx="2148840" cy="731520"/>
+            <a:off x="660400" y="4038600"/>
+            <a:ext cx="1920239" cy="749300"/>
           </a:xfrm>
           <a:prstGeom prst="rect">
             <a:avLst/>
@@ -4972,7 +5254,7 @@
           <a:noFill/>
         </p:spPr>
         <p:txBody>
-          <a:bodyPr wrap="square" anchor="ctr" lIns="64008" rIns="64008" tIns="27432" bIns="27432">
+          <a:bodyPr wrap="square" anchor="ctr" lIns="25400" rIns="25400" tIns="12700" bIns="12700">
             <a:normAutofit/>
           </a:bodyPr>
           <a:lstStyle/>
@@ -4983,11 +5265,11 @@
               </a:spcAft>
             </a:pPr>
             <a:r>
-              <a:rPr sz="1100" b="0">
-                <a:solidFill>
-                  <a:srgbClr val="6E2F2F"/>
-                </a:solidFill>
-                <a:latin typeface="Calibri"/>
+              <a:rPr sz="800" b="0">
+                <a:solidFill>
+                  <a:srgbClr val="7A3B2E"/>
+                </a:solidFill>
+                <a:latin typeface="Inter"/>
               </a:rPr>
               <a:t>Enquiries slip through the cracks</a:t>
             </a:r>
@@ -4996,25 +5278,27 @@
       </p:sp>
       <p:sp>
         <p:nvSpPr>
-          <p:cNvPr id="34" name="Rounded Rectangle 33"/>
+          <p:cNvPr id="35" name="Rounded Rectangle 34"/>
           <p:cNvSpPr/>
           <p:nvPr/>
         </p:nvSpPr>
         <p:spPr>
           <a:xfrm>
-            <a:off x="2715768" y="3547872"/>
-            <a:ext cx="2148840" cy="731520"/>
+            <a:off x="2809239" y="4038600"/>
+            <a:ext cx="2098040" cy="749300"/>
           </a:xfrm>
           <a:prstGeom prst="roundRect">
             <a:avLst>
-              <a:gd name="adj" fmla="val 12500"/>
+              <a:gd name="adj" fmla="val 10169"/>
             </a:avLst>
           </a:prstGeom>
           <a:solidFill>
-            <a:srgbClr val="F1EEE9"/>
+            <a:srgbClr val="FBF7F1"/>
           </a:solidFill>
-          <a:ln>
-            <a:noFill/>
+          <a:ln w="12700">
+            <a:solidFill>
+              <a:srgbClr val="E5E7EB"/>
+            </a:solidFill>
           </a:ln>
           <a:effectLst/>
         </p:spPr>
@@ -5042,14 +5326,14 @@
       </p:sp>
       <p:sp>
         <p:nvSpPr>
-          <p:cNvPr id="35" name="TextBox 34"/>
+          <p:cNvPr id="36" name="TextBox 35"/>
           <p:cNvSpPr txBox="1"/>
           <p:nvPr/>
         </p:nvSpPr>
         <p:spPr>
           <a:xfrm>
-            <a:off x="2715768" y="3547872"/>
-            <a:ext cx="2148840" cy="731520"/>
+            <a:off x="2898140" y="4038600"/>
+            <a:ext cx="1920239" cy="749300"/>
           </a:xfrm>
           <a:prstGeom prst="rect">
             <a:avLst/>
@@ -5057,7 +5341,7 @@
           <a:noFill/>
         </p:spPr>
         <p:txBody>
-          <a:bodyPr wrap="square" anchor="ctr" lIns="64008" rIns="64008" tIns="27432" bIns="27432">
+          <a:bodyPr wrap="square" anchor="ctr" lIns="25400" rIns="25400" tIns="12700" bIns="12700">
             <a:normAutofit/>
           </a:bodyPr>
           <a:lstStyle/>
@@ -5068,38 +5352,40 @@
               </a:spcAft>
             </a:pPr>
             <a:r>
-              <a:rPr sz="1100" b="0">
-                <a:solidFill>
-                  <a:srgbClr val="6E2F2F"/>
-                </a:solidFill>
-                <a:latin typeface="Calibri"/>
+              <a:rPr sz="800" b="0">
+                <a:solidFill>
+                  <a:srgbClr val="7A3B2E"/>
+                </a:solidFill>
+                <a:latin typeface="Inter"/>
               </a:rPr>
-              <a:t>Chasing forms; everything is manual</a:t>
-            </a:r>
-          </a:p>
-        </p:txBody>
-      </p:sp>
-      <p:sp>
-        <p:nvSpPr>
-          <p:cNvPr id="36" name="Rounded Rectangle 35"/>
+              <a:t>Chasing forms — everything is manual</a:t>
+            </a:r>
+          </a:p>
+        </p:txBody>
+      </p:sp>
+      <p:sp>
+        <p:nvSpPr>
+          <p:cNvPr id="37" name="Rounded Rectangle 36"/>
           <p:cNvSpPr/>
           <p:nvPr/>
         </p:nvSpPr>
         <p:spPr>
           <a:xfrm>
-            <a:off x="5020056" y="3547872"/>
-            <a:ext cx="2148840" cy="731520"/>
+            <a:off x="5046979" y="4038600"/>
+            <a:ext cx="2098040" cy="749300"/>
           </a:xfrm>
           <a:prstGeom prst="roundRect">
             <a:avLst>
-              <a:gd name="adj" fmla="val 12500"/>
+              <a:gd name="adj" fmla="val 10169"/>
             </a:avLst>
           </a:prstGeom>
           <a:solidFill>
-            <a:srgbClr val="F1EEE9"/>
+            <a:srgbClr val="FBF7F1"/>
           </a:solidFill>
-          <a:ln>
-            <a:noFill/>
+          <a:ln w="12700">
+            <a:solidFill>
+              <a:srgbClr val="E5E7EB"/>
+            </a:solidFill>
           </a:ln>
           <a:effectLst/>
         </p:spPr>
@@ -5127,14 +5413,14 @@
       </p:sp>
       <p:sp>
         <p:nvSpPr>
-          <p:cNvPr id="37" name="TextBox 36"/>
+          <p:cNvPr id="38" name="TextBox 37"/>
           <p:cNvSpPr txBox="1"/>
           <p:nvPr/>
         </p:nvSpPr>
         <p:spPr>
           <a:xfrm>
-            <a:off x="5020056" y="3547872"/>
-            <a:ext cx="2148840" cy="731520"/>
+            <a:off x="5135880" y="4038600"/>
+            <a:ext cx="1920239" cy="749300"/>
           </a:xfrm>
           <a:prstGeom prst="rect">
             <a:avLst/>
@@ -5142,7 +5428,7 @@
           <a:noFill/>
         </p:spPr>
         <p:txBody>
-          <a:bodyPr wrap="square" anchor="ctr" lIns="64008" rIns="64008" tIns="27432" bIns="27432">
+          <a:bodyPr wrap="square" anchor="ctr" lIns="25400" rIns="25400" tIns="12700" bIns="12700">
             <a:normAutofit/>
           </a:bodyPr>
           <a:lstStyle/>
@@ -5153,38 +5439,40 @@
               </a:spcAft>
             </a:pPr>
             <a:r>
-              <a:rPr sz="1100" b="0">
-                <a:solidFill>
-                  <a:srgbClr val="6E2F2F"/>
-                </a:solidFill>
-                <a:latin typeface="Calibri"/>
+              <a:rPr sz="800" b="0">
+                <a:solidFill>
+                  <a:srgbClr val="7A3B2E"/>
+                </a:solidFill>
+                <a:latin typeface="Inter"/>
               </a:rPr>
-              <a:t>Prep rushed; the free consult under-delivers</a:t>
-            </a:r>
-          </a:p>
-        </p:txBody>
-      </p:sp>
-      <p:sp>
-        <p:nvSpPr>
-          <p:cNvPr id="38" name="Rounded Rectangle 37"/>
+              <a:t>Prep is rushed; the free consult under-delivers</a:t>
+            </a:r>
+          </a:p>
+        </p:txBody>
+      </p:sp>
+      <p:sp>
+        <p:nvSpPr>
+          <p:cNvPr id="39" name="Rounded Rectangle 38"/>
           <p:cNvSpPr/>
           <p:nvPr/>
         </p:nvSpPr>
         <p:spPr>
           <a:xfrm>
-            <a:off x="7324344" y="3547872"/>
-            <a:ext cx="2148840" cy="731520"/>
+            <a:off x="7284719" y="4038600"/>
+            <a:ext cx="2098040" cy="749300"/>
           </a:xfrm>
           <a:prstGeom prst="roundRect">
             <a:avLst>
-              <a:gd name="adj" fmla="val 12500"/>
+              <a:gd name="adj" fmla="val 10169"/>
             </a:avLst>
           </a:prstGeom>
           <a:solidFill>
-            <a:srgbClr val="F1EEE9"/>
+            <a:srgbClr val="FBF7F1"/>
           </a:solidFill>
-          <a:ln>
-            <a:noFill/>
+          <a:ln w="12700">
+            <a:solidFill>
+              <a:srgbClr val="E5E7EB"/>
+            </a:solidFill>
           </a:ln>
           <a:effectLst/>
         </p:spPr>
@@ -5212,14 +5500,14 @@
       </p:sp>
       <p:sp>
         <p:nvSpPr>
-          <p:cNvPr id="39" name="TextBox 38"/>
+          <p:cNvPr id="40" name="TextBox 39"/>
           <p:cNvSpPr txBox="1"/>
           <p:nvPr/>
         </p:nvSpPr>
         <p:spPr>
           <a:xfrm>
-            <a:off x="7324344" y="3547872"/>
-            <a:ext cx="2148840" cy="731520"/>
+            <a:off x="7373619" y="4038600"/>
+            <a:ext cx="1920239" cy="749300"/>
           </a:xfrm>
           <a:prstGeom prst="rect">
             <a:avLst/>
@@ -5227,7 +5515,7 @@
           <a:noFill/>
         </p:spPr>
         <p:txBody>
-          <a:bodyPr wrap="square" anchor="ctr" lIns="64008" rIns="64008" tIns="27432" bIns="27432">
+          <a:bodyPr wrap="square" anchor="ctr" lIns="25400" rIns="25400" tIns="12700" bIns="12700">
             <a:normAutofit/>
           </a:bodyPr>
           <a:lstStyle/>
@@ -5238,11 +5526,11 @@
               </a:spcAft>
             </a:pPr>
             <a:r>
-              <a:rPr sz="1100" b="0">
-                <a:solidFill>
-                  <a:srgbClr val="6E2F2F"/>
-                </a:solidFill>
-                <a:latin typeface="Calibri"/>
+              <a:rPr sz="800" b="0">
+                <a:solidFill>
+                  <a:srgbClr val="7A3B2E"/>
+                </a:solidFill>
+                <a:latin typeface="Inter"/>
               </a:rPr>
               <a:t>Plans hand-built; reports take ~3 weeks</a:t>
             </a:r>
@@ -5251,25 +5539,27 @@
       </p:sp>
       <p:sp>
         <p:nvSpPr>
-          <p:cNvPr id="40" name="Rounded Rectangle 39"/>
+          <p:cNvPr id="41" name="Rounded Rectangle 40"/>
           <p:cNvSpPr/>
           <p:nvPr/>
         </p:nvSpPr>
         <p:spPr>
           <a:xfrm>
-            <a:off x="9628632" y="3547872"/>
-            <a:ext cx="2148840" cy="731520"/>
+            <a:off x="9522459" y="4038600"/>
+            <a:ext cx="2098040" cy="749300"/>
           </a:xfrm>
           <a:prstGeom prst="roundRect">
             <a:avLst>
-              <a:gd name="adj" fmla="val 12500"/>
+              <a:gd name="adj" fmla="val 10169"/>
             </a:avLst>
           </a:prstGeom>
           <a:solidFill>
-            <a:srgbClr val="F1EEE9"/>
+            <a:srgbClr val="FBF7F1"/>
           </a:solidFill>
-          <a:ln>
-            <a:noFill/>
+          <a:ln w="12700">
+            <a:solidFill>
+              <a:srgbClr val="E5E7EB"/>
+            </a:solidFill>
           </a:ln>
           <a:effectLst/>
         </p:spPr>
@@ -5297,14 +5587,14 @@
       </p:sp>
       <p:sp>
         <p:nvSpPr>
-          <p:cNvPr id="41" name="TextBox 40"/>
+          <p:cNvPr id="42" name="TextBox 41"/>
           <p:cNvSpPr txBox="1"/>
           <p:nvPr/>
         </p:nvSpPr>
         <p:spPr>
           <a:xfrm>
-            <a:off x="9628632" y="3547872"/>
-            <a:ext cx="2148840" cy="731520"/>
+            <a:off x="9611360" y="4038600"/>
+            <a:ext cx="1920239" cy="749300"/>
           </a:xfrm>
           <a:prstGeom prst="rect">
             <a:avLst/>
@@ -5312,7 +5602,7 @@
           <a:noFill/>
         </p:spPr>
         <p:txBody>
-          <a:bodyPr wrap="square" anchor="ctr" lIns="64008" rIns="64008" tIns="27432" bIns="27432">
+          <a:bodyPr wrap="square" anchor="ctr" lIns="25400" rIns="25400" tIns="12700" bIns="12700">
             <a:normAutofit/>
           </a:bodyPr>
           <a:lstStyle/>
@@ -5323,11 +5613,11 @@
               </a:spcAft>
             </a:pPr>
             <a:r>
-              <a:rPr sz="1100" b="0">
-                <a:solidFill>
-                  <a:srgbClr val="6E2F2F"/>
-                </a:solidFill>
-                <a:latin typeface="Calibri"/>
+              <a:rPr sz="800" b="0">
+                <a:solidFill>
+                  <a:srgbClr val="7A3B2E"/>
+                </a:solidFill>
+                <a:latin typeface="Inter"/>
               </a:rPr>
               <a:t>Carryover is ad-hoc (email / WhatsApp)</a:t>
             </a:r>
@@ -5336,14 +5626,14 @@
       </p:sp>
       <p:sp>
         <p:nvSpPr>
-          <p:cNvPr id="42" name="TextBox 41"/>
+          <p:cNvPr id="43" name="TextBox 42"/>
           <p:cNvSpPr txBox="1"/>
           <p:nvPr/>
         </p:nvSpPr>
         <p:spPr>
           <a:xfrm>
-            <a:off x="411480" y="4462272"/>
-            <a:ext cx="11365992" cy="228600"/>
+            <a:off x="571500" y="5067300"/>
+            <a:ext cx="5715000" cy="152400"/>
           </a:xfrm>
           <a:prstGeom prst="rect">
             <a:avLst/>
@@ -5351,7 +5641,7 @@
           <a:noFill/>
         </p:spPr>
         <p:txBody>
-          <a:bodyPr wrap="square" anchor="t" lIns="64008" rIns="64008" tIns="27432" bIns="27432">
+          <a:bodyPr wrap="square" anchor="t" lIns="25400" rIns="25400" tIns="12700" bIns="12700">
             <a:spAutoFit/>
           </a:bodyPr>
           <a:lstStyle/>
@@ -5362,79 +5652,31 @@
               </a:spcAft>
             </a:pPr>
             <a:r>
-              <a:rPr sz="1000" b="1">
-                <a:solidFill>
-                  <a:srgbClr val="8A938F"/>
-                </a:solidFill>
-                <a:latin typeface="Calibri"/>
+              <a:rPr sz="700" b="1">
+                <a:solidFill>
+                  <a:srgbClr val="8597A4"/>
+                </a:solidFill>
+                <a:latin typeface="Inter"/>
               </a:rPr>
-              <a:t>WHAT IT'S WORTH (TARGETS)</a:t>
-            </a:r>
-          </a:p>
-        </p:txBody>
-      </p:sp>
-      <p:sp>
-        <p:nvSpPr>
-          <p:cNvPr id="43" name="Rounded Rectangle 42"/>
+              <a:t>THE PRIZE — TARGETS</a:t>
+            </a:r>
+          </a:p>
+        </p:txBody>
+      </p:sp>
+      <p:sp>
+        <p:nvSpPr>
+          <p:cNvPr id="44" name="Rounded Rectangle 43"/>
           <p:cNvSpPr/>
           <p:nvPr/>
         </p:nvSpPr>
         <p:spPr>
           <a:xfrm>
-            <a:off x="411480" y="4700016"/>
-            <a:ext cx="5500116" cy="1078992"/>
+            <a:off x="584200" y="5283200"/>
+            <a:ext cx="571500" cy="31750"/>
           </a:xfrm>
           <a:prstGeom prst="roundRect">
             <a:avLst>
-              <a:gd name="adj" fmla="val 6779"/>
-            </a:avLst>
-          </a:prstGeom>
-          <a:solidFill>
-            <a:srgbClr val="FFFFFF"/>
-          </a:solidFill>
-          <a:ln w="12700">
-            <a:solidFill>
-              <a:srgbClr val="D8E0DE"/>
-            </a:solidFill>
-          </a:ln>
-          <a:effectLst/>
-        </p:spPr>
-        <p:style>
-          <a:lnRef idx="1">
-            <a:schemeClr val="accent1"/>
-          </a:lnRef>
-          <a:fillRef idx="3">
-            <a:schemeClr val="accent1"/>
-          </a:fillRef>
-          <a:effectRef idx="2">
-            <a:schemeClr val="accent1"/>
-          </a:effectRef>
-          <a:fontRef idx="minor">
-            <a:schemeClr val="lt1"/>
-          </a:fontRef>
-        </p:style>
-        <p:txBody>
-          <a:bodyPr rtlCol="0" anchor="ctr"/>
-          <a:lstStyle/>
-          <a:p>
-            <a:pPr algn="ctr"/>
-          </a:p>
-        </p:txBody>
-      </p:sp>
-      <p:sp>
-        <p:nvSpPr>
-          <p:cNvPr id="44" name="Rounded Rectangle 43"/>
-          <p:cNvSpPr/>
-          <p:nvPr/>
-        </p:nvSpPr>
-        <p:spPr>
-          <a:xfrm>
-            <a:off x="612648" y="4882896"/>
-            <a:ext cx="457200" cy="54864"/>
-          </a:xfrm>
-          <a:prstGeom prst="roundRect">
-            <a:avLst>
-              <a:gd name="adj" fmla="val 33333"/>
+              <a:gd name="adj" fmla="val 40000"/>
             </a:avLst>
           </a:prstGeom>
           <a:solidFill>
@@ -5475,8 +5717,8 @@
         </p:nvSpPr>
         <p:spPr>
           <a:xfrm>
-            <a:off x="411480" y="4992624"/>
-            <a:ext cx="5500116" cy="502920"/>
+            <a:off x="571500" y="5372100"/>
+            <a:ext cx="5207000" cy="355600"/>
           </a:xfrm>
           <a:prstGeom prst="rect">
             <a:avLst/>
@@ -5484,7 +5726,7 @@
           <a:noFill/>
         </p:spPr>
         <p:txBody>
-          <a:bodyPr wrap="square" anchor="t" lIns="64008" rIns="64008" tIns="27432" bIns="27432">
+          <a:bodyPr wrap="square" anchor="t" lIns="25400" rIns="25400" tIns="12700" bIns="12700">
             <a:spAutoFit/>
           </a:bodyPr>
           <a:lstStyle/>
@@ -5495,11 +5737,11 @@
               </a:spcAft>
             </a:pPr>
             <a:r>
-              <a:rPr sz="2600" b="1">
+              <a:rPr sz="2100" b="1">
                 <a:solidFill>
                   <a:srgbClr val="2D6A6E"/>
                 </a:solidFill>
-                <a:latin typeface="Calibri"/>
+                <a:latin typeface="Inter"/>
               </a:rPr>
               <a:t>≥ 4 hours / month</a:t>
             </a:r>
@@ -5514,8 +5756,8 @@
         </p:nvSpPr>
         <p:spPr>
           <a:xfrm>
-            <a:off x="411480" y="5504688"/>
-            <a:ext cx="5500116" cy="228600"/>
+            <a:off x="571500" y="5791200"/>
+            <a:ext cx="5207000" cy="190500"/>
           </a:xfrm>
           <a:prstGeom prst="rect">
             <a:avLst/>
@@ -5523,7 +5765,7 @@
           <a:noFill/>
         </p:spPr>
         <p:txBody>
-          <a:bodyPr wrap="square" anchor="t" lIns="64008" rIns="64008" tIns="27432" bIns="27432">
+          <a:bodyPr wrap="square" anchor="t" lIns="25400" rIns="25400" tIns="12700" bIns="12700">
             <a:spAutoFit/>
           </a:bodyPr>
           <a:lstStyle/>
@@ -5534,13 +5776,13 @@
               </a:spcAft>
             </a:pPr>
             <a:r>
-              <a:rPr sz="1150" b="0">
-                <a:solidFill>
-                  <a:srgbClr val="5A6A66"/>
-                </a:solidFill>
-                <a:latin typeface="Calibri"/>
+              <a:rPr sz="900" b="0">
+                <a:solidFill>
+                  <a:srgbClr val="4A5B6B"/>
+                </a:solidFill>
+                <a:latin typeface="Inter"/>
               </a:rPr>
-              <a:t>TARGET — productive hours given back to each clinician</a:t>
+              <a:t>productive hours given back to each clinician</a:t>
             </a:r>
           </a:p>
         </p:txBody>
@@ -5553,60 +5795,12 @@
         </p:nvSpPr>
         <p:spPr>
           <a:xfrm>
-            <a:off x="6277356" y="4700016"/>
-            <a:ext cx="5500116" cy="1078992"/>
+            <a:off x="6362700" y="5283200"/>
+            <a:ext cx="571500" cy="31750"/>
           </a:xfrm>
           <a:prstGeom prst="roundRect">
             <a:avLst>
-              <a:gd name="adj" fmla="val 6779"/>
-            </a:avLst>
-          </a:prstGeom>
-          <a:solidFill>
-            <a:srgbClr val="FFFFFF"/>
-          </a:solidFill>
-          <a:ln w="12700">
-            <a:solidFill>
-              <a:srgbClr val="D8E0DE"/>
-            </a:solidFill>
-          </a:ln>
-          <a:effectLst/>
-        </p:spPr>
-        <p:style>
-          <a:lnRef idx="1">
-            <a:schemeClr val="accent1"/>
-          </a:lnRef>
-          <a:fillRef idx="3">
-            <a:schemeClr val="accent1"/>
-          </a:fillRef>
-          <a:effectRef idx="2">
-            <a:schemeClr val="accent1"/>
-          </a:effectRef>
-          <a:fontRef idx="minor">
-            <a:schemeClr val="lt1"/>
-          </a:fontRef>
-        </p:style>
-        <p:txBody>
-          <a:bodyPr rtlCol="0" anchor="ctr"/>
-          <a:lstStyle/>
-          <a:p>
-            <a:pPr algn="ctr"/>
-          </a:p>
-        </p:txBody>
-      </p:sp>
-      <p:sp>
-        <p:nvSpPr>
-          <p:cNvPr id="48" name="Rounded Rectangle 47"/>
-          <p:cNvSpPr/>
-          <p:nvPr/>
-        </p:nvSpPr>
-        <p:spPr>
-          <a:xfrm>
-            <a:off x="6478524" y="4882896"/>
-            <a:ext cx="457200" cy="54864"/>
-          </a:xfrm>
-          <a:prstGeom prst="roundRect">
-            <a:avLst>
-              <a:gd name="adj" fmla="val 33333"/>
+              <a:gd name="adj" fmla="val 40000"/>
             </a:avLst>
           </a:prstGeom>
           <a:solidFill>
@@ -5641,14 +5835,14 @@
       </p:sp>
       <p:sp>
         <p:nvSpPr>
-          <p:cNvPr id="49" name="TextBox 48"/>
+          <p:cNvPr id="48" name="TextBox 47"/>
           <p:cNvSpPr txBox="1"/>
           <p:nvPr/>
         </p:nvSpPr>
         <p:spPr>
           <a:xfrm>
-            <a:off x="6277356" y="4992624"/>
-            <a:ext cx="5500116" cy="502920"/>
+            <a:off x="6350000" y="5372100"/>
+            <a:ext cx="5207000" cy="355600"/>
           </a:xfrm>
           <a:prstGeom prst="rect">
             <a:avLst/>
@@ -5656,7 +5850,7 @@
           <a:noFill/>
         </p:spPr>
         <p:txBody>
-          <a:bodyPr wrap="square" anchor="t" lIns="64008" rIns="64008" tIns="27432" bIns="27432">
+          <a:bodyPr wrap="square" anchor="t" lIns="25400" rIns="25400" tIns="12700" bIns="12700">
             <a:spAutoFit/>
           </a:bodyPr>
           <a:lstStyle/>
@@ -5667,11 +5861,11 @@
               </a:spcAft>
             </a:pPr>
             <a:r>
-              <a:rPr sz="2600" b="1">
+              <a:rPr sz="2100" b="1">
                 <a:solidFill>
                   <a:srgbClr val="2D6A6E"/>
                 </a:solidFill>
-                <a:latin typeface="Calibri"/>
+                <a:latin typeface="Inter"/>
               </a:rPr>
               <a:t>Same-day</a:t>
             </a:r>
@@ -5680,14 +5874,14 @@
       </p:sp>
       <p:sp>
         <p:nvSpPr>
-          <p:cNvPr id="50" name="TextBox 49"/>
+          <p:cNvPr id="49" name="TextBox 48"/>
           <p:cNvSpPr txBox="1"/>
           <p:nvPr/>
         </p:nvSpPr>
         <p:spPr>
           <a:xfrm>
-            <a:off x="6277356" y="5504688"/>
-            <a:ext cx="5500116" cy="228600"/>
+            <a:off x="6350000" y="5791200"/>
+            <a:ext cx="5207000" cy="190500"/>
           </a:xfrm>
           <a:prstGeom prst="rect">
             <a:avLst/>
@@ -5695,7 +5889,7 @@
           <a:noFill/>
         </p:spPr>
         <p:txBody>
-          <a:bodyPr wrap="square" anchor="t" lIns="64008" rIns="64008" tIns="27432" bIns="27432">
+          <a:bodyPr wrap="square" anchor="t" lIns="25400" rIns="25400" tIns="12700" bIns="12700">
             <a:spAutoFit/>
           </a:bodyPr>
           <a:lstStyle/>
@@ -5706,13 +5900,91 @@
               </a:spcAft>
             </a:pPr>
             <a:r>
-              <a:rPr sz="1150" b="0">
-                <a:solidFill>
-                  <a:srgbClr val="5A6A66"/>
-                </a:solidFill>
-                <a:latin typeface="Calibri"/>
+              <a:rPr sz="900" b="0">
+                <a:solidFill>
+                  <a:srgbClr val="4A5B6B"/>
+                </a:solidFill>
+                <a:latin typeface="Inter"/>
               </a:rPr>
-              <a:t>TARGET — client summaries &amp; reports vs the ~3-week baseline</a:t>
+              <a:t>client summaries &amp; reports, vs the ~3-week manual baseline</a:t>
+            </a:r>
+          </a:p>
+        </p:txBody>
+      </p:sp>
+      <p:sp>
+        <p:nvSpPr>
+          <p:cNvPr id="50" name="TextBox 49"/>
+          <p:cNvSpPr txBox="1"/>
+          <p:nvPr/>
+        </p:nvSpPr>
+        <p:spPr>
+          <a:xfrm>
+            <a:off x="571500" y="6604000"/>
+            <a:ext cx="5715000" cy="139700"/>
+          </a:xfrm>
+          <a:prstGeom prst="rect">
+            <a:avLst/>
+          </a:prstGeom>
+          <a:noFill/>
+        </p:spPr>
+        <p:txBody>
+          <a:bodyPr wrap="square" anchor="t" lIns="25400" rIns="25400" tIns="12700" bIns="12700">
+            <a:spAutoFit/>
+          </a:bodyPr>
+          <a:lstStyle/>
+          <a:p>
+            <a:pPr algn="l">
+              <a:spcAft>
+                <a:spcPts val="0"/>
+              </a:spcAft>
+            </a:pPr>
+            <a:r>
+              <a:rPr sz="600" b="0">
+                <a:solidFill>
+                  <a:srgbClr val="8597A4"/>
+                </a:solidFill>
+                <a:latin typeface="Inter"/>
+              </a:rPr>
+              <a:t>Sona — Care Journey &amp; Product Overview</a:t>
+            </a:r>
+          </a:p>
+        </p:txBody>
+      </p:sp>
+      <p:sp>
+        <p:nvSpPr>
+          <p:cNvPr id="51" name="TextBox 50"/>
+          <p:cNvSpPr txBox="1"/>
+          <p:nvPr/>
+        </p:nvSpPr>
+        <p:spPr>
+          <a:xfrm>
+            <a:off x="10414000" y="6604000"/>
+            <a:ext cx="1206500" cy="139700"/>
+          </a:xfrm>
+          <a:prstGeom prst="rect">
+            <a:avLst/>
+          </a:prstGeom>
+          <a:noFill/>
+        </p:spPr>
+        <p:txBody>
+          <a:bodyPr wrap="square" anchor="t" lIns="25400" rIns="25400" tIns="12700" bIns="12700">
+            <a:spAutoFit/>
+          </a:bodyPr>
+          <a:lstStyle/>
+          <a:p>
+            <a:pPr algn="r">
+              <a:spcAft>
+                <a:spcPts val="0"/>
+              </a:spcAft>
+            </a:pPr>
+            <a:r>
+              <a:rPr sz="600" b="0">
+                <a:solidFill>
+                  <a:srgbClr val="8597A4"/>
+                </a:solidFill>
+                <a:latin typeface="Inter"/>
+              </a:rPr>
+              <a:t>2 / 3</a:t>
             </a:r>
           </a:p>
         </p:txBody>
@@ -5744,7 +6016,7 @@
         <p:spPr>
           <a:xfrm>
             <a:off x="0" y="0"/>
-            <a:ext cx="12191695" cy="6858000"/>
+            <a:ext cx="12192000" cy="6858000"/>
           </a:xfrm>
           <a:prstGeom prst="rect">
             <a:avLst/>
@@ -5787,8 +6059,8 @@
         </p:nvSpPr>
         <p:spPr>
           <a:xfrm>
-            <a:off x="411480" y="256032"/>
-            <a:ext cx="11365992" cy="502920"/>
+            <a:off x="571500" y="469899"/>
+            <a:ext cx="5715000" cy="165100"/>
           </a:xfrm>
           <a:prstGeom prst="rect">
             <a:avLst/>
@@ -5796,7 +6068,7 @@
           <a:noFill/>
         </p:spPr>
         <p:txBody>
-          <a:bodyPr wrap="square" anchor="ctr" lIns="64008" rIns="64008" tIns="27432" bIns="27432">
+          <a:bodyPr wrap="square" anchor="t" lIns="25400" rIns="25400" tIns="12700" bIns="12700">
             <a:spAutoFit/>
           </a:bodyPr>
           <a:lstStyle/>
@@ -5807,13 +6079,13 @@
               </a:spcAft>
             </a:pPr>
             <a:r>
-              <a:rPr sz="2400" b="1">
-                <a:solidFill>
-                  <a:srgbClr val="2D6A6E"/>
-                </a:solidFill>
-                <a:latin typeface="Calibri"/>
+              <a:rPr sz="750" b="1">
+                <a:solidFill>
+                  <a:srgbClr val="8597A4"/>
+                </a:solidFill>
+                <a:latin typeface="Inter"/>
               </a:rPr>
-              <a:t>Executive view — strategy &amp; sequencing</a:t>
+              <a:t>PRODUCT VIEW</a:t>
             </a:r>
           </a:p>
         </p:txBody>
@@ -5826,8 +6098,8 @@
         </p:nvSpPr>
         <p:spPr>
           <a:xfrm>
-            <a:off x="411480" y="786384"/>
-            <a:ext cx="11365992" cy="228600"/>
+            <a:off x="571500" y="635000"/>
+            <a:ext cx="10160000" cy="381000"/>
           </a:xfrm>
           <a:prstGeom prst="rect">
             <a:avLst/>
@@ -5835,7 +6107,7 @@
           <a:noFill/>
         </p:spPr>
         <p:txBody>
-          <a:bodyPr wrap="square" anchor="t" lIns="64008" rIns="64008" tIns="27432" bIns="27432">
+          <a:bodyPr wrap="square" anchor="t" lIns="25400" rIns="25400" tIns="12700" bIns="12700">
             <a:spAutoFit/>
           </a:bodyPr>
           <a:lstStyle/>
@@ -5846,35 +6118,74 @@
               </a:spcAft>
             </a:pPr>
             <a:r>
-              <a:rPr sz="1000" b="1">
-                <a:solidFill>
-                  <a:srgbClr val="8A938F"/>
-                </a:solidFill>
-                <a:latin typeface="Calibri"/>
+              <a:rPr sz="2000" b="1">
+                <a:solidFill>
+                  <a:srgbClr val="2D6A6E"/>
+                </a:solidFill>
+                <a:latin typeface="Inter"/>
               </a:rPr>
-              <a:t>STRATEGIC OPPORTUNITIES — where Sona wins</a:t>
-            </a:r>
-          </a:p>
-        </p:txBody>
-      </p:sp>
-      <p:sp>
-        <p:nvSpPr>
-          <p:cNvPr id="5" name="Rounded Rectangle 4"/>
+              <a:t>The proposed solution</a:t>
+            </a:r>
+          </a:p>
+        </p:txBody>
+      </p:sp>
+      <p:sp>
+        <p:nvSpPr>
+          <p:cNvPr id="5" name="TextBox 4"/>
+          <p:cNvSpPr txBox="1"/>
+          <p:nvPr/>
+        </p:nvSpPr>
+        <p:spPr>
+          <a:xfrm>
+            <a:off x="571500" y="1066800"/>
+            <a:ext cx="10541000" cy="317500"/>
+          </a:xfrm>
+          <a:prstGeom prst="rect">
+            <a:avLst/>
+          </a:prstGeom>
+          <a:noFill/>
+        </p:spPr>
+        <p:txBody>
+          <a:bodyPr wrap="square" anchor="t" lIns="25400" rIns="25400" tIns="12700" bIns="12700">
+            <a:spAutoFit/>
+          </a:bodyPr>
+          <a:lstStyle/>
+          <a:p>
+            <a:pPr algn="l">
+              <a:spcAft>
+                <a:spcPts val="0"/>
+              </a:spcAft>
+            </a:pPr>
+            <a:r>
+              <a:rPr sz="950" b="0">
+                <a:solidFill>
+                  <a:srgbClr val="4A5B6B"/>
+                </a:solidFill>
+                <a:latin typeface="Inter"/>
+              </a:rPr>
+              <a:t>The client's first 30 days as nine stages grouped into five phases — for each stage: what Sona does, and the surface that delivers it.</a:t>
+            </a:r>
+          </a:p>
+        </p:txBody>
+      </p:sp>
+      <p:sp>
+        <p:nvSpPr>
+          <p:cNvPr id="6" name="Rounded Rectangle 5"/>
           <p:cNvSpPr/>
           <p:nvPr/>
         </p:nvSpPr>
         <p:spPr>
           <a:xfrm>
-            <a:off x="411480" y="1005840"/>
-            <a:ext cx="2718054" cy="777240"/>
+            <a:off x="584200" y="1422400"/>
+            <a:ext cx="889000" cy="31750"/>
           </a:xfrm>
           <a:prstGeom prst="roundRect">
             <a:avLst>
-              <a:gd name="adj" fmla="val 11764"/>
+              <a:gd name="adj" fmla="val 40000"/>
             </a:avLst>
           </a:prstGeom>
           <a:solidFill>
-            <a:srgbClr val="E3EFEE"/>
+            <a:srgbClr val="F2A878"/>
           </a:solidFill>
           <a:ln>
             <a:noFill/>
@@ -5905,14 +6216,14 @@
       </p:sp>
       <p:sp>
         <p:nvSpPr>
-          <p:cNvPr id="6" name="TextBox 5"/>
+          <p:cNvPr id="7" name="TextBox 6"/>
           <p:cNvSpPr txBox="1"/>
           <p:nvPr/>
         </p:nvSpPr>
         <p:spPr>
           <a:xfrm>
-            <a:off x="411480" y="1005840"/>
-            <a:ext cx="2718054" cy="777240"/>
+            <a:off x="571500" y="1828800"/>
+            <a:ext cx="939799" cy="317500"/>
           </a:xfrm>
           <a:prstGeom prst="rect">
             <a:avLst/>
@@ -5920,301 +6231,7 @@
           <a:noFill/>
         </p:spPr>
         <p:txBody>
-          <a:bodyPr wrap="square" anchor="ctr" lIns="64008" rIns="64008" tIns="27432" bIns="27432">
-            <a:normAutofit/>
-          </a:bodyPr>
-          <a:lstStyle/>
-          <a:p>
-            <a:pPr algn="ctr">
-              <a:spcAft>
-                <a:spcPts val="0"/>
-              </a:spcAft>
-            </a:pPr>
-            <a:r>
-              <a:rPr sz="1150" b="1">
-                <a:solidFill>
-                  <a:srgbClr val="2D6A6E"/>
-                </a:solidFill>
-                <a:latin typeface="Calibri"/>
-              </a:rPr>
-              <a:t>Own the first 30 days as one reviewed loop</a:t>
-            </a:r>
-          </a:p>
-        </p:txBody>
-      </p:sp>
-      <p:sp>
-        <p:nvSpPr>
-          <p:cNvPr id="7" name="Rounded Rectangle 6"/>
-          <p:cNvSpPr/>
-          <p:nvPr/>
-        </p:nvSpPr>
-        <p:spPr>
-          <a:xfrm>
-            <a:off x="3294126" y="1005840"/>
-            <a:ext cx="2718054" cy="777240"/>
-          </a:xfrm>
-          <a:prstGeom prst="roundRect">
-            <a:avLst>
-              <a:gd name="adj" fmla="val 11764"/>
-            </a:avLst>
-          </a:prstGeom>
-          <a:solidFill>
-            <a:srgbClr val="E3EFEE"/>
-          </a:solidFill>
-          <a:ln>
-            <a:noFill/>
-          </a:ln>
-          <a:effectLst/>
-        </p:spPr>
-        <p:style>
-          <a:lnRef idx="1">
-            <a:schemeClr val="accent1"/>
-          </a:lnRef>
-          <a:fillRef idx="3">
-            <a:schemeClr val="accent1"/>
-          </a:fillRef>
-          <a:effectRef idx="2">
-            <a:schemeClr val="accent1"/>
-          </a:effectRef>
-          <a:fontRef idx="minor">
-            <a:schemeClr val="lt1"/>
-          </a:fontRef>
-        </p:style>
-        <p:txBody>
-          <a:bodyPr rtlCol="0" anchor="ctr"/>
-          <a:lstStyle/>
-          <a:p>
-            <a:pPr algn="ctr"/>
-          </a:p>
-        </p:txBody>
-      </p:sp>
-      <p:sp>
-        <p:nvSpPr>
-          <p:cNvPr id="8" name="TextBox 7"/>
-          <p:cNvSpPr txBox="1"/>
-          <p:nvPr/>
-        </p:nvSpPr>
-        <p:spPr>
-          <a:xfrm>
-            <a:off x="3294126" y="1005840"/>
-            <a:ext cx="2718054" cy="777240"/>
-          </a:xfrm>
-          <a:prstGeom prst="rect">
-            <a:avLst/>
-          </a:prstGeom>
-          <a:noFill/>
-        </p:spPr>
-        <p:txBody>
-          <a:bodyPr wrap="square" anchor="ctr" lIns="64008" rIns="64008" tIns="27432" bIns="27432">
-            <a:normAutofit/>
-          </a:bodyPr>
-          <a:lstStyle/>
-          <a:p>
-            <a:pPr algn="ctr">
-              <a:spcAft>
-                <a:spcPts val="0"/>
-              </a:spcAft>
-            </a:pPr>
-            <a:r>
-              <a:rPr sz="1150" b="1">
-                <a:solidFill>
-                  <a:srgbClr val="2D6A6E"/>
-                </a:solidFill>
-                <a:latin typeface="Calibri"/>
-              </a:rPr>
-              <a:t>Trust is the moat — clinician signs every AI draft</a:t>
-            </a:r>
-          </a:p>
-        </p:txBody>
-      </p:sp>
-      <p:sp>
-        <p:nvSpPr>
-          <p:cNvPr id="9" name="Rounded Rectangle 8"/>
-          <p:cNvSpPr/>
-          <p:nvPr/>
-        </p:nvSpPr>
-        <p:spPr>
-          <a:xfrm>
-            <a:off x="6176772" y="1005840"/>
-            <a:ext cx="2718054" cy="777240"/>
-          </a:xfrm>
-          <a:prstGeom prst="roundRect">
-            <a:avLst>
-              <a:gd name="adj" fmla="val 11764"/>
-            </a:avLst>
-          </a:prstGeom>
-          <a:solidFill>
-            <a:srgbClr val="E3EFEE"/>
-          </a:solidFill>
-          <a:ln>
-            <a:noFill/>
-          </a:ln>
-          <a:effectLst/>
-        </p:spPr>
-        <p:style>
-          <a:lnRef idx="1">
-            <a:schemeClr val="accent1"/>
-          </a:lnRef>
-          <a:fillRef idx="3">
-            <a:schemeClr val="accent1"/>
-          </a:fillRef>
-          <a:effectRef idx="2">
-            <a:schemeClr val="accent1"/>
-          </a:effectRef>
-          <a:fontRef idx="minor">
-            <a:schemeClr val="lt1"/>
-          </a:fontRef>
-        </p:style>
-        <p:txBody>
-          <a:bodyPr rtlCol="0" anchor="ctr"/>
-          <a:lstStyle/>
-          <a:p>
-            <a:pPr algn="ctr"/>
-          </a:p>
-        </p:txBody>
-      </p:sp>
-      <p:sp>
-        <p:nvSpPr>
-          <p:cNvPr id="10" name="TextBox 9"/>
-          <p:cNvSpPr txBox="1"/>
-          <p:nvPr/>
-        </p:nvSpPr>
-        <p:spPr>
-          <a:xfrm>
-            <a:off x="6176772" y="1005840"/>
-            <a:ext cx="2718054" cy="777240"/>
-          </a:xfrm>
-          <a:prstGeom prst="rect">
-            <a:avLst/>
-          </a:prstGeom>
-          <a:noFill/>
-        </p:spPr>
-        <p:txBody>
-          <a:bodyPr wrap="square" anchor="ctr" lIns="64008" rIns="64008" tIns="27432" bIns="27432">
-            <a:normAutofit/>
-          </a:bodyPr>
-          <a:lstStyle/>
-          <a:p>
-            <a:pPr algn="ctr">
-              <a:spcAft>
-                <a:spcPts val="0"/>
-              </a:spcAft>
-            </a:pPr>
-            <a:r>
-              <a:rPr sz="1150" b="1">
-                <a:solidFill>
-                  <a:srgbClr val="2D6A6E"/>
-                </a:solidFill>
-                <a:latin typeface="Calibri"/>
-              </a:rPr>
-              <a:t>Start paediatric, generalise across other areas</a:t>
-            </a:r>
-          </a:p>
-        </p:txBody>
-      </p:sp>
-      <p:sp>
-        <p:nvSpPr>
-          <p:cNvPr id="11" name="Rounded Rectangle 10"/>
-          <p:cNvSpPr/>
-          <p:nvPr/>
-        </p:nvSpPr>
-        <p:spPr>
-          <a:xfrm>
-            <a:off x="9059418" y="1005840"/>
-            <a:ext cx="2718054" cy="777240"/>
-          </a:xfrm>
-          <a:prstGeom prst="roundRect">
-            <a:avLst>
-              <a:gd name="adj" fmla="val 11764"/>
-            </a:avLst>
-          </a:prstGeom>
-          <a:solidFill>
-            <a:srgbClr val="E3EFEE"/>
-          </a:solidFill>
-          <a:ln>
-            <a:noFill/>
-          </a:ln>
-          <a:effectLst/>
-        </p:spPr>
-        <p:style>
-          <a:lnRef idx="1">
-            <a:schemeClr val="accent1"/>
-          </a:lnRef>
-          <a:fillRef idx="3">
-            <a:schemeClr val="accent1"/>
-          </a:fillRef>
-          <a:effectRef idx="2">
-            <a:schemeClr val="accent1"/>
-          </a:effectRef>
-          <a:fontRef idx="minor">
-            <a:schemeClr val="lt1"/>
-          </a:fontRef>
-        </p:style>
-        <p:txBody>
-          <a:bodyPr rtlCol="0" anchor="ctr"/>
-          <a:lstStyle/>
-          <a:p>
-            <a:pPr algn="ctr"/>
-          </a:p>
-        </p:txBody>
-      </p:sp>
-      <p:sp>
-        <p:nvSpPr>
-          <p:cNvPr id="12" name="TextBox 11"/>
-          <p:cNvSpPr txBox="1"/>
-          <p:nvPr/>
-        </p:nvSpPr>
-        <p:spPr>
-          <a:xfrm>
-            <a:off x="9059418" y="1005840"/>
-            <a:ext cx="2718054" cy="777240"/>
-          </a:xfrm>
-          <a:prstGeom prst="rect">
-            <a:avLst/>
-          </a:prstGeom>
-          <a:noFill/>
-        </p:spPr>
-        <p:txBody>
-          <a:bodyPr wrap="square" anchor="ctr" lIns="64008" rIns="64008" tIns="27432" bIns="27432">
-            <a:normAutofit/>
-          </a:bodyPr>
-          <a:lstStyle/>
-          <a:p>
-            <a:pPr algn="ctr">
-              <a:spcAft>
-                <a:spcPts val="0"/>
-              </a:spcAft>
-            </a:pPr>
-            <a:r>
-              <a:rPr sz="1150" b="1">
-                <a:solidFill>
-                  <a:srgbClr val="2D6A6E"/>
-                </a:solidFill>
-                <a:latin typeface="Calibri"/>
-              </a:rPr>
-              <a:t>UK data residency + Clinical audit</a:t>
-            </a:r>
-          </a:p>
-        </p:txBody>
-      </p:sp>
-      <p:sp>
-        <p:nvSpPr>
-          <p:cNvPr id="13" name="TextBox 12"/>
-          <p:cNvSpPr txBox="1"/>
-          <p:nvPr/>
-        </p:nvSpPr>
-        <p:spPr>
-          <a:xfrm>
-            <a:off x="411480" y="2011680"/>
-            <a:ext cx="5486400" cy="228600"/>
-          </a:xfrm>
-          <a:prstGeom prst="rect">
-            <a:avLst/>
-          </a:prstGeom>
-          <a:noFill/>
-        </p:spPr>
-        <p:txBody>
-          <a:bodyPr wrap="square" anchor="t" lIns="64008" rIns="64008" tIns="27432" bIns="27432">
+          <a:bodyPr wrap="square" anchor="ctr" lIns="25400" rIns="25400" tIns="12700" bIns="12700">
             <a:spAutoFit/>
           </a:bodyPr>
           <a:lstStyle/>
@@ -6225,145 +6242,27 @@
               </a:spcAft>
             </a:pPr>
             <a:r>
-              <a:rPr sz="1000" b="1">
-                <a:solidFill>
-                  <a:srgbClr val="8A938F"/>
-                </a:solidFill>
-                <a:latin typeface="Calibri"/>
+              <a:rPr sz="700" b="1">
+                <a:solidFill>
+                  <a:srgbClr val="4A5B6B"/>
+                </a:solidFill>
+                <a:latin typeface="Inter"/>
               </a:rPr>
-              <a:t>PRIORITISATION — impact × effort · vertical = impact, horizontal = effort</a:t>
-            </a:r>
-          </a:p>
-        </p:txBody>
-      </p:sp>
-      <p:sp>
-        <p:nvSpPr>
-          <p:cNvPr id="14" name="Rounded Rectangle 13"/>
-          <p:cNvSpPr/>
-          <p:nvPr/>
-        </p:nvSpPr>
-        <p:spPr>
-          <a:xfrm>
-            <a:off x="411480" y="2286000"/>
-            <a:ext cx="5486400" cy="3931920"/>
-          </a:xfrm>
-          <a:prstGeom prst="roundRect">
-            <a:avLst>
-              <a:gd name="adj" fmla="val 697"/>
-            </a:avLst>
-          </a:prstGeom>
-          <a:solidFill>
-            <a:srgbClr val="F6F4EF"/>
-          </a:solidFill>
-          <a:ln>
-            <a:noFill/>
-          </a:ln>
-          <a:effectLst/>
-        </p:spPr>
-        <p:style>
-          <a:lnRef idx="1">
-            <a:schemeClr val="accent1"/>
-          </a:lnRef>
-          <a:fillRef idx="3">
-            <a:schemeClr val="accent1"/>
-          </a:fillRef>
-          <a:effectRef idx="2">
-            <a:schemeClr val="accent1"/>
-          </a:effectRef>
-          <a:fontRef idx="minor">
-            <a:schemeClr val="lt1"/>
-          </a:fontRef>
-        </p:style>
-        <p:txBody>
-          <a:bodyPr rtlCol="0" anchor="ctr"/>
-          <a:lstStyle/>
-          <a:p>
-            <a:pPr algn="ctr"/>
-          </a:p>
-        </p:txBody>
-      </p:sp>
-      <p:cxnSp>
-        <p:nvCxnSpPr>
-          <p:cNvPr id="15" name="Connector 14"/>
-          <p:cNvCxnSpPr/>
-          <p:nvPr/>
-        </p:nvCxnSpPr>
-        <p:spPr>
-          <a:xfrm>
-            <a:off x="3154680" y="2377440"/>
-            <a:ext cx="0" cy="3749040"/>
-          </a:xfrm>
-          <a:prstGeom prst="line">
-            <a:avLst/>
-          </a:prstGeom>
-          <a:ln w="12700">
-            <a:solidFill>
-              <a:srgbClr val="C9CFC9"/>
-            </a:solidFill>
-          </a:ln>
-          <a:effectLst/>
-        </p:spPr>
-        <p:style>
-          <a:lnRef idx="2">
-            <a:schemeClr val="accent1"/>
-          </a:lnRef>
-          <a:fillRef idx="0">
-            <a:schemeClr val="accent1"/>
-          </a:fillRef>
-          <a:effectRef idx="1">
-            <a:schemeClr val="accent1"/>
-          </a:effectRef>
-          <a:fontRef idx="minor">
-            <a:schemeClr val="tx1"/>
-          </a:fontRef>
-        </p:style>
-      </p:cxnSp>
-      <p:cxnSp>
-        <p:nvCxnSpPr>
-          <p:cNvPr id="16" name="Connector 15"/>
-          <p:cNvCxnSpPr/>
-          <p:nvPr/>
-        </p:nvCxnSpPr>
-        <p:spPr>
-          <a:xfrm>
-            <a:off x="502920" y="4251960"/>
-            <a:ext cx="5303520" cy="0"/>
-          </a:xfrm>
-          <a:prstGeom prst="line">
-            <a:avLst/>
-          </a:prstGeom>
-          <a:ln w="12700">
-            <a:solidFill>
-              <a:srgbClr val="C9CFC9"/>
-            </a:solidFill>
-          </a:ln>
-          <a:effectLst/>
-        </p:spPr>
-        <p:style>
-          <a:lnRef idx="2">
-            <a:schemeClr val="accent1"/>
-          </a:lnRef>
-          <a:fillRef idx="0">
-            <a:schemeClr val="accent1"/>
-          </a:fillRef>
-          <a:effectRef idx="1">
-            <a:schemeClr val="accent1"/>
-          </a:effectRef>
-          <a:fontRef idx="minor">
-            <a:schemeClr val="tx1"/>
-          </a:fontRef>
-        </p:style>
-      </p:cxnSp>
-      <p:sp>
-        <p:nvSpPr>
-          <p:cNvPr id="17" name="TextBox 16"/>
+              <a:t>Phase</a:t>
+            </a:r>
+          </a:p>
+        </p:txBody>
+      </p:sp>
+      <p:sp>
+        <p:nvSpPr>
+          <p:cNvPr id="8" name="TextBox 7"/>
           <p:cNvSpPr txBox="1"/>
           <p:nvPr/>
         </p:nvSpPr>
         <p:spPr>
           <a:xfrm>
-            <a:off x="521208" y="2340864"/>
-            <a:ext cx="1828800" cy="228600"/>
+            <a:off x="571500" y="2197100"/>
+            <a:ext cx="939799" cy="381000"/>
           </a:xfrm>
           <a:prstGeom prst="rect">
             <a:avLst/>
@@ -6371,7 +6270,7 @@
           <a:noFill/>
         </p:spPr>
         <p:txBody>
-          <a:bodyPr wrap="square" anchor="t" lIns="64008" rIns="64008" tIns="27432" bIns="27432">
+          <a:bodyPr wrap="square" anchor="ctr" lIns="25400" rIns="25400" tIns="12700" bIns="12700">
             <a:spAutoFit/>
           </a:bodyPr>
           <a:lstStyle/>
@@ -6382,27 +6281,27 @@
               </a:spcAft>
             </a:pPr>
             <a:r>
-              <a:rPr sz="950" b="1">
-                <a:solidFill>
-                  <a:srgbClr val="5A6A66"/>
-                </a:solidFill>
-                <a:latin typeface="Calibri"/>
+              <a:rPr sz="700" b="1">
+                <a:solidFill>
+                  <a:srgbClr val="4A5B6B"/>
+                </a:solidFill>
+                <a:latin typeface="Inter"/>
               </a:rPr>
-              <a:t>QUICK WINS</a:t>
-            </a:r>
-          </a:p>
-        </p:txBody>
-      </p:sp>
-      <p:sp>
-        <p:nvSpPr>
-          <p:cNvPr id="18" name="TextBox 17"/>
+              <a:t>Stage</a:t>
+            </a:r>
+          </a:p>
+        </p:txBody>
+      </p:sp>
+      <p:sp>
+        <p:nvSpPr>
+          <p:cNvPr id="9" name="TextBox 8"/>
           <p:cNvSpPr txBox="1"/>
           <p:nvPr/>
         </p:nvSpPr>
         <p:spPr>
           <a:xfrm>
-            <a:off x="3959352" y="2340864"/>
-            <a:ext cx="1828800" cy="228600"/>
+            <a:off x="571500" y="2628900"/>
+            <a:ext cx="939799" cy="1143000"/>
           </a:xfrm>
           <a:prstGeom prst="rect">
             <a:avLst/>
@@ -6410,46 +6309,7 @@
           <a:noFill/>
         </p:spPr>
         <p:txBody>
-          <a:bodyPr wrap="square" anchor="t" lIns="64008" rIns="64008" tIns="27432" bIns="27432">
-            <a:spAutoFit/>
-          </a:bodyPr>
-          <a:lstStyle/>
-          <a:p>
-            <a:pPr algn="r">
-              <a:spcAft>
-                <a:spcPts val="0"/>
-              </a:spcAft>
-            </a:pPr>
-            <a:r>
-              <a:rPr sz="950" b="1">
-                <a:solidFill>
-                  <a:srgbClr val="5A6A66"/>
-                </a:solidFill>
-                <a:latin typeface="Calibri"/>
-              </a:rPr>
-              <a:t>BIG BETS</a:t>
-            </a:r>
-          </a:p>
-        </p:txBody>
-      </p:sp>
-      <p:sp>
-        <p:nvSpPr>
-          <p:cNvPr id="19" name="TextBox 18"/>
-          <p:cNvSpPr txBox="1"/>
-          <p:nvPr/>
-        </p:nvSpPr>
-        <p:spPr>
-          <a:xfrm>
-            <a:off x="521208" y="5943600"/>
-            <a:ext cx="1828800" cy="228600"/>
-          </a:xfrm>
-          <a:prstGeom prst="rect">
-            <a:avLst/>
-          </a:prstGeom>
-          <a:noFill/>
-        </p:spPr>
-        <p:txBody>
-          <a:bodyPr wrap="square" anchor="t" lIns="64008" rIns="64008" tIns="27432" bIns="27432">
+          <a:bodyPr wrap="square" anchor="ctr" lIns="25400" rIns="25400" tIns="12700" bIns="12700">
             <a:spAutoFit/>
           </a:bodyPr>
           <a:lstStyle/>
@@ -6460,27 +6320,27 @@
               </a:spcAft>
             </a:pPr>
             <a:r>
-              <a:rPr sz="950" b="1">
-                <a:solidFill>
-                  <a:srgbClr val="5A6A66"/>
-                </a:solidFill>
-                <a:latin typeface="Calibri"/>
+              <a:rPr sz="700" b="1">
+                <a:solidFill>
+                  <a:srgbClr val="4A5B6B"/>
+                </a:solidFill>
+                <a:latin typeface="Inter"/>
               </a:rPr>
-              <a:t>FILL-INS</a:t>
-            </a:r>
-          </a:p>
-        </p:txBody>
-      </p:sp>
-      <p:sp>
-        <p:nvSpPr>
-          <p:cNvPr id="20" name="TextBox 19"/>
+              <a:t>What Sona does</a:t>
+            </a:r>
+          </a:p>
+        </p:txBody>
+      </p:sp>
+      <p:sp>
+        <p:nvSpPr>
+          <p:cNvPr id="10" name="TextBox 9"/>
           <p:cNvSpPr txBox="1"/>
           <p:nvPr/>
         </p:nvSpPr>
         <p:spPr>
           <a:xfrm>
-            <a:off x="3959352" y="5943600"/>
-            <a:ext cx="1828800" cy="228600"/>
+            <a:off x="571500" y="3822700"/>
+            <a:ext cx="939799" cy="762000"/>
           </a:xfrm>
           <a:prstGeom prst="rect">
             <a:avLst/>
@@ -6488,92 +6348,7 @@
           <a:noFill/>
         </p:spPr>
         <p:txBody>
-          <a:bodyPr wrap="square" anchor="t" lIns="64008" rIns="64008" tIns="27432" bIns="27432">
-            <a:spAutoFit/>
-          </a:bodyPr>
-          <a:lstStyle/>
-          <a:p>
-            <a:pPr algn="r">
-              <a:spcAft>
-                <a:spcPts val="0"/>
-              </a:spcAft>
-            </a:pPr>
-            <a:r>
-              <a:rPr sz="950" b="1">
-                <a:solidFill>
-                  <a:srgbClr val="5A6A66"/>
-                </a:solidFill>
-                <a:latin typeface="Calibri"/>
-              </a:rPr>
-              <a:t>TIME SINKS</a:t>
-            </a:r>
-          </a:p>
-        </p:txBody>
-      </p:sp>
-      <p:sp>
-        <p:nvSpPr>
-          <p:cNvPr id="21" name="Oval 20"/>
-          <p:cNvSpPr/>
-          <p:nvPr/>
-        </p:nvSpPr>
-        <p:spPr>
-          <a:xfrm>
-            <a:off x="1826971" y="3154680"/>
-            <a:ext cx="146304" cy="146304"/>
-          </a:xfrm>
-          <a:prstGeom prst="ellipse">
-            <a:avLst/>
-          </a:prstGeom>
-          <a:solidFill>
-            <a:srgbClr val="F2A878"/>
-          </a:solidFill>
-          <a:ln w="19050">
-            <a:solidFill>
-              <a:srgbClr val="2D6A6E"/>
-            </a:solidFill>
-          </a:ln>
-          <a:effectLst/>
-        </p:spPr>
-        <p:style>
-          <a:lnRef idx="1">
-            <a:schemeClr val="accent1"/>
-          </a:lnRef>
-          <a:fillRef idx="3">
-            <a:schemeClr val="accent1"/>
-          </a:fillRef>
-          <a:effectRef idx="2">
-            <a:schemeClr val="accent1"/>
-          </a:effectRef>
-          <a:fontRef idx="minor">
-            <a:schemeClr val="lt1"/>
-          </a:fontRef>
-        </p:style>
-        <p:txBody>
-          <a:bodyPr rtlCol="0" anchor="ctr"/>
-          <a:lstStyle/>
-          <a:p>
-            <a:pPr algn="ctr"/>
-          </a:p>
-        </p:txBody>
-      </p:sp>
-      <p:sp>
-        <p:nvSpPr>
-          <p:cNvPr id="22" name="TextBox 21"/>
-          <p:cNvSpPr txBox="1"/>
-          <p:nvPr/>
-        </p:nvSpPr>
-        <p:spPr>
-          <a:xfrm>
-            <a:off x="2028139" y="3090672"/>
-            <a:ext cx="2377440" cy="274320"/>
-          </a:xfrm>
-          <a:prstGeom prst="rect">
-            <a:avLst/>
-          </a:prstGeom>
-          <a:noFill/>
-        </p:spPr>
-        <p:txBody>
-          <a:bodyPr wrap="square" anchor="ctr" lIns="64008" rIns="64008" tIns="27432" bIns="27432">
+          <a:bodyPr wrap="square" anchor="ctr" lIns="25400" rIns="25400" tIns="12700" bIns="12700">
             <a:spAutoFit/>
           </a:bodyPr>
           <a:lstStyle/>
@@ -6584,805 +6359,31 @@
               </a:spcAft>
             </a:pPr>
             <a:r>
-              <a:rPr sz="1000" b="1">
-                <a:solidFill>
-                  <a:srgbClr val="2D6A6E"/>
-                </a:solidFill>
-                <a:latin typeface="Calibri"/>
+              <a:rPr sz="700" b="1">
+                <a:solidFill>
+                  <a:srgbClr val="4A5B6B"/>
+                </a:solidFill>
+                <a:latin typeface="Inter"/>
               </a:rPr>
-              <a:t>Trust / sign-off</a:t>
-            </a:r>
-          </a:p>
-        </p:txBody>
-      </p:sp>
-      <p:sp>
-        <p:nvSpPr>
-          <p:cNvPr id="23" name="Oval 22"/>
+              <a:t>Surface / owner</a:t>
+            </a:r>
+          </a:p>
+        </p:txBody>
+      </p:sp>
+      <p:sp>
+        <p:nvSpPr>
+          <p:cNvPr id="11" name="Rounded Rectangle 10"/>
           <p:cNvSpPr/>
           <p:nvPr/>
         </p:nvSpPr>
         <p:spPr>
           <a:xfrm>
-            <a:off x="3529584" y="3300984"/>
-            <a:ext cx="146304" cy="146304"/>
-          </a:xfrm>
-          <a:prstGeom prst="ellipse">
-            <a:avLst/>
-          </a:prstGeom>
-          <a:solidFill>
-            <a:srgbClr val="F2A878"/>
-          </a:solidFill>
-          <a:ln w="19050">
-            <a:solidFill>
-              <a:srgbClr val="2D6A6E"/>
-            </a:solidFill>
-          </a:ln>
-          <a:effectLst/>
-        </p:spPr>
-        <p:style>
-          <a:lnRef idx="1">
-            <a:schemeClr val="accent1"/>
-          </a:lnRef>
-          <a:fillRef idx="3">
-            <a:schemeClr val="accent1"/>
-          </a:fillRef>
-          <a:effectRef idx="2">
-            <a:schemeClr val="accent1"/>
-          </a:effectRef>
-          <a:fontRef idx="minor">
-            <a:schemeClr val="lt1"/>
-          </a:fontRef>
-        </p:style>
-        <p:txBody>
-          <a:bodyPr rtlCol="0" anchor="ctr"/>
-          <a:lstStyle/>
-          <a:p>
-            <a:pPr algn="ctr"/>
-          </a:p>
-        </p:txBody>
-      </p:sp>
-      <p:sp>
-        <p:nvSpPr>
-          <p:cNvPr id="24" name="TextBox 23"/>
-          <p:cNvSpPr txBox="1"/>
-          <p:nvPr/>
-        </p:nvSpPr>
-        <p:spPr>
-          <a:xfrm>
-            <a:off x="3730752" y="3236976"/>
-            <a:ext cx="2377440" cy="274320"/>
-          </a:xfrm>
-          <a:prstGeom prst="rect">
-            <a:avLst/>
-          </a:prstGeom>
-          <a:noFill/>
-        </p:spPr>
-        <p:txBody>
-          <a:bodyPr wrap="square" anchor="ctr" lIns="64008" rIns="64008" tIns="27432" bIns="27432">
-            <a:spAutoFit/>
-          </a:bodyPr>
-          <a:lstStyle/>
-          <a:p>
-            <a:pPr algn="l">
-              <a:spcAft>
-                <a:spcPts val="0"/>
-              </a:spcAft>
-            </a:pPr>
-            <a:r>
-              <a:rPr sz="1000" b="1">
-                <a:solidFill>
-                  <a:srgbClr val="2D6A6E"/>
-                </a:solidFill>
-                <a:latin typeface="Calibri"/>
-              </a:rPr>
-              <a:t>Own 30-day loop</a:t>
-            </a:r>
-          </a:p>
-        </p:txBody>
-      </p:sp>
-      <p:sp>
-        <p:nvSpPr>
-          <p:cNvPr id="25" name="Oval 24"/>
-          <p:cNvSpPr/>
-          <p:nvPr/>
-        </p:nvSpPr>
-        <p:spPr>
-          <a:xfrm>
-            <a:off x="2723083" y="3827678"/>
-            <a:ext cx="146304" cy="146304"/>
-          </a:xfrm>
-          <a:prstGeom prst="ellipse">
-            <a:avLst/>
-          </a:prstGeom>
-          <a:solidFill>
-            <a:srgbClr val="F2A878"/>
-          </a:solidFill>
-          <a:ln w="19050">
-            <a:solidFill>
-              <a:srgbClr val="2D6A6E"/>
-            </a:solidFill>
-          </a:ln>
-          <a:effectLst/>
-        </p:spPr>
-        <p:style>
-          <a:lnRef idx="1">
-            <a:schemeClr val="accent1"/>
-          </a:lnRef>
-          <a:fillRef idx="3">
-            <a:schemeClr val="accent1"/>
-          </a:fillRef>
-          <a:effectRef idx="2">
-            <a:schemeClr val="accent1"/>
-          </a:effectRef>
-          <a:fontRef idx="minor">
-            <a:schemeClr val="lt1"/>
-          </a:fontRef>
-        </p:style>
-        <p:txBody>
-          <a:bodyPr rtlCol="0" anchor="ctr"/>
-          <a:lstStyle/>
-          <a:p>
-            <a:pPr algn="ctr"/>
-          </a:p>
-        </p:txBody>
-      </p:sp>
-      <p:sp>
-        <p:nvSpPr>
-          <p:cNvPr id="26" name="TextBox 25"/>
-          <p:cNvSpPr txBox="1"/>
-          <p:nvPr/>
-        </p:nvSpPr>
-        <p:spPr>
-          <a:xfrm>
-            <a:off x="2924251" y="3763670"/>
-            <a:ext cx="2377440" cy="274320"/>
-          </a:xfrm>
-          <a:prstGeom prst="rect">
-            <a:avLst/>
-          </a:prstGeom>
-          <a:noFill/>
-        </p:spPr>
-        <p:txBody>
-          <a:bodyPr wrap="square" anchor="ctr" lIns="64008" rIns="64008" tIns="27432" bIns="27432">
-            <a:spAutoFit/>
-          </a:bodyPr>
-          <a:lstStyle/>
-          <a:p>
-            <a:pPr algn="l">
-              <a:spcAft>
-                <a:spcPts val="0"/>
-              </a:spcAft>
-            </a:pPr>
-            <a:r>
-              <a:rPr sz="1000" b="1">
-                <a:solidFill>
-                  <a:srgbClr val="2D6A6E"/>
-                </a:solidFill>
-                <a:latin typeface="Calibri"/>
-              </a:rPr>
-              <a:t>Paediatric → generalise</a:t>
-            </a:r>
-          </a:p>
-        </p:txBody>
-      </p:sp>
-      <p:sp>
-        <p:nvSpPr>
-          <p:cNvPr id="27" name="Oval 26"/>
-          <p:cNvSpPr/>
-          <p:nvPr/>
-        </p:nvSpPr>
-        <p:spPr>
-          <a:xfrm>
-            <a:off x="3305556" y="4412894"/>
-            <a:ext cx="146304" cy="146304"/>
-          </a:xfrm>
-          <a:prstGeom prst="ellipse">
-            <a:avLst/>
-          </a:prstGeom>
-          <a:solidFill>
-            <a:srgbClr val="F2A878"/>
-          </a:solidFill>
-          <a:ln w="19050">
-            <a:solidFill>
-              <a:srgbClr val="2D6A6E"/>
-            </a:solidFill>
-          </a:ln>
-          <a:effectLst/>
-        </p:spPr>
-        <p:style>
-          <a:lnRef idx="1">
-            <a:schemeClr val="accent1"/>
-          </a:lnRef>
-          <a:fillRef idx="3">
-            <a:schemeClr val="accent1"/>
-          </a:fillRef>
-          <a:effectRef idx="2">
-            <a:schemeClr val="accent1"/>
-          </a:effectRef>
-          <a:fontRef idx="minor">
-            <a:schemeClr val="lt1"/>
-          </a:fontRef>
-        </p:style>
-        <p:txBody>
-          <a:bodyPr rtlCol="0" anchor="ctr"/>
-          <a:lstStyle/>
-          <a:p>
-            <a:pPr algn="ctr"/>
-          </a:p>
-        </p:txBody>
-      </p:sp>
-      <p:sp>
-        <p:nvSpPr>
-          <p:cNvPr id="28" name="TextBox 27"/>
-          <p:cNvSpPr txBox="1"/>
-          <p:nvPr/>
-        </p:nvSpPr>
-        <p:spPr>
-          <a:xfrm>
-            <a:off x="3506724" y="4348886"/>
-            <a:ext cx="2377440" cy="274320"/>
-          </a:xfrm>
-          <a:prstGeom prst="rect">
-            <a:avLst/>
-          </a:prstGeom>
-          <a:noFill/>
-        </p:spPr>
-        <p:txBody>
-          <a:bodyPr wrap="square" anchor="ctr" lIns="64008" rIns="64008" tIns="27432" bIns="27432">
-            <a:spAutoFit/>
-          </a:bodyPr>
-          <a:lstStyle/>
-          <a:p>
-            <a:pPr algn="l">
-              <a:spcAft>
-                <a:spcPts val="0"/>
-              </a:spcAft>
-            </a:pPr>
-            <a:r>
-              <a:rPr sz="1000" b="1">
-                <a:solidFill>
-                  <a:srgbClr val="2D6A6E"/>
-                </a:solidFill>
-                <a:latin typeface="Calibri"/>
-              </a:rPr>
-              <a:t>UK residency + audit</a:t>
-            </a:r>
-          </a:p>
-        </p:txBody>
-      </p:sp>
-      <p:sp>
-        <p:nvSpPr>
-          <p:cNvPr id="29" name="TextBox 28"/>
-          <p:cNvSpPr txBox="1"/>
-          <p:nvPr/>
-        </p:nvSpPr>
-        <p:spPr>
-          <a:xfrm>
-            <a:off x="6309360" y="2011680"/>
-            <a:ext cx="5468112" cy="228600"/>
-          </a:xfrm>
-          <a:prstGeom prst="rect">
-            <a:avLst/>
-          </a:prstGeom>
-          <a:noFill/>
-        </p:spPr>
-        <p:txBody>
-          <a:bodyPr wrap="square" anchor="t" lIns="64008" rIns="64008" tIns="27432" bIns="27432">
-            <a:spAutoFit/>
-          </a:bodyPr>
-          <a:lstStyle/>
-          <a:p>
-            <a:pPr algn="l">
-              <a:spcAft>
-                <a:spcPts val="0"/>
-              </a:spcAft>
-            </a:pPr>
-            <a:r>
-              <a:rPr sz="1000" b="1">
-                <a:solidFill>
-                  <a:srgbClr val="8A938F"/>
-                </a:solidFill>
-                <a:latin typeface="Calibri"/>
-              </a:rPr>
-              <a:t>SEQUENCED BETS — ranked by impact × feasibility</a:t>
-            </a:r>
-          </a:p>
-        </p:txBody>
-      </p:sp>
-      <p:sp>
-        <p:nvSpPr>
-          <p:cNvPr id="30" name="Rounded Rectangle 29"/>
-          <p:cNvSpPr/>
-          <p:nvPr/>
-        </p:nvSpPr>
-        <p:spPr>
-          <a:xfrm>
-            <a:off x="6309360" y="2331720"/>
-            <a:ext cx="5468112" cy="713232"/>
+            <a:off x="1587500" y="1828800"/>
+            <a:ext cx="1058333" cy="317500"/>
           </a:xfrm>
           <a:prstGeom prst="roundRect">
             <a:avLst>
-              <a:gd name="adj" fmla="val 12820"/>
-            </a:avLst>
-          </a:prstGeom>
-          <a:solidFill>
-            <a:srgbClr val="E3EFEE"/>
-          </a:solidFill>
-          <a:ln>
-            <a:noFill/>
-          </a:ln>
-          <a:effectLst/>
-        </p:spPr>
-        <p:style>
-          <a:lnRef idx="1">
-            <a:schemeClr val="accent1"/>
-          </a:lnRef>
-          <a:fillRef idx="3">
-            <a:schemeClr val="accent1"/>
-          </a:fillRef>
-          <a:effectRef idx="2">
-            <a:schemeClr val="accent1"/>
-          </a:effectRef>
-          <a:fontRef idx="minor">
-            <a:schemeClr val="lt1"/>
-          </a:fontRef>
-        </p:style>
-        <p:txBody>
-          <a:bodyPr rtlCol="0" anchor="ctr"/>
-          <a:lstStyle/>
-          <a:p>
-            <a:pPr algn="ctr"/>
-          </a:p>
-        </p:txBody>
-      </p:sp>
-      <p:sp>
-        <p:nvSpPr>
-          <p:cNvPr id="31" name="TextBox 30"/>
-          <p:cNvSpPr txBox="1"/>
-          <p:nvPr/>
-        </p:nvSpPr>
-        <p:spPr>
-          <a:xfrm>
-            <a:off x="6309360" y="2331720"/>
-            <a:ext cx="5468112" cy="713232"/>
-          </a:xfrm>
-          <a:prstGeom prst="rect">
-            <a:avLst/>
-          </a:prstGeom>
-          <a:noFill/>
-        </p:spPr>
-        <p:txBody>
-          <a:bodyPr wrap="square" anchor="ctr" lIns="64008" rIns="64008" tIns="27432" bIns="27432">
-            <a:normAutofit/>
-          </a:bodyPr>
-          <a:lstStyle/>
-          <a:p>
-            <a:pPr algn="l">
-              <a:spcAft>
-                <a:spcPts val="0"/>
-              </a:spcAft>
-            </a:pPr>
-            <a:r>
-              <a:rPr sz="1150" b="1">
-                <a:solidFill>
-                  <a:srgbClr val="2D6A6E"/>
-                </a:solidFill>
-                <a:latin typeface="Calibri"/>
-              </a:rPr>
-              <a:t>1 · Trust as the moat — clinician sign-off on every AI draft   (Impact H · Effort L–M · DO NOW)</a:t>
-            </a:r>
-          </a:p>
-        </p:txBody>
-      </p:sp>
-      <p:sp>
-        <p:nvSpPr>
-          <p:cNvPr id="32" name="Rounded Rectangle 31"/>
-          <p:cNvSpPr/>
-          <p:nvPr/>
-        </p:nvSpPr>
-        <p:spPr>
-          <a:xfrm>
-            <a:off x="6309360" y="3200400"/>
-            <a:ext cx="5468112" cy="713232"/>
-          </a:xfrm>
-          <a:prstGeom prst="roundRect">
-            <a:avLst>
-              <a:gd name="adj" fmla="val 12820"/>
-            </a:avLst>
-          </a:prstGeom>
-          <a:solidFill>
-            <a:srgbClr val="E3EFEE"/>
-          </a:solidFill>
-          <a:ln>
-            <a:noFill/>
-          </a:ln>
-          <a:effectLst/>
-        </p:spPr>
-        <p:style>
-          <a:lnRef idx="1">
-            <a:schemeClr val="accent1"/>
-          </a:lnRef>
-          <a:fillRef idx="3">
-            <a:schemeClr val="accent1"/>
-          </a:fillRef>
-          <a:effectRef idx="2">
-            <a:schemeClr val="accent1"/>
-          </a:effectRef>
-          <a:fontRef idx="minor">
-            <a:schemeClr val="lt1"/>
-          </a:fontRef>
-        </p:style>
-        <p:txBody>
-          <a:bodyPr rtlCol="0" anchor="ctr"/>
-          <a:lstStyle/>
-          <a:p>
-            <a:pPr algn="ctr"/>
-          </a:p>
-        </p:txBody>
-      </p:sp>
-      <p:sp>
-        <p:nvSpPr>
-          <p:cNvPr id="33" name="TextBox 32"/>
-          <p:cNvSpPr txBox="1"/>
-          <p:nvPr/>
-        </p:nvSpPr>
-        <p:spPr>
-          <a:xfrm>
-            <a:off x="6309360" y="3200400"/>
-            <a:ext cx="5468112" cy="713232"/>
-          </a:xfrm>
-          <a:prstGeom prst="rect">
-            <a:avLst/>
-          </a:prstGeom>
-          <a:noFill/>
-        </p:spPr>
-        <p:txBody>
-          <a:bodyPr wrap="square" anchor="ctr" lIns="64008" rIns="64008" tIns="27432" bIns="27432">
-            <a:normAutofit/>
-          </a:bodyPr>
-          <a:lstStyle/>
-          <a:p>
-            <a:pPr algn="l">
-              <a:spcAft>
-                <a:spcPts val="0"/>
-              </a:spcAft>
-            </a:pPr>
-            <a:r>
-              <a:rPr sz="1150" b="1">
-                <a:solidFill>
-                  <a:srgbClr val="2D6A6E"/>
-                </a:solidFill>
-                <a:latin typeface="Calibri"/>
-              </a:rPr>
-              <a:t>2 · Own the first 30 days as one reviewed loop   (Impact H · Effort M · DO NOW)</a:t>
-            </a:r>
-          </a:p>
-        </p:txBody>
-      </p:sp>
-      <p:sp>
-        <p:nvSpPr>
-          <p:cNvPr id="34" name="Rounded Rectangle 33"/>
-          <p:cNvSpPr/>
-          <p:nvPr/>
-        </p:nvSpPr>
-        <p:spPr>
-          <a:xfrm>
-            <a:off x="6309360" y="4069079"/>
-            <a:ext cx="5468112" cy="713232"/>
-          </a:xfrm>
-          <a:prstGeom prst="roundRect">
-            <a:avLst>
-              <a:gd name="adj" fmla="val 12820"/>
-            </a:avLst>
-          </a:prstGeom>
-          <a:solidFill>
-            <a:srgbClr val="E3EFEE"/>
-          </a:solidFill>
-          <a:ln>
-            <a:noFill/>
-          </a:ln>
-          <a:effectLst/>
-        </p:spPr>
-        <p:style>
-          <a:lnRef idx="1">
-            <a:schemeClr val="accent1"/>
-          </a:lnRef>
-          <a:fillRef idx="3">
-            <a:schemeClr val="accent1"/>
-          </a:fillRef>
-          <a:effectRef idx="2">
-            <a:schemeClr val="accent1"/>
-          </a:effectRef>
-          <a:fontRef idx="minor">
-            <a:schemeClr val="lt1"/>
-          </a:fontRef>
-        </p:style>
-        <p:txBody>
-          <a:bodyPr rtlCol="0" anchor="ctr"/>
-          <a:lstStyle/>
-          <a:p>
-            <a:pPr algn="ctr"/>
-          </a:p>
-        </p:txBody>
-      </p:sp>
-      <p:sp>
-        <p:nvSpPr>
-          <p:cNvPr id="35" name="TextBox 34"/>
-          <p:cNvSpPr txBox="1"/>
-          <p:nvPr/>
-        </p:nvSpPr>
-        <p:spPr>
-          <a:xfrm>
-            <a:off x="6309360" y="4069079"/>
-            <a:ext cx="5468112" cy="713232"/>
-          </a:xfrm>
-          <a:prstGeom prst="rect">
-            <a:avLst/>
-          </a:prstGeom>
-          <a:noFill/>
-        </p:spPr>
-        <p:txBody>
-          <a:bodyPr wrap="square" anchor="ctr" lIns="64008" rIns="64008" tIns="27432" bIns="27432">
-            <a:normAutofit/>
-          </a:bodyPr>
-          <a:lstStyle/>
-          <a:p>
-            <a:pPr algn="l">
-              <a:spcAft>
-                <a:spcPts val="0"/>
-              </a:spcAft>
-            </a:pPr>
-            <a:r>
-              <a:rPr sz="1150" b="1">
-                <a:solidFill>
-                  <a:srgbClr val="2D6A6E"/>
-                </a:solidFill>
-                <a:latin typeface="Calibri"/>
-              </a:rPr>
-              <a:t>3 · UK data residency + audit by construction   (Impact M · Effort M · NOW)</a:t>
-            </a:r>
-          </a:p>
-        </p:txBody>
-      </p:sp>
-      <p:sp>
-        <p:nvSpPr>
-          <p:cNvPr id="36" name="Rounded Rectangle 35"/>
-          <p:cNvSpPr/>
-          <p:nvPr/>
-        </p:nvSpPr>
-        <p:spPr>
-          <a:xfrm>
-            <a:off x="6309360" y="4937759"/>
-            <a:ext cx="5468112" cy="713232"/>
-          </a:xfrm>
-          <a:prstGeom prst="roundRect">
-            <a:avLst>
-              <a:gd name="adj" fmla="val 12820"/>
-            </a:avLst>
-          </a:prstGeom>
-          <a:solidFill>
-            <a:srgbClr val="E3EFEE"/>
-          </a:solidFill>
-          <a:ln>
-            <a:noFill/>
-          </a:ln>
-          <a:effectLst/>
-        </p:spPr>
-        <p:style>
-          <a:lnRef idx="1">
-            <a:schemeClr val="accent1"/>
-          </a:lnRef>
-          <a:fillRef idx="3">
-            <a:schemeClr val="accent1"/>
-          </a:fillRef>
-          <a:effectRef idx="2">
-            <a:schemeClr val="accent1"/>
-          </a:effectRef>
-          <a:fontRef idx="minor">
-            <a:schemeClr val="lt1"/>
-          </a:fontRef>
-        </p:style>
-        <p:txBody>
-          <a:bodyPr rtlCol="0" anchor="ctr"/>
-          <a:lstStyle/>
-          <a:p>
-            <a:pPr algn="ctr"/>
-          </a:p>
-        </p:txBody>
-      </p:sp>
-      <p:sp>
-        <p:nvSpPr>
-          <p:cNvPr id="37" name="TextBox 36"/>
-          <p:cNvSpPr txBox="1"/>
-          <p:nvPr/>
-        </p:nvSpPr>
-        <p:spPr>
-          <a:xfrm>
-            <a:off x="6309360" y="4937759"/>
-            <a:ext cx="5468112" cy="713232"/>
-          </a:xfrm>
-          <a:prstGeom prst="rect">
-            <a:avLst/>
-          </a:prstGeom>
-          <a:noFill/>
-        </p:spPr>
-        <p:txBody>
-          <a:bodyPr wrap="square" anchor="ctr" lIns="64008" rIns="64008" tIns="27432" bIns="27432">
-            <a:normAutofit/>
-          </a:bodyPr>
-          <a:lstStyle/>
-          <a:p>
-            <a:pPr algn="l">
-              <a:spcAft>
-                <a:spcPts val="0"/>
-              </a:spcAft>
-            </a:pPr>
-            <a:r>
-              <a:rPr sz="1150" b="1">
-                <a:solidFill>
-                  <a:srgbClr val="2D6A6E"/>
-                </a:solidFill>
-                <a:latin typeface="Calibri"/>
-              </a:rPr>
-              <a:t>4 · Start paediatric, then generalise across other areas   (Impact H · Effort M · NEXT)</a:t>
-            </a:r>
-          </a:p>
-        </p:txBody>
-      </p:sp>
-    </p:spTree>
-  </p:cSld>
-  <p:clrMapOvr>
-    <a:masterClrMapping/>
-  </p:clrMapOvr>
-</p:sld>
-</file>
-
-<file path=ppt/slides/slide4.xml><?xml version="1.0" encoding="utf-8"?>
-<p:sld xmlns:a="http://schemas.openxmlformats.org/drawingml/2006/main" xmlns:p="http://schemas.openxmlformats.org/presentationml/2006/main" xmlns:r="http://schemas.openxmlformats.org/officeDocument/2006/relationships">
-  <p:cSld>
-    <p:spTree>
-      <p:nvGrpSpPr>
-        <p:cNvPr id="1" name=""/>
-        <p:cNvGrpSpPr/>
-        <p:nvPr/>
-      </p:nvGrpSpPr>
-      <p:grpSpPr/>
-      <p:sp>
-        <p:nvSpPr>
-          <p:cNvPr id="2" name="Rectangle 1"/>
-          <p:cNvSpPr/>
-          <p:nvPr/>
-        </p:nvSpPr>
-        <p:spPr>
-          <a:xfrm>
-            <a:off x="0" y="0"/>
-            <a:ext cx="12191695" cy="6858000"/>
-          </a:xfrm>
-          <a:prstGeom prst="rect">
-            <a:avLst/>
-          </a:prstGeom>
-          <a:solidFill>
-            <a:srgbClr val="FAFAF7"/>
-          </a:solidFill>
-          <a:ln>
-            <a:noFill/>
-          </a:ln>
-          <a:effectLst/>
-        </p:spPr>
-        <p:style>
-          <a:lnRef idx="1">
-            <a:schemeClr val="accent1"/>
-          </a:lnRef>
-          <a:fillRef idx="3">
-            <a:schemeClr val="accent1"/>
-          </a:fillRef>
-          <a:effectRef idx="2">
-            <a:schemeClr val="accent1"/>
-          </a:effectRef>
-          <a:fontRef idx="minor">
-            <a:schemeClr val="lt1"/>
-          </a:fontRef>
-        </p:style>
-        <p:txBody>
-          <a:bodyPr rtlCol="0" anchor="ctr"/>
-          <a:lstStyle/>
-          <a:p>
-            <a:pPr algn="ctr"/>
-          </a:p>
-        </p:txBody>
-      </p:sp>
-      <p:sp>
-        <p:nvSpPr>
-          <p:cNvPr id="3" name="TextBox 2"/>
-          <p:cNvSpPr txBox="1"/>
-          <p:nvPr/>
-        </p:nvSpPr>
-        <p:spPr>
-          <a:xfrm>
-            <a:off x="411480" y="256032"/>
-            <a:ext cx="11365992" cy="502920"/>
-          </a:xfrm>
-          <a:prstGeom prst="rect">
-            <a:avLst/>
-          </a:prstGeom>
-          <a:noFill/>
-        </p:spPr>
-        <p:txBody>
-          <a:bodyPr wrap="square" anchor="ctr" lIns="64008" rIns="64008" tIns="27432" bIns="27432">
-            <a:spAutoFit/>
-          </a:bodyPr>
-          <a:lstStyle/>
-          <a:p>
-            <a:pPr algn="l">
-              <a:spcAft>
-                <a:spcPts val="0"/>
-              </a:spcAft>
-            </a:pPr>
-            <a:r>
-              <a:rPr sz="2400" b="1">
-                <a:solidFill>
-                  <a:srgbClr val="2D6A6E"/>
-                </a:solidFill>
-                <a:latin typeface="Calibri"/>
-              </a:rPr>
-              <a:t>Product view — overview of the proposed solution</a:t>
-            </a:r>
-          </a:p>
-        </p:txBody>
-      </p:sp>
-      <p:sp>
-        <p:nvSpPr>
-          <p:cNvPr id="4" name="TextBox 3"/>
-          <p:cNvSpPr txBox="1"/>
-          <p:nvPr/>
-        </p:nvSpPr>
-        <p:spPr>
-          <a:xfrm>
-            <a:off x="411480" y="749808"/>
-            <a:ext cx="11365992" cy="411480"/>
-          </a:xfrm>
-          <a:prstGeom prst="rect">
-            <a:avLst/>
-          </a:prstGeom>
-          <a:noFill/>
-        </p:spPr>
-        <p:txBody>
-          <a:bodyPr wrap="square" anchor="t" lIns="64008" rIns="64008" tIns="27432" bIns="27432">
-            <a:spAutoFit/>
-          </a:bodyPr>
-          <a:lstStyle/>
-          <a:p>
-            <a:pPr algn="l">
-              <a:spcAft>
-                <a:spcPts val="0"/>
-              </a:spcAft>
-            </a:pPr>
-            <a:r>
-              <a:rPr sz="1200" b="0">
-                <a:solidFill>
-                  <a:srgbClr val="5A6A66"/>
-                </a:solidFill>
-                <a:latin typeface="Calibri"/>
-              </a:rPr>
-              <a:t>The client's first 30 days of care as 9 stages grouped into 5 phases. For each stage: what Sona does for the user, and the surface (family app / portal, clinician web, or background AI) that delivers it.</a:t>
-            </a:r>
-          </a:p>
-        </p:txBody>
-      </p:sp>
-      <p:sp>
-        <p:nvSpPr>
-          <p:cNvPr id="5" name="Rounded Rectangle 4"/>
-          <p:cNvSpPr/>
-          <p:nvPr/>
-        </p:nvSpPr>
-        <p:spPr>
-          <a:xfrm>
-            <a:off x="411480" y="1371600"/>
-            <a:ext cx="1143000" cy="457200"/>
-          </a:xfrm>
-          <a:prstGeom prst="roundRect">
-            <a:avLst>
-              <a:gd name="adj" fmla="val 24000"/>
+              <a:gd name="adj" fmla="val 20000"/>
             </a:avLst>
           </a:prstGeom>
           <a:solidFill>
@@ -7417,14 +6418,14 @@
       </p:sp>
       <p:sp>
         <p:nvSpPr>
-          <p:cNvPr id="6" name="TextBox 5"/>
+          <p:cNvPr id="12" name="TextBox 11"/>
           <p:cNvSpPr txBox="1"/>
           <p:nvPr/>
         </p:nvSpPr>
         <p:spPr>
           <a:xfrm>
-            <a:off x="411480" y="1371600"/>
-            <a:ext cx="1143000" cy="457200"/>
+            <a:off x="1663700" y="1828800"/>
+            <a:ext cx="905933" cy="317500"/>
           </a:xfrm>
           <a:prstGeom prst="rect">
             <a:avLst/>
@@ -7432,7 +6433,7 @@
           <a:noFill/>
         </p:spPr>
         <p:txBody>
-          <a:bodyPr wrap="square" anchor="ctr" lIns="64008" rIns="64008" tIns="27432" bIns="27432">
+          <a:bodyPr wrap="square" anchor="ctr" lIns="25400" rIns="25400" tIns="12700" bIns="12700">
             <a:normAutofit/>
           </a:bodyPr>
           <a:lstStyle/>
@@ -7443,31 +6444,371 @@
               </a:spcAft>
             </a:pPr>
             <a:r>
-              <a:rPr sz="1100" b="1">
+              <a:rPr sz="700" b="1">
                 <a:solidFill>
                   <a:srgbClr val="FFFFFF"/>
                 </a:solidFill>
-                <a:latin typeface="Calibri"/>
+                <a:latin typeface="Inter"/>
               </a:rPr>
-              <a:t>Phase</a:t>
-            </a:r>
-          </a:p>
-        </p:txBody>
-      </p:sp>
-      <p:sp>
-        <p:nvSpPr>
-          <p:cNvPr id="7" name="Rounded Rectangle 6"/>
+              <a:t>Find &amp; enquire</a:t>
+            </a:r>
+          </a:p>
+        </p:txBody>
+      </p:sp>
+      <p:sp>
+        <p:nvSpPr>
+          <p:cNvPr id="13" name="Rounded Rectangle 12"/>
           <p:cNvSpPr/>
           <p:nvPr/>
         </p:nvSpPr>
         <p:spPr>
           <a:xfrm>
-            <a:off x="411480" y="1874519"/>
-            <a:ext cx="1143000" cy="566928"/>
+            <a:off x="2709333" y="1828800"/>
+            <a:ext cx="2180166" cy="317500"/>
           </a:xfrm>
           <a:prstGeom prst="roundRect">
             <a:avLst>
-              <a:gd name="adj" fmla="val 19354"/>
+              <a:gd name="adj" fmla="val 20000"/>
+            </a:avLst>
+          </a:prstGeom>
+          <a:solidFill>
+            <a:srgbClr val="356985"/>
+          </a:solidFill>
+          <a:ln>
+            <a:noFill/>
+          </a:ln>
+          <a:effectLst/>
+        </p:spPr>
+        <p:style>
+          <a:lnRef idx="1">
+            <a:schemeClr val="accent1"/>
+          </a:lnRef>
+          <a:fillRef idx="3">
+            <a:schemeClr val="accent1"/>
+          </a:fillRef>
+          <a:effectRef idx="2">
+            <a:schemeClr val="accent1"/>
+          </a:effectRef>
+          <a:fontRef idx="minor">
+            <a:schemeClr val="lt1"/>
+          </a:fontRef>
+        </p:style>
+        <p:txBody>
+          <a:bodyPr rtlCol="0" anchor="ctr"/>
+          <a:lstStyle/>
+          <a:p>
+            <a:pPr algn="ctr"/>
+          </a:p>
+        </p:txBody>
+      </p:sp>
+      <p:sp>
+        <p:nvSpPr>
+          <p:cNvPr id="14" name="TextBox 13"/>
+          <p:cNvSpPr txBox="1"/>
+          <p:nvPr/>
+        </p:nvSpPr>
+        <p:spPr>
+          <a:xfrm>
+            <a:off x="2785533" y="1828800"/>
+            <a:ext cx="2027766" cy="317500"/>
+          </a:xfrm>
+          <a:prstGeom prst="rect">
+            <a:avLst/>
+          </a:prstGeom>
+          <a:noFill/>
+        </p:spPr>
+        <p:txBody>
+          <a:bodyPr wrap="square" anchor="ctr" lIns="25400" rIns="25400" tIns="12700" bIns="12700">
+            <a:normAutofit/>
+          </a:bodyPr>
+          <a:lstStyle/>
+          <a:p>
+            <a:pPr algn="ctr">
+              <a:spcAft>
+                <a:spcPts val="0"/>
+              </a:spcAft>
+            </a:pPr>
+            <a:r>
+              <a:rPr sz="700" b="1">
+                <a:solidFill>
+                  <a:srgbClr val="FFFFFF"/>
+                </a:solidFill>
+                <a:latin typeface="Inter"/>
+              </a:rPr>
+              <a:t>Understand</a:t>
+            </a:r>
+          </a:p>
+        </p:txBody>
+      </p:sp>
+      <p:sp>
+        <p:nvSpPr>
+          <p:cNvPr id="15" name="Rounded Rectangle 14"/>
+          <p:cNvSpPr/>
+          <p:nvPr/>
+        </p:nvSpPr>
+        <p:spPr>
+          <a:xfrm>
+            <a:off x="4953000" y="1828800"/>
+            <a:ext cx="3302000" cy="317500"/>
+          </a:xfrm>
+          <a:prstGeom prst="roundRect">
+            <a:avLst>
+              <a:gd name="adj" fmla="val 20000"/>
+            </a:avLst>
+          </a:prstGeom>
+          <a:solidFill>
+            <a:srgbClr val="C0703F"/>
+          </a:solidFill>
+          <a:ln>
+            <a:noFill/>
+          </a:ln>
+          <a:effectLst/>
+        </p:spPr>
+        <p:style>
+          <a:lnRef idx="1">
+            <a:schemeClr val="accent1"/>
+          </a:lnRef>
+          <a:fillRef idx="3">
+            <a:schemeClr val="accent1"/>
+          </a:fillRef>
+          <a:effectRef idx="2">
+            <a:schemeClr val="accent1"/>
+          </a:effectRef>
+          <a:fontRef idx="minor">
+            <a:schemeClr val="lt1"/>
+          </a:fontRef>
+        </p:style>
+        <p:txBody>
+          <a:bodyPr rtlCol="0" anchor="ctr"/>
+          <a:lstStyle/>
+          <a:p>
+            <a:pPr algn="ctr"/>
+          </a:p>
+        </p:txBody>
+      </p:sp>
+      <p:sp>
+        <p:nvSpPr>
+          <p:cNvPr id="16" name="TextBox 15"/>
+          <p:cNvSpPr txBox="1"/>
+          <p:nvPr/>
+        </p:nvSpPr>
+        <p:spPr>
+          <a:xfrm>
+            <a:off x="5029200" y="1828800"/>
+            <a:ext cx="3149600" cy="317500"/>
+          </a:xfrm>
+          <a:prstGeom prst="rect">
+            <a:avLst/>
+          </a:prstGeom>
+          <a:noFill/>
+        </p:spPr>
+        <p:txBody>
+          <a:bodyPr wrap="square" anchor="ctr" lIns="25400" rIns="25400" tIns="12700" bIns="12700">
+            <a:normAutofit/>
+          </a:bodyPr>
+          <a:lstStyle/>
+          <a:p>
+            <a:pPr algn="ctr">
+              <a:spcAft>
+                <a:spcPts val="0"/>
+              </a:spcAft>
+            </a:pPr>
+            <a:r>
+              <a:rPr sz="700" b="1">
+                <a:solidFill>
+                  <a:srgbClr val="FFFFFF"/>
+                </a:solidFill>
+                <a:latin typeface="Inter"/>
+              </a:rPr>
+              <a:t>Meet &amp; decide</a:t>
+            </a:r>
+          </a:p>
+        </p:txBody>
+      </p:sp>
+      <p:sp>
+        <p:nvSpPr>
+          <p:cNvPr id="17" name="Rounded Rectangle 16"/>
+          <p:cNvSpPr/>
+          <p:nvPr/>
+        </p:nvSpPr>
+        <p:spPr>
+          <a:xfrm>
+            <a:off x="8318499" y="1828800"/>
+            <a:ext cx="2180166" cy="317500"/>
+          </a:xfrm>
+          <a:prstGeom prst="roundRect">
+            <a:avLst>
+              <a:gd name="adj" fmla="val 20000"/>
+            </a:avLst>
+          </a:prstGeom>
+          <a:solidFill>
+            <a:srgbClr val="6E5A86"/>
+          </a:solidFill>
+          <a:ln>
+            <a:noFill/>
+          </a:ln>
+          <a:effectLst/>
+        </p:spPr>
+        <p:style>
+          <a:lnRef idx="1">
+            <a:schemeClr val="accent1"/>
+          </a:lnRef>
+          <a:fillRef idx="3">
+            <a:schemeClr val="accent1"/>
+          </a:fillRef>
+          <a:effectRef idx="2">
+            <a:schemeClr val="accent1"/>
+          </a:effectRef>
+          <a:fontRef idx="minor">
+            <a:schemeClr val="lt1"/>
+          </a:fontRef>
+        </p:style>
+        <p:txBody>
+          <a:bodyPr rtlCol="0" anchor="ctr"/>
+          <a:lstStyle/>
+          <a:p>
+            <a:pPr algn="ctr"/>
+          </a:p>
+        </p:txBody>
+      </p:sp>
+      <p:sp>
+        <p:nvSpPr>
+          <p:cNvPr id="18" name="TextBox 17"/>
+          <p:cNvSpPr txBox="1"/>
+          <p:nvPr/>
+        </p:nvSpPr>
+        <p:spPr>
+          <a:xfrm>
+            <a:off x="8394700" y="1828800"/>
+            <a:ext cx="2027766" cy="317500"/>
+          </a:xfrm>
+          <a:prstGeom prst="rect">
+            <a:avLst/>
+          </a:prstGeom>
+          <a:noFill/>
+        </p:spPr>
+        <p:txBody>
+          <a:bodyPr wrap="square" anchor="ctr" lIns="25400" rIns="25400" tIns="12700" bIns="12700">
+            <a:normAutofit/>
+          </a:bodyPr>
+          <a:lstStyle/>
+          <a:p>
+            <a:pPr algn="ctr">
+              <a:spcAft>
+                <a:spcPts val="0"/>
+              </a:spcAft>
+            </a:pPr>
+            <a:r>
+              <a:rPr sz="700" b="1">
+                <a:solidFill>
+                  <a:srgbClr val="FFFFFF"/>
+                </a:solidFill>
+                <a:latin typeface="Inter"/>
+              </a:rPr>
+              <a:t>Plan &amp; share</a:t>
+            </a:r>
+          </a:p>
+        </p:txBody>
+      </p:sp>
+      <p:sp>
+        <p:nvSpPr>
+          <p:cNvPr id="19" name="Rounded Rectangle 18"/>
+          <p:cNvSpPr/>
+          <p:nvPr/>
+        </p:nvSpPr>
+        <p:spPr>
+          <a:xfrm>
+            <a:off x="10562166" y="1828800"/>
+            <a:ext cx="1058333" cy="317500"/>
+          </a:xfrm>
+          <a:prstGeom prst="roundRect">
+            <a:avLst>
+              <a:gd name="adj" fmla="val 20000"/>
+            </a:avLst>
+          </a:prstGeom>
+          <a:solidFill>
+            <a:srgbClr val="4C8060"/>
+          </a:solidFill>
+          <a:ln>
+            <a:noFill/>
+          </a:ln>
+          <a:effectLst/>
+        </p:spPr>
+        <p:style>
+          <a:lnRef idx="1">
+            <a:schemeClr val="accent1"/>
+          </a:lnRef>
+          <a:fillRef idx="3">
+            <a:schemeClr val="accent1"/>
+          </a:fillRef>
+          <a:effectRef idx="2">
+            <a:schemeClr val="accent1"/>
+          </a:effectRef>
+          <a:fontRef idx="minor">
+            <a:schemeClr val="lt1"/>
+          </a:fontRef>
+        </p:style>
+        <p:txBody>
+          <a:bodyPr rtlCol="0" anchor="ctr"/>
+          <a:lstStyle/>
+          <a:p>
+            <a:pPr algn="ctr"/>
+          </a:p>
+        </p:txBody>
+      </p:sp>
+      <p:sp>
+        <p:nvSpPr>
+          <p:cNvPr id="20" name="TextBox 19"/>
+          <p:cNvSpPr txBox="1"/>
+          <p:nvPr/>
+        </p:nvSpPr>
+        <p:spPr>
+          <a:xfrm>
+            <a:off x="10638366" y="1828800"/>
+            <a:ext cx="905933" cy="317500"/>
+          </a:xfrm>
+          <a:prstGeom prst="rect">
+            <a:avLst/>
+          </a:prstGeom>
+          <a:noFill/>
+        </p:spPr>
+        <p:txBody>
+          <a:bodyPr wrap="square" anchor="ctr" lIns="25400" rIns="25400" tIns="12700" bIns="12700">
+            <a:normAutofit/>
+          </a:bodyPr>
+          <a:lstStyle/>
+          <a:p>
+            <a:pPr algn="ctr">
+              <a:spcAft>
+                <a:spcPts val="0"/>
+              </a:spcAft>
+            </a:pPr>
+            <a:r>
+              <a:rPr sz="700" b="1">
+                <a:solidFill>
+                  <a:srgbClr val="FFFFFF"/>
+                </a:solidFill>
+                <a:latin typeface="Inter"/>
+              </a:rPr>
+              <a:t>Progress together</a:t>
+            </a:r>
+          </a:p>
+        </p:txBody>
+      </p:sp>
+      <p:sp>
+        <p:nvSpPr>
+          <p:cNvPr id="21" name="Rounded Rectangle 20"/>
+          <p:cNvSpPr/>
+          <p:nvPr/>
+        </p:nvSpPr>
+        <p:spPr>
+          <a:xfrm>
+            <a:off x="1587500" y="2197100"/>
+            <a:ext cx="1058333" cy="381000"/>
+          </a:xfrm>
+          <a:prstGeom prst="roundRect">
+            <a:avLst>
+              <a:gd name="adj" fmla="val 16666"/>
             </a:avLst>
           </a:prstGeom>
           <a:solidFill>
@@ -7502,14 +6843,14 @@
       </p:sp>
       <p:sp>
         <p:nvSpPr>
-          <p:cNvPr id="8" name="TextBox 7"/>
+          <p:cNvPr id="22" name="TextBox 21"/>
           <p:cNvSpPr txBox="1"/>
           <p:nvPr/>
         </p:nvSpPr>
         <p:spPr>
           <a:xfrm>
-            <a:off x="411480" y="1874519"/>
-            <a:ext cx="1143000" cy="566928"/>
+            <a:off x="1625600" y="2197100"/>
+            <a:ext cx="982133" cy="381000"/>
           </a:xfrm>
           <a:prstGeom prst="rect">
             <a:avLst/>
@@ -7517,7 +6858,7 @@
           <a:noFill/>
         </p:spPr>
         <p:txBody>
-          <a:bodyPr wrap="square" anchor="ctr" lIns="64008" rIns="64008" tIns="27432" bIns="27432">
+          <a:bodyPr wrap="square" anchor="ctr" lIns="25400" rIns="25400" tIns="12700" bIns="12700">
             <a:normAutofit/>
           </a:bodyPr>
           <a:lstStyle/>
@@ -7528,35 +6869,35 @@
               </a:spcAft>
             </a:pPr>
             <a:r>
-              <a:rPr sz="1100" b="1">
+              <a:rPr sz="600" b="1">
                 <a:solidFill>
                   <a:srgbClr val="FFFFFF"/>
                 </a:solidFill>
-                <a:latin typeface="Calibri"/>
+                <a:latin typeface="Inter"/>
               </a:rPr>
-              <a:t>Stage</a:t>
-            </a:r>
-          </a:p>
-        </p:txBody>
-      </p:sp>
-      <p:sp>
-        <p:nvSpPr>
-          <p:cNvPr id="9" name="Rounded Rectangle 8"/>
+              <a:t>1 · Referral</a:t>
+            </a:r>
+          </a:p>
+        </p:txBody>
+      </p:sp>
+      <p:sp>
+        <p:nvSpPr>
+          <p:cNvPr id="23" name="Rounded Rectangle 22"/>
           <p:cNvSpPr/>
           <p:nvPr/>
         </p:nvSpPr>
         <p:spPr>
           <a:xfrm>
-            <a:off x="411480" y="2487168"/>
-            <a:ext cx="1143000" cy="1783080"/>
+            <a:off x="1587500" y="2628900"/>
+            <a:ext cx="1058333" cy="1143000"/>
           </a:xfrm>
           <a:prstGeom prst="roundRect">
             <a:avLst>
-              <a:gd name="adj" fmla="val 8000"/>
+              <a:gd name="adj" fmla="val 6000"/>
             </a:avLst>
           </a:prstGeom>
           <a:solidFill>
-            <a:srgbClr val="E7E7E2"/>
+            <a:srgbClr val="DCE9E8"/>
           </a:solidFill>
           <a:ln>
             <a:noFill/>
@@ -7587,14 +6928,14 @@
       </p:sp>
       <p:sp>
         <p:nvSpPr>
-          <p:cNvPr id="10" name="TextBox 9"/>
+          <p:cNvPr id="24" name="TextBox 23"/>
           <p:cNvSpPr txBox="1"/>
           <p:nvPr/>
         </p:nvSpPr>
         <p:spPr>
           <a:xfrm>
-            <a:off x="411480" y="2487168"/>
-            <a:ext cx="1143000" cy="1783080"/>
+            <a:off x="1663700" y="2628900"/>
+            <a:ext cx="905933" cy="1143000"/>
           </a:xfrm>
           <a:prstGeom prst="rect">
             <a:avLst/>
@@ -7602,7 +6943,7 @@
           <a:noFill/>
         </p:spPr>
         <p:txBody>
-          <a:bodyPr wrap="square" anchor="ctr" lIns="64008" rIns="64008" tIns="27432" bIns="27432">
+          <a:bodyPr wrap="square" anchor="ctr" lIns="25400" rIns="25400" tIns="12700" bIns="12700">
             <a:normAutofit/>
           </a:bodyPr>
           <a:lstStyle/>
@@ -7613,35 +6954,35 @@
               </a:spcAft>
             </a:pPr>
             <a:r>
-              <a:rPr sz="1200" b="1">
-                <a:solidFill>
-                  <a:srgbClr val="15302E"/>
-                </a:solidFill>
-                <a:latin typeface="Calibri"/>
+              <a:rPr sz="650" b="0">
+                <a:solidFill>
+                  <a:srgbClr val="142433"/>
+                </a:solidFill>
+                <a:latin typeface="Inter"/>
               </a:rPr>
-              <a:t>What Sona does</a:t>
-            </a:r>
-          </a:p>
-        </p:txBody>
-      </p:sp>
-      <p:sp>
-        <p:nvSpPr>
-          <p:cNvPr id="11" name="Rounded Rectangle 10"/>
+              <a:t>Capture every enquiry — one case record + audit trail.</a:t>
+            </a:r>
+          </a:p>
+        </p:txBody>
+      </p:sp>
+      <p:sp>
+        <p:nvSpPr>
+          <p:cNvPr id="25" name="Rounded Rectangle 24"/>
           <p:cNvSpPr/>
           <p:nvPr/>
         </p:nvSpPr>
         <p:spPr>
           <a:xfrm>
-            <a:off x="411480" y="4315968"/>
-            <a:ext cx="1143000" cy="1325880"/>
+            <a:off x="1587500" y="3822700"/>
+            <a:ext cx="1058333" cy="762000"/>
           </a:xfrm>
           <a:prstGeom prst="roundRect">
             <a:avLst>
-              <a:gd name="adj" fmla="val 8000"/>
+              <a:gd name="adj" fmla="val 8333"/>
             </a:avLst>
           </a:prstGeom>
           <a:solidFill>
-            <a:srgbClr val="E7E7E2"/>
+            <a:srgbClr val="DCE9E8"/>
           </a:solidFill>
           <a:ln>
             <a:noFill/>
@@ -7672,14 +7013,14 @@
       </p:sp>
       <p:sp>
         <p:nvSpPr>
-          <p:cNvPr id="12" name="TextBox 11"/>
+          <p:cNvPr id="26" name="TextBox 25"/>
           <p:cNvSpPr txBox="1"/>
           <p:nvPr/>
         </p:nvSpPr>
         <p:spPr>
           <a:xfrm>
-            <a:off x="411480" y="4315968"/>
-            <a:ext cx="1143000" cy="1325880"/>
+            <a:off x="1663700" y="3822700"/>
+            <a:ext cx="905933" cy="762000"/>
           </a:xfrm>
           <a:prstGeom prst="rect">
             <a:avLst/>
@@ -7687,7 +7028,7 @@
           <a:noFill/>
         </p:spPr>
         <p:txBody>
-          <a:bodyPr wrap="square" anchor="ctr" lIns="64008" rIns="64008" tIns="27432" bIns="27432">
+          <a:bodyPr wrap="square" anchor="ctr" lIns="25400" rIns="25400" tIns="12700" bIns="12700">
             <a:normAutofit/>
           </a:bodyPr>
           <a:lstStyle/>
@@ -7698,116 +7039,31 @@
               </a:spcAft>
             </a:pPr>
             <a:r>
-              <a:rPr sz="1200" b="1">
-                <a:solidFill>
-                  <a:srgbClr val="15302E"/>
-                </a:solidFill>
-                <a:latin typeface="Calibri"/>
+              <a:rPr sz="625" b="0">
+                <a:solidFill>
+                  <a:srgbClr val="142433"/>
+                </a:solidFill>
+                <a:latin typeface="Inter"/>
               </a:rPr>
-              <a:t>Surface / owner</a:t>
-            </a:r>
-          </a:p>
-        </p:txBody>
-      </p:sp>
-      <p:sp>
-        <p:nvSpPr>
-          <p:cNvPr id="13" name="Rounded Rectangle 12"/>
+              <a:t>Clinician web — enquiry queue</a:t>
+            </a:r>
+          </a:p>
+        </p:txBody>
+      </p:sp>
+      <p:sp>
+        <p:nvSpPr>
+          <p:cNvPr id="27" name="Rounded Rectangle 26"/>
           <p:cNvSpPr/>
           <p:nvPr/>
         </p:nvSpPr>
         <p:spPr>
           <a:xfrm>
-            <a:off x="1627632" y="1371600"/>
-            <a:ext cx="1070864" cy="457200"/>
+            <a:off x="2709333" y="2197100"/>
+            <a:ext cx="1058333" cy="381000"/>
           </a:xfrm>
           <a:prstGeom prst="roundRect">
             <a:avLst>
-              <a:gd name="adj" fmla="val 20000"/>
-            </a:avLst>
-          </a:prstGeom>
-          <a:solidFill>
-            <a:srgbClr val="2D6A6E"/>
-          </a:solidFill>
-          <a:ln>
-            <a:noFill/>
-          </a:ln>
-          <a:effectLst/>
-        </p:spPr>
-        <p:style>
-          <a:lnRef idx="1">
-            <a:schemeClr val="accent1"/>
-          </a:lnRef>
-          <a:fillRef idx="3">
-            <a:schemeClr val="accent1"/>
-          </a:fillRef>
-          <a:effectRef idx="2">
-            <a:schemeClr val="accent1"/>
-          </a:effectRef>
-          <a:fontRef idx="minor">
-            <a:schemeClr val="lt1"/>
-          </a:fontRef>
-        </p:style>
-        <p:txBody>
-          <a:bodyPr rtlCol="0" anchor="ctr"/>
-          <a:lstStyle/>
-          <a:p>
-            <a:pPr algn="ctr"/>
-          </a:p>
-        </p:txBody>
-      </p:sp>
-      <p:sp>
-        <p:nvSpPr>
-          <p:cNvPr id="14" name="TextBox 13"/>
-          <p:cNvSpPr txBox="1"/>
-          <p:nvPr/>
-        </p:nvSpPr>
-        <p:spPr>
-          <a:xfrm>
-            <a:off x="1627632" y="1371600"/>
-            <a:ext cx="1070864" cy="457200"/>
-          </a:xfrm>
-          <a:prstGeom prst="rect">
-            <a:avLst/>
-          </a:prstGeom>
-          <a:noFill/>
-        </p:spPr>
-        <p:txBody>
-          <a:bodyPr wrap="square" anchor="ctr" lIns="64008" rIns="64008" tIns="27432" bIns="27432">
-            <a:normAutofit/>
-          </a:bodyPr>
-          <a:lstStyle/>
-          <a:p>
-            <a:pPr algn="ctr">
-              <a:spcAft>
-                <a:spcPts val="0"/>
-              </a:spcAft>
-            </a:pPr>
-            <a:r>
-              <a:rPr sz="1100" b="1">
-                <a:solidFill>
-                  <a:srgbClr val="FFFFFF"/>
-                </a:solidFill>
-                <a:latin typeface="Calibri"/>
-              </a:rPr>
-              <a:t>1 · Find &amp; enquire</a:t>
-            </a:r>
-          </a:p>
-        </p:txBody>
-      </p:sp>
-      <p:sp>
-        <p:nvSpPr>
-          <p:cNvPr id="15" name="Rounded Rectangle 14"/>
-          <p:cNvSpPr/>
-          <p:nvPr/>
-        </p:nvSpPr>
-        <p:spPr>
-          <a:xfrm>
-            <a:off x="2762504" y="1371600"/>
-            <a:ext cx="2205736" cy="457200"/>
-          </a:xfrm>
-          <a:prstGeom prst="roundRect">
-            <a:avLst>
-              <a:gd name="adj" fmla="val 20000"/>
+              <a:gd name="adj" fmla="val 16666"/>
             </a:avLst>
           </a:prstGeom>
           <a:solidFill>
@@ -7842,14 +7098,14 @@
       </p:sp>
       <p:sp>
         <p:nvSpPr>
-          <p:cNvPr id="16" name="TextBox 15"/>
+          <p:cNvPr id="28" name="TextBox 27"/>
           <p:cNvSpPr txBox="1"/>
           <p:nvPr/>
         </p:nvSpPr>
         <p:spPr>
           <a:xfrm>
-            <a:off x="2762504" y="1371600"/>
-            <a:ext cx="2205736" cy="457200"/>
+            <a:off x="2747433" y="2197100"/>
+            <a:ext cx="982133" cy="381000"/>
           </a:xfrm>
           <a:prstGeom prst="rect">
             <a:avLst/>
@@ -7857,7 +7113,7 @@
           <a:noFill/>
         </p:spPr>
         <p:txBody>
-          <a:bodyPr wrap="square" anchor="ctr" lIns="64008" rIns="64008" tIns="27432" bIns="27432">
+          <a:bodyPr wrap="square" anchor="ctr" lIns="25400" rIns="25400" tIns="12700" bIns="12700">
             <a:normAutofit/>
           </a:bodyPr>
           <a:lstStyle/>
@@ -7868,31 +7124,456 @@
               </a:spcAft>
             </a:pPr>
             <a:r>
-              <a:rPr sz="1100" b="1">
+              <a:rPr sz="600" b="1">
                 <a:solidFill>
                   <a:srgbClr val="FFFFFF"/>
                 </a:solidFill>
-                <a:latin typeface="Calibri"/>
+                <a:latin typeface="Inter"/>
               </a:rPr>
-              <a:t>2 · Understand</a:t>
-            </a:r>
-          </a:p>
-        </p:txBody>
-      </p:sp>
-      <p:sp>
-        <p:nvSpPr>
-          <p:cNvPr id="17" name="Rounded Rectangle 16"/>
+              <a:t>2 · Smart intake</a:t>
+            </a:r>
+          </a:p>
+        </p:txBody>
+      </p:sp>
+      <p:sp>
+        <p:nvSpPr>
+          <p:cNvPr id="29" name="Rounded Rectangle 28"/>
           <p:cNvSpPr/>
           <p:nvPr/>
         </p:nvSpPr>
         <p:spPr>
           <a:xfrm>
-            <a:off x="5032248" y="1371600"/>
-            <a:ext cx="3340608" cy="457200"/>
+            <a:off x="2709333" y="2628900"/>
+            <a:ext cx="1058333" cy="1143000"/>
           </a:xfrm>
           <a:prstGeom prst="roundRect">
             <a:avLst>
-              <a:gd name="adj" fmla="val 20000"/>
+              <a:gd name="adj" fmla="val 6000"/>
+            </a:avLst>
+          </a:prstGeom>
+          <a:solidFill>
+            <a:srgbClr val="DCE7EE"/>
+          </a:solidFill>
+          <a:ln>
+            <a:noFill/>
+          </a:ln>
+          <a:effectLst/>
+        </p:spPr>
+        <p:style>
+          <a:lnRef idx="1">
+            <a:schemeClr val="accent1"/>
+          </a:lnRef>
+          <a:fillRef idx="3">
+            <a:schemeClr val="accent1"/>
+          </a:fillRef>
+          <a:effectRef idx="2">
+            <a:schemeClr val="accent1"/>
+          </a:effectRef>
+          <a:fontRef idx="minor">
+            <a:schemeClr val="lt1"/>
+          </a:fontRef>
+        </p:style>
+        <p:txBody>
+          <a:bodyPr rtlCol="0" anchor="ctr"/>
+          <a:lstStyle/>
+          <a:p>
+            <a:pPr algn="ctr"/>
+          </a:p>
+        </p:txBody>
+      </p:sp>
+      <p:sp>
+        <p:nvSpPr>
+          <p:cNvPr id="30" name="TextBox 29"/>
+          <p:cNvSpPr txBox="1"/>
+          <p:nvPr/>
+        </p:nvSpPr>
+        <p:spPr>
+          <a:xfrm>
+            <a:off x="2785533" y="2628900"/>
+            <a:ext cx="905933" cy="1143000"/>
+          </a:xfrm>
+          <a:prstGeom prst="rect">
+            <a:avLst/>
+          </a:prstGeom>
+          <a:noFill/>
+        </p:spPr>
+        <p:txBody>
+          <a:bodyPr wrap="square" anchor="ctr" lIns="25400" rIns="25400" tIns="12700" bIns="12700">
+            <a:normAutofit/>
+          </a:bodyPr>
+          <a:lstStyle/>
+          <a:p>
+            <a:pPr algn="ctr">
+              <a:spcAft>
+                <a:spcPts val="0"/>
+              </a:spcAft>
+            </a:pPr>
+            <a:r>
+              <a:rPr sz="650" b="0">
+                <a:solidFill>
+                  <a:srgbClr val="142433"/>
+                </a:solidFill>
+                <a:latin typeface="Inter"/>
+              </a:rPr>
+              <a:t>Adaptive magic-link intake + live status + consent.</a:t>
+            </a:r>
+          </a:p>
+        </p:txBody>
+      </p:sp>
+      <p:sp>
+        <p:nvSpPr>
+          <p:cNvPr id="31" name="Rounded Rectangle 30"/>
+          <p:cNvSpPr/>
+          <p:nvPr/>
+        </p:nvSpPr>
+        <p:spPr>
+          <a:xfrm>
+            <a:off x="2709333" y="3822700"/>
+            <a:ext cx="1058333" cy="762000"/>
+          </a:xfrm>
+          <a:prstGeom prst="roundRect">
+            <a:avLst>
+              <a:gd name="adj" fmla="val 8333"/>
+            </a:avLst>
+          </a:prstGeom>
+          <a:solidFill>
+            <a:srgbClr val="DCE7EE"/>
+          </a:solidFill>
+          <a:ln>
+            <a:noFill/>
+          </a:ln>
+          <a:effectLst/>
+        </p:spPr>
+        <p:style>
+          <a:lnRef idx="1">
+            <a:schemeClr val="accent1"/>
+          </a:lnRef>
+          <a:fillRef idx="3">
+            <a:schemeClr val="accent1"/>
+          </a:fillRef>
+          <a:effectRef idx="2">
+            <a:schemeClr val="accent1"/>
+          </a:effectRef>
+          <a:fontRef idx="minor">
+            <a:schemeClr val="lt1"/>
+          </a:fontRef>
+        </p:style>
+        <p:txBody>
+          <a:bodyPr rtlCol="0" anchor="ctr"/>
+          <a:lstStyle/>
+          <a:p>
+            <a:pPr algn="ctr"/>
+          </a:p>
+        </p:txBody>
+      </p:sp>
+      <p:sp>
+        <p:nvSpPr>
+          <p:cNvPr id="32" name="TextBox 31"/>
+          <p:cNvSpPr txBox="1"/>
+          <p:nvPr/>
+        </p:nvSpPr>
+        <p:spPr>
+          <a:xfrm>
+            <a:off x="2785533" y="3822700"/>
+            <a:ext cx="905933" cy="762000"/>
+          </a:xfrm>
+          <a:prstGeom prst="rect">
+            <a:avLst/>
+          </a:prstGeom>
+          <a:noFill/>
+        </p:spPr>
+        <p:txBody>
+          <a:bodyPr wrap="square" anchor="ctr" lIns="25400" rIns="25400" tIns="12700" bIns="12700">
+            <a:normAutofit/>
+          </a:bodyPr>
+          <a:lstStyle/>
+          <a:p>
+            <a:pPr algn="ctr">
+              <a:spcAft>
+                <a:spcPts val="0"/>
+              </a:spcAft>
+            </a:pPr>
+            <a:r>
+              <a:rPr sz="625" b="0">
+                <a:solidFill>
+                  <a:srgbClr val="142433"/>
+                </a:solidFill>
+                <a:latin typeface="Inter"/>
+              </a:rPr>
+              <a:t>Family / client portal</a:t>
+            </a:r>
+          </a:p>
+        </p:txBody>
+      </p:sp>
+      <p:sp>
+        <p:nvSpPr>
+          <p:cNvPr id="33" name="Rounded Rectangle 32"/>
+          <p:cNvSpPr/>
+          <p:nvPr/>
+        </p:nvSpPr>
+        <p:spPr>
+          <a:xfrm>
+            <a:off x="3831166" y="2197100"/>
+            <a:ext cx="1058333" cy="381000"/>
+          </a:xfrm>
+          <a:prstGeom prst="roundRect">
+            <a:avLst>
+              <a:gd name="adj" fmla="val 16666"/>
+            </a:avLst>
+          </a:prstGeom>
+          <a:solidFill>
+            <a:srgbClr val="356985"/>
+          </a:solidFill>
+          <a:ln>
+            <a:noFill/>
+          </a:ln>
+          <a:effectLst/>
+        </p:spPr>
+        <p:style>
+          <a:lnRef idx="1">
+            <a:schemeClr val="accent1"/>
+          </a:lnRef>
+          <a:fillRef idx="3">
+            <a:schemeClr val="accent1"/>
+          </a:fillRef>
+          <a:effectRef idx="2">
+            <a:schemeClr val="accent1"/>
+          </a:effectRef>
+          <a:fontRef idx="minor">
+            <a:schemeClr val="lt1"/>
+          </a:fontRef>
+        </p:style>
+        <p:txBody>
+          <a:bodyPr rtlCol="0" anchor="ctr"/>
+          <a:lstStyle/>
+          <a:p>
+            <a:pPr algn="ctr"/>
+          </a:p>
+        </p:txBody>
+      </p:sp>
+      <p:sp>
+        <p:nvSpPr>
+          <p:cNvPr id="34" name="TextBox 33"/>
+          <p:cNvSpPr txBox="1"/>
+          <p:nvPr/>
+        </p:nvSpPr>
+        <p:spPr>
+          <a:xfrm>
+            <a:off x="3869266" y="2197100"/>
+            <a:ext cx="982133" cy="381000"/>
+          </a:xfrm>
+          <a:prstGeom prst="rect">
+            <a:avLst/>
+          </a:prstGeom>
+          <a:noFill/>
+        </p:spPr>
+        <p:txBody>
+          <a:bodyPr wrap="square" anchor="ctr" lIns="25400" rIns="25400" tIns="12700" bIns="12700">
+            <a:normAutofit/>
+          </a:bodyPr>
+          <a:lstStyle/>
+          <a:p>
+            <a:pPr algn="ctr">
+              <a:spcAft>
+                <a:spcPts val="0"/>
+              </a:spcAft>
+            </a:pPr>
+            <a:r>
+              <a:rPr sz="600" b="1">
+                <a:solidFill>
+                  <a:srgbClr val="FFFFFF"/>
+                </a:solidFill>
+                <a:latin typeface="Inter"/>
+              </a:rPr>
+              <a:t>3 · Intake review</a:t>
+            </a:r>
+          </a:p>
+        </p:txBody>
+      </p:sp>
+      <p:sp>
+        <p:nvSpPr>
+          <p:cNvPr id="35" name="Rounded Rectangle 34"/>
+          <p:cNvSpPr/>
+          <p:nvPr/>
+        </p:nvSpPr>
+        <p:spPr>
+          <a:xfrm>
+            <a:off x="3831166" y="2628900"/>
+            <a:ext cx="1058333" cy="1143000"/>
+          </a:xfrm>
+          <a:prstGeom prst="roundRect">
+            <a:avLst>
+              <a:gd name="adj" fmla="val 6000"/>
+            </a:avLst>
+          </a:prstGeom>
+          <a:solidFill>
+            <a:srgbClr val="DCE7EE"/>
+          </a:solidFill>
+          <a:ln>
+            <a:noFill/>
+          </a:ln>
+          <a:effectLst/>
+        </p:spPr>
+        <p:style>
+          <a:lnRef idx="1">
+            <a:schemeClr val="accent1"/>
+          </a:lnRef>
+          <a:fillRef idx="3">
+            <a:schemeClr val="accent1"/>
+          </a:fillRef>
+          <a:effectRef idx="2">
+            <a:schemeClr val="accent1"/>
+          </a:effectRef>
+          <a:fontRef idx="minor">
+            <a:schemeClr val="lt1"/>
+          </a:fontRef>
+        </p:style>
+        <p:txBody>
+          <a:bodyPr rtlCol="0" anchor="ctr"/>
+          <a:lstStyle/>
+          <a:p>
+            <a:pPr algn="ctr"/>
+          </a:p>
+        </p:txBody>
+      </p:sp>
+      <p:sp>
+        <p:nvSpPr>
+          <p:cNvPr id="36" name="TextBox 35"/>
+          <p:cNvSpPr txBox="1"/>
+          <p:nvPr/>
+        </p:nvSpPr>
+        <p:spPr>
+          <a:xfrm>
+            <a:off x="3907366" y="2628900"/>
+            <a:ext cx="905933" cy="1143000"/>
+          </a:xfrm>
+          <a:prstGeom prst="rect">
+            <a:avLst/>
+          </a:prstGeom>
+          <a:noFill/>
+        </p:spPr>
+        <p:txBody>
+          <a:bodyPr wrap="square" anchor="ctr" lIns="25400" rIns="25400" tIns="12700" bIns="12700">
+            <a:normAutofit/>
+          </a:bodyPr>
+          <a:lstStyle/>
+          <a:p>
+            <a:pPr algn="ctr">
+              <a:spcAft>
+                <a:spcPts val="0"/>
+              </a:spcAft>
+            </a:pPr>
+            <a:r>
+              <a:rPr sz="650" b="0">
+                <a:solidFill>
+                  <a:srgbClr val="142433"/>
+                </a:solidFill>
+                <a:latin typeface="Inter"/>
+              </a:rPr>
+              <a:t>One-screen client overview / summary.</a:t>
+            </a:r>
+          </a:p>
+        </p:txBody>
+      </p:sp>
+      <p:sp>
+        <p:nvSpPr>
+          <p:cNvPr id="37" name="Rounded Rectangle 36"/>
+          <p:cNvSpPr/>
+          <p:nvPr/>
+        </p:nvSpPr>
+        <p:spPr>
+          <a:xfrm>
+            <a:off x="3831166" y="3822700"/>
+            <a:ext cx="1058333" cy="762000"/>
+          </a:xfrm>
+          <a:prstGeom prst="roundRect">
+            <a:avLst>
+              <a:gd name="adj" fmla="val 8333"/>
+            </a:avLst>
+          </a:prstGeom>
+          <a:solidFill>
+            <a:srgbClr val="DCE7EE"/>
+          </a:solidFill>
+          <a:ln>
+            <a:noFill/>
+          </a:ln>
+          <a:effectLst/>
+        </p:spPr>
+        <p:style>
+          <a:lnRef idx="1">
+            <a:schemeClr val="accent1"/>
+          </a:lnRef>
+          <a:fillRef idx="3">
+            <a:schemeClr val="accent1"/>
+          </a:fillRef>
+          <a:effectRef idx="2">
+            <a:schemeClr val="accent1"/>
+          </a:effectRef>
+          <a:fontRef idx="minor">
+            <a:schemeClr val="lt1"/>
+          </a:fontRef>
+        </p:style>
+        <p:txBody>
+          <a:bodyPr rtlCol="0" anchor="ctr"/>
+          <a:lstStyle/>
+          <a:p>
+            <a:pPr algn="ctr"/>
+          </a:p>
+        </p:txBody>
+      </p:sp>
+      <p:sp>
+        <p:nvSpPr>
+          <p:cNvPr id="38" name="TextBox 37"/>
+          <p:cNvSpPr txBox="1"/>
+          <p:nvPr/>
+        </p:nvSpPr>
+        <p:spPr>
+          <a:xfrm>
+            <a:off x="3907366" y="3822700"/>
+            <a:ext cx="905933" cy="762000"/>
+          </a:xfrm>
+          <a:prstGeom prst="rect">
+            <a:avLst/>
+          </a:prstGeom>
+          <a:noFill/>
+        </p:spPr>
+        <p:txBody>
+          <a:bodyPr wrap="square" anchor="ctr" lIns="25400" rIns="25400" tIns="12700" bIns="12700">
+            <a:normAutofit/>
+          </a:bodyPr>
+          <a:lstStyle/>
+          <a:p>
+            <a:pPr algn="ctr">
+              <a:spcAft>
+                <a:spcPts val="0"/>
+              </a:spcAft>
+            </a:pPr>
+            <a:r>
+              <a:rPr sz="625" b="0">
+                <a:solidFill>
+                  <a:srgbClr val="142433"/>
+                </a:solidFill>
+                <a:latin typeface="Inter"/>
+              </a:rPr>
+              <a:t>Clinician web</a:t>
+            </a:r>
+          </a:p>
+        </p:txBody>
+      </p:sp>
+      <p:sp>
+        <p:nvSpPr>
+          <p:cNvPr id="39" name="Rounded Rectangle 38"/>
+          <p:cNvSpPr/>
+          <p:nvPr/>
+        </p:nvSpPr>
+        <p:spPr>
+          <a:xfrm>
+            <a:off x="4953000" y="2197100"/>
+            <a:ext cx="1058333" cy="381000"/>
+          </a:xfrm>
+          <a:prstGeom prst="roundRect">
+            <a:avLst>
+              <a:gd name="adj" fmla="val 16666"/>
             </a:avLst>
           </a:prstGeom>
           <a:solidFill>
@@ -7927,14 +7608,14 @@
       </p:sp>
       <p:sp>
         <p:nvSpPr>
-          <p:cNvPr id="18" name="TextBox 17"/>
+          <p:cNvPr id="40" name="TextBox 39"/>
           <p:cNvSpPr txBox="1"/>
           <p:nvPr/>
         </p:nvSpPr>
         <p:spPr>
           <a:xfrm>
-            <a:off x="5032248" y="1371600"/>
-            <a:ext cx="3340608" cy="457200"/>
+            <a:off x="4991100" y="2197100"/>
+            <a:ext cx="982133" cy="381000"/>
           </a:xfrm>
           <a:prstGeom prst="rect">
             <a:avLst/>
@@ -7942,7 +7623,7 @@
           <a:noFill/>
         </p:spPr>
         <p:txBody>
-          <a:bodyPr wrap="square" anchor="ctr" lIns="64008" rIns="64008" tIns="27432" bIns="27432">
+          <a:bodyPr wrap="square" anchor="ctr" lIns="25400" rIns="25400" tIns="12700" bIns="12700">
             <a:normAutofit/>
           </a:bodyPr>
           <a:lstStyle/>
@@ -7953,31 +7634,711 @@
               </a:spcAft>
             </a:pPr>
             <a:r>
-              <a:rPr sz="1100" b="1">
+              <a:rPr sz="600" b="1">
                 <a:solidFill>
                   <a:srgbClr val="FFFFFF"/>
                 </a:solidFill>
-                <a:latin typeface="Calibri"/>
+                <a:latin typeface="Inter"/>
               </a:rPr>
-              <a:t>3 · Meet &amp; decide</a:t>
-            </a:r>
-          </a:p>
-        </p:txBody>
-      </p:sp>
-      <p:sp>
-        <p:nvSpPr>
-          <p:cNvPr id="19" name="Rounded Rectangle 18"/>
+              <a:t>4 · Consult prep</a:t>
+            </a:r>
+          </a:p>
+        </p:txBody>
+      </p:sp>
+      <p:sp>
+        <p:nvSpPr>
+          <p:cNvPr id="41" name="Rounded Rectangle 40"/>
           <p:cNvSpPr/>
           <p:nvPr/>
         </p:nvSpPr>
         <p:spPr>
           <a:xfrm>
-            <a:off x="8436864" y="1371600"/>
-            <a:ext cx="2205736" cy="457200"/>
+            <a:off x="4953000" y="2628900"/>
+            <a:ext cx="1058333" cy="1143000"/>
           </a:xfrm>
           <a:prstGeom prst="roundRect">
             <a:avLst>
-              <a:gd name="adj" fmla="val 20000"/>
+              <a:gd name="adj" fmla="val 6000"/>
+            </a:avLst>
+          </a:prstGeom>
+          <a:solidFill>
+            <a:srgbClr val="F6E5D7"/>
+          </a:solidFill>
+          <a:ln>
+            <a:noFill/>
+          </a:ln>
+          <a:effectLst/>
+        </p:spPr>
+        <p:style>
+          <a:lnRef idx="1">
+            <a:schemeClr val="accent1"/>
+          </a:lnRef>
+          <a:fillRef idx="3">
+            <a:schemeClr val="accent1"/>
+          </a:fillRef>
+          <a:effectRef idx="2">
+            <a:schemeClr val="accent1"/>
+          </a:effectRef>
+          <a:fontRef idx="minor">
+            <a:schemeClr val="lt1"/>
+          </a:fontRef>
+        </p:style>
+        <p:txBody>
+          <a:bodyPr rtlCol="0" anchor="ctr"/>
+          <a:lstStyle/>
+          <a:p>
+            <a:pPr algn="ctr"/>
+          </a:p>
+        </p:txBody>
+      </p:sp>
+      <p:sp>
+        <p:nvSpPr>
+          <p:cNvPr id="42" name="TextBox 41"/>
+          <p:cNvSpPr txBox="1"/>
+          <p:nvPr/>
+        </p:nvSpPr>
+        <p:spPr>
+          <a:xfrm>
+            <a:off x="5029200" y="2628900"/>
+            <a:ext cx="905933" cy="1143000"/>
+          </a:xfrm>
+          <a:prstGeom prst="rect">
+            <a:avLst/>
+          </a:prstGeom>
+          <a:noFill/>
+        </p:spPr>
+        <p:txBody>
+          <a:bodyPr wrap="square" anchor="ctr" lIns="25400" rIns="25400" tIns="12700" bIns="12700">
+            <a:normAutofit/>
+          </a:bodyPr>
+          <a:lstStyle/>
+          <a:p>
+            <a:pPr algn="ctr">
+              <a:spcAft>
+                <a:spcPts val="0"/>
+              </a:spcAft>
+            </a:pPr>
+            <a:r>
+              <a:rPr sz="650" b="0">
+                <a:solidFill>
+                  <a:srgbClr val="142433"/>
+                </a:solidFill>
+                <a:latin typeface="Inter"/>
+              </a:rPr>
+              <a:t>AI prep brief — probes, red flags, references.</a:t>
+            </a:r>
+          </a:p>
+        </p:txBody>
+      </p:sp>
+      <p:sp>
+        <p:nvSpPr>
+          <p:cNvPr id="43" name="Rounded Rectangle 42"/>
+          <p:cNvSpPr/>
+          <p:nvPr/>
+        </p:nvSpPr>
+        <p:spPr>
+          <a:xfrm>
+            <a:off x="4953000" y="3822700"/>
+            <a:ext cx="1058333" cy="762000"/>
+          </a:xfrm>
+          <a:prstGeom prst="roundRect">
+            <a:avLst>
+              <a:gd name="adj" fmla="val 8333"/>
+            </a:avLst>
+          </a:prstGeom>
+          <a:solidFill>
+            <a:srgbClr val="F6E5D7"/>
+          </a:solidFill>
+          <a:ln>
+            <a:noFill/>
+          </a:ln>
+          <a:effectLst/>
+        </p:spPr>
+        <p:style>
+          <a:lnRef idx="1">
+            <a:schemeClr val="accent1"/>
+          </a:lnRef>
+          <a:fillRef idx="3">
+            <a:schemeClr val="accent1"/>
+          </a:fillRef>
+          <a:effectRef idx="2">
+            <a:schemeClr val="accent1"/>
+          </a:effectRef>
+          <a:fontRef idx="minor">
+            <a:schemeClr val="lt1"/>
+          </a:fontRef>
+        </p:style>
+        <p:txBody>
+          <a:bodyPr rtlCol="0" anchor="ctr"/>
+          <a:lstStyle/>
+          <a:p>
+            <a:pPr algn="ctr"/>
+          </a:p>
+        </p:txBody>
+      </p:sp>
+      <p:sp>
+        <p:nvSpPr>
+          <p:cNvPr id="44" name="TextBox 43"/>
+          <p:cNvSpPr txBox="1"/>
+          <p:nvPr/>
+        </p:nvSpPr>
+        <p:spPr>
+          <a:xfrm>
+            <a:off x="5029200" y="3822700"/>
+            <a:ext cx="905933" cy="762000"/>
+          </a:xfrm>
+          <a:prstGeom prst="rect">
+            <a:avLst/>
+          </a:prstGeom>
+          <a:noFill/>
+        </p:spPr>
+        <p:txBody>
+          <a:bodyPr wrap="square" anchor="ctr" lIns="25400" rIns="25400" tIns="12700" bIns="12700">
+            <a:normAutofit/>
+          </a:bodyPr>
+          <a:lstStyle/>
+          <a:p>
+            <a:pPr algn="ctr">
+              <a:spcAft>
+                <a:spcPts val="0"/>
+              </a:spcAft>
+            </a:pPr>
+            <a:r>
+              <a:rPr sz="625" b="0">
+                <a:solidFill>
+                  <a:srgbClr val="142433"/>
+                </a:solidFill>
+                <a:latin typeface="Inter"/>
+              </a:rPr>
+              <a:t>Clinician web + AI</a:t>
+            </a:r>
+          </a:p>
+        </p:txBody>
+      </p:sp>
+      <p:sp>
+        <p:nvSpPr>
+          <p:cNvPr id="45" name="Rounded Rectangle 44"/>
+          <p:cNvSpPr/>
+          <p:nvPr/>
+        </p:nvSpPr>
+        <p:spPr>
+          <a:xfrm>
+            <a:off x="6074833" y="2197100"/>
+            <a:ext cx="1058333" cy="381000"/>
+          </a:xfrm>
+          <a:prstGeom prst="roundRect">
+            <a:avLst>
+              <a:gd name="adj" fmla="val 16666"/>
+            </a:avLst>
+          </a:prstGeom>
+          <a:solidFill>
+            <a:srgbClr val="C0703F"/>
+          </a:solidFill>
+          <a:ln>
+            <a:noFill/>
+          </a:ln>
+          <a:effectLst/>
+        </p:spPr>
+        <p:style>
+          <a:lnRef idx="1">
+            <a:schemeClr val="accent1"/>
+          </a:lnRef>
+          <a:fillRef idx="3">
+            <a:schemeClr val="accent1"/>
+          </a:fillRef>
+          <a:effectRef idx="2">
+            <a:schemeClr val="accent1"/>
+          </a:effectRef>
+          <a:fontRef idx="minor">
+            <a:schemeClr val="lt1"/>
+          </a:fontRef>
+        </p:style>
+        <p:txBody>
+          <a:bodyPr rtlCol="0" anchor="ctr"/>
+          <a:lstStyle/>
+          <a:p>
+            <a:pPr algn="ctr"/>
+          </a:p>
+        </p:txBody>
+      </p:sp>
+      <p:sp>
+        <p:nvSpPr>
+          <p:cNvPr id="46" name="TextBox 45"/>
+          <p:cNvSpPr txBox="1"/>
+          <p:nvPr/>
+        </p:nvSpPr>
+        <p:spPr>
+          <a:xfrm>
+            <a:off x="6112933" y="2197100"/>
+            <a:ext cx="982133" cy="381000"/>
+          </a:xfrm>
+          <a:prstGeom prst="rect">
+            <a:avLst/>
+          </a:prstGeom>
+          <a:noFill/>
+        </p:spPr>
+        <p:txBody>
+          <a:bodyPr wrap="square" anchor="ctr" lIns="25400" rIns="25400" tIns="12700" bIns="12700">
+            <a:normAutofit/>
+          </a:bodyPr>
+          <a:lstStyle/>
+          <a:p>
+            <a:pPr algn="ctr">
+              <a:spcAft>
+                <a:spcPts val="0"/>
+              </a:spcAft>
+            </a:pPr>
+            <a:r>
+              <a:rPr sz="600" b="1">
+                <a:solidFill>
+                  <a:srgbClr val="FFFFFF"/>
+                </a:solidFill>
+                <a:latin typeface="Inter"/>
+              </a:rPr>
+              <a:t>5 · Consultation</a:t>
+            </a:r>
+          </a:p>
+        </p:txBody>
+      </p:sp>
+      <p:sp>
+        <p:nvSpPr>
+          <p:cNvPr id="47" name="Rounded Rectangle 46"/>
+          <p:cNvSpPr/>
+          <p:nvPr/>
+        </p:nvSpPr>
+        <p:spPr>
+          <a:xfrm>
+            <a:off x="6074833" y="2628900"/>
+            <a:ext cx="1058333" cy="1143000"/>
+          </a:xfrm>
+          <a:prstGeom prst="roundRect">
+            <a:avLst>
+              <a:gd name="adj" fmla="val 6000"/>
+            </a:avLst>
+          </a:prstGeom>
+          <a:solidFill>
+            <a:srgbClr val="F6E5D7"/>
+          </a:solidFill>
+          <a:ln>
+            <a:noFill/>
+          </a:ln>
+          <a:effectLst/>
+        </p:spPr>
+        <p:style>
+          <a:lnRef idx="1">
+            <a:schemeClr val="accent1"/>
+          </a:lnRef>
+          <a:fillRef idx="3">
+            <a:schemeClr val="accent1"/>
+          </a:fillRef>
+          <a:effectRef idx="2">
+            <a:schemeClr val="accent1"/>
+          </a:effectRef>
+          <a:fontRef idx="minor">
+            <a:schemeClr val="lt1"/>
+          </a:fontRef>
+        </p:style>
+        <p:txBody>
+          <a:bodyPr rtlCol="0" anchor="ctr"/>
+          <a:lstStyle/>
+          <a:p>
+            <a:pPr algn="ctr"/>
+          </a:p>
+        </p:txBody>
+      </p:sp>
+      <p:sp>
+        <p:nvSpPr>
+          <p:cNvPr id="48" name="TextBox 47"/>
+          <p:cNvSpPr txBox="1"/>
+          <p:nvPr/>
+        </p:nvSpPr>
+        <p:spPr>
+          <a:xfrm>
+            <a:off x="6151033" y="2628900"/>
+            <a:ext cx="905933" cy="1143000"/>
+          </a:xfrm>
+          <a:prstGeom prst="rect">
+            <a:avLst/>
+          </a:prstGeom>
+          <a:noFill/>
+        </p:spPr>
+        <p:txBody>
+          <a:bodyPr wrap="square" anchor="ctr" lIns="25400" rIns="25400" tIns="12700" bIns="12700">
+            <a:normAutofit/>
+          </a:bodyPr>
+          <a:lstStyle/>
+          <a:p>
+            <a:pPr algn="ctr">
+              <a:spcAft>
+                <a:spcPts val="0"/>
+              </a:spcAft>
+            </a:pPr>
+            <a:r>
+              <a:rPr sz="650" b="0">
+                <a:solidFill>
+                  <a:srgbClr val="142433"/>
+                </a:solidFill>
+                <a:latin typeface="Inter"/>
+              </a:rPr>
+              <a:t>Schedule the consult + calendar / video links.</a:t>
+            </a:r>
+          </a:p>
+        </p:txBody>
+      </p:sp>
+      <p:sp>
+        <p:nvSpPr>
+          <p:cNvPr id="49" name="Rounded Rectangle 48"/>
+          <p:cNvSpPr/>
+          <p:nvPr/>
+        </p:nvSpPr>
+        <p:spPr>
+          <a:xfrm>
+            <a:off x="6074833" y="3822700"/>
+            <a:ext cx="1058333" cy="762000"/>
+          </a:xfrm>
+          <a:prstGeom prst="roundRect">
+            <a:avLst>
+              <a:gd name="adj" fmla="val 8333"/>
+            </a:avLst>
+          </a:prstGeom>
+          <a:solidFill>
+            <a:srgbClr val="F6E5D7"/>
+          </a:solidFill>
+          <a:ln>
+            <a:noFill/>
+          </a:ln>
+          <a:effectLst/>
+        </p:spPr>
+        <p:style>
+          <a:lnRef idx="1">
+            <a:schemeClr val="accent1"/>
+          </a:lnRef>
+          <a:fillRef idx="3">
+            <a:schemeClr val="accent1"/>
+          </a:fillRef>
+          <a:effectRef idx="2">
+            <a:schemeClr val="accent1"/>
+          </a:effectRef>
+          <a:fontRef idx="minor">
+            <a:schemeClr val="lt1"/>
+          </a:fontRef>
+        </p:style>
+        <p:txBody>
+          <a:bodyPr rtlCol="0" anchor="ctr"/>
+          <a:lstStyle/>
+          <a:p>
+            <a:pPr algn="ctr"/>
+          </a:p>
+        </p:txBody>
+      </p:sp>
+      <p:sp>
+        <p:nvSpPr>
+          <p:cNvPr id="50" name="TextBox 49"/>
+          <p:cNvSpPr txBox="1"/>
+          <p:nvPr/>
+        </p:nvSpPr>
+        <p:spPr>
+          <a:xfrm>
+            <a:off x="6151033" y="3822700"/>
+            <a:ext cx="905933" cy="762000"/>
+          </a:xfrm>
+          <a:prstGeom prst="rect">
+            <a:avLst/>
+          </a:prstGeom>
+          <a:noFill/>
+        </p:spPr>
+        <p:txBody>
+          <a:bodyPr wrap="square" anchor="ctr" lIns="25400" rIns="25400" tIns="12700" bIns="12700">
+            <a:normAutofit/>
+          </a:bodyPr>
+          <a:lstStyle/>
+          <a:p>
+            <a:pPr algn="ctr">
+              <a:spcAft>
+                <a:spcPts val="0"/>
+              </a:spcAft>
+            </a:pPr>
+            <a:r>
+              <a:rPr sz="625" b="0">
+                <a:solidFill>
+                  <a:srgbClr val="142433"/>
+                </a:solidFill>
+                <a:latin typeface="Inter"/>
+              </a:rPr>
+              <a:t>Clinician web + calendar / video</a:t>
+            </a:r>
+          </a:p>
+        </p:txBody>
+      </p:sp>
+      <p:sp>
+        <p:nvSpPr>
+          <p:cNvPr id="51" name="Rounded Rectangle 50"/>
+          <p:cNvSpPr/>
+          <p:nvPr/>
+        </p:nvSpPr>
+        <p:spPr>
+          <a:xfrm>
+            <a:off x="7196666" y="2197100"/>
+            <a:ext cx="1058333" cy="381000"/>
+          </a:xfrm>
+          <a:prstGeom prst="roundRect">
+            <a:avLst>
+              <a:gd name="adj" fmla="val 16666"/>
+            </a:avLst>
+          </a:prstGeom>
+          <a:solidFill>
+            <a:srgbClr val="C0703F"/>
+          </a:solidFill>
+          <a:ln>
+            <a:noFill/>
+          </a:ln>
+          <a:effectLst/>
+        </p:spPr>
+        <p:style>
+          <a:lnRef idx="1">
+            <a:schemeClr val="accent1"/>
+          </a:lnRef>
+          <a:fillRef idx="3">
+            <a:schemeClr val="accent1"/>
+          </a:fillRef>
+          <a:effectRef idx="2">
+            <a:schemeClr val="accent1"/>
+          </a:effectRef>
+          <a:fontRef idx="minor">
+            <a:schemeClr val="lt1"/>
+          </a:fontRef>
+        </p:style>
+        <p:txBody>
+          <a:bodyPr rtlCol="0" anchor="ctr"/>
+          <a:lstStyle/>
+          <a:p>
+            <a:pPr algn="ctr"/>
+          </a:p>
+        </p:txBody>
+      </p:sp>
+      <p:sp>
+        <p:nvSpPr>
+          <p:cNvPr id="52" name="TextBox 51"/>
+          <p:cNvSpPr txBox="1"/>
+          <p:nvPr/>
+        </p:nvSpPr>
+        <p:spPr>
+          <a:xfrm>
+            <a:off x="7234766" y="2197100"/>
+            <a:ext cx="982133" cy="381000"/>
+          </a:xfrm>
+          <a:prstGeom prst="rect">
+            <a:avLst/>
+          </a:prstGeom>
+          <a:noFill/>
+        </p:spPr>
+        <p:txBody>
+          <a:bodyPr wrap="square" anchor="ctr" lIns="25400" rIns="25400" tIns="12700" bIns="12700">
+            <a:normAutofit/>
+          </a:bodyPr>
+          <a:lstStyle/>
+          <a:p>
+            <a:pPr algn="ctr">
+              <a:spcAft>
+                <a:spcPts val="0"/>
+              </a:spcAft>
+            </a:pPr>
+            <a:r>
+              <a:rPr sz="600" b="1">
+                <a:solidFill>
+                  <a:srgbClr val="FFFFFF"/>
+                </a:solidFill>
+                <a:latin typeface="Inter"/>
+              </a:rPr>
+              <a:t>6 · Triage</a:t>
+            </a:r>
+          </a:p>
+        </p:txBody>
+      </p:sp>
+      <p:sp>
+        <p:nvSpPr>
+          <p:cNvPr id="53" name="Rounded Rectangle 52"/>
+          <p:cNvSpPr/>
+          <p:nvPr/>
+        </p:nvSpPr>
+        <p:spPr>
+          <a:xfrm>
+            <a:off x="7196666" y="2628900"/>
+            <a:ext cx="1058333" cy="1143000"/>
+          </a:xfrm>
+          <a:prstGeom prst="roundRect">
+            <a:avLst>
+              <a:gd name="adj" fmla="val 6000"/>
+            </a:avLst>
+          </a:prstGeom>
+          <a:solidFill>
+            <a:srgbClr val="F6E5D7"/>
+          </a:solidFill>
+          <a:ln>
+            <a:noFill/>
+          </a:ln>
+          <a:effectLst/>
+        </p:spPr>
+        <p:style>
+          <a:lnRef idx="1">
+            <a:schemeClr val="accent1"/>
+          </a:lnRef>
+          <a:fillRef idx="3">
+            <a:schemeClr val="accent1"/>
+          </a:fillRef>
+          <a:effectRef idx="2">
+            <a:schemeClr val="accent1"/>
+          </a:effectRef>
+          <a:fontRef idx="minor">
+            <a:schemeClr val="lt1"/>
+          </a:fontRef>
+        </p:style>
+        <p:txBody>
+          <a:bodyPr rtlCol="0" anchor="ctr"/>
+          <a:lstStyle/>
+          <a:p>
+            <a:pPr algn="ctr"/>
+          </a:p>
+        </p:txBody>
+      </p:sp>
+      <p:sp>
+        <p:nvSpPr>
+          <p:cNvPr id="54" name="TextBox 53"/>
+          <p:cNvSpPr txBox="1"/>
+          <p:nvPr/>
+        </p:nvSpPr>
+        <p:spPr>
+          <a:xfrm>
+            <a:off x="7272866" y="2628900"/>
+            <a:ext cx="905933" cy="1143000"/>
+          </a:xfrm>
+          <a:prstGeom prst="rect">
+            <a:avLst/>
+          </a:prstGeom>
+          <a:noFill/>
+        </p:spPr>
+        <p:txBody>
+          <a:bodyPr wrap="square" anchor="ctr" lIns="25400" rIns="25400" tIns="12700" bIns="12700">
+            <a:normAutofit/>
+          </a:bodyPr>
+          <a:lstStyle/>
+          <a:p>
+            <a:pPr algn="ctr">
+              <a:spcAft>
+                <a:spcPts val="0"/>
+              </a:spcAft>
+            </a:pPr>
+            <a:r>
+              <a:rPr sz="650" b="0">
+                <a:solidFill>
+                  <a:srgbClr val="142433"/>
+                </a:solidFill>
+                <a:latin typeface="Inter"/>
+              </a:rPr>
+              <a:t>Capture triage outcome + rationale.</a:t>
+            </a:r>
+          </a:p>
+        </p:txBody>
+      </p:sp>
+      <p:sp>
+        <p:nvSpPr>
+          <p:cNvPr id="55" name="Rounded Rectangle 54"/>
+          <p:cNvSpPr/>
+          <p:nvPr/>
+        </p:nvSpPr>
+        <p:spPr>
+          <a:xfrm>
+            <a:off x="7196666" y="3822700"/>
+            <a:ext cx="1058333" cy="762000"/>
+          </a:xfrm>
+          <a:prstGeom prst="roundRect">
+            <a:avLst>
+              <a:gd name="adj" fmla="val 8333"/>
+            </a:avLst>
+          </a:prstGeom>
+          <a:solidFill>
+            <a:srgbClr val="F6E5D7"/>
+          </a:solidFill>
+          <a:ln>
+            <a:noFill/>
+          </a:ln>
+          <a:effectLst/>
+        </p:spPr>
+        <p:style>
+          <a:lnRef idx="1">
+            <a:schemeClr val="accent1"/>
+          </a:lnRef>
+          <a:fillRef idx="3">
+            <a:schemeClr val="accent1"/>
+          </a:fillRef>
+          <a:effectRef idx="2">
+            <a:schemeClr val="accent1"/>
+          </a:effectRef>
+          <a:fontRef idx="minor">
+            <a:schemeClr val="lt1"/>
+          </a:fontRef>
+        </p:style>
+        <p:txBody>
+          <a:bodyPr rtlCol="0" anchor="ctr"/>
+          <a:lstStyle/>
+          <a:p>
+            <a:pPr algn="ctr"/>
+          </a:p>
+        </p:txBody>
+      </p:sp>
+      <p:sp>
+        <p:nvSpPr>
+          <p:cNvPr id="56" name="TextBox 55"/>
+          <p:cNvSpPr txBox="1"/>
+          <p:nvPr/>
+        </p:nvSpPr>
+        <p:spPr>
+          <a:xfrm>
+            <a:off x="7272866" y="3822700"/>
+            <a:ext cx="905933" cy="762000"/>
+          </a:xfrm>
+          <a:prstGeom prst="rect">
+            <a:avLst/>
+          </a:prstGeom>
+          <a:noFill/>
+        </p:spPr>
+        <p:txBody>
+          <a:bodyPr wrap="square" anchor="ctr" lIns="25400" rIns="25400" tIns="12700" bIns="12700">
+            <a:normAutofit/>
+          </a:bodyPr>
+          <a:lstStyle/>
+          <a:p>
+            <a:pPr algn="ctr">
+              <a:spcAft>
+                <a:spcPts val="0"/>
+              </a:spcAft>
+            </a:pPr>
+            <a:r>
+              <a:rPr sz="625" b="0">
+                <a:solidFill>
+                  <a:srgbClr val="142433"/>
+                </a:solidFill>
+                <a:latin typeface="Inter"/>
+              </a:rPr>
+              <a:t>Clinician web — triage</a:t>
+            </a:r>
+          </a:p>
+        </p:txBody>
+      </p:sp>
+      <p:sp>
+        <p:nvSpPr>
+          <p:cNvPr id="57" name="Rounded Rectangle 56"/>
+          <p:cNvSpPr/>
+          <p:nvPr/>
+        </p:nvSpPr>
+        <p:spPr>
+          <a:xfrm>
+            <a:off x="8318499" y="2197100"/>
+            <a:ext cx="1058333" cy="381000"/>
+          </a:xfrm>
+          <a:prstGeom prst="roundRect">
+            <a:avLst>
+              <a:gd name="adj" fmla="val 16666"/>
             </a:avLst>
           </a:prstGeom>
           <a:solidFill>
@@ -8012,14 +8373,14 @@
       </p:sp>
       <p:sp>
         <p:nvSpPr>
-          <p:cNvPr id="20" name="TextBox 19"/>
+          <p:cNvPr id="58" name="TextBox 57"/>
           <p:cNvSpPr txBox="1"/>
           <p:nvPr/>
         </p:nvSpPr>
         <p:spPr>
           <a:xfrm>
-            <a:off x="8436864" y="1371600"/>
-            <a:ext cx="2205736" cy="457200"/>
+            <a:off x="8356600" y="2197100"/>
+            <a:ext cx="982133" cy="381000"/>
           </a:xfrm>
           <a:prstGeom prst="rect">
             <a:avLst/>
@@ -8027,7 +8388,7 @@
           <a:noFill/>
         </p:spPr>
         <p:txBody>
-          <a:bodyPr wrap="square" anchor="ctr" lIns="64008" rIns="64008" tIns="27432" bIns="27432">
+          <a:bodyPr wrap="square" anchor="ctr" lIns="25400" rIns="25400" tIns="12700" bIns="12700">
             <a:normAutofit/>
           </a:bodyPr>
           <a:lstStyle/>
@@ -8038,31 +8399,456 @@
               </a:spcAft>
             </a:pPr>
             <a:r>
-              <a:rPr sz="1100" b="1">
+              <a:rPr sz="600" b="1">
                 <a:solidFill>
                   <a:srgbClr val="FFFFFF"/>
                 </a:solidFill>
-                <a:latin typeface="Calibri"/>
+                <a:latin typeface="Inter"/>
               </a:rPr>
-              <a:t>4 · Plan &amp; share</a:t>
-            </a:r>
-          </a:p>
-        </p:txBody>
-      </p:sp>
-      <p:sp>
-        <p:nvSpPr>
-          <p:cNvPr id="21" name="Rounded Rectangle 20"/>
+              <a:t>7 · Session plan</a:t>
+            </a:r>
+          </a:p>
+        </p:txBody>
+      </p:sp>
+      <p:sp>
+        <p:nvSpPr>
+          <p:cNvPr id="59" name="Rounded Rectangle 58"/>
           <p:cNvSpPr/>
           <p:nvPr/>
         </p:nvSpPr>
         <p:spPr>
           <a:xfrm>
-            <a:off x="10706608" y="1371600"/>
-            <a:ext cx="1070864" cy="457200"/>
+            <a:off x="8318499" y="2628900"/>
+            <a:ext cx="1058333" cy="1143000"/>
           </a:xfrm>
           <a:prstGeom prst="roundRect">
             <a:avLst>
-              <a:gd name="adj" fmla="val 20000"/>
+              <a:gd name="adj" fmla="val 6000"/>
+            </a:avLst>
+          </a:prstGeom>
+          <a:solidFill>
+            <a:srgbClr val="E8E2F0"/>
+          </a:solidFill>
+          <a:ln>
+            <a:noFill/>
+          </a:ln>
+          <a:effectLst/>
+        </p:spPr>
+        <p:style>
+          <a:lnRef idx="1">
+            <a:schemeClr val="accent1"/>
+          </a:lnRef>
+          <a:fillRef idx="3">
+            <a:schemeClr val="accent1"/>
+          </a:fillRef>
+          <a:effectRef idx="2">
+            <a:schemeClr val="accent1"/>
+          </a:effectRef>
+          <a:fontRef idx="minor">
+            <a:schemeClr val="lt1"/>
+          </a:fontRef>
+        </p:style>
+        <p:txBody>
+          <a:bodyPr rtlCol="0" anchor="ctr"/>
+          <a:lstStyle/>
+          <a:p>
+            <a:pPr algn="ctr"/>
+          </a:p>
+        </p:txBody>
+      </p:sp>
+      <p:sp>
+        <p:nvSpPr>
+          <p:cNvPr id="60" name="TextBox 59"/>
+          <p:cNvSpPr txBox="1"/>
+          <p:nvPr/>
+        </p:nvSpPr>
+        <p:spPr>
+          <a:xfrm>
+            <a:off x="8394700" y="2628900"/>
+            <a:ext cx="905933" cy="1143000"/>
+          </a:xfrm>
+          <a:prstGeom prst="rect">
+            <a:avLst/>
+          </a:prstGeom>
+          <a:noFill/>
+        </p:spPr>
+        <p:txBody>
+          <a:bodyPr wrap="square" anchor="ctr" lIns="25400" rIns="25400" tIns="12700" bIns="12700">
+            <a:normAutofit/>
+          </a:bodyPr>
+          <a:lstStyle/>
+          <a:p>
+            <a:pPr algn="ctr">
+              <a:spcAft>
+                <a:spcPts val="0"/>
+              </a:spcAft>
+            </a:pPr>
+            <a:r>
+              <a:rPr sz="650" b="0">
+                <a:solidFill>
+                  <a:srgbClr val="142433"/>
+                </a:solidFill>
+                <a:latin typeface="Inter"/>
+              </a:rPr>
+              <a:t>AI-drafted, clinician-edited session plan.</a:t>
+            </a:r>
+          </a:p>
+        </p:txBody>
+      </p:sp>
+      <p:sp>
+        <p:nvSpPr>
+          <p:cNvPr id="61" name="Rounded Rectangle 60"/>
+          <p:cNvSpPr/>
+          <p:nvPr/>
+        </p:nvSpPr>
+        <p:spPr>
+          <a:xfrm>
+            <a:off x="8318499" y="3822700"/>
+            <a:ext cx="1058333" cy="762000"/>
+          </a:xfrm>
+          <a:prstGeom prst="roundRect">
+            <a:avLst>
+              <a:gd name="adj" fmla="val 8333"/>
+            </a:avLst>
+          </a:prstGeom>
+          <a:solidFill>
+            <a:srgbClr val="E8E2F0"/>
+          </a:solidFill>
+          <a:ln>
+            <a:noFill/>
+          </a:ln>
+          <a:effectLst/>
+        </p:spPr>
+        <p:style>
+          <a:lnRef idx="1">
+            <a:schemeClr val="accent1"/>
+          </a:lnRef>
+          <a:fillRef idx="3">
+            <a:schemeClr val="accent1"/>
+          </a:fillRef>
+          <a:effectRef idx="2">
+            <a:schemeClr val="accent1"/>
+          </a:effectRef>
+          <a:fontRef idx="minor">
+            <a:schemeClr val="lt1"/>
+          </a:fontRef>
+        </p:style>
+        <p:txBody>
+          <a:bodyPr rtlCol="0" anchor="ctr"/>
+          <a:lstStyle/>
+          <a:p>
+            <a:pPr algn="ctr"/>
+          </a:p>
+        </p:txBody>
+      </p:sp>
+      <p:sp>
+        <p:nvSpPr>
+          <p:cNvPr id="62" name="TextBox 61"/>
+          <p:cNvSpPr txBox="1"/>
+          <p:nvPr/>
+        </p:nvSpPr>
+        <p:spPr>
+          <a:xfrm>
+            <a:off x="8394700" y="3822700"/>
+            <a:ext cx="905933" cy="762000"/>
+          </a:xfrm>
+          <a:prstGeom prst="rect">
+            <a:avLst/>
+          </a:prstGeom>
+          <a:noFill/>
+        </p:spPr>
+        <p:txBody>
+          <a:bodyPr wrap="square" anchor="ctr" lIns="25400" rIns="25400" tIns="12700" bIns="12700">
+            <a:normAutofit/>
+          </a:bodyPr>
+          <a:lstStyle/>
+          <a:p>
+            <a:pPr algn="ctr">
+              <a:spcAft>
+                <a:spcPts val="0"/>
+              </a:spcAft>
+            </a:pPr>
+            <a:r>
+              <a:rPr sz="625" b="0">
+                <a:solidFill>
+                  <a:srgbClr val="142433"/>
+                </a:solidFill>
+                <a:latin typeface="Inter"/>
+              </a:rPr>
+              <a:t>Clinician web + AI</a:t>
+            </a:r>
+          </a:p>
+        </p:txBody>
+      </p:sp>
+      <p:sp>
+        <p:nvSpPr>
+          <p:cNvPr id="63" name="Rounded Rectangle 62"/>
+          <p:cNvSpPr/>
+          <p:nvPr/>
+        </p:nvSpPr>
+        <p:spPr>
+          <a:xfrm>
+            <a:off x="9440333" y="2197100"/>
+            <a:ext cx="1058333" cy="381000"/>
+          </a:xfrm>
+          <a:prstGeom prst="roundRect">
+            <a:avLst>
+              <a:gd name="adj" fmla="val 16666"/>
+            </a:avLst>
+          </a:prstGeom>
+          <a:solidFill>
+            <a:srgbClr val="6E5A86"/>
+          </a:solidFill>
+          <a:ln>
+            <a:noFill/>
+          </a:ln>
+          <a:effectLst/>
+        </p:spPr>
+        <p:style>
+          <a:lnRef idx="1">
+            <a:schemeClr val="accent1"/>
+          </a:lnRef>
+          <a:fillRef idx="3">
+            <a:schemeClr val="accent1"/>
+          </a:fillRef>
+          <a:effectRef idx="2">
+            <a:schemeClr val="accent1"/>
+          </a:effectRef>
+          <a:fontRef idx="minor">
+            <a:schemeClr val="lt1"/>
+          </a:fontRef>
+        </p:style>
+        <p:txBody>
+          <a:bodyPr rtlCol="0" anchor="ctr"/>
+          <a:lstStyle/>
+          <a:p>
+            <a:pPr algn="ctr"/>
+          </a:p>
+        </p:txBody>
+      </p:sp>
+      <p:sp>
+        <p:nvSpPr>
+          <p:cNvPr id="64" name="TextBox 63"/>
+          <p:cNvSpPr txBox="1"/>
+          <p:nvPr/>
+        </p:nvSpPr>
+        <p:spPr>
+          <a:xfrm>
+            <a:off x="9478433" y="2197100"/>
+            <a:ext cx="982133" cy="381000"/>
+          </a:xfrm>
+          <a:prstGeom prst="rect">
+            <a:avLst/>
+          </a:prstGeom>
+          <a:noFill/>
+        </p:spPr>
+        <p:txBody>
+          <a:bodyPr wrap="square" anchor="ctr" lIns="25400" rIns="25400" tIns="12700" bIns="12700">
+            <a:normAutofit/>
+          </a:bodyPr>
+          <a:lstStyle/>
+          <a:p>
+            <a:pPr algn="ctr">
+              <a:spcAft>
+                <a:spcPts val="0"/>
+              </a:spcAft>
+            </a:pPr>
+            <a:r>
+              <a:rPr sz="600" b="1">
+                <a:solidFill>
+                  <a:srgbClr val="FFFFFF"/>
+                </a:solidFill>
+                <a:latin typeface="Inter"/>
+              </a:rPr>
+              <a:t>8 · Family summary</a:t>
+            </a:r>
+          </a:p>
+        </p:txBody>
+      </p:sp>
+      <p:sp>
+        <p:nvSpPr>
+          <p:cNvPr id="65" name="Rounded Rectangle 64"/>
+          <p:cNvSpPr/>
+          <p:nvPr/>
+        </p:nvSpPr>
+        <p:spPr>
+          <a:xfrm>
+            <a:off x="9440333" y="2628900"/>
+            <a:ext cx="1058333" cy="1143000"/>
+          </a:xfrm>
+          <a:prstGeom prst="roundRect">
+            <a:avLst>
+              <a:gd name="adj" fmla="val 6000"/>
+            </a:avLst>
+          </a:prstGeom>
+          <a:solidFill>
+            <a:srgbClr val="E8E2F0"/>
+          </a:solidFill>
+          <a:ln>
+            <a:noFill/>
+          </a:ln>
+          <a:effectLst/>
+        </p:spPr>
+        <p:style>
+          <a:lnRef idx="1">
+            <a:schemeClr val="accent1"/>
+          </a:lnRef>
+          <a:fillRef idx="3">
+            <a:schemeClr val="accent1"/>
+          </a:fillRef>
+          <a:effectRef idx="2">
+            <a:schemeClr val="accent1"/>
+          </a:effectRef>
+          <a:fontRef idx="minor">
+            <a:schemeClr val="lt1"/>
+          </a:fontRef>
+        </p:style>
+        <p:txBody>
+          <a:bodyPr rtlCol="0" anchor="ctr"/>
+          <a:lstStyle/>
+          <a:p>
+            <a:pPr algn="ctr"/>
+          </a:p>
+        </p:txBody>
+      </p:sp>
+      <p:sp>
+        <p:nvSpPr>
+          <p:cNvPr id="66" name="TextBox 65"/>
+          <p:cNvSpPr txBox="1"/>
+          <p:nvPr/>
+        </p:nvSpPr>
+        <p:spPr>
+          <a:xfrm>
+            <a:off x="9516533" y="2628900"/>
+            <a:ext cx="905933" cy="1143000"/>
+          </a:xfrm>
+          <a:prstGeom prst="rect">
+            <a:avLst/>
+          </a:prstGeom>
+          <a:noFill/>
+        </p:spPr>
+        <p:txBody>
+          <a:bodyPr wrap="square" anchor="ctr" lIns="25400" rIns="25400" tIns="12700" bIns="12700">
+            <a:normAutofit/>
+          </a:bodyPr>
+          <a:lstStyle/>
+          <a:p>
+            <a:pPr algn="ctr">
+              <a:spcAft>
+                <a:spcPts val="0"/>
+              </a:spcAft>
+            </a:pPr>
+            <a:r>
+              <a:rPr sz="650" b="0">
+                <a:solidFill>
+                  <a:srgbClr val="142433"/>
+                </a:solidFill>
+                <a:latin typeface="Inter"/>
+              </a:rPr>
+              <a:t>Tone / reading-level client summary via portal.</a:t>
+            </a:r>
+          </a:p>
+        </p:txBody>
+      </p:sp>
+      <p:sp>
+        <p:nvSpPr>
+          <p:cNvPr id="67" name="Rounded Rectangle 66"/>
+          <p:cNvSpPr/>
+          <p:nvPr/>
+        </p:nvSpPr>
+        <p:spPr>
+          <a:xfrm>
+            <a:off x="9440333" y="3822700"/>
+            <a:ext cx="1058333" cy="762000"/>
+          </a:xfrm>
+          <a:prstGeom prst="roundRect">
+            <a:avLst>
+              <a:gd name="adj" fmla="val 8333"/>
+            </a:avLst>
+          </a:prstGeom>
+          <a:solidFill>
+            <a:srgbClr val="E8E2F0"/>
+          </a:solidFill>
+          <a:ln>
+            <a:noFill/>
+          </a:ln>
+          <a:effectLst/>
+        </p:spPr>
+        <p:style>
+          <a:lnRef idx="1">
+            <a:schemeClr val="accent1"/>
+          </a:lnRef>
+          <a:fillRef idx="3">
+            <a:schemeClr val="accent1"/>
+          </a:fillRef>
+          <a:effectRef idx="2">
+            <a:schemeClr val="accent1"/>
+          </a:effectRef>
+          <a:fontRef idx="minor">
+            <a:schemeClr val="lt1"/>
+          </a:fontRef>
+        </p:style>
+        <p:txBody>
+          <a:bodyPr rtlCol="0" anchor="ctr"/>
+          <a:lstStyle/>
+          <a:p>
+            <a:pPr algn="ctr"/>
+          </a:p>
+        </p:txBody>
+      </p:sp>
+      <p:sp>
+        <p:nvSpPr>
+          <p:cNvPr id="68" name="TextBox 67"/>
+          <p:cNvSpPr txBox="1"/>
+          <p:nvPr/>
+        </p:nvSpPr>
+        <p:spPr>
+          <a:xfrm>
+            <a:off x="9516533" y="3822700"/>
+            <a:ext cx="905933" cy="762000"/>
+          </a:xfrm>
+          <a:prstGeom prst="rect">
+            <a:avLst/>
+          </a:prstGeom>
+          <a:noFill/>
+        </p:spPr>
+        <p:txBody>
+          <a:bodyPr wrap="square" anchor="ctr" lIns="25400" rIns="25400" tIns="12700" bIns="12700">
+            <a:normAutofit/>
+          </a:bodyPr>
+          <a:lstStyle/>
+          <a:p>
+            <a:pPr algn="ctr">
+              <a:spcAft>
+                <a:spcPts val="0"/>
+              </a:spcAft>
+            </a:pPr>
+            <a:r>
+              <a:rPr sz="625" b="0">
+                <a:solidFill>
+                  <a:srgbClr val="142433"/>
+                </a:solidFill>
+                <a:latin typeface="Inter"/>
+              </a:rPr>
+              <a:t>Client app / portal + AI</a:t>
+            </a:r>
+          </a:p>
+        </p:txBody>
+      </p:sp>
+      <p:sp>
+        <p:nvSpPr>
+          <p:cNvPr id="69" name="Rounded Rectangle 68"/>
+          <p:cNvSpPr/>
+          <p:nvPr/>
+        </p:nvSpPr>
+        <p:spPr>
+          <a:xfrm>
+            <a:off x="10562166" y="2197100"/>
+            <a:ext cx="1058333" cy="381000"/>
+          </a:xfrm>
+          <a:prstGeom prst="roundRect">
+            <a:avLst>
+              <a:gd name="adj" fmla="val 16666"/>
             </a:avLst>
           </a:prstGeom>
           <a:solidFill>
@@ -8097,14 +8883,14 @@
       </p:sp>
       <p:sp>
         <p:nvSpPr>
-          <p:cNvPr id="22" name="TextBox 21"/>
+          <p:cNvPr id="70" name="TextBox 69"/>
           <p:cNvSpPr txBox="1"/>
           <p:nvPr/>
         </p:nvSpPr>
         <p:spPr>
           <a:xfrm>
-            <a:off x="10706608" y="1371600"/>
-            <a:ext cx="1070864" cy="457200"/>
+            <a:off x="10600266" y="2197100"/>
+            <a:ext cx="982133" cy="381000"/>
           </a:xfrm>
           <a:prstGeom prst="rect">
             <a:avLst/>
@@ -8112,7 +8898,7 @@
           <a:noFill/>
         </p:spPr>
         <p:txBody>
-          <a:bodyPr wrap="square" anchor="ctr" lIns="64008" rIns="64008" tIns="27432" bIns="27432">
+          <a:bodyPr wrap="square" anchor="ctr" lIns="25400" rIns="25400" tIns="12700" bIns="12700">
             <a:normAutofit/>
           </a:bodyPr>
           <a:lstStyle/>
@@ -8123,2156 +8909,31 @@
               </a:spcAft>
             </a:pPr>
             <a:r>
-              <a:rPr sz="1100" b="1">
+              <a:rPr sz="600" b="1">
                 <a:solidFill>
                   <a:srgbClr val="FFFFFF"/>
                 </a:solidFill>
-                <a:latin typeface="Calibri"/>
+                <a:latin typeface="Inter"/>
               </a:rPr>
-              <a:t>5 · Progress together</a:t>
-            </a:r>
-          </a:p>
-        </p:txBody>
-      </p:sp>
-      <p:sp>
-        <p:nvSpPr>
-          <p:cNvPr id="23" name="Rounded Rectangle 22"/>
+              <a:t>9 · Carryover</a:t>
+            </a:r>
+          </a:p>
+        </p:txBody>
+      </p:sp>
+      <p:sp>
+        <p:nvSpPr>
+          <p:cNvPr id="71" name="Rounded Rectangle 70"/>
           <p:cNvSpPr/>
           <p:nvPr/>
         </p:nvSpPr>
         <p:spPr>
           <a:xfrm>
-            <a:off x="1627632" y="1874519"/>
-            <a:ext cx="1070864" cy="566928"/>
+            <a:off x="10562166" y="2628900"/>
+            <a:ext cx="1058333" cy="1143000"/>
           </a:xfrm>
           <a:prstGeom prst="roundRect">
             <a:avLst>
-              <a:gd name="adj" fmla="val 19354"/>
-            </a:avLst>
-          </a:prstGeom>
-          <a:solidFill>
-            <a:srgbClr val="2D6A6E"/>
-          </a:solidFill>
-          <a:ln>
-            <a:noFill/>
-          </a:ln>
-          <a:effectLst/>
-        </p:spPr>
-        <p:style>
-          <a:lnRef idx="1">
-            <a:schemeClr val="accent1"/>
-          </a:lnRef>
-          <a:fillRef idx="3">
-            <a:schemeClr val="accent1"/>
-          </a:fillRef>
-          <a:effectRef idx="2">
-            <a:schemeClr val="accent1"/>
-          </a:effectRef>
-          <a:fontRef idx="minor">
-            <a:schemeClr val="lt1"/>
-          </a:fontRef>
-        </p:style>
-        <p:txBody>
-          <a:bodyPr rtlCol="0" anchor="ctr"/>
-          <a:lstStyle/>
-          <a:p>
-            <a:pPr algn="ctr"/>
-          </a:p>
-        </p:txBody>
-      </p:sp>
-      <p:sp>
-        <p:nvSpPr>
-          <p:cNvPr id="24" name="TextBox 23"/>
-          <p:cNvSpPr txBox="1"/>
-          <p:nvPr/>
-        </p:nvSpPr>
-        <p:spPr>
-          <a:xfrm>
-            <a:off x="1627632" y="1874519"/>
-            <a:ext cx="1070864" cy="566928"/>
-          </a:xfrm>
-          <a:prstGeom prst="rect">
-            <a:avLst/>
-          </a:prstGeom>
-          <a:noFill/>
-        </p:spPr>
-        <p:txBody>
-          <a:bodyPr wrap="square" anchor="ctr" lIns="64008" rIns="64008" tIns="27432" bIns="27432">
-            <a:normAutofit/>
-          </a:bodyPr>
-          <a:lstStyle/>
-          <a:p>
-            <a:pPr algn="ctr">
-              <a:spcAft>
-                <a:spcPts val="0"/>
-              </a:spcAft>
-            </a:pPr>
-            <a:r>
-              <a:rPr sz="850" b="1">
-                <a:solidFill>
-                  <a:srgbClr val="FFFFFF"/>
-                </a:solidFill>
-                <a:latin typeface="Calibri"/>
-              </a:rPr>
-              <a:t>1 · Referral / first contact</a:t>
-            </a:r>
-          </a:p>
-        </p:txBody>
-      </p:sp>
-      <p:sp>
-        <p:nvSpPr>
-          <p:cNvPr id="25" name="Rounded Rectangle 24"/>
-          <p:cNvSpPr/>
-          <p:nvPr/>
-        </p:nvSpPr>
-        <p:spPr>
-          <a:xfrm>
-            <a:off x="1627632" y="2487168"/>
-            <a:ext cx="1070864" cy="1783080"/>
-          </a:xfrm>
-          <a:prstGeom prst="roundRect">
-            <a:avLst>
-              <a:gd name="adj" fmla="val 8538"/>
-            </a:avLst>
-          </a:prstGeom>
-          <a:solidFill>
-            <a:srgbClr val="DCE9E8"/>
-          </a:solidFill>
-          <a:ln>
-            <a:noFill/>
-          </a:ln>
-          <a:effectLst/>
-        </p:spPr>
-        <p:style>
-          <a:lnRef idx="1">
-            <a:schemeClr val="accent1"/>
-          </a:lnRef>
-          <a:fillRef idx="3">
-            <a:schemeClr val="accent1"/>
-          </a:fillRef>
-          <a:effectRef idx="2">
-            <a:schemeClr val="accent1"/>
-          </a:effectRef>
-          <a:fontRef idx="minor">
-            <a:schemeClr val="lt1"/>
-          </a:fontRef>
-        </p:style>
-        <p:txBody>
-          <a:bodyPr rtlCol="0" anchor="ctr"/>
-          <a:lstStyle/>
-          <a:p>
-            <a:pPr algn="ctr"/>
-          </a:p>
-        </p:txBody>
-      </p:sp>
-      <p:sp>
-        <p:nvSpPr>
-          <p:cNvPr id="26" name="TextBox 25"/>
-          <p:cNvSpPr txBox="1"/>
-          <p:nvPr/>
-        </p:nvSpPr>
-        <p:spPr>
-          <a:xfrm>
-            <a:off x="1627632" y="2487168"/>
-            <a:ext cx="1070864" cy="1783080"/>
-          </a:xfrm>
-          <a:prstGeom prst="rect">
-            <a:avLst/>
-          </a:prstGeom>
-          <a:noFill/>
-        </p:spPr>
-        <p:txBody>
-          <a:bodyPr wrap="square" anchor="ctr" lIns="64008" rIns="64008" tIns="27432" bIns="27432">
-            <a:normAutofit/>
-          </a:bodyPr>
-          <a:lstStyle/>
-          <a:p>
-            <a:pPr algn="ctr">
-              <a:spcAft>
-                <a:spcPts val="0"/>
-              </a:spcAft>
-            </a:pPr>
-            <a:r>
-              <a:rPr sz="950" b="0">
-                <a:solidFill>
-                  <a:srgbClr val="15302E"/>
-                </a:solidFill>
-                <a:latin typeface="Calibri"/>
-              </a:rPr>
-              <a:t>Capture every enquiry in one place — case record + audit trail.</a:t>
-            </a:r>
-          </a:p>
-        </p:txBody>
-      </p:sp>
-      <p:sp>
-        <p:nvSpPr>
-          <p:cNvPr id="27" name="Rounded Rectangle 26"/>
-          <p:cNvSpPr/>
-          <p:nvPr/>
-        </p:nvSpPr>
-        <p:spPr>
-          <a:xfrm>
-            <a:off x="1627632" y="4315968"/>
-            <a:ext cx="1070864" cy="1325880"/>
-          </a:xfrm>
-          <a:prstGeom prst="roundRect">
-            <a:avLst>
-              <a:gd name="adj" fmla="val 8538"/>
-            </a:avLst>
-          </a:prstGeom>
-          <a:solidFill>
-            <a:srgbClr val="DCE9E8"/>
-          </a:solidFill>
-          <a:ln>
-            <a:noFill/>
-          </a:ln>
-          <a:effectLst/>
-        </p:spPr>
-        <p:style>
-          <a:lnRef idx="1">
-            <a:schemeClr val="accent1"/>
-          </a:lnRef>
-          <a:fillRef idx="3">
-            <a:schemeClr val="accent1"/>
-          </a:fillRef>
-          <a:effectRef idx="2">
-            <a:schemeClr val="accent1"/>
-          </a:effectRef>
-          <a:fontRef idx="minor">
-            <a:schemeClr val="lt1"/>
-          </a:fontRef>
-        </p:style>
-        <p:txBody>
-          <a:bodyPr rtlCol="0" anchor="ctr"/>
-          <a:lstStyle/>
-          <a:p>
-            <a:pPr algn="ctr"/>
-          </a:p>
-        </p:txBody>
-      </p:sp>
-      <p:sp>
-        <p:nvSpPr>
-          <p:cNvPr id="28" name="TextBox 27"/>
-          <p:cNvSpPr txBox="1"/>
-          <p:nvPr/>
-        </p:nvSpPr>
-        <p:spPr>
-          <a:xfrm>
-            <a:off x="1627632" y="4315968"/>
-            <a:ext cx="1070864" cy="1325880"/>
-          </a:xfrm>
-          <a:prstGeom prst="rect">
-            <a:avLst/>
-          </a:prstGeom>
-          <a:noFill/>
-        </p:spPr>
-        <p:txBody>
-          <a:bodyPr wrap="square" anchor="ctr" lIns="64008" rIns="64008" tIns="27432" bIns="27432">
-            <a:normAutofit/>
-          </a:bodyPr>
-          <a:lstStyle/>
-          <a:p>
-            <a:pPr algn="ctr">
-              <a:spcAft>
-                <a:spcPts val="0"/>
-              </a:spcAft>
-            </a:pPr>
-            <a:r>
-              <a:rPr sz="950" b="0">
-                <a:solidFill>
-                  <a:srgbClr val="15302E"/>
-                </a:solidFill>
-                <a:latin typeface="Calibri"/>
-              </a:rPr>
-              <a:t>Clinician web — enquiry queue</a:t>
-            </a:r>
-          </a:p>
-        </p:txBody>
-      </p:sp>
-      <p:sp>
-        <p:nvSpPr>
-          <p:cNvPr id="29" name="Rounded Rectangle 28"/>
-          <p:cNvSpPr/>
-          <p:nvPr/>
-        </p:nvSpPr>
-        <p:spPr>
-          <a:xfrm>
-            <a:off x="2762504" y="1874519"/>
-            <a:ext cx="1070864" cy="566928"/>
-          </a:xfrm>
-          <a:prstGeom prst="roundRect">
-            <a:avLst>
-              <a:gd name="adj" fmla="val 19354"/>
-            </a:avLst>
-          </a:prstGeom>
-          <a:solidFill>
-            <a:srgbClr val="356985"/>
-          </a:solidFill>
-          <a:ln>
-            <a:noFill/>
-          </a:ln>
-          <a:effectLst/>
-        </p:spPr>
-        <p:style>
-          <a:lnRef idx="1">
-            <a:schemeClr val="accent1"/>
-          </a:lnRef>
-          <a:fillRef idx="3">
-            <a:schemeClr val="accent1"/>
-          </a:fillRef>
-          <a:effectRef idx="2">
-            <a:schemeClr val="accent1"/>
-          </a:effectRef>
-          <a:fontRef idx="minor">
-            <a:schemeClr val="lt1"/>
-          </a:fontRef>
-        </p:style>
-        <p:txBody>
-          <a:bodyPr rtlCol="0" anchor="ctr"/>
-          <a:lstStyle/>
-          <a:p>
-            <a:pPr algn="ctr"/>
-          </a:p>
-        </p:txBody>
-      </p:sp>
-      <p:sp>
-        <p:nvSpPr>
-          <p:cNvPr id="30" name="TextBox 29"/>
-          <p:cNvSpPr txBox="1"/>
-          <p:nvPr/>
-        </p:nvSpPr>
-        <p:spPr>
-          <a:xfrm>
-            <a:off x="2762504" y="1874519"/>
-            <a:ext cx="1070864" cy="566928"/>
-          </a:xfrm>
-          <a:prstGeom prst="rect">
-            <a:avLst/>
-          </a:prstGeom>
-          <a:noFill/>
-        </p:spPr>
-        <p:txBody>
-          <a:bodyPr wrap="square" anchor="ctr" lIns="64008" rIns="64008" tIns="27432" bIns="27432">
-            <a:normAutofit/>
-          </a:bodyPr>
-          <a:lstStyle/>
-          <a:p>
-            <a:pPr algn="ctr">
-              <a:spcAft>
-                <a:spcPts val="0"/>
-              </a:spcAft>
-            </a:pPr>
-            <a:r>
-              <a:rPr sz="850" b="1">
-                <a:solidFill>
-                  <a:srgbClr val="FFFFFF"/>
-                </a:solidFill>
-                <a:latin typeface="Calibri"/>
-              </a:rPr>
-              <a:t>2 · Smart intake</a:t>
-            </a:r>
-          </a:p>
-        </p:txBody>
-      </p:sp>
-      <p:sp>
-        <p:nvSpPr>
-          <p:cNvPr id="31" name="Rounded Rectangle 30"/>
-          <p:cNvSpPr/>
-          <p:nvPr/>
-        </p:nvSpPr>
-        <p:spPr>
-          <a:xfrm>
-            <a:off x="2762504" y="2487168"/>
-            <a:ext cx="1070864" cy="1783080"/>
-          </a:xfrm>
-          <a:prstGeom prst="roundRect">
-            <a:avLst>
-              <a:gd name="adj" fmla="val 8538"/>
-            </a:avLst>
-          </a:prstGeom>
-          <a:solidFill>
-            <a:srgbClr val="DCE7EE"/>
-          </a:solidFill>
-          <a:ln>
-            <a:noFill/>
-          </a:ln>
-          <a:effectLst/>
-        </p:spPr>
-        <p:style>
-          <a:lnRef idx="1">
-            <a:schemeClr val="accent1"/>
-          </a:lnRef>
-          <a:fillRef idx="3">
-            <a:schemeClr val="accent1"/>
-          </a:fillRef>
-          <a:effectRef idx="2">
-            <a:schemeClr val="accent1"/>
-          </a:effectRef>
-          <a:fontRef idx="minor">
-            <a:schemeClr val="lt1"/>
-          </a:fontRef>
-        </p:style>
-        <p:txBody>
-          <a:bodyPr rtlCol="0" anchor="ctr"/>
-          <a:lstStyle/>
-          <a:p>
-            <a:pPr algn="ctr"/>
-          </a:p>
-        </p:txBody>
-      </p:sp>
-      <p:sp>
-        <p:nvSpPr>
-          <p:cNvPr id="32" name="TextBox 31"/>
-          <p:cNvSpPr txBox="1"/>
-          <p:nvPr/>
-        </p:nvSpPr>
-        <p:spPr>
-          <a:xfrm>
-            <a:off x="2762504" y="2487168"/>
-            <a:ext cx="1070864" cy="1783080"/>
-          </a:xfrm>
-          <a:prstGeom prst="rect">
-            <a:avLst/>
-          </a:prstGeom>
-          <a:noFill/>
-        </p:spPr>
-        <p:txBody>
-          <a:bodyPr wrap="square" anchor="ctr" lIns="64008" rIns="64008" tIns="27432" bIns="27432">
-            <a:normAutofit/>
-          </a:bodyPr>
-          <a:lstStyle/>
-          <a:p>
-            <a:pPr algn="ctr">
-              <a:spcAft>
-                <a:spcPts val="0"/>
-              </a:spcAft>
-            </a:pPr>
-            <a:r>
-              <a:rPr sz="950" b="0">
-                <a:solidFill>
-                  <a:srgbClr val="15302E"/>
-                </a:solidFill>
-                <a:latin typeface="Calibri"/>
-              </a:rPr>
-              <a:t>Adaptive magic-link intake + live status + consent.</a:t>
-            </a:r>
-          </a:p>
-        </p:txBody>
-      </p:sp>
-      <p:sp>
-        <p:nvSpPr>
-          <p:cNvPr id="33" name="Rounded Rectangle 32"/>
-          <p:cNvSpPr/>
-          <p:nvPr/>
-        </p:nvSpPr>
-        <p:spPr>
-          <a:xfrm>
-            <a:off x="2762504" y="4315968"/>
-            <a:ext cx="1070864" cy="1325880"/>
-          </a:xfrm>
-          <a:prstGeom prst="roundRect">
-            <a:avLst>
-              <a:gd name="adj" fmla="val 8538"/>
-            </a:avLst>
-          </a:prstGeom>
-          <a:solidFill>
-            <a:srgbClr val="DCE7EE"/>
-          </a:solidFill>
-          <a:ln>
-            <a:noFill/>
-          </a:ln>
-          <a:effectLst/>
-        </p:spPr>
-        <p:style>
-          <a:lnRef idx="1">
-            <a:schemeClr val="accent1"/>
-          </a:lnRef>
-          <a:fillRef idx="3">
-            <a:schemeClr val="accent1"/>
-          </a:fillRef>
-          <a:effectRef idx="2">
-            <a:schemeClr val="accent1"/>
-          </a:effectRef>
-          <a:fontRef idx="minor">
-            <a:schemeClr val="lt1"/>
-          </a:fontRef>
-        </p:style>
-        <p:txBody>
-          <a:bodyPr rtlCol="0" anchor="ctr"/>
-          <a:lstStyle/>
-          <a:p>
-            <a:pPr algn="ctr"/>
-          </a:p>
-        </p:txBody>
-      </p:sp>
-      <p:sp>
-        <p:nvSpPr>
-          <p:cNvPr id="34" name="TextBox 33"/>
-          <p:cNvSpPr txBox="1"/>
-          <p:nvPr/>
-        </p:nvSpPr>
-        <p:spPr>
-          <a:xfrm>
-            <a:off x="2762504" y="4315968"/>
-            <a:ext cx="1070864" cy="1325880"/>
-          </a:xfrm>
-          <a:prstGeom prst="rect">
-            <a:avLst/>
-          </a:prstGeom>
-          <a:noFill/>
-        </p:spPr>
-        <p:txBody>
-          <a:bodyPr wrap="square" anchor="ctr" lIns="64008" rIns="64008" tIns="27432" bIns="27432">
-            <a:normAutofit/>
-          </a:bodyPr>
-          <a:lstStyle/>
-          <a:p>
-            <a:pPr algn="ctr">
-              <a:spcAft>
-                <a:spcPts val="0"/>
-              </a:spcAft>
-            </a:pPr>
-            <a:r>
-              <a:rPr sz="950" b="0">
-                <a:solidFill>
-                  <a:srgbClr val="15302E"/>
-                </a:solidFill>
-                <a:latin typeface="Calibri"/>
-              </a:rPr>
-              <a:t>Family / client portal (mobile · web)</a:t>
-            </a:r>
-          </a:p>
-        </p:txBody>
-      </p:sp>
-      <p:sp>
-        <p:nvSpPr>
-          <p:cNvPr id="35" name="Rounded Rectangle 34"/>
-          <p:cNvSpPr/>
-          <p:nvPr/>
-        </p:nvSpPr>
-        <p:spPr>
-          <a:xfrm>
-            <a:off x="3897376" y="1874519"/>
-            <a:ext cx="1070864" cy="566928"/>
-          </a:xfrm>
-          <a:prstGeom prst="roundRect">
-            <a:avLst>
-              <a:gd name="adj" fmla="val 19354"/>
-            </a:avLst>
-          </a:prstGeom>
-          <a:solidFill>
-            <a:srgbClr val="356985"/>
-          </a:solidFill>
-          <a:ln>
-            <a:noFill/>
-          </a:ln>
-          <a:effectLst/>
-        </p:spPr>
-        <p:style>
-          <a:lnRef idx="1">
-            <a:schemeClr val="accent1"/>
-          </a:lnRef>
-          <a:fillRef idx="3">
-            <a:schemeClr val="accent1"/>
-          </a:fillRef>
-          <a:effectRef idx="2">
-            <a:schemeClr val="accent1"/>
-          </a:effectRef>
-          <a:fontRef idx="minor">
-            <a:schemeClr val="lt1"/>
-          </a:fontRef>
-        </p:style>
-        <p:txBody>
-          <a:bodyPr rtlCol="0" anchor="ctr"/>
-          <a:lstStyle/>
-          <a:p>
-            <a:pPr algn="ctr"/>
-          </a:p>
-        </p:txBody>
-      </p:sp>
-      <p:sp>
-        <p:nvSpPr>
-          <p:cNvPr id="36" name="TextBox 35"/>
-          <p:cNvSpPr txBox="1"/>
-          <p:nvPr/>
-        </p:nvSpPr>
-        <p:spPr>
-          <a:xfrm>
-            <a:off x="3897376" y="1874519"/>
-            <a:ext cx="1070864" cy="566928"/>
-          </a:xfrm>
-          <a:prstGeom prst="rect">
-            <a:avLst/>
-          </a:prstGeom>
-          <a:noFill/>
-        </p:spPr>
-        <p:txBody>
-          <a:bodyPr wrap="square" anchor="ctr" lIns="64008" rIns="64008" tIns="27432" bIns="27432">
-            <a:normAutofit/>
-          </a:bodyPr>
-          <a:lstStyle/>
-          <a:p>
-            <a:pPr algn="ctr">
-              <a:spcAft>
-                <a:spcPts val="0"/>
-              </a:spcAft>
-            </a:pPr>
-            <a:r>
-              <a:rPr sz="850" b="1">
-                <a:solidFill>
-                  <a:srgbClr val="FFFFFF"/>
-                </a:solidFill>
-                <a:latin typeface="Calibri"/>
-              </a:rPr>
-              <a:t>3 · Intake review &amp; overview</a:t>
-            </a:r>
-          </a:p>
-        </p:txBody>
-      </p:sp>
-      <p:sp>
-        <p:nvSpPr>
-          <p:cNvPr id="37" name="Rounded Rectangle 36"/>
-          <p:cNvSpPr/>
-          <p:nvPr/>
-        </p:nvSpPr>
-        <p:spPr>
-          <a:xfrm>
-            <a:off x="3897376" y="2487168"/>
-            <a:ext cx="1070864" cy="1783080"/>
-          </a:xfrm>
-          <a:prstGeom prst="roundRect">
-            <a:avLst>
-              <a:gd name="adj" fmla="val 8538"/>
-            </a:avLst>
-          </a:prstGeom>
-          <a:solidFill>
-            <a:srgbClr val="DCE7EE"/>
-          </a:solidFill>
-          <a:ln>
-            <a:noFill/>
-          </a:ln>
-          <a:effectLst/>
-        </p:spPr>
-        <p:style>
-          <a:lnRef idx="1">
-            <a:schemeClr val="accent1"/>
-          </a:lnRef>
-          <a:fillRef idx="3">
-            <a:schemeClr val="accent1"/>
-          </a:fillRef>
-          <a:effectRef idx="2">
-            <a:schemeClr val="accent1"/>
-          </a:effectRef>
-          <a:fontRef idx="minor">
-            <a:schemeClr val="lt1"/>
-          </a:fontRef>
-        </p:style>
-        <p:txBody>
-          <a:bodyPr rtlCol="0" anchor="ctr"/>
-          <a:lstStyle/>
-          <a:p>
-            <a:pPr algn="ctr"/>
-          </a:p>
-        </p:txBody>
-      </p:sp>
-      <p:sp>
-        <p:nvSpPr>
-          <p:cNvPr id="38" name="TextBox 37"/>
-          <p:cNvSpPr txBox="1"/>
-          <p:nvPr/>
-        </p:nvSpPr>
-        <p:spPr>
-          <a:xfrm>
-            <a:off x="3897376" y="2487168"/>
-            <a:ext cx="1070864" cy="1783080"/>
-          </a:xfrm>
-          <a:prstGeom prst="rect">
-            <a:avLst/>
-          </a:prstGeom>
-          <a:noFill/>
-        </p:spPr>
-        <p:txBody>
-          <a:bodyPr wrap="square" anchor="ctr" lIns="64008" rIns="64008" tIns="27432" bIns="27432">
-            <a:normAutofit/>
-          </a:bodyPr>
-          <a:lstStyle/>
-          <a:p>
-            <a:pPr algn="ctr">
-              <a:spcAft>
-                <a:spcPts val="0"/>
-              </a:spcAft>
-            </a:pPr>
-            <a:r>
-              <a:rPr sz="950" b="0">
-                <a:solidFill>
-                  <a:srgbClr val="15302E"/>
-                </a:solidFill>
-                <a:latin typeface="Calibri"/>
-              </a:rPr>
-              <a:t>One-screen client overview / summary view.</a:t>
-            </a:r>
-          </a:p>
-        </p:txBody>
-      </p:sp>
-      <p:sp>
-        <p:nvSpPr>
-          <p:cNvPr id="39" name="Rounded Rectangle 38"/>
-          <p:cNvSpPr/>
-          <p:nvPr/>
-        </p:nvSpPr>
-        <p:spPr>
-          <a:xfrm>
-            <a:off x="3897376" y="4315968"/>
-            <a:ext cx="1070864" cy="1325880"/>
-          </a:xfrm>
-          <a:prstGeom prst="roundRect">
-            <a:avLst>
-              <a:gd name="adj" fmla="val 8538"/>
-            </a:avLst>
-          </a:prstGeom>
-          <a:solidFill>
-            <a:srgbClr val="DCE7EE"/>
-          </a:solidFill>
-          <a:ln>
-            <a:noFill/>
-          </a:ln>
-          <a:effectLst/>
-        </p:spPr>
-        <p:style>
-          <a:lnRef idx="1">
-            <a:schemeClr val="accent1"/>
-          </a:lnRef>
-          <a:fillRef idx="3">
-            <a:schemeClr val="accent1"/>
-          </a:fillRef>
-          <a:effectRef idx="2">
-            <a:schemeClr val="accent1"/>
-          </a:effectRef>
-          <a:fontRef idx="minor">
-            <a:schemeClr val="lt1"/>
-          </a:fontRef>
-        </p:style>
-        <p:txBody>
-          <a:bodyPr rtlCol="0" anchor="ctr"/>
-          <a:lstStyle/>
-          <a:p>
-            <a:pPr algn="ctr"/>
-          </a:p>
-        </p:txBody>
-      </p:sp>
-      <p:sp>
-        <p:nvSpPr>
-          <p:cNvPr id="40" name="TextBox 39"/>
-          <p:cNvSpPr txBox="1"/>
-          <p:nvPr/>
-        </p:nvSpPr>
-        <p:spPr>
-          <a:xfrm>
-            <a:off x="3897376" y="4315968"/>
-            <a:ext cx="1070864" cy="1325880"/>
-          </a:xfrm>
-          <a:prstGeom prst="rect">
-            <a:avLst/>
-          </a:prstGeom>
-          <a:noFill/>
-        </p:spPr>
-        <p:txBody>
-          <a:bodyPr wrap="square" anchor="ctr" lIns="64008" rIns="64008" tIns="27432" bIns="27432">
-            <a:normAutofit/>
-          </a:bodyPr>
-          <a:lstStyle/>
-          <a:p>
-            <a:pPr algn="ctr">
-              <a:spcAft>
-                <a:spcPts val="0"/>
-              </a:spcAft>
-            </a:pPr>
-            <a:r>
-              <a:rPr sz="950" b="0">
-                <a:solidFill>
-                  <a:srgbClr val="15302E"/>
-                </a:solidFill>
-                <a:latin typeface="Calibri"/>
-              </a:rPr>
-              <a:t>Clinician web</a:t>
-            </a:r>
-          </a:p>
-        </p:txBody>
-      </p:sp>
-      <p:sp>
-        <p:nvSpPr>
-          <p:cNvPr id="41" name="Rounded Rectangle 40"/>
-          <p:cNvSpPr/>
-          <p:nvPr/>
-        </p:nvSpPr>
-        <p:spPr>
-          <a:xfrm>
-            <a:off x="5032248" y="1874519"/>
-            <a:ext cx="1070864" cy="566928"/>
-          </a:xfrm>
-          <a:prstGeom prst="roundRect">
-            <a:avLst>
-              <a:gd name="adj" fmla="val 19354"/>
-            </a:avLst>
-          </a:prstGeom>
-          <a:solidFill>
-            <a:srgbClr val="C0703F"/>
-          </a:solidFill>
-          <a:ln>
-            <a:noFill/>
-          </a:ln>
-          <a:effectLst/>
-        </p:spPr>
-        <p:style>
-          <a:lnRef idx="1">
-            <a:schemeClr val="accent1"/>
-          </a:lnRef>
-          <a:fillRef idx="3">
-            <a:schemeClr val="accent1"/>
-          </a:fillRef>
-          <a:effectRef idx="2">
-            <a:schemeClr val="accent1"/>
-          </a:effectRef>
-          <a:fontRef idx="minor">
-            <a:schemeClr val="lt1"/>
-          </a:fontRef>
-        </p:style>
-        <p:txBody>
-          <a:bodyPr rtlCol="0" anchor="ctr"/>
-          <a:lstStyle/>
-          <a:p>
-            <a:pPr algn="ctr"/>
-          </a:p>
-        </p:txBody>
-      </p:sp>
-      <p:sp>
-        <p:nvSpPr>
-          <p:cNvPr id="42" name="TextBox 41"/>
-          <p:cNvSpPr txBox="1"/>
-          <p:nvPr/>
-        </p:nvSpPr>
-        <p:spPr>
-          <a:xfrm>
-            <a:off x="5032248" y="1874519"/>
-            <a:ext cx="1070864" cy="566928"/>
-          </a:xfrm>
-          <a:prstGeom prst="rect">
-            <a:avLst/>
-          </a:prstGeom>
-          <a:noFill/>
-        </p:spPr>
-        <p:txBody>
-          <a:bodyPr wrap="square" anchor="ctr" lIns="64008" rIns="64008" tIns="27432" bIns="27432">
-            <a:normAutofit/>
-          </a:bodyPr>
-          <a:lstStyle/>
-          <a:p>
-            <a:pPr algn="ctr">
-              <a:spcAft>
-                <a:spcPts val="0"/>
-              </a:spcAft>
-            </a:pPr>
-            <a:r>
-              <a:rPr sz="850" b="1">
-                <a:solidFill>
-                  <a:srgbClr val="FFFFFF"/>
-                </a:solidFill>
-                <a:latin typeface="Calibri"/>
-              </a:rPr>
-              <a:t>4 · Consult prep</a:t>
-            </a:r>
-          </a:p>
-        </p:txBody>
-      </p:sp>
-      <p:sp>
-        <p:nvSpPr>
-          <p:cNvPr id="43" name="Rounded Rectangle 42"/>
-          <p:cNvSpPr/>
-          <p:nvPr/>
-        </p:nvSpPr>
-        <p:spPr>
-          <a:xfrm>
-            <a:off x="5032248" y="2487168"/>
-            <a:ext cx="1070864" cy="1783080"/>
-          </a:xfrm>
-          <a:prstGeom prst="roundRect">
-            <a:avLst>
-              <a:gd name="adj" fmla="val 8538"/>
-            </a:avLst>
-          </a:prstGeom>
-          <a:solidFill>
-            <a:srgbClr val="F6E5D7"/>
-          </a:solidFill>
-          <a:ln>
-            <a:noFill/>
-          </a:ln>
-          <a:effectLst/>
-        </p:spPr>
-        <p:style>
-          <a:lnRef idx="1">
-            <a:schemeClr val="accent1"/>
-          </a:lnRef>
-          <a:fillRef idx="3">
-            <a:schemeClr val="accent1"/>
-          </a:fillRef>
-          <a:effectRef idx="2">
-            <a:schemeClr val="accent1"/>
-          </a:effectRef>
-          <a:fontRef idx="minor">
-            <a:schemeClr val="lt1"/>
-          </a:fontRef>
-        </p:style>
-        <p:txBody>
-          <a:bodyPr rtlCol="0" anchor="ctr"/>
-          <a:lstStyle/>
-          <a:p>
-            <a:pPr algn="ctr"/>
-          </a:p>
-        </p:txBody>
-      </p:sp>
-      <p:sp>
-        <p:nvSpPr>
-          <p:cNvPr id="44" name="TextBox 43"/>
-          <p:cNvSpPr txBox="1"/>
-          <p:nvPr/>
-        </p:nvSpPr>
-        <p:spPr>
-          <a:xfrm>
-            <a:off x="5032248" y="2487168"/>
-            <a:ext cx="1070864" cy="1783080"/>
-          </a:xfrm>
-          <a:prstGeom prst="rect">
-            <a:avLst/>
-          </a:prstGeom>
-          <a:noFill/>
-        </p:spPr>
-        <p:txBody>
-          <a:bodyPr wrap="square" anchor="ctr" lIns="64008" rIns="64008" tIns="27432" bIns="27432">
-            <a:normAutofit/>
-          </a:bodyPr>
-          <a:lstStyle/>
-          <a:p>
-            <a:pPr algn="ctr">
-              <a:spcAft>
-                <a:spcPts val="0"/>
-              </a:spcAft>
-            </a:pPr>
-            <a:r>
-              <a:rPr sz="950" b="0">
-                <a:solidFill>
-                  <a:srgbClr val="15302E"/>
-                </a:solidFill>
-                <a:latin typeface="Calibri"/>
-              </a:rPr>
-              <a:t>AI prep brief — probe areas, red flags, references.</a:t>
-            </a:r>
-          </a:p>
-        </p:txBody>
-      </p:sp>
-      <p:sp>
-        <p:nvSpPr>
-          <p:cNvPr id="45" name="Rounded Rectangle 44"/>
-          <p:cNvSpPr/>
-          <p:nvPr/>
-        </p:nvSpPr>
-        <p:spPr>
-          <a:xfrm>
-            <a:off x="5032248" y="4315968"/>
-            <a:ext cx="1070864" cy="1325880"/>
-          </a:xfrm>
-          <a:prstGeom prst="roundRect">
-            <a:avLst>
-              <a:gd name="adj" fmla="val 8538"/>
-            </a:avLst>
-          </a:prstGeom>
-          <a:solidFill>
-            <a:srgbClr val="F6E5D7"/>
-          </a:solidFill>
-          <a:ln>
-            <a:noFill/>
-          </a:ln>
-          <a:effectLst/>
-        </p:spPr>
-        <p:style>
-          <a:lnRef idx="1">
-            <a:schemeClr val="accent1"/>
-          </a:lnRef>
-          <a:fillRef idx="3">
-            <a:schemeClr val="accent1"/>
-          </a:fillRef>
-          <a:effectRef idx="2">
-            <a:schemeClr val="accent1"/>
-          </a:effectRef>
-          <a:fontRef idx="minor">
-            <a:schemeClr val="lt1"/>
-          </a:fontRef>
-        </p:style>
-        <p:txBody>
-          <a:bodyPr rtlCol="0" anchor="ctr"/>
-          <a:lstStyle/>
-          <a:p>
-            <a:pPr algn="ctr"/>
-          </a:p>
-        </p:txBody>
-      </p:sp>
-      <p:sp>
-        <p:nvSpPr>
-          <p:cNvPr id="46" name="TextBox 45"/>
-          <p:cNvSpPr txBox="1"/>
-          <p:nvPr/>
-        </p:nvSpPr>
-        <p:spPr>
-          <a:xfrm>
-            <a:off x="5032248" y="4315968"/>
-            <a:ext cx="1070864" cy="1325880"/>
-          </a:xfrm>
-          <a:prstGeom prst="rect">
-            <a:avLst/>
-          </a:prstGeom>
-          <a:noFill/>
-        </p:spPr>
-        <p:txBody>
-          <a:bodyPr wrap="square" anchor="ctr" lIns="64008" rIns="64008" tIns="27432" bIns="27432">
-            <a:normAutofit/>
-          </a:bodyPr>
-          <a:lstStyle/>
-          <a:p>
-            <a:pPr algn="ctr">
-              <a:spcAft>
-                <a:spcPts val="0"/>
-              </a:spcAft>
-            </a:pPr>
-            <a:r>
-              <a:rPr sz="950" b="0">
-                <a:solidFill>
-                  <a:srgbClr val="15302E"/>
-                </a:solidFill>
-                <a:latin typeface="Calibri"/>
-              </a:rPr>
-              <a:t>Clinician web + AI worker</a:t>
-            </a:r>
-          </a:p>
-        </p:txBody>
-      </p:sp>
-      <p:sp>
-        <p:nvSpPr>
-          <p:cNvPr id="47" name="Rounded Rectangle 46"/>
-          <p:cNvSpPr/>
-          <p:nvPr/>
-        </p:nvSpPr>
-        <p:spPr>
-          <a:xfrm>
-            <a:off x="6167120" y="1874519"/>
-            <a:ext cx="1070864" cy="566928"/>
-          </a:xfrm>
-          <a:prstGeom prst="roundRect">
-            <a:avLst>
-              <a:gd name="adj" fmla="val 19354"/>
-            </a:avLst>
-          </a:prstGeom>
-          <a:solidFill>
-            <a:srgbClr val="C0703F"/>
-          </a:solidFill>
-          <a:ln>
-            <a:noFill/>
-          </a:ln>
-          <a:effectLst/>
-        </p:spPr>
-        <p:style>
-          <a:lnRef idx="1">
-            <a:schemeClr val="accent1"/>
-          </a:lnRef>
-          <a:fillRef idx="3">
-            <a:schemeClr val="accent1"/>
-          </a:fillRef>
-          <a:effectRef idx="2">
-            <a:schemeClr val="accent1"/>
-          </a:effectRef>
-          <a:fontRef idx="minor">
-            <a:schemeClr val="lt1"/>
-          </a:fontRef>
-        </p:style>
-        <p:txBody>
-          <a:bodyPr rtlCol="0" anchor="ctr"/>
-          <a:lstStyle/>
-          <a:p>
-            <a:pPr algn="ctr"/>
-          </a:p>
-        </p:txBody>
-      </p:sp>
-      <p:sp>
-        <p:nvSpPr>
-          <p:cNvPr id="48" name="TextBox 47"/>
-          <p:cNvSpPr txBox="1"/>
-          <p:nvPr/>
-        </p:nvSpPr>
-        <p:spPr>
-          <a:xfrm>
-            <a:off x="6167120" y="1874519"/>
-            <a:ext cx="1070864" cy="566928"/>
-          </a:xfrm>
-          <a:prstGeom prst="rect">
-            <a:avLst/>
-          </a:prstGeom>
-          <a:noFill/>
-        </p:spPr>
-        <p:txBody>
-          <a:bodyPr wrap="square" anchor="ctr" lIns="64008" rIns="64008" tIns="27432" bIns="27432">
-            <a:normAutofit/>
-          </a:bodyPr>
-          <a:lstStyle/>
-          <a:p>
-            <a:pPr algn="ctr">
-              <a:spcAft>
-                <a:spcPts val="0"/>
-              </a:spcAft>
-            </a:pPr>
-            <a:r>
-              <a:rPr sz="850" b="1">
-                <a:solidFill>
-                  <a:srgbClr val="FFFFFF"/>
-                </a:solidFill>
-                <a:latin typeface="Calibri"/>
-              </a:rPr>
-              <a:t>5 · Consultation</a:t>
-            </a:r>
-          </a:p>
-        </p:txBody>
-      </p:sp>
-      <p:sp>
-        <p:nvSpPr>
-          <p:cNvPr id="49" name="Rounded Rectangle 48"/>
-          <p:cNvSpPr/>
-          <p:nvPr/>
-        </p:nvSpPr>
-        <p:spPr>
-          <a:xfrm>
-            <a:off x="6167120" y="2487168"/>
-            <a:ext cx="1070864" cy="1783080"/>
-          </a:xfrm>
-          <a:prstGeom prst="roundRect">
-            <a:avLst>
-              <a:gd name="adj" fmla="val 8538"/>
-            </a:avLst>
-          </a:prstGeom>
-          <a:solidFill>
-            <a:srgbClr val="F6E5D7"/>
-          </a:solidFill>
-          <a:ln>
-            <a:noFill/>
-          </a:ln>
-          <a:effectLst/>
-        </p:spPr>
-        <p:style>
-          <a:lnRef idx="1">
-            <a:schemeClr val="accent1"/>
-          </a:lnRef>
-          <a:fillRef idx="3">
-            <a:schemeClr val="accent1"/>
-          </a:fillRef>
-          <a:effectRef idx="2">
-            <a:schemeClr val="accent1"/>
-          </a:effectRef>
-          <a:fontRef idx="minor">
-            <a:schemeClr val="lt1"/>
-          </a:fontRef>
-        </p:style>
-        <p:txBody>
-          <a:bodyPr rtlCol="0" anchor="ctr"/>
-          <a:lstStyle/>
-          <a:p>
-            <a:pPr algn="ctr"/>
-          </a:p>
-        </p:txBody>
-      </p:sp>
-      <p:sp>
-        <p:nvSpPr>
-          <p:cNvPr id="50" name="TextBox 49"/>
-          <p:cNvSpPr txBox="1"/>
-          <p:nvPr/>
-        </p:nvSpPr>
-        <p:spPr>
-          <a:xfrm>
-            <a:off x="6167120" y="2487168"/>
-            <a:ext cx="1070864" cy="1783080"/>
-          </a:xfrm>
-          <a:prstGeom prst="rect">
-            <a:avLst/>
-          </a:prstGeom>
-          <a:noFill/>
-        </p:spPr>
-        <p:txBody>
-          <a:bodyPr wrap="square" anchor="ctr" lIns="64008" rIns="64008" tIns="27432" bIns="27432">
-            <a:normAutofit/>
-          </a:bodyPr>
-          <a:lstStyle/>
-          <a:p>
-            <a:pPr algn="ctr">
-              <a:spcAft>
-                <a:spcPts val="0"/>
-              </a:spcAft>
-            </a:pPr>
-            <a:r>
-              <a:rPr sz="950" b="0">
-                <a:solidFill>
-                  <a:srgbClr val="15302E"/>
-                </a:solidFill>
-                <a:latin typeface="Calibri"/>
-              </a:rPr>
-              <a:t>Schedule the consult + calendar / video links.</a:t>
-            </a:r>
-          </a:p>
-        </p:txBody>
-      </p:sp>
-      <p:sp>
-        <p:nvSpPr>
-          <p:cNvPr id="51" name="Rounded Rectangle 50"/>
-          <p:cNvSpPr/>
-          <p:nvPr/>
-        </p:nvSpPr>
-        <p:spPr>
-          <a:xfrm>
-            <a:off x="6167120" y="4315968"/>
-            <a:ext cx="1070864" cy="1325880"/>
-          </a:xfrm>
-          <a:prstGeom prst="roundRect">
-            <a:avLst>
-              <a:gd name="adj" fmla="val 8538"/>
-            </a:avLst>
-          </a:prstGeom>
-          <a:solidFill>
-            <a:srgbClr val="F6E5D7"/>
-          </a:solidFill>
-          <a:ln>
-            <a:noFill/>
-          </a:ln>
-          <a:effectLst/>
-        </p:spPr>
-        <p:style>
-          <a:lnRef idx="1">
-            <a:schemeClr val="accent1"/>
-          </a:lnRef>
-          <a:fillRef idx="3">
-            <a:schemeClr val="accent1"/>
-          </a:fillRef>
-          <a:effectRef idx="2">
-            <a:schemeClr val="accent1"/>
-          </a:effectRef>
-          <a:fontRef idx="minor">
-            <a:schemeClr val="lt1"/>
-          </a:fontRef>
-        </p:style>
-        <p:txBody>
-          <a:bodyPr rtlCol="0" anchor="ctr"/>
-          <a:lstStyle/>
-          <a:p>
-            <a:pPr algn="ctr"/>
-          </a:p>
-        </p:txBody>
-      </p:sp>
-      <p:sp>
-        <p:nvSpPr>
-          <p:cNvPr id="52" name="TextBox 51"/>
-          <p:cNvSpPr txBox="1"/>
-          <p:nvPr/>
-        </p:nvSpPr>
-        <p:spPr>
-          <a:xfrm>
-            <a:off x="6167120" y="4315968"/>
-            <a:ext cx="1070864" cy="1325880"/>
-          </a:xfrm>
-          <a:prstGeom prst="rect">
-            <a:avLst/>
-          </a:prstGeom>
-          <a:noFill/>
-        </p:spPr>
-        <p:txBody>
-          <a:bodyPr wrap="square" anchor="ctr" lIns="64008" rIns="64008" tIns="27432" bIns="27432">
-            <a:normAutofit/>
-          </a:bodyPr>
-          <a:lstStyle/>
-          <a:p>
-            <a:pPr algn="ctr">
-              <a:spcAft>
-                <a:spcPts val="0"/>
-              </a:spcAft>
-            </a:pPr>
-            <a:r>
-              <a:rPr sz="950" b="0">
-                <a:solidFill>
-                  <a:srgbClr val="15302E"/>
-                </a:solidFill>
-                <a:latin typeface="Calibri"/>
-              </a:rPr>
-              <a:t>Clinician web + calendar / video</a:t>
-            </a:r>
-          </a:p>
-        </p:txBody>
-      </p:sp>
-      <p:sp>
-        <p:nvSpPr>
-          <p:cNvPr id="53" name="Rounded Rectangle 52"/>
-          <p:cNvSpPr/>
-          <p:nvPr/>
-        </p:nvSpPr>
-        <p:spPr>
-          <a:xfrm>
-            <a:off x="7301992" y="1874519"/>
-            <a:ext cx="1070864" cy="566928"/>
-          </a:xfrm>
-          <a:prstGeom prst="roundRect">
-            <a:avLst>
-              <a:gd name="adj" fmla="val 19354"/>
-            </a:avLst>
-          </a:prstGeom>
-          <a:solidFill>
-            <a:srgbClr val="C0703F"/>
-          </a:solidFill>
-          <a:ln>
-            <a:noFill/>
-          </a:ln>
-          <a:effectLst/>
-        </p:spPr>
-        <p:style>
-          <a:lnRef idx="1">
-            <a:schemeClr val="accent1"/>
-          </a:lnRef>
-          <a:fillRef idx="3">
-            <a:schemeClr val="accent1"/>
-          </a:fillRef>
-          <a:effectRef idx="2">
-            <a:schemeClr val="accent1"/>
-          </a:effectRef>
-          <a:fontRef idx="minor">
-            <a:schemeClr val="lt1"/>
-          </a:fontRef>
-        </p:style>
-        <p:txBody>
-          <a:bodyPr rtlCol="0" anchor="ctr"/>
-          <a:lstStyle/>
-          <a:p>
-            <a:pPr algn="ctr"/>
-          </a:p>
-        </p:txBody>
-      </p:sp>
-      <p:sp>
-        <p:nvSpPr>
-          <p:cNvPr id="54" name="TextBox 53"/>
-          <p:cNvSpPr txBox="1"/>
-          <p:nvPr/>
-        </p:nvSpPr>
-        <p:spPr>
-          <a:xfrm>
-            <a:off x="7301992" y="1874519"/>
-            <a:ext cx="1070864" cy="566928"/>
-          </a:xfrm>
-          <a:prstGeom prst="rect">
-            <a:avLst/>
-          </a:prstGeom>
-          <a:noFill/>
-        </p:spPr>
-        <p:txBody>
-          <a:bodyPr wrap="square" anchor="ctr" lIns="64008" rIns="64008" tIns="27432" bIns="27432">
-            <a:normAutofit/>
-          </a:bodyPr>
-          <a:lstStyle/>
-          <a:p>
-            <a:pPr algn="ctr">
-              <a:spcAft>
-                <a:spcPts val="0"/>
-              </a:spcAft>
-            </a:pPr>
-            <a:r>
-              <a:rPr sz="850" b="1">
-                <a:solidFill>
-                  <a:srgbClr val="FFFFFF"/>
-                </a:solidFill>
-                <a:latin typeface="Calibri"/>
-              </a:rPr>
-              <a:t>6 · Triage decision</a:t>
-            </a:r>
-          </a:p>
-        </p:txBody>
-      </p:sp>
-      <p:sp>
-        <p:nvSpPr>
-          <p:cNvPr id="55" name="Rounded Rectangle 54"/>
-          <p:cNvSpPr/>
-          <p:nvPr/>
-        </p:nvSpPr>
-        <p:spPr>
-          <a:xfrm>
-            <a:off x="7301992" y="2487168"/>
-            <a:ext cx="1070864" cy="1783080"/>
-          </a:xfrm>
-          <a:prstGeom prst="roundRect">
-            <a:avLst>
-              <a:gd name="adj" fmla="val 8538"/>
-            </a:avLst>
-          </a:prstGeom>
-          <a:solidFill>
-            <a:srgbClr val="F6E5D7"/>
-          </a:solidFill>
-          <a:ln>
-            <a:noFill/>
-          </a:ln>
-          <a:effectLst/>
-        </p:spPr>
-        <p:style>
-          <a:lnRef idx="1">
-            <a:schemeClr val="accent1"/>
-          </a:lnRef>
-          <a:fillRef idx="3">
-            <a:schemeClr val="accent1"/>
-          </a:fillRef>
-          <a:effectRef idx="2">
-            <a:schemeClr val="accent1"/>
-          </a:effectRef>
-          <a:fontRef idx="minor">
-            <a:schemeClr val="lt1"/>
-          </a:fontRef>
-        </p:style>
-        <p:txBody>
-          <a:bodyPr rtlCol="0" anchor="ctr"/>
-          <a:lstStyle/>
-          <a:p>
-            <a:pPr algn="ctr"/>
-          </a:p>
-        </p:txBody>
-      </p:sp>
-      <p:sp>
-        <p:nvSpPr>
-          <p:cNvPr id="56" name="TextBox 55"/>
-          <p:cNvSpPr txBox="1"/>
-          <p:nvPr/>
-        </p:nvSpPr>
-        <p:spPr>
-          <a:xfrm>
-            <a:off x="7301992" y="2487168"/>
-            <a:ext cx="1070864" cy="1783080"/>
-          </a:xfrm>
-          <a:prstGeom prst="rect">
-            <a:avLst/>
-          </a:prstGeom>
-          <a:noFill/>
-        </p:spPr>
-        <p:txBody>
-          <a:bodyPr wrap="square" anchor="ctr" lIns="64008" rIns="64008" tIns="27432" bIns="27432">
-            <a:normAutofit/>
-          </a:bodyPr>
-          <a:lstStyle/>
-          <a:p>
-            <a:pPr algn="ctr">
-              <a:spcAft>
-                <a:spcPts val="0"/>
-              </a:spcAft>
-            </a:pPr>
-            <a:r>
-              <a:rPr sz="950" b="0">
-                <a:solidFill>
-                  <a:srgbClr val="15302E"/>
-                </a:solidFill>
-                <a:latin typeface="Calibri"/>
-              </a:rPr>
-              <a:t>Capture triage outcome + rationale (configurable).</a:t>
-            </a:r>
-          </a:p>
-        </p:txBody>
-      </p:sp>
-      <p:sp>
-        <p:nvSpPr>
-          <p:cNvPr id="57" name="Rounded Rectangle 56"/>
-          <p:cNvSpPr/>
-          <p:nvPr/>
-        </p:nvSpPr>
-        <p:spPr>
-          <a:xfrm>
-            <a:off x="7301992" y="4315968"/>
-            <a:ext cx="1070864" cy="1325880"/>
-          </a:xfrm>
-          <a:prstGeom prst="roundRect">
-            <a:avLst>
-              <a:gd name="adj" fmla="val 8538"/>
-            </a:avLst>
-          </a:prstGeom>
-          <a:solidFill>
-            <a:srgbClr val="F6E5D7"/>
-          </a:solidFill>
-          <a:ln>
-            <a:noFill/>
-          </a:ln>
-          <a:effectLst/>
-        </p:spPr>
-        <p:style>
-          <a:lnRef idx="1">
-            <a:schemeClr val="accent1"/>
-          </a:lnRef>
-          <a:fillRef idx="3">
-            <a:schemeClr val="accent1"/>
-          </a:fillRef>
-          <a:effectRef idx="2">
-            <a:schemeClr val="accent1"/>
-          </a:effectRef>
-          <a:fontRef idx="minor">
-            <a:schemeClr val="lt1"/>
-          </a:fontRef>
-        </p:style>
-        <p:txBody>
-          <a:bodyPr rtlCol="0" anchor="ctr"/>
-          <a:lstStyle/>
-          <a:p>
-            <a:pPr algn="ctr"/>
-          </a:p>
-        </p:txBody>
-      </p:sp>
-      <p:sp>
-        <p:nvSpPr>
-          <p:cNvPr id="58" name="TextBox 57"/>
-          <p:cNvSpPr txBox="1"/>
-          <p:nvPr/>
-        </p:nvSpPr>
-        <p:spPr>
-          <a:xfrm>
-            <a:off x="7301992" y="4315968"/>
-            <a:ext cx="1070864" cy="1325880"/>
-          </a:xfrm>
-          <a:prstGeom prst="rect">
-            <a:avLst/>
-          </a:prstGeom>
-          <a:noFill/>
-        </p:spPr>
-        <p:txBody>
-          <a:bodyPr wrap="square" anchor="ctr" lIns="64008" rIns="64008" tIns="27432" bIns="27432">
-            <a:normAutofit/>
-          </a:bodyPr>
-          <a:lstStyle/>
-          <a:p>
-            <a:pPr algn="ctr">
-              <a:spcAft>
-                <a:spcPts val="0"/>
-              </a:spcAft>
-            </a:pPr>
-            <a:r>
-              <a:rPr sz="950" b="0">
-                <a:solidFill>
-                  <a:srgbClr val="15302E"/>
-                </a:solidFill>
-                <a:latin typeface="Calibri"/>
-              </a:rPr>
-              <a:t>Clinician web — triage</a:t>
-            </a:r>
-          </a:p>
-        </p:txBody>
-      </p:sp>
-      <p:sp>
-        <p:nvSpPr>
-          <p:cNvPr id="59" name="Rounded Rectangle 58"/>
-          <p:cNvSpPr/>
-          <p:nvPr/>
-        </p:nvSpPr>
-        <p:spPr>
-          <a:xfrm>
-            <a:off x="8436864" y="1874519"/>
-            <a:ext cx="1070864" cy="566928"/>
-          </a:xfrm>
-          <a:prstGeom prst="roundRect">
-            <a:avLst>
-              <a:gd name="adj" fmla="val 19354"/>
-            </a:avLst>
-          </a:prstGeom>
-          <a:solidFill>
-            <a:srgbClr val="6E5A86"/>
-          </a:solidFill>
-          <a:ln>
-            <a:noFill/>
-          </a:ln>
-          <a:effectLst/>
-        </p:spPr>
-        <p:style>
-          <a:lnRef idx="1">
-            <a:schemeClr val="accent1"/>
-          </a:lnRef>
-          <a:fillRef idx="3">
-            <a:schemeClr val="accent1"/>
-          </a:fillRef>
-          <a:effectRef idx="2">
-            <a:schemeClr val="accent1"/>
-          </a:effectRef>
-          <a:fontRef idx="minor">
-            <a:schemeClr val="lt1"/>
-          </a:fontRef>
-        </p:style>
-        <p:txBody>
-          <a:bodyPr rtlCol="0" anchor="ctr"/>
-          <a:lstStyle/>
-          <a:p>
-            <a:pPr algn="ctr"/>
-          </a:p>
-        </p:txBody>
-      </p:sp>
-      <p:sp>
-        <p:nvSpPr>
-          <p:cNvPr id="60" name="TextBox 59"/>
-          <p:cNvSpPr txBox="1"/>
-          <p:nvPr/>
-        </p:nvSpPr>
-        <p:spPr>
-          <a:xfrm>
-            <a:off x="8436864" y="1874519"/>
-            <a:ext cx="1070864" cy="566928"/>
-          </a:xfrm>
-          <a:prstGeom prst="rect">
-            <a:avLst/>
-          </a:prstGeom>
-          <a:noFill/>
-        </p:spPr>
-        <p:txBody>
-          <a:bodyPr wrap="square" anchor="ctr" lIns="64008" rIns="64008" tIns="27432" bIns="27432">
-            <a:normAutofit/>
-          </a:bodyPr>
-          <a:lstStyle/>
-          <a:p>
-            <a:pPr algn="ctr">
-              <a:spcAft>
-                <a:spcPts val="0"/>
-              </a:spcAft>
-            </a:pPr>
-            <a:r>
-              <a:rPr sz="850" b="1">
-                <a:solidFill>
-                  <a:srgbClr val="FFFFFF"/>
-                </a:solidFill>
-                <a:latin typeface="Calibri"/>
-              </a:rPr>
-              <a:t>7 · First session plan</a:t>
-            </a:r>
-          </a:p>
-        </p:txBody>
-      </p:sp>
-      <p:sp>
-        <p:nvSpPr>
-          <p:cNvPr id="61" name="Rounded Rectangle 60"/>
-          <p:cNvSpPr/>
-          <p:nvPr/>
-        </p:nvSpPr>
-        <p:spPr>
-          <a:xfrm>
-            <a:off x="8436864" y="2487168"/>
-            <a:ext cx="1070864" cy="1783080"/>
-          </a:xfrm>
-          <a:prstGeom prst="roundRect">
-            <a:avLst>
-              <a:gd name="adj" fmla="val 8538"/>
-            </a:avLst>
-          </a:prstGeom>
-          <a:solidFill>
-            <a:srgbClr val="E8E2F0"/>
-          </a:solidFill>
-          <a:ln>
-            <a:noFill/>
-          </a:ln>
-          <a:effectLst/>
-        </p:spPr>
-        <p:style>
-          <a:lnRef idx="1">
-            <a:schemeClr val="accent1"/>
-          </a:lnRef>
-          <a:fillRef idx="3">
-            <a:schemeClr val="accent1"/>
-          </a:fillRef>
-          <a:effectRef idx="2">
-            <a:schemeClr val="accent1"/>
-          </a:effectRef>
-          <a:fontRef idx="minor">
-            <a:schemeClr val="lt1"/>
-          </a:fontRef>
-        </p:style>
-        <p:txBody>
-          <a:bodyPr rtlCol="0" anchor="ctr"/>
-          <a:lstStyle/>
-          <a:p>
-            <a:pPr algn="ctr"/>
-          </a:p>
-        </p:txBody>
-      </p:sp>
-      <p:sp>
-        <p:nvSpPr>
-          <p:cNvPr id="62" name="TextBox 61"/>
-          <p:cNvSpPr txBox="1"/>
-          <p:nvPr/>
-        </p:nvSpPr>
-        <p:spPr>
-          <a:xfrm>
-            <a:off x="8436864" y="2487168"/>
-            <a:ext cx="1070864" cy="1783080"/>
-          </a:xfrm>
-          <a:prstGeom prst="rect">
-            <a:avLst/>
-          </a:prstGeom>
-          <a:noFill/>
-        </p:spPr>
-        <p:txBody>
-          <a:bodyPr wrap="square" anchor="ctr" lIns="64008" rIns="64008" tIns="27432" bIns="27432">
-            <a:normAutofit/>
-          </a:bodyPr>
-          <a:lstStyle/>
-          <a:p>
-            <a:pPr algn="ctr">
-              <a:spcAft>
-                <a:spcPts val="0"/>
-              </a:spcAft>
-            </a:pPr>
-            <a:r>
-              <a:rPr sz="950" b="0">
-                <a:solidFill>
-                  <a:srgbClr val="15302E"/>
-                </a:solidFill>
-                <a:latin typeface="Calibri"/>
-              </a:rPr>
-              <a:t>AI-drafted, clinician-edited first session plan.</a:t>
-            </a:r>
-          </a:p>
-        </p:txBody>
-      </p:sp>
-      <p:sp>
-        <p:nvSpPr>
-          <p:cNvPr id="63" name="Rounded Rectangle 62"/>
-          <p:cNvSpPr/>
-          <p:nvPr/>
-        </p:nvSpPr>
-        <p:spPr>
-          <a:xfrm>
-            <a:off x="8436864" y="4315968"/>
-            <a:ext cx="1070864" cy="1325880"/>
-          </a:xfrm>
-          <a:prstGeom prst="roundRect">
-            <a:avLst>
-              <a:gd name="adj" fmla="val 8538"/>
-            </a:avLst>
-          </a:prstGeom>
-          <a:solidFill>
-            <a:srgbClr val="E8E2F0"/>
-          </a:solidFill>
-          <a:ln>
-            <a:noFill/>
-          </a:ln>
-          <a:effectLst/>
-        </p:spPr>
-        <p:style>
-          <a:lnRef idx="1">
-            <a:schemeClr val="accent1"/>
-          </a:lnRef>
-          <a:fillRef idx="3">
-            <a:schemeClr val="accent1"/>
-          </a:fillRef>
-          <a:effectRef idx="2">
-            <a:schemeClr val="accent1"/>
-          </a:effectRef>
-          <a:fontRef idx="minor">
-            <a:schemeClr val="lt1"/>
-          </a:fontRef>
-        </p:style>
-        <p:txBody>
-          <a:bodyPr rtlCol="0" anchor="ctr"/>
-          <a:lstStyle/>
-          <a:p>
-            <a:pPr algn="ctr"/>
-          </a:p>
-        </p:txBody>
-      </p:sp>
-      <p:sp>
-        <p:nvSpPr>
-          <p:cNvPr id="64" name="TextBox 63"/>
-          <p:cNvSpPr txBox="1"/>
-          <p:nvPr/>
-        </p:nvSpPr>
-        <p:spPr>
-          <a:xfrm>
-            <a:off x="8436864" y="4315968"/>
-            <a:ext cx="1070864" cy="1325880"/>
-          </a:xfrm>
-          <a:prstGeom prst="rect">
-            <a:avLst/>
-          </a:prstGeom>
-          <a:noFill/>
-        </p:spPr>
-        <p:txBody>
-          <a:bodyPr wrap="square" anchor="ctr" lIns="64008" rIns="64008" tIns="27432" bIns="27432">
-            <a:normAutofit/>
-          </a:bodyPr>
-          <a:lstStyle/>
-          <a:p>
-            <a:pPr algn="ctr">
-              <a:spcAft>
-                <a:spcPts val="0"/>
-              </a:spcAft>
-            </a:pPr>
-            <a:r>
-              <a:rPr sz="950" b="0">
-                <a:solidFill>
-                  <a:srgbClr val="15302E"/>
-                </a:solidFill>
-                <a:latin typeface="Calibri"/>
-              </a:rPr>
-              <a:t>Clinician web + AI worker</a:t>
-            </a:r>
-          </a:p>
-        </p:txBody>
-      </p:sp>
-      <p:sp>
-        <p:nvSpPr>
-          <p:cNvPr id="65" name="Rounded Rectangle 64"/>
-          <p:cNvSpPr/>
-          <p:nvPr/>
-        </p:nvSpPr>
-        <p:spPr>
-          <a:xfrm>
-            <a:off x="9571736" y="1874519"/>
-            <a:ext cx="1070864" cy="566928"/>
-          </a:xfrm>
-          <a:prstGeom prst="roundRect">
-            <a:avLst>
-              <a:gd name="adj" fmla="val 19354"/>
-            </a:avLst>
-          </a:prstGeom>
-          <a:solidFill>
-            <a:srgbClr val="6E5A86"/>
-          </a:solidFill>
-          <a:ln>
-            <a:noFill/>
-          </a:ln>
-          <a:effectLst/>
-        </p:spPr>
-        <p:style>
-          <a:lnRef idx="1">
-            <a:schemeClr val="accent1"/>
-          </a:lnRef>
-          <a:fillRef idx="3">
-            <a:schemeClr val="accent1"/>
-          </a:fillRef>
-          <a:effectRef idx="2">
-            <a:schemeClr val="accent1"/>
-          </a:effectRef>
-          <a:fontRef idx="minor">
-            <a:schemeClr val="lt1"/>
-          </a:fontRef>
-        </p:style>
-        <p:txBody>
-          <a:bodyPr rtlCol="0" anchor="ctr"/>
-          <a:lstStyle/>
-          <a:p>
-            <a:pPr algn="ctr"/>
-          </a:p>
-        </p:txBody>
-      </p:sp>
-      <p:sp>
-        <p:nvSpPr>
-          <p:cNvPr id="66" name="TextBox 65"/>
-          <p:cNvSpPr txBox="1"/>
-          <p:nvPr/>
-        </p:nvSpPr>
-        <p:spPr>
-          <a:xfrm>
-            <a:off x="9571736" y="1874519"/>
-            <a:ext cx="1070864" cy="566928"/>
-          </a:xfrm>
-          <a:prstGeom prst="rect">
-            <a:avLst/>
-          </a:prstGeom>
-          <a:noFill/>
-        </p:spPr>
-        <p:txBody>
-          <a:bodyPr wrap="square" anchor="ctr" lIns="64008" rIns="64008" tIns="27432" bIns="27432">
-            <a:normAutofit/>
-          </a:bodyPr>
-          <a:lstStyle/>
-          <a:p>
-            <a:pPr algn="ctr">
-              <a:spcAft>
-                <a:spcPts val="0"/>
-              </a:spcAft>
-            </a:pPr>
-            <a:r>
-              <a:rPr sz="850" b="1">
-                <a:solidFill>
-                  <a:srgbClr val="FFFFFF"/>
-                </a:solidFill>
-                <a:latin typeface="Calibri"/>
-              </a:rPr>
-              <a:t>8 · Client / family summary</a:t>
-            </a:r>
-          </a:p>
-        </p:txBody>
-      </p:sp>
-      <p:sp>
-        <p:nvSpPr>
-          <p:cNvPr id="67" name="Rounded Rectangle 66"/>
-          <p:cNvSpPr/>
-          <p:nvPr/>
-        </p:nvSpPr>
-        <p:spPr>
-          <a:xfrm>
-            <a:off x="9571736" y="2487168"/>
-            <a:ext cx="1070864" cy="1783080"/>
-          </a:xfrm>
-          <a:prstGeom prst="roundRect">
-            <a:avLst>
-              <a:gd name="adj" fmla="val 8538"/>
-            </a:avLst>
-          </a:prstGeom>
-          <a:solidFill>
-            <a:srgbClr val="E8E2F0"/>
-          </a:solidFill>
-          <a:ln>
-            <a:noFill/>
-          </a:ln>
-          <a:effectLst/>
-        </p:spPr>
-        <p:style>
-          <a:lnRef idx="1">
-            <a:schemeClr val="accent1"/>
-          </a:lnRef>
-          <a:fillRef idx="3">
-            <a:schemeClr val="accent1"/>
-          </a:fillRef>
-          <a:effectRef idx="2">
-            <a:schemeClr val="accent1"/>
-          </a:effectRef>
-          <a:fontRef idx="minor">
-            <a:schemeClr val="lt1"/>
-          </a:fontRef>
-        </p:style>
-        <p:txBody>
-          <a:bodyPr rtlCol="0" anchor="ctr"/>
-          <a:lstStyle/>
-          <a:p>
-            <a:pPr algn="ctr"/>
-          </a:p>
-        </p:txBody>
-      </p:sp>
-      <p:sp>
-        <p:nvSpPr>
-          <p:cNvPr id="68" name="TextBox 67"/>
-          <p:cNvSpPr txBox="1"/>
-          <p:nvPr/>
-        </p:nvSpPr>
-        <p:spPr>
-          <a:xfrm>
-            <a:off x="9571736" y="2487168"/>
-            <a:ext cx="1070864" cy="1783080"/>
-          </a:xfrm>
-          <a:prstGeom prst="rect">
-            <a:avLst/>
-          </a:prstGeom>
-          <a:noFill/>
-        </p:spPr>
-        <p:txBody>
-          <a:bodyPr wrap="square" anchor="ctr" lIns="64008" rIns="64008" tIns="27432" bIns="27432">
-            <a:normAutofit/>
-          </a:bodyPr>
-          <a:lstStyle/>
-          <a:p>
-            <a:pPr algn="ctr">
-              <a:spcAft>
-                <a:spcPts val="0"/>
-              </a:spcAft>
-            </a:pPr>
-            <a:r>
-              <a:rPr sz="950" b="0">
-                <a:solidFill>
-                  <a:srgbClr val="15302E"/>
-                </a:solidFill>
-                <a:latin typeface="Calibri"/>
-              </a:rPr>
-              <a:t>Tone / reading-level client summary via secure portal.</a:t>
-            </a:r>
-          </a:p>
-        </p:txBody>
-      </p:sp>
-      <p:sp>
-        <p:nvSpPr>
-          <p:cNvPr id="69" name="Rounded Rectangle 68"/>
-          <p:cNvSpPr/>
-          <p:nvPr/>
-        </p:nvSpPr>
-        <p:spPr>
-          <a:xfrm>
-            <a:off x="9571736" y="4315968"/>
-            <a:ext cx="1070864" cy="1325880"/>
-          </a:xfrm>
-          <a:prstGeom prst="roundRect">
-            <a:avLst>
-              <a:gd name="adj" fmla="val 8538"/>
-            </a:avLst>
-          </a:prstGeom>
-          <a:solidFill>
-            <a:srgbClr val="E8E2F0"/>
-          </a:solidFill>
-          <a:ln>
-            <a:noFill/>
-          </a:ln>
-          <a:effectLst/>
-        </p:spPr>
-        <p:style>
-          <a:lnRef idx="1">
-            <a:schemeClr val="accent1"/>
-          </a:lnRef>
-          <a:fillRef idx="3">
-            <a:schemeClr val="accent1"/>
-          </a:fillRef>
-          <a:effectRef idx="2">
-            <a:schemeClr val="accent1"/>
-          </a:effectRef>
-          <a:fontRef idx="minor">
-            <a:schemeClr val="lt1"/>
-          </a:fontRef>
-        </p:style>
-        <p:txBody>
-          <a:bodyPr rtlCol="0" anchor="ctr"/>
-          <a:lstStyle/>
-          <a:p>
-            <a:pPr algn="ctr"/>
-          </a:p>
-        </p:txBody>
-      </p:sp>
-      <p:sp>
-        <p:nvSpPr>
-          <p:cNvPr id="70" name="TextBox 69"/>
-          <p:cNvSpPr txBox="1"/>
-          <p:nvPr/>
-        </p:nvSpPr>
-        <p:spPr>
-          <a:xfrm>
-            <a:off x="9571736" y="4315968"/>
-            <a:ext cx="1070864" cy="1325880"/>
-          </a:xfrm>
-          <a:prstGeom prst="rect">
-            <a:avLst/>
-          </a:prstGeom>
-          <a:noFill/>
-        </p:spPr>
-        <p:txBody>
-          <a:bodyPr wrap="square" anchor="ctr" lIns="64008" rIns="64008" tIns="27432" bIns="27432">
-            <a:normAutofit/>
-          </a:bodyPr>
-          <a:lstStyle/>
-          <a:p>
-            <a:pPr algn="ctr">
-              <a:spcAft>
-                <a:spcPts val="0"/>
-              </a:spcAft>
-            </a:pPr>
-            <a:r>
-              <a:rPr sz="950" b="0">
-                <a:solidFill>
-                  <a:srgbClr val="15302E"/>
-                </a:solidFill>
-                <a:latin typeface="Calibri"/>
-              </a:rPr>
-              <a:t>Client portal / app + AI worker</a:t>
-            </a:r>
-          </a:p>
-        </p:txBody>
-      </p:sp>
-      <p:sp>
-        <p:nvSpPr>
-          <p:cNvPr id="71" name="Rounded Rectangle 70"/>
-          <p:cNvSpPr/>
-          <p:nvPr/>
-        </p:nvSpPr>
-        <p:spPr>
-          <a:xfrm>
-            <a:off x="10706608" y="1874519"/>
-            <a:ext cx="1070864" cy="566928"/>
-          </a:xfrm>
-          <a:prstGeom prst="roundRect">
-            <a:avLst>
-              <a:gd name="adj" fmla="val 19354"/>
-            </a:avLst>
-          </a:prstGeom>
-          <a:solidFill>
-            <a:srgbClr val="4C8060"/>
-          </a:solidFill>
-          <a:ln>
-            <a:noFill/>
-          </a:ln>
-          <a:effectLst/>
-        </p:spPr>
-        <p:style>
-          <a:lnRef idx="1">
-            <a:schemeClr val="accent1"/>
-          </a:lnRef>
-          <a:fillRef idx="3">
-            <a:schemeClr val="accent1"/>
-          </a:fillRef>
-          <a:effectRef idx="2">
-            <a:schemeClr val="accent1"/>
-          </a:effectRef>
-          <a:fontRef idx="minor">
-            <a:schemeClr val="lt1"/>
-          </a:fontRef>
-        </p:style>
-        <p:txBody>
-          <a:bodyPr rtlCol="0" anchor="ctr"/>
-          <a:lstStyle/>
-          <a:p>
-            <a:pPr algn="ctr"/>
-          </a:p>
-        </p:txBody>
-      </p:sp>
-      <p:sp>
-        <p:nvSpPr>
-          <p:cNvPr id="72" name="TextBox 71"/>
-          <p:cNvSpPr txBox="1"/>
-          <p:nvPr/>
-        </p:nvSpPr>
-        <p:spPr>
-          <a:xfrm>
-            <a:off x="10706608" y="1874519"/>
-            <a:ext cx="1070864" cy="566928"/>
-          </a:xfrm>
-          <a:prstGeom prst="rect">
-            <a:avLst/>
-          </a:prstGeom>
-          <a:noFill/>
-        </p:spPr>
-        <p:txBody>
-          <a:bodyPr wrap="square" anchor="ctr" lIns="64008" rIns="64008" tIns="27432" bIns="27432">
-            <a:normAutofit/>
-          </a:bodyPr>
-          <a:lstStyle/>
-          <a:p>
-            <a:pPr algn="ctr">
-              <a:spcAft>
-                <a:spcPts val="0"/>
-              </a:spcAft>
-            </a:pPr>
-            <a:r>
-              <a:rPr sz="850" b="1">
-                <a:solidFill>
-                  <a:srgbClr val="FFFFFF"/>
-                </a:solidFill>
-                <a:latin typeface="Calibri"/>
-              </a:rPr>
-              <a:t>9 · Carryover &amp; progress</a:t>
-            </a:r>
-          </a:p>
-        </p:txBody>
-      </p:sp>
-      <p:sp>
-        <p:nvSpPr>
-          <p:cNvPr id="73" name="Rounded Rectangle 72"/>
-          <p:cNvSpPr/>
-          <p:nvPr/>
-        </p:nvSpPr>
-        <p:spPr>
-          <a:xfrm>
-            <a:off x="10706608" y="2487168"/>
-            <a:ext cx="1070864" cy="1783080"/>
-          </a:xfrm>
-          <a:prstGeom prst="roundRect">
-            <a:avLst>
-              <a:gd name="adj" fmla="val 8538"/>
+              <a:gd name="adj" fmla="val 6000"/>
             </a:avLst>
           </a:prstGeom>
           <a:solidFill>
@@ -10307,14 +8968,14 @@
       </p:sp>
       <p:sp>
         <p:nvSpPr>
-          <p:cNvPr id="74" name="TextBox 73"/>
+          <p:cNvPr id="72" name="TextBox 71"/>
           <p:cNvSpPr txBox="1"/>
           <p:nvPr/>
         </p:nvSpPr>
         <p:spPr>
           <a:xfrm>
-            <a:off x="10706608" y="2487168"/>
-            <a:ext cx="1070864" cy="1783080"/>
+            <a:off x="10638366" y="2628900"/>
+            <a:ext cx="905933" cy="1143000"/>
           </a:xfrm>
           <a:prstGeom prst="rect">
             <a:avLst/>
@@ -10322,7 +8983,7 @@
           <a:noFill/>
         </p:spPr>
         <p:txBody>
-          <a:bodyPr wrap="square" anchor="ctr" lIns="64008" rIns="64008" tIns="27432" bIns="27432">
+          <a:bodyPr wrap="square" anchor="ctr" lIns="25400" rIns="25400" tIns="12700" bIns="12700">
             <a:normAutofit/>
           </a:bodyPr>
           <a:lstStyle/>
@@ -10333,31 +8994,31 @@
               </a:spcAft>
             </a:pPr>
             <a:r>
-              <a:rPr sz="950" b="0">
-                <a:solidFill>
-                  <a:srgbClr val="15302E"/>
-                </a:solidFill>
-                <a:latin typeface="Calibri"/>
+              <a:rPr sz="650" b="0">
+                <a:solidFill>
+                  <a:srgbClr val="142433"/>
+                </a:solidFill>
+                <a:latin typeface="Inter"/>
               </a:rPr>
-              <a:t>Resources, progress portal &amp; assessment-report loop.</a:t>
-            </a:r>
-          </a:p>
-        </p:txBody>
-      </p:sp>
-      <p:sp>
-        <p:nvSpPr>
-          <p:cNvPr id="75" name="Rounded Rectangle 74"/>
+              <a:t>Resources, progress portal &amp; report loop.</a:t>
+            </a:r>
+          </a:p>
+        </p:txBody>
+      </p:sp>
+      <p:sp>
+        <p:nvSpPr>
+          <p:cNvPr id="73" name="Rounded Rectangle 72"/>
           <p:cNvSpPr/>
           <p:nvPr/>
         </p:nvSpPr>
         <p:spPr>
           <a:xfrm>
-            <a:off x="10706608" y="4315968"/>
-            <a:ext cx="1070864" cy="1325880"/>
+            <a:off x="10562166" y="3822700"/>
+            <a:ext cx="1058333" cy="762000"/>
           </a:xfrm>
           <a:prstGeom prst="roundRect">
             <a:avLst>
-              <a:gd name="adj" fmla="val 8538"/>
+              <a:gd name="adj" fmla="val 8333"/>
             </a:avLst>
           </a:prstGeom>
           <a:solidFill>
@@ -10392,14 +9053,14 @@
       </p:sp>
       <p:sp>
         <p:nvSpPr>
-          <p:cNvPr id="76" name="TextBox 75"/>
+          <p:cNvPr id="74" name="TextBox 73"/>
           <p:cNvSpPr txBox="1"/>
           <p:nvPr/>
         </p:nvSpPr>
         <p:spPr>
           <a:xfrm>
-            <a:off x="10706608" y="4315968"/>
-            <a:ext cx="1070864" cy="1325880"/>
+            <a:off x="10638366" y="3822700"/>
+            <a:ext cx="905933" cy="762000"/>
           </a:xfrm>
           <a:prstGeom prst="rect">
             <a:avLst/>
@@ -10407,7 +9068,7 @@
           <a:noFill/>
         </p:spPr>
         <p:txBody>
-          <a:bodyPr wrap="square" anchor="ctr" lIns="64008" rIns="64008" tIns="27432" bIns="27432">
+          <a:bodyPr wrap="square" anchor="ctr" lIns="25400" rIns="25400" tIns="12700" bIns="12700">
             <a:normAutofit/>
           </a:bodyPr>
           <a:lstStyle/>
@@ -10418,11 +9079,11 @@
               </a:spcAft>
             </a:pPr>
             <a:r>
-              <a:rPr sz="950" b="0">
-                <a:solidFill>
-                  <a:srgbClr val="15302E"/>
-                </a:solidFill>
-                <a:latin typeface="Calibri"/>
+              <a:rPr sz="625" b="0">
+                <a:solidFill>
+                  <a:srgbClr val="142433"/>
+                </a:solidFill>
+                <a:latin typeface="Inter"/>
               </a:rPr>
               <a:t>Client app + clinician web</a:t>
             </a:r>
@@ -10431,14 +9092,14 @@
       </p:sp>
       <p:sp>
         <p:nvSpPr>
-          <p:cNvPr id="77" name="TextBox 76"/>
+          <p:cNvPr id="75" name="TextBox 74"/>
           <p:cNvSpPr txBox="1"/>
           <p:nvPr/>
         </p:nvSpPr>
         <p:spPr>
           <a:xfrm>
-            <a:off x="411480" y="5751576"/>
-            <a:ext cx="11365992" cy="274320"/>
+            <a:off x="571500" y="4902200"/>
+            <a:ext cx="5715000" cy="152400"/>
           </a:xfrm>
           <a:prstGeom prst="rect">
             <a:avLst/>
@@ -10446,7 +9107,7 @@
           <a:noFill/>
         </p:spPr>
         <p:txBody>
-          <a:bodyPr wrap="square" anchor="t" lIns="64008" rIns="64008" tIns="27432" bIns="27432">
+          <a:bodyPr wrap="square" anchor="t" lIns="25400" rIns="25400" tIns="12700" bIns="12700">
             <a:spAutoFit/>
           </a:bodyPr>
           <a:lstStyle/>
@@ -10457,13 +9118,470 @@
               </a:spcAft>
             </a:pPr>
             <a:r>
-              <a:rPr sz="1000" b="0">
-                <a:solidFill>
-                  <a:srgbClr val="8A938F"/>
-                </a:solidFill>
-                <a:latin typeface="Calibri"/>
+              <a:rPr sz="700" b="1">
+                <a:solidFill>
+                  <a:srgbClr val="8597A4"/>
+                </a:solidFill>
+                <a:latin typeface="Inter"/>
               </a:rPr>
-              <a:t>Generalized across SLTs (Pediatric &amp; Adult)   ·   Colour groups the 9 stages into their 5 phases.</a:t>
+              <a:t>WHERE SONA WINS</a:t>
+            </a:r>
+          </a:p>
+        </p:txBody>
+      </p:sp>
+      <p:sp>
+        <p:nvSpPr>
+          <p:cNvPr id="76" name="Rounded Rectangle 75"/>
+          <p:cNvSpPr/>
+          <p:nvPr/>
+        </p:nvSpPr>
+        <p:spPr>
+          <a:xfrm>
+            <a:off x="571500" y="5118100"/>
+            <a:ext cx="2667000" cy="520700"/>
+          </a:xfrm>
+          <a:prstGeom prst="roundRect">
+            <a:avLst>
+              <a:gd name="adj" fmla="val 14634"/>
+            </a:avLst>
+          </a:prstGeom>
+          <a:solidFill>
+            <a:srgbClr val="E6F0F0"/>
+          </a:solidFill>
+          <a:ln>
+            <a:noFill/>
+          </a:ln>
+          <a:effectLst/>
+        </p:spPr>
+        <p:style>
+          <a:lnRef idx="1">
+            <a:schemeClr val="accent1"/>
+          </a:lnRef>
+          <a:fillRef idx="3">
+            <a:schemeClr val="accent1"/>
+          </a:fillRef>
+          <a:effectRef idx="2">
+            <a:schemeClr val="accent1"/>
+          </a:effectRef>
+          <a:fontRef idx="minor">
+            <a:schemeClr val="lt1"/>
+          </a:fontRef>
+        </p:style>
+        <p:txBody>
+          <a:bodyPr rtlCol="0" anchor="ctr"/>
+          <a:lstStyle/>
+          <a:p>
+            <a:pPr algn="ctr"/>
+          </a:p>
+        </p:txBody>
+      </p:sp>
+      <p:sp>
+        <p:nvSpPr>
+          <p:cNvPr id="77" name="TextBox 76"/>
+          <p:cNvSpPr txBox="1"/>
+          <p:nvPr/>
+        </p:nvSpPr>
+        <p:spPr>
+          <a:xfrm>
+            <a:off x="673100" y="5118100"/>
+            <a:ext cx="2463800" cy="520700"/>
+          </a:xfrm>
+          <a:prstGeom prst="rect">
+            <a:avLst/>
+          </a:prstGeom>
+          <a:noFill/>
+        </p:spPr>
+        <p:txBody>
+          <a:bodyPr wrap="square" anchor="ctr" lIns="25400" rIns="25400" tIns="12700" bIns="12700">
+            <a:normAutofit/>
+          </a:bodyPr>
+          <a:lstStyle/>
+          <a:p>
+            <a:pPr algn="ctr">
+              <a:spcAft>
+                <a:spcPts val="0"/>
+              </a:spcAft>
+            </a:pPr>
+            <a:r>
+              <a:rPr sz="750" b="1">
+                <a:solidFill>
+                  <a:srgbClr val="2D6A6E"/>
+                </a:solidFill>
+                <a:latin typeface="Inter"/>
+              </a:rPr>
+              <a:t>Own the first 30 days as one reviewed loop</a:t>
+            </a:r>
+          </a:p>
+        </p:txBody>
+      </p:sp>
+      <p:sp>
+        <p:nvSpPr>
+          <p:cNvPr id="78" name="Rounded Rectangle 77"/>
+          <p:cNvSpPr/>
+          <p:nvPr/>
+        </p:nvSpPr>
+        <p:spPr>
+          <a:xfrm>
+            <a:off x="3365500" y="5118100"/>
+            <a:ext cx="2667000" cy="520700"/>
+          </a:xfrm>
+          <a:prstGeom prst="roundRect">
+            <a:avLst>
+              <a:gd name="adj" fmla="val 14634"/>
+            </a:avLst>
+          </a:prstGeom>
+          <a:solidFill>
+            <a:srgbClr val="E6F0F0"/>
+          </a:solidFill>
+          <a:ln>
+            <a:noFill/>
+          </a:ln>
+          <a:effectLst/>
+        </p:spPr>
+        <p:style>
+          <a:lnRef idx="1">
+            <a:schemeClr val="accent1"/>
+          </a:lnRef>
+          <a:fillRef idx="3">
+            <a:schemeClr val="accent1"/>
+          </a:fillRef>
+          <a:effectRef idx="2">
+            <a:schemeClr val="accent1"/>
+          </a:effectRef>
+          <a:fontRef idx="minor">
+            <a:schemeClr val="lt1"/>
+          </a:fontRef>
+        </p:style>
+        <p:txBody>
+          <a:bodyPr rtlCol="0" anchor="ctr"/>
+          <a:lstStyle/>
+          <a:p>
+            <a:pPr algn="ctr"/>
+          </a:p>
+        </p:txBody>
+      </p:sp>
+      <p:sp>
+        <p:nvSpPr>
+          <p:cNvPr id="79" name="TextBox 78"/>
+          <p:cNvSpPr txBox="1"/>
+          <p:nvPr/>
+        </p:nvSpPr>
+        <p:spPr>
+          <a:xfrm>
+            <a:off x="3467100" y="5118100"/>
+            <a:ext cx="2463800" cy="520700"/>
+          </a:xfrm>
+          <a:prstGeom prst="rect">
+            <a:avLst/>
+          </a:prstGeom>
+          <a:noFill/>
+        </p:spPr>
+        <p:txBody>
+          <a:bodyPr wrap="square" anchor="ctr" lIns="25400" rIns="25400" tIns="12700" bIns="12700">
+            <a:normAutofit/>
+          </a:bodyPr>
+          <a:lstStyle/>
+          <a:p>
+            <a:pPr algn="ctr">
+              <a:spcAft>
+                <a:spcPts val="0"/>
+              </a:spcAft>
+            </a:pPr>
+            <a:r>
+              <a:rPr sz="750" b="1">
+                <a:solidFill>
+                  <a:srgbClr val="2D6A6E"/>
+                </a:solidFill>
+                <a:latin typeface="Inter"/>
+              </a:rPr>
+              <a:t>Trust is the moat — clinician signs every AI draft</a:t>
+            </a:r>
+          </a:p>
+        </p:txBody>
+      </p:sp>
+      <p:sp>
+        <p:nvSpPr>
+          <p:cNvPr id="80" name="Rounded Rectangle 79"/>
+          <p:cNvSpPr/>
+          <p:nvPr/>
+        </p:nvSpPr>
+        <p:spPr>
+          <a:xfrm>
+            <a:off x="6159500" y="5118100"/>
+            <a:ext cx="2667000" cy="520700"/>
+          </a:xfrm>
+          <a:prstGeom prst="roundRect">
+            <a:avLst>
+              <a:gd name="adj" fmla="val 14634"/>
+            </a:avLst>
+          </a:prstGeom>
+          <a:solidFill>
+            <a:srgbClr val="E6F0F0"/>
+          </a:solidFill>
+          <a:ln>
+            <a:noFill/>
+          </a:ln>
+          <a:effectLst/>
+        </p:spPr>
+        <p:style>
+          <a:lnRef idx="1">
+            <a:schemeClr val="accent1"/>
+          </a:lnRef>
+          <a:fillRef idx="3">
+            <a:schemeClr val="accent1"/>
+          </a:fillRef>
+          <a:effectRef idx="2">
+            <a:schemeClr val="accent1"/>
+          </a:effectRef>
+          <a:fontRef idx="minor">
+            <a:schemeClr val="lt1"/>
+          </a:fontRef>
+        </p:style>
+        <p:txBody>
+          <a:bodyPr rtlCol="0" anchor="ctr"/>
+          <a:lstStyle/>
+          <a:p>
+            <a:pPr algn="ctr"/>
+          </a:p>
+        </p:txBody>
+      </p:sp>
+      <p:sp>
+        <p:nvSpPr>
+          <p:cNvPr id="81" name="TextBox 80"/>
+          <p:cNvSpPr txBox="1"/>
+          <p:nvPr/>
+        </p:nvSpPr>
+        <p:spPr>
+          <a:xfrm>
+            <a:off x="6261100" y="5118100"/>
+            <a:ext cx="2463800" cy="520700"/>
+          </a:xfrm>
+          <a:prstGeom prst="rect">
+            <a:avLst/>
+          </a:prstGeom>
+          <a:noFill/>
+        </p:spPr>
+        <p:txBody>
+          <a:bodyPr wrap="square" anchor="ctr" lIns="25400" rIns="25400" tIns="12700" bIns="12700">
+            <a:normAutofit/>
+          </a:bodyPr>
+          <a:lstStyle/>
+          <a:p>
+            <a:pPr algn="ctr">
+              <a:spcAft>
+                <a:spcPts val="0"/>
+              </a:spcAft>
+            </a:pPr>
+            <a:r>
+              <a:rPr sz="750" b="1">
+                <a:solidFill>
+                  <a:srgbClr val="2D6A6E"/>
+                </a:solidFill>
+                <a:latin typeface="Inter"/>
+              </a:rPr>
+              <a:t>Start paediatric, then generalise</a:t>
+            </a:r>
+          </a:p>
+        </p:txBody>
+      </p:sp>
+      <p:sp>
+        <p:nvSpPr>
+          <p:cNvPr id="82" name="Rounded Rectangle 81"/>
+          <p:cNvSpPr/>
+          <p:nvPr/>
+        </p:nvSpPr>
+        <p:spPr>
+          <a:xfrm>
+            <a:off x="8953500" y="5118100"/>
+            <a:ext cx="2667000" cy="520700"/>
+          </a:xfrm>
+          <a:prstGeom prst="roundRect">
+            <a:avLst>
+              <a:gd name="adj" fmla="val 14634"/>
+            </a:avLst>
+          </a:prstGeom>
+          <a:solidFill>
+            <a:srgbClr val="E6F0F0"/>
+          </a:solidFill>
+          <a:ln>
+            <a:noFill/>
+          </a:ln>
+          <a:effectLst/>
+        </p:spPr>
+        <p:style>
+          <a:lnRef idx="1">
+            <a:schemeClr val="accent1"/>
+          </a:lnRef>
+          <a:fillRef idx="3">
+            <a:schemeClr val="accent1"/>
+          </a:fillRef>
+          <a:effectRef idx="2">
+            <a:schemeClr val="accent1"/>
+          </a:effectRef>
+          <a:fontRef idx="minor">
+            <a:schemeClr val="lt1"/>
+          </a:fontRef>
+        </p:style>
+        <p:txBody>
+          <a:bodyPr rtlCol="0" anchor="ctr"/>
+          <a:lstStyle/>
+          <a:p>
+            <a:pPr algn="ctr"/>
+          </a:p>
+        </p:txBody>
+      </p:sp>
+      <p:sp>
+        <p:nvSpPr>
+          <p:cNvPr id="83" name="TextBox 82"/>
+          <p:cNvSpPr txBox="1"/>
+          <p:nvPr/>
+        </p:nvSpPr>
+        <p:spPr>
+          <a:xfrm>
+            <a:off x="9055100" y="5118100"/>
+            <a:ext cx="2463800" cy="520700"/>
+          </a:xfrm>
+          <a:prstGeom prst="rect">
+            <a:avLst/>
+          </a:prstGeom>
+          <a:noFill/>
+        </p:spPr>
+        <p:txBody>
+          <a:bodyPr wrap="square" anchor="ctr" lIns="25400" rIns="25400" tIns="12700" bIns="12700">
+            <a:normAutofit/>
+          </a:bodyPr>
+          <a:lstStyle/>
+          <a:p>
+            <a:pPr algn="ctr">
+              <a:spcAft>
+                <a:spcPts val="0"/>
+              </a:spcAft>
+            </a:pPr>
+            <a:r>
+              <a:rPr sz="750" b="1">
+                <a:solidFill>
+                  <a:srgbClr val="2D6A6E"/>
+                </a:solidFill>
+                <a:latin typeface="Inter"/>
+              </a:rPr>
+              <a:t>UK data residency + clinical audit</a:t>
+            </a:r>
+          </a:p>
+        </p:txBody>
+      </p:sp>
+      <p:sp>
+        <p:nvSpPr>
+          <p:cNvPr id="84" name="TextBox 83"/>
+          <p:cNvSpPr txBox="1"/>
+          <p:nvPr/>
+        </p:nvSpPr>
+        <p:spPr>
+          <a:xfrm>
+            <a:off x="571500" y="6388100"/>
+            <a:ext cx="11049000" cy="139700"/>
+          </a:xfrm>
+          <a:prstGeom prst="rect">
+            <a:avLst/>
+          </a:prstGeom>
+          <a:noFill/>
+        </p:spPr>
+        <p:txBody>
+          <a:bodyPr wrap="square" anchor="t" lIns="25400" rIns="25400" tIns="12700" bIns="12700">
+            <a:spAutoFit/>
+          </a:bodyPr>
+          <a:lstStyle/>
+          <a:p>
+            <a:pPr algn="l">
+              <a:spcAft>
+                <a:spcPts val="0"/>
+              </a:spcAft>
+            </a:pPr>
+            <a:r>
+              <a:rPr sz="625" b="0">
+                <a:solidFill>
+                  <a:srgbClr val="8597A4"/>
+                </a:solidFill>
+                <a:latin typeface="Inter"/>
+              </a:rPr>
+              <a:t>Colour groups the nine stages into their five phases.   ·   Generalized across SLTs (Pediatric &amp; Adult).</a:t>
+            </a:r>
+          </a:p>
+        </p:txBody>
+      </p:sp>
+      <p:sp>
+        <p:nvSpPr>
+          <p:cNvPr id="85" name="TextBox 84"/>
+          <p:cNvSpPr txBox="1"/>
+          <p:nvPr/>
+        </p:nvSpPr>
+        <p:spPr>
+          <a:xfrm>
+            <a:off x="571500" y="6604000"/>
+            <a:ext cx="5715000" cy="139700"/>
+          </a:xfrm>
+          <a:prstGeom prst="rect">
+            <a:avLst/>
+          </a:prstGeom>
+          <a:noFill/>
+        </p:spPr>
+        <p:txBody>
+          <a:bodyPr wrap="square" anchor="t" lIns="25400" rIns="25400" tIns="12700" bIns="12700">
+            <a:spAutoFit/>
+          </a:bodyPr>
+          <a:lstStyle/>
+          <a:p>
+            <a:pPr algn="l">
+              <a:spcAft>
+                <a:spcPts val="0"/>
+              </a:spcAft>
+            </a:pPr>
+            <a:r>
+              <a:rPr sz="600" b="0">
+                <a:solidFill>
+                  <a:srgbClr val="8597A4"/>
+                </a:solidFill>
+                <a:latin typeface="Inter"/>
+              </a:rPr>
+              <a:t>Sona — Care Journey &amp; Product Overview</a:t>
+            </a:r>
+          </a:p>
+        </p:txBody>
+      </p:sp>
+      <p:sp>
+        <p:nvSpPr>
+          <p:cNvPr id="86" name="TextBox 85"/>
+          <p:cNvSpPr txBox="1"/>
+          <p:nvPr/>
+        </p:nvSpPr>
+        <p:spPr>
+          <a:xfrm>
+            <a:off x="10414000" y="6604000"/>
+            <a:ext cx="1206500" cy="139700"/>
+          </a:xfrm>
+          <a:prstGeom prst="rect">
+            <a:avLst/>
+          </a:prstGeom>
+          <a:noFill/>
+        </p:spPr>
+        <p:txBody>
+          <a:bodyPr wrap="square" anchor="t" lIns="25400" rIns="25400" tIns="12700" bIns="12700">
+            <a:spAutoFit/>
+          </a:bodyPr>
+          <a:lstStyle/>
+          <a:p>
+            <a:pPr algn="r">
+              <a:spcAft>
+                <a:spcPts val="0"/>
+              </a:spcAft>
+            </a:pPr>
+            <a:r>
+              <a:rPr sz="600" b="0">
+                <a:solidFill>
+                  <a:srgbClr val="8597A4"/>
+                </a:solidFill>
+                <a:latin typeface="Inter"/>
+              </a:rPr>
+              <a:t>3 / 3</a:t>
             </a:r>
           </a:p>
         </p:txBody>

--- a/docs/design/Sona_Care_Journey_Deck.pptx
+++ b/docs/design/Sona_Care_Journey_Deck.pptx
@@ -8,6 +8,7 @@
     <p:sldId id="256" r:id="rId7"/>
     <p:sldId id="257" r:id="rId8"/>
     <p:sldId id="258" r:id="rId9"/>
+    <p:sldId id="259" r:id="rId10"/>
   </p:sldIdLst>
   <p:sldSz cx="12192000" cy="6858000" type="screen4x3"/>
   <p:notesSz cx="6858000" cy="9144000"/>
@@ -3505,7 +3506,7 @@
         <p:spPr>
           <a:xfrm>
             <a:off x="6388100" y="2286000"/>
-            <a:ext cx="5080000" cy="2794000"/>
+            <a:ext cx="5080000" cy="2921000"/>
           </a:xfrm>
           <a:prstGeom prst="rect">
             <a:avLst/>
@@ -3530,7 +3531,7 @@
                 </a:solidFill>
                 <a:latin typeface="Inter"/>
               </a:rPr>
-              <a:t>•  Two views follow — the Executive view (the journey and the value) and the Product view (the proposed solution, phase by phase).</a:t>
+              <a:t>•  Three views follow — the Executive view (the journey and the value), the Product view (the proposed solution), and the Process-flow view (the To-Be swimlane).</a:t>
             </a:r>
           </a:p>
           <a:p>
@@ -3887,7 +3888,7 @@
                 </a:solidFill>
                 <a:latin typeface="Inter"/>
               </a:rPr>
-              <a:t>1 / 3</a:t>
+              <a:t>1 / 4</a:t>
             </a:r>
           </a:p>
         </p:txBody>
@@ -5984,7 +5985,7 @@
                 </a:solidFill>
                 <a:latin typeface="Inter"/>
               </a:rPr>
-              <a:t>2 / 3</a:t>
+              <a:t>2 / 4</a:t>
             </a:r>
           </a:p>
         </p:txBody>
@@ -9581,7 +9582,2951 @@
                 </a:solidFill>
                 <a:latin typeface="Inter"/>
               </a:rPr>
-              <a:t>3 / 3</a:t>
+              <a:t>3 / 4</a:t>
+            </a:r>
+          </a:p>
+        </p:txBody>
+      </p:sp>
+    </p:spTree>
+  </p:cSld>
+  <p:clrMapOvr>
+    <a:masterClrMapping/>
+  </p:clrMapOvr>
+</p:sld>
+</file>
+
+<file path=ppt/slides/slide4.xml><?xml version="1.0" encoding="utf-8"?>
+<p:sld xmlns:a="http://schemas.openxmlformats.org/drawingml/2006/main" xmlns:p="http://schemas.openxmlformats.org/presentationml/2006/main" xmlns:r="http://schemas.openxmlformats.org/officeDocument/2006/relationships">
+  <p:cSld>
+    <p:spTree>
+      <p:nvGrpSpPr>
+        <p:cNvPr id="1" name=""/>
+        <p:cNvGrpSpPr/>
+        <p:nvPr/>
+      </p:nvGrpSpPr>
+      <p:grpSpPr/>
+      <p:sp>
+        <p:nvSpPr>
+          <p:cNvPr id="2" name="Rectangle 1"/>
+          <p:cNvSpPr/>
+          <p:nvPr/>
+        </p:nvSpPr>
+        <p:spPr>
+          <a:xfrm>
+            <a:off x="0" y="0"/>
+            <a:ext cx="12192000" cy="6858000"/>
+          </a:xfrm>
+          <a:prstGeom prst="rect">
+            <a:avLst/>
+          </a:prstGeom>
+          <a:solidFill>
+            <a:srgbClr val="FAFAF7"/>
+          </a:solidFill>
+          <a:ln>
+            <a:noFill/>
+          </a:ln>
+          <a:effectLst/>
+        </p:spPr>
+        <p:style>
+          <a:lnRef idx="1">
+            <a:schemeClr val="accent1"/>
+          </a:lnRef>
+          <a:fillRef idx="3">
+            <a:schemeClr val="accent1"/>
+          </a:fillRef>
+          <a:effectRef idx="2">
+            <a:schemeClr val="accent1"/>
+          </a:effectRef>
+          <a:fontRef idx="minor">
+            <a:schemeClr val="lt1"/>
+          </a:fontRef>
+        </p:style>
+        <p:txBody>
+          <a:bodyPr rtlCol="0" anchor="ctr"/>
+          <a:lstStyle/>
+          <a:p>
+            <a:pPr algn="ctr"/>
+          </a:p>
+        </p:txBody>
+      </p:sp>
+      <p:sp>
+        <p:nvSpPr>
+          <p:cNvPr id="3" name="TextBox 2"/>
+          <p:cNvSpPr txBox="1"/>
+          <p:nvPr/>
+        </p:nvSpPr>
+        <p:spPr>
+          <a:xfrm>
+            <a:off x="571500" y="406400"/>
+            <a:ext cx="5715000" cy="165100"/>
+          </a:xfrm>
+          <a:prstGeom prst="rect">
+            <a:avLst/>
+          </a:prstGeom>
+          <a:noFill/>
+        </p:spPr>
+        <p:txBody>
+          <a:bodyPr wrap="square" anchor="t" lIns="25400" rIns="25400" tIns="12700" bIns="12700">
+            <a:spAutoFit/>
+          </a:bodyPr>
+          <a:lstStyle/>
+          <a:p>
+            <a:pPr algn="l">
+              <a:spcAft>
+                <a:spcPts val="0"/>
+              </a:spcAft>
+            </a:pPr>
+            <a:r>
+              <a:rPr sz="750" b="1">
+                <a:solidFill>
+                  <a:srgbClr val="8597A4"/>
+                </a:solidFill>
+                <a:latin typeface="Inter"/>
+              </a:rPr>
+              <a:t>PROCESS FLOW · TO-BE</a:t>
+            </a:r>
+          </a:p>
+        </p:txBody>
+      </p:sp>
+      <p:sp>
+        <p:nvSpPr>
+          <p:cNvPr id="4" name="TextBox 3"/>
+          <p:cNvSpPr txBox="1"/>
+          <p:nvPr/>
+        </p:nvSpPr>
+        <p:spPr>
+          <a:xfrm>
+            <a:off x="571500" y="571500"/>
+            <a:ext cx="9525000" cy="381000"/>
+          </a:xfrm>
+          <a:prstGeom prst="rect">
+            <a:avLst/>
+          </a:prstGeom>
+          <a:noFill/>
+        </p:spPr>
+        <p:txBody>
+          <a:bodyPr wrap="square" anchor="t" lIns="25400" rIns="25400" tIns="12700" bIns="12700">
+            <a:spAutoFit/>
+          </a:bodyPr>
+          <a:lstStyle/>
+          <a:p>
+            <a:pPr algn="l">
+              <a:spcAft>
+                <a:spcPts val="0"/>
+              </a:spcAft>
+            </a:pPr>
+            <a:r>
+              <a:rPr sz="2000" b="1">
+                <a:solidFill>
+                  <a:srgbClr val="2D6A6E"/>
+                </a:solidFill>
+                <a:latin typeface="Inter"/>
+              </a:rPr>
+              <a:t>How the journey runs with Sona</a:t>
+            </a:r>
+          </a:p>
+        </p:txBody>
+      </p:sp>
+      <p:sp>
+        <p:nvSpPr>
+          <p:cNvPr id="5" name="TextBox 4"/>
+          <p:cNvSpPr txBox="1"/>
+          <p:nvPr/>
+        </p:nvSpPr>
+        <p:spPr>
+          <a:xfrm>
+            <a:off x="571500" y="1003300"/>
+            <a:ext cx="10922000" cy="317500"/>
+          </a:xfrm>
+          <a:prstGeom prst="rect">
+            <a:avLst/>
+          </a:prstGeom>
+          <a:noFill/>
+        </p:spPr>
+        <p:txBody>
+          <a:bodyPr wrap="square" anchor="t" lIns="25400" rIns="25400" tIns="12700" bIns="12700">
+            <a:spAutoFit/>
+          </a:bodyPr>
+          <a:lstStyle/>
+          <a:p>
+            <a:pPr algn="l">
+              <a:spcAft>
+                <a:spcPts val="0"/>
+              </a:spcAft>
+            </a:pPr>
+            <a:r>
+              <a:rPr sz="900" b="0">
+                <a:solidFill>
+                  <a:srgbClr val="4A5B6B"/>
+                </a:solidFill>
+                <a:latin typeface="Inter"/>
+              </a:rPr>
+              <a:t>A swimlane map of the proposed (To-Be) process — read against today's As-Is to spot what to optimise, and use it to design the prototypes and screens.</a:t>
+            </a:r>
+          </a:p>
+        </p:txBody>
+      </p:sp>
+      <p:sp>
+        <p:nvSpPr>
+          <p:cNvPr id="6" name="Rectangle 5"/>
+          <p:cNvSpPr/>
+          <p:nvPr/>
+        </p:nvSpPr>
+        <p:spPr>
+          <a:xfrm>
+            <a:off x="1371600" y="1473200"/>
+            <a:ext cx="10439400" cy="1244600"/>
+          </a:xfrm>
+          <a:prstGeom prst="rect">
+            <a:avLst/>
+          </a:prstGeom>
+          <a:solidFill>
+            <a:srgbClr val="FFFFFF"/>
+          </a:solidFill>
+          <a:ln w="12700">
+            <a:solidFill>
+              <a:srgbClr val="E5E7EB"/>
+            </a:solidFill>
+          </a:ln>
+          <a:effectLst/>
+        </p:spPr>
+        <p:style>
+          <a:lnRef idx="1">
+            <a:schemeClr val="accent1"/>
+          </a:lnRef>
+          <a:fillRef idx="3">
+            <a:schemeClr val="accent1"/>
+          </a:fillRef>
+          <a:effectRef idx="2">
+            <a:schemeClr val="accent1"/>
+          </a:effectRef>
+          <a:fontRef idx="minor">
+            <a:schemeClr val="lt1"/>
+          </a:fontRef>
+        </p:style>
+        <p:txBody>
+          <a:bodyPr rtlCol="0" anchor="ctr"/>
+          <a:lstStyle/>
+          <a:p>
+            <a:pPr algn="ctr"/>
+          </a:p>
+        </p:txBody>
+      </p:sp>
+      <p:sp>
+        <p:nvSpPr>
+          <p:cNvPr id="7" name="Rectangle 6"/>
+          <p:cNvSpPr/>
+          <p:nvPr/>
+        </p:nvSpPr>
+        <p:spPr>
+          <a:xfrm>
+            <a:off x="381000" y="1473200"/>
+            <a:ext cx="990599" cy="1244600"/>
+          </a:xfrm>
+          <a:prstGeom prst="rect">
+            <a:avLst/>
+          </a:prstGeom>
+          <a:solidFill>
+            <a:srgbClr val="C98A5E"/>
+          </a:solidFill>
+          <a:ln>
+            <a:noFill/>
+          </a:ln>
+          <a:effectLst/>
+        </p:spPr>
+        <p:style>
+          <a:lnRef idx="1">
+            <a:schemeClr val="accent1"/>
+          </a:lnRef>
+          <a:fillRef idx="3">
+            <a:schemeClr val="accent1"/>
+          </a:fillRef>
+          <a:effectRef idx="2">
+            <a:schemeClr val="accent1"/>
+          </a:effectRef>
+          <a:fontRef idx="minor">
+            <a:schemeClr val="lt1"/>
+          </a:fontRef>
+        </p:style>
+        <p:txBody>
+          <a:bodyPr rtlCol="0" anchor="ctr"/>
+          <a:lstStyle/>
+          <a:p>
+            <a:pPr algn="ctr"/>
+          </a:p>
+        </p:txBody>
+      </p:sp>
+      <p:sp>
+        <p:nvSpPr>
+          <p:cNvPr id="8" name="TextBox 7"/>
+          <p:cNvSpPr txBox="1"/>
+          <p:nvPr/>
+        </p:nvSpPr>
+        <p:spPr>
+          <a:xfrm rot="16200000">
+            <a:off x="381000" y="1473200"/>
+            <a:ext cx="990599" cy="1244600"/>
+          </a:xfrm>
+          <a:prstGeom prst="rect">
+            <a:avLst/>
+          </a:prstGeom>
+          <a:noFill/>
+        </p:spPr>
+        <p:txBody>
+          <a:bodyPr wrap="square" anchor="ctr">
+            <a:spAutoFit/>
+          </a:bodyPr>
+          <a:lstStyle/>
+          <a:p>
+            <a:pPr algn="ctr"/>
+            <a:r>
+              <a:rPr sz="700" b="1">
+                <a:solidFill>
+                  <a:srgbClr val="FFFFFF"/>
+                </a:solidFill>
+                <a:latin typeface="Inter"/>
+              </a:rPr>
+              <a:t>Client / Parent / Carer</a:t>
+            </a:r>
+          </a:p>
+        </p:txBody>
+      </p:sp>
+      <p:sp>
+        <p:nvSpPr>
+          <p:cNvPr id="9" name="Rectangle 8"/>
+          <p:cNvSpPr/>
+          <p:nvPr/>
+        </p:nvSpPr>
+        <p:spPr>
+          <a:xfrm>
+            <a:off x="1371600" y="2717800"/>
+            <a:ext cx="10439400" cy="1244600"/>
+          </a:xfrm>
+          <a:prstGeom prst="rect">
+            <a:avLst/>
+          </a:prstGeom>
+          <a:solidFill>
+            <a:srgbClr val="F3F6F6"/>
+          </a:solidFill>
+          <a:ln w="12700">
+            <a:solidFill>
+              <a:srgbClr val="E5E7EB"/>
+            </a:solidFill>
+          </a:ln>
+          <a:effectLst/>
+        </p:spPr>
+        <p:style>
+          <a:lnRef idx="1">
+            <a:schemeClr val="accent1"/>
+          </a:lnRef>
+          <a:fillRef idx="3">
+            <a:schemeClr val="accent1"/>
+          </a:fillRef>
+          <a:effectRef idx="2">
+            <a:schemeClr val="accent1"/>
+          </a:effectRef>
+          <a:fontRef idx="minor">
+            <a:schemeClr val="lt1"/>
+          </a:fontRef>
+        </p:style>
+        <p:txBody>
+          <a:bodyPr rtlCol="0" anchor="ctr"/>
+          <a:lstStyle/>
+          <a:p>
+            <a:pPr algn="ctr"/>
+          </a:p>
+        </p:txBody>
+      </p:sp>
+      <p:sp>
+        <p:nvSpPr>
+          <p:cNvPr id="10" name="Rectangle 9"/>
+          <p:cNvSpPr/>
+          <p:nvPr/>
+        </p:nvSpPr>
+        <p:spPr>
+          <a:xfrm>
+            <a:off x="381000" y="2717800"/>
+            <a:ext cx="990599" cy="1244600"/>
+          </a:xfrm>
+          <a:prstGeom prst="rect">
+            <a:avLst/>
+          </a:prstGeom>
+          <a:solidFill>
+            <a:srgbClr val="2D6A6E"/>
+          </a:solidFill>
+          <a:ln>
+            <a:noFill/>
+          </a:ln>
+          <a:effectLst/>
+        </p:spPr>
+        <p:style>
+          <a:lnRef idx="1">
+            <a:schemeClr val="accent1"/>
+          </a:lnRef>
+          <a:fillRef idx="3">
+            <a:schemeClr val="accent1"/>
+          </a:fillRef>
+          <a:effectRef idx="2">
+            <a:schemeClr val="accent1"/>
+          </a:effectRef>
+          <a:fontRef idx="minor">
+            <a:schemeClr val="lt1"/>
+          </a:fontRef>
+        </p:style>
+        <p:txBody>
+          <a:bodyPr rtlCol="0" anchor="ctr"/>
+          <a:lstStyle/>
+          <a:p>
+            <a:pPr algn="ctr"/>
+          </a:p>
+        </p:txBody>
+      </p:sp>
+      <p:sp>
+        <p:nvSpPr>
+          <p:cNvPr id="11" name="TextBox 10"/>
+          <p:cNvSpPr txBox="1"/>
+          <p:nvPr/>
+        </p:nvSpPr>
+        <p:spPr>
+          <a:xfrm rot="16200000">
+            <a:off x="381000" y="2717800"/>
+            <a:ext cx="990599" cy="1244600"/>
+          </a:xfrm>
+          <a:prstGeom prst="rect">
+            <a:avLst/>
+          </a:prstGeom>
+          <a:noFill/>
+        </p:spPr>
+        <p:txBody>
+          <a:bodyPr wrap="square" anchor="ctr">
+            <a:spAutoFit/>
+          </a:bodyPr>
+          <a:lstStyle/>
+          <a:p>
+            <a:pPr algn="ctr"/>
+            <a:r>
+              <a:rPr sz="700" b="1">
+                <a:solidFill>
+                  <a:srgbClr val="FFFFFF"/>
+                </a:solidFill>
+                <a:latin typeface="Inter"/>
+              </a:rPr>
+              <a:t>Clinician / SLT</a:t>
+            </a:r>
+          </a:p>
+        </p:txBody>
+      </p:sp>
+      <p:sp>
+        <p:nvSpPr>
+          <p:cNvPr id="12" name="Rectangle 11"/>
+          <p:cNvSpPr/>
+          <p:nvPr/>
+        </p:nvSpPr>
+        <p:spPr>
+          <a:xfrm>
+            <a:off x="1371600" y="3962399"/>
+            <a:ext cx="10439400" cy="1244600"/>
+          </a:xfrm>
+          <a:prstGeom prst="rect">
+            <a:avLst/>
+          </a:prstGeom>
+          <a:solidFill>
+            <a:srgbClr val="FFFFFF"/>
+          </a:solidFill>
+          <a:ln w="12700">
+            <a:solidFill>
+              <a:srgbClr val="E5E7EB"/>
+            </a:solidFill>
+          </a:ln>
+          <a:effectLst/>
+        </p:spPr>
+        <p:style>
+          <a:lnRef idx="1">
+            <a:schemeClr val="accent1"/>
+          </a:lnRef>
+          <a:fillRef idx="3">
+            <a:schemeClr val="accent1"/>
+          </a:fillRef>
+          <a:effectRef idx="2">
+            <a:schemeClr val="accent1"/>
+          </a:effectRef>
+          <a:fontRef idx="minor">
+            <a:schemeClr val="lt1"/>
+          </a:fontRef>
+        </p:style>
+        <p:txBody>
+          <a:bodyPr rtlCol="0" anchor="ctr"/>
+          <a:lstStyle/>
+          <a:p>
+            <a:pPr algn="ctr"/>
+          </a:p>
+        </p:txBody>
+      </p:sp>
+      <p:sp>
+        <p:nvSpPr>
+          <p:cNvPr id="13" name="Rectangle 12"/>
+          <p:cNvSpPr/>
+          <p:nvPr/>
+        </p:nvSpPr>
+        <p:spPr>
+          <a:xfrm>
+            <a:off x="381000" y="3962399"/>
+            <a:ext cx="990599" cy="1244600"/>
+          </a:xfrm>
+          <a:prstGeom prst="rect">
+            <a:avLst/>
+          </a:prstGeom>
+          <a:solidFill>
+            <a:srgbClr val="356985"/>
+          </a:solidFill>
+          <a:ln>
+            <a:noFill/>
+          </a:ln>
+          <a:effectLst/>
+        </p:spPr>
+        <p:style>
+          <a:lnRef idx="1">
+            <a:schemeClr val="accent1"/>
+          </a:lnRef>
+          <a:fillRef idx="3">
+            <a:schemeClr val="accent1"/>
+          </a:fillRef>
+          <a:effectRef idx="2">
+            <a:schemeClr val="accent1"/>
+          </a:effectRef>
+          <a:fontRef idx="minor">
+            <a:schemeClr val="lt1"/>
+          </a:fontRef>
+        </p:style>
+        <p:txBody>
+          <a:bodyPr rtlCol="0" anchor="ctr"/>
+          <a:lstStyle/>
+          <a:p>
+            <a:pPr algn="ctr"/>
+          </a:p>
+        </p:txBody>
+      </p:sp>
+      <p:sp>
+        <p:nvSpPr>
+          <p:cNvPr id="14" name="TextBox 13"/>
+          <p:cNvSpPr txBox="1"/>
+          <p:nvPr/>
+        </p:nvSpPr>
+        <p:spPr>
+          <a:xfrm rot="16200000">
+            <a:off x="381000" y="3962399"/>
+            <a:ext cx="990599" cy="1244600"/>
+          </a:xfrm>
+          <a:prstGeom prst="rect">
+            <a:avLst/>
+          </a:prstGeom>
+          <a:noFill/>
+        </p:spPr>
+        <p:txBody>
+          <a:bodyPr wrap="square" anchor="ctr">
+            <a:spAutoFit/>
+          </a:bodyPr>
+          <a:lstStyle/>
+          <a:p>
+            <a:pPr algn="ctr"/>
+            <a:r>
+              <a:rPr sz="700" b="1">
+                <a:solidFill>
+                  <a:srgbClr val="FFFFFF"/>
+                </a:solidFill>
+                <a:latin typeface="Inter"/>
+              </a:rPr>
+              <a:t>Sona  (app &amp; AI)</a:t>
+            </a:r>
+          </a:p>
+        </p:txBody>
+      </p:sp>
+      <p:sp>
+        <p:nvSpPr>
+          <p:cNvPr id="15" name="Rectangle 14"/>
+          <p:cNvSpPr/>
+          <p:nvPr/>
+        </p:nvSpPr>
+        <p:spPr>
+          <a:xfrm>
+            <a:off x="1371600" y="5207000"/>
+            <a:ext cx="10439400" cy="1244600"/>
+          </a:xfrm>
+          <a:prstGeom prst="rect">
+            <a:avLst/>
+          </a:prstGeom>
+          <a:solidFill>
+            <a:srgbClr val="F3F6F6"/>
+          </a:solidFill>
+          <a:ln w="12700">
+            <a:solidFill>
+              <a:srgbClr val="E5E7EB"/>
+            </a:solidFill>
+          </a:ln>
+          <a:effectLst/>
+        </p:spPr>
+        <p:style>
+          <a:lnRef idx="1">
+            <a:schemeClr val="accent1"/>
+          </a:lnRef>
+          <a:fillRef idx="3">
+            <a:schemeClr val="accent1"/>
+          </a:fillRef>
+          <a:effectRef idx="2">
+            <a:schemeClr val="accent1"/>
+          </a:effectRef>
+          <a:fontRef idx="minor">
+            <a:schemeClr val="lt1"/>
+          </a:fontRef>
+        </p:style>
+        <p:txBody>
+          <a:bodyPr rtlCol="0" anchor="ctr"/>
+          <a:lstStyle/>
+          <a:p>
+            <a:pPr algn="ctr"/>
+          </a:p>
+        </p:txBody>
+      </p:sp>
+      <p:sp>
+        <p:nvSpPr>
+          <p:cNvPr id="16" name="Rectangle 15"/>
+          <p:cNvSpPr/>
+          <p:nvPr/>
+        </p:nvSpPr>
+        <p:spPr>
+          <a:xfrm>
+            <a:off x="381000" y="5207000"/>
+            <a:ext cx="990599" cy="1244600"/>
+          </a:xfrm>
+          <a:prstGeom prst="rect">
+            <a:avLst/>
+          </a:prstGeom>
+          <a:solidFill>
+            <a:srgbClr val="4C8060"/>
+          </a:solidFill>
+          <a:ln>
+            <a:noFill/>
+          </a:ln>
+          <a:effectLst/>
+        </p:spPr>
+        <p:style>
+          <a:lnRef idx="1">
+            <a:schemeClr val="accent1"/>
+          </a:lnRef>
+          <a:fillRef idx="3">
+            <a:schemeClr val="accent1"/>
+          </a:fillRef>
+          <a:effectRef idx="2">
+            <a:schemeClr val="accent1"/>
+          </a:effectRef>
+          <a:fontRef idx="minor">
+            <a:schemeClr val="lt1"/>
+          </a:fontRef>
+        </p:style>
+        <p:txBody>
+          <a:bodyPr rtlCol="0" anchor="ctr"/>
+          <a:lstStyle/>
+          <a:p>
+            <a:pPr algn="ctr"/>
+          </a:p>
+        </p:txBody>
+      </p:sp>
+      <p:sp>
+        <p:nvSpPr>
+          <p:cNvPr id="17" name="TextBox 16"/>
+          <p:cNvSpPr txBox="1"/>
+          <p:nvPr/>
+        </p:nvSpPr>
+        <p:spPr>
+          <a:xfrm rot="16200000">
+            <a:off x="381000" y="5207000"/>
+            <a:ext cx="990599" cy="1244600"/>
+          </a:xfrm>
+          <a:prstGeom prst="rect">
+            <a:avLst/>
+          </a:prstGeom>
+          <a:noFill/>
+        </p:spPr>
+        <p:txBody>
+          <a:bodyPr wrap="square" anchor="ctr">
+            <a:spAutoFit/>
+          </a:bodyPr>
+          <a:lstStyle/>
+          <a:p>
+            <a:pPr algn="ctr"/>
+            <a:r>
+              <a:rPr sz="700" b="1">
+                <a:solidFill>
+                  <a:srgbClr val="FFFFFF"/>
+                </a:solidFill>
+                <a:latin typeface="Inter"/>
+              </a:rPr>
+              <a:t>External  (calendar · PMS)</a:t>
+            </a:r>
+          </a:p>
+        </p:txBody>
+      </p:sp>
+      <p:sp>
+        <p:nvSpPr>
+          <p:cNvPr id="18" name="Rounded Rectangle 17"/>
+          <p:cNvSpPr/>
+          <p:nvPr/>
+        </p:nvSpPr>
+        <p:spPr>
+          <a:xfrm>
+            <a:off x="1397000" y="1866899"/>
+            <a:ext cx="1016000" cy="457200"/>
+          </a:xfrm>
+          <a:prstGeom prst="roundRect">
+            <a:avLst>
+              <a:gd name="adj" fmla="val 50000"/>
+            </a:avLst>
+          </a:prstGeom>
+          <a:solidFill>
+            <a:srgbClr val="FBF7F1"/>
+          </a:solidFill>
+          <a:ln w="12700">
+            <a:solidFill>
+              <a:srgbClr val="C98A5E"/>
+            </a:solidFill>
+          </a:ln>
+          <a:effectLst/>
+        </p:spPr>
+        <p:style>
+          <a:lnRef idx="1">
+            <a:schemeClr val="accent1"/>
+          </a:lnRef>
+          <a:fillRef idx="3">
+            <a:schemeClr val="accent1"/>
+          </a:fillRef>
+          <a:effectRef idx="2">
+            <a:schemeClr val="accent1"/>
+          </a:effectRef>
+          <a:fontRef idx="minor">
+            <a:schemeClr val="lt1"/>
+          </a:fontRef>
+        </p:style>
+        <p:txBody>
+          <a:bodyPr rtlCol="0" anchor="ctr"/>
+          <a:lstStyle/>
+          <a:p>
+            <a:pPr algn="ctr"/>
+          </a:p>
+        </p:txBody>
+      </p:sp>
+      <p:sp>
+        <p:nvSpPr>
+          <p:cNvPr id="19" name="TextBox 18"/>
+          <p:cNvSpPr txBox="1"/>
+          <p:nvPr/>
+        </p:nvSpPr>
+        <p:spPr>
+          <a:xfrm>
+            <a:off x="1460500" y="1866899"/>
+            <a:ext cx="889000" cy="457200"/>
+          </a:xfrm>
+          <a:prstGeom prst="rect">
+            <a:avLst/>
+          </a:prstGeom>
+          <a:noFill/>
+        </p:spPr>
+        <p:txBody>
+          <a:bodyPr wrap="square" anchor="ctr" lIns="25400" rIns="25400" tIns="12700" bIns="12700">
+            <a:normAutofit/>
+          </a:bodyPr>
+          <a:lstStyle/>
+          <a:p>
+            <a:pPr algn="ctr">
+              <a:spcAft>
+                <a:spcPts val="0"/>
+              </a:spcAft>
+            </a:pPr>
+            <a:r>
+              <a:rPr sz="625" b="1">
+                <a:solidFill>
+                  <a:srgbClr val="142433"/>
+                </a:solidFill>
+                <a:latin typeface="Inter"/>
+              </a:rPr>
+              <a:t>Enquiry arrives</a:t>
+            </a:r>
+          </a:p>
+        </p:txBody>
+      </p:sp>
+      <p:sp>
+        <p:nvSpPr>
+          <p:cNvPr id="20" name="Rounded Rectangle 19"/>
+          <p:cNvSpPr/>
+          <p:nvPr/>
+        </p:nvSpPr>
+        <p:spPr>
+          <a:xfrm>
+            <a:off x="1397000" y="4362450"/>
+            <a:ext cx="1016000" cy="444500"/>
+          </a:xfrm>
+          <a:prstGeom prst="roundRect">
+            <a:avLst>
+              <a:gd name="adj" fmla="val 17142"/>
+            </a:avLst>
+          </a:prstGeom>
+          <a:solidFill>
+            <a:srgbClr val="E6F0F0"/>
+          </a:solidFill>
+          <a:ln w="12700">
+            <a:solidFill>
+              <a:srgbClr val="2D6A6E"/>
+            </a:solidFill>
+          </a:ln>
+          <a:effectLst/>
+        </p:spPr>
+        <p:style>
+          <a:lnRef idx="1">
+            <a:schemeClr val="accent1"/>
+          </a:lnRef>
+          <a:fillRef idx="3">
+            <a:schemeClr val="accent1"/>
+          </a:fillRef>
+          <a:effectRef idx="2">
+            <a:schemeClr val="accent1"/>
+          </a:effectRef>
+          <a:fontRef idx="minor">
+            <a:schemeClr val="lt1"/>
+          </a:fontRef>
+        </p:style>
+        <p:txBody>
+          <a:bodyPr rtlCol="0" anchor="ctr"/>
+          <a:lstStyle/>
+          <a:p>
+            <a:pPr algn="ctr"/>
+          </a:p>
+        </p:txBody>
+      </p:sp>
+      <p:sp>
+        <p:nvSpPr>
+          <p:cNvPr id="21" name="TextBox 20"/>
+          <p:cNvSpPr txBox="1"/>
+          <p:nvPr/>
+        </p:nvSpPr>
+        <p:spPr>
+          <a:xfrm>
+            <a:off x="1460500" y="4362450"/>
+            <a:ext cx="889000" cy="444500"/>
+          </a:xfrm>
+          <a:prstGeom prst="rect">
+            <a:avLst/>
+          </a:prstGeom>
+          <a:noFill/>
+        </p:spPr>
+        <p:txBody>
+          <a:bodyPr wrap="square" anchor="ctr" lIns="25400" rIns="25400" tIns="12700" bIns="12700">
+            <a:normAutofit/>
+          </a:bodyPr>
+          <a:lstStyle/>
+          <a:p>
+            <a:pPr algn="ctr">
+              <a:spcAft>
+                <a:spcPts val="0"/>
+              </a:spcAft>
+            </a:pPr>
+            <a:r>
+              <a:rPr sz="625" b="0">
+                <a:solidFill>
+                  <a:srgbClr val="142433"/>
+                </a:solidFill>
+                <a:latin typeface="Inter"/>
+              </a:rPr>
+              <a:t>Capture enquiry + smart intake</a:t>
+            </a:r>
+          </a:p>
+        </p:txBody>
+      </p:sp>
+      <p:sp>
+        <p:nvSpPr>
+          <p:cNvPr id="22" name="Rounded Rectangle 21"/>
+          <p:cNvSpPr/>
+          <p:nvPr/>
+        </p:nvSpPr>
+        <p:spPr>
+          <a:xfrm>
+            <a:off x="2362200" y="1873250"/>
+            <a:ext cx="1016000" cy="444500"/>
+          </a:xfrm>
+          <a:prstGeom prst="roundRect">
+            <a:avLst>
+              <a:gd name="adj" fmla="val 17142"/>
+            </a:avLst>
+          </a:prstGeom>
+          <a:solidFill>
+            <a:srgbClr val="E6F0F0"/>
+          </a:solidFill>
+          <a:ln w="12700">
+            <a:solidFill>
+              <a:srgbClr val="2D6A6E"/>
+            </a:solidFill>
+          </a:ln>
+          <a:effectLst/>
+        </p:spPr>
+        <p:style>
+          <a:lnRef idx="1">
+            <a:schemeClr val="accent1"/>
+          </a:lnRef>
+          <a:fillRef idx="3">
+            <a:schemeClr val="accent1"/>
+          </a:fillRef>
+          <a:effectRef idx="2">
+            <a:schemeClr val="accent1"/>
+          </a:effectRef>
+          <a:fontRef idx="minor">
+            <a:schemeClr val="lt1"/>
+          </a:fontRef>
+        </p:style>
+        <p:txBody>
+          <a:bodyPr rtlCol="0" anchor="ctr"/>
+          <a:lstStyle/>
+          <a:p>
+            <a:pPr algn="ctr"/>
+          </a:p>
+        </p:txBody>
+      </p:sp>
+      <p:sp>
+        <p:nvSpPr>
+          <p:cNvPr id="23" name="TextBox 22"/>
+          <p:cNvSpPr txBox="1"/>
+          <p:nvPr/>
+        </p:nvSpPr>
+        <p:spPr>
+          <a:xfrm>
+            <a:off x="2425700" y="1873250"/>
+            <a:ext cx="889000" cy="444500"/>
+          </a:xfrm>
+          <a:prstGeom prst="rect">
+            <a:avLst/>
+          </a:prstGeom>
+          <a:noFill/>
+        </p:spPr>
+        <p:txBody>
+          <a:bodyPr wrap="square" anchor="ctr" lIns="25400" rIns="25400" tIns="12700" bIns="12700">
+            <a:normAutofit/>
+          </a:bodyPr>
+          <a:lstStyle/>
+          <a:p>
+            <a:pPr algn="ctr">
+              <a:spcAft>
+                <a:spcPts val="0"/>
+              </a:spcAft>
+            </a:pPr>
+            <a:r>
+              <a:rPr sz="625" b="0">
+                <a:solidFill>
+                  <a:srgbClr val="142433"/>
+                </a:solidFill>
+                <a:latin typeface="Inter"/>
+              </a:rPr>
+              <a:t>Complete intake &amp; consent</a:t>
+            </a:r>
+          </a:p>
+        </p:txBody>
+      </p:sp>
+      <p:sp>
+        <p:nvSpPr>
+          <p:cNvPr id="24" name="Rounded Rectangle 23"/>
+          <p:cNvSpPr/>
+          <p:nvPr/>
+        </p:nvSpPr>
+        <p:spPr>
+          <a:xfrm>
+            <a:off x="3327400" y="4362450"/>
+            <a:ext cx="1016000" cy="444500"/>
+          </a:xfrm>
+          <a:prstGeom prst="roundRect">
+            <a:avLst>
+              <a:gd name="adj" fmla="val 17142"/>
+            </a:avLst>
+          </a:prstGeom>
+          <a:solidFill>
+            <a:srgbClr val="E6F0F0"/>
+          </a:solidFill>
+          <a:ln w="12700">
+            <a:solidFill>
+              <a:srgbClr val="2D6A6E"/>
+            </a:solidFill>
+          </a:ln>
+          <a:effectLst/>
+        </p:spPr>
+        <p:style>
+          <a:lnRef idx="1">
+            <a:schemeClr val="accent1"/>
+          </a:lnRef>
+          <a:fillRef idx="3">
+            <a:schemeClr val="accent1"/>
+          </a:fillRef>
+          <a:effectRef idx="2">
+            <a:schemeClr val="accent1"/>
+          </a:effectRef>
+          <a:fontRef idx="minor">
+            <a:schemeClr val="lt1"/>
+          </a:fontRef>
+        </p:style>
+        <p:txBody>
+          <a:bodyPr rtlCol="0" anchor="ctr"/>
+          <a:lstStyle/>
+          <a:p>
+            <a:pPr algn="ctr"/>
+          </a:p>
+        </p:txBody>
+      </p:sp>
+      <p:sp>
+        <p:nvSpPr>
+          <p:cNvPr id="25" name="TextBox 24"/>
+          <p:cNvSpPr txBox="1"/>
+          <p:nvPr/>
+        </p:nvSpPr>
+        <p:spPr>
+          <a:xfrm>
+            <a:off x="3390900" y="4362450"/>
+            <a:ext cx="889000" cy="444500"/>
+          </a:xfrm>
+          <a:prstGeom prst="rect">
+            <a:avLst/>
+          </a:prstGeom>
+          <a:noFill/>
+        </p:spPr>
+        <p:txBody>
+          <a:bodyPr wrap="square" anchor="ctr" lIns="25400" rIns="25400" tIns="12700" bIns="12700">
+            <a:normAutofit/>
+          </a:bodyPr>
+          <a:lstStyle/>
+          <a:p>
+            <a:pPr algn="ctr">
+              <a:spcAft>
+                <a:spcPts val="0"/>
+              </a:spcAft>
+            </a:pPr>
+            <a:r>
+              <a:rPr sz="625" b="0">
+                <a:solidFill>
+                  <a:srgbClr val="142433"/>
+                </a:solidFill>
+                <a:latin typeface="Inter"/>
+              </a:rPr>
+              <a:t>AI prep brief (DRAFT)</a:t>
+            </a:r>
+          </a:p>
+        </p:txBody>
+      </p:sp>
+      <p:sp>
+        <p:nvSpPr>
+          <p:cNvPr id="26" name="Rounded Rectangle 25"/>
+          <p:cNvSpPr/>
+          <p:nvPr/>
+        </p:nvSpPr>
+        <p:spPr>
+          <a:xfrm>
+            <a:off x="4292600" y="3117850"/>
+            <a:ext cx="1016000" cy="444500"/>
+          </a:xfrm>
+          <a:prstGeom prst="roundRect">
+            <a:avLst>
+              <a:gd name="adj" fmla="val 17142"/>
+            </a:avLst>
+          </a:prstGeom>
+          <a:solidFill>
+            <a:srgbClr val="E6F0F0"/>
+          </a:solidFill>
+          <a:ln w="12700">
+            <a:solidFill>
+              <a:srgbClr val="2D6A6E"/>
+            </a:solidFill>
+          </a:ln>
+          <a:effectLst/>
+        </p:spPr>
+        <p:style>
+          <a:lnRef idx="1">
+            <a:schemeClr val="accent1"/>
+          </a:lnRef>
+          <a:fillRef idx="3">
+            <a:schemeClr val="accent1"/>
+          </a:fillRef>
+          <a:effectRef idx="2">
+            <a:schemeClr val="accent1"/>
+          </a:effectRef>
+          <a:fontRef idx="minor">
+            <a:schemeClr val="lt1"/>
+          </a:fontRef>
+        </p:style>
+        <p:txBody>
+          <a:bodyPr rtlCol="0" anchor="ctr"/>
+          <a:lstStyle/>
+          <a:p>
+            <a:pPr algn="ctr"/>
+          </a:p>
+        </p:txBody>
+      </p:sp>
+      <p:sp>
+        <p:nvSpPr>
+          <p:cNvPr id="27" name="TextBox 26"/>
+          <p:cNvSpPr txBox="1"/>
+          <p:nvPr/>
+        </p:nvSpPr>
+        <p:spPr>
+          <a:xfrm>
+            <a:off x="4356100" y="3117850"/>
+            <a:ext cx="889000" cy="444500"/>
+          </a:xfrm>
+          <a:prstGeom prst="rect">
+            <a:avLst/>
+          </a:prstGeom>
+          <a:noFill/>
+        </p:spPr>
+        <p:txBody>
+          <a:bodyPr wrap="square" anchor="ctr" lIns="25400" rIns="25400" tIns="12700" bIns="12700">
+            <a:normAutofit/>
+          </a:bodyPr>
+          <a:lstStyle/>
+          <a:p>
+            <a:pPr algn="ctr">
+              <a:spcAft>
+                <a:spcPts val="0"/>
+              </a:spcAft>
+            </a:pPr>
+            <a:r>
+              <a:rPr sz="625" b="0">
+                <a:solidFill>
+                  <a:srgbClr val="142433"/>
+                </a:solidFill>
+                <a:latin typeface="Inter"/>
+              </a:rPr>
+              <a:t>Review overview + prep</a:t>
+            </a:r>
+          </a:p>
+        </p:txBody>
+      </p:sp>
+      <p:sp>
+        <p:nvSpPr>
+          <p:cNvPr id="28" name="Rounded Rectangle 27"/>
+          <p:cNvSpPr/>
+          <p:nvPr/>
+        </p:nvSpPr>
+        <p:spPr>
+          <a:xfrm>
+            <a:off x="4292600" y="5607050"/>
+            <a:ext cx="1016000" cy="444500"/>
+          </a:xfrm>
+          <a:prstGeom prst="roundRect">
+            <a:avLst>
+              <a:gd name="adj" fmla="val 17142"/>
+            </a:avLst>
+          </a:prstGeom>
+          <a:solidFill>
+            <a:srgbClr val="E6F0F0"/>
+          </a:solidFill>
+          <a:ln w="12700">
+            <a:solidFill>
+              <a:srgbClr val="2D6A6E"/>
+            </a:solidFill>
+          </a:ln>
+          <a:effectLst/>
+        </p:spPr>
+        <p:style>
+          <a:lnRef idx="1">
+            <a:schemeClr val="accent1"/>
+          </a:lnRef>
+          <a:fillRef idx="3">
+            <a:schemeClr val="accent1"/>
+          </a:fillRef>
+          <a:effectRef idx="2">
+            <a:schemeClr val="accent1"/>
+          </a:effectRef>
+          <a:fontRef idx="minor">
+            <a:schemeClr val="lt1"/>
+          </a:fontRef>
+        </p:style>
+        <p:txBody>
+          <a:bodyPr rtlCol="0" anchor="ctr"/>
+          <a:lstStyle/>
+          <a:p>
+            <a:pPr algn="ctr"/>
+          </a:p>
+        </p:txBody>
+      </p:sp>
+      <p:sp>
+        <p:nvSpPr>
+          <p:cNvPr id="29" name="TextBox 28"/>
+          <p:cNvSpPr txBox="1"/>
+          <p:nvPr/>
+        </p:nvSpPr>
+        <p:spPr>
+          <a:xfrm>
+            <a:off x="4356100" y="5607050"/>
+            <a:ext cx="889000" cy="444500"/>
+          </a:xfrm>
+          <a:prstGeom prst="rect">
+            <a:avLst/>
+          </a:prstGeom>
+          <a:noFill/>
+        </p:spPr>
+        <p:txBody>
+          <a:bodyPr wrap="square" anchor="ctr" lIns="25400" rIns="25400" tIns="12700" bIns="12700">
+            <a:normAutofit/>
+          </a:bodyPr>
+          <a:lstStyle/>
+          <a:p>
+            <a:pPr algn="ctr">
+              <a:spcAft>
+                <a:spcPts val="0"/>
+              </a:spcAft>
+            </a:pPr>
+            <a:r>
+              <a:rPr sz="625" b="0">
+                <a:solidFill>
+                  <a:srgbClr val="142433"/>
+                </a:solidFill>
+                <a:latin typeface="Inter"/>
+              </a:rPr>
+              <a:t>Calendar / video link</a:t>
+            </a:r>
+          </a:p>
+        </p:txBody>
+      </p:sp>
+      <p:sp>
+        <p:nvSpPr>
+          <p:cNvPr id="30" name="Rounded Rectangle 29"/>
+          <p:cNvSpPr/>
+          <p:nvPr/>
+        </p:nvSpPr>
+        <p:spPr>
+          <a:xfrm>
+            <a:off x="5257800" y="3117850"/>
+            <a:ext cx="1016000" cy="444500"/>
+          </a:xfrm>
+          <a:prstGeom prst="roundRect">
+            <a:avLst>
+              <a:gd name="adj" fmla="val 17142"/>
+            </a:avLst>
+          </a:prstGeom>
+          <a:solidFill>
+            <a:srgbClr val="E6F0F0"/>
+          </a:solidFill>
+          <a:ln w="12700">
+            <a:solidFill>
+              <a:srgbClr val="2D6A6E"/>
+            </a:solidFill>
+          </a:ln>
+          <a:effectLst/>
+        </p:spPr>
+        <p:style>
+          <a:lnRef idx="1">
+            <a:schemeClr val="accent1"/>
+          </a:lnRef>
+          <a:fillRef idx="3">
+            <a:schemeClr val="accent1"/>
+          </a:fillRef>
+          <a:effectRef idx="2">
+            <a:schemeClr val="accent1"/>
+          </a:effectRef>
+          <a:fontRef idx="minor">
+            <a:schemeClr val="lt1"/>
+          </a:fontRef>
+        </p:style>
+        <p:txBody>
+          <a:bodyPr rtlCol="0" anchor="ctr"/>
+          <a:lstStyle/>
+          <a:p>
+            <a:pPr algn="ctr"/>
+          </a:p>
+        </p:txBody>
+      </p:sp>
+      <p:sp>
+        <p:nvSpPr>
+          <p:cNvPr id="31" name="TextBox 30"/>
+          <p:cNvSpPr txBox="1"/>
+          <p:nvPr/>
+        </p:nvSpPr>
+        <p:spPr>
+          <a:xfrm>
+            <a:off x="5321300" y="3117850"/>
+            <a:ext cx="889000" cy="444500"/>
+          </a:xfrm>
+          <a:prstGeom prst="rect">
+            <a:avLst/>
+          </a:prstGeom>
+          <a:noFill/>
+        </p:spPr>
+        <p:txBody>
+          <a:bodyPr wrap="square" anchor="ctr" lIns="25400" rIns="25400" tIns="12700" bIns="12700">
+            <a:normAutofit/>
+          </a:bodyPr>
+          <a:lstStyle/>
+          <a:p>
+            <a:pPr algn="ctr">
+              <a:spcAft>
+                <a:spcPts val="0"/>
+              </a:spcAft>
+            </a:pPr>
+            <a:r>
+              <a:rPr sz="625" b="0">
+                <a:solidFill>
+                  <a:srgbClr val="142433"/>
+                </a:solidFill>
+                <a:latin typeface="Inter"/>
+              </a:rPr>
+              <a:t>Consultation (~20 min)</a:t>
+            </a:r>
+          </a:p>
+        </p:txBody>
+      </p:sp>
+      <p:sp>
+        <p:nvSpPr>
+          <p:cNvPr id="32" name="Diamond 31"/>
+          <p:cNvSpPr/>
+          <p:nvPr/>
+        </p:nvSpPr>
+        <p:spPr>
+          <a:xfrm>
+            <a:off x="6184900" y="3009900"/>
+            <a:ext cx="1092200" cy="660400"/>
+          </a:xfrm>
+          <a:prstGeom prst="diamond">
+            <a:avLst/>
+          </a:prstGeom>
+          <a:solidFill>
+            <a:srgbClr val="FFF0E6"/>
+          </a:solidFill>
+          <a:ln w="19050">
+            <a:solidFill>
+              <a:srgbClr val="C45A1A"/>
+            </a:solidFill>
+          </a:ln>
+          <a:effectLst/>
+        </p:spPr>
+        <p:style>
+          <a:lnRef idx="1">
+            <a:schemeClr val="accent1"/>
+          </a:lnRef>
+          <a:fillRef idx="3">
+            <a:schemeClr val="accent1"/>
+          </a:fillRef>
+          <a:effectRef idx="2">
+            <a:schemeClr val="accent1"/>
+          </a:effectRef>
+          <a:fontRef idx="minor">
+            <a:schemeClr val="lt1"/>
+          </a:fontRef>
+        </p:style>
+        <p:txBody>
+          <a:bodyPr rtlCol="0" anchor="ctr" wrap="square" lIns="38100" rIns="38100" tIns="12700" bIns="12700">
+            <a:normAutofit/>
+          </a:bodyPr>
+          <a:lstStyle/>
+          <a:p>
+            <a:pPr algn="ctr"/>
+            <a:r>
+              <a:rPr sz="625" b="1">
+                <a:solidFill>
+                  <a:srgbClr val="142433"/>
+                </a:solidFill>
+                <a:latin typeface="Inter"/>
+              </a:rPr>
+              <a:t>Ongoing therapy?</a:t>
+            </a:r>
+          </a:p>
+        </p:txBody>
+      </p:sp>
+      <p:sp>
+        <p:nvSpPr>
+          <p:cNvPr id="33" name="Rounded Rectangle 32"/>
+          <p:cNvSpPr/>
+          <p:nvPr/>
+        </p:nvSpPr>
+        <p:spPr>
+          <a:xfrm>
+            <a:off x="7188200" y="4362450"/>
+            <a:ext cx="1016000" cy="444500"/>
+          </a:xfrm>
+          <a:prstGeom prst="roundRect">
+            <a:avLst>
+              <a:gd name="adj" fmla="val 17142"/>
+            </a:avLst>
+          </a:prstGeom>
+          <a:solidFill>
+            <a:srgbClr val="E6F0F0"/>
+          </a:solidFill>
+          <a:ln w="12700">
+            <a:solidFill>
+              <a:srgbClr val="2D6A6E"/>
+            </a:solidFill>
+          </a:ln>
+          <a:effectLst/>
+        </p:spPr>
+        <p:style>
+          <a:lnRef idx="1">
+            <a:schemeClr val="accent1"/>
+          </a:lnRef>
+          <a:fillRef idx="3">
+            <a:schemeClr val="accent1"/>
+          </a:fillRef>
+          <a:effectRef idx="2">
+            <a:schemeClr val="accent1"/>
+          </a:effectRef>
+          <a:fontRef idx="minor">
+            <a:schemeClr val="lt1"/>
+          </a:fontRef>
+        </p:style>
+        <p:txBody>
+          <a:bodyPr rtlCol="0" anchor="ctr"/>
+          <a:lstStyle/>
+          <a:p>
+            <a:pPr algn="ctr"/>
+          </a:p>
+        </p:txBody>
+      </p:sp>
+      <p:sp>
+        <p:nvSpPr>
+          <p:cNvPr id="34" name="TextBox 33"/>
+          <p:cNvSpPr txBox="1"/>
+          <p:nvPr/>
+        </p:nvSpPr>
+        <p:spPr>
+          <a:xfrm>
+            <a:off x="7251700" y="4362450"/>
+            <a:ext cx="889000" cy="444500"/>
+          </a:xfrm>
+          <a:prstGeom prst="rect">
+            <a:avLst/>
+          </a:prstGeom>
+          <a:noFill/>
+        </p:spPr>
+        <p:txBody>
+          <a:bodyPr wrap="square" anchor="ctr" lIns="25400" rIns="25400" tIns="12700" bIns="12700">
+            <a:normAutofit/>
+          </a:bodyPr>
+          <a:lstStyle/>
+          <a:p>
+            <a:pPr algn="ctr">
+              <a:spcAft>
+                <a:spcPts val="0"/>
+              </a:spcAft>
+            </a:pPr>
+            <a:r>
+              <a:rPr sz="625" b="0">
+                <a:solidFill>
+                  <a:srgbClr val="142433"/>
+                </a:solidFill>
+                <a:latin typeface="Inter"/>
+              </a:rPr>
+              <a:t>AI session plan (DRAFT)</a:t>
+            </a:r>
+          </a:p>
+        </p:txBody>
+      </p:sp>
+      <p:sp>
+        <p:nvSpPr>
+          <p:cNvPr id="35" name="Rounded Rectangle 34"/>
+          <p:cNvSpPr/>
+          <p:nvPr/>
+        </p:nvSpPr>
+        <p:spPr>
+          <a:xfrm>
+            <a:off x="7188200" y="3117850"/>
+            <a:ext cx="1016000" cy="444500"/>
+          </a:xfrm>
+          <a:prstGeom prst="roundRect">
+            <a:avLst>
+              <a:gd name="adj" fmla="val 17142"/>
+            </a:avLst>
+          </a:prstGeom>
+          <a:solidFill>
+            <a:srgbClr val="E6F0F0"/>
+          </a:solidFill>
+          <a:ln w="12700">
+            <a:solidFill>
+              <a:srgbClr val="2D6A6E"/>
+            </a:solidFill>
+          </a:ln>
+          <a:effectLst/>
+        </p:spPr>
+        <p:style>
+          <a:lnRef idx="1">
+            <a:schemeClr val="accent1"/>
+          </a:lnRef>
+          <a:fillRef idx="3">
+            <a:schemeClr val="accent1"/>
+          </a:fillRef>
+          <a:effectRef idx="2">
+            <a:schemeClr val="accent1"/>
+          </a:effectRef>
+          <a:fontRef idx="minor">
+            <a:schemeClr val="lt1"/>
+          </a:fontRef>
+        </p:style>
+        <p:txBody>
+          <a:bodyPr rtlCol="0" anchor="ctr"/>
+          <a:lstStyle/>
+          <a:p>
+            <a:pPr algn="ctr"/>
+          </a:p>
+        </p:txBody>
+      </p:sp>
+      <p:sp>
+        <p:nvSpPr>
+          <p:cNvPr id="36" name="TextBox 35"/>
+          <p:cNvSpPr txBox="1"/>
+          <p:nvPr/>
+        </p:nvSpPr>
+        <p:spPr>
+          <a:xfrm>
+            <a:off x="7251700" y="3117850"/>
+            <a:ext cx="889000" cy="444500"/>
+          </a:xfrm>
+          <a:prstGeom prst="rect">
+            <a:avLst/>
+          </a:prstGeom>
+          <a:noFill/>
+        </p:spPr>
+        <p:txBody>
+          <a:bodyPr wrap="square" anchor="ctr" lIns="25400" rIns="25400" tIns="12700" bIns="12700">
+            <a:normAutofit/>
+          </a:bodyPr>
+          <a:lstStyle/>
+          <a:p>
+            <a:pPr algn="ctr">
+              <a:spcAft>
+                <a:spcPts val="0"/>
+              </a:spcAft>
+            </a:pPr>
+            <a:r>
+              <a:rPr sz="625" b="0">
+                <a:solidFill>
+                  <a:srgbClr val="142433"/>
+                </a:solidFill>
+                <a:latin typeface="Inter"/>
+              </a:rPr>
+              <a:t>Strategy advice &amp; home tips</a:t>
+            </a:r>
+          </a:p>
+        </p:txBody>
+      </p:sp>
+      <p:sp>
+        <p:nvSpPr>
+          <p:cNvPr id="37" name="Rounded Rectangle 36"/>
+          <p:cNvSpPr/>
+          <p:nvPr/>
+        </p:nvSpPr>
+        <p:spPr>
+          <a:xfrm>
+            <a:off x="8153399" y="3117850"/>
+            <a:ext cx="1016000" cy="444500"/>
+          </a:xfrm>
+          <a:prstGeom prst="roundRect">
+            <a:avLst>
+              <a:gd name="adj" fmla="val 17142"/>
+            </a:avLst>
+          </a:prstGeom>
+          <a:solidFill>
+            <a:srgbClr val="E6F0F0"/>
+          </a:solidFill>
+          <a:ln w="12700">
+            <a:solidFill>
+              <a:srgbClr val="2D6A6E"/>
+            </a:solidFill>
+          </a:ln>
+          <a:effectLst/>
+        </p:spPr>
+        <p:style>
+          <a:lnRef idx="1">
+            <a:schemeClr val="accent1"/>
+          </a:lnRef>
+          <a:fillRef idx="3">
+            <a:schemeClr val="accent1"/>
+          </a:fillRef>
+          <a:effectRef idx="2">
+            <a:schemeClr val="accent1"/>
+          </a:effectRef>
+          <a:fontRef idx="minor">
+            <a:schemeClr val="lt1"/>
+          </a:fontRef>
+        </p:style>
+        <p:txBody>
+          <a:bodyPr rtlCol="0" anchor="ctr"/>
+          <a:lstStyle/>
+          <a:p>
+            <a:pPr algn="ctr"/>
+          </a:p>
+        </p:txBody>
+      </p:sp>
+      <p:sp>
+        <p:nvSpPr>
+          <p:cNvPr id="38" name="TextBox 37"/>
+          <p:cNvSpPr txBox="1"/>
+          <p:nvPr/>
+        </p:nvSpPr>
+        <p:spPr>
+          <a:xfrm>
+            <a:off x="8216900" y="3117850"/>
+            <a:ext cx="889000" cy="444500"/>
+          </a:xfrm>
+          <a:prstGeom prst="rect">
+            <a:avLst/>
+          </a:prstGeom>
+          <a:noFill/>
+        </p:spPr>
+        <p:txBody>
+          <a:bodyPr wrap="square" anchor="ctr" lIns="25400" rIns="25400" tIns="12700" bIns="12700">
+            <a:normAutofit/>
+          </a:bodyPr>
+          <a:lstStyle/>
+          <a:p>
+            <a:pPr algn="ctr">
+              <a:spcAft>
+                <a:spcPts val="0"/>
+              </a:spcAft>
+            </a:pPr>
+            <a:r>
+              <a:rPr sz="625" b="0">
+                <a:solidFill>
+                  <a:srgbClr val="142433"/>
+                </a:solidFill>
+                <a:latin typeface="Inter"/>
+              </a:rPr>
+              <a:t>Edit &amp; sign plan</a:t>
+            </a:r>
+          </a:p>
+        </p:txBody>
+      </p:sp>
+      <p:sp>
+        <p:nvSpPr>
+          <p:cNvPr id="39" name="Rounded Rectangle 38"/>
+          <p:cNvSpPr/>
+          <p:nvPr/>
+        </p:nvSpPr>
+        <p:spPr>
+          <a:xfrm>
+            <a:off x="9118600" y="4362450"/>
+            <a:ext cx="1016000" cy="444500"/>
+          </a:xfrm>
+          <a:prstGeom prst="roundRect">
+            <a:avLst>
+              <a:gd name="adj" fmla="val 17142"/>
+            </a:avLst>
+          </a:prstGeom>
+          <a:solidFill>
+            <a:srgbClr val="E6F0F0"/>
+          </a:solidFill>
+          <a:ln w="12700">
+            <a:solidFill>
+              <a:srgbClr val="2D6A6E"/>
+            </a:solidFill>
+          </a:ln>
+          <a:effectLst/>
+        </p:spPr>
+        <p:style>
+          <a:lnRef idx="1">
+            <a:schemeClr val="accent1"/>
+          </a:lnRef>
+          <a:fillRef idx="3">
+            <a:schemeClr val="accent1"/>
+          </a:fillRef>
+          <a:effectRef idx="2">
+            <a:schemeClr val="accent1"/>
+          </a:effectRef>
+          <a:fontRef idx="minor">
+            <a:schemeClr val="lt1"/>
+          </a:fontRef>
+        </p:style>
+        <p:txBody>
+          <a:bodyPr rtlCol="0" anchor="ctr"/>
+          <a:lstStyle/>
+          <a:p>
+            <a:pPr algn="ctr"/>
+          </a:p>
+        </p:txBody>
+      </p:sp>
+      <p:sp>
+        <p:nvSpPr>
+          <p:cNvPr id="40" name="TextBox 39"/>
+          <p:cNvSpPr txBox="1"/>
+          <p:nvPr/>
+        </p:nvSpPr>
+        <p:spPr>
+          <a:xfrm>
+            <a:off x="9182100" y="4362450"/>
+            <a:ext cx="889000" cy="444500"/>
+          </a:xfrm>
+          <a:prstGeom prst="rect">
+            <a:avLst/>
+          </a:prstGeom>
+          <a:noFill/>
+        </p:spPr>
+        <p:txBody>
+          <a:bodyPr wrap="square" anchor="ctr" lIns="25400" rIns="25400" tIns="12700" bIns="12700">
+            <a:normAutofit/>
+          </a:bodyPr>
+          <a:lstStyle/>
+          <a:p>
+            <a:pPr algn="ctr">
+              <a:spcAft>
+                <a:spcPts val="0"/>
+              </a:spcAft>
+            </a:pPr>
+            <a:r>
+              <a:rPr sz="625" b="0">
+                <a:solidFill>
+                  <a:srgbClr val="142433"/>
+                </a:solidFill>
+                <a:latin typeface="Inter"/>
+              </a:rPr>
+              <a:t>AI family summary (DRAFT)</a:t>
+            </a:r>
+          </a:p>
+        </p:txBody>
+      </p:sp>
+      <p:sp>
+        <p:nvSpPr>
+          <p:cNvPr id="41" name="Rounded Rectangle 40"/>
+          <p:cNvSpPr/>
+          <p:nvPr/>
+        </p:nvSpPr>
+        <p:spPr>
+          <a:xfrm>
+            <a:off x="10083800" y="3117850"/>
+            <a:ext cx="1016000" cy="444500"/>
+          </a:xfrm>
+          <a:prstGeom prst="roundRect">
+            <a:avLst>
+              <a:gd name="adj" fmla="val 17142"/>
+            </a:avLst>
+          </a:prstGeom>
+          <a:solidFill>
+            <a:srgbClr val="E6F0F0"/>
+          </a:solidFill>
+          <a:ln w="12700">
+            <a:solidFill>
+              <a:srgbClr val="2D6A6E"/>
+            </a:solidFill>
+          </a:ln>
+          <a:effectLst/>
+        </p:spPr>
+        <p:style>
+          <a:lnRef idx="1">
+            <a:schemeClr val="accent1"/>
+          </a:lnRef>
+          <a:fillRef idx="3">
+            <a:schemeClr val="accent1"/>
+          </a:fillRef>
+          <a:effectRef idx="2">
+            <a:schemeClr val="accent1"/>
+          </a:effectRef>
+          <a:fontRef idx="minor">
+            <a:schemeClr val="lt1"/>
+          </a:fontRef>
+        </p:style>
+        <p:txBody>
+          <a:bodyPr rtlCol="0" anchor="ctr"/>
+          <a:lstStyle/>
+          <a:p>
+            <a:pPr algn="ctr"/>
+          </a:p>
+        </p:txBody>
+      </p:sp>
+      <p:sp>
+        <p:nvSpPr>
+          <p:cNvPr id="42" name="TextBox 41"/>
+          <p:cNvSpPr txBox="1"/>
+          <p:nvPr/>
+        </p:nvSpPr>
+        <p:spPr>
+          <a:xfrm>
+            <a:off x="10147300" y="3117850"/>
+            <a:ext cx="889000" cy="444500"/>
+          </a:xfrm>
+          <a:prstGeom prst="rect">
+            <a:avLst/>
+          </a:prstGeom>
+          <a:noFill/>
+        </p:spPr>
+        <p:txBody>
+          <a:bodyPr wrap="square" anchor="ctr" lIns="25400" rIns="25400" tIns="12700" bIns="12700">
+            <a:normAutofit/>
+          </a:bodyPr>
+          <a:lstStyle/>
+          <a:p>
+            <a:pPr algn="ctr">
+              <a:spcAft>
+                <a:spcPts val="0"/>
+              </a:spcAft>
+            </a:pPr>
+            <a:r>
+              <a:rPr sz="625" b="0">
+                <a:solidFill>
+                  <a:srgbClr val="142433"/>
+                </a:solidFill>
+                <a:latin typeface="Inter"/>
+              </a:rPr>
+              <a:t>Review &amp; send summary</a:t>
+            </a:r>
+          </a:p>
+        </p:txBody>
+      </p:sp>
+      <p:sp>
+        <p:nvSpPr>
+          <p:cNvPr id="43" name="Rounded Rectangle 42"/>
+          <p:cNvSpPr/>
+          <p:nvPr/>
+        </p:nvSpPr>
+        <p:spPr>
+          <a:xfrm>
+            <a:off x="9626600" y="1873250"/>
+            <a:ext cx="1016000" cy="444500"/>
+          </a:xfrm>
+          <a:prstGeom prst="roundRect">
+            <a:avLst>
+              <a:gd name="adj" fmla="val 17142"/>
+            </a:avLst>
+          </a:prstGeom>
+          <a:solidFill>
+            <a:srgbClr val="E6F0F0"/>
+          </a:solidFill>
+          <a:ln w="12700">
+            <a:solidFill>
+              <a:srgbClr val="2D6A6E"/>
+            </a:solidFill>
+          </a:ln>
+          <a:effectLst/>
+        </p:spPr>
+        <p:style>
+          <a:lnRef idx="1">
+            <a:schemeClr val="accent1"/>
+          </a:lnRef>
+          <a:fillRef idx="3">
+            <a:schemeClr val="accent1"/>
+          </a:fillRef>
+          <a:effectRef idx="2">
+            <a:schemeClr val="accent1"/>
+          </a:effectRef>
+          <a:fontRef idx="minor">
+            <a:schemeClr val="lt1"/>
+          </a:fontRef>
+        </p:style>
+        <p:txBody>
+          <a:bodyPr rtlCol="0" anchor="ctr"/>
+          <a:lstStyle/>
+          <a:p>
+            <a:pPr algn="ctr"/>
+          </a:p>
+        </p:txBody>
+      </p:sp>
+      <p:sp>
+        <p:nvSpPr>
+          <p:cNvPr id="44" name="TextBox 43"/>
+          <p:cNvSpPr txBox="1"/>
+          <p:nvPr/>
+        </p:nvSpPr>
+        <p:spPr>
+          <a:xfrm>
+            <a:off x="9690100" y="1873250"/>
+            <a:ext cx="889000" cy="444500"/>
+          </a:xfrm>
+          <a:prstGeom prst="rect">
+            <a:avLst/>
+          </a:prstGeom>
+          <a:noFill/>
+        </p:spPr>
+        <p:txBody>
+          <a:bodyPr wrap="square" anchor="ctr" lIns="25400" rIns="25400" tIns="12700" bIns="12700">
+            <a:normAutofit/>
+          </a:bodyPr>
+          <a:lstStyle/>
+          <a:p>
+            <a:pPr algn="ctr">
+              <a:spcAft>
+                <a:spcPts val="0"/>
+              </a:spcAft>
+            </a:pPr>
+            <a:r>
+              <a:rPr sz="625" b="0">
+                <a:solidFill>
+                  <a:srgbClr val="142433"/>
+                </a:solidFill>
+                <a:latin typeface="Inter"/>
+              </a:rPr>
+              <a:t>Receive summary (app)</a:t>
+            </a:r>
+          </a:p>
+        </p:txBody>
+      </p:sp>
+      <p:sp>
+        <p:nvSpPr>
+          <p:cNvPr id="45" name="Rounded Rectangle 44"/>
+          <p:cNvSpPr/>
+          <p:nvPr/>
+        </p:nvSpPr>
+        <p:spPr>
+          <a:xfrm>
+            <a:off x="10083800" y="4362450"/>
+            <a:ext cx="1016000" cy="444500"/>
+          </a:xfrm>
+          <a:prstGeom prst="roundRect">
+            <a:avLst>
+              <a:gd name="adj" fmla="val 17142"/>
+            </a:avLst>
+          </a:prstGeom>
+          <a:solidFill>
+            <a:srgbClr val="E6F0F0"/>
+          </a:solidFill>
+          <a:ln w="12700">
+            <a:solidFill>
+              <a:srgbClr val="2D6A6E"/>
+            </a:solidFill>
+          </a:ln>
+          <a:effectLst/>
+        </p:spPr>
+        <p:style>
+          <a:lnRef idx="1">
+            <a:schemeClr val="accent1"/>
+          </a:lnRef>
+          <a:fillRef idx="3">
+            <a:schemeClr val="accent1"/>
+          </a:fillRef>
+          <a:effectRef idx="2">
+            <a:schemeClr val="accent1"/>
+          </a:effectRef>
+          <a:fontRef idx="minor">
+            <a:schemeClr val="lt1"/>
+          </a:fontRef>
+        </p:style>
+        <p:txBody>
+          <a:bodyPr rtlCol="0" anchor="ctr"/>
+          <a:lstStyle/>
+          <a:p>
+            <a:pPr algn="ctr"/>
+          </a:p>
+        </p:txBody>
+      </p:sp>
+      <p:sp>
+        <p:nvSpPr>
+          <p:cNvPr id="46" name="TextBox 45"/>
+          <p:cNvSpPr txBox="1"/>
+          <p:nvPr/>
+        </p:nvSpPr>
+        <p:spPr>
+          <a:xfrm>
+            <a:off x="10147300" y="4362450"/>
+            <a:ext cx="889000" cy="444500"/>
+          </a:xfrm>
+          <a:prstGeom prst="rect">
+            <a:avLst/>
+          </a:prstGeom>
+          <a:noFill/>
+        </p:spPr>
+        <p:txBody>
+          <a:bodyPr wrap="square" anchor="ctr" lIns="25400" rIns="25400" tIns="12700" bIns="12700">
+            <a:normAutofit/>
+          </a:bodyPr>
+          <a:lstStyle/>
+          <a:p>
+            <a:pPr algn="ctr">
+              <a:spcAft>
+                <a:spcPts val="0"/>
+              </a:spcAft>
+            </a:pPr>
+            <a:r>
+              <a:rPr sz="625" b="0">
+                <a:solidFill>
+                  <a:srgbClr val="142433"/>
+                </a:solidFill>
+                <a:latin typeface="Inter"/>
+              </a:rPr>
+              <a:t>Carryover + progress portal</a:t>
+            </a:r>
+          </a:p>
+        </p:txBody>
+      </p:sp>
+      <p:sp>
+        <p:nvSpPr>
+          <p:cNvPr id="47" name="Rounded Rectangle 46"/>
+          <p:cNvSpPr/>
+          <p:nvPr/>
+        </p:nvSpPr>
+        <p:spPr>
+          <a:xfrm>
+            <a:off x="10083800" y="5607050"/>
+            <a:ext cx="1016000" cy="444500"/>
+          </a:xfrm>
+          <a:prstGeom prst="roundRect">
+            <a:avLst>
+              <a:gd name="adj" fmla="val 17142"/>
+            </a:avLst>
+          </a:prstGeom>
+          <a:solidFill>
+            <a:srgbClr val="E6F0F0"/>
+          </a:solidFill>
+          <a:ln w="12700">
+            <a:solidFill>
+              <a:srgbClr val="2D6A6E"/>
+            </a:solidFill>
+          </a:ln>
+          <a:effectLst/>
+        </p:spPr>
+        <p:style>
+          <a:lnRef idx="1">
+            <a:schemeClr val="accent1"/>
+          </a:lnRef>
+          <a:fillRef idx="3">
+            <a:schemeClr val="accent1"/>
+          </a:fillRef>
+          <a:effectRef idx="2">
+            <a:schemeClr val="accent1"/>
+          </a:effectRef>
+          <a:fontRef idx="minor">
+            <a:schemeClr val="lt1"/>
+          </a:fontRef>
+        </p:style>
+        <p:txBody>
+          <a:bodyPr rtlCol="0" anchor="ctr"/>
+          <a:lstStyle/>
+          <a:p>
+            <a:pPr algn="ctr"/>
+          </a:p>
+        </p:txBody>
+      </p:sp>
+      <p:sp>
+        <p:nvSpPr>
+          <p:cNvPr id="48" name="TextBox 47"/>
+          <p:cNvSpPr txBox="1"/>
+          <p:nvPr/>
+        </p:nvSpPr>
+        <p:spPr>
+          <a:xfrm>
+            <a:off x="10147300" y="5607050"/>
+            <a:ext cx="889000" cy="444500"/>
+          </a:xfrm>
+          <a:prstGeom prst="rect">
+            <a:avLst/>
+          </a:prstGeom>
+          <a:noFill/>
+        </p:spPr>
+        <p:txBody>
+          <a:bodyPr wrap="square" anchor="ctr" lIns="25400" rIns="25400" tIns="12700" bIns="12700">
+            <a:normAutofit/>
+          </a:bodyPr>
+          <a:lstStyle/>
+          <a:p>
+            <a:pPr algn="ctr">
+              <a:spcAft>
+                <a:spcPts val="0"/>
+              </a:spcAft>
+            </a:pPr>
+            <a:r>
+              <a:rPr sz="625" b="0">
+                <a:solidFill>
+                  <a:srgbClr val="142433"/>
+                </a:solidFill>
+                <a:latin typeface="Inter"/>
+              </a:rPr>
+              <a:t>PMS sync (vision)</a:t>
+            </a:r>
+          </a:p>
+        </p:txBody>
+      </p:sp>
+      <p:sp>
+        <p:nvSpPr>
+          <p:cNvPr id="49" name="Rounded Rectangle 48"/>
+          <p:cNvSpPr/>
+          <p:nvPr/>
+        </p:nvSpPr>
+        <p:spPr>
+          <a:xfrm>
+            <a:off x="10775950" y="1866899"/>
+            <a:ext cx="952500" cy="457200"/>
+          </a:xfrm>
+          <a:prstGeom prst="roundRect">
+            <a:avLst>
+              <a:gd name="adj" fmla="val 50000"/>
+            </a:avLst>
+          </a:prstGeom>
+          <a:solidFill>
+            <a:srgbClr val="FBF7F1"/>
+          </a:solidFill>
+          <a:ln w="12700">
+            <a:solidFill>
+              <a:srgbClr val="C98A5E"/>
+            </a:solidFill>
+          </a:ln>
+          <a:effectLst/>
+        </p:spPr>
+        <p:style>
+          <a:lnRef idx="1">
+            <a:schemeClr val="accent1"/>
+          </a:lnRef>
+          <a:fillRef idx="3">
+            <a:schemeClr val="accent1"/>
+          </a:fillRef>
+          <a:effectRef idx="2">
+            <a:schemeClr val="accent1"/>
+          </a:effectRef>
+          <a:fontRef idx="minor">
+            <a:schemeClr val="lt1"/>
+          </a:fontRef>
+        </p:style>
+        <p:txBody>
+          <a:bodyPr rtlCol="0" anchor="ctr"/>
+          <a:lstStyle/>
+          <a:p>
+            <a:pPr algn="ctr"/>
+          </a:p>
+        </p:txBody>
+      </p:sp>
+      <p:sp>
+        <p:nvSpPr>
+          <p:cNvPr id="50" name="TextBox 49"/>
+          <p:cNvSpPr txBox="1"/>
+          <p:nvPr/>
+        </p:nvSpPr>
+        <p:spPr>
+          <a:xfrm>
+            <a:off x="10839450" y="1866899"/>
+            <a:ext cx="825500" cy="457200"/>
+          </a:xfrm>
+          <a:prstGeom prst="rect">
+            <a:avLst/>
+          </a:prstGeom>
+          <a:noFill/>
+        </p:spPr>
+        <p:txBody>
+          <a:bodyPr wrap="square" anchor="ctr" lIns="25400" rIns="25400" tIns="12700" bIns="12700">
+            <a:normAutofit/>
+          </a:bodyPr>
+          <a:lstStyle/>
+          <a:p>
+            <a:pPr algn="ctr">
+              <a:spcAft>
+                <a:spcPts val="0"/>
+              </a:spcAft>
+            </a:pPr>
+            <a:r>
+              <a:rPr sz="625" b="1">
+                <a:solidFill>
+                  <a:srgbClr val="142433"/>
+                </a:solidFill>
+                <a:latin typeface="Inter"/>
+              </a:rPr>
+              <a:t>Ongoing care</a:t>
+            </a:r>
+          </a:p>
+        </p:txBody>
+      </p:sp>
+      <p:cxnSp>
+        <p:nvCxnSpPr>
+          <p:cNvPr id="51" name="Connector 50"/>
+          <p:cNvCxnSpPr/>
+          <p:nvPr/>
+        </p:nvCxnSpPr>
+        <p:spPr>
+          <a:xfrm>
+            <a:off x="1905000" y="2324100"/>
+            <a:ext cx="0" cy="2038350"/>
+          </a:xfrm>
+          <a:prstGeom prst="bentConnector3">
+            <a:avLst/>
+          </a:prstGeom>
+          <a:ln w="15875">
+            <a:solidFill>
+              <a:srgbClr val="9AA7AD"/>
+            </a:solidFill>
+            <a:tailEnd type="triangle" w="med" len="med"/>
+          </a:ln>
+          <a:effectLst/>
+        </p:spPr>
+        <p:style>
+          <a:lnRef idx="2">
+            <a:schemeClr val="accent1"/>
+          </a:lnRef>
+          <a:fillRef idx="0">
+            <a:schemeClr val="accent1"/>
+          </a:fillRef>
+          <a:effectRef idx="1">
+            <a:schemeClr val="accent1"/>
+          </a:effectRef>
+          <a:fontRef idx="minor">
+            <a:schemeClr val="tx1"/>
+          </a:fontRef>
+        </p:style>
+      </p:cxnSp>
+      <p:cxnSp>
+        <p:nvCxnSpPr>
+          <p:cNvPr id="52" name="Connector 51"/>
+          <p:cNvCxnSpPr/>
+          <p:nvPr/>
+        </p:nvCxnSpPr>
+        <p:spPr>
+          <a:xfrm flipV="1">
+            <a:off x="1905000" y="2317750"/>
+            <a:ext cx="965200" cy="2044700"/>
+          </a:xfrm>
+          <a:prstGeom prst="bentConnector3">
+            <a:avLst/>
+          </a:prstGeom>
+          <a:ln w="15875">
+            <a:solidFill>
+              <a:srgbClr val="9AA7AD"/>
+            </a:solidFill>
+            <a:tailEnd type="triangle" w="med" len="med"/>
+          </a:ln>
+          <a:effectLst/>
+        </p:spPr>
+        <p:style>
+          <a:lnRef idx="2">
+            <a:schemeClr val="accent1"/>
+          </a:lnRef>
+          <a:fillRef idx="0">
+            <a:schemeClr val="accent1"/>
+          </a:fillRef>
+          <a:effectRef idx="1">
+            <a:schemeClr val="accent1"/>
+          </a:effectRef>
+          <a:fontRef idx="minor">
+            <a:schemeClr val="tx1"/>
+          </a:fontRef>
+        </p:style>
+      </p:cxnSp>
+      <p:cxnSp>
+        <p:nvCxnSpPr>
+          <p:cNvPr id="53" name="Connector 52"/>
+          <p:cNvCxnSpPr/>
+          <p:nvPr/>
+        </p:nvCxnSpPr>
+        <p:spPr>
+          <a:xfrm>
+            <a:off x="2870200" y="2317750"/>
+            <a:ext cx="965200" cy="2044700"/>
+          </a:xfrm>
+          <a:prstGeom prst="bentConnector3">
+            <a:avLst/>
+          </a:prstGeom>
+          <a:ln w="15875">
+            <a:solidFill>
+              <a:srgbClr val="9AA7AD"/>
+            </a:solidFill>
+            <a:tailEnd type="triangle" w="med" len="med"/>
+          </a:ln>
+          <a:effectLst/>
+        </p:spPr>
+        <p:style>
+          <a:lnRef idx="2">
+            <a:schemeClr val="accent1"/>
+          </a:lnRef>
+          <a:fillRef idx="0">
+            <a:schemeClr val="accent1"/>
+          </a:fillRef>
+          <a:effectRef idx="1">
+            <a:schemeClr val="accent1"/>
+          </a:effectRef>
+          <a:fontRef idx="minor">
+            <a:schemeClr val="tx1"/>
+          </a:fontRef>
+        </p:style>
+      </p:cxnSp>
+      <p:cxnSp>
+        <p:nvCxnSpPr>
+          <p:cNvPr id="54" name="Connector 53"/>
+          <p:cNvCxnSpPr/>
+          <p:nvPr/>
+        </p:nvCxnSpPr>
+        <p:spPr>
+          <a:xfrm flipV="1">
+            <a:off x="3835400" y="3562350"/>
+            <a:ext cx="965200" cy="800100"/>
+          </a:xfrm>
+          <a:prstGeom prst="bentConnector3">
+            <a:avLst/>
+          </a:prstGeom>
+          <a:ln w="15875">
+            <a:solidFill>
+              <a:srgbClr val="9AA7AD"/>
+            </a:solidFill>
+            <a:tailEnd type="triangle" w="med" len="med"/>
+          </a:ln>
+          <a:effectLst/>
+        </p:spPr>
+        <p:style>
+          <a:lnRef idx="2">
+            <a:schemeClr val="accent1"/>
+          </a:lnRef>
+          <a:fillRef idx="0">
+            <a:schemeClr val="accent1"/>
+          </a:fillRef>
+          <a:effectRef idx="1">
+            <a:schemeClr val="accent1"/>
+          </a:effectRef>
+          <a:fontRef idx="minor">
+            <a:schemeClr val="tx1"/>
+          </a:fontRef>
+        </p:style>
+      </p:cxnSp>
+      <p:cxnSp>
+        <p:nvCxnSpPr>
+          <p:cNvPr id="55" name="Connector 54"/>
+          <p:cNvCxnSpPr/>
+          <p:nvPr/>
+        </p:nvCxnSpPr>
+        <p:spPr>
+          <a:xfrm flipV="1">
+            <a:off x="4800600" y="3562350"/>
+            <a:ext cx="965200" cy="2044700"/>
+          </a:xfrm>
+          <a:prstGeom prst="bentConnector3">
+            <a:avLst/>
+          </a:prstGeom>
+          <a:ln w="15875">
+            <a:solidFill>
+              <a:srgbClr val="9AA7AD"/>
+            </a:solidFill>
+            <a:tailEnd type="triangle" w="med" len="med"/>
+          </a:ln>
+          <a:effectLst/>
+        </p:spPr>
+        <p:style>
+          <a:lnRef idx="2">
+            <a:schemeClr val="accent1"/>
+          </a:lnRef>
+          <a:fillRef idx="0">
+            <a:schemeClr val="accent1"/>
+          </a:fillRef>
+          <a:effectRef idx="1">
+            <a:schemeClr val="accent1"/>
+          </a:effectRef>
+          <a:fontRef idx="minor">
+            <a:schemeClr val="tx1"/>
+          </a:fontRef>
+        </p:style>
+      </p:cxnSp>
+      <p:cxnSp>
+        <p:nvCxnSpPr>
+          <p:cNvPr id="56" name="Connector 55"/>
+          <p:cNvCxnSpPr/>
+          <p:nvPr/>
+        </p:nvCxnSpPr>
+        <p:spPr>
+          <a:xfrm flipH="1">
+            <a:off x="5257800" y="3340100"/>
+            <a:ext cx="50800" cy="0"/>
+          </a:xfrm>
+          <a:prstGeom prst="bentConnector3">
+            <a:avLst/>
+          </a:prstGeom>
+          <a:ln w="15875">
+            <a:solidFill>
+              <a:srgbClr val="9AA7AD"/>
+            </a:solidFill>
+            <a:tailEnd type="triangle" w="med" len="med"/>
+          </a:ln>
+          <a:effectLst/>
+        </p:spPr>
+        <p:style>
+          <a:lnRef idx="2">
+            <a:schemeClr val="accent1"/>
+          </a:lnRef>
+          <a:fillRef idx="0">
+            <a:schemeClr val="accent1"/>
+          </a:fillRef>
+          <a:effectRef idx="1">
+            <a:schemeClr val="accent1"/>
+          </a:effectRef>
+          <a:fontRef idx="minor">
+            <a:schemeClr val="tx1"/>
+          </a:fontRef>
+        </p:style>
+      </p:cxnSp>
+      <p:cxnSp>
+        <p:nvCxnSpPr>
+          <p:cNvPr id="57" name="Connector 56"/>
+          <p:cNvCxnSpPr/>
+          <p:nvPr/>
+        </p:nvCxnSpPr>
+        <p:spPr>
+          <a:xfrm flipH="1">
+            <a:off x="6184900" y="3340100"/>
+            <a:ext cx="88900" cy="0"/>
+          </a:xfrm>
+          <a:prstGeom prst="bentConnector3">
+            <a:avLst/>
+          </a:prstGeom>
+          <a:ln w="15875">
+            <a:solidFill>
+              <a:srgbClr val="9AA7AD"/>
+            </a:solidFill>
+            <a:tailEnd type="triangle" w="med" len="med"/>
+          </a:ln>
+          <a:effectLst/>
+        </p:spPr>
+        <p:style>
+          <a:lnRef idx="2">
+            <a:schemeClr val="accent1"/>
+          </a:lnRef>
+          <a:fillRef idx="0">
+            <a:schemeClr val="accent1"/>
+          </a:fillRef>
+          <a:effectRef idx="1">
+            <a:schemeClr val="accent1"/>
+          </a:effectRef>
+          <a:fontRef idx="minor">
+            <a:schemeClr val="tx1"/>
+          </a:fontRef>
+        </p:style>
+      </p:cxnSp>
+      <p:cxnSp>
+        <p:nvCxnSpPr>
+          <p:cNvPr id="58" name="Connector 57"/>
+          <p:cNvCxnSpPr/>
+          <p:nvPr/>
+        </p:nvCxnSpPr>
+        <p:spPr>
+          <a:xfrm>
+            <a:off x="6731000" y="3670300"/>
+            <a:ext cx="965199" cy="692150"/>
+          </a:xfrm>
+          <a:prstGeom prst="bentConnector3">
+            <a:avLst/>
+          </a:prstGeom>
+          <a:ln w="15875">
+            <a:solidFill>
+              <a:srgbClr val="9AA7AD"/>
+            </a:solidFill>
+            <a:tailEnd type="triangle" w="med" len="med"/>
+          </a:ln>
+          <a:effectLst/>
+        </p:spPr>
+        <p:style>
+          <a:lnRef idx="2">
+            <a:schemeClr val="accent1"/>
+          </a:lnRef>
+          <a:fillRef idx="0">
+            <a:schemeClr val="accent1"/>
+          </a:fillRef>
+          <a:effectRef idx="1">
+            <a:schemeClr val="accent1"/>
+          </a:effectRef>
+          <a:fontRef idx="minor">
+            <a:schemeClr val="tx1"/>
+          </a:fontRef>
+        </p:style>
+      </p:cxnSp>
+      <p:sp>
+        <p:nvSpPr>
+          <p:cNvPr id="59" name="TextBox 58"/>
+          <p:cNvSpPr txBox="1"/>
+          <p:nvPr/>
+        </p:nvSpPr>
+        <p:spPr>
+          <a:xfrm>
+            <a:off x="7023100" y="3876674"/>
+            <a:ext cx="381000" cy="139700"/>
+          </a:xfrm>
+          <a:prstGeom prst="rect">
+            <a:avLst/>
+          </a:prstGeom>
+          <a:noFill/>
+        </p:spPr>
+        <p:txBody>
+          <a:bodyPr wrap="none">
+            <a:spAutoFit/>
+          </a:bodyPr>
+          <a:lstStyle/>
+          <a:p>
+            <a:pPr algn="ctr"/>
+            <a:r>
+              <a:rPr sz="600" b="1">
+                <a:solidFill>
+                  <a:srgbClr val="4A5B6B"/>
+                </a:solidFill>
+                <a:latin typeface="Inter"/>
+              </a:rPr>
+              <a:t>Yes</a:t>
+            </a:r>
+          </a:p>
+        </p:txBody>
+      </p:sp>
+      <p:cxnSp>
+        <p:nvCxnSpPr>
+          <p:cNvPr id="60" name="Connector 59"/>
+          <p:cNvCxnSpPr/>
+          <p:nvPr/>
+        </p:nvCxnSpPr>
+        <p:spPr>
+          <a:xfrm flipH="1">
+            <a:off x="7188200" y="3340100"/>
+            <a:ext cx="88900" cy="0"/>
+          </a:xfrm>
+          <a:prstGeom prst="bentConnector3">
+            <a:avLst/>
+          </a:prstGeom>
+          <a:ln w="15875">
+            <a:solidFill>
+              <a:srgbClr val="9AA7AD"/>
+            </a:solidFill>
+            <a:tailEnd type="triangle" w="med" len="med"/>
+          </a:ln>
+          <a:effectLst/>
+        </p:spPr>
+        <p:style>
+          <a:lnRef idx="2">
+            <a:schemeClr val="accent1"/>
+          </a:lnRef>
+          <a:fillRef idx="0">
+            <a:schemeClr val="accent1"/>
+          </a:fillRef>
+          <a:effectRef idx="1">
+            <a:schemeClr val="accent1"/>
+          </a:effectRef>
+          <a:fontRef idx="minor">
+            <a:schemeClr val="tx1"/>
+          </a:fontRef>
+        </p:style>
+      </p:cxnSp>
+      <p:sp>
+        <p:nvSpPr>
+          <p:cNvPr id="61" name="TextBox 60"/>
+          <p:cNvSpPr txBox="1"/>
+          <p:nvPr/>
+        </p:nvSpPr>
+        <p:spPr>
+          <a:xfrm>
+            <a:off x="7042150" y="3200400"/>
+            <a:ext cx="381000" cy="139700"/>
+          </a:xfrm>
+          <a:prstGeom prst="rect">
+            <a:avLst/>
+          </a:prstGeom>
+          <a:noFill/>
+        </p:spPr>
+        <p:txBody>
+          <a:bodyPr wrap="none">
+            <a:spAutoFit/>
+          </a:bodyPr>
+          <a:lstStyle/>
+          <a:p>
+            <a:pPr algn="ctr"/>
+            <a:r>
+              <a:rPr sz="600" b="1">
+                <a:solidFill>
+                  <a:srgbClr val="4A5B6B"/>
+                </a:solidFill>
+                <a:latin typeface="Inter"/>
+              </a:rPr>
+              <a:t>No</a:t>
+            </a:r>
+          </a:p>
+        </p:txBody>
+      </p:sp>
+      <p:cxnSp>
+        <p:nvCxnSpPr>
+          <p:cNvPr id="62" name="Connector 61"/>
+          <p:cNvCxnSpPr/>
+          <p:nvPr/>
+        </p:nvCxnSpPr>
+        <p:spPr>
+          <a:xfrm flipV="1">
+            <a:off x="7696199" y="3562350"/>
+            <a:ext cx="965201" cy="800100"/>
+          </a:xfrm>
+          <a:prstGeom prst="bentConnector3">
+            <a:avLst/>
+          </a:prstGeom>
+          <a:ln w="15875">
+            <a:solidFill>
+              <a:srgbClr val="9AA7AD"/>
+            </a:solidFill>
+            <a:tailEnd type="triangle" w="med" len="med"/>
+          </a:ln>
+          <a:effectLst/>
+        </p:spPr>
+        <p:style>
+          <a:lnRef idx="2">
+            <a:schemeClr val="accent1"/>
+          </a:lnRef>
+          <a:fillRef idx="0">
+            <a:schemeClr val="accent1"/>
+          </a:fillRef>
+          <a:effectRef idx="1">
+            <a:schemeClr val="accent1"/>
+          </a:effectRef>
+          <a:fontRef idx="minor">
+            <a:schemeClr val="tx1"/>
+          </a:fontRef>
+        </p:style>
+      </p:cxnSp>
+      <p:cxnSp>
+        <p:nvCxnSpPr>
+          <p:cNvPr id="63" name="Connector 62"/>
+          <p:cNvCxnSpPr/>
+          <p:nvPr/>
+        </p:nvCxnSpPr>
+        <p:spPr>
+          <a:xfrm>
+            <a:off x="8661400" y="3562350"/>
+            <a:ext cx="965200" cy="800100"/>
+          </a:xfrm>
+          <a:prstGeom prst="bentConnector3">
+            <a:avLst/>
+          </a:prstGeom>
+          <a:ln w="15875">
+            <a:solidFill>
+              <a:srgbClr val="9AA7AD"/>
+            </a:solidFill>
+            <a:tailEnd type="triangle" w="med" len="med"/>
+          </a:ln>
+          <a:effectLst/>
+        </p:spPr>
+        <p:style>
+          <a:lnRef idx="2">
+            <a:schemeClr val="accent1"/>
+          </a:lnRef>
+          <a:fillRef idx="0">
+            <a:schemeClr val="accent1"/>
+          </a:fillRef>
+          <a:effectRef idx="1">
+            <a:schemeClr val="accent1"/>
+          </a:effectRef>
+          <a:fontRef idx="minor">
+            <a:schemeClr val="tx1"/>
+          </a:fontRef>
+        </p:style>
+      </p:cxnSp>
+      <p:cxnSp>
+        <p:nvCxnSpPr>
+          <p:cNvPr id="64" name="Connector 63"/>
+          <p:cNvCxnSpPr/>
+          <p:nvPr/>
+        </p:nvCxnSpPr>
+        <p:spPr>
+          <a:xfrm>
+            <a:off x="8204199" y="3340100"/>
+            <a:ext cx="914401" cy="1244600"/>
+          </a:xfrm>
+          <a:prstGeom prst="bentConnector3">
+            <a:avLst/>
+          </a:prstGeom>
+          <a:ln w="15875">
+            <a:solidFill>
+              <a:srgbClr val="9AA7AD"/>
+            </a:solidFill>
+            <a:tailEnd type="triangle" w="med" len="med"/>
+          </a:ln>
+          <a:effectLst/>
+        </p:spPr>
+        <p:style>
+          <a:lnRef idx="2">
+            <a:schemeClr val="accent1"/>
+          </a:lnRef>
+          <a:fillRef idx="0">
+            <a:schemeClr val="accent1"/>
+          </a:fillRef>
+          <a:effectRef idx="1">
+            <a:schemeClr val="accent1"/>
+          </a:effectRef>
+          <a:fontRef idx="minor">
+            <a:schemeClr val="tx1"/>
+          </a:fontRef>
+        </p:style>
+      </p:cxnSp>
+      <p:cxnSp>
+        <p:nvCxnSpPr>
+          <p:cNvPr id="65" name="Connector 64"/>
+          <p:cNvCxnSpPr/>
+          <p:nvPr/>
+        </p:nvCxnSpPr>
+        <p:spPr>
+          <a:xfrm flipV="1">
+            <a:off x="9626600" y="3562350"/>
+            <a:ext cx="965200" cy="800100"/>
+          </a:xfrm>
+          <a:prstGeom prst="bentConnector3">
+            <a:avLst/>
+          </a:prstGeom>
+          <a:ln w="15875">
+            <a:solidFill>
+              <a:srgbClr val="9AA7AD"/>
+            </a:solidFill>
+            <a:tailEnd type="triangle" w="med" len="med"/>
+          </a:ln>
+          <a:effectLst/>
+        </p:spPr>
+        <p:style>
+          <a:lnRef idx="2">
+            <a:schemeClr val="accent1"/>
+          </a:lnRef>
+          <a:fillRef idx="0">
+            <a:schemeClr val="accent1"/>
+          </a:fillRef>
+          <a:effectRef idx="1">
+            <a:schemeClr val="accent1"/>
+          </a:effectRef>
+          <a:fontRef idx="minor">
+            <a:schemeClr val="tx1"/>
+          </a:fontRef>
+        </p:style>
+      </p:cxnSp>
+      <p:cxnSp>
+        <p:nvCxnSpPr>
+          <p:cNvPr id="66" name="Connector 65"/>
+          <p:cNvCxnSpPr/>
+          <p:nvPr/>
+        </p:nvCxnSpPr>
+        <p:spPr>
+          <a:xfrm flipH="1" flipV="1">
+            <a:off x="10134600" y="2317750"/>
+            <a:ext cx="457200" cy="800100"/>
+          </a:xfrm>
+          <a:prstGeom prst="bentConnector3">
+            <a:avLst/>
+          </a:prstGeom>
+          <a:ln w="15875">
+            <a:solidFill>
+              <a:srgbClr val="9AA7AD"/>
+            </a:solidFill>
+            <a:tailEnd type="triangle" w="med" len="med"/>
+          </a:ln>
+          <a:effectLst/>
+        </p:spPr>
+        <p:style>
+          <a:lnRef idx="2">
+            <a:schemeClr val="accent1"/>
+          </a:lnRef>
+          <a:fillRef idx="0">
+            <a:schemeClr val="accent1"/>
+          </a:fillRef>
+          <a:effectRef idx="1">
+            <a:schemeClr val="accent1"/>
+          </a:effectRef>
+          <a:fontRef idx="minor">
+            <a:schemeClr val="tx1"/>
+          </a:fontRef>
+        </p:style>
+      </p:cxnSp>
+      <p:cxnSp>
+        <p:nvCxnSpPr>
+          <p:cNvPr id="67" name="Connector 66"/>
+          <p:cNvCxnSpPr/>
+          <p:nvPr/>
+        </p:nvCxnSpPr>
+        <p:spPr>
+          <a:xfrm>
+            <a:off x="10591800" y="3562350"/>
+            <a:ext cx="0" cy="800100"/>
+          </a:xfrm>
+          <a:prstGeom prst="bentConnector3">
+            <a:avLst/>
+          </a:prstGeom>
+          <a:ln w="15875">
+            <a:solidFill>
+              <a:srgbClr val="9AA7AD"/>
+            </a:solidFill>
+            <a:tailEnd type="triangle" w="med" len="med"/>
+          </a:ln>
+          <a:effectLst/>
+        </p:spPr>
+        <p:style>
+          <a:lnRef idx="2">
+            <a:schemeClr val="accent1"/>
+          </a:lnRef>
+          <a:fillRef idx="0">
+            <a:schemeClr val="accent1"/>
+          </a:fillRef>
+          <a:effectRef idx="1">
+            <a:schemeClr val="accent1"/>
+          </a:effectRef>
+          <a:fontRef idx="minor">
+            <a:schemeClr val="tx1"/>
+          </a:fontRef>
+        </p:style>
+      </p:cxnSp>
+      <p:cxnSp>
+        <p:nvCxnSpPr>
+          <p:cNvPr id="68" name="Connector 67"/>
+          <p:cNvCxnSpPr/>
+          <p:nvPr/>
+        </p:nvCxnSpPr>
+        <p:spPr>
+          <a:xfrm>
+            <a:off x="10642600" y="2095499"/>
+            <a:ext cx="133350" cy="0"/>
+          </a:xfrm>
+          <a:prstGeom prst="bentConnector3">
+            <a:avLst/>
+          </a:prstGeom>
+          <a:ln w="15875">
+            <a:solidFill>
+              <a:srgbClr val="9AA7AD"/>
+            </a:solidFill>
+            <a:tailEnd type="triangle" w="med" len="med"/>
+          </a:ln>
+          <a:effectLst/>
+        </p:spPr>
+        <p:style>
+          <a:lnRef idx="2">
+            <a:schemeClr val="accent1"/>
+          </a:lnRef>
+          <a:fillRef idx="0">
+            <a:schemeClr val="accent1"/>
+          </a:fillRef>
+          <a:effectRef idx="1">
+            <a:schemeClr val="accent1"/>
+          </a:effectRef>
+          <a:fontRef idx="minor">
+            <a:schemeClr val="tx1"/>
+          </a:fontRef>
+        </p:style>
+      </p:cxnSp>
+      <p:cxnSp>
+        <p:nvCxnSpPr>
+          <p:cNvPr id="69" name="Connector 68"/>
+          <p:cNvCxnSpPr/>
+          <p:nvPr/>
+        </p:nvCxnSpPr>
+        <p:spPr>
+          <a:xfrm>
+            <a:off x="10591800" y="4806950"/>
+            <a:ext cx="0" cy="800100"/>
+          </a:xfrm>
+          <a:prstGeom prst="bentConnector3">
+            <a:avLst/>
+          </a:prstGeom>
+          <a:ln w="15875">
+            <a:solidFill>
+              <a:srgbClr val="9AA7AD"/>
+            </a:solidFill>
+            <a:tailEnd type="triangle" w="med" len="med"/>
+          </a:ln>
+          <a:effectLst/>
+        </p:spPr>
+        <p:style>
+          <a:lnRef idx="2">
+            <a:schemeClr val="accent1"/>
+          </a:lnRef>
+          <a:fillRef idx="0">
+            <a:schemeClr val="accent1"/>
+          </a:fillRef>
+          <a:effectRef idx="1">
+            <a:schemeClr val="accent1"/>
+          </a:effectRef>
+          <a:fontRef idx="minor">
+            <a:schemeClr val="tx1"/>
+          </a:fontRef>
+        </p:style>
+      </p:cxnSp>
+      <p:sp>
+        <p:nvSpPr>
+          <p:cNvPr id="70" name="TextBox 69"/>
+          <p:cNvSpPr txBox="1"/>
+          <p:nvPr/>
+        </p:nvSpPr>
+        <p:spPr>
+          <a:xfrm>
+            <a:off x="1371600" y="6464300"/>
+            <a:ext cx="11049000" cy="139700"/>
+          </a:xfrm>
+          <a:prstGeom prst="rect">
+            <a:avLst/>
+          </a:prstGeom>
+          <a:noFill/>
+        </p:spPr>
+        <p:txBody>
+          <a:bodyPr wrap="square" anchor="t" lIns="25400" rIns="25400" tIns="12700" bIns="12700">
+            <a:spAutoFit/>
+          </a:bodyPr>
+          <a:lstStyle/>
+          <a:p>
+            <a:pPr algn="l">
+              <a:spcAft>
+                <a:spcPts val="0"/>
+              </a:spcAft>
+            </a:pPr>
+            <a:r>
+              <a:rPr sz="625" b="0">
+                <a:solidFill>
+                  <a:srgbClr val="8597A4"/>
+                </a:solidFill>
+                <a:latin typeface="Inter"/>
+              </a:rPr>
+              <a:t>Shapes:  rounded = task   ·   diamond = decision   ·   pill = start / end.    DRAFT = AI artifact the clinician reviews &amp; signs.</a:t>
+            </a:r>
+          </a:p>
+        </p:txBody>
+      </p:sp>
+      <p:sp>
+        <p:nvSpPr>
+          <p:cNvPr id="71" name="TextBox 70"/>
+          <p:cNvSpPr txBox="1"/>
+          <p:nvPr/>
+        </p:nvSpPr>
+        <p:spPr>
+          <a:xfrm>
+            <a:off x="571500" y="6654800"/>
+            <a:ext cx="5715000" cy="139700"/>
+          </a:xfrm>
+          <a:prstGeom prst="rect">
+            <a:avLst/>
+          </a:prstGeom>
+          <a:noFill/>
+        </p:spPr>
+        <p:txBody>
+          <a:bodyPr wrap="square" anchor="t" lIns="25400" rIns="25400" tIns="12700" bIns="12700">
+            <a:spAutoFit/>
+          </a:bodyPr>
+          <a:lstStyle/>
+          <a:p>
+            <a:pPr algn="l">
+              <a:spcAft>
+                <a:spcPts val="0"/>
+              </a:spcAft>
+            </a:pPr>
+            <a:r>
+              <a:rPr sz="600" b="0">
+                <a:solidFill>
+                  <a:srgbClr val="8597A4"/>
+                </a:solidFill>
+                <a:latin typeface="Inter"/>
+              </a:rPr>
+              <a:t>Sona — Care Journey &amp; Product Overview</a:t>
+            </a:r>
+          </a:p>
+        </p:txBody>
+      </p:sp>
+      <p:sp>
+        <p:nvSpPr>
+          <p:cNvPr id="72" name="TextBox 71"/>
+          <p:cNvSpPr txBox="1"/>
+          <p:nvPr/>
+        </p:nvSpPr>
+        <p:spPr>
+          <a:xfrm>
+            <a:off x="10414000" y="6654800"/>
+            <a:ext cx="1206500" cy="139700"/>
+          </a:xfrm>
+          <a:prstGeom prst="rect">
+            <a:avLst/>
+          </a:prstGeom>
+          <a:noFill/>
+        </p:spPr>
+        <p:txBody>
+          <a:bodyPr wrap="square" anchor="t" lIns="25400" rIns="25400" tIns="12700" bIns="12700">
+            <a:spAutoFit/>
+          </a:bodyPr>
+          <a:lstStyle/>
+          <a:p>
+            <a:pPr algn="r">
+              <a:spcAft>
+                <a:spcPts val="0"/>
+              </a:spcAft>
+            </a:pPr>
+            <a:r>
+              <a:rPr sz="600" b="0">
+                <a:solidFill>
+                  <a:srgbClr val="8597A4"/>
+                </a:solidFill>
+                <a:latin typeface="Inter"/>
+              </a:rPr>
+              <a:t>4 / 4</a:t>
             </a:r>
           </a:p>
         </p:txBody>

--- a/docs/design/Sona_Care_Journey_Deck.pptx
+++ b/docs/design/Sona_Care_Journey_Deck.pptx
@@ -3152,7 +3152,7 @@
           <a:noFill/>
         </p:spPr>
         <p:txBody>
-          <a:bodyPr wrap="square" anchor="t" lIns="25400" rIns="25400" tIns="12700" bIns="12700">
+          <a:bodyPr wrap="square" anchor="t" lIns="25400" rIns="25400" tIns="25400" bIns="25400">
             <a:spAutoFit/>
           </a:bodyPr>
           <a:lstStyle/>
@@ -3191,7 +3191,7 @@
           <a:noFill/>
         </p:spPr>
         <p:txBody>
-          <a:bodyPr wrap="square" anchor="t" lIns="25400" rIns="25400" tIns="12700" bIns="12700">
+          <a:bodyPr wrap="square" anchor="t" lIns="25400" rIns="25400" tIns="25400" bIns="25400">
             <a:spAutoFit/>
           </a:bodyPr>
           <a:lstStyle/>
@@ -3230,7 +3230,7 @@
           <a:noFill/>
         </p:spPr>
         <p:txBody>
-          <a:bodyPr wrap="square" anchor="t" lIns="25400" rIns="25400" tIns="12700" bIns="12700">
+          <a:bodyPr wrap="square" anchor="t" lIns="25400" rIns="25400" tIns="25400" bIns="25400">
             <a:spAutoFit/>
           </a:bodyPr>
           <a:lstStyle/>
@@ -3315,7 +3315,7 @@
           <a:noFill/>
         </p:spPr>
         <p:txBody>
-          <a:bodyPr wrap="square" anchor="t" lIns="25400" rIns="25400" tIns="12700" bIns="12700">
+          <a:bodyPr wrap="square" anchor="t" lIns="25400" rIns="25400" tIns="25400" bIns="25400">
             <a:spAutoFit/>
           </a:bodyPr>
           <a:lstStyle/>
@@ -3354,7 +3354,7 @@
           <a:noFill/>
         </p:spPr>
         <p:txBody>
-          <a:bodyPr wrap="square" anchor="t" lIns="25400" rIns="25400" tIns="12700" bIns="12700">
+          <a:bodyPr wrap="square" anchor="t" lIns="25400" rIns="25400" tIns="25400" bIns="25400">
             <a:spAutoFit/>
           </a:bodyPr>
           <a:lstStyle/>
@@ -3475,7 +3475,7 @@
           <a:noFill/>
         </p:spPr>
         <p:txBody>
-          <a:bodyPr wrap="square" anchor="t" lIns="25400" rIns="25400" tIns="12700" bIns="12700">
+          <a:bodyPr wrap="square" anchor="t" lIns="25400" rIns="25400" tIns="25400" bIns="25400">
             <a:spAutoFit/>
           </a:bodyPr>
           <a:lstStyle/>
@@ -3492,7 +3492,7 @@
                 </a:solidFill>
                 <a:latin typeface="Inter"/>
               </a:rPr>
-              <a:t>HOW TO READ THIS BOARD</a:t>
+              <a:t>HOW TO READ THIS</a:t>
             </a:r>
           </a:p>
         </p:txBody>
@@ -3505,8 +3505,8 @@
         </p:nvSpPr>
         <p:spPr>
           <a:xfrm>
-            <a:off x="6388100" y="2286000"/>
-            <a:ext cx="5080000" cy="2921000"/>
+            <a:off x="6388100" y="2298700"/>
+            <a:ext cx="5080000" cy="177800"/>
           </a:xfrm>
           <a:prstGeom prst="rect">
             <a:avLst/>
@@ -3514,7 +3514,7 @@
           <a:noFill/>
         </p:spPr>
         <p:txBody>
-          <a:bodyPr wrap="square" anchor="t" lIns="25400" rIns="25400" tIns="12700" bIns="12700">
+          <a:bodyPr wrap="square" anchor="t" lIns="25400" rIns="25400" tIns="25400" bIns="25400">
             <a:spAutoFit/>
           </a:bodyPr>
           <a:lstStyle/>
@@ -3527,71 +3527,244 @@
             <a:r>
               <a:rPr sz="900" b="0">
                 <a:solidFill>
-                  <a:srgbClr val="142433"/>
+                  <a:srgbClr val="4A5B6B"/>
                 </a:solidFill>
                 <a:latin typeface="Inter"/>
               </a:rPr>
-              <a:t>•  Three views follow — the Executive view (the journey and the value), the Product view (the proposed solution), and the Process-flow view (the To-Be swimlane).</a:t>
-            </a:r>
-          </a:p>
+              <a:t>Three views, read left → right:</a:t>
+            </a:r>
+          </a:p>
+        </p:txBody>
+      </p:sp>
+      <p:sp>
+        <p:nvSpPr>
+          <p:cNvPr id="12" name="TextBox 11"/>
+          <p:cNvSpPr txBox="1"/>
+          <p:nvPr/>
+        </p:nvSpPr>
+        <p:spPr>
+          <a:xfrm>
+            <a:off x="6388100" y="2578100"/>
+            <a:ext cx="5207000" cy="177800"/>
+          </a:xfrm>
+          <a:prstGeom prst="rect">
+            <a:avLst/>
+          </a:prstGeom>
+          <a:noFill/>
+        </p:spPr>
+        <p:txBody>
+          <a:bodyPr wrap="square">
+            <a:spAutoFit/>
+          </a:bodyPr>
+          <a:lstStyle/>
+          <a:p>
+            <a:pPr algn="l"/>
+            <a:r>
+              <a:rPr sz="900" b="1">
+                <a:solidFill>
+                  <a:srgbClr val="2D6A6E"/>
+                </a:solidFill>
+                <a:latin typeface="Inter"/>
+              </a:rPr>
+              <a:t>Executive</a:t>
+            </a:r>
+            <a:r>
+              <a:rPr sz="900" b="0">
+                <a:solidFill>
+                  <a:srgbClr val="142433"/>
+                </a:solidFill>
+                <a:latin typeface="Inter"/>
+              </a:rPr>
+              <a:t>  —  the journey &amp; the value</a:t>
+            </a:r>
+          </a:p>
+        </p:txBody>
+      </p:sp>
+      <p:sp>
+        <p:nvSpPr>
+          <p:cNvPr id="13" name="TextBox 12"/>
+          <p:cNvSpPr txBox="1"/>
+          <p:nvPr/>
+        </p:nvSpPr>
+        <p:spPr>
+          <a:xfrm>
+            <a:off x="6388100" y="2832100"/>
+            <a:ext cx="5207000" cy="177800"/>
+          </a:xfrm>
+          <a:prstGeom prst="rect">
+            <a:avLst/>
+          </a:prstGeom>
+          <a:noFill/>
+        </p:spPr>
+        <p:txBody>
+          <a:bodyPr wrap="square">
+            <a:spAutoFit/>
+          </a:bodyPr>
+          <a:lstStyle/>
+          <a:p>
+            <a:pPr algn="l"/>
+            <a:r>
+              <a:rPr sz="900" b="1">
+                <a:solidFill>
+                  <a:srgbClr val="2D6A6E"/>
+                </a:solidFill>
+                <a:latin typeface="Inter"/>
+              </a:rPr>
+              <a:t>Product</a:t>
+            </a:r>
+            <a:r>
+              <a:rPr sz="900" b="0">
+                <a:solidFill>
+                  <a:srgbClr val="142433"/>
+                </a:solidFill>
+                <a:latin typeface="Inter"/>
+              </a:rPr>
+              <a:t>  —  the proposed solution</a:t>
+            </a:r>
+          </a:p>
+        </p:txBody>
+      </p:sp>
+      <p:sp>
+        <p:nvSpPr>
+          <p:cNvPr id="14" name="TextBox 13"/>
+          <p:cNvSpPr txBox="1"/>
+          <p:nvPr/>
+        </p:nvSpPr>
+        <p:spPr>
+          <a:xfrm>
+            <a:off x="6388100" y="3086100"/>
+            <a:ext cx="5207000" cy="177800"/>
+          </a:xfrm>
+          <a:prstGeom prst="rect">
+            <a:avLst/>
+          </a:prstGeom>
+          <a:noFill/>
+        </p:spPr>
+        <p:txBody>
+          <a:bodyPr wrap="square">
+            <a:spAutoFit/>
+          </a:bodyPr>
+          <a:lstStyle/>
+          <a:p>
+            <a:pPr algn="l"/>
+            <a:r>
+              <a:rPr sz="900" b="1">
+                <a:solidFill>
+                  <a:srgbClr val="2D6A6E"/>
+                </a:solidFill>
+                <a:latin typeface="Inter"/>
+              </a:rPr>
+              <a:t>Process flow</a:t>
+            </a:r>
+            <a:r>
+              <a:rPr sz="900" b="0">
+                <a:solidFill>
+                  <a:srgbClr val="142433"/>
+                </a:solidFill>
+                <a:latin typeface="Inter"/>
+              </a:rPr>
+              <a:t>  —  the To-Be swimlane</a:t>
+            </a:r>
+          </a:p>
+        </p:txBody>
+      </p:sp>
+      <p:sp>
+        <p:nvSpPr>
+          <p:cNvPr id="15" name="TextBox 14"/>
+          <p:cNvSpPr txBox="1"/>
+          <p:nvPr/>
+        </p:nvSpPr>
+        <p:spPr>
+          <a:xfrm>
+            <a:off x="6388100" y="3530600"/>
+            <a:ext cx="5080000" cy="165100"/>
+          </a:xfrm>
+          <a:prstGeom prst="rect">
+            <a:avLst/>
+          </a:prstGeom>
+          <a:noFill/>
+        </p:spPr>
+        <p:txBody>
+          <a:bodyPr wrap="square" anchor="t" lIns="25400" rIns="25400" tIns="25400" bIns="25400">
+            <a:spAutoFit/>
+          </a:bodyPr>
+          <a:lstStyle/>
           <a:p>
             <a:pPr algn="l">
-              <a:spcBef>
-                <a:spcPts val="500"/>
-              </a:spcBef>
               <a:spcAft>
                 <a:spcPts val="0"/>
               </a:spcAft>
             </a:pPr>
             <a:r>
-              <a:rPr sz="900" b="0">
-                <a:solidFill>
-                  <a:srgbClr val="142433"/>
+              <a:rPr sz="750" b="1">
+                <a:solidFill>
+                  <a:srgbClr val="2D6A6E"/>
                 </a:solidFill>
                 <a:latin typeface="Inter"/>
               </a:rPr>
-              <a:t>•  Read each view left → right: the client's journey across the first ~30 days of a new case.</a:t>
-            </a:r>
-          </a:p>
+              <a:t>WHO'S WHO</a:t>
+            </a:r>
+          </a:p>
+        </p:txBody>
+      </p:sp>
+      <p:sp>
+        <p:nvSpPr>
+          <p:cNvPr id="16" name="TextBox 15"/>
+          <p:cNvSpPr txBox="1"/>
+          <p:nvPr/>
+        </p:nvSpPr>
+        <p:spPr>
+          <a:xfrm>
+            <a:off x="6388100" y="3733799"/>
+            <a:ext cx="5143500" cy="381000"/>
+          </a:xfrm>
+          <a:prstGeom prst="rect">
+            <a:avLst/>
+          </a:prstGeom>
+          <a:noFill/>
+        </p:spPr>
+        <p:txBody>
+          <a:bodyPr wrap="square" anchor="t" lIns="25400" rIns="25400" tIns="25400" bIns="25400">
+            <a:spAutoFit/>
+          </a:bodyPr>
+          <a:lstStyle/>
           <a:p>
             <a:pPr algn="l">
-              <a:spcBef>
-                <a:spcPts val="500"/>
-              </a:spcBef>
               <a:spcAft>
                 <a:spcPts val="0"/>
               </a:spcAft>
             </a:pPr>
             <a:r>
-              <a:rPr sz="900" b="0">
-                <a:solidFill>
-                  <a:srgbClr val="142433"/>
+              <a:rPr sz="800" b="0">
+                <a:solidFill>
+                  <a:srgbClr val="4A5B6B"/>
                 </a:solidFill>
                 <a:latin typeface="Inter"/>
               </a:rPr>
-              <a:t>•  Who's who —  client / parent / carer: the family or adult client;  clinician / SLT: the therapist;  practice: the private clinic.</a:t>
-            </a:r>
-          </a:p>
-        </p:txBody>
-      </p:sp>
-      <p:sp>
-        <p:nvSpPr>
-          <p:cNvPr id="12" name="Rounded Rectangle 11"/>
+              <a:t>client / parent / carer — the family or adult client
+clinician / SLT — the therapist    ·    practice — the private clinic</a:t>
+            </a:r>
+          </a:p>
+        </p:txBody>
+      </p:sp>
+      <p:sp>
+        <p:nvSpPr>
+          <p:cNvPr id="17" name="Rounded Rectangle 16"/>
           <p:cNvSpPr/>
           <p:nvPr/>
         </p:nvSpPr>
         <p:spPr>
           <a:xfrm>
             <a:off x="571500" y="5664200"/>
-            <a:ext cx="11049000" cy="812800"/>
+            <a:ext cx="11049000" cy="762000"/>
           </a:xfrm>
           <a:prstGeom prst="roundRect">
             <a:avLst>
-              <a:gd name="adj" fmla="val 12500"/>
+              <a:gd name="adj" fmla="val 13333"/>
             </a:avLst>
           </a:prstGeom>
           <a:solidFill>
-            <a:srgbClr val="1E4A4D"/>
+            <a:srgbClr val="EAF1F0"/>
           </a:solidFill>
           <a:ln>
             <a:noFill/>
@@ -3622,13 +3795,13 @@
       </p:sp>
       <p:sp>
         <p:nvSpPr>
-          <p:cNvPr id="13" name="TextBox 12"/>
+          <p:cNvPr id="18" name="TextBox 17"/>
           <p:cNvSpPr txBox="1"/>
           <p:nvPr/>
         </p:nvSpPr>
         <p:spPr>
           <a:xfrm>
-            <a:off x="774700" y="5816600"/>
+            <a:off x="774700" y="5803900"/>
             <a:ext cx="3810000" cy="152400"/>
           </a:xfrm>
           <a:prstGeom prst="rect">
@@ -3637,7 +3810,7 @@
           <a:noFill/>
         </p:spPr>
         <p:txBody>
-          <a:bodyPr wrap="square" anchor="t" lIns="25400" rIns="25400" tIns="12700" bIns="12700">
+          <a:bodyPr wrap="square" anchor="t" lIns="25400" rIns="25400" tIns="25400" bIns="25400">
             <a:spAutoFit/>
           </a:bodyPr>
           <a:lstStyle/>
@@ -3650,7 +3823,7 @@
             <a:r>
               <a:rPr sz="700" b="1">
                 <a:solidFill>
-                  <a:srgbClr val="A9C7C7"/>
+                  <a:srgbClr val="2D6A6E"/>
                 </a:solidFill>
                 <a:latin typeface="Inter"/>
               </a:rPr>
@@ -3661,13 +3834,13 @@
       </p:sp>
       <p:sp>
         <p:nvSpPr>
-          <p:cNvPr id="14" name="TextBox 13"/>
+          <p:cNvPr id="19" name="TextBox 18"/>
           <p:cNvSpPr txBox="1"/>
           <p:nvPr/>
         </p:nvSpPr>
         <p:spPr>
           <a:xfrm>
-            <a:off x="774700" y="6083300"/>
+            <a:off x="774700" y="6032500"/>
             <a:ext cx="2667000" cy="177800"/>
           </a:xfrm>
           <a:prstGeom prst="rect">
@@ -3676,7 +3849,7 @@
           <a:noFill/>
         </p:spPr>
         <p:txBody>
-          <a:bodyPr wrap="square" anchor="t" lIns="25400" rIns="25400" tIns="12700" bIns="12700">
+          <a:bodyPr wrap="square" anchor="t" lIns="25400" rIns="25400" tIns="25400" bIns="25400">
             <a:spAutoFit/>
           </a:bodyPr>
           <a:lstStyle/>
@@ -3689,24 +3862,24 @@
             <a:r>
               <a:rPr sz="750" b="0">
                 <a:solidFill>
-                  <a:srgbClr val="FFFFFF"/>
+                  <a:srgbClr val="1E4A4D"/>
                 </a:solidFill>
                 <a:latin typeface="Inter"/>
               </a:rPr>
-              <a:t>(1)   AI drafts, clinician decides</a:t>
-            </a:r>
-          </a:p>
-        </p:txBody>
-      </p:sp>
-      <p:sp>
-        <p:nvSpPr>
-          <p:cNvPr id="15" name="TextBox 14"/>
+              <a:t>AI drafts, clinician decides</a:t>
+            </a:r>
+          </a:p>
+        </p:txBody>
+      </p:sp>
+      <p:sp>
+        <p:nvSpPr>
+          <p:cNvPr id="20" name="TextBox 19"/>
           <p:cNvSpPr txBox="1"/>
           <p:nvPr/>
         </p:nvSpPr>
         <p:spPr>
           <a:xfrm>
-            <a:off x="3530600" y="6083300"/>
+            <a:off x="3530600" y="6032500"/>
             <a:ext cx="2667000" cy="177800"/>
           </a:xfrm>
           <a:prstGeom prst="rect">
@@ -3715,7 +3888,7 @@
           <a:noFill/>
         </p:spPr>
         <p:txBody>
-          <a:bodyPr wrap="square" anchor="t" lIns="25400" rIns="25400" tIns="12700" bIns="12700">
+          <a:bodyPr wrap="square" anchor="t" lIns="25400" rIns="25400" tIns="25400" bIns="25400">
             <a:spAutoFit/>
           </a:bodyPr>
           <a:lstStyle/>
@@ -3728,24 +3901,24 @@
             <a:r>
               <a:rPr sz="750" b="0">
                 <a:solidFill>
-                  <a:srgbClr val="FFFFFF"/>
+                  <a:srgbClr val="1E4A4D"/>
                 </a:solidFill>
                 <a:latin typeface="Inter"/>
               </a:rPr>
-              <a:t>(2)   No screen time for children</a:t>
-            </a:r>
-          </a:p>
-        </p:txBody>
-      </p:sp>
-      <p:sp>
-        <p:nvSpPr>
-          <p:cNvPr id="16" name="TextBox 15"/>
+              <a:t>No screen time for children</a:t>
+            </a:r>
+          </a:p>
+        </p:txBody>
+      </p:sp>
+      <p:sp>
+        <p:nvSpPr>
+          <p:cNvPr id="21" name="TextBox 20"/>
           <p:cNvSpPr txBox="1"/>
           <p:nvPr/>
         </p:nvSpPr>
         <p:spPr>
           <a:xfrm>
-            <a:off x="6286500" y="6083300"/>
+            <a:off x="6286500" y="6032500"/>
             <a:ext cx="2667000" cy="177800"/>
           </a:xfrm>
           <a:prstGeom prst="rect">
@@ -3754,7 +3927,7 @@
           <a:noFill/>
         </p:spPr>
         <p:txBody>
-          <a:bodyPr wrap="square" anchor="t" lIns="25400" rIns="25400" tIns="12700" bIns="12700">
+          <a:bodyPr wrap="square" anchor="t" lIns="25400" rIns="25400" tIns="25400" bIns="25400">
             <a:spAutoFit/>
           </a:bodyPr>
           <a:lstStyle/>
@@ -3767,24 +3940,24 @@
             <a:r>
               <a:rPr sz="750" b="0">
                 <a:solidFill>
-                  <a:srgbClr val="FFFFFF"/>
+                  <a:srgbClr val="1E4A4D"/>
                 </a:solidFill>
                 <a:latin typeface="Inter"/>
               </a:rPr>
-              <a:t>(3)   UK data residency + audit by construction</a:t>
-            </a:r>
-          </a:p>
-        </p:txBody>
-      </p:sp>
-      <p:sp>
-        <p:nvSpPr>
-          <p:cNvPr id="17" name="TextBox 16"/>
+              <a:t>UK data residency + audit by construction</a:t>
+            </a:r>
+          </a:p>
+        </p:txBody>
+      </p:sp>
+      <p:sp>
+        <p:nvSpPr>
+          <p:cNvPr id="22" name="TextBox 21"/>
           <p:cNvSpPr txBox="1"/>
           <p:nvPr/>
         </p:nvSpPr>
         <p:spPr>
           <a:xfrm>
-            <a:off x="8953500" y="6083300"/>
+            <a:off x="8953500" y="6032500"/>
             <a:ext cx="2667000" cy="177800"/>
           </a:xfrm>
           <a:prstGeom prst="rect">
@@ -3793,7 +3966,7 @@
           <a:noFill/>
         </p:spPr>
         <p:txBody>
-          <a:bodyPr wrap="square" anchor="t" lIns="25400" rIns="25400" tIns="12700" bIns="12700">
+          <a:bodyPr wrap="square" anchor="t" lIns="25400" rIns="25400" tIns="25400" bIns="25400">
             <a:spAutoFit/>
           </a:bodyPr>
           <a:lstStyle/>
@@ -3806,18 +3979,150 @@
             <a:r>
               <a:rPr sz="750" b="0">
                 <a:solidFill>
-                  <a:srgbClr val="FFFFFF"/>
+                  <a:srgbClr val="1E4A4D"/>
                 </a:solidFill>
                 <a:latin typeface="Inter"/>
               </a:rPr>
-              <a:t>(4)   Augment people, never replace them</a:t>
-            </a:r>
-          </a:p>
-        </p:txBody>
-      </p:sp>
-      <p:sp>
-        <p:nvSpPr>
-          <p:cNvPr id="18" name="TextBox 17"/>
+              <a:t>Augment people, never replace them</a:t>
+            </a:r>
+          </a:p>
+        </p:txBody>
+      </p:sp>
+      <p:sp>
+        <p:nvSpPr>
+          <p:cNvPr id="23" name="Rectangle 22"/>
+          <p:cNvSpPr/>
+          <p:nvPr/>
+        </p:nvSpPr>
+        <p:spPr>
+          <a:xfrm>
+            <a:off x="3429000" y="6007100"/>
+            <a:ext cx="6350" cy="279400"/>
+          </a:xfrm>
+          <a:prstGeom prst="rect">
+            <a:avLst/>
+          </a:prstGeom>
+          <a:solidFill>
+            <a:srgbClr val="E5E7EB"/>
+          </a:solidFill>
+          <a:ln>
+            <a:noFill/>
+          </a:ln>
+          <a:effectLst/>
+        </p:spPr>
+        <p:style>
+          <a:lnRef idx="1">
+            <a:schemeClr val="accent1"/>
+          </a:lnRef>
+          <a:fillRef idx="3">
+            <a:schemeClr val="accent1"/>
+          </a:fillRef>
+          <a:effectRef idx="2">
+            <a:schemeClr val="accent1"/>
+          </a:effectRef>
+          <a:fontRef idx="minor">
+            <a:schemeClr val="lt1"/>
+          </a:fontRef>
+        </p:style>
+        <p:txBody>
+          <a:bodyPr rtlCol="0" anchor="ctr"/>
+          <a:lstStyle/>
+          <a:p>
+            <a:pPr algn="ctr"/>
+          </a:p>
+        </p:txBody>
+      </p:sp>
+      <p:sp>
+        <p:nvSpPr>
+          <p:cNvPr id="24" name="Rectangle 23"/>
+          <p:cNvSpPr/>
+          <p:nvPr/>
+        </p:nvSpPr>
+        <p:spPr>
+          <a:xfrm>
+            <a:off x="6184900" y="6007100"/>
+            <a:ext cx="6350" cy="279400"/>
+          </a:xfrm>
+          <a:prstGeom prst="rect">
+            <a:avLst/>
+          </a:prstGeom>
+          <a:solidFill>
+            <a:srgbClr val="E5E7EB"/>
+          </a:solidFill>
+          <a:ln>
+            <a:noFill/>
+          </a:ln>
+          <a:effectLst/>
+        </p:spPr>
+        <p:style>
+          <a:lnRef idx="1">
+            <a:schemeClr val="accent1"/>
+          </a:lnRef>
+          <a:fillRef idx="3">
+            <a:schemeClr val="accent1"/>
+          </a:fillRef>
+          <a:effectRef idx="2">
+            <a:schemeClr val="accent1"/>
+          </a:effectRef>
+          <a:fontRef idx="minor">
+            <a:schemeClr val="lt1"/>
+          </a:fontRef>
+        </p:style>
+        <p:txBody>
+          <a:bodyPr rtlCol="0" anchor="ctr"/>
+          <a:lstStyle/>
+          <a:p>
+            <a:pPr algn="ctr"/>
+          </a:p>
+        </p:txBody>
+      </p:sp>
+      <p:sp>
+        <p:nvSpPr>
+          <p:cNvPr id="25" name="Rectangle 24"/>
+          <p:cNvSpPr/>
+          <p:nvPr/>
+        </p:nvSpPr>
+        <p:spPr>
+          <a:xfrm>
+            <a:off x="8851900" y="6007100"/>
+            <a:ext cx="6350" cy="279400"/>
+          </a:xfrm>
+          <a:prstGeom prst="rect">
+            <a:avLst/>
+          </a:prstGeom>
+          <a:solidFill>
+            <a:srgbClr val="E5E7EB"/>
+          </a:solidFill>
+          <a:ln>
+            <a:noFill/>
+          </a:ln>
+          <a:effectLst/>
+        </p:spPr>
+        <p:style>
+          <a:lnRef idx="1">
+            <a:schemeClr val="accent1"/>
+          </a:lnRef>
+          <a:fillRef idx="3">
+            <a:schemeClr val="accent1"/>
+          </a:fillRef>
+          <a:effectRef idx="2">
+            <a:schemeClr val="accent1"/>
+          </a:effectRef>
+          <a:fontRef idx="minor">
+            <a:schemeClr val="lt1"/>
+          </a:fontRef>
+        </p:style>
+        <p:txBody>
+          <a:bodyPr rtlCol="0" anchor="ctr"/>
+          <a:lstStyle/>
+          <a:p>
+            <a:pPr algn="ctr"/>
+          </a:p>
+        </p:txBody>
+      </p:sp>
+      <p:sp>
+        <p:nvSpPr>
+          <p:cNvPr id="26" name="TextBox 25"/>
           <p:cNvSpPr txBox="1"/>
           <p:nvPr/>
         </p:nvSpPr>
@@ -3832,7 +4137,7 @@
           <a:noFill/>
         </p:spPr>
         <p:txBody>
-          <a:bodyPr wrap="square" anchor="t" lIns="25400" rIns="25400" tIns="12700" bIns="12700">
+          <a:bodyPr wrap="square" anchor="t" lIns="25400" rIns="25400" tIns="25400" bIns="25400">
             <a:spAutoFit/>
           </a:bodyPr>
           <a:lstStyle/>
@@ -3856,7 +4161,7 @@
       </p:sp>
       <p:sp>
         <p:nvSpPr>
-          <p:cNvPr id="19" name="TextBox 18"/>
+          <p:cNvPr id="27" name="TextBox 26"/>
           <p:cNvSpPr txBox="1"/>
           <p:nvPr/>
         </p:nvSpPr>
@@ -3871,7 +4176,7 @@
           <a:noFill/>
         </p:spPr>
         <p:txBody>
-          <a:bodyPr wrap="square" anchor="t" lIns="25400" rIns="25400" tIns="12700" bIns="12700">
+          <a:bodyPr wrap="square" anchor="t" lIns="25400" rIns="25400" tIns="25400" bIns="25400">
             <a:spAutoFit/>
           </a:bodyPr>
           <a:lstStyle/>
@@ -3972,7 +4277,7 @@
           <a:noFill/>
         </p:spPr>
         <p:txBody>
-          <a:bodyPr wrap="square" anchor="t" lIns="25400" rIns="25400" tIns="12700" bIns="12700">
+          <a:bodyPr wrap="square" anchor="t" lIns="25400" rIns="25400" tIns="25400" bIns="25400">
             <a:spAutoFit/>
           </a:bodyPr>
           <a:lstStyle/>
@@ -4011,7 +4316,7 @@
           <a:noFill/>
         </p:spPr>
         <p:txBody>
-          <a:bodyPr wrap="square" anchor="t" lIns="25400" rIns="25400" tIns="12700" bIns="12700">
+          <a:bodyPr wrap="square" anchor="t" lIns="25400" rIns="25400" tIns="25400" bIns="25400">
             <a:spAutoFit/>
           </a:bodyPr>
           <a:lstStyle/>
@@ -4050,7 +4355,7 @@
           <a:noFill/>
         </p:spPr>
         <p:txBody>
-          <a:bodyPr wrap="square" anchor="t" lIns="25400" rIns="25400" tIns="12700" bIns="12700">
+          <a:bodyPr wrap="square" anchor="t" lIns="25400" rIns="25400" tIns="25400" bIns="25400">
             <a:spAutoFit/>
           </a:bodyPr>
           <a:lstStyle/>
@@ -4181,7 +4486,7 @@
           <a:noFill/>
         </p:spPr>
         <p:txBody>
-          <a:bodyPr wrap="square" anchor="ctr" lIns="25400" rIns="25400" tIns="12700" bIns="12700">
+          <a:bodyPr wrap="square" anchor="ctr" lIns="25400" rIns="25400" tIns="25400" bIns="25400">
             <a:normAutofit/>
           </a:bodyPr>
           <a:lstStyle/>
@@ -4266,7 +4571,7 @@
           <a:noFill/>
         </p:spPr>
         <p:txBody>
-          <a:bodyPr wrap="square" anchor="ctr" lIns="25400" rIns="25400" tIns="12700" bIns="12700">
+          <a:bodyPr wrap="square" anchor="ctr" lIns="25400" rIns="25400" tIns="25400" bIns="25400">
             <a:normAutofit/>
           </a:bodyPr>
           <a:lstStyle/>
@@ -4351,7 +4656,7 @@
           <a:noFill/>
         </p:spPr>
         <p:txBody>
-          <a:bodyPr wrap="square" anchor="ctr" lIns="25400" rIns="25400" tIns="12700" bIns="12700">
+          <a:bodyPr wrap="square" anchor="ctr" lIns="25400" rIns="25400" tIns="25400" bIns="25400">
             <a:normAutofit/>
           </a:bodyPr>
           <a:lstStyle/>
@@ -4436,7 +4741,7 @@
           <a:noFill/>
         </p:spPr>
         <p:txBody>
-          <a:bodyPr wrap="square" anchor="ctr" lIns="25400" rIns="25400" tIns="12700" bIns="12700">
+          <a:bodyPr wrap="square" anchor="ctr" lIns="25400" rIns="25400" tIns="25400" bIns="25400">
             <a:normAutofit/>
           </a:bodyPr>
           <a:lstStyle/>
@@ -4521,7 +4826,7 @@
           <a:noFill/>
         </p:spPr>
         <p:txBody>
-          <a:bodyPr wrap="square" anchor="ctr" lIns="25400" rIns="25400" tIns="12700" bIns="12700">
+          <a:bodyPr wrap="square" anchor="ctr" lIns="25400" rIns="25400" tIns="25400" bIns="25400">
             <a:normAutofit/>
           </a:bodyPr>
           <a:lstStyle/>
@@ -4560,7 +4865,7 @@
           <a:noFill/>
         </p:spPr>
         <p:txBody>
-          <a:bodyPr wrap="square" anchor="t" lIns="25400" rIns="25400" tIns="12700" bIns="12700">
+          <a:bodyPr wrap="square" anchor="t" lIns="25400" rIns="25400" tIns="25400" bIns="25400">
             <a:spAutoFit/>
           </a:bodyPr>
           <a:lstStyle/>
@@ -4582,42 +4887,80 @@
           </a:p>
         </p:txBody>
       </p:sp>
-      <p:cxnSp>
-        <p:nvCxnSpPr>
-          <p:cNvPr id="18" name="Connector 17"/>
-          <p:cNvCxnSpPr/>
-          <p:nvPr/>
-        </p:nvCxnSpPr>
-        <p:spPr>
-          <a:xfrm>
-            <a:off x="1620520" y="3202940"/>
-            <a:ext cx="2237739" cy="91439"/>
-          </a:xfrm>
-          <a:prstGeom prst="line">
-            <a:avLst/>
-          </a:prstGeom>
-          <a:ln w="19050">
-            <a:solidFill>
-              <a:srgbClr val="2D6A6E"/>
-            </a:solidFill>
+      <p:sp>
+        <p:nvSpPr>
+          <p:cNvPr id="18" name="Freeform 17"/>
+          <p:cNvSpPr/>
+          <p:nvPr/>
+        </p:nvSpPr>
+        <p:spPr>
+          <a:xfrm>
+            <a:off x="1620520" y="2631440"/>
+            <a:ext cx="8950959" cy="797560"/>
+          </a:xfrm>
+          <a:custGeom>
+            <a:avLst/>
+            <a:gdLst/>
+            <a:ahLst/>
+            <a:cxnLst/>
+            <a:rect l="l" t="t" r="r" b="b"/>
+            <a:pathLst>
+              <a:path w="8950959" h="797560">
+                <a:moveTo>
+                  <a:pt x="0" y="797560"/>
+                </a:moveTo>
+                <a:lnTo>
+                  <a:pt x="0" y="544830"/>
+                </a:lnTo>
+                <a:lnTo>
+                  <a:pt x="2237739" y="628650"/>
+                </a:lnTo>
+                <a:lnTo>
+                  <a:pt x="4475480" y="321310"/>
+                </a:lnTo>
+                <a:lnTo>
+                  <a:pt x="6713219" y="125729"/>
+                </a:lnTo>
+                <a:lnTo>
+                  <a:pt x="8950959" y="0"/>
+                </a:lnTo>
+                <a:lnTo>
+                  <a:pt x="8950959" y="797560"/>
+                </a:lnTo>
+                <a:close/>
+              </a:path>
+            </a:pathLst>
+          </a:custGeom>
+          <a:solidFill>
+            <a:srgbClr val="D9E7E6"/>
+          </a:solidFill>
+          <a:ln>
+            <a:noFill/>
           </a:ln>
           <a:effectLst/>
         </p:spPr>
         <p:style>
-          <a:lnRef idx="2">
+          <a:lnRef idx="1">
             <a:schemeClr val="accent1"/>
           </a:lnRef>
-          <a:fillRef idx="0">
+          <a:fillRef idx="3">
             <a:schemeClr val="accent1"/>
           </a:fillRef>
-          <a:effectRef idx="1">
+          <a:effectRef idx="2">
             <a:schemeClr val="accent1"/>
           </a:effectRef>
           <a:fontRef idx="minor">
-            <a:schemeClr val="tx1"/>
+            <a:schemeClr val="lt1"/>
           </a:fontRef>
         </p:style>
-      </p:cxnSp>
+        <p:txBody>
+          <a:bodyPr rtlCol="0" anchor="ctr"/>
+          <a:lstStyle/>
+          <a:p>
+            <a:pPr algn="ctr"/>
+          </a:p>
+        </p:txBody>
+      </p:sp>
       <p:cxnSp>
         <p:nvCxnSpPr>
           <p:cNvPr id="19" name="Connector 18"/>
@@ -4625,16 +4968,16 @@
           <p:nvPr/>
         </p:nvCxnSpPr>
         <p:spPr>
-          <a:xfrm flipV="1">
-            <a:off x="3858259" y="2959100"/>
-            <a:ext cx="2237741" cy="335279"/>
+          <a:xfrm>
+            <a:off x="571500" y="3429000"/>
+            <a:ext cx="11049000" cy="0"/>
           </a:xfrm>
           <a:prstGeom prst="line">
             <a:avLst/>
           </a:prstGeom>
-          <a:ln w="19050">
+          <a:ln w="9525">
             <a:solidFill>
-              <a:srgbClr val="2D6A6E"/>
+              <a:srgbClr val="E5E7EB"/>
             </a:solidFill>
           </a:ln>
           <a:effectLst/>
@@ -4661,14 +5004,14 @@
           <p:nvPr/>
         </p:nvCxnSpPr>
         <p:spPr>
-          <a:xfrm flipV="1">
-            <a:off x="6096000" y="2745740"/>
-            <a:ext cx="2237739" cy="213360"/>
+          <a:xfrm>
+            <a:off x="1620520" y="3176270"/>
+            <a:ext cx="2237739" cy="83820"/>
           </a:xfrm>
           <a:prstGeom prst="line">
             <a:avLst/>
           </a:prstGeom>
-          <a:ln w="19050">
+          <a:ln w="25400">
             <a:solidFill>
               <a:srgbClr val="2D6A6E"/>
             </a:solidFill>
@@ -4698,13 +5041,13 @@
         </p:nvCxnSpPr>
         <p:spPr>
           <a:xfrm flipV="1">
-            <a:off x="8333739" y="2608580"/>
-            <a:ext cx="2237740" cy="137160"/>
+            <a:off x="3858259" y="2952750"/>
+            <a:ext cx="2237741" cy="307340"/>
           </a:xfrm>
           <a:prstGeom prst="line">
             <a:avLst/>
           </a:prstGeom>
-          <a:ln w="19050">
+          <a:ln w="25400">
             <a:solidFill>
               <a:srgbClr val="2D6A6E"/>
             </a:solidFill>
@@ -4726,16 +5069,88 @@
           </a:fontRef>
         </p:style>
       </p:cxnSp>
-      <p:sp>
-        <p:nvSpPr>
-          <p:cNvPr id="22" name="Oval 21"/>
+      <p:cxnSp>
+        <p:nvCxnSpPr>
+          <p:cNvPr id="22" name="Connector 21"/>
+          <p:cNvCxnSpPr/>
+          <p:nvPr/>
+        </p:nvCxnSpPr>
+        <p:spPr>
+          <a:xfrm flipV="1">
+            <a:off x="6096000" y="2757169"/>
+            <a:ext cx="2237739" cy="195581"/>
+          </a:xfrm>
+          <a:prstGeom prst="line">
+            <a:avLst/>
+          </a:prstGeom>
+          <a:ln w="25400">
+            <a:solidFill>
+              <a:srgbClr val="2D6A6E"/>
+            </a:solidFill>
+          </a:ln>
+          <a:effectLst/>
+        </p:spPr>
+        <p:style>
+          <a:lnRef idx="2">
+            <a:schemeClr val="accent1"/>
+          </a:lnRef>
+          <a:fillRef idx="0">
+            <a:schemeClr val="accent1"/>
+          </a:fillRef>
+          <a:effectRef idx="1">
+            <a:schemeClr val="accent1"/>
+          </a:effectRef>
+          <a:fontRef idx="minor">
+            <a:schemeClr val="tx1"/>
+          </a:fontRef>
+        </p:style>
+      </p:cxnSp>
+      <p:cxnSp>
+        <p:nvCxnSpPr>
+          <p:cNvPr id="23" name="Connector 22"/>
+          <p:cNvCxnSpPr/>
+          <p:nvPr/>
+        </p:nvCxnSpPr>
+        <p:spPr>
+          <a:xfrm flipV="1">
+            <a:off x="8333739" y="2631440"/>
+            <a:ext cx="2237740" cy="125729"/>
+          </a:xfrm>
+          <a:prstGeom prst="line">
+            <a:avLst/>
+          </a:prstGeom>
+          <a:ln w="25400">
+            <a:solidFill>
+              <a:srgbClr val="2D6A6E"/>
+            </a:solidFill>
+          </a:ln>
+          <a:effectLst/>
+        </p:spPr>
+        <p:style>
+          <a:lnRef idx="2">
+            <a:schemeClr val="accent1"/>
+          </a:lnRef>
+          <a:fillRef idx="0">
+            <a:schemeClr val="accent1"/>
+          </a:fillRef>
+          <a:effectRef idx="1">
+            <a:schemeClr val="accent1"/>
+          </a:effectRef>
+          <a:fontRef idx="minor">
+            <a:schemeClr val="tx1"/>
+          </a:fontRef>
+        </p:style>
+      </p:cxnSp>
+      <p:sp>
+        <p:nvSpPr>
+          <p:cNvPr id="24" name="Oval 23"/>
           <p:cNvSpPr/>
           <p:nvPr/>
         </p:nvSpPr>
         <p:spPr>
           <a:xfrm>
-            <a:off x="1569720" y="3152139"/>
-            <a:ext cx="101600" cy="101600"/>
+            <a:off x="1557020" y="3112770"/>
+            <a:ext cx="127000" cy="127000"/>
           </a:xfrm>
           <a:prstGeom prst="ellipse">
             <a:avLst/>
@@ -4745,7 +5160,7 @@
           </a:solidFill>
           <a:ln w="19050">
             <a:solidFill>
-              <a:srgbClr val="FAFAF7"/>
+              <a:srgbClr val="FFFFFF"/>
             </a:solidFill>
           </a:ln>
           <a:effectLst/>
@@ -4774,14 +5189,14 @@
       </p:sp>
       <p:sp>
         <p:nvSpPr>
-          <p:cNvPr id="23" name="TextBox 22"/>
+          <p:cNvPr id="25" name="TextBox 24"/>
           <p:cNvSpPr txBox="1"/>
           <p:nvPr/>
         </p:nvSpPr>
         <p:spPr>
           <a:xfrm>
-            <a:off x="571500" y="3479800"/>
-            <a:ext cx="2098040" cy="165100"/>
+            <a:off x="571500" y="3530600"/>
+            <a:ext cx="2098040" cy="152400"/>
           </a:xfrm>
           <a:prstGeom prst="rect">
             <a:avLst/>
@@ -4789,7 +5204,7 @@
           <a:noFill/>
         </p:spPr>
         <p:txBody>
-          <a:bodyPr wrap="square" anchor="ctr" lIns="25400" rIns="25400" tIns="12700" bIns="12700">
+          <a:bodyPr wrap="square" anchor="ctr" lIns="25400" rIns="25400" tIns="25400" bIns="25400">
             <a:spAutoFit/>
           </a:bodyPr>
           <a:lstStyle/>
@@ -4800,7 +5215,7 @@
               </a:spcAft>
             </a:pPr>
             <a:r>
-              <a:rPr sz="800" b="1">
+              <a:rPr sz="850" b="1">
                 <a:solidFill>
                   <a:srgbClr val="2D6A6E"/>
                 </a:solidFill>
@@ -4813,14 +5228,53 @@
       </p:sp>
       <p:sp>
         <p:nvSpPr>
-          <p:cNvPr id="24" name="Oval 23"/>
+          <p:cNvPr id="26" name="TextBox 25"/>
+          <p:cNvSpPr txBox="1"/>
+          <p:nvPr/>
+        </p:nvSpPr>
+        <p:spPr>
+          <a:xfrm>
+            <a:off x="571500" y="3695700"/>
+            <a:ext cx="2098040" cy="139700"/>
+          </a:xfrm>
+          <a:prstGeom prst="rect">
+            <a:avLst/>
+          </a:prstGeom>
+          <a:noFill/>
+        </p:spPr>
+        <p:txBody>
+          <a:bodyPr wrap="square" anchor="ctr" lIns="25400" rIns="25400" tIns="25400" bIns="25400">
+            <a:spAutoFit/>
+          </a:bodyPr>
+          <a:lstStyle/>
+          <a:p>
+            <a:pPr algn="ctr">
+              <a:spcAft>
+                <a:spcPts val="0"/>
+              </a:spcAft>
+            </a:pPr>
+            <a:r>
+              <a:rPr sz="675" b="0">
+                <a:solidFill>
+                  <a:srgbClr val="4A5B6B"/>
+                </a:solidFill>
+                <a:latin typeface="Inter"/>
+              </a:rPr>
+              <a:t>unsure where to start</a:t>
+            </a:r>
+          </a:p>
+        </p:txBody>
+      </p:sp>
+      <p:sp>
+        <p:nvSpPr>
+          <p:cNvPr id="27" name="Oval 26"/>
           <p:cNvSpPr/>
           <p:nvPr/>
         </p:nvSpPr>
         <p:spPr>
           <a:xfrm>
-            <a:off x="3807459" y="3243580"/>
-            <a:ext cx="101600" cy="101600"/>
+            <a:off x="3794759" y="3196590"/>
+            <a:ext cx="127000" cy="127000"/>
           </a:xfrm>
           <a:prstGeom prst="ellipse">
             <a:avLst/>
@@ -4830,7 +5284,7 @@
           </a:solidFill>
           <a:ln w="19050">
             <a:solidFill>
-              <a:srgbClr val="FAFAF7"/>
+              <a:srgbClr val="FFFFFF"/>
             </a:solidFill>
           </a:ln>
           <a:effectLst/>
@@ -4859,14 +5313,14 @@
       </p:sp>
       <p:sp>
         <p:nvSpPr>
-          <p:cNvPr id="25" name="TextBox 24"/>
+          <p:cNvPr id="28" name="TextBox 27"/>
           <p:cNvSpPr txBox="1"/>
           <p:nvPr/>
         </p:nvSpPr>
         <p:spPr>
           <a:xfrm>
-            <a:off x="2809239" y="3479800"/>
-            <a:ext cx="2098040" cy="165100"/>
+            <a:off x="2809239" y="3530600"/>
+            <a:ext cx="2098040" cy="152400"/>
           </a:xfrm>
           <a:prstGeom prst="rect">
             <a:avLst/>
@@ -4874,7 +5328,7 @@
           <a:noFill/>
         </p:spPr>
         <p:txBody>
-          <a:bodyPr wrap="square" anchor="ctr" lIns="25400" rIns="25400" tIns="12700" bIns="12700">
+          <a:bodyPr wrap="square" anchor="ctr" lIns="25400" rIns="25400" tIns="25400" bIns="25400">
             <a:spAutoFit/>
           </a:bodyPr>
           <a:lstStyle/>
@@ -4885,7 +5339,7 @@
               </a:spcAft>
             </a:pPr>
             <a:r>
-              <a:rPr sz="800" b="1">
+              <a:rPr sz="850" b="1">
                 <a:solidFill>
                   <a:srgbClr val="2D6A6E"/>
                 </a:solidFill>
@@ -4898,14 +5352,53 @@
       </p:sp>
       <p:sp>
         <p:nvSpPr>
-          <p:cNvPr id="26" name="Oval 25"/>
+          <p:cNvPr id="29" name="TextBox 28"/>
+          <p:cNvSpPr txBox="1"/>
+          <p:nvPr/>
+        </p:nvSpPr>
+        <p:spPr>
+          <a:xfrm>
+            <a:off x="2809239" y="3695700"/>
+            <a:ext cx="2098040" cy="139700"/>
+          </a:xfrm>
+          <a:prstGeom prst="rect">
+            <a:avLst/>
+          </a:prstGeom>
+          <a:noFill/>
+        </p:spPr>
+        <p:txBody>
+          <a:bodyPr wrap="square" anchor="ctr" lIns="25400" rIns="25400" tIns="25400" bIns="25400">
+            <a:spAutoFit/>
+          </a:bodyPr>
+          <a:lstStyle/>
+          <a:p>
+            <a:pPr algn="ctr">
+              <a:spcAft>
+                <a:spcPts val="0"/>
+              </a:spcAft>
+            </a:pPr>
+            <a:r>
+              <a:rPr sz="675" b="0">
+                <a:solidFill>
+                  <a:srgbClr val="4A5B6B"/>
+                </a:solidFill>
+                <a:latin typeface="Inter"/>
+              </a:rPr>
+              <a:t>so much to take in</a:t>
+            </a:r>
+          </a:p>
+        </p:txBody>
+      </p:sp>
+      <p:sp>
+        <p:nvSpPr>
+          <p:cNvPr id="30" name="Oval 29"/>
           <p:cNvSpPr/>
           <p:nvPr/>
         </p:nvSpPr>
         <p:spPr>
           <a:xfrm>
-            <a:off x="6045200" y="2908300"/>
-            <a:ext cx="101600" cy="101600"/>
+            <a:off x="6032500" y="2889250"/>
+            <a:ext cx="127000" cy="127000"/>
           </a:xfrm>
           <a:prstGeom prst="ellipse">
             <a:avLst/>
@@ -4915,7 +5408,7 @@
           </a:solidFill>
           <a:ln w="19050">
             <a:solidFill>
-              <a:srgbClr val="FAFAF7"/>
+              <a:srgbClr val="FFFFFF"/>
             </a:solidFill>
           </a:ln>
           <a:effectLst/>
@@ -4944,14 +5437,14 @@
       </p:sp>
       <p:sp>
         <p:nvSpPr>
-          <p:cNvPr id="27" name="TextBox 26"/>
+          <p:cNvPr id="31" name="TextBox 30"/>
           <p:cNvSpPr txBox="1"/>
           <p:nvPr/>
         </p:nvSpPr>
         <p:spPr>
           <a:xfrm>
-            <a:off x="5046979" y="3479800"/>
-            <a:ext cx="2098040" cy="165100"/>
+            <a:off x="5046979" y="3530600"/>
+            <a:ext cx="2098040" cy="152400"/>
           </a:xfrm>
           <a:prstGeom prst="rect">
             <a:avLst/>
@@ -4959,7 +5452,7 @@
           <a:noFill/>
         </p:spPr>
         <p:txBody>
-          <a:bodyPr wrap="square" anchor="ctr" lIns="25400" rIns="25400" tIns="12700" bIns="12700">
+          <a:bodyPr wrap="square" anchor="ctr" lIns="25400" rIns="25400" tIns="25400" bIns="25400">
             <a:spAutoFit/>
           </a:bodyPr>
           <a:lstStyle/>
@@ -4970,7 +5463,7 @@
               </a:spcAft>
             </a:pPr>
             <a:r>
-              <a:rPr sz="800" b="1">
+              <a:rPr sz="850" b="1">
                 <a:solidFill>
                   <a:srgbClr val="2D6A6E"/>
                 </a:solidFill>
@@ -4983,14 +5476,53 @@
       </p:sp>
       <p:sp>
         <p:nvSpPr>
-          <p:cNvPr id="28" name="Oval 27"/>
+          <p:cNvPr id="32" name="TextBox 31"/>
+          <p:cNvSpPr txBox="1"/>
+          <p:nvPr/>
+        </p:nvSpPr>
+        <p:spPr>
+          <a:xfrm>
+            <a:off x="5046979" y="3695700"/>
+            <a:ext cx="2098040" cy="139700"/>
+          </a:xfrm>
+          <a:prstGeom prst="rect">
+            <a:avLst/>
+          </a:prstGeom>
+          <a:noFill/>
+        </p:spPr>
+        <p:txBody>
+          <a:bodyPr wrap="square" anchor="ctr" lIns="25400" rIns="25400" tIns="25400" bIns="25400">
+            <a:spAutoFit/>
+          </a:bodyPr>
+          <a:lstStyle/>
+          <a:p>
+            <a:pPr algn="ctr">
+              <a:spcAft>
+                <a:spcPts val="0"/>
+              </a:spcAft>
+            </a:pPr>
+            <a:r>
+              <a:rPr sz="675" b="0">
+                <a:solidFill>
+                  <a:srgbClr val="4A5B6B"/>
+                </a:solidFill>
+                <a:latin typeface="Inter"/>
+              </a:rPr>
+              <a:t>a clear path forward</a:t>
+            </a:r>
+          </a:p>
+        </p:txBody>
+      </p:sp>
+      <p:sp>
+        <p:nvSpPr>
+          <p:cNvPr id="33" name="Oval 32"/>
           <p:cNvSpPr/>
           <p:nvPr/>
         </p:nvSpPr>
         <p:spPr>
           <a:xfrm>
-            <a:off x="8282939" y="2694939"/>
-            <a:ext cx="101600" cy="101600"/>
+            <a:off x="8270240" y="2693670"/>
+            <a:ext cx="127000" cy="127000"/>
           </a:xfrm>
           <a:prstGeom prst="ellipse">
             <a:avLst/>
@@ -5000,7 +5532,7 @@
           </a:solidFill>
           <a:ln w="19050">
             <a:solidFill>
-              <a:srgbClr val="FAFAF7"/>
+              <a:srgbClr val="FFFFFF"/>
             </a:solidFill>
           </a:ln>
           <a:effectLst/>
@@ -5029,14 +5561,14 @@
       </p:sp>
       <p:sp>
         <p:nvSpPr>
-          <p:cNvPr id="29" name="TextBox 28"/>
+          <p:cNvPr id="34" name="TextBox 33"/>
           <p:cNvSpPr txBox="1"/>
           <p:nvPr/>
         </p:nvSpPr>
         <p:spPr>
           <a:xfrm>
-            <a:off x="7284719" y="3479800"/>
-            <a:ext cx="2098040" cy="165100"/>
+            <a:off x="7284719" y="3530600"/>
+            <a:ext cx="2098040" cy="152400"/>
           </a:xfrm>
           <a:prstGeom prst="rect">
             <a:avLst/>
@@ -5044,7 +5576,7 @@
           <a:noFill/>
         </p:spPr>
         <p:txBody>
-          <a:bodyPr wrap="square" anchor="ctr" lIns="25400" rIns="25400" tIns="12700" bIns="12700">
+          <a:bodyPr wrap="square" anchor="ctr" lIns="25400" rIns="25400" tIns="25400" bIns="25400">
             <a:spAutoFit/>
           </a:bodyPr>
           <a:lstStyle/>
@@ -5055,7 +5587,7 @@
               </a:spcAft>
             </a:pPr>
             <a:r>
-              <a:rPr sz="800" b="1">
+              <a:rPr sz="850" b="1">
                 <a:solidFill>
                   <a:srgbClr val="2D6A6E"/>
                 </a:solidFill>
@@ -5068,14 +5600,53 @@
       </p:sp>
       <p:sp>
         <p:nvSpPr>
-          <p:cNvPr id="30" name="Oval 29"/>
+          <p:cNvPr id="35" name="TextBox 34"/>
+          <p:cNvSpPr txBox="1"/>
+          <p:nvPr/>
+        </p:nvSpPr>
+        <p:spPr>
+          <a:xfrm>
+            <a:off x="7284719" y="3695700"/>
+            <a:ext cx="2098040" cy="139700"/>
+          </a:xfrm>
+          <a:prstGeom prst="rect">
+            <a:avLst/>
+          </a:prstGeom>
+          <a:noFill/>
+        </p:spPr>
+        <p:txBody>
+          <a:bodyPr wrap="square" anchor="ctr" lIns="25400" rIns="25400" tIns="25400" bIns="25400">
+            <a:spAutoFit/>
+          </a:bodyPr>
+          <a:lstStyle/>
+          <a:p>
+            <a:pPr algn="ctr">
+              <a:spcAft>
+                <a:spcPts val="0"/>
+              </a:spcAft>
+            </a:pPr>
+            <a:r>
+              <a:rPr sz="675" b="0">
+                <a:solidFill>
+                  <a:srgbClr val="4A5B6B"/>
+                </a:solidFill>
+                <a:latin typeface="Inter"/>
+              </a:rPr>
+              <a:t>kept in the loop</a:t>
+            </a:r>
+          </a:p>
+        </p:txBody>
+      </p:sp>
+      <p:sp>
+        <p:nvSpPr>
+          <p:cNvPr id="36" name="Oval 35"/>
           <p:cNvSpPr/>
           <p:nvPr/>
         </p:nvSpPr>
         <p:spPr>
           <a:xfrm>
-            <a:off x="10520680" y="2557780"/>
-            <a:ext cx="101600" cy="101600"/>
+            <a:off x="10507980" y="2567940"/>
+            <a:ext cx="127000" cy="127000"/>
           </a:xfrm>
           <a:prstGeom prst="ellipse">
             <a:avLst/>
@@ -5085,7 +5656,7 @@
           </a:solidFill>
           <a:ln w="19050">
             <a:solidFill>
-              <a:srgbClr val="FAFAF7"/>
+              <a:srgbClr val="FFFFFF"/>
             </a:solidFill>
           </a:ln>
           <a:effectLst/>
@@ -5114,14 +5685,14 @@
       </p:sp>
       <p:sp>
         <p:nvSpPr>
-          <p:cNvPr id="31" name="TextBox 30"/>
+          <p:cNvPr id="37" name="TextBox 36"/>
           <p:cNvSpPr txBox="1"/>
           <p:nvPr/>
         </p:nvSpPr>
         <p:spPr>
           <a:xfrm>
-            <a:off x="9522459" y="3479800"/>
-            <a:ext cx="2098040" cy="165100"/>
+            <a:off x="9522459" y="3530600"/>
+            <a:ext cx="2098040" cy="152400"/>
           </a:xfrm>
           <a:prstGeom prst="rect">
             <a:avLst/>
@@ -5129,7 +5700,7 @@
           <a:noFill/>
         </p:spPr>
         <p:txBody>
-          <a:bodyPr wrap="square" anchor="ctr" lIns="25400" rIns="25400" tIns="12700" bIns="12700">
+          <a:bodyPr wrap="square" anchor="ctr" lIns="25400" rIns="25400" tIns="25400" bIns="25400">
             <a:spAutoFit/>
           </a:bodyPr>
           <a:lstStyle/>
@@ -5140,7 +5711,7 @@
               </a:spcAft>
             </a:pPr>
             <a:r>
-              <a:rPr sz="800" b="1">
+              <a:rPr sz="850" b="1">
                 <a:solidFill>
                   <a:srgbClr val="2D6A6E"/>
                 </a:solidFill>
@@ -5153,13 +5724,52 @@
       </p:sp>
       <p:sp>
         <p:nvSpPr>
-          <p:cNvPr id="32" name="TextBox 31"/>
+          <p:cNvPr id="38" name="TextBox 37"/>
           <p:cNvSpPr txBox="1"/>
           <p:nvPr/>
         </p:nvSpPr>
         <p:spPr>
           <a:xfrm>
-            <a:off x="571500" y="3835400"/>
+            <a:off x="9522459" y="3695700"/>
+            <a:ext cx="2098040" cy="139700"/>
+          </a:xfrm>
+          <a:prstGeom prst="rect">
+            <a:avLst/>
+          </a:prstGeom>
+          <a:noFill/>
+        </p:spPr>
+        <p:txBody>
+          <a:bodyPr wrap="square" anchor="ctr" lIns="25400" rIns="25400" tIns="25400" bIns="25400">
+            <a:spAutoFit/>
+          </a:bodyPr>
+          <a:lstStyle/>
+          <a:p>
+            <a:pPr algn="ctr">
+              <a:spcAft>
+                <a:spcPts val="0"/>
+              </a:spcAft>
+            </a:pPr>
+            <a:r>
+              <a:rPr sz="675" b="0">
+                <a:solidFill>
+                  <a:srgbClr val="4A5B6B"/>
+                </a:solidFill>
+                <a:latin typeface="Inter"/>
+              </a:rPr>
+              <a:t>confident &amp; in control</a:t>
+            </a:r>
+          </a:p>
+        </p:txBody>
+      </p:sp>
+      <p:sp>
+        <p:nvSpPr>
+          <p:cNvPr id="39" name="TextBox 38"/>
+          <p:cNvSpPr txBox="1"/>
+          <p:nvPr/>
+        </p:nvSpPr>
+        <p:spPr>
+          <a:xfrm>
+            <a:off x="571500" y="4038600"/>
             <a:ext cx="5715000" cy="152400"/>
           </a:xfrm>
           <a:prstGeom prst="rect">
@@ -5168,7 +5778,7 @@
           <a:noFill/>
         </p:spPr>
         <p:txBody>
-          <a:bodyPr wrap="square" anchor="t" lIns="25400" rIns="25400" tIns="12700" bIns="12700">
+          <a:bodyPr wrap="square" anchor="t" lIns="25400" rIns="25400" tIns="25400" bIns="25400">
             <a:spAutoFit/>
           </a:bodyPr>
           <a:lstStyle/>
@@ -5192,22 +5802,22 @@
       </p:sp>
       <p:sp>
         <p:nvSpPr>
-          <p:cNvPr id="33" name="Rounded Rectangle 32"/>
+          <p:cNvPr id="40" name="Rounded Rectangle 39"/>
           <p:cNvSpPr/>
           <p:nvPr/>
         </p:nvSpPr>
         <p:spPr>
           <a:xfrm>
-            <a:off x="571500" y="4038600"/>
-            <a:ext cx="2098040" cy="749300"/>
+            <a:off x="571500" y="4241800"/>
+            <a:ext cx="2098040" cy="736600"/>
           </a:xfrm>
           <a:prstGeom prst="roundRect">
             <a:avLst>
-              <a:gd name="adj" fmla="val 10169"/>
+              <a:gd name="adj" fmla="val 10344"/>
             </a:avLst>
           </a:prstGeom>
           <a:solidFill>
-            <a:srgbClr val="FBF7F1"/>
+            <a:srgbClr val="F2F5F6"/>
           </a:solidFill>
           <a:ln w="12700">
             <a:solidFill>
@@ -5240,14 +5850,58 @@
       </p:sp>
       <p:sp>
         <p:nvSpPr>
-          <p:cNvPr id="34" name="TextBox 33"/>
+          <p:cNvPr id="41" name="Oval 40"/>
+          <p:cNvSpPr/>
+          <p:nvPr/>
+        </p:nvSpPr>
+        <p:spPr>
+          <a:xfrm>
+            <a:off x="673100" y="4343400"/>
+            <a:ext cx="57150" cy="57150"/>
+          </a:xfrm>
+          <a:prstGeom prst="ellipse">
+            <a:avLst/>
+          </a:prstGeom>
+          <a:solidFill>
+            <a:srgbClr val="F2A878"/>
+          </a:solidFill>
+          <a:ln>
+            <a:noFill/>
+          </a:ln>
+          <a:effectLst/>
+        </p:spPr>
+        <p:style>
+          <a:lnRef idx="1">
+            <a:schemeClr val="accent1"/>
+          </a:lnRef>
+          <a:fillRef idx="3">
+            <a:schemeClr val="accent1"/>
+          </a:fillRef>
+          <a:effectRef idx="2">
+            <a:schemeClr val="accent1"/>
+          </a:effectRef>
+          <a:fontRef idx="minor">
+            <a:schemeClr val="lt1"/>
+          </a:fontRef>
+        </p:style>
+        <p:txBody>
+          <a:bodyPr rtlCol="0" anchor="ctr"/>
+          <a:lstStyle/>
+          <a:p>
+            <a:pPr algn="ctr"/>
+          </a:p>
+        </p:txBody>
+      </p:sp>
+      <p:sp>
+        <p:nvSpPr>
+          <p:cNvPr id="42" name="TextBox 41"/>
           <p:cNvSpPr txBox="1"/>
           <p:nvPr/>
         </p:nvSpPr>
         <p:spPr>
           <a:xfrm>
-            <a:off x="660400" y="4038600"/>
-            <a:ext cx="1920239" cy="749300"/>
+            <a:off x="673100" y="4241800"/>
+            <a:ext cx="1894839" cy="736600"/>
           </a:xfrm>
           <a:prstGeom prst="rect">
             <a:avLst/>
@@ -5255,7 +5909,7 @@
           <a:noFill/>
         </p:spPr>
         <p:txBody>
-          <a:bodyPr wrap="square" anchor="ctr" lIns="25400" rIns="25400" tIns="12700" bIns="12700">
+          <a:bodyPr wrap="square" anchor="ctr" lIns="25400" rIns="25400" tIns="25400" bIns="25400">
             <a:normAutofit/>
           </a:bodyPr>
           <a:lstStyle/>
@@ -5268,7 +5922,7 @@
             <a:r>
               <a:rPr sz="800" b="0">
                 <a:solidFill>
-                  <a:srgbClr val="7A3B2E"/>
+                  <a:srgbClr val="3A4A55"/>
                 </a:solidFill>
                 <a:latin typeface="Inter"/>
               </a:rPr>
@@ -5279,22 +5933,22 @@
       </p:sp>
       <p:sp>
         <p:nvSpPr>
-          <p:cNvPr id="35" name="Rounded Rectangle 34"/>
+          <p:cNvPr id="43" name="Rounded Rectangle 42"/>
           <p:cNvSpPr/>
           <p:nvPr/>
         </p:nvSpPr>
         <p:spPr>
           <a:xfrm>
-            <a:off x="2809239" y="4038600"/>
-            <a:ext cx="2098040" cy="749300"/>
+            <a:off x="2809239" y="4241800"/>
+            <a:ext cx="2098040" cy="736600"/>
           </a:xfrm>
           <a:prstGeom prst="roundRect">
             <a:avLst>
-              <a:gd name="adj" fmla="val 10169"/>
+              <a:gd name="adj" fmla="val 10344"/>
             </a:avLst>
           </a:prstGeom>
           <a:solidFill>
-            <a:srgbClr val="FBF7F1"/>
+            <a:srgbClr val="F2F5F6"/>
           </a:solidFill>
           <a:ln w="12700">
             <a:solidFill>
@@ -5327,14 +5981,58 @@
       </p:sp>
       <p:sp>
         <p:nvSpPr>
-          <p:cNvPr id="36" name="TextBox 35"/>
+          <p:cNvPr id="44" name="Oval 43"/>
+          <p:cNvSpPr/>
+          <p:nvPr/>
+        </p:nvSpPr>
+        <p:spPr>
+          <a:xfrm>
+            <a:off x="2910840" y="4343400"/>
+            <a:ext cx="57150" cy="57150"/>
+          </a:xfrm>
+          <a:prstGeom prst="ellipse">
+            <a:avLst/>
+          </a:prstGeom>
+          <a:solidFill>
+            <a:srgbClr val="F2A878"/>
+          </a:solidFill>
+          <a:ln>
+            <a:noFill/>
+          </a:ln>
+          <a:effectLst/>
+        </p:spPr>
+        <p:style>
+          <a:lnRef idx="1">
+            <a:schemeClr val="accent1"/>
+          </a:lnRef>
+          <a:fillRef idx="3">
+            <a:schemeClr val="accent1"/>
+          </a:fillRef>
+          <a:effectRef idx="2">
+            <a:schemeClr val="accent1"/>
+          </a:effectRef>
+          <a:fontRef idx="minor">
+            <a:schemeClr val="lt1"/>
+          </a:fontRef>
+        </p:style>
+        <p:txBody>
+          <a:bodyPr rtlCol="0" anchor="ctr"/>
+          <a:lstStyle/>
+          <a:p>
+            <a:pPr algn="ctr"/>
+          </a:p>
+        </p:txBody>
+      </p:sp>
+      <p:sp>
+        <p:nvSpPr>
+          <p:cNvPr id="45" name="TextBox 44"/>
           <p:cNvSpPr txBox="1"/>
           <p:nvPr/>
         </p:nvSpPr>
         <p:spPr>
           <a:xfrm>
-            <a:off x="2898140" y="4038600"/>
-            <a:ext cx="1920239" cy="749300"/>
+            <a:off x="2910840" y="4241800"/>
+            <a:ext cx="1894839" cy="736600"/>
           </a:xfrm>
           <a:prstGeom prst="rect">
             <a:avLst/>
@@ -5342,7 +6040,7 @@
           <a:noFill/>
         </p:spPr>
         <p:txBody>
-          <a:bodyPr wrap="square" anchor="ctr" lIns="25400" rIns="25400" tIns="12700" bIns="12700">
+          <a:bodyPr wrap="square" anchor="ctr" lIns="25400" rIns="25400" tIns="25400" bIns="25400">
             <a:normAutofit/>
           </a:bodyPr>
           <a:lstStyle/>
@@ -5355,7 +6053,7 @@
             <a:r>
               <a:rPr sz="800" b="0">
                 <a:solidFill>
-                  <a:srgbClr val="7A3B2E"/>
+                  <a:srgbClr val="3A4A55"/>
                 </a:solidFill>
                 <a:latin typeface="Inter"/>
               </a:rPr>
@@ -5366,22 +6064,22 @@
       </p:sp>
       <p:sp>
         <p:nvSpPr>
-          <p:cNvPr id="37" name="Rounded Rectangle 36"/>
+          <p:cNvPr id="46" name="Rounded Rectangle 45"/>
           <p:cNvSpPr/>
           <p:nvPr/>
         </p:nvSpPr>
         <p:spPr>
           <a:xfrm>
-            <a:off x="5046979" y="4038600"/>
-            <a:ext cx="2098040" cy="749300"/>
+            <a:off x="5046979" y="4241800"/>
+            <a:ext cx="2098040" cy="736600"/>
           </a:xfrm>
           <a:prstGeom prst="roundRect">
             <a:avLst>
-              <a:gd name="adj" fmla="val 10169"/>
+              <a:gd name="adj" fmla="val 10344"/>
             </a:avLst>
           </a:prstGeom>
           <a:solidFill>
-            <a:srgbClr val="FBF7F1"/>
+            <a:srgbClr val="F2F5F6"/>
           </a:solidFill>
           <a:ln w="12700">
             <a:solidFill>
@@ -5414,14 +6112,58 @@
       </p:sp>
       <p:sp>
         <p:nvSpPr>
-          <p:cNvPr id="38" name="TextBox 37"/>
+          <p:cNvPr id="47" name="Oval 46"/>
+          <p:cNvSpPr/>
+          <p:nvPr/>
+        </p:nvSpPr>
+        <p:spPr>
+          <a:xfrm>
+            <a:off x="5148580" y="4343400"/>
+            <a:ext cx="57150" cy="57150"/>
+          </a:xfrm>
+          <a:prstGeom prst="ellipse">
+            <a:avLst/>
+          </a:prstGeom>
+          <a:solidFill>
+            <a:srgbClr val="F2A878"/>
+          </a:solidFill>
+          <a:ln>
+            <a:noFill/>
+          </a:ln>
+          <a:effectLst/>
+        </p:spPr>
+        <p:style>
+          <a:lnRef idx="1">
+            <a:schemeClr val="accent1"/>
+          </a:lnRef>
+          <a:fillRef idx="3">
+            <a:schemeClr val="accent1"/>
+          </a:fillRef>
+          <a:effectRef idx="2">
+            <a:schemeClr val="accent1"/>
+          </a:effectRef>
+          <a:fontRef idx="minor">
+            <a:schemeClr val="lt1"/>
+          </a:fontRef>
+        </p:style>
+        <p:txBody>
+          <a:bodyPr rtlCol="0" anchor="ctr"/>
+          <a:lstStyle/>
+          <a:p>
+            <a:pPr algn="ctr"/>
+          </a:p>
+        </p:txBody>
+      </p:sp>
+      <p:sp>
+        <p:nvSpPr>
+          <p:cNvPr id="48" name="TextBox 47"/>
           <p:cNvSpPr txBox="1"/>
           <p:nvPr/>
         </p:nvSpPr>
         <p:spPr>
           <a:xfrm>
-            <a:off x="5135880" y="4038600"/>
-            <a:ext cx="1920239" cy="749300"/>
+            <a:off x="5148580" y="4241800"/>
+            <a:ext cx="1894839" cy="736600"/>
           </a:xfrm>
           <a:prstGeom prst="rect">
             <a:avLst/>
@@ -5429,7 +6171,7 @@
           <a:noFill/>
         </p:spPr>
         <p:txBody>
-          <a:bodyPr wrap="square" anchor="ctr" lIns="25400" rIns="25400" tIns="12700" bIns="12700">
+          <a:bodyPr wrap="square" anchor="ctr" lIns="25400" rIns="25400" tIns="25400" bIns="25400">
             <a:normAutofit/>
           </a:bodyPr>
           <a:lstStyle/>
@@ -5442,7 +6184,7 @@
             <a:r>
               <a:rPr sz="800" b="0">
                 <a:solidFill>
-                  <a:srgbClr val="7A3B2E"/>
+                  <a:srgbClr val="3A4A55"/>
                 </a:solidFill>
                 <a:latin typeface="Inter"/>
               </a:rPr>
@@ -5453,22 +6195,22 @@
       </p:sp>
       <p:sp>
         <p:nvSpPr>
-          <p:cNvPr id="39" name="Rounded Rectangle 38"/>
+          <p:cNvPr id="49" name="Rounded Rectangle 48"/>
           <p:cNvSpPr/>
           <p:nvPr/>
         </p:nvSpPr>
         <p:spPr>
           <a:xfrm>
-            <a:off x="7284719" y="4038600"/>
-            <a:ext cx="2098040" cy="749300"/>
+            <a:off x="7284719" y="4241800"/>
+            <a:ext cx="2098040" cy="736600"/>
           </a:xfrm>
           <a:prstGeom prst="roundRect">
             <a:avLst>
-              <a:gd name="adj" fmla="val 10169"/>
+              <a:gd name="adj" fmla="val 10344"/>
             </a:avLst>
           </a:prstGeom>
           <a:solidFill>
-            <a:srgbClr val="FBF7F1"/>
+            <a:srgbClr val="F2F5F6"/>
           </a:solidFill>
           <a:ln w="12700">
             <a:solidFill>
@@ -5501,14 +6243,58 @@
       </p:sp>
       <p:sp>
         <p:nvSpPr>
-          <p:cNvPr id="40" name="TextBox 39"/>
+          <p:cNvPr id="50" name="Oval 49"/>
+          <p:cNvSpPr/>
+          <p:nvPr/>
+        </p:nvSpPr>
+        <p:spPr>
+          <a:xfrm>
+            <a:off x="7386319" y="4343400"/>
+            <a:ext cx="57150" cy="57150"/>
+          </a:xfrm>
+          <a:prstGeom prst="ellipse">
+            <a:avLst/>
+          </a:prstGeom>
+          <a:solidFill>
+            <a:srgbClr val="F2A878"/>
+          </a:solidFill>
+          <a:ln>
+            <a:noFill/>
+          </a:ln>
+          <a:effectLst/>
+        </p:spPr>
+        <p:style>
+          <a:lnRef idx="1">
+            <a:schemeClr val="accent1"/>
+          </a:lnRef>
+          <a:fillRef idx="3">
+            <a:schemeClr val="accent1"/>
+          </a:fillRef>
+          <a:effectRef idx="2">
+            <a:schemeClr val="accent1"/>
+          </a:effectRef>
+          <a:fontRef idx="minor">
+            <a:schemeClr val="lt1"/>
+          </a:fontRef>
+        </p:style>
+        <p:txBody>
+          <a:bodyPr rtlCol="0" anchor="ctr"/>
+          <a:lstStyle/>
+          <a:p>
+            <a:pPr algn="ctr"/>
+          </a:p>
+        </p:txBody>
+      </p:sp>
+      <p:sp>
+        <p:nvSpPr>
+          <p:cNvPr id="51" name="TextBox 50"/>
           <p:cNvSpPr txBox="1"/>
           <p:nvPr/>
         </p:nvSpPr>
         <p:spPr>
           <a:xfrm>
-            <a:off x="7373619" y="4038600"/>
-            <a:ext cx="1920239" cy="749300"/>
+            <a:off x="7386319" y="4241800"/>
+            <a:ext cx="1894839" cy="736600"/>
           </a:xfrm>
           <a:prstGeom prst="rect">
             <a:avLst/>
@@ -5516,7 +6302,7 @@
           <a:noFill/>
         </p:spPr>
         <p:txBody>
-          <a:bodyPr wrap="square" anchor="ctr" lIns="25400" rIns="25400" tIns="12700" bIns="12700">
+          <a:bodyPr wrap="square" anchor="ctr" lIns="25400" rIns="25400" tIns="25400" bIns="25400">
             <a:normAutofit/>
           </a:bodyPr>
           <a:lstStyle/>
@@ -5529,7 +6315,7 @@
             <a:r>
               <a:rPr sz="800" b="0">
                 <a:solidFill>
-                  <a:srgbClr val="7A3B2E"/>
+                  <a:srgbClr val="3A4A55"/>
                 </a:solidFill>
                 <a:latin typeface="Inter"/>
               </a:rPr>
@@ -5540,22 +6326,22 @@
       </p:sp>
       <p:sp>
         <p:nvSpPr>
-          <p:cNvPr id="41" name="Rounded Rectangle 40"/>
+          <p:cNvPr id="52" name="Rounded Rectangle 51"/>
           <p:cNvSpPr/>
           <p:nvPr/>
         </p:nvSpPr>
         <p:spPr>
           <a:xfrm>
-            <a:off x="9522459" y="4038600"/>
-            <a:ext cx="2098040" cy="749300"/>
+            <a:off x="9522459" y="4241800"/>
+            <a:ext cx="2098040" cy="736600"/>
           </a:xfrm>
           <a:prstGeom prst="roundRect">
             <a:avLst>
-              <a:gd name="adj" fmla="val 10169"/>
+              <a:gd name="adj" fmla="val 10344"/>
             </a:avLst>
           </a:prstGeom>
           <a:solidFill>
-            <a:srgbClr val="FBF7F1"/>
+            <a:srgbClr val="F2F5F6"/>
           </a:solidFill>
           <a:ln w="12700">
             <a:solidFill>
@@ -5588,97 +6374,17 @@
       </p:sp>
       <p:sp>
         <p:nvSpPr>
-          <p:cNvPr id="42" name="TextBox 41"/>
-          <p:cNvSpPr txBox="1"/>
-          <p:nvPr/>
-        </p:nvSpPr>
-        <p:spPr>
-          <a:xfrm>
-            <a:off x="9611360" y="4038600"/>
-            <a:ext cx="1920239" cy="749300"/>
-          </a:xfrm>
-          <a:prstGeom prst="rect">
-            <a:avLst/>
-          </a:prstGeom>
-          <a:noFill/>
-        </p:spPr>
-        <p:txBody>
-          <a:bodyPr wrap="square" anchor="ctr" lIns="25400" rIns="25400" tIns="12700" bIns="12700">
-            <a:normAutofit/>
-          </a:bodyPr>
-          <a:lstStyle/>
-          <a:p>
-            <a:pPr algn="ctr">
-              <a:spcAft>
-                <a:spcPts val="0"/>
-              </a:spcAft>
-            </a:pPr>
-            <a:r>
-              <a:rPr sz="800" b="0">
-                <a:solidFill>
-                  <a:srgbClr val="7A3B2E"/>
-                </a:solidFill>
-                <a:latin typeface="Inter"/>
-              </a:rPr>
-              <a:t>Carryover is ad-hoc (email / WhatsApp)</a:t>
-            </a:r>
-          </a:p>
-        </p:txBody>
-      </p:sp>
-      <p:sp>
-        <p:nvSpPr>
-          <p:cNvPr id="43" name="TextBox 42"/>
-          <p:cNvSpPr txBox="1"/>
-          <p:nvPr/>
-        </p:nvSpPr>
-        <p:spPr>
-          <a:xfrm>
-            <a:off x="571500" y="5067300"/>
-            <a:ext cx="5715000" cy="152400"/>
-          </a:xfrm>
-          <a:prstGeom prst="rect">
-            <a:avLst/>
-          </a:prstGeom>
-          <a:noFill/>
-        </p:spPr>
-        <p:txBody>
-          <a:bodyPr wrap="square" anchor="t" lIns="25400" rIns="25400" tIns="12700" bIns="12700">
-            <a:spAutoFit/>
-          </a:bodyPr>
-          <a:lstStyle/>
-          <a:p>
-            <a:pPr algn="l">
-              <a:spcAft>
-                <a:spcPts val="0"/>
-              </a:spcAft>
-            </a:pPr>
-            <a:r>
-              <a:rPr sz="700" b="1">
-                <a:solidFill>
-                  <a:srgbClr val="8597A4"/>
-                </a:solidFill>
-                <a:latin typeface="Inter"/>
-              </a:rPr>
-              <a:t>THE PRIZE — TARGETS</a:t>
-            </a:r>
-          </a:p>
-        </p:txBody>
-      </p:sp>
-      <p:sp>
-        <p:nvSpPr>
-          <p:cNvPr id="44" name="Rounded Rectangle 43"/>
+          <p:cNvPr id="53" name="Oval 52"/>
           <p:cNvSpPr/>
           <p:nvPr/>
         </p:nvSpPr>
         <p:spPr>
           <a:xfrm>
-            <a:off x="584200" y="5283200"/>
-            <a:ext cx="571500" cy="31750"/>
-          </a:xfrm>
-          <a:prstGeom prst="roundRect">
-            <a:avLst>
-              <a:gd name="adj" fmla="val 40000"/>
-            </a:avLst>
+            <a:off x="9624059" y="4343400"/>
+            <a:ext cx="57150" cy="57150"/>
+          </a:xfrm>
+          <a:prstGeom prst="ellipse">
+            <a:avLst/>
           </a:prstGeom>
           <a:solidFill>
             <a:srgbClr val="F2A878"/>
@@ -5712,14 +6418,14 @@
       </p:sp>
       <p:sp>
         <p:nvSpPr>
-          <p:cNvPr id="45" name="TextBox 44"/>
+          <p:cNvPr id="54" name="TextBox 53"/>
           <p:cNvSpPr txBox="1"/>
           <p:nvPr/>
         </p:nvSpPr>
         <p:spPr>
           <a:xfrm>
-            <a:off x="571500" y="5372100"/>
-            <a:ext cx="5207000" cy="355600"/>
+            <a:off x="9624059" y="4241800"/>
+            <a:ext cx="1894839" cy="736600"/>
           </a:xfrm>
           <a:prstGeom prst="rect">
             <a:avLst/>
@@ -5727,7 +6433,46 @@
           <a:noFill/>
         </p:spPr>
         <p:txBody>
-          <a:bodyPr wrap="square" anchor="t" lIns="25400" rIns="25400" tIns="12700" bIns="12700">
+          <a:bodyPr wrap="square" anchor="ctr" lIns="25400" rIns="25400" tIns="25400" bIns="25400">
+            <a:normAutofit/>
+          </a:bodyPr>
+          <a:lstStyle/>
+          <a:p>
+            <a:pPr algn="ctr">
+              <a:spcAft>
+                <a:spcPts val="0"/>
+              </a:spcAft>
+            </a:pPr>
+            <a:r>
+              <a:rPr sz="800" b="0">
+                <a:solidFill>
+                  <a:srgbClr val="3A4A55"/>
+                </a:solidFill>
+                <a:latin typeface="Inter"/>
+              </a:rPr>
+              <a:t>Carryover is ad-hoc (email / WhatsApp)</a:t>
+            </a:r>
+          </a:p>
+        </p:txBody>
+      </p:sp>
+      <p:sp>
+        <p:nvSpPr>
+          <p:cNvPr id="55" name="TextBox 54"/>
+          <p:cNvSpPr txBox="1"/>
+          <p:nvPr/>
+        </p:nvSpPr>
+        <p:spPr>
+          <a:xfrm>
+            <a:off x="571500" y="5156200"/>
+            <a:ext cx="5715000" cy="152400"/>
+          </a:xfrm>
+          <a:prstGeom prst="rect">
+            <a:avLst/>
+          </a:prstGeom>
+          <a:noFill/>
+        </p:spPr>
+        <p:txBody>
+          <a:bodyPr wrap="square" anchor="t" lIns="25400" rIns="25400" tIns="25400" bIns="25400">
             <a:spAutoFit/>
           </a:bodyPr>
           <a:lstStyle/>
@@ -5738,65 +6483,26 @@
               </a:spcAft>
             </a:pPr>
             <a:r>
-              <a:rPr sz="2100" b="1">
-                <a:solidFill>
-                  <a:srgbClr val="2D6A6E"/>
+              <a:rPr sz="700" b="1">
+                <a:solidFill>
+                  <a:srgbClr val="8597A4"/>
                 </a:solidFill>
                 <a:latin typeface="Inter"/>
               </a:rPr>
-              <a:t>≥ 4 hours / month</a:t>
-            </a:r>
-          </a:p>
-        </p:txBody>
-      </p:sp>
-      <p:sp>
-        <p:nvSpPr>
-          <p:cNvPr id="46" name="TextBox 45"/>
-          <p:cNvSpPr txBox="1"/>
-          <p:nvPr/>
-        </p:nvSpPr>
-        <p:spPr>
-          <a:xfrm>
-            <a:off x="571500" y="5791200"/>
-            <a:ext cx="5207000" cy="190500"/>
-          </a:xfrm>
-          <a:prstGeom prst="rect">
-            <a:avLst/>
-          </a:prstGeom>
-          <a:noFill/>
-        </p:spPr>
-        <p:txBody>
-          <a:bodyPr wrap="square" anchor="t" lIns="25400" rIns="25400" tIns="12700" bIns="12700">
-            <a:spAutoFit/>
-          </a:bodyPr>
-          <a:lstStyle/>
-          <a:p>
-            <a:pPr algn="l">
-              <a:spcAft>
-                <a:spcPts val="0"/>
-              </a:spcAft>
-            </a:pPr>
-            <a:r>
-              <a:rPr sz="900" b="0">
-                <a:solidFill>
-                  <a:srgbClr val="4A5B6B"/>
-                </a:solidFill>
-                <a:latin typeface="Inter"/>
-              </a:rPr>
-              <a:t>productive hours given back to each clinician</a:t>
-            </a:r>
-          </a:p>
-        </p:txBody>
-      </p:sp>
-      <p:sp>
-        <p:nvSpPr>
-          <p:cNvPr id="47" name="Rounded Rectangle 46"/>
+              <a:t>TARGET OUTCOMES</a:t>
+            </a:r>
+          </a:p>
+        </p:txBody>
+      </p:sp>
+      <p:sp>
+        <p:nvSpPr>
+          <p:cNvPr id="56" name="Rounded Rectangle 55"/>
           <p:cNvSpPr/>
           <p:nvPr/>
         </p:nvSpPr>
         <p:spPr>
           <a:xfrm>
-            <a:off x="6362700" y="5283200"/>
+            <a:off x="584200" y="5359400"/>
             <a:ext cx="571500" cy="31750"/>
           </a:xfrm>
           <a:prstGeom prst="roundRect">
@@ -5836,13 +6542,13 @@
       </p:sp>
       <p:sp>
         <p:nvSpPr>
-          <p:cNvPr id="48" name="TextBox 47"/>
+          <p:cNvPr id="57" name="TextBox 56"/>
           <p:cNvSpPr txBox="1"/>
           <p:nvPr/>
         </p:nvSpPr>
         <p:spPr>
           <a:xfrm>
-            <a:off x="6350000" y="5372100"/>
+            <a:off x="571500" y="5448300"/>
             <a:ext cx="5207000" cy="355600"/>
           </a:xfrm>
           <a:prstGeom prst="rect">
@@ -5851,7 +6557,7 @@
           <a:noFill/>
         </p:spPr>
         <p:txBody>
-          <a:bodyPr wrap="square" anchor="t" lIns="25400" rIns="25400" tIns="12700" bIns="12700">
+          <a:bodyPr wrap="square" anchor="t" lIns="25400" rIns="25400" tIns="25400" bIns="25400">
             <a:spAutoFit/>
           </a:bodyPr>
           <a:lstStyle/>
@@ -5868,20 +6574,20 @@
                 </a:solidFill>
                 <a:latin typeface="Inter"/>
               </a:rPr>
-              <a:t>Same-day</a:t>
-            </a:r>
-          </a:p>
-        </p:txBody>
-      </p:sp>
-      <p:sp>
-        <p:nvSpPr>
-          <p:cNvPr id="49" name="TextBox 48"/>
+              <a:t>≥ 4 hours / month</a:t>
+            </a:r>
+          </a:p>
+        </p:txBody>
+      </p:sp>
+      <p:sp>
+        <p:nvSpPr>
+          <p:cNvPr id="58" name="TextBox 57"/>
           <p:cNvSpPr txBox="1"/>
           <p:nvPr/>
         </p:nvSpPr>
         <p:spPr>
           <a:xfrm>
-            <a:off x="6350000" y="5791200"/>
+            <a:off x="571500" y="5867400"/>
             <a:ext cx="5207000" cy="190500"/>
           </a:xfrm>
           <a:prstGeom prst="rect">
@@ -5890,7 +6596,7 @@
           <a:noFill/>
         </p:spPr>
         <p:txBody>
-          <a:bodyPr wrap="square" anchor="t" lIns="25400" rIns="25400" tIns="12700" bIns="12700">
+          <a:bodyPr wrap="square" anchor="t" lIns="25400" rIns="25400" tIns="25400" bIns="25400">
             <a:spAutoFit/>
           </a:bodyPr>
           <a:lstStyle/>
@@ -5907,21 +6613,67 @@
                 </a:solidFill>
                 <a:latin typeface="Inter"/>
               </a:rPr>
-              <a:t>client summaries &amp; reports, vs the ~3-week manual baseline</a:t>
-            </a:r>
-          </a:p>
-        </p:txBody>
-      </p:sp>
-      <p:sp>
-        <p:nvSpPr>
-          <p:cNvPr id="50" name="TextBox 49"/>
+              <a:t>productive hours given back to each clinician</a:t>
+            </a:r>
+          </a:p>
+        </p:txBody>
+      </p:sp>
+      <p:sp>
+        <p:nvSpPr>
+          <p:cNvPr id="59" name="Rounded Rectangle 58"/>
+          <p:cNvSpPr/>
+          <p:nvPr/>
+        </p:nvSpPr>
+        <p:spPr>
+          <a:xfrm>
+            <a:off x="6362700" y="5359400"/>
+            <a:ext cx="571500" cy="31750"/>
+          </a:xfrm>
+          <a:prstGeom prst="roundRect">
+            <a:avLst>
+              <a:gd name="adj" fmla="val 40000"/>
+            </a:avLst>
+          </a:prstGeom>
+          <a:solidFill>
+            <a:srgbClr val="F2A878"/>
+          </a:solidFill>
+          <a:ln>
+            <a:noFill/>
+          </a:ln>
+          <a:effectLst/>
+        </p:spPr>
+        <p:style>
+          <a:lnRef idx="1">
+            <a:schemeClr val="accent1"/>
+          </a:lnRef>
+          <a:fillRef idx="3">
+            <a:schemeClr val="accent1"/>
+          </a:fillRef>
+          <a:effectRef idx="2">
+            <a:schemeClr val="accent1"/>
+          </a:effectRef>
+          <a:fontRef idx="minor">
+            <a:schemeClr val="lt1"/>
+          </a:fontRef>
+        </p:style>
+        <p:txBody>
+          <a:bodyPr rtlCol="0" anchor="ctr"/>
+          <a:lstStyle/>
+          <a:p>
+            <a:pPr algn="ctr"/>
+          </a:p>
+        </p:txBody>
+      </p:sp>
+      <p:sp>
+        <p:nvSpPr>
+          <p:cNvPr id="60" name="TextBox 59"/>
           <p:cNvSpPr txBox="1"/>
           <p:nvPr/>
         </p:nvSpPr>
         <p:spPr>
           <a:xfrm>
-            <a:off x="571500" y="6604000"/>
-            <a:ext cx="5715000" cy="139700"/>
+            <a:off x="6350000" y="5448300"/>
+            <a:ext cx="5207000" cy="355600"/>
           </a:xfrm>
           <a:prstGeom prst="rect">
             <a:avLst/>
@@ -5929,7 +6681,7 @@
           <a:noFill/>
         </p:spPr>
         <p:txBody>
-          <a:bodyPr wrap="square" anchor="t" lIns="25400" rIns="25400" tIns="12700" bIns="12700">
+          <a:bodyPr wrap="square" anchor="t" lIns="25400" rIns="25400" tIns="25400" bIns="25400">
             <a:spAutoFit/>
           </a:bodyPr>
           <a:lstStyle/>
@@ -5940,6 +6692,84 @@
               </a:spcAft>
             </a:pPr>
             <a:r>
+              <a:rPr sz="2100" b="1">
+                <a:solidFill>
+                  <a:srgbClr val="2D6A6E"/>
+                </a:solidFill>
+                <a:latin typeface="Inter"/>
+              </a:rPr>
+              <a:t>Same-day</a:t>
+            </a:r>
+          </a:p>
+        </p:txBody>
+      </p:sp>
+      <p:sp>
+        <p:nvSpPr>
+          <p:cNvPr id="61" name="TextBox 60"/>
+          <p:cNvSpPr txBox="1"/>
+          <p:nvPr/>
+        </p:nvSpPr>
+        <p:spPr>
+          <a:xfrm>
+            <a:off x="6350000" y="5867400"/>
+            <a:ext cx="5207000" cy="190500"/>
+          </a:xfrm>
+          <a:prstGeom prst="rect">
+            <a:avLst/>
+          </a:prstGeom>
+          <a:noFill/>
+        </p:spPr>
+        <p:txBody>
+          <a:bodyPr wrap="square" anchor="t" lIns="25400" rIns="25400" tIns="25400" bIns="25400">
+            <a:spAutoFit/>
+          </a:bodyPr>
+          <a:lstStyle/>
+          <a:p>
+            <a:pPr algn="l">
+              <a:spcAft>
+                <a:spcPts val="0"/>
+              </a:spcAft>
+            </a:pPr>
+            <a:r>
+              <a:rPr sz="900" b="0">
+                <a:solidFill>
+                  <a:srgbClr val="4A5B6B"/>
+                </a:solidFill>
+                <a:latin typeface="Inter"/>
+              </a:rPr>
+              <a:t>client summaries &amp; reports, vs the ~3-week manual baseline</a:t>
+            </a:r>
+          </a:p>
+        </p:txBody>
+      </p:sp>
+      <p:sp>
+        <p:nvSpPr>
+          <p:cNvPr id="62" name="TextBox 61"/>
+          <p:cNvSpPr txBox="1"/>
+          <p:nvPr/>
+        </p:nvSpPr>
+        <p:spPr>
+          <a:xfrm>
+            <a:off x="571500" y="6604000"/>
+            <a:ext cx="5715000" cy="139700"/>
+          </a:xfrm>
+          <a:prstGeom prst="rect">
+            <a:avLst/>
+          </a:prstGeom>
+          <a:noFill/>
+        </p:spPr>
+        <p:txBody>
+          <a:bodyPr wrap="square" anchor="t" lIns="25400" rIns="25400" tIns="25400" bIns="25400">
+            <a:spAutoFit/>
+          </a:bodyPr>
+          <a:lstStyle/>
+          <a:p>
+            <a:pPr algn="l">
+              <a:spcAft>
+                <a:spcPts val="0"/>
+              </a:spcAft>
+            </a:pPr>
+            <a:r>
               <a:rPr sz="600" b="0">
                 <a:solidFill>
                   <a:srgbClr val="8597A4"/>
@@ -5953,7 +6783,7 @@
       </p:sp>
       <p:sp>
         <p:nvSpPr>
-          <p:cNvPr id="51" name="TextBox 50"/>
+          <p:cNvPr id="63" name="TextBox 62"/>
           <p:cNvSpPr txBox="1"/>
           <p:nvPr/>
         </p:nvSpPr>
@@ -5968,7 +6798,7 @@
           <a:noFill/>
         </p:spPr>
         <p:txBody>
-          <a:bodyPr wrap="square" anchor="t" lIns="25400" rIns="25400" tIns="12700" bIns="12700">
+          <a:bodyPr wrap="square" anchor="t" lIns="25400" rIns="25400" tIns="25400" bIns="25400">
             <a:spAutoFit/>
           </a:bodyPr>
           <a:lstStyle/>
@@ -6069,7 +6899,7 @@
           <a:noFill/>
         </p:spPr>
         <p:txBody>
-          <a:bodyPr wrap="square" anchor="t" lIns="25400" rIns="25400" tIns="12700" bIns="12700">
+          <a:bodyPr wrap="square" anchor="t" lIns="25400" rIns="25400" tIns="25400" bIns="25400">
             <a:spAutoFit/>
           </a:bodyPr>
           <a:lstStyle/>
@@ -6108,7 +6938,7 @@
           <a:noFill/>
         </p:spPr>
         <p:txBody>
-          <a:bodyPr wrap="square" anchor="t" lIns="25400" rIns="25400" tIns="12700" bIns="12700">
+          <a:bodyPr wrap="square" anchor="t" lIns="25400" rIns="25400" tIns="25400" bIns="25400">
             <a:spAutoFit/>
           </a:bodyPr>
           <a:lstStyle/>
@@ -6147,7 +6977,7 @@
           <a:noFill/>
         </p:spPr>
         <p:txBody>
-          <a:bodyPr wrap="square" anchor="t" lIns="25400" rIns="25400" tIns="12700" bIns="12700">
+          <a:bodyPr wrap="square" anchor="t" lIns="25400" rIns="25400" tIns="25400" bIns="25400">
             <a:spAutoFit/>
           </a:bodyPr>
           <a:lstStyle/>
@@ -6232,7 +7062,7 @@
           <a:noFill/>
         </p:spPr>
         <p:txBody>
-          <a:bodyPr wrap="square" anchor="ctr" lIns="25400" rIns="25400" tIns="12700" bIns="12700">
+          <a:bodyPr wrap="square" anchor="ctr" lIns="25400" rIns="25400" tIns="25400" bIns="25400">
             <a:spAutoFit/>
           </a:bodyPr>
           <a:lstStyle/>
@@ -6271,7 +7101,7 @@
           <a:noFill/>
         </p:spPr>
         <p:txBody>
-          <a:bodyPr wrap="square" anchor="ctr" lIns="25400" rIns="25400" tIns="12700" bIns="12700">
+          <a:bodyPr wrap="square" anchor="ctr" lIns="25400" rIns="25400" tIns="25400" bIns="25400">
             <a:spAutoFit/>
           </a:bodyPr>
           <a:lstStyle/>
@@ -6310,7 +7140,7 @@
           <a:noFill/>
         </p:spPr>
         <p:txBody>
-          <a:bodyPr wrap="square" anchor="ctr" lIns="25400" rIns="25400" tIns="12700" bIns="12700">
+          <a:bodyPr wrap="square" anchor="ctr" lIns="25400" rIns="25400" tIns="25400" bIns="25400">
             <a:spAutoFit/>
           </a:bodyPr>
           <a:lstStyle/>
@@ -6349,7 +7179,7 @@
           <a:noFill/>
         </p:spPr>
         <p:txBody>
-          <a:bodyPr wrap="square" anchor="ctr" lIns="25400" rIns="25400" tIns="12700" bIns="12700">
+          <a:bodyPr wrap="square" anchor="ctr" lIns="25400" rIns="25400" tIns="25400" bIns="25400">
             <a:spAutoFit/>
           </a:bodyPr>
           <a:lstStyle/>
@@ -6434,7 +7264,7 @@
           <a:noFill/>
         </p:spPr>
         <p:txBody>
-          <a:bodyPr wrap="square" anchor="ctr" lIns="25400" rIns="25400" tIns="12700" bIns="12700">
+          <a:bodyPr wrap="square" anchor="ctr" lIns="25400" rIns="25400" tIns="25400" bIns="25400">
             <a:normAutofit/>
           </a:bodyPr>
           <a:lstStyle/>
@@ -6519,7 +7349,7 @@
           <a:noFill/>
         </p:spPr>
         <p:txBody>
-          <a:bodyPr wrap="square" anchor="ctr" lIns="25400" rIns="25400" tIns="12700" bIns="12700">
+          <a:bodyPr wrap="square" anchor="ctr" lIns="25400" rIns="25400" tIns="25400" bIns="25400">
             <a:normAutofit/>
           </a:bodyPr>
           <a:lstStyle/>
@@ -6604,7 +7434,7 @@
           <a:noFill/>
         </p:spPr>
         <p:txBody>
-          <a:bodyPr wrap="square" anchor="ctr" lIns="25400" rIns="25400" tIns="12700" bIns="12700">
+          <a:bodyPr wrap="square" anchor="ctr" lIns="25400" rIns="25400" tIns="25400" bIns="25400">
             <a:normAutofit/>
           </a:bodyPr>
           <a:lstStyle/>
@@ -6689,7 +7519,7 @@
           <a:noFill/>
         </p:spPr>
         <p:txBody>
-          <a:bodyPr wrap="square" anchor="ctr" lIns="25400" rIns="25400" tIns="12700" bIns="12700">
+          <a:bodyPr wrap="square" anchor="ctr" lIns="25400" rIns="25400" tIns="25400" bIns="25400">
             <a:normAutofit/>
           </a:bodyPr>
           <a:lstStyle/>
@@ -6774,7 +7604,7 @@
           <a:noFill/>
         </p:spPr>
         <p:txBody>
-          <a:bodyPr wrap="square" anchor="ctr" lIns="25400" rIns="25400" tIns="12700" bIns="12700">
+          <a:bodyPr wrap="square" anchor="ctr" lIns="25400" rIns="25400" tIns="25400" bIns="25400">
             <a:normAutofit/>
           </a:bodyPr>
           <a:lstStyle/>
@@ -6859,7 +7689,7 @@
           <a:noFill/>
         </p:spPr>
         <p:txBody>
-          <a:bodyPr wrap="square" anchor="ctr" lIns="25400" rIns="25400" tIns="12700" bIns="12700">
+          <a:bodyPr wrap="square" anchor="ctr" lIns="25400" rIns="25400" tIns="25400" bIns="25400">
             <a:normAutofit/>
           </a:bodyPr>
           <a:lstStyle/>
@@ -6944,7 +7774,7 @@
           <a:noFill/>
         </p:spPr>
         <p:txBody>
-          <a:bodyPr wrap="square" anchor="ctr" lIns="25400" rIns="25400" tIns="12700" bIns="12700">
+          <a:bodyPr wrap="square" anchor="ctr" lIns="25400" rIns="25400" tIns="25400" bIns="25400">
             <a:normAutofit/>
           </a:bodyPr>
           <a:lstStyle/>
@@ -7029,7 +7859,7 @@
           <a:noFill/>
         </p:spPr>
         <p:txBody>
-          <a:bodyPr wrap="square" anchor="ctr" lIns="25400" rIns="25400" tIns="12700" bIns="12700">
+          <a:bodyPr wrap="square" anchor="ctr" lIns="25400" rIns="25400" tIns="25400" bIns="25400">
             <a:normAutofit/>
           </a:bodyPr>
           <a:lstStyle/>
@@ -7114,7 +7944,7 @@
           <a:noFill/>
         </p:spPr>
         <p:txBody>
-          <a:bodyPr wrap="square" anchor="ctr" lIns="25400" rIns="25400" tIns="12700" bIns="12700">
+          <a:bodyPr wrap="square" anchor="ctr" lIns="25400" rIns="25400" tIns="25400" bIns="25400">
             <a:normAutofit/>
           </a:bodyPr>
           <a:lstStyle/>
@@ -7199,7 +8029,7 @@
           <a:noFill/>
         </p:spPr>
         <p:txBody>
-          <a:bodyPr wrap="square" anchor="ctr" lIns="25400" rIns="25400" tIns="12700" bIns="12700">
+          <a:bodyPr wrap="square" anchor="ctr" lIns="25400" rIns="25400" tIns="25400" bIns="25400">
             <a:normAutofit/>
           </a:bodyPr>
           <a:lstStyle/>
@@ -7284,7 +8114,7 @@
           <a:noFill/>
         </p:spPr>
         <p:txBody>
-          <a:bodyPr wrap="square" anchor="ctr" lIns="25400" rIns="25400" tIns="12700" bIns="12700">
+          <a:bodyPr wrap="square" anchor="ctr" lIns="25400" rIns="25400" tIns="25400" bIns="25400">
             <a:normAutofit/>
           </a:bodyPr>
           <a:lstStyle/>
@@ -7369,7 +8199,7 @@
           <a:noFill/>
         </p:spPr>
         <p:txBody>
-          <a:bodyPr wrap="square" anchor="ctr" lIns="25400" rIns="25400" tIns="12700" bIns="12700">
+          <a:bodyPr wrap="square" anchor="ctr" lIns="25400" rIns="25400" tIns="25400" bIns="25400">
             <a:normAutofit/>
           </a:bodyPr>
           <a:lstStyle/>
@@ -7454,7 +8284,7 @@
           <a:noFill/>
         </p:spPr>
         <p:txBody>
-          <a:bodyPr wrap="square" anchor="ctr" lIns="25400" rIns="25400" tIns="12700" bIns="12700">
+          <a:bodyPr wrap="square" anchor="ctr" lIns="25400" rIns="25400" tIns="25400" bIns="25400">
             <a:normAutofit/>
           </a:bodyPr>
           <a:lstStyle/>
@@ -7539,7 +8369,7 @@
           <a:noFill/>
         </p:spPr>
         <p:txBody>
-          <a:bodyPr wrap="square" anchor="ctr" lIns="25400" rIns="25400" tIns="12700" bIns="12700">
+          <a:bodyPr wrap="square" anchor="ctr" lIns="25400" rIns="25400" tIns="25400" bIns="25400">
             <a:normAutofit/>
           </a:bodyPr>
           <a:lstStyle/>
@@ -7624,7 +8454,7 @@
           <a:noFill/>
         </p:spPr>
         <p:txBody>
-          <a:bodyPr wrap="square" anchor="ctr" lIns="25400" rIns="25400" tIns="12700" bIns="12700">
+          <a:bodyPr wrap="square" anchor="ctr" lIns="25400" rIns="25400" tIns="25400" bIns="25400">
             <a:normAutofit/>
           </a:bodyPr>
           <a:lstStyle/>
@@ -7709,7 +8539,7 @@
           <a:noFill/>
         </p:spPr>
         <p:txBody>
-          <a:bodyPr wrap="square" anchor="ctr" lIns="25400" rIns="25400" tIns="12700" bIns="12700">
+          <a:bodyPr wrap="square" anchor="ctr" lIns="25400" rIns="25400" tIns="25400" bIns="25400">
             <a:normAutofit/>
           </a:bodyPr>
           <a:lstStyle/>
@@ -7794,7 +8624,7 @@
           <a:noFill/>
         </p:spPr>
         <p:txBody>
-          <a:bodyPr wrap="square" anchor="ctr" lIns="25400" rIns="25400" tIns="12700" bIns="12700">
+          <a:bodyPr wrap="square" anchor="ctr" lIns="25400" rIns="25400" tIns="25400" bIns="25400">
             <a:normAutofit/>
           </a:bodyPr>
           <a:lstStyle/>
@@ -7879,7 +8709,7 @@
           <a:noFill/>
         </p:spPr>
         <p:txBody>
-          <a:bodyPr wrap="square" anchor="ctr" lIns="25400" rIns="25400" tIns="12700" bIns="12700">
+          <a:bodyPr wrap="square" anchor="ctr" lIns="25400" rIns="25400" tIns="25400" bIns="25400">
             <a:normAutofit/>
           </a:bodyPr>
           <a:lstStyle/>
@@ -7964,7 +8794,7 @@
           <a:noFill/>
         </p:spPr>
         <p:txBody>
-          <a:bodyPr wrap="square" anchor="ctr" lIns="25400" rIns="25400" tIns="12700" bIns="12700">
+          <a:bodyPr wrap="square" anchor="ctr" lIns="25400" rIns="25400" tIns="25400" bIns="25400">
             <a:normAutofit/>
           </a:bodyPr>
           <a:lstStyle/>
@@ -8049,7 +8879,7 @@
           <a:noFill/>
         </p:spPr>
         <p:txBody>
-          <a:bodyPr wrap="square" anchor="ctr" lIns="25400" rIns="25400" tIns="12700" bIns="12700">
+          <a:bodyPr wrap="square" anchor="ctr" lIns="25400" rIns="25400" tIns="25400" bIns="25400">
             <a:normAutofit/>
           </a:bodyPr>
           <a:lstStyle/>
@@ -8134,7 +8964,7 @@
           <a:noFill/>
         </p:spPr>
         <p:txBody>
-          <a:bodyPr wrap="square" anchor="ctr" lIns="25400" rIns="25400" tIns="12700" bIns="12700">
+          <a:bodyPr wrap="square" anchor="ctr" lIns="25400" rIns="25400" tIns="25400" bIns="25400">
             <a:normAutofit/>
           </a:bodyPr>
           <a:lstStyle/>
@@ -8219,7 +9049,7 @@
           <a:noFill/>
         </p:spPr>
         <p:txBody>
-          <a:bodyPr wrap="square" anchor="ctr" lIns="25400" rIns="25400" tIns="12700" bIns="12700">
+          <a:bodyPr wrap="square" anchor="ctr" lIns="25400" rIns="25400" tIns="25400" bIns="25400">
             <a:normAutofit/>
           </a:bodyPr>
           <a:lstStyle/>
@@ -8304,7 +9134,7 @@
           <a:noFill/>
         </p:spPr>
         <p:txBody>
-          <a:bodyPr wrap="square" anchor="ctr" lIns="25400" rIns="25400" tIns="12700" bIns="12700">
+          <a:bodyPr wrap="square" anchor="ctr" lIns="25400" rIns="25400" tIns="25400" bIns="25400">
             <a:normAutofit/>
           </a:bodyPr>
           <a:lstStyle/>
@@ -8389,7 +9219,7 @@
           <a:noFill/>
         </p:spPr>
         <p:txBody>
-          <a:bodyPr wrap="square" anchor="ctr" lIns="25400" rIns="25400" tIns="12700" bIns="12700">
+          <a:bodyPr wrap="square" anchor="ctr" lIns="25400" rIns="25400" tIns="25400" bIns="25400">
             <a:normAutofit/>
           </a:bodyPr>
           <a:lstStyle/>
@@ -8474,7 +9304,7 @@
           <a:noFill/>
         </p:spPr>
         <p:txBody>
-          <a:bodyPr wrap="square" anchor="ctr" lIns="25400" rIns="25400" tIns="12700" bIns="12700">
+          <a:bodyPr wrap="square" anchor="ctr" lIns="25400" rIns="25400" tIns="25400" bIns="25400">
             <a:normAutofit/>
           </a:bodyPr>
           <a:lstStyle/>
@@ -8559,7 +9389,7 @@
           <a:noFill/>
         </p:spPr>
         <p:txBody>
-          <a:bodyPr wrap="square" anchor="ctr" lIns="25400" rIns="25400" tIns="12700" bIns="12700">
+          <a:bodyPr wrap="square" anchor="ctr" lIns="25400" rIns="25400" tIns="25400" bIns="25400">
             <a:normAutofit/>
           </a:bodyPr>
           <a:lstStyle/>
@@ -8644,7 +9474,7 @@
           <a:noFill/>
         </p:spPr>
         <p:txBody>
-          <a:bodyPr wrap="square" anchor="ctr" lIns="25400" rIns="25400" tIns="12700" bIns="12700">
+          <a:bodyPr wrap="square" anchor="ctr" lIns="25400" rIns="25400" tIns="25400" bIns="25400">
             <a:normAutofit/>
           </a:bodyPr>
           <a:lstStyle/>
@@ -8729,7 +9559,7 @@
           <a:noFill/>
         </p:spPr>
         <p:txBody>
-          <a:bodyPr wrap="square" anchor="ctr" lIns="25400" rIns="25400" tIns="12700" bIns="12700">
+          <a:bodyPr wrap="square" anchor="ctr" lIns="25400" rIns="25400" tIns="25400" bIns="25400">
             <a:normAutofit/>
           </a:bodyPr>
           <a:lstStyle/>
@@ -8814,7 +9644,7 @@
           <a:noFill/>
         </p:spPr>
         <p:txBody>
-          <a:bodyPr wrap="square" anchor="ctr" lIns="25400" rIns="25400" tIns="12700" bIns="12700">
+          <a:bodyPr wrap="square" anchor="ctr" lIns="25400" rIns="25400" tIns="25400" bIns="25400">
             <a:normAutofit/>
           </a:bodyPr>
           <a:lstStyle/>
@@ -8899,7 +9729,7 @@
           <a:noFill/>
         </p:spPr>
         <p:txBody>
-          <a:bodyPr wrap="square" anchor="ctr" lIns="25400" rIns="25400" tIns="12700" bIns="12700">
+          <a:bodyPr wrap="square" anchor="ctr" lIns="25400" rIns="25400" tIns="25400" bIns="25400">
             <a:normAutofit/>
           </a:bodyPr>
           <a:lstStyle/>
@@ -8984,7 +9814,7 @@
           <a:noFill/>
         </p:spPr>
         <p:txBody>
-          <a:bodyPr wrap="square" anchor="ctr" lIns="25400" rIns="25400" tIns="12700" bIns="12700">
+          <a:bodyPr wrap="square" anchor="ctr" lIns="25400" rIns="25400" tIns="25400" bIns="25400">
             <a:normAutofit/>
           </a:bodyPr>
           <a:lstStyle/>
@@ -9069,7 +9899,7 @@
           <a:noFill/>
         </p:spPr>
         <p:txBody>
-          <a:bodyPr wrap="square" anchor="ctr" lIns="25400" rIns="25400" tIns="12700" bIns="12700">
+          <a:bodyPr wrap="square" anchor="ctr" lIns="25400" rIns="25400" tIns="25400" bIns="25400">
             <a:normAutofit/>
           </a:bodyPr>
           <a:lstStyle/>
@@ -9108,7 +9938,7 @@
           <a:noFill/>
         </p:spPr>
         <p:txBody>
-          <a:bodyPr wrap="square" anchor="t" lIns="25400" rIns="25400" tIns="12700" bIns="12700">
+          <a:bodyPr wrap="square" anchor="t" lIns="25400" rIns="25400" tIns="25400" bIns="25400">
             <a:spAutoFit/>
           </a:bodyPr>
           <a:lstStyle/>
@@ -9193,7 +10023,7 @@
           <a:noFill/>
         </p:spPr>
         <p:txBody>
-          <a:bodyPr wrap="square" anchor="ctr" lIns="25400" rIns="25400" tIns="12700" bIns="12700">
+          <a:bodyPr wrap="square" anchor="ctr" lIns="25400" rIns="25400" tIns="25400" bIns="25400">
             <a:normAutofit/>
           </a:bodyPr>
           <a:lstStyle/>
@@ -9278,7 +10108,7 @@
           <a:noFill/>
         </p:spPr>
         <p:txBody>
-          <a:bodyPr wrap="square" anchor="ctr" lIns="25400" rIns="25400" tIns="12700" bIns="12700">
+          <a:bodyPr wrap="square" anchor="ctr" lIns="25400" rIns="25400" tIns="25400" bIns="25400">
             <a:normAutofit/>
           </a:bodyPr>
           <a:lstStyle/>
@@ -9363,7 +10193,7 @@
           <a:noFill/>
         </p:spPr>
         <p:txBody>
-          <a:bodyPr wrap="square" anchor="ctr" lIns="25400" rIns="25400" tIns="12700" bIns="12700">
+          <a:bodyPr wrap="square" anchor="ctr" lIns="25400" rIns="25400" tIns="25400" bIns="25400">
             <a:normAutofit/>
           </a:bodyPr>
           <a:lstStyle/>
@@ -9448,7 +10278,7 @@
           <a:noFill/>
         </p:spPr>
         <p:txBody>
-          <a:bodyPr wrap="square" anchor="ctr" lIns="25400" rIns="25400" tIns="12700" bIns="12700">
+          <a:bodyPr wrap="square" anchor="ctr" lIns="25400" rIns="25400" tIns="25400" bIns="25400">
             <a:normAutofit/>
           </a:bodyPr>
           <a:lstStyle/>
@@ -9487,7 +10317,7 @@
           <a:noFill/>
         </p:spPr>
         <p:txBody>
-          <a:bodyPr wrap="square" anchor="t" lIns="25400" rIns="25400" tIns="12700" bIns="12700">
+          <a:bodyPr wrap="square" anchor="t" lIns="25400" rIns="25400" tIns="25400" bIns="25400">
             <a:spAutoFit/>
           </a:bodyPr>
           <a:lstStyle/>
@@ -9526,7 +10356,7 @@
           <a:noFill/>
         </p:spPr>
         <p:txBody>
-          <a:bodyPr wrap="square" anchor="t" lIns="25400" rIns="25400" tIns="12700" bIns="12700">
+          <a:bodyPr wrap="square" anchor="t" lIns="25400" rIns="25400" tIns="25400" bIns="25400">
             <a:spAutoFit/>
           </a:bodyPr>
           <a:lstStyle/>
@@ -9565,7 +10395,7 @@
           <a:noFill/>
         </p:spPr>
         <p:txBody>
-          <a:bodyPr wrap="square" anchor="t" lIns="25400" rIns="25400" tIns="12700" bIns="12700">
+          <a:bodyPr wrap="square" anchor="t" lIns="25400" rIns="25400" tIns="25400" bIns="25400">
             <a:spAutoFit/>
           </a:bodyPr>
           <a:lstStyle/>
@@ -9666,7 +10496,7 @@
           <a:noFill/>
         </p:spPr>
         <p:txBody>
-          <a:bodyPr wrap="square" anchor="t" lIns="25400" rIns="25400" tIns="12700" bIns="12700">
+          <a:bodyPr wrap="square" anchor="t" lIns="25400" rIns="25400" tIns="25400" bIns="25400">
             <a:spAutoFit/>
           </a:bodyPr>
           <a:lstStyle/>
@@ -9683,7 +10513,7 @@
                 </a:solidFill>
                 <a:latin typeface="Inter"/>
               </a:rPr>
-              <a:t>PROCESS FLOW · TO-BE</a:t>
+              <a:t>PROCESS FLOW</a:t>
             </a:r>
           </a:p>
         </p:txBody>
@@ -9705,7 +10535,7 @@
           <a:noFill/>
         </p:spPr>
         <p:txBody>
-          <a:bodyPr wrap="square" anchor="t" lIns="25400" rIns="25400" tIns="12700" bIns="12700">
+          <a:bodyPr wrap="square" anchor="t" lIns="25400" rIns="25400" tIns="25400" bIns="25400">
             <a:spAutoFit/>
           </a:bodyPr>
           <a:lstStyle/>
@@ -9736,7 +10566,7 @@
         <p:spPr>
           <a:xfrm>
             <a:off x="571500" y="1003300"/>
-            <a:ext cx="10922000" cy="317500"/>
+            <a:ext cx="10922000" cy="254000"/>
           </a:xfrm>
           <a:prstGeom prst="rect">
             <a:avLst/>
@@ -9744,7 +10574,7 @@
           <a:noFill/>
         </p:spPr>
         <p:txBody>
-          <a:bodyPr wrap="square" anchor="t" lIns="25400" rIns="25400" tIns="12700" bIns="12700">
+          <a:bodyPr wrap="square" anchor="t" lIns="25400" rIns="25400" tIns="25400" bIns="25400">
             <a:spAutoFit/>
           </a:bodyPr>
           <a:lstStyle/>
@@ -9761,7 +10591,7 @@
                 </a:solidFill>
                 <a:latin typeface="Inter"/>
               </a:rPr>
-              <a:t>A swimlane map of the proposed (To-Be) process — read against today's As-Is to spot what to optimise, and use it to design the prototypes and screens.</a:t>
+              <a:t>A swimlane map of the proposed process.</a:t>
             </a:r>
           </a:p>
         </p:txBody>
@@ -10274,8 +11104,8 @@
         </p:nvSpPr>
         <p:spPr>
           <a:xfrm>
-            <a:off x="1397000" y="1866899"/>
-            <a:ext cx="1016000" cy="457200"/>
+            <a:off x="1435100" y="1854200"/>
+            <a:ext cx="1041400" cy="482600"/>
           </a:xfrm>
           <a:prstGeom prst="roundRect">
             <a:avLst>
@@ -10283,7 +11113,7 @@
             </a:avLst>
           </a:prstGeom>
           <a:solidFill>
-            <a:srgbClr val="FBF7F1"/>
+            <a:srgbClr val="FFFFFF"/>
           </a:solidFill>
           <a:ln w="12700">
             <a:solidFill>
@@ -10322,8 +11152,8 @@
         </p:nvSpPr>
         <p:spPr>
           <a:xfrm>
-            <a:off x="1460500" y="1866899"/>
-            <a:ext cx="889000" cy="457200"/>
+            <a:off x="1498600" y="1854200"/>
+            <a:ext cx="914400" cy="482600"/>
           </a:xfrm>
           <a:prstGeom prst="rect">
             <a:avLst/>
@@ -10331,7 +11161,7 @@
           <a:noFill/>
         </p:spPr>
         <p:txBody>
-          <a:bodyPr wrap="square" anchor="ctr" lIns="25400" rIns="25400" tIns="12700" bIns="12700">
+          <a:bodyPr wrap="square" anchor="ctr" lIns="25400" rIns="25400" tIns="25400" bIns="25400">
             <a:normAutofit/>
           </a:bodyPr>
           <a:lstStyle/>
@@ -10361,7 +11191,94 @@
         </p:nvSpPr>
         <p:spPr>
           <a:xfrm>
-            <a:off x="1397000" y="4362450"/>
+            <a:off x="10775950" y="1854200"/>
+            <a:ext cx="952500" cy="482600"/>
+          </a:xfrm>
+          <a:prstGeom prst="roundRect">
+            <a:avLst>
+              <a:gd name="adj" fmla="val 50000"/>
+            </a:avLst>
+          </a:prstGeom>
+          <a:solidFill>
+            <a:srgbClr val="FFFFFF"/>
+          </a:solidFill>
+          <a:ln w="12700">
+            <a:solidFill>
+              <a:srgbClr val="C98A5E"/>
+            </a:solidFill>
+          </a:ln>
+          <a:effectLst/>
+        </p:spPr>
+        <p:style>
+          <a:lnRef idx="1">
+            <a:schemeClr val="accent1"/>
+          </a:lnRef>
+          <a:fillRef idx="3">
+            <a:schemeClr val="accent1"/>
+          </a:fillRef>
+          <a:effectRef idx="2">
+            <a:schemeClr val="accent1"/>
+          </a:effectRef>
+          <a:fontRef idx="minor">
+            <a:schemeClr val="lt1"/>
+          </a:fontRef>
+        </p:style>
+        <p:txBody>
+          <a:bodyPr rtlCol="0" anchor="ctr"/>
+          <a:lstStyle/>
+          <a:p>
+            <a:pPr algn="ctr"/>
+          </a:p>
+        </p:txBody>
+      </p:sp>
+      <p:sp>
+        <p:nvSpPr>
+          <p:cNvPr id="21" name="TextBox 20"/>
+          <p:cNvSpPr txBox="1"/>
+          <p:nvPr/>
+        </p:nvSpPr>
+        <p:spPr>
+          <a:xfrm>
+            <a:off x="10839450" y="1854200"/>
+            <a:ext cx="825500" cy="482600"/>
+          </a:xfrm>
+          <a:prstGeom prst="rect">
+            <a:avLst/>
+          </a:prstGeom>
+          <a:noFill/>
+        </p:spPr>
+        <p:txBody>
+          <a:bodyPr wrap="square" anchor="ctr" lIns="25400" rIns="25400" tIns="25400" bIns="25400">
+            <a:normAutofit/>
+          </a:bodyPr>
+          <a:lstStyle/>
+          <a:p>
+            <a:pPr algn="ctr">
+              <a:spcAft>
+                <a:spcPts val="0"/>
+              </a:spcAft>
+            </a:pPr>
+            <a:r>
+              <a:rPr sz="625" b="1">
+                <a:solidFill>
+                  <a:srgbClr val="142433"/>
+                </a:solidFill>
+                <a:latin typeface="Inter"/>
+              </a:rPr>
+              <a:t>Ongoing care</a:t>
+            </a:r>
+          </a:p>
+        </p:txBody>
+      </p:sp>
+      <p:sp>
+        <p:nvSpPr>
+          <p:cNvPr id="22" name="Rounded Rectangle 21"/>
+          <p:cNvSpPr/>
+          <p:nvPr/>
+        </p:nvSpPr>
+        <p:spPr>
+          <a:xfrm>
+            <a:off x="2540000" y="1873250"/>
             <a:ext cx="1016000" cy="444500"/>
           </a:xfrm>
           <a:prstGeom prst="roundRect">
@@ -10403,13 +11320,13 @@
       </p:sp>
       <p:sp>
         <p:nvSpPr>
-          <p:cNvPr id="21" name="TextBox 20"/>
+          <p:cNvPr id="23" name="TextBox 22"/>
           <p:cNvSpPr txBox="1"/>
           <p:nvPr/>
         </p:nvSpPr>
         <p:spPr>
           <a:xfrm>
-            <a:off x="1460500" y="4362450"/>
+            <a:off x="2603500" y="1873250"/>
             <a:ext cx="889000" cy="444500"/>
           </a:xfrm>
           <a:prstGeom prst="rect">
@@ -10418,7 +11335,7 @@
           <a:noFill/>
         </p:spPr>
         <p:txBody>
-          <a:bodyPr wrap="square" anchor="ctr" lIns="25400" rIns="25400" tIns="12700" bIns="12700">
+          <a:bodyPr wrap="square" anchor="ctr" lIns="25400" rIns="25400" tIns="25400" bIns="25400">
             <a:normAutofit/>
           </a:bodyPr>
           <a:lstStyle/>
@@ -10435,20 +11352,20 @@
                 </a:solidFill>
                 <a:latin typeface="Inter"/>
               </a:rPr>
-              <a:t>Capture enquiry + smart intake</a:t>
-            </a:r>
-          </a:p>
-        </p:txBody>
-      </p:sp>
-      <p:sp>
-        <p:nvSpPr>
-          <p:cNvPr id="22" name="Rounded Rectangle 21"/>
+              <a:t>Complete intake &amp; consent</a:t>
+            </a:r>
+          </a:p>
+        </p:txBody>
+      </p:sp>
+      <p:sp>
+        <p:nvSpPr>
+          <p:cNvPr id="24" name="Rounded Rectangle 23"/>
           <p:cNvSpPr/>
           <p:nvPr/>
         </p:nvSpPr>
         <p:spPr>
           <a:xfrm>
-            <a:off x="2362200" y="1873250"/>
+            <a:off x="9626600" y="1873250"/>
             <a:ext cx="1016000" cy="444500"/>
           </a:xfrm>
           <a:prstGeom prst="roundRect">
@@ -10490,13 +11407,13 @@
       </p:sp>
       <p:sp>
         <p:nvSpPr>
-          <p:cNvPr id="23" name="TextBox 22"/>
+          <p:cNvPr id="25" name="TextBox 24"/>
           <p:cNvSpPr txBox="1"/>
           <p:nvPr/>
         </p:nvSpPr>
         <p:spPr>
           <a:xfrm>
-            <a:off x="2425700" y="1873250"/>
+            <a:off x="9690100" y="1873250"/>
             <a:ext cx="889000" cy="444500"/>
           </a:xfrm>
           <a:prstGeom prst="rect">
@@ -10505,7 +11422,7 @@
           <a:noFill/>
         </p:spPr>
         <p:txBody>
-          <a:bodyPr wrap="square" anchor="ctr" lIns="25400" rIns="25400" tIns="12700" bIns="12700">
+          <a:bodyPr wrap="square" anchor="ctr" lIns="25400" rIns="25400" tIns="25400" bIns="25400">
             <a:normAutofit/>
           </a:bodyPr>
           <a:lstStyle/>
@@ -10522,20 +11439,77 @@
                 </a:solidFill>
                 <a:latin typeface="Inter"/>
               </a:rPr>
-              <a:t>Complete intake &amp; consent</a:t>
-            </a:r>
-          </a:p>
-        </p:txBody>
-      </p:sp>
-      <p:sp>
-        <p:nvSpPr>
-          <p:cNvPr id="24" name="Rounded Rectangle 23"/>
+              <a:t>Receive summary (app)</a:t>
+            </a:r>
+          </a:p>
+        </p:txBody>
+      </p:sp>
+      <p:sp>
+        <p:nvSpPr>
+          <p:cNvPr id="26" name="Diamond 25"/>
           <p:cNvSpPr/>
           <p:nvPr/>
         </p:nvSpPr>
         <p:spPr>
           <a:xfrm>
-            <a:off x="3327400" y="4362450"/>
+            <a:off x="6038850" y="3009900"/>
+            <a:ext cx="1092200" cy="660400"/>
+          </a:xfrm>
+          <a:prstGeom prst="diamond">
+            <a:avLst/>
+          </a:prstGeom>
+          <a:solidFill>
+            <a:srgbClr val="FFF0E6"/>
+          </a:solidFill>
+          <a:ln w="19050">
+            <a:solidFill>
+              <a:srgbClr val="C45A1A"/>
+            </a:solidFill>
+          </a:ln>
+          <a:effectLst/>
+        </p:spPr>
+        <p:style>
+          <a:lnRef idx="1">
+            <a:schemeClr val="accent1"/>
+          </a:lnRef>
+          <a:fillRef idx="3">
+            <a:schemeClr val="accent1"/>
+          </a:fillRef>
+          <a:effectRef idx="2">
+            <a:schemeClr val="accent1"/>
+          </a:effectRef>
+          <a:fontRef idx="minor">
+            <a:schemeClr val="lt1"/>
+          </a:fontRef>
+        </p:style>
+        <p:txBody>
+          <a:bodyPr rtlCol="0" anchor="ctr" wrap="square" lIns="25400" rIns="25400" tIns="25400" bIns="25400">
+            <a:normAutofit/>
+          </a:bodyPr>
+          <a:lstStyle/>
+          <a:p>
+            <a:pPr algn="ctr"/>
+            <a:r>
+              <a:rPr sz="625" b="1">
+                <a:solidFill>
+                  <a:srgbClr val="142433"/>
+                </a:solidFill>
+                <a:latin typeface="Inter"/>
+              </a:rPr>
+              <a:t>Ongoing therapy?</a:t>
+            </a:r>
+          </a:p>
+        </p:txBody>
+      </p:sp>
+      <p:sp>
+        <p:nvSpPr>
+          <p:cNvPr id="27" name="Rounded Rectangle 26"/>
+          <p:cNvSpPr/>
+          <p:nvPr/>
+        </p:nvSpPr>
+        <p:spPr>
+          <a:xfrm>
+            <a:off x="3613150" y="3117850"/>
             <a:ext cx="1016000" cy="444500"/>
           </a:xfrm>
           <a:prstGeom prst="roundRect">
@@ -10577,13 +11551,13 @@
       </p:sp>
       <p:sp>
         <p:nvSpPr>
-          <p:cNvPr id="25" name="TextBox 24"/>
+          <p:cNvPr id="28" name="TextBox 27"/>
           <p:cNvSpPr txBox="1"/>
           <p:nvPr/>
         </p:nvSpPr>
         <p:spPr>
           <a:xfrm>
-            <a:off x="3390900" y="4362450"/>
+            <a:off x="3676649" y="3117850"/>
             <a:ext cx="889000" cy="444500"/>
           </a:xfrm>
           <a:prstGeom prst="rect">
@@ -10592,7 +11566,7 @@
           <a:noFill/>
         </p:spPr>
         <p:txBody>
-          <a:bodyPr wrap="square" anchor="ctr" lIns="25400" rIns="25400" tIns="12700" bIns="12700">
+          <a:bodyPr wrap="square" anchor="ctr" lIns="25400" rIns="25400" tIns="25400" bIns="25400">
             <a:normAutofit/>
           </a:bodyPr>
           <a:lstStyle/>
@@ -10609,20 +11583,20 @@
                 </a:solidFill>
                 <a:latin typeface="Inter"/>
               </a:rPr>
-              <a:t>AI prep brief (DRAFT)</a:t>
-            </a:r>
-          </a:p>
-        </p:txBody>
-      </p:sp>
-      <p:sp>
-        <p:nvSpPr>
-          <p:cNvPr id="26" name="Rounded Rectangle 25"/>
+              <a:t>Review overview + prep</a:t>
+            </a:r>
+          </a:p>
+        </p:txBody>
+      </p:sp>
+      <p:sp>
+        <p:nvSpPr>
+          <p:cNvPr id="29" name="Rounded Rectangle 28"/>
           <p:cNvSpPr/>
           <p:nvPr/>
         </p:nvSpPr>
         <p:spPr>
           <a:xfrm>
-            <a:off x="4292600" y="3117850"/>
+            <a:off x="4826000" y="3117850"/>
             <a:ext cx="1016000" cy="444500"/>
           </a:xfrm>
           <a:prstGeom prst="roundRect">
@@ -10664,13 +11638,13 @@
       </p:sp>
       <p:sp>
         <p:nvSpPr>
-          <p:cNvPr id="27" name="TextBox 26"/>
+          <p:cNvPr id="30" name="TextBox 29"/>
           <p:cNvSpPr txBox="1"/>
           <p:nvPr/>
         </p:nvSpPr>
         <p:spPr>
           <a:xfrm>
-            <a:off x="4356100" y="3117850"/>
+            <a:off x="4889500" y="3117850"/>
             <a:ext cx="889000" cy="444500"/>
           </a:xfrm>
           <a:prstGeom prst="rect">
@@ -10679,7 +11653,7 @@
           <a:noFill/>
         </p:spPr>
         <p:txBody>
-          <a:bodyPr wrap="square" anchor="ctr" lIns="25400" rIns="25400" tIns="12700" bIns="12700">
+          <a:bodyPr wrap="square" anchor="ctr" lIns="25400" rIns="25400" tIns="25400" bIns="25400">
             <a:normAutofit/>
           </a:bodyPr>
           <a:lstStyle/>
@@ -10696,20 +11670,20 @@
                 </a:solidFill>
                 <a:latin typeface="Inter"/>
               </a:rPr>
-              <a:t>Review overview + prep</a:t>
-            </a:r>
-          </a:p>
-        </p:txBody>
-      </p:sp>
-      <p:sp>
-        <p:nvSpPr>
-          <p:cNvPr id="28" name="Rounded Rectangle 27"/>
+              <a:t>Consultation (~20 min)</a:t>
+            </a:r>
+          </a:p>
+        </p:txBody>
+      </p:sp>
+      <p:sp>
+        <p:nvSpPr>
+          <p:cNvPr id="31" name="Rounded Rectangle 30"/>
           <p:cNvSpPr/>
           <p:nvPr/>
         </p:nvSpPr>
         <p:spPr>
           <a:xfrm>
-            <a:off x="4292600" y="5607050"/>
+            <a:off x="7454900" y="3117850"/>
             <a:ext cx="1016000" cy="444500"/>
           </a:xfrm>
           <a:prstGeom prst="roundRect">
@@ -10751,13 +11725,13 @@
       </p:sp>
       <p:sp>
         <p:nvSpPr>
-          <p:cNvPr id="29" name="TextBox 28"/>
+          <p:cNvPr id="32" name="TextBox 31"/>
           <p:cNvSpPr txBox="1"/>
           <p:nvPr/>
         </p:nvSpPr>
         <p:spPr>
           <a:xfrm>
-            <a:off x="4356100" y="5607050"/>
+            <a:off x="7518399" y="3117850"/>
             <a:ext cx="889000" cy="444500"/>
           </a:xfrm>
           <a:prstGeom prst="rect">
@@ -10766,7 +11740,7 @@
           <a:noFill/>
         </p:spPr>
         <p:txBody>
-          <a:bodyPr wrap="square" anchor="ctr" lIns="25400" rIns="25400" tIns="12700" bIns="12700">
+          <a:bodyPr wrap="square" anchor="ctr" lIns="25400" rIns="25400" tIns="25400" bIns="25400">
             <a:normAutofit/>
           </a:bodyPr>
           <a:lstStyle/>
@@ -10783,20 +11757,20 @@
                 </a:solidFill>
                 <a:latin typeface="Inter"/>
               </a:rPr>
-              <a:t>Calendar / video link</a:t>
-            </a:r>
-          </a:p>
-        </p:txBody>
-      </p:sp>
-      <p:sp>
-        <p:nvSpPr>
-          <p:cNvPr id="30" name="Rounded Rectangle 29"/>
+              <a:t>Strategy advice &amp; home tips</a:t>
+            </a:r>
+          </a:p>
+        </p:txBody>
+      </p:sp>
+      <p:sp>
+        <p:nvSpPr>
+          <p:cNvPr id="33" name="Rounded Rectangle 32"/>
           <p:cNvSpPr/>
           <p:nvPr/>
         </p:nvSpPr>
         <p:spPr>
           <a:xfrm>
-            <a:off x="5257800" y="3117850"/>
+            <a:off x="8940800" y="3117850"/>
             <a:ext cx="1016000" cy="444500"/>
           </a:xfrm>
           <a:prstGeom prst="roundRect">
@@ -10838,13 +11812,13 @@
       </p:sp>
       <p:sp>
         <p:nvSpPr>
-          <p:cNvPr id="31" name="TextBox 30"/>
+          <p:cNvPr id="34" name="TextBox 33"/>
           <p:cNvSpPr txBox="1"/>
           <p:nvPr/>
         </p:nvSpPr>
         <p:spPr>
           <a:xfrm>
-            <a:off x="5321300" y="3117850"/>
+            <a:off x="9004300" y="3117850"/>
             <a:ext cx="889000" cy="444500"/>
           </a:xfrm>
           <a:prstGeom prst="rect">
@@ -10853,7 +11827,7 @@
           <a:noFill/>
         </p:spPr>
         <p:txBody>
-          <a:bodyPr wrap="square" anchor="ctr" lIns="25400" rIns="25400" tIns="12700" bIns="12700">
+          <a:bodyPr wrap="square" anchor="ctr" lIns="25400" rIns="25400" tIns="25400" bIns="25400">
             <a:normAutofit/>
           </a:bodyPr>
           <a:lstStyle/>
@@ -10870,77 +11844,20 @@
                 </a:solidFill>
                 <a:latin typeface="Inter"/>
               </a:rPr>
-              <a:t>Consultation (~20 min)</a:t>
-            </a:r>
-          </a:p>
-        </p:txBody>
-      </p:sp>
-      <p:sp>
-        <p:nvSpPr>
-          <p:cNvPr id="32" name="Diamond 31"/>
+              <a:t>Edit &amp; sign plan</a:t>
+            </a:r>
+          </a:p>
+        </p:txBody>
+      </p:sp>
+      <p:sp>
+        <p:nvSpPr>
+          <p:cNvPr id="35" name="Rounded Rectangle 34"/>
           <p:cNvSpPr/>
           <p:nvPr/>
         </p:nvSpPr>
         <p:spPr>
           <a:xfrm>
-            <a:off x="6184900" y="3009900"/>
-            <a:ext cx="1092200" cy="660400"/>
-          </a:xfrm>
-          <a:prstGeom prst="diamond">
-            <a:avLst/>
-          </a:prstGeom>
-          <a:solidFill>
-            <a:srgbClr val="FFF0E6"/>
-          </a:solidFill>
-          <a:ln w="19050">
-            <a:solidFill>
-              <a:srgbClr val="C45A1A"/>
-            </a:solidFill>
-          </a:ln>
-          <a:effectLst/>
-        </p:spPr>
-        <p:style>
-          <a:lnRef idx="1">
-            <a:schemeClr val="accent1"/>
-          </a:lnRef>
-          <a:fillRef idx="3">
-            <a:schemeClr val="accent1"/>
-          </a:fillRef>
-          <a:effectRef idx="2">
-            <a:schemeClr val="accent1"/>
-          </a:effectRef>
-          <a:fontRef idx="minor">
-            <a:schemeClr val="lt1"/>
-          </a:fontRef>
-        </p:style>
-        <p:txBody>
-          <a:bodyPr rtlCol="0" anchor="ctr" wrap="square" lIns="38100" rIns="38100" tIns="12700" bIns="12700">
-            <a:normAutofit/>
-          </a:bodyPr>
-          <a:lstStyle/>
-          <a:p>
-            <a:pPr algn="ctr"/>
-            <a:r>
-              <a:rPr sz="625" b="1">
-                <a:solidFill>
-                  <a:srgbClr val="142433"/>
-                </a:solidFill>
-                <a:latin typeface="Inter"/>
-              </a:rPr>
-              <a:t>Ongoing therapy?</a:t>
-            </a:r>
-          </a:p>
-        </p:txBody>
-      </p:sp>
-      <p:sp>
-        <p:nvSpPr>
-          <p:cNvPr id="33" name="Rounded Rectangle 32"/>
-          <p:cNvSpPr/>
-          <p:nvPr/>
-        </p:nvSpPr>
-        <p:spPr>
-          <a:xfrm>
-            <a:off x="7188200" y="4362450"/>
+            <a:off x="10083800" y="3117850"/>
             <a:ext cx="1016000" cy="444500"/>
           </a:xfrm>
           <a:prstGeom prst="roundRect">
@@ -10982,13 +11899,13 @@
       </p:sp>
       <p:sp>
         <p:nvSpPr>
-          <p:cNvPr id="34" name="TextBox 33"/>
+          <p:cNvPr id="36" name="TextBox 35"/>
           <p:cNvSpPr txBox="1"/>
           <p:nvPr/>
         </p:nvSpPr>
         <p:spPr>
           <a:xfrm>
-            <a:off x="7251700" y="4362450"/>
+            <a:off x="10147300" y="3117850"/>
             <a:ext cx="889000" cy="444500"/>
           </a:xfrm>
           <a:prstGeom prst="rect">
@@ -10997,7 +11914,7 @@
           <a:noFill/>
         </p:spPr>
         <p:txBody>
-          <a:bodyPr wrap="square" anchor="ctr" lIns="25400" rIns="25400" tIns="12700" bIns="12700">
+          <a:bodyPr wrap="square" anchor="ctr" lIns="25400" rIns="25400" tIns="25400" bIns="25400">
             <a:normAutofit/>
           </a:bodyPr>
           <a:lstStyle/>
@@ -11014,20 +11931,20 @@
                 </a:solidFill>
                 <a:latin typeface="Inter"/>
               </a:rPr>
-              <a:t>AI session plan (DRAFT)</a:t>
-            </a:r>
-          </a:p>
-        </p:txBody>
-      </p:sp>
-      <p:sp>
-        <p:nvSpPr>
-          <p:cNvPr id="35" name="Rounded Rectangle 34"/>
+              <a:t>Review &amp; send summary</a:t>
+            </a:r>
+          </a:p>
+        </p:txBody>
+      </p:sp>
+      <p:sp>
+        <p:nvSpPr>
+          <p:cNvPr id="37" name="Rounded Rectangle 36"/>
           <p:cNvSpPr/>
           <p:nvPr/>
         </p:nvSpPr>
         <p:spPr>
           <a:xfrm>
-            <a:off x="7188200" y="3117850"/>
+            <a:off x="1435100" y="4362450"/>
             <a:ext cx="1016000" cy="444500"/>
           </a:xfrm>
           <a:prstGeom prst="roundRect">
@@ -11069,13 +11986,13 @@
       </p:sp>
       <p:sp>
         <p:nvSpPr>
-          <p:cNvPr id="36" name="TextBox 35"/>
+          <p:cNvPr id="38" name="TextBox 37"/>
           <p:cNvSpPr txBox="1"/>
           <p:nvPr/>
         </p:nvSpPr>
         <p:spPr>
           <a:xfrm>
-            <a:off x="7251700" y="3117850"/>
+            <a:off x="1498600" y="4362450"/>
             <a:ext cx="889000" cy="444500"/>
           </a:xfrm>
           <a:prstGeom prst="rect">
@@ -11084,7 +12001,7 @@
           <a:noFill/>
         </p:spPr>
         <p:txBody>
-          <a:bodyPr wrap="square" anchor="ctr" lIns="25400" rIns="25400" tIns="12700" bIns="12700">
+          <a:bodyPr wrap="square" anchor="ctr" lIns="25400" rIns="25400" tIns="25400" bIns="25400">
             <a:normAutofit/>
           </a:bodyPr>
           <a:lstStyle/>
@@ -11101,20 +12018,20 @@
                 </a:solidFill>
                 <a:latin typeface="Inter"/>
               </a:rPr>
-              <a:t>Strategy advice &amp; home tips</a:t>
-            </a:r>
-          </a:p>
-        </p:txBody>
-      </p:sp>
-      <p:sp>
-        <p:nvSpPr>
-          <p:cNvPr id="37" name="Rounded Rectangle 36"/>
+              <a:t>Capture enquiry + smart intake</a:t>
+            </a:r>
+          </a:p>
+        </p:txBody>
+      </p:sp>
+      <p:sp>
+        <p:nvSpPr>
+          <p:cNvPr id="39" name="Rounded Rectangle 38"/>
           <p:cNvSpPr/>
           <p:nvPr/>
         </p:nvSpPr>
         <p:spPr>
           <a:xfrm>
-            <a:off x="8153399" y="3117850"/>
+            <a:off x="2762250" y="4362450"/>
             <a:ext cx="1016000" cy="444500"/>
           </a:xfrm>
           <a:prstGeom prst="roundRect">
@@ -11156,13 +12073,13 @@
       </p:sp>
       <p:sp>
         <p:nvSpPr>
-          <p:cNvPr id="38" name="TextBox 37"/>
+          <p:cNvPr id="40" name="TextBox 39"/>
           <p:cNvSpPr txBox="1"/>
           <p:nvPr/>
         </p:nvSpPr>
         <p:spPr>
           <a:xfrm>
-            <a:off x="8216900" y="3117850"/>
+            <a:off x="2825750" y="4362450"/>
             <a:ext cx="889000" cy="444500"/>
           </a:xfrm>
           <a:prstGeom prst="rect">
@@ -11171,7 +12088,7 @@
           <a:noFill/>
         </p:spPr>
         <p:txBody>
-          <a:bodyPr wrap="square" anchor="ctr" lIns="25400" rIns="25400" tIns="12700" bIns="12700">
+          <a:bodyPr wrap="square" anchor="ctr" lIns="25400" rIns="25400" tIns="25400" bIns="25400">
             <a:normAutofit/>
           </a:bodyPr>
           <a:lstStyle/>
@@ -11188,20 +12105,20 @@
                 </a:solidFill>
                 <a:latin typeface="Inter"/>
               </a:rPr>
-              <a:t>Edit &amp; sign plan</a:t>
-            </a:r>
-          </a:p>
-        </p:txBody>
-      </p:sp>
-      <p:sp>
-        <p:nvSpPr>
-          <p:cNvPr id="39" name="Rounded Rectangle 38"/>
+              <a:t>AI prep brief (DRAFT)</a:t>
+            </a:r>
+          </a:p>
+        </p:txBody>
+      </p:sp>
+      <p:sp>
+        <p:nvSpPr>
+          <p:cNvPr id="41" name="Rounded Rectangle 40"/>
           <p:cNvSpPr/>
           <p:nvPr/>
         </p:nvSpPr>
         <p:spPr>
           <a:xfrm>
-            <a:off x="9118600" y="4362450"/>
+            <a:off x="7188200" y="4362450"/>
             <a:ext cx="1016000" cy="444500"/>
           </a:xfrm>
           <a:prstGeom prst="roundRect">
@@ -11243,13 +12160,13 @@
       </p:sp>
       <p:sp>
         <p:nvSpPr>
-          <p:cNvPr id="40" name="TextBox 39"/>
+          <p:cNvPr id="42" name="TextBox 41"/>
           <p:cNvSpPr txBox="1"/>
           <p:nvPr/>
         </p:nvSpPr>
         <p:spPr>
           <a:xfrm>
-            <a:off x="9182100" y="4362450"/>
+            <a:off x="7251700" y="4362450"/>
             <a:ext cx="889000" cy="444500"/>
           </a:xfrm>
           <a:prstGeom prst="rect">
@@ -11258,7 +12175,7 @@
           <a:noFill/>
         </p:spPr>
         <p:txBody>
-          <a:bodyPr wrap="square" anchor="ctr" lIns="25400" rIns="25400" tIns="12700" bIns="12700">
+          <a:bodyPr wrap="square" anchor="ctr" lIns="25400" rIns="25400" tIns="25400" bIns="25400">
             <a:normAutofit/>
           </a:bodyPr>
           <a:lstStyle/>
@@ -11275,20 +12192,20 @@
                 </a:solidFill>
                 <a:latin typeface="Inter"/>
               </a:rPr>
-              <a:t>AI family summary (DRAFT)</a:t>
-            </a:r>
-          </a:p>
-        </p:txBody>
-      </p:sp>
-      <p:sp>
-        <p:nvSpPr>
-          <p:cNvPr id="41" name="Rounded Rectangle 40"/>
+              <a:t>AI session plan (DRAFT)</a:t>
+            </a:r>
+          </a:p>
+        </p:txBody>
+      </p:sp>
+      <p:sp>
+        <p:nvSpPr>
+          <p:cNvPr id="43" name="Rounded Rectangle 42"/>
           <p:cNvSpPr/>
           <p:nvPr/>
         </p:nvSpPr>
         <p:spPr>
           <a:xfrm>
-            <a:off x="10083800" y="3117850"/>
+            <a:off x="9118600" y="4362450"/>
             <a:ext cx="1016000" cy="444500"/>
           </a:xfrm>
           <a:prstGeom prst="roundRect">
@@ -11330,13 +12247,13 @@
       </p:sp>
       <p:sp>
         <p:nvSpPr>
-          <p:cNvPr id="42" name="TextBox 41"/>
+          <p:cNvPr id="44" name="TextBox 43"/>
           <p:cNvSpPr txBox="1"/>
           <p:nvPr/>
         </p:nvSpPr>
         <p:spPr>
           <a:xfrm>
-            <a:off x="10147300" y="3117850"/>
+            <a:off x="9182100" y="4362450"/>
             <a:ext cx="889000" cy="444500"/>
           </a:xfrm>
           <a:prstGeom prst="rect">
@@ -11345,7 +12262,7 @@
           <a:noFill/>
         </p:spPr>
         <p:txBody>
-          <a:bodyPr wrap="square" anchor="ctr" lIns="25400" rIns="25400" tIns="12700" bIns="12700">
+          <a:bodyPr wrap="square" anchor="ctr" lIns="25400" rIns="25400" tIns="25400" bIns="25400">
             <a:normAutofit/>
           </a:bodyPr>
           <a:lstStyle/>
@@ -11362,20 +12279,20 @@
                 </a:solidFill>
                 <a:latin typeface="Inter"/>
               </a:rPr>
-              <a:t>Review &amp; send summary</a:t>
-            </a:r>
-          </a:p>
-        </p:txBody>
-      </p:sp>
-      <p:sp>
-        <p:nvSpPr>
-          <p:cNvPr id="43" name="Rounded Rectangle 42"/>
+              <a:t>AI family summary (DRAFT)</a:t>
+            </a:r>
+          </a:p>
+        </p:txBody>
+      </p:sp>
+      <p:sp>
+        <p:nvSpPr>
+          <p:cNvPr id="45" name="Rounded Rectangle 44"/>
           <p:cNvSpPr/>
           <p:nvPr/>
         </p:nvSpPr>
         <p:spPr>
           <a:xfrm>
-            <a:off x="9626600" y="1873250"/>
+            <a:off x="10363200" y="4362450"/>
             <a:ext cx="1016000" cy="444500"/>
           </a:xfrm>
           <a:prstGeom prst="roundRect">
@@ -11417,13 +12334,13 @@
       </p:sp>
       <p:sp>
         <p:nvSpPr>
-          <p:cNvPr id="44" name="TextBox 43"/>
+          <p:cNvPr id="46" name="TextBox 45"/>
           <p:cNvSpPr txBox="1"/>
           <p:nvPr/>
         </p:nvSpPr>
         <p:spPr>
           <a:xfrm>
-            <a:off x="9690100" y="1873250"/>
+            <a:off x="10426700" y="4362450"/>
             <a:ext cx="889000" cy="444500"/>
           </a:xfrm>
           <a:prstGeom prst="rect">
@@ -11432,7 +12349,7 @@
           <a:noFill/>
         </p:spPr>
         <p:txBody>
-          <a:bodyPr wrap="square" anchor="ctr" lIns="25400" rIns="25400" tIns="12700" bIns="12700">
+          <a:bodyPr wrap="square" anchor="ctr" lIns="25400" rIns="25400" tIns="25400" bIns="25400">
             <a:normAutofit/>
           </a:bodyPr>
           <a:lstStyle/>
@@ -11449,20 +12366,20 @@
                 </a:solidFill>
                 <a:latin typeface="Inter"/>
               </a:rPr>
-              <a:t>Receive summary (app)</a:t>
-            </a:r>
-          </a:p>
-        </p:txBody>
-      </p:sp>
-      <p:sp>
-        <p:nvSpPr>
-          <p:cNvPr id="45" name="Rounded Rectangle 44"/>
+              <a:t>Carryover + progress portal</a:t>
+            </a:r>
+          </a:p>
+        </p:txBody>
+      </p:sp>
+      <p:sp>
+        <p:nvSpPr>
+          <p:cNvPr id="47" name="Rounded Rectangle 46"/>
           <p:cNvSpPr/>
           <p:nvPr/>
         </p:nvSpPr>
         <p:spPr>
           <a:xfrm>
-            <a:off x="10083800" y="4362450"/>
+            <a:off x="4292600" y="5607050"/>
             <a:ext cx="1016000" cy="444500"/>
           </a:xfrm>
           <a:prstGeom prst="roundRect">
@@ -11504,13 +12421,13 @@
       </p:sp>
       <p:sp>
         <p:nvSpPr>
-          <p:cNvPr id="46" name="TextBox 45"/>
+          <p:cNvPr id="48" name="TextBox 47"/>
           <p:cNvSpPr txBox="1"/>
           <p:nvPr/>
         </p:nvSpPr>
         <p:spPr>
           <a:xfrm>
-            <a:off x="10147300" y="4362450"/>
+            <a:off x="4356100" y="5607050"/>
             <a:ext cx="889000" cy="444500"/>
           </a:xfrm>
           <a:prstGeom prst="rect">
@@ -11519,7 +12436,7 @@
           <a:noFill/>
         </p:spPr>
         <p:txBody>
-          <a:bodyPr wrap="square" anchor="ctr" lIns="25400" rIns="25400" tIns="12700" bIns="12700">
+          <a:bodyPr wrap="square" anchor="ctr" lIns="25400" rIns="25400" tIns="25400" bIns="25400">
             <a:normAutofit/>
           </a:bodyPr>
           <a:lstStyle/>
@@ -11536,20 +12453,20 @@
                 </a:solidFill>
                 <a:latin typeface="Inter"/>
               </a:rPr>
-              <a:t>Carryover + progress portal</a:t>
-            </a:r>
-          </a:p>
-        </p:txBody>
-      </p:sp>
-      <p:sp>
-        <p:nvSpPr>
-          <p:cNvPr id="47" name="Rounded Rectangle 46"/>
+              <a:t>Calendar / video link</a:t>
+            </a:r>
+          </a:p>
+        </p:txBody>
+      </p:sp>
+      <p:sp>
+        <p:nvSpPr>
+          <p:cNvPr id="49" name="Rounded Rectangle 48"/>
           <p:cNvSpPr/>
           <p:nvPr/>
         </p:nvSpPr>
         <p:spPr>
           <a:xfrm>
-            <a:off x="10083800" y="5607050"/>
+            <a:off x="10363200" y="5613400"/>
             <a:ext cx="1016000" cy="444500"/>
           </a:xfrm>
           <a:prstGeom prst="roundRect">
@@ -11591,13 +12508,13 @@
       </p:sp>
       <p:sp>
         <p:nvSpPr>
-          <p:cNvPr id="48" name="TextBox 47"/>
+          <p:cNvPr id="50" name="TextBox 49"/>
           <p:cNvSpPr txBox="1"/>
           <p:nvPr/>
         </p:nvSpPr>
         <p:spPr>
           <a:xfrm>
-            <a:off x="10147300" y="5607050"/>
+            <a:off x="10426700" y="5613400"/>
             <a:ext cx="889000" cy="444500"/>
           </a:xfrm>
           <a:prstGeom prst="rect">
@@ -11606,7 +12523,7 @@
           <a:noFill/>
         </p:spPr>
         <p:txBody>
-          <a:bodyPr wrap="square" anchor="ctr" lIns="25400" rIns="25400" tIns="12700" bIns="12700">
+          <a:bodyPr wrap="square" anchor="ctr" lIns="25400" rIns="25400" tIns="25400" bIns="25400">
             <a:normAutofit/>
           </a:bodyPr>
           <a:lstStyle/>
@@ -11628,93 +12545,6 @@
           </a:p>
         </p:txBody>
       </p:sp>
-      <p:sp>
-        <p:nvSpPr>
-          <p:cNvPr id="49" name="Rounded Rectangle 48"/>
-          <p:cNvSpPr/>
-          <p:nvPr/>
-        </p:nvSpPr>
-        <p:spPr>
-          <a:xfrm>
-            <a:off x="10775950" y="1866899"/>
-            <a:ext cx="952500" cy="457200"/>
-          </a:xfrm>
-          <a:prstGeom prst="roundRect">
-            <a:avLst>
-              <a:gd name="adj" fmla="val 50000"/>
-            </a:avLst>
-          </a:prstGeom>
-          <a:solidFill>
-            <a:srgbClr val="FBF7F1"/>
-          </a:solidFill>
-          <a:ln w="12700">
-            <a:solidFill>
-              <a:srgbClr val="C98A5E"/>
-            </a:solidFill>
-          </a:ln>
-          <a:effectLst/>
-        </p:spPr>
-        <p:style>
-          <a:lnRef idx="1">
-            <a:schemeClr val="accent1"/>
-          </a:lnRef>
-          <a:fillRef idx="3">
-            <a:schemeClr val="accent1"/>
-          </a:fillRef>
-          <a:effectRef idx="2">
-            <a:schemeClr val="accent1"/>
-          </a:effectRef>
-          <a:fontRef idx="minor">
-            <a:schemeClr val="lt1"/>
-          </a:fontRef>
-        </p:style>
-        <p:txBody>
-          <a:bodyPr rtlCol="0" anchor="ctr"/>
-          <a:lstStyle/>
-          <a:p>
-            <a:pPr algn="ctr"/>
-          </a:p>
-        </p:txBody>
-      </p:sp>
-      <p:sp>
-        <p:nvSpPr>
-          <p:cNvPr id="50" name="TextBox 49"/>
-          <p:cNvSpPr txBox="1"/>
-          <p:nvPr/>
-        </p:nvSpPr>
-        <p:spPr>
-          <a:xfrm>
-            <a:off x="10839450" y="1866899"/>
-            <a:ext cx="825500" cy="457200"/>
-          </a:xfrm>
-          <a:prstGeom prst="rect">
-            <a:avLst/>
-          </a:prstGeom>
-          <a:noFill/>
-        </p:spPr>
-        <p:txBody>
-          <a:bodyPr wrap="square" anchor="ctr" lIns="25400" rIns="25400" tIns="12700" bIns="12700">
-            <a:normAutofit/>
-          </a:bodyPr>
-          <a:lstStyle/>
-          <a:p>
-            <a:pPr algn="ctr">
-              <a:spcAft>
-                <a:spcPts val="0"/>
-              </a:spcAft>
-            </a:pPr>
-            <a:r>
-              <a:rPr sz="625" b="1">
-                <a:solidFill>
-                  <a:srgbClr val="142433"/>
-                </a:solidFill>
-                <a:latin typeface="Inter"/>
-              </a:rPr>
-              <a:t>Ongoing care</a:t>
-            </a:r>
-          </a:p>
-        </p:txBody>
-      </p:sp>
       <p:cxnSp>
         <p:nvCxnSpPr>
           <p:cNvPr id="51" name="Connector 50"/>
@@ -11722,9 +12552,9 @@
           <p:nvPr/>
         </p:nvCxnSpPr>
         <p:spPr>
-          <a:xfrm>
-            <a:off x="1905000" y="2324100"/>
-            <a:ext cx="0" cy="2038350"/>
+          <a:xfrm flipH="1">
+            <a:off x="1943100" y="2336800"/>
+            <a:ext cx="12700" cy="2025650"/>
           </a:xfrm>
           <a:prstGeom prst="bentConnector3">
             <a:avLst/>
@@ -11760,8 +12590,8 @@
         </p:nvCxnSpPr>
         <p:spPr>
           <a:xfrm flipV="1">
-            <a:off x="1905000" y="2317750"/>
-            <a:ext cx="965200" cy="2044700"/>
+            <a:off x="1943100" y="2317750"/>
+            <a:ext cx="1104900" cy="2044700"/>
           </a:xfrm>
           <a:prstGeom prst="bentConnector3">
             <a:avLst/>
@@ -11797,8 +12627,8 @@
         </p:nvCxnSpPr>
         <p:spPr>
           <a:xfrm>
-            <a:off x="2870200" y="2317750"/>
-            <a:ext cx="965200" cy="2044700"/>
+            <a:off x="3048000" y="2317750"/>
+            <a:ext cx="222250" cy="2044700"/>
           </a:xfrm>
           <a:prstGeom prst="bentConnector3">
             <a:avLst/>
@@ -11834,8 +12664,8 @@
         </p:nvCxnSpPr>
         <p:spPr>
           <a:xfrm flipV="1">
-            <a:off x="3835400" y="3562350"/>
-            <a:ext cx="965200" cy="800100"/>
+            <a:off x="3270250" y="3562350"/>
+            <a:ext cx="850900" cy="800100"/>
           </a:xfrm>
           <a:prstGeom prst="bentConnector3">
             <a:avLst/>
@@ -11872,7 +12702,7 @@
         <p:spPr>
           <a:xfrm flipV="1">
             <a:off x="4800600" y="3562350"/>
-            <a:ext cx="965200" cy="2044700"/>
+            <a:ext cx="533400" cy="2044700"/>
           </a:xfrm>
           <a:prstGeom prst="bentConnector3">
             <a:avLst/>
@@ -11907,9 +12737,9 @@
           <p:nvPr/>
         </p:nvCxnSpPr>
         <p:spPr>
-          <a:xfrm flipH="1">
-            <a:off x="5257800" y="3340100"/>
-            <a:ext cx="50800" cy="0"/>
+          <a:xfrm>
+            <a:off x="4629150" y="3340100"/>
+            <a:ext cx="196850" cy="0"/>
           </a:xfrm>
           <a:prstGeom prst="bentConnector3">
             <a:avLst/>
@@ -11944,9 +12774,9 @@
           <p:nvPr/>
         </p:nvCxnSpPr>
         <p:spPr>
-          <a:xfrm flipH="1">
-            <a:off x="6184900" y="3340100"/>
-            <a:ext cx="88900" cy="0"/>
+          <a:xfrm>
+            <a:off x="5842000" y="3340100"/>
+            <a:ext cx="196850" cy="0"/>
           </a:xfrm>
           <a:prstGeom prst="bentConnector3">
             <a:avLst/>
@@ -11982,8 +12812,8 @@
         </p:nvCxnSpPr>
         <p:spPr>
           <a:xfrm>
-            <a:off x="6731000" y="3670300"/>
-            <a:ext cx="965199" cy="692150"/>
+            <a:off x="6584950" y="3670300"/>
+            <a:ext cx="1111249" cy="692150"/>
           </a:xfrm>
           <a:prstGeom prst="bentConnector3">
             <a:avLst/>
@@ -12019,7 +12849,7 @@
         </p:nvSpPr>
         <p:spPr>
           <a:xfrm>
-            <a:off x="7023100" y="3876674"/>
+            <a:off x="6950075" y="3876674"/>
             <a:ext cx="381000" cy="139700"/>
           </a:xfrm>
           <a:prstGeom prst="rect">
@@ -12053,9 +12883,9 @@
           <p:nvPr/>
         </p:nvCxnSpPr>
         <p:spPr>
-          <a:xfrm flipH="1">
-            <a:off x="7188200" y="3340100"/>
-            <a:ext cx="88900" cy="0"/>
+          <a:xfrm>
+            <a:off x="7131050" y="3340100"/>
+            <a:ext cx="323850" cy="0"/>
           </a:xfrm>
           <a:prstGeom prst="bentConnector3">
             <a:avLst/>
@@ -12091,7 +12921,7 @@
         </p:nvSpPr>
         <p:spPr>
           <a:xfrm>
-            <a:off x="7042150" y="3200400"/>
+            <a:off x="7102475" y="3200400"/>
             <a:ext cx="381000" cy="139700"/>
           </a:xfrm>
           <a:prstGeom prst="rect">
@@ -12126,8 +12956,8 @@
         </p:nvCxnSpPr>
         <p:spPr>
           <a:xfrm flipV="1">
-            <a:off x="7696199" y="3562350"/>
-            <a:ext cx="965201" cy="800100"/>
+            <a:off x="8204199" y="3340100"/>
+            <a:ext cx="736601" cy="1244600"/>
           </a:xfrm>
           <a:prstGeom prst="bentConnector3">
             <a:avLst/>
@@ -12163,8 +12993,8 @@
         </p:nvCxnSpPr>
         <p:spPr>
           <a:xfrm>
-            <a:off x="8661400" y="3562350"/>
-            <a:ext cx="965200" cy="800100"/>
+            <a:off x="9448800" y="3562350"/>
+            <a:ext cx="177800" cy="800100"/>
           </a:xfrm>
           <a:prstGeom prst="bentConnector3">
             <a:avLst/>
@@ -12200,8 +13030,8 @@
         </p:nvCxnSpPr>
         <p:spPr>
           <a:xfrm>
-            <a:off x="8204199" y="3340100"/>
-            <a:ext cx="914401" cy="1244600"/>
+            <a:off x="8470900" y="3340100"/>
+            <a:ext cx="647700" cy="1244600"/>
           </a:xfrm>
           <a:prstGeom prst="bentConnector3">
             <a:avLst/>
@@ -12312,7 +13142,7 @@
         <p:spPr>
           <a:xfrm>
             <a:off x="10591800" y="3562350"/>
-            <a:ext cx="0" cy="800100"/>
+            <a:ext cx="279400" cy="800100"/>
           </a:xfrm>
           <a:prstGeom prst="bentConnector3">
             <a:avLst/>
@@ -12385,8 +13215,8 @@
         </p:nvCxnSpPr>
         <p:spPr>
           <a:xfrm>
-            <a:off x="10591800" y="4806950"/>
-            <a:ext cx="0" cy="800100"/>
+            <a:off x="10871200" y="4806950"/>
+            <a:ext cx="0" cy="806450"/>
           </a:xfrm>
           <a:prstGeom prst="bentConnector3">
             <a:avLst/>
@@ -12431,7 +13261,7 @@
           <a:noFill/>
         </p:spPr>
         <p:txBody>
-          <a:bodyPr wrap="square" anchor="t" lIns="25400" rIns="25400" tIns="12700" bIns="12700">
+          <a:bodyPr wrap="square" anchor="t" lIns="25400" rIns="25400" tIns="25400" bIns="25400">
             <a:spAutoFit/>
           </a:bodyPr>
           <a:lstStyle/>
@@ -12470,7 +13300,7 @@
           <a:noFill/>
         </p:spPr>
         <p:txBody>
-          <a:bodyPr wrap="square" anchor="t" lIns="25400" rIns="25400" tIns="12700" bIns="12700">
+          <a:bodyPr wrap="square" anchor="t" lIns="25400" rIns="25400" tIns="25400" bIns="25400">
             <a:spAutoFit/>
           </a:bodyPr>
           <a:lstStyle/>
@@ -12509,7 +13339,7 @@
           <a:noFill/>
         </p:spPr>
         <p:txBody>
-          <a:bodyPr wrap="square" anchor="t" lIns="25400" rIns="25400" tIns="12700" bIns="12700">
+          <a:bodyPr wrap="square" anchor="t" lIns="25400" rIns="25400" tIns="25400" bIns="25400">
             <a:spAutoFit/>
           </a:bodyPr>
           <a:lstStyle/>

--- a/docs/design/Sona_Care_Journey_Deck.pptx
+++ b/docs/design/Sona_Care_Journey_Deck.pptx
@@ -4857,7 +4857,7 @@
         <p:spPr>
           <a:xfrm>
             <a:off x="571500" y="2286000"/>
-            <a:ext cx="5715000" cy="152400"/>
+            <a:ext cx="7620000" cy="152400"/>
           </a:xfrm>
           <a:prstGeom prst="rect">
             <a:avLst/>
@@ -4882,21 +4882,201 @@
                 </a:solidFill>
                 <a:latin typeface="Inter"/>
               </a:rPr>
-              <a:t>SENTIMENT · FAMILY + CLINICIAN</a:t>
-            </a:r>
-          </a:p>
-        </p:txBody>
-      </p:sp>
-      <p:sp>
-        <p:nvSpPr>
-          <p:cNvPr id="18" name="Freeform 17"/>
+              <a:t>HOW EACH PHASE FEELS  ·  one point per phase, family + clinician</a:t>
+            </a:r>
+          </a:p>
+        </p:txBody>
+      </p:sp>
+      <p:cxnSp>
+        <p:nvCxnSpPr>
+          <p:cNvPr id="18" name="Connector 17"/>
+          <p:cNvCxnSpPr/>
+          <p:nvPr/>
+        </p:nvCxnSpPr>
+        <p:spPr>
+          <a:xfrm>
+            <a:off x="1620520" y="2095499"/>
+            <a:ext cx="0" cy="1038607"/>
+          </a:xfrm>
+          <a:prstGeom prst="line">
+            <a:avLst/>
+          </a:prstGeom>
+          <a:ln w="9525">
+            <a:solidFill>
+              <a:srgbClr val="D7DDE0"/>
+            </a:solidFill>
+          </a:ln>
+          <a:effectLst/>
+        </p:spPr>
+        <p:style>
+          <a:lnRef idx="2">
+            <a:schemeClr val="accent1"/>
+          </a:lnRef>
+          <a:fillRef idx="0">
+            <a:schemeClr val="accent1"/>
+          </a:fillRef>
+          <a:effectRef idx="1">
+            <a:schemeClr val="accent1"/>
+          </a:effectRef>
+          <a:fontRef idx="minor">
+            <a:schemeClr val="tx1"/>
+          </a:fontRef>
+        </p:style>
+      </p:cxnSp>
+      <p:cxnSp>
+        <p:nvCxnSpPr>
+          <p:cNvPr id="19" name="Connector 18"/>
+          <p:cNvCxnSpPr/>
+          <p:nvPr/>
+        </p:nvCxnSpPr>
+        <p:spPr>
+          <a:xfrm>
+            <a:off x="3858259" y="2095499"/>
+            <a:ext cx="0" cy="1120903"/>
+          </a:xfrm>
+          <a:prstGeom prst="line">
+            <a:avLst/>
+          </a:prstGeom>
+          <a:ln w="9525">
+            <a:solidFill>
+              <a:srgbClr val="D7DDE0"/>
+            </a:solidFill>
+          </a:ln>
+          <a:effectLst/>
+        </p:spPr>
+        <p:style>
+          <a:lnRef idx="2">
+            <a:schemeClr val="accent1"/>
+          </a:lnRef>
+          <a:fillRef idx="0">
+            <a:schemeClr val="accent1"/>
+          </a:fillRef>
+          <a:effectRef idx="1">
+            <a:schemeClr val="accent1"/>
+          </a:effectRef>
+          <a:fontRef idx="minor">
+            <a:schemeClr val="tx1"/>
+          </a:fontRef>
+        </p:style>
+      </p:cxnSp>
+      <p:cxnSp>
+        <p:nvCxnSpPr>
+          <p:cNvPr id="20" name="Connector 19"/>
+          <p:cNvCxnSpPr/>
+          <p:nvPr/>
+        </p:nvCxnSpPr>
+        <p:spPr>
+          <a:xfrm>
+            <a:off x="6096000" y="2095499"/>
+            <a:ext cx="0" cy="819151"/>
+          </a:xfrm>
+          <a:prstGeom prst="line">
+            <a:avLst/>
+          </a:prstGeom>
+          <a:ln w="9525">
+            <a:solidFill>
+              <a:srgbClr val="D7DDE0"/>
+            </a:solidFill>
+          </a:ln>
+          <a:effectLst/>
+        </p:spPr>
+        <p:style>
+          <a:lnRef idx="2">
+            <a:schemeClr val="accent1"/>
+          </a:lnRef>
+          <a:fillRef idx="0">
+            <a:schemeClr val="accent1"/>
+          </a:fillRef>
+          <a:effectRef idx="1">
+            <a:schemeClr val="accent1"/>
+          </a:effectRef>
+          <a:fontRef idx="minor">
+            <a:schemeClr val="tx1"/>
+          </a:fontRef>
+        </p:style>
+      </p:cxnSp>
+      <p:cxnSp>
+        <p:nvCxnSpPr>
+          <p:cNvPr id="21" name="Connector 20"/>
+          <p:cNvCxnSpPr/>
+          <p:nvPr/>
+        </p:nvCxnSpPr>
+        <p:spPr>
+          <a:xfrm>
+            <a:off x="8333739" y="2095499"/>
+            <a:ext cx="0" cy="627127"/>
+          </a:xfrm>
+          <a:prstGeom prst="line">
+            <a:avLst/>
+          </a:prstGeom>
+          <a:ln w="9525">
+            <a:solidFill>
+              <a:srgbClr val="D7DDE0"/>
+            </a:solidFill>
+          </a:ln>
+          <a:effectLst/>
+        </p:spPr>
+        <p:style>
+          <a:lnRef idx="2">
+            <a:schemeClr val="accent1"/>
+          </a:lnRef>
+          <a:fillRef idx="0">
+            <a:schemeClr val="accent1"/>
+          </a:fillRef>
+          <a:effectRef idx="1">
+            <a:schemeClr val="accent1"/>
+          </a:effectRef>
+          <a:fontRef idx="minor">
+            <a:schemeClr val="tx1"/>
+          </a:fontRef>
+        </p:style>
+      </p:cxnSp>
+      <p:cxnSp>
+        <p:nvCxnSpPr>
+          <p:cNvPr id="22" name="Connector 21"/>
+          <p:cNvCxnSpPr/>
+          <p:nvPr/>
+        </p:nvCxnSpPr>
+        <p:spPr>
+          <a:xfrm>
+            <a:off x="10571479" y="2095499"/>
+            <a:ext cx="0" cy="503683"/>
+          </a:xfrm>
+          <a:prstGeom prst="line">
+            <a:avLst/>
+          </a:prstGeom>
+          <a:ln w="9525">
+            <a:solidFill>
+              <a:srgbClr val="D7DDE0"/>
+            </a:solidFill>
+          </a:ln>
+          <a:effectLst/>
+        </p:spPr>
+        <p:style>
+          <a:lnRef idx="2">
+            <a:schemeClr val="accent1"/>
+          </a:lnRef>
+          <a:fillRef idx="0">
+            <a:schemeClr val="accent1"/>
+          </a:fillRef>
+          <a:effectRef idx="1">
+            <a:schemeClr val="accent1"/>
+          </a:effectRef>
+          <a:fontRef idx="minor">
+            <a:schemeClr val="tx1"/>
+          </a:fontRef>
+        </p:style>
+      </p:cxnSp>
+      <p:sp>
+        <p:nvSpPr>
+          <p:cNvPr id="23" name="Freeform 22"/>
           <p:cNvSpPr/>
           <p:nvPr/>
         </p:nvSpPr>
         <p:spPr>
           <a:xfrm>
-            <a:off x="1620520" y="2631440"/>
-            <a:ext cx="8950959" cy="797560"/>
+            <a:off x="1620520" y="2656332"/>
+            <a:ext cx="8950959" cy="772668"/>
           </a:xfrm>
           <a:custGeom>
             <a:avLst/>
@@ -4905,27 +5085,27 @@
             <a:cxnLst/>
             <a:rect l="l" t="t" r="r" b="b"/>
             <a:pathLst>
-              <a:path w="8950959" h="797560">
+              <a:path w="8950959" h="772668">
                 <a:moveTo>
-                  <a:pt x="0" y="797560"/>
+                  <a:pt x="0" y="772668"/>
                 </a:moveTo>
                 <a:lnTo>
-                  <a:pt x="0" y="544830"/>
+                  <a:pt x="0" y="534924"/>
                 </a:lnTo>
                 <a:lnTo>
-                  <a:pt x="2237739" y="628650"/>
+                  <a:pt x="2237739" y="617220"/>
                 </a:lnTo>
                 <a:lnTo>
-                  <a:pt x="4475480" y="321310"/>
+                  <a:pt x="4475480" y="315468"/>
                 </a:lnTo>
                 <a:lnTo>
-                  <a:pt x="6713219" y="125729"/>
+                  <a:pt x="6713219" y="123444"/>
                 </a:lnTo>
                 <a:lnTo>
                   <a:pt x="8950959" y="0"/>
                 </a:lnTo>
                 <a:lnTo>
-                  <a:pt x="8950959" y="797560"/>
+                  <a:pt x="8950959" y="772668"/>
                 </a:lnTo>
                 <a:close/>
               </a:path>
@@ -4963,7 +5143,7 @@
       </p:sp>
       <p:cxnSp>
         <p:nvCxnSpPr>
-          <p:cNvPr id="19" name="Connector 18"/>
+          <p:cNvPr id="24" name="Connector 23"/>
           <p:cNvCxnSpPr/>
           <p:nvPr/>
         </p:nvCxnSpPr>
@@ -4999,14 +5179,14 @@
       </p:cxnSp>
       <p:cxnSp>
         <p:nvCxnSpPr>
-          <p:cNvPr id="20" name="Connector 19"/>
+          <p:cNvPr id="25" name="Connector 24"/>
           <p:cNvCxnSpPr/>
           <p:nvPr/>
         </p:nvCxnSpPr>
         <p:spPr>
           <a:xfrm>
-            <a:off x="1620520" y="3176270"/>
-            <a:ext cx="2237739" cy="83820"/>
+            <a:off x="1620520" y="3191256"/>
+            <a:ext cx="2237739" cy="82296"/>
           </a:xfrm>
           <a:prstGeom prst="line">
             <a:avLst/>
@@ -5035,14 +5215,14 @@
       </p:cxnSp>
       <p:cxnSp>
         <p:nvCxnSpPr>
-          <p:cNvPr id="21" name="Connector 20"/>
+          <p:cNvPr id="26" name="Connector 25"/>
           <p:cNvCxnSpPr/>
           <p:nvPr/>
         </p:nvCxnSpPr>
         <p:spPr>
           <a:xfrm flipV="1">
-            <a:off x="3858259" y="2952750"/>
-            <a:ext cx="2237741" cy="307340"/>
+            <a:off x="3858259" y="2971800"/>
+            <a:ext cx="2237741" cy="301752"/>
           </a:xfrm>
           <a:prstGeom prst="line">
             <a:avLst/>
@@ -5071,14 +5251,14 @@
       </p:cxnSp>
       <p:cxnSp>
         <p:nvCxnSpPr>
-          <p:cNvPr id="22" name="Connector 21"/>
+          <p:cNvPr id="27" name="Connector 26"/>
           <p:cNvCxnSpPr/>
           <p:nvPr/>
         </p:nvCxnSpPr>
         <p:spPr>
           <a:xfrm flipV="1">
-            <a:off x="6096000" y="2757169"/>
-            <a:ext cx="2237739" cy="195581"/>
+            <a:off x="6096000" y="2779776"/>
+            <a:ext cx="2237739" cy="192024"/>
           </a:xfrm>
           <a:prstGeom prst="line">
             <a:avLst/>
@@ -5107,14 +5287,14 @@
       </p:cxnSp>
       <p:cxnSp>
         <p:nvCxnSpPr>
-          <p:cNvPr id="23" name="Connector 22"/>
+          <p:cNvPr id="28" name="Connector 27"/>
           <p:cNvCxnSpPr/>
           <p:nvPr/>
         </p:nvCxnSpPr>
         <p:spPr>
           <a:xfrm flipV="1">
-            <a:off x="8333739" y="2631440"/>
-            <a:ext cx="2237740" cy="125729"/>
+            <a:off x="8333739" y="2656332"/>
+            <a:ext cx="2237740" cy="123444"/>
           </a:xfrm>
           <a:prstGeom prst="line">
             <a:avLst/>
@@ -5143,14 +5323,14 @@
       </p:cxnSp>
       <p:sp>
         <p:nvSpPr>
-          <p:cNvPr id="24" name="Oval 23"/>
+          <p:cNvPr id="29" name="Oval 28"/>
           <p:cNvSpPr/>
           <p:nvPr/>
         </p:nvSpPr>
         <p:spPr>
           <a:xfrm>
-            <a:off x="1557020" y="3112770"/>
-            <a:ext cx="127000" cy="127000"/>
+            <a:off x="1550670" y="3121406"/>
+            <a:ext cx="139700" cy="139700"/>
           </a:xfrm>
           <a:prstGeom prst="ellipse">
             <a:avLst/>
@@ -5189,7 +5369,7 @@
       </p:sp>
       <p:sp>
         <p:nvSpPr>
-          <p:cNvPr id="25" name="TextBox 24"/>
+          <p:cNvPr id="30" name="TextBox 29"/>
           <p:cNvSpPr txBox="1"/>
           <p:nvPr/>
         </p:nvSpPr>
@@ -5228,7 +5408,7 @@
       </p:sp>
       <p:sp>
         <p:nvSpPr>
-          <p:cNvPr id="26" name="TextBox 25"/>
+          <p:cNvPr id="31" name="TextBox 30"/>
           <p:cNvSpPr txBox="1"/>
           <p:nvPr/>
         </p:nvSpPr>
@@ -5267,20 +5447,20 @@
       </p:sp>
       <p:sp>
         <p:nvSpPr>
-          <p:cNvPr id="27" name="Oval 26"/>
+          <p:cNvPr id="32" name="Oval 31"/>
           <p:cNvSpPr/>
           <p:nvPr/>
         </p:nvSpPr>
         <p:spPr>
           <a:xfrm>
-            <a:off x="3794759" y="3196590"/>
-            <a:ext cx="127000" cy="127000"/>
+            <a:off x="3788409" y="3203701"/>
+            <a:ext cx="139700" cy="139700"/>
           </a:xfrm>
           <a:prstGeom prst="ellipse">
             <a:avLst/>
           </a:prstGeom>
           <a:solidFill>
-            <a:srgbClr val="2D6A6E"/>
+            <a:srgbClr val="356985"/>
           </a:solidFill>
           <a:ln w="19050">
             <a:solidFill>
@@ -5313,7 +5493,7 @@
       </p:sp>
       <p:sp>
         <p:nvSpPr>
-          <p:cNvPr id="28" name="TextBox 27"/>
+          <p:cNvPr id="33" name="TextBox 32"/>
           <p:cNvSpPr txBox="1"/>
           <p:nvPr/>
         </p:nvSpPr>
@@ -5341,7 +5521,7 @@
             <a:r>
               <a:rPr sz="850" b="1">
                 <a:solidFill>
-                  <a:srgbClr val="2D6A6E"/>
+                  <a:srgbClr val="356985"/>
                 </a:solidFill>
                 <a:latin typeface="Inter"/>
               </a:rPr>
@@ -5352,7 +5532,7 @@
       </p:sp>
       <p:sp>
         <p:nvSpPr>
-          <p:cNvPr id="29" name="TextBox 28"/>
+          <p:cNvPr id="34" name="TextBox 33"/>
           <p:cNvSpPr txBox="1"/>
           <p:nvPr/>
         </p:nvSpPr>
@@ -5391,20 +5571,20 @@
       </p:sp>
       <p:sp>
         <p:nvSpPr>
-          <p:cNvPr id="30" name="Oval 29"/>
+          <p:cNvPr id="35" name="Oval 34"/>
           <p:cNvSpPr/>
           <p:nvPr/>
         </p:nvSpPr>
         <p:spPr>
           <a:xfrm>
-            <a:off x="6032500" y="2889250"/>
-            <a:ext cx="127000" cy="127000"/>
+            <a:off x="6026150" y="2901950"/>
+            <a:ext cx="139700" cy="139700"/>
           </a:xfrm>
           <a:prstGeom prst="ellipse">
             <a:avLst/>
           </a:prstGeom>
           <a:solidFill>
-            <a:srgbClr val="2D6A6E"/>
+            <a:srgbClr val="C0703F"/>
           </a:solidFill>
           <a:ln w="19050">
             <a:solidFill>
@@ -5437,7 +5617,7 @@
       </p:sp>
       <p:sp>
         <p:nvSpPr>
-          <p:cNvPr id="31" name="TextBox 30"/>
+          <p:cNvPr id="36" name="TextBox 35"/>
           <p:cNvSpPr txBox="1"/>
           <p:nvPr/>
         </p:nvSpPr>
@@ -5465,7 +5645,7 @@
             <a:r>
               <a:rPr sz="850" b="1">
                 <a:solidFill>
-                  <a:srgbClr val="2D6A6E"/>
+                  <a:srgbClr val="C0703F"/>
                 </a:solidFill>
                 <a:latin typeface="Inter"/>
               </a:rPr>
@@ -5476,7 +5656,7 @@
       </p:sp>
       <p:sp>
         <p:nvSpPr>
-          <p:cNvPr id="32" name="TextBox 31"/>
+          <p:cNvPr id="37" name="TextBox 36"/>
           <p:cNvSpPr txBox="1"/>
           <p:nvPr/>
         </p:nvSpPr>
@@ -5515,20 +5695,20 @@
       </p:sp>
       <p:sp>
         <p:nvSpPr>
-          <p:cNvPr id="33" name="Oval 32"/>
+          <p:cNvPr id="38" name="Oval 37"/>
           <p:cNvSpPr/>
           <p:nvPr/>
         </p:nvSpPr>
         <p:spPr>
           <a:xfrm>
-            <a:off x="8270240" y="2693670"/>
-            <a:ext cx="127000" cy="127000"/>
+            <a:off x="8263890" y="2709926"/>
+            <a:ext cx="139700" cy="139700"/>
           </a:xfrm>
           <a:prstGeom prst="ellipse">
             <a:avLst/>
           </a:prstGeom>
           <a:solidFill>
-            <a:srgbClr val="2D6A6E"/>
+            <a:srgbClr val="6E5A86"/>
           </a:solidFill>
           <a:ln w="19050">
             <a:solidFill>
@@ -5561,7 +5741,7 @@
       </p:sp>
       <p:sp>
         <p:nvSpPr>
-          <p:cNvPr id="34" name="TextBox 33"/>
+          <p:cNvPr id="39" name="TextBox 38"/>
           <p:cNvSpPr txBox="1"/>
           <p:nvPr/>
         </p:nvSpPr>
@@ -5589,7 +5769,7 @@
             <a:r>
               <a:rPr sz="850" b="1">
                 <a:solidFill>
-                  <a:srgbClr val="2D6A6E"/>
+                  <a:srgbClr val="6E5A86"/>
                 </a:solidFill>
                 <a:latin typeface="Inter"/>
               </a:rPr>
@@ -5600,7 +5780,7 @@
       </p:sp>
       <p:sp>
         <p:nvSpPr>
-          <p:cNvPr id="35" name="TextBox 34"/>
+          <p:cNvPr id="40" name="TextBox 39"/>
           <p:cNvSpPr txBox="1"/>
           <p:nvPr/>
         </p:nvSpPr>
@@ -5639,20 +5819,20 @@
       </p:sp>
       <p:sp>
         <p:nvSpPr>
-          <p:cNvPr id="36" name="Oval 35"/>
+          <p:cNvPr id="41" name="Oval 40"/>
           <p:cNvSpPr/>
           <p:nvPr/>
         </p:nvSpPr>
         <p:spPr>
           <a:xfrm>
-            <a:off x="10507980" y="2567940"/>
-            <a:ext cx="127000" cy="127000"/>
+            <a:off x="10501630" y="2586482"/>
+            <a:ext cx="139700" cy="139700"/>
           </a:xfrm>
           <a:prstGeom prst="ellipse">
             <a:avLst/>
           </a:prstGeom>
           <a:solidFill>
-            <a:srgbClr val="2D6A6E"/>
+            <a:srgbClr val="4C8060"/>
           </a:solidFill>
           <a:ln w="19050">
             <a:solidFill>
@@ -5685,7 +5865,7 @@
       </p:sp>
       <p:sp>
         <p:nvSpPr>
-          <p:cNvPr id="37" name="TextBox 36"/>
+          <p:cNvPr id="42" name="TextBox 41"/>
           <p:cNvSpPr txBox="1"/>
           <p:nvPr/>
         </p:nvSpPr>
@@ -5713,7 +5893,7 @@
             <a:r>
               <a:rPr sz="850" b="1">
                 <a:solidFill>
-                  <a:srgbClr val="2D6A6E"/>
+                  <a:srgbClr val="4C8060"/>
                 </a:solidFill>
                 <a:latin typeface="Inter"/>
               </a:rPr>
@@ -5724,7 +5904,7 @@
       </p:sp>
       <p:sp>
         <p:nvSpPr>
-          <p:cNvPr id="38" name="TextBox 37"/>
+          <p:cNvPr id="43" name="TextBox 42"/>
           <p:cNvSpPr txBox="1"/>
           <p:nvPr/>
         </p:nvSpPr>
@@ -5763,7 +5943,7 @@
       </p:sp>
       <p:sp>
         <p:nvSpPr>
-          <p:cNvPr id="39" name="TextBox 38"/>
+          <p:cNvPr id="44" name="TextBox 43"/>
           <p:cNvSpPr txBox="1"/>
           <p:nvPr/>
         </p:nvSpPr>
@@ -5802,7 +5982,7 @@
       </p:sp>
       <p:sp>
         <p:nvSpPr>
-          <p:cNvPr id="40" name="Rounded Rectangle 39"/>
+          <p:cNvPr id="45" name="Rounded Rectangle 44"/>
           <p:cNvSpPr/>
           <p:nvPr/>
         </p:nvSpPr>
@@ -5850,7 +6030,7 @@
       </p:sp>
       <p:sp>
         <p:nvSpPr>
-          <p:cNvPr id="41" name="Oval 40"/>
+          <p:cNvPr id="46" name="Oval 45"/>
           <p:cNvSpPr/>
           <p:nvPr/>
         </p:nvSpPr>
@@ -5863,7 +6043,7 @@
             <a:avLst/>
           </a:prstGeom>
           <a:solidFill>
-            <a:srgbClr val="F2A878"/>
+            <a:srgbClr val="2D6A6E"/>
           </a:solidFill>
           <a:ln>
             <a:noFill/>
@@ -5894,7 +6074,7 @@
       </p:sp>
       <p:sp>
         <p:nvSpPr>
-          <p:cNvPr id="42" name="TextBox 41"/>
+          <p:cNvPr id="47" name="TextBox 46"/>
           <p:cNvSpPr txBox="1"/>
           <p:nvPr/>
         </p:nvSpPr>
@@ -5933,7 +6113,7 @@
       </p:sp>
       <p:sp>
         <p:nvSpPr>
-          <p:cNvPr id="43" name="Rounded Rectangle 42"/>
+          <p:cNvPr id="48" name="Rounded Rectangle 47"/>
           <p:cNvSpPr/>
           <p:nvPr/>
         </p:nvSpPr>
@@ -5981,7 +6161,7 @@
       </p:sp>
       <p:sp>
         <p:nvSpPr>
-          <p:cNvPr id="44" name="Oval 43"/>
+          <p:cNvPr id="49" name="Oval 48"/>
           <p:cNvSpPr/>
           <p:nvPr/>
         </p:nvSpPr>
@@ -5994,7 +6174,7 @@
             <a:avLst/>
           </a:prstGeom>
           <a:solidFill>
-            <a:srgbClr val="F2A878"/>
+            <a:srgbClr val="356985"/>
           </a:solidFill>
           <a:ln>
             <a:noFill/>
@@ -6025,7 +6205,7 @@
       </p:sp>
       <p:sp>
         <p:nvSpPr>
-          <p:cNvPr id="45" name="TextBox 44"/>
+          <p:cNvPr id="50" name="TextBox 49"/>
           <p:cNvSpPr txBox="1"/>
           <p:nvPr/>
         </p:nvSpPr>
@@ -6064,7 +6244,7 @@
       </p:sp>
       <p:sp>
         <p:nvSpPr>
-          <p:cNvPr id="46" name="Rounded Rectangle 45"/>
+          <p:cNvPr id="51" name="Rounded Rectangle 50"/>
           <p:cNvSpPr/>
           <p:nvPr/>
         </p:nvSpPr>
@@ -6112,7 +6292,7 @@
       </p:sp>
       <p:sp>
         <p:nvSpPr>
-          <p:cNvPr id="47" name="Oval 46"/>
+          <p:cNvPr id="52" name="Oval 51"/>
           <p:cNvSpPr/>
           <p:nvPr/>
         </p:nvSpPr>
@@ -6125,7 +6305,7 @@
             <a:avLst/>
           </a:prstGeom>
           <a:solidFill>
-            <a:srgbClr val="F2A878"/>
+            <a:srgbClr val="C0703F"/>
           </a:solidFill>
           <a:ln>
             <a:noFill/>
@@ -6156,7 +6336,7 @@
       </p:sp>
       <p:sp>
         <p:nvSpPr>
-          <p:cNvPr id="48" name="TextBox 47"/>
+          <p:cNvPr id="53" name="TextBox 52"/>
           <p:cNvSpPr txBox="1"/>
           <p:nvPr/>
         </p:nvSpPr>
@@ -6195,7 +6375,7 @@
       </p:sp>
       <p:sp>
         <p:nvSpPr>
-          <p:cNvPr id="49" name="Rounded Rectangle 48"/>
+          <p:cNvPr id="54" name="Rounded Rectangle 53"/>
           <p:cNvSpPr/>
           <p:nvPr/>
         </p:nvSpPr>
@@ -6243,7 +6423,7 @@
       </p:sp>
       <p:sp>
         <p:nvSpPr>
-          <p:cNvPr id="50" name="Oval 49"/>
+          <p:cNvPr id="55" name="Oval 54"/>
           <p:cNvSpPr/>
           <p:nvPr/>
         </p:nvSpPr>
@@ -6256,7 +6436,7 @@
             <a:avLst/>
           </a:prstGeom>
           <a:solidFill>
-            <a:srgbClr val="F2A878"/>
+            <a:srgbClr val="6E5A86"/>
           </a:solidFill>
           <a:ln>
             <a:noFill/>
@@ -6287,7 +6467,7 @@
       </p:sp>
       <p:sp>
         <p:nvSpPr>
-          <p:cNvPr id="51" name="TextBox 50"/>
+          <p:cNvPr id="56" name="TextBox 55"/>
           <p:cNvSpPr txBox="1"/>
           <p:nvPr/>
         </p:nvSpPr>
@@ -6326,7 +6506,7 @@
       </p:sp>
       <p:sp>
         <p:nvSpPr>
-          <p:cNvPr id="52" name="Rounded Rectangle 51"/>
+          <p:cNvPr id="57" name="Rounded Rectangle 56"/>
           <p:cNvSpPr/>
           <p:nvPr/>
         </p:nvSpPr>
@@ -6374,7 +6554,7 @@
       </p:sp>
       <p:sp>
         <p:nvSpPr>
-          <p:cNvPr id="53" name="Oval 52"/>
+          <p:cNvPr id="58" name="Oval 57"/>
           <p:cNvSpPr/>
           <p:nvPr/>
         </p:nvSpPr>
@@ -6385,6 +6565,130 @@
           </a:xfrm>
           <a:prstGeom prst="ellipse">
             <a:avLst/>
+          </a:prstGeom>
+          <a:solidFill>
+            <a:srgbClr val="4C8060"/>
+          </a:solidFill>
+          <a:ln>
+            <a:noFill/>
+          </a:ln>
+          <a:effectLst/>
+        </p:spPr>
+        <p:style>
+          <a:lnRef idx="1">
+            <a:schemeClr val="accent1"/>
+          </a:lnRef>
+          <a:fillRef idx="3">
+            <a:schemeClr val="accent1"/>
+          </a:fillRef>
+          <a:effectRef idx="2">
+            <a:schemeClr val="accent1"/>
+          </a:effectRef>
+          <a:fontRef idx="minor">
+            <a:schemeClr val="lt1"/>
+          </a:fontRef>
+        </p:style>
+        <p:txBody>
+          <a:bodyPr rtlCol="0" anchor="ctr"/>
+          <a:lstStyle/>
+          <a:p>
+            <a:pPr algn="ctr"/>
+          </a:p>
+        </p:txBody>
+      </p:sp>
+      <p:sp>
+        <p:nvSpPr>
+          <p:cNvPr id="59" name="TextBox 58"/>
+          <p:cNvSpPr txBox="1"/>
+          <p:nvPr/>
+        </p:nvSpPr>
+        <p:spPr>
+          <a:xfrm>
+            <a:off x="9624059" y="4241800"/>
+            <a:ext cx="1894839" cy="736600"/>
+          </a:xfrm>
+          <a:prstGeom prst="rect">
+            <a:avLst/>
+          </a:prstGeom>
+          <a:noFill/>
+        </p:spPr>
+        <p:txBody>
+          <a:bodyPr wrap="square" anchor="ctr" lIns="25400" rIns="25400" tIns="25400" bIns="25400">
+            <a:normAutofit/>
+          </a:bodyPr>
+          <a:lstStyle/>
+          <a:p>
+            <a:pPr algn="ctr">
+              <a:spcAft>
+                <a:spcPts val="0"/>
+              </a:spcAft>
+            </a:pPr>
+            <a:r>
+              <a:rPr sz="800" b="0">
+                <a:solidFill>
+                  <a:srgbClr val="3A4A55"/>
+                </a:solidFill>
+                <a:latin typeface="Inter"/>
+              </a:rPr>
+              <a:t>Carryover is ad-hoc (email / WhatsApp)</a:t>
+            </a:r>
+          </a:p>
+        </p:txBody>
+      </p:sp>
+      <p:sp>
+        <p:nvSpPr>
+          <p:cNvPr id="60" name="TextBox 59"/>
+          <p:cNvSpPr txBox="1"/>
+          <p:nvPr/>
+        </p:nvSpPr>
+        <p:spPr>
+          <a:xfrm>
+            <a:off x="571500" y="5156200"/>
+            <a:ext cx="5715000" cy="152400"/>
+          </a:xfrm>
+          <a:prstGeom prst="rect">
+            <a:avLst/>
+          </a:prstGeom>
+          <a:noFill/>
+        </p:spPr>
+        <p:txBody>
+          <a:bodyPr wrap="square" anchor="t" lIns="25400" rIns="25400" tIns="25400" bIns="25400">
+            <a:spAutoFit/>
+          </a:bodyPr>
+          <a:lstStyle/>
+          <a:p>
+            <a:pPr algn="l">
+              <a:spcAft>
+                <a:spcPts val="0"/>
+              </a:spcAft>
+            </a:pPr>
+            <a:r>
+              <a:rPr sz="700" b="1">
+                <a:solidFill>
+                  <a:srgbClr val="8597A4"/>
+                </a:solidFill>
+                <a:latin typeface="Inter"/>
+              </a:rPr>
+              <a:t>TARGET OUTCOMES</a:t>
+            </a:r>
+          </a:p>
+        </p:txBody>
+      </p:sp>
+      <p:sp>
+        <p:nvSpPr>
+          <p:cNvPr id="61" name="Rounded Rectangle 60"/>
+          <p:cNvSpPr/>
+          <p:nvPr/>
+        </p:nvSpPr>
+        <p:spPr>
+          <a:xfrm>
+            <a:off x="584200" y="5359400"/>
+            <a:ext cx="571500" cy="31750"/>
+          </a:xfrm>
+          <a:prstGeom prst="roundRect">
+            <a:avLst>
+              <a:gd name="adj" fmla="val 40000"/>
+            </a:avLst>
           </a:prstGeom>
           <a:solidFill>
             <a:srgbClr val="F2A878"/>
@@ -6418,53 +6722,14 @@
       </p:sp>
       <p:sp>
         <p:nvSpPr>
-          <p:cNvPr id="54" name="TextBox 53"/>
+          <p:cNvPr id="62" name="TextBox 61"/>
           <p:cNvSpPr txBox="1"/>
           <p:nvPr/>
         </p:nvSpPr>
         <p:spPr>
           <a:xfrm>
-            <a:off x="9624059" y="4241800"/>
-            <a:ext cx="1894839" cy="736600"/>
-          </a:xfrm>
-          <a:prstGeom prst="rect">
-            <a:avLst/>
-          </a:prstGeom>
-          <a:noFill/>
-        </p:spPr>
-        <p:txBody>
-          <a:bodyPr wrap="square" anchor="ctr" lIns="25400" rIns="25400" tIns="25400" bIns="25400">
-            <a:normAutofit/>
-          </a:bodyPr>
-          <a:lstStyle/>
-          <a:p>
-            <a:pPr algn="ctr">
-              <a:spcAft>
-                <a:spcPts val="0"/>
-              </a:spcAft>
-            </a:pPr>
-            <a:r>
-              <a:rPr sz="800" b="0">
-                <a:solidFill>
-                  <a:srgbClr val="3A4A55"/>
-                </a:solidFill>
-                <a:latin typeface="Inter"/>
-              </a:rPr>
-              <a:t>Carryover is ad-hoc (email / WhatsApp)</a:t>
-            </a:r>
-          </a:p>
-        </p:txBody>
-      </p:sp>
-      <p:sp>
-        <p:nvSpPr>
-          <p:cNvPr id="55" name="TextBox 54"/>
-          <p:cNvSpPr txBox="1"/>
-          <p:nvPr/>
-        </p:nvSpPr>
-        <p:spPr>
-          <a:xfrm>
-            <a:off x="571500" y="5156200"/>
-            <a:ext cx="5715000" cy="152400"/>
+            <a:off x="571500" y="5448300"/>
+            <a:ext cx="5207000" cy="355600"/>
           </a:xfrm>
           <a:prstGeom prst="rect">
             <a:avLst/>
@@ -6483,26 +6748,65 @@
               </a:spcAft>
             </a:pPr>
             <a:r>
-              <a:rPr sz="700" b="1">
-                <a:solidFill>
-                  <a:srgbClr val="8597A4"/>
+              <a:rPr sz="2100" b="1">
+                <a:solidFill>
+                  <a:srgbClr val="2D6A6E"/>
                 </a:solidFill>
                 <a:latin typeface="Inter"/>
               </a:rPr>
-              <a:t>TARGET OUTCOMES</a:t>
-            </a:r>
-          </a:p>
-        </p:txBody>
-      </p:sp>
-      <p:sp>
-        <p:nvSpPr>
-          <p:cNvPr id="56" name="Rounded Rectangle 55"/>
+              <a:t>≥ 4 hours / month</a:t>
+            </a:r>
+          </a:p>
+        </p:txBody>
+      </p:sp>
+      <p:sp>
+        <p:nvSpPr>
+          <p:cNvPr id="63" name="TextBox 62"/>
+          <p:cNvSpPr txBox="1"/>
+          <p:nvPr/>
+        </p:nvSpPr>
+        <p:spPr>
+          <a:xfrm>
+            <a:off x="571500" y="5867400"/>
+            <a:ext cx="5207000" cy="190500"/>
+          </a:xfrm>
+          <a:prstGeom prst="rect">
+            <a:avLst/>
+          </a:prstGeom>
+          <a:noFill/>
+        </p:spPr>
+        <p:txBody>
+          <a:bodyPr wrap="square" anchor="t" lIns="25400" rIns="25400" tIns="25400" bIns="25400">
+            <a:spAutoFit/>
+          </a:bodyPr>
+          <a:lstStyle/>
+          <a:p>
+            <a:pPr algn="l">
+              <a:spcAft>
+                <a:spcPts val="0"/>
+              </a:spcAft>
+            </a:pPr>
+            <a:r>
+              <a:rPr sz="900" b="0">
+                <a:solidFill>
+                  <a:srgbClr val="4A5B6B"/>
+                </a:solidFill>
+                <a:latin typeface="Inter"/>
+              </a:rPr>
+              <a:t>productive hours given back to each clinician</a:t>
+            </a:r>
+          </a:p>
+        </p:txBody>
+      </p:sp>
+      <p:sp>
+        <p:nvSpPr>
+          <p:cNvPr id="64" name="Rounded Rectangle 63"/>
           <p:cNvSpPr/>
           <p:nvPr/>
         </p:nvSpPr>
         <p:spPr>
           <a:xfrm>
-            <a:off x="584200" y="5359400"/>
+            <a:off x="6362700" y="5359400"/>
             <a:ext cx="571500" cy="31750"/>
           </a:xfrm>
           <a:prstGeom prst="roundRect">
@@ -6542,13 +6846,13 @@
       </p:sp>
       <p:sp>
         <p:nvSpPr>
-          <p:cNvPr id="57" name="TextBox 56"/>
+          <p:cNvPr id="65" name="TextBox 64"/>
           <p:cNvSpPr txBox="1"/>
           <p:nvPr/>
         </p:nvSpPr>
         <p:spPr>
           <a:xfrm>
-            <a:off x="571500" y="5448300"/>
+            <a:off x="6350000" y="5448300"/>
             <a:ext cx="5207000" cy="355600"/>
           </a:xfrm>
           <a:prstGeom prst="rect">
@@ -6574,20 +6878,20 @@
                 </a:solidFill>
                 <a:latin typeface="Inter"/>
               </a:rPr>
-              <a:t>≥ 4 hours / month</a:t>
-            </a:r>
-          </a:p>
-        </p:txBody>
-      </p:sp>
-      <p:sp>
-        <p:nvSpPr>
-          <p:cNvPr id="58" name="TextBox 57"/>
+              <a:t>Same-day</a:t>
+            </a:r>
+          </a:p>
+        </p:txBody>
+      </p:sp>
+      <p:sp>
+        <p:nvSpPr>
+          <p:cNvPr id="66" name="TextBox 65"/>
           <p:cNvSpPr txBox="1"/>
           <p:nvPr/>
         </p:nvSpPr>
         <p:spPr>
           <a:xfrm>
-            <a:off x="571500" y="5867400"/>
+            <a:off x="6350000" y="5867400"/>
             <a:ext cx="5207000" cy="190500"/>
           </a:xfrm>
           <a:prstGeom prst="rect">
@@ -6613,67 +6917,21 @@
                 </a:solidFill>
                 <a:latin typeface="Inter"/>
               </a:rPr>
-              <a:t>productive hours given back to each clinician</a:t>
-            </a:r>
-          </a:p>
-        </p:txBody>
-      </p:sp>
-      <p:sp>
-        <p:nvSpPr>
-          <p:cNvPr id="59" name="Rounded Rectangle 58"/>
-          <p:cNvSpPr/>
-          <p:nvPr/>
-        </p:nvSpPr>
-        <p:spPr>
-          <a:xfrm>
-            <a:off x="6362700" y="5359400"/>
-            <a:ext cx="571500" cy="31750"/>
-          </a:xfrm>
-          <a:prstGeom prst="roundRect">
-            <a:avLst>
-              <a:gd name="adj" fmla="val 40000"/>
-            </a:avLst>
-          </a:prstGeom>
-          <a:solidFill>
-            <a:srgbClr val="F2A878"/>
-          </a:solidFill>
-          <a:ln>
-            <a:noFill/>
-          </a:ln>
-          <a:effectLst/>
-        </p:spPr>
-        <p:style>
-          <a:lnRef idx="1">
-            <a:schemeClr val="accent1"/>
-          </a:lnRef>
-          <a:fillRef idx="3">
-            <a:schemeClr val="accent1"/>
-          </a:fillRef>
-          <a:effectRef idx="2">
-            <a:schemeClr val="accent1"/>
-          </a:effectRef>
-          <a:fontRef idx="minor">
-            <a:schemeClr val="lt1"/>
-          </a:fontRef>
-        </p:style>
-        <p:txBody>
-          <a:bodyPr rtlCol="0" anchor="ctr"/>
-          <a:lstStyle/>
-          <a:p>
-            <a:pPr algn="ctr"/>
-          </a:p>
-        </p:txBody>
-      </p:sp>
-      <p:sp>
-        <p:nvSpPr>
-          <p:cNvPr id="60" name="TextBox 59"/>
+              <a:t>client summaries &amp; reports, vs the ~3-week manual baseline</a:t>
+            </a:r>
+          </a:p>
+        </p:txBody>
+      </p:sp>
+      <p:sp>
+        <p:nvSpPr>
+          <p:cNvPr id="67" name="TextBox 66"/>
           <p:cNvSpPr txBox="1"/>
           <p:nvPr/>
         </p:nvSpPr>
         <p:spPr>
           <a:xfrm>
-            <a:off x="6350000" y="5448300"/>
-            <a:ext cx="5207000" cy="355600"/>
+            <a:off x="571500" y="6604000"/>
+            <a:ext cx="5715000" cy="139700"/>
           </a:xfrm>
           <a:prstGeom prst="rect">
             <a:avLst/>
@@ -6692,84 +6950,6 @@
               </a:spcAft>
             </a:pPr>
             <a:r>
-              <a:rPr sz="2100" b="1">
-                <a:solidFill>
-                  <a:srgbClr val="2D6A6E"/>
-                </a:solidFill>
-                <a:latin typeface="Inter"/>
-              </a:rPr>
-              <a:t>Same-day</a:t>
-            </a:r>
-          </a:p>
-        </p:txBody>
-      </p:sp>
-      <p:sp>
-        <p:nvSpPr>
-          <p:cNvPr id="61" name="TextBox 60"/>
-          <p:cNvSpPr txBox="1"/>
-          <p:nvPr/>
-        </p:nvSpPr>
-        <p:spPr>
-          <a:xfrm>
-            <a:off x="6350000" y="5867400"/>
-            <a:ext cx="5207000" cy="190500"/>
-          </a:xfrm>
-          <a:prstGeom prst="rect">
-            <a:avLst/>
-          </a:prstGeom>
-          <a:noFill/>
-        </p:spPr>
-        <p:txBody>
-          <a:bodyPr wrap="square" anchor="t" lIns="25400" rIns="25400" tIns="25400" bIns="25400">
-            <a:spAutoFit/>
-          </a:bodyPr>
-          <a:lstStyle/>
-          <a:p>
-            <a:pPr algn="l">
-              <a:spcAft>
-                <a:spcPts val="0"/>
-              </a:spcAft>
-            </a:pPr>
-            <a:r>
-              <a:rPr sz="900" b="0">
-                <a:solidFill>
-                  <a:srgbClr val="4A5B6B"/>
-                </a:solidFill>
-                <a:latin typeface="Inter"/>
-              </a:rPr>
-              <a:t>client summaries &amp; reports, vs the ~3-week manual baseline</a:t>
-            </a:r>
-          </a:p>
-        </p:txBody>
-      </p:sp>
-      <p:sp>
-        <p:nvSpPr>
-          <p:cNvPr id="62" name="TextBox 61"/>
-          <p:cNvSpPr txBox="1"/>
-          <p:nvPr/>
-        </p:nvSpPr>
-        <p:spPr>
-          <a:xfrm>
-            <a:off x="571500" y="6604000"/>
-            <a:ext cx="5715000" cy="139700"/>
-          </a:xfrm>
-          <a:prstGeom prst="rect">
-            <a:avLst/>
-          </a:prstGeom>
-          <a:noFill/>
-        </p:spPr>
-        <p:txBody>
-          <a:bodyPr wrap="square" anchor="t" lIns="25400" rIns="25400" tIns="25400" bIns="25400">
-            <a:spAutoFit/>
-          </a:bodyPr>
-          <a:lstStyle/>
-          <a:p>
-            <a:pPr algn="l">
-              <a:spcAft>
-                <a:spcPts val="0"/>
-              </a:spcAft>
-            </a:pPr>
-            <a:r>
               <a:rPr sz="600" b="0">
                 <a:solidFill>
                   <a:srgbClr val="8597A4"/>
@@ -6783,7 +6963,7 @@
       </p:sp>
       <p:sp>
         <p:nvSpPr>
-          <p:cNvPr id="63" name="TextBox 62"/>
+          <p:cNvPr id="68" name="TextBox 67"/>
           <p:cNvSpPr txBox="1"/>
           <p:nvPr/>
         </p:nvSpPr>

--- a/docs/design/Sona_Care_Journey_Deck.pptx
+++ b/docs/design/Sona_Care_Journey_Deck.pptx
@@ -3143,8 +3143,8 @@
         </p:nvSpPr>
         <p:spPr>
           <a:xfrm>
-            <a:off x="571500" y="469899"/>
-            <a:ext cx="5715000" cy="165100"/>
+            <a:off x="635000" y="495299"/>
+            <a:ext cx="5715000" cy="215900"/>
           </a:xfrm>
           <a:prstGeom prst="rect">
             <a:avLst/>
@@ -3163,7 +3163,7 @@
               </a:spcAft>
             </a:pPr>
             <a:r>
-              <a:rPr sz="750" b="1">
+              <a:rPr sz="1300" b="1">
                 <a:solidFill>
                   <a:srgbClr val="8597A4"/>
                 </a:solidFill>
@@ -3182,8 +3182,8 @@
         </p:nvSpPr>
         <p:spPr>
           <a:xfrm>
-            <a:off x="571500" y="635000"/>
-            <a:ext cx="11176000" cy="444500"/>
+            <a:off x="635000" y="749300"/>
+            <a:ext cx="10922000" cy="635000"/>
           </a:xfrm>
           <a:prstGeom prst="rect">
             <a:avLst/>
@@ -3202,7 +3202,7 @@
               </a:spcAft>
             </a:pPr>
             <a:r>
-              <a:rPr sz="2300" b="1">
+              <a:rPr sz="4000" b="1">
                 <a:solidFill>
                   <a:srgbClr val="2D6A6E"/>
                 </a:solidFill>
@@ -3221,8 +3221,8 @@
         </p:nvSpPr>
         <p:spPr>
           <a:xfrm>
-            <a:off x="571500" y="1143000"/>
-            <a:ext cx="9906000" cy="508000"/>
+            <a:off x="635000" y="1498600"/>
+            <a:ext cx="10541000" cy="609600"/>
           </a:xfrm>
           <a:prstGeom prst="rect">
             <a:avLst/>
@@ -3241,7 +3241,7 @@
               </a:spcAft>
             </a:pPr>
             <a:r>
-              <a:rPr sz="1000" b="0">
+              <a:rPr sz="1800" b="0">
                 <a:solidFill>
                   <a:srgbClr val="4A5B6B"/>
                 </a:solidFill>
@@ -3260,12 +3260,12 @@
         </p:nvSpPr>
         <p:spPr>
           <a:xfrm>
-            <a:off x="584200" y="1727200"/>
-            <a:ext cx="889000" cy="31750"/>
+            <a:off x="647700" y="2324100"/>
+            <a:ext cx="1016000" cy="38100"/>
           </a:xfrm>
           <a:prstGeom prst="roundRect">
             <a:avLst>
-              <a:gd name="adj" fmla="val 40000"/>
+              <a:gd name="adj" fmla="val 50000"/>
             </a:avLst>
           </a:prstGeom>
           <a:solidFill>
@@ -3306,8 +3306,8 @@
         </p:nvSpPr>
         <p:spPr>
           <a:xfrm>
-            <a:off x="571500" y="2032000"/>
-            <a:ext cx="5207000" cy="177800"/>
+            <a:off x="635000" y="2654300"/>
+            <a:ext cx="5334000" cy="254000"/>
           </a:xfrm>
           <a:prstGeom prst="rect">
             <a:avLst/>
@@ -3326,7 +3326,7 @@
               </a:spcAft>
             </a:pPr>
             <a:r>
-              <a:rPr sz="800" b="1">
+              <a:rPr sz="1600" b="1">
                 <a:solidFill>
                   <a:srgbClr val="2D6A6E"/>
                 </a:solidFill>
@@ -3345,8 +3345,8 @@
         </p:nvSpPr>
         <p:spPr>
           <a:xfrm>
-            <a:off x="571500" y="2286000"/>
-            <a:ext cx="5143500" cy="2794000"/>
+            <a:off x="635000" y="3035300"/>
+            <a:ext cx="5270500" cy="2667000"/>
           </a:xfrm>
           <a:prstGeom prst="rect">
             <a:avLst/>
@@ -3365,7 +3365,7 @@
               </a:spcAft>
             </a:pPr>
             <a:r>
-              <a:rPr sz="900" b="0">
+              <a:rPr sz="1700" b="0">
                 <a:solidFill>
                   <a:srgbClr val="142433"/>
                 </a:solidFill>
@@ -3377,39 +3377,39 @@
           <a:p>
             <a:pPr algn="l">
               <a:spcBef>
-                <a:spcPts val="500"/>
+                <a:spcPts val="900"/>
               </a:spcBef>
               <a:spcAft>
                 <a:spcPts val="0"/>
               </a:spcAft>
             </a:pPr>
             <a:r>
-              <a:rPr sz="900" b="0">
+              <a:rPr sz="1700" b="0">
                 <a:solidFill>
                   <a:srgbClr val="142433"/>
                 </a:solidFill>
                 <a:latin typeface="Inter"/>
               </a:rPr>
-              <a:t>It does the repetitive admin alongside the clinician — capturing the enquiry, running a smart intake, prepping the consult, recording the triage decision, and drafting the first session plan and family summary, always as drafts for the clinician to review.</a:t>
+              <a:t>It does the repetitive admin alongside the clinician — capturing the enquiry, smart intake, consult prep, the triage decision, the first session plan and the family summary, always as drafts for the clinician to review.</a:t>
             </a:r>
           </a:p>
           <a:p>
             <a:pPr algn="l">
               <a:spcBef>
-                <a:spcPts val="500"/>
+                <a:spcPts val="900"/>
               </a:spcBef>
               <a:spcAft>
                 <a:spcPts val="0"/>
               </a:spcAft>
             </a:pPr>
             <a:r>
-              <a:rPr sz="900" b="0">
+              <a:rPr sz="1700" b="0">
                 <a:solidFill>
                   <a:srgbClr val="142433"/>
                 </a:solidFill>
                 <a:latin typeface="Inter"/>
               </a:rPr>
-              <a:t>Sona augments clinicians. Its purpose is to increase human productivity — less admin burnout, more time for care.</a:t>
+              <a:t>Sona augments clinicians — it increases human productivity: less admin burnout, more time for care.</a:t>
             </a:r>
           </a:p>
         </p:txBody>
@@ -3422,8 +3422,8 @@
         </p:nvSpPr>
         <p:spPr>
           <a:xfrm>
-            <a:off x="6083300" y="2044700"/>
-            <a:ext cx="12700" cy="2984500"/>
+            <a:off x="6146800" y="2667000"/>
+            <a:ext cx="12700" cy="3086100"/>
           </a:xfrm>
           <a:prstGeom prst="rect">
             <a:avLst/>
@@ -3466,8 +3466,8 @@
         </p:nvSpPr>
         <p:spPr>
           <a:xfrm>
-            <a:off x="6388100" y="2032000"/>
-            <a:ext cx="5080000" cy="177800"/>
+            <a:off x="6451600" y="2654300"/>
+            <a:ext cx="5207000" cy="254000"/>
           </a:xfrm>
           <a:prstGeom prst="rect">
             <a:avLst/>
@@ -3486,7 +3486,7 @@
               </a:spcAft>
             </a:pPr>
             <a:r>
-              <a:rPr sz="800" b="1">
+              <a:rPr sz="1600" b="1">
                 <a:solidFill>
                   <a:srgbClr val="2D6A6E"/>
                 </a:solidFill>
@@ -3505,8 +3505,8 @@
         </p:nvSpPr>
         <p:spPr>
           <a:xfrm>
-            <a:off x="6388100" y="2298700"/>
-            <a:ext cx="5080000" cy="177800"/>
+            <a:off x="6451600" y="3035300"/>
+            <a:ext cx="5207000" cy="254000"/>
           </a:xfrm>
           <a:prstGeom prst="rect">
             <a:avLst/>
@@ -3525,7 +3525,7 @@
               </a:spcAft>
             </a:pPr>
             <a:r>
-              <a:rPr sz="900" b="0">
+              <a:rPr sz="1600" b="0">
                 <a:solidFill>
                   <a:srgbClr val="4A5B6B"/>
                 </a:solidFill>
@@ -3544,8 +3544,8 @@
         </p:nvSpPr>
         <p:spPr>
           <a:xfrm>
-            <a:off x="6388100" y="2578100"/>
-            <a:ext cx="5207000" cy="177800"/>
+            <a:off x="6451600" y="3429000"/>
+            <a:ext cx="5461000" cy="304800"/>
           </a:xfrm>
           <a:prstGeom prst="rect">
             <a:avLst/>
@@ -3560,7 +3560,7 @@
           <a:p>
             <a:pPr algn="l"/>
             <a:r>
-              <a:rPr sz="900" b="1">
+              <a:rPr sz="2000" b="1">
                 <a:solidFill>
                   <a:srgbClr val="2D6A6E"/>
                 </a:solidFill>
@@ -3569,7 +3569,7 @@
               <a:t>Executive</a:t>
             </a:r>
             <a:r>
-              <a:rPr sz="900" b="0">
+              <a:rPr sz="2000" b="0">
                 <a:solidFill>
                   <a:srgbClr val="142433"/>
                 </a:solidFill>
@@ -3588,8 +3588,8 @@
         </p:nvSpPr>
         <p:spPr>
           <a:xfrm>
-            <a:off x="6388100" y="2832100"/>
-            <a:ext cx="5207000" cy="177800"/>
+            <a:off x="6451600" y="3848099"/>
+            <a:ext cx="5461000" cy="304800"/>
           </a:xfrm>
           <a:prstGeom prst="rect">
             <a:avLst/>
@@ -3604,7 +3604,7 @@
           <a:p>
             <a:pPr algn="l"/>
             <a:r>
-              <a:rPr sz="900" b="1">
+              <a:rPr sz="2000" b="1">
                 <a:solidFill>
                   <a:srgbClr val="2D6A6E"/>
                 </a:solidFill>
@@ -3613,7 +3613,7 @@
               <a:t>Product</a:t>
             </a:r>
             <a:r>
-              <a:rPr sz="900" b="0">
+              <a:rPr sz="2000" b="0">
                 <a:solidFill>
                   <a:srgbClr val="142433"/>
                 </a:solidFill>
@@ -3632,8 +3632,8 @@
         </p:nvSpPr>
         <p:spPr>
           <a:xfrm>
-            <a:off x="6388100" y="3086100"/>
-            <a:ext cx="5207000" cy="177800"/>
+            <a:off x="6451600" y="4267200"/>
+            <a:ext cx="5461000" cy="304800"/>
           </a:xfrm>
           <a:prstGeom prst="rect">
             <a:avLst/>
@@ -3648,7 +3648,7 @@
           <a:p>
             <a:pPr algn="l"/>
             <a:r>
-              <a:rPr sz="900" b="1">
+              <a:rPr sz="2000" b="1">
                 <a:solidFill>
                   <a:srgbClr val="2D6A6E"/>
                 </a:solidFill>
@@ -3657,7 +3657,7 @@
               <a:t>Process flow</a:t>
             </a:r>
             <a:r>
-              <a:rPr sz="900" b="0">
+              <a:rPr sz="2000" b="0">
                 <a:solidFill>
                   <a:srgbClr val="142433"/>
                 </a:solidFill>
@@ -3676,8 +3676,8 @@
         </p:nvSpPr>
         <p:spPr>
           <a:xfrm>
-            <a:off x="6388100" y="3530600"/>
-            <a:ext cx="5080000" cy="165100"/>
+            <a:off x="6451600" y="4838700"/>
+            <a:ext cx="5207000" cy="228600"/>
           </a:xfrm>
           <a:prstGeom prst="rect">
             <a:avLst/>
@@ -3696,7 +3696,7 @@
               </a:spcAft>
             </a:pPr>
             <a:r>
-              <a:rPr sz="750" b="1">
+              <a:rPr sz="1300" b="1">
                 <a:solidFill>
                   <a:srgbClr val="2D6A6E"/>
                 </a:solidFill>
@@ -3715,8 +3715,8 @@
         </p:nvSpPr>
         <p:spPr>
           <a:xfrm>
-            <a:off x="6388100" y="3733799"/>
-            <a:ext cx="5143500" cy="381000"/>
+            <a:off x="6451600" y="5118100"/>
+            <a:ext cx="5334000" cy="571500"/>
           </a:xfrm>
           <a:prstGeom prst="rect">
             <a:avLst/>
@@ -3735,7 +3735,7 @@
               </a:spcAft>
             </a:pPr>
             <a:r>
-              <a:rPr sz="800" b="0">
+              <a:rPr sz="1400" b="0">
                 <a:solidFill>
                   <a:srgbClr val="4A5B6B"/>
                 </a:solidFill>
@@ -3755,12 +3755,12 @@
         </p:nvSpPr>
         <p:spPr>
           <a:xfrm>
-            <a:off x="571500" y="5664200"/>
-            <a:ext cx="11049000" cy="762000"/>
+            <a:off x="635000" y="5791200"/>
+            <a:ext cx="10922000" cy="889000"/>
           </a:xfrm>
           <a:prstGeom prst="roundRect">
             <a:avLst>
-              <a:gd name="adj" fmla="val 13333"/>
+              <a:gd name="adj" fmla="val 11428"/>
             </a:avLst>
           </a:prstGeom>
           <a:solidFill>
@@ -3801,8 +3801,8 @@
         </p:nvSpPr>
         <p:spPr>
           <a:xfrm>
-            <a:off x="774700" y="5803900"/>
-            <a:ext cx="3810000" cy="152400"/>
+            <a:off x="838200" y="5956300"/>
+            <a:ext cx="3810000" cy="203200"/>
           </a:xfrm>
           <a:prstGeom prst="rect">
             <a:avLst/>
@@ -3821,7 +3821,7 @@
               </a:spcAft>
             </a:pPr>
             <a:r>
-              <a:rPr sz="700" b="1">
+              <a:rPr sz="1200" b="1">
                 <a:solidFill>
                   <a:srgbClr val="2D6A6E"/>
                 </a:solidFill>
@@ -3840,8 +3840,8 @@
         </p:nvSpPr>
         <p:spPr>
           <a:xfrm>
-            <a:off x="774700" y="6032500"/>
-            <a:ext cx="2667000" cy="177800"/>
+            <a:off x="838200" y="6273800"/>
+            <a:ext cx="2730500" cy="254000"/>
           </a:xfrm>
           <a:prstGeom prst="rect">
             <a:avLst/>
@@ -3860,7 +3860,7 @@
               </a:spcAft>
             </a:pPr>
             <a:r>
-              <a:rPr sz="750" b="0">
+              <a:rPr sz="1300" b="0">
                 <a:solidFill>
                   <a:srgbClr val="1E4A4D"/>
                 </a:solidFill>
@@ -3879,8 +3879,8 @@
         </p:nvSpPr>
         <p:spPr>
           <a:xfrm>
-            <a:off x="3530600" y="6032500"/>
-            <a:ext cx="2667000" cy="177800"/>
+            <a:off x="3568700" y="6273800"/>
+            <a:ext cx="2730500" cy="254000"/>
           </a:xfrm>
           <a:prstGeom prst="rect">
             <a:avLst/>
@@ -3899,7 +3899,7 @@
               </a:spcAft>
             </a:pPr>
             <a:r>
-              <a:rPr sz="750" b="0">
+              <a:rPr sz="1300" b="0">
                 <a:solidFill>
                   <a:srgbClr val="1E4A4D"/>
                 </a:solidFill>
@@ -3918,8 +3918,8 @@
         </p:nvSpPr>
         <p:spPr>
           <a:xfrm>
-            <a:off x="6286500" y="6032500"/>
-            <a:ext cx="2667000" cy="177800"/>
+            <a:off x="6299200" y="6273800"/>
+            <a:ext cx="2730500" cy="254000"/>
           </a:xfrm>
           <a:prstGeom prst="rect">
             <a:avLst/>
@@ -3938,13 +3938,13 @@
               </a:spcAft>
             </a:pPr>
             <a:r>
-              <a:rPr sz="750" b="0">
+              <a:rPr sz="1300" b="0">
                 <a:solidFill>
                   <a:srgbClr val="1E4A4D"/>
                 </a:solidFill>
                 <a:latin typeface="Inter"/>
               </a:rPr>
-              <a:t>UK data residency + audit by construction</a:t>
+              <a:t>UK data residency + audit</a:t>
             </a:r>
           </a:p>
         </p:txBody>
@@ -3957,8 +3957,8 @@
         </p:nvSpPr>
         <p:spPr>
           <a:xfrm>
-            <a:off x="8953500" y="6032500"/>
-            <a:ext cx="2667000" cy="177800"/>
+            <a:off x="8902700" y="6273800"/>
+            <a:ext cx="2730500" cy="254000"/>
           </a:xfrm>
           <a:prstGeom prst="rect">
             <a:avLst/>
@@ -3977,13 +3977,13 @@
               </a:spcAft>
             </a:pPr>
             <a:r>
-              <a:rPr sz="750" b="0">
+              <a:rPr sz="1300" b="0">
                 <a:solidFill>
                   <a:srgbClr val="1E4A4D"/>
                 </a:solidFill>
                 <a:latin typeface="Inter"/>
               </a:rPr>
-              <a:t>Augment people, never replace them</a:t>
+              <a:t>Augment people, never replace</a:t>
             </a:r>
           </a:p>
         </p:txBody>
@@ -3996,8 +3996,8 @@
         </p:nvSpPr>
         <p:spPr>
           <a:xfrm>
-            <a:off x="3429000" y="6007100"/>
-            <a:ext cx="6350" cy="279400"/>
+            <a:off x="3467100" y="6235700"/>
+            <a:ext cx="6350" cy="330200"/>
           </a:xfrm>
           <a:prstGeom prst="rect">
             <a:avLst/>
@@ -4040,8 +4040,8 @@
         </p:nvSpPr>
         <p:spPr>
           <a:xfrm>
-            <a:off x="6184900" y="6007100"/>
-            <a:ext cx="6350" cy="279400"/>
+            <a:off x="6197600" y="6235700"/>
+            <a:ext cx="6350" cy="330200"/>
           </a:xfrm>
           <a:prstGeom prst="rect">
             <a:avLst/>
@@ -4084,8 +4084,8 @@
         </p:nvSpPr>
         <p:spPr>
           <a:xfrm>
-            <a:off x="8851900" y="6007100"/>
-            <a:ext cx="6350" cy="279400"/>
+            <a:off x="8801100" y="6235700"/>
+            <a:ext cx="6350" cy="330200"/>
           </a:xfrm>
           <a:prstGeom prst="rect">
             <a:avLst/>
@@ -4128,8 +4128,8 @@
         </p:nvSpPr>
         <p:spPr>
           <a:xfrm>
-            <a:off x="571500" y="6604000"/>
-            <a:ext cx="5715000" cy="139700"/>
+            <a:off x="635000" y="6642100"/>
+            <a:ext cx="5715000" cy="165100"/>
           </a:xfrm>
           <a:prstGeom prst="rect">
             <a:avLst/>
@@ -4137,18 +4137,13 @@
           <a:noFill/>
         </p:spPr>
         <p:txBody>
-          <a:bodyPr wrap="square" anchor="t" lIns="25400" rIns="25400" tIns="25400" bIns="25400">
+          <a:bodyPr wrap="none">
             <a:spAutoFit/>
           </a:bodyPr>
           <a:lstStyle/>
           <a:p>
-            <a:pPr algn="l">
-              <a:spcAft>
-                <a:spcPts val="0"/>
-              </a:spcAft>
-            </a:pPr>
-            <a:r>
-              <a:rPr sz="600" b="0">
+            <a:r>
+              <a:rPr sz="1000">
                 <a:solidFill>
                   <a:srgbClr val="8597A4"/>
                 </a:solidFill>
@@ -4167,8 +4162,8 @@
         </p:nvSpPr>
         <p:spPr>
           <a:xfrm>
-            <a:off x="10414000" y="6604000"/>
-            <a:ext cx="1206500" cy="139700"/>
+            <a:off x="10287000" y="6642100"/>
+            <a:ext cx="1270000" cy="165100"/>
           </a:xfrm>
           <a:prstGeom prst="rect">
             <a:avLst/>
@@ -4176,18 +4171,14 @@
           <a:noFill/>
         </p:spPr>
         <p:txBody>
-          <a:bodyPr wrap="square" anchor="t" lIns="25400" rIns="25400" tIns="25400" bIns="25400">
+          <a:bodyPr wrap="none">
             <a:spAutoFit/>
           </a:bodyPr>
           <a:lstStyle/>
           <a:p>
-            <a:pPr algn="r">
-              <a:spcAft>
-                <a:spcPts val="0"/>
-              </a:spcAft>
-            </a:pPr>
-            <a:r>
-              <a:rPr sz="600" b="0">
+            <a:pPr algn="r"/>
+            <a:r>
+              <a:rPr sz="1000">
                 <a:solidFill>
                   <a:srgbClr val="8597A4"/>
                 </a:solidFill>
@@ -4268,8 +4259,8 @@
         </p:nvSpPr>
         <p:spPr>
           <a:xfrm>
-            <a:off x="571500" y="469899"/>
-            <a:ext cx="5715000" cy="165100"/>
+            <a:off x="635000" y="431800"/>
+            <a:ext cx="5715000" cy="203200"/>
           </a:xfrm>
           <a:prstGeom prst="rect">
             <a:avLst/>
@@ -4288,7 +4279,7 @@
               </a:spcAft>
             </a:pPr>
             <a:r>
-              <a:rPr sz="750" b="1">
+              <a:rPr sz="1200" b="1">
                 <a:solidFill>
                   <a:srgbClr val="8597A4"/>
                 </a:solidFill>
@@ -4307,8 +4298,8 @@
         </p:nvSpPr>
         <p:spPr>
           <a:xfrm>
-            <a:off x="571500" y="635000"/>
-            <a:ext cx="10160000" cy="381000"/>
+            <a:off x="635000" y="660400"/>
+            <a:ext cx="10414000" cy="508000"/>
           </a:xfrm>
           <a:prstGeom prst="rect">
             <a:avLst/>
@@ -4327,7 +4318,7 @@
               </a:spcAft>
             </a:pPr>
             <a:r>
-              <a:rPr sz="2000" b="1">
+              <a:rPr sz="3600" b="1">
                 <a:solidFill>
                   <a:srgbClr val="2D6A6E"/>
                 </a:solidFill>
@@ -4346,8 +4337,8 @@
         </p:nvSpPr>
         <p:spPr>
           <a:xfrm>
-            <a:off x="571500" y="1066800"/>
-            <a:ext cx="10287000" cy="317500"/>
+            <a:off x="635000" y="1333500"/>
+            <a:ext cx="10541000" cy="292100"/>
           </a:xfrm>
           <a:prstGeom prst="rect">
             <a:avLst/>
@@ -4366,7 +4357,7 @@
               </a:spcAft>
             </a:pPr>
             <a:r>
-              <a:rPr sz="950" b="0">
+              <a:rPr sz="1600" b="0">
                 <a:solidFill>
                   <a:srgbClr val="4A5B6B"/>
                 </a:solidFill>
@@ -4385,12 +4376,12 @@
         </p:nvSpPr>
         <p:spPr>
           <a:xfrm>
-            <a:off x="584200" y="1422400"/>
-            <a:ext cx="889000" cy="31750"/>
+            <a:off x="647700" y="1727200"/>
+            <a:ext cx="952500" cy="38100"/>
           </a:xfrm>
           <a:prstGeom prst="roundRect">
             <a:avLst>
-              <a:gd name="adj" fmla="val 40000"/>
+              <a:gd name="adj" fmla="val 50000"/>
             </a:avLst>
           </a:prstGeom>
           <a:solidFill>
@@ -4431,12 +4422,12 @@
         </p:nvSpPr>
         <p:spPr>
           <a:xfrm>
-            <a:off x="571500" y="1663700"/>
-            <a:ext cx="2098040" cy="419100"/>
+            <a:off x="635000" y="1905000"/>
+            <a:ext cx="2072640" cy="533400"/>
           </a:xfrm>
           <a:prstGeom prst="roundRect">
             <a:avLst>
-              <a:gd name="adj" fmla="val 18181"/>
+              <a:gd name="adj" fmla="val 16666"/>
             </a:avLst>
           </a:prstGeom>
           <a:solidFill>
@@ -4477,8 +4468,8 @@
         </p:nvSpPr>
         <p:spPr>
           <a:xfrm>
-            <a:off x="647700" y="1663700"/>
-            <a:ext cx="1945640" cy="419100"/>
+            <a:off x="723900" y="1905000"/>
+            <a:ext cx="1894839" cy="533400"/>
           </a:xfrm>
           <a:prstGeom prst="rect">
             <a:avLst/>
@@ -4497,7 +4488,7 @@
               </a:spcAft>
             </a:pPr>
             <a:r>
-              <a:rPr sz="900" b="1">
+              <a:rPr sz="1500" b="1">
                 <a:solidFill>
                   <a:srgbClr val="FFFFFF"/>
                 </a:solidFill>
@@ -4516,12 +4507,12 @@
         </p:nvSpPr>
         <p:spPr>
           <a:xfrm>
-            <a:off x="2809239" y="1663700"/>
-            <a:ext cx="2098040" cy="419100"/>
+            <a:off x="2847340" y="1905000"/>
+            <a:ext cx="2072640" cy="533400"/>
           </a:xfrm>
           <a:prstGeom prst="roundRect">
             <a:avLst>
-              <a:gd name="adj" fmla="val 18181"/>
+              <a:gd name="adj" fmla="val 16666"/>
             </a:avLst>
           </a:prstGeom>
           <a:solidFill>
@@ -4562,8 +4553,8 @@
         </p:nvSpPr>
         <p:spPr>
           <a:xfrm>
-            <a:off x="2885440" y="1663700"/>
-            <a:ext cx="1945640" cy="419100"/>
+            <a:off x="2936239" y="1905000"/>
+            <a:ext cx="1894839" cy="533400"/>
           </a:xfrm>
           <a:prstGeom prst="rect">
             <a:avLst/>
@@ -4582,7 +4573,7 @@
               </a:spcAft>
             </a:pPr>
             <a:r>
-              <a:rPr sz="900" b="1">
+              <a:rPr sz="1500" b="1">
                 <a:solidFill>
                   <a:srgbClr val="FFFFFF"/>
                 </a:solidFill>
@@ -4601,12 +4592,12 @@
         </p:nvSpPr>
         <p:spPr>
           <a:xfrm>
-            <a:off x="5046979" y="1663700"/>
-            <a:ext cx="2098040" cy="419100"/>
+            <a:off x="5059680" y="1905000"/>
+            <a:ext cx="2072640" cy="533400"/>
           </a:xfrm>
           <a:prstGeom prst="roundRect">
             <a:avLst>
-              <a:gd name="adj" fmla="val 18181"/>
+              <a:gd name="adj" fmla="val 16666"/>
             </a:avLst>
           </a:prstGeom>
           <a:solidFill>
@@ -4647,8 +4638,8 @@
         </p:nvSpPr>
         <p:spPr>
           <a:xfrm>
-            <a:off x="5123180" y="1663700"/>
-            <a:ext cx="1945640" cy="419100"/>
+            <a:off x="5148580" y="1905000"/>
+            <a:ext cx="1894839" cy="533400"/>
           </a:xfrm>
           <a:prstGeom prst="rect">
             <a:avLst/>
@@ -4667,7 +4658,7 @@
               </a:spcAft>
             </a:pPr>
             <a:r>
-              <a:rPr sz="900" b="1">
+              <a:rPr sz="1500" b="1">
                 <a:solidFill>
                   <a:srgbClr val="FFFFFF"/>
                 </a:solidFill>
@@ -4686,12 +4677,12 @@
         </p:nvSpPr>
         <p:spPr>
           <a:xfrm>
-            <a:off x="7284719" y="1663700"/>
-            <a:ext cx="2098040" cy="419100"/>
+            <a:off x="7272019" y="1905000"/>
+            <a:ext cx="2072640" cy="533400"/>
           </a:xfrm>
           <a:prstGeom prst="roundRect">
             <a:avLst>
-              <a:gd name="adj" fmla="val 18181"/>
+              <a:gd name="adj" fmla="val 16666"/>
             </a:avLst>
           </a:prstGeom>
           <a:solidFill>
@@ -4732,8 +4723,8 @@
         </p:nvSpPr>
         <p:spPr>
           <a:xfrm>
-            <a:off x="7360919" y="1663700"/>
-            <a:ext cx="1945640" cy="419100"/>
+            <a:off x="7360919" y="1905000"/>
+            <a:ext cx="1894839" cy="533400"/>
           </a:xfrm>
           <a:prstGeom prst="rect">
             <a:avLst/>
@@ -4752,7 +4743,7 @@
               </a:spcAft>
             </a:pPr>
             <a:r>
-              <a:rPr sz="900" b="1">
+              <a:rPr sz="1500" b="1">
                 <a:solidFill>
                   <a:srgbClr val="FFFFFF"/>
                 </a:solidFill>
@@ -4771,12 +4762,12 @@
         </p:nvSpPr>
         <p:spPr>
           <a:xfrm>
-            <a:off x="9522459" y="1663700"/>
-            <a:ext cx="2098040" cy="419100"/>
+            <a:off x="9484360" y="1905000"/>
+            <a:ext cx="2072640" cy="533400"/>
           </a:xfrm>
           <a:prstGeom prst="roundRect">
             <a:avLst>
-              <a:gd name="adj" fmla="val 18181"/>
+              <a:gd name="adj" fmla="val 16666"/>
             </a:avLst>
           </a:prstGeom>
           <a:solidFill>
@@ -4817,8 +4808,8 @@
         </p:nvSpPr>
         <p:spPr>
           <a:xfrm>
-            <a:off x="9598660" y="1663700"/>
-            <a:ext cx="1945640" cy="419100"/>
+            <a:off x="9573259" y="1905000"/>
+            <a:ext cx="1894839" cy="533400"/>
           </a:xfrm>
           <a:prstGeom prst="rect">
             <a:avLst/>
@@ -4837,7 +4828,7 @@
               </a:spcAft>
             </a:pPr>
             <a:r>
-              <a:rPr sz="900" b="1">
+              <a:rPr sz="1500" b="1">
                 <a:solidFill>
                   <a:srgbClr val="FFFFFF"/>
                 </a:solidFill>
@@ -4856,8 +4847,8 @@
         </p:nvSpPr>
         <p:spPr>
           <a:xfrm>
-            <a:off x="571500" y="2286000"/>
-            <a:ext cx="7620000" cy="152400"/>
+            <a:off x="635000" y="2590800"/>
+            <a:ext cx="8255000" cy="190500"/>
           </a:xfrm>
           <a:prstGeom prst="rect">
             <a:avLst/>
@@ -4876,7 +4867,7 @@
               </a:spcAft>
             </a:pPr>
             <a:r>
-              <a:rPr sz="700" b="1">
+              <a:rPr sz="1200" b="1">
                 <a:solidFill>
                   <a:srgbClr val="8597A4"/>
                 </a:solidFill>
@@ -4895,8 +4886,8 @@
         </p:nvCxnSpPr>
         <p:spPr>
           <a:xfrm>
-            <a:off x="1620520" y="2095499"/>
-            <a:ext cx="0" cy="1038607"/>
+            <a:off x="1671320" y="2451100"/>
+            <a:ext cx="0" cy="857250"/>
           </a:xfrm>
           <a:prstGeom prst="line">
             <a:avLst/>
@@ -4931,8 +4922,8 @@
         </p:nvCxnSpPr>
         <p:spPr>
           <a:xfrm>
-            <a:off x="3858259" y="2095499"/>
-            <a:ext cx="0" cy="1120903"/>
+            <a:off x="3883659" y="2451100"/>
+            <a:ext cx="0" cy="933450"/>
           </a:xfrm>
           <a:prstGeom prst="line">
             <a:avLst/>
@@ -4967,8 +4958,8 @@
         </p:nvCxnSpPr>
         <p:spPr>
           <a:xfrm>
-            <a:off x="6096000" y="2095499"/>
-            <a:ext cx="0" cy="819151"/>
+            <a:off x="6096000" y="2451100"/>
+            <a:ext cx="0" cy="654050"/>
           </a:xfrm>
           <a:prstGeom prst="line">
             <a:avLst/>
@@ -5003,8 +4994,8 @@
         </p:nvCxnSpPr>
         <p:spPr>
           <a:xfrm>
-            <a:off x="8333739" y="2095499"/>
-            <a:ext cx="0" cy="627127"/>
+            <a:off x="8308339" y="2451100"/>
+            <a:ext cx="0" cy="476250"/>
           </a:xfrm>
           <a:prstGeom prst="line">
             <a:avLst/>
@@ -5039,8 +5030,8 @@
         </p:nvCxnSpPr>
         <p:spPr>
           <a:xfrm>
-            <a:off x="10571479" y="2095499"/>
-            <a:ext cx="0" cy="503683"/>
+            <a:off x="10520680" y="2451100"/>
+            <a:ext cx="0" cy="361950"/>
           </a:xfrm>
           <a:prstGeom prst="line">
             <a:avLst/>
@@ -5075,8 +5066,8 @@
         </p:nvSpPr>
         <p:spPr>
           <a:xfrm>
-            <a:off x="1620520" y="2656332"/>
-            <a:ext cx="8950959" cy="772668"/>
+            <a:off x="1671320" y="2895600"/>
+            <a:ext cx="8849360" cy="660400"/>
           </a:xfrm>
           <a:custGeom>
             <a:avLst/>
@@ -5085,27 +5076,27 @@
             <a:cxnLst/>
             <a:rect l="l" t="t" r="r" b="b"/>
             <a:pathLst>
-              <a:path w="8950959" h="772668">
+              <a:path w="8849360" h="660400">
                 <a:moveTo>
-                  <a:pt x="0" y="772668"/>
+                  <a:pt x="0" y="660400"/>
                 </a:moveTo>
                 <a:lnTo>
-                  <a:pt x="0" y="534924"/>
+                  <a:pt x="0" y="495300"/>
                 </a:lnTo>
                 <a:lnTo>
-                  <a:pt x="2237739" y="617220"/>
+                  <a:pt x="2212339" y="571500"/>
                 </a:lnTo>
                 <a:lnTo>
-                  <a:pt x="4475480" y="315468"/>
+                  <a:pt x="4424680" y="292100"/>
                 </a:lnTo>
                 <a:lnTo>
-                  <a:pt x="6713219" y="123444"/>
+                  <a:pt x="6637019" y="114300"/>
                 </a:lnTo>
                 <a:lnTo>
-                  <a:pt x="8950959" y="0"/>
+                  <a:pt x="8849360" y="0"/>
                 </a:lnTo>
                 <a:lnTo>
-                  <a:pt x="8950959" y="772668"/>
+                  <a:pt x="8849360" y="660400"/>
                 </a:lnTo>
                 <a:close/>
               </a:path>
@@ -5149,8 +5140,8 @@
         </p:nvCxnSpPr>
         <p:spPr>
           <a:xfrm>
-            <a:off x="571500" y="3429000"/>
-            <a:ext cx="11049000" cy="0"/>
+            <a:off x="635000" y="3556000"/>
+            <a:ext cx="10922000" cy="0"/>
           </a:xfrm>
           <a:prstGeom prst="line">
             <a:avLst/>
@@ -5185,13 +5176,13 @@
         </p:nvCxnSpPr>
         <p:spPr>
           <a:xfrm>
-            <a:off x="1620520" y="3191256"/>
-            <a:ext cx="2237739" cy="82296"/>
+            <a:off x="1671320" y="3390900"/>
+            <a:ext cx="2212339" cy="76200"/>
           </a:xfrm>
           <a:prstGeom prst="line">
             <a:avLst/>
           </a:prstGeom>
-          <a:ln w="25400">
+          <a:ln w="31750">
             <a:solidFill>
               <a:srgbClr val="2D6A6E"/>
             </a:solidFill>
@@ -5221,13 +5212,13 @@
         </p:nvCxnSpPr>
         <p:spPr>
           <a:xfrm flipV="1">
-            <a:off x="3858259" y="2971800"/>
-            <a:ext cx="2237741" cy="301752"/>
+            <a:off x="3883659" y="3187700"/>
+            <a:ext cx="2212341" cy="279400"/>
           </a:xfrm>
           <a:prstGeom prst="line">
             <a:avLst/>
           </a:prstGeom>
-          <a:ln w="25400">
+          <a:ln w="31750">
             <a:solidFill>
               <a:srgbClr val="2D6A6E"/>
             </a:solidFill>
@@ -5257,13 +5248,13 @@
         </p:nvCxnSpPr>
         <p:spPr>
           <a:xfrm flipV="1">
-            <a:off x="6096000" y="2779776"/>
-            <a:ext cx="2237739" cy="192024"/>
+            <a:off x="6096000" y="3009900"/>
+            <a:ext cx="2212339" cy="177800"/>
           </a:xfrm>
           <a:prstGeom prst="line">
             <a:avLst/>
           </a:prstGeom>
-          <a:ln w="25400">
+          <a:ln w="31750">
             <a:solidFill>
               <a:srgbClr val="2D6A6E"/>
             </a:solidFill>
@@ -5293,13 +5284,13 @@
         </p:nvCxnSpPr>
         <p:spPr>
           <a:xfrm flipV="1">
-            <a:off x="8333739" y="2656332"/>
-            <a:ext cx="2237740" cy="123444"/>
+            <a:off x="8308339" y="2895600"/>
+            <a:ext cx="2212341" cy="114300"/>
           </a:xfrm>
           <a:prstGeom prst="line">
             <a:avLst/>
           </a:prstGeom>
-          <a:ln w="25400">
+          <a:ln w="31750">
             <a:solidFill>
               <a:srgbClr val="2D6A6E"/>
             </a:solidFill>
@@ -5329,8 +5320,8 @@
         </p:nvSpPr>
         <p:spPr>
           <a:xfrm>
-            <a:off x="1550670" y="3121406"/>
-            <a:ext cx="139700" cy="139700"/>
+            <a:off x="1588769" y="3308350"/>
+            <a:ext cx="165100" cy="165100"/>
           </a:xfrm>
           <a:prstGeom prst="ellipse">
             <a:avLst/>
@@ -5375,8 +5366,8 @@
         </p:nvSpPr>
         <p:spPr>
           <a:xfrm>
-            <a:off x="571500" y="3530600"/>
-            <a:ext cx="2098040" cy="152400"/>
+            <a:off x="635000" y="3657600"/>
+            <a:ext cx="2072640" cy="203200"/>
           </a:xfrm>
           <a:prstGeom prst="rect">
             <a:avLst/>
@@ -5395,7 +5386,7 @@
               </a:spcAft>
             </a:pPr>
             <a:r>
-              <a:rPr sz="850" b="1">
+              <a:rPr sz="1500" b="1">
                 <a:solidFill>
                   <a:srgbClr val="2D6A6E"/>
                 </a:solidFill>
@@ -5414,8 +5405,8 @@
         </p:nvSpPr>
         <p:spPr>
           <a:xfrm>
-            <a:off x="571500" y="3695700"/>
-            <a:ext cx="2098040" cy="139700"/>
+            <a:off x="635000" y="3898900"/>
+            <a:ext cx="2072640" cy="177800"/>
           </a:xfrm>
           <a:prstGeom prst="rect">
             <a:avLst/>
@@ -5434,7 +5425,7 @@
               </a:spcAft>
             </a:pPr>
             <a:r>
-              <a:rPr sz="675" b="0">
+              <a:rPr sz="1100" b="0">
                 <a:solidFill>
                   <a:srgbClr val="4A5B6B"/>
                 </a:solidFill>
@@ -5453,8 +5444,8 @@
         </p:nvSpPr>
         <p:spPr>
           <a:xfrm>
-            <a:off x="3788409" y="3203701"/>
-            <a:ext cx="139700" cy="139700"/>
+            <a:off x="3801109" y="3384550"/>
+            <a:ext cx="165100" cy="165100"/>
           </a:xfrm>
           <a:prstGeom prst="ellipse">
             <a:avLst/>
@@ -5499,8 +5490,8 @@
         </p:nvSpPr>
         <p:spPr>
           <a:xfrm>
-            <a:off x="2809239" y="3530600"/>
-            <a:ext cx="2098040" cy="152400"/>
+            <a:off x="2847340" y="3657600"/>
+            <a:ext cx="2072640" cy="203200"/>
           </a:xfrm>
           <a:prstGeom prst="rect">
             <a:avLst/>
@@ -5519,7 +5510,7 @@
               </a:spcAft>
             </a:pPr>
             <a:r>
-              <a:rPr sz="850" b="1">
+              <a:rPr sz="1500" b="1">
                 <a:solidFill>
                   <a:srgbClr val="356985"/>
                 </a:solidFill>
@@ -5538,8 +5529,8 @@
         </p:nvSpPr>
         <p:spPr>
           <a:xfrm>
-            <a:off x="2809239" y="3695700"/>
-            <a:ext cx="2098040" cy="139700"/>
+            <a:off x="2847340" y="3898900"/>
+            <a:ext cx="2072640" cy="177800"/>
           </a:xfrm>
           <a:prstGeom prst="rect">
             <a:avLst/>
@@ -5558,7 +5549,7 @@
               </a:spcAft>
             </a:pPr>
             <a:r>
-              <a:rPr sz="675" b="0">
+              <a:rPr sz="1100" b="0">
                 <a:solidFill>
                   <a:srgbClr val="4A5B6B"/>
                 </a:solidFill>
@@ -5577,8 +5568,8 @@
         </p:nvSpPr>
         <p:spPr>
           <a:xfrm>
-            <a:off x="6026150" y="2901950"/>
-            <a:ext cx="139700" cy="139700"/>
+            <a:off x="6013450" y="3105150"/>
+            <a:ext cx="165100" cy="165100"/>
           </a:xfrm>
           <a:prstGeom prst="ellipse">
             <a:avLst/>
@@ -5623,8 +5614,8 @@
         </p:nvSpPr>
         <p:spPr>
           <a:xfrm>
-            <a:off x="5046979" y="3530600"/>
-            <a:ext cx="2098040" cy="152400"/>
+            <a:off x="5059680" y="3657600"/>
+            <a:ext cx="2072640" cy="203200"/>
           </a:xfrm>
           <a:prstGeom prst="rect">
             <a:avLst/>
@@ -5643,7 +5634,7 @@
               </a:spcAft>
             </a:pPr>
             <a:r>
-              <a:rPr sz="850" b="1">
+              <a:rPr sz="1500" b="1">
                 <a:solidFill>
                   <a:srgbClr val="C0703F"/>
                 </a:solidFill>
@@ -5662,8 +5653,8 @@
         </p:nvSpPr>
         <p:spPr>
           <a:xfrm>
-            <a:off x="5046979" y="3695700"/>
-            <a:ext cx="2098040" cy="139700"/>
+            <a:off x="5059680" y="3898900"/>
+            <a:ext cx="2072640" cy="177800"/>
           </a:xfrm>
           <a:prstGeom prst="rect">
             <a:avLst/>
@@ -5682,7 +5673,7 @@
               </a:spcAft>
             </a:pPr>
             <a:r>
-              <a:rPr sz="675" b="0">
+              <a:rPr sz="1100" b="0">
                 <a:solidFill>
                   <a:srgbClr val="4A5B6B"/>
                 </a:solidFill>
@@ -5701,8 +5692,8 @@
         </p:nvSpPr>
         <p:spPr>
           <a:xfrm>
-            <a:off x="8263890" y="2709926"/>
-            <a:ext cx="139700" cy="139700"/>
+            <a:off x="8225789" y="2927350"/>
+            <a:ext cx="165100" cy="165100"/>
           </a:xfrm>
           <a:prstGeom prst="ellipse">
             <a:avLst/>
@@ -5747,8 +5738,8 @@
         </p:nvSpPr>
         <p:spPr>
           <a:xfrm>
-            <a:off x="7284719" y="3530600"/>
-            <a:ext cx="2098040" cy="152400"/>
+            <a:off x="7272019" y="3657600"/>
+            <a:ext cx="2072640" cy="203200"/>
           </a:xfrm>
           <a:prstGeom prst="rect">
             <a:avLst/>
@@ -5767,7 +5758,7 @@
               </a:spcAft>
             </a:pPr>
             <a:r>
-              <a:rPr sz="850" b="1">
+              <a:rPr sz="1500" b="1">
                 <a:solidFill>
                   <a:srgbClr val="6E5A86"/>
                 </a:solidFill>
@@ -5786,8 +5777,8 @@
         </p:nvSpPr>
         <p:spPr>
           <a:xfrm>
-            <a:off x="7284719" y="3695700"/>
-            <a:ext cx="2098040" cy="139700"/>
+            <a:off x="7272019" y="3898900"/>
+            <a:ext cx="2072640" cy="177800"/>
           </a:xfrm>
           <a:prstGeom prst="rect">
             <a:avLst/>
@@ -5806,7 +5797,7 @@
               </a:spcAft>
             </a:pPr>
             <a:r>
-              <a:rPr sz="675" b="0">
+              <a:rPr sz="1100" b="0">
                 <a:solidFill>
                   <a:srgbClr val="4A5B6B"/>
                 </a:solidFill>
@@ -5825,8 +5816,8 @@
         </p:nvSpPr>
         <p:spPr>
           <a:xfrm>
-            <a:off x="10501630" y="2586482"/>
-            <a:ext cx="139700" cy="139700"/>
+            <a:off x="10438130" y="2813050"/>
+            <a:ext cx="165100" cy="165100"/>
           </a:xfrm>
           <a:prstGeom prst="ellipse">
             <a:avLst/>
@@ -5871,8 +5862,8 @@
         </p:nvSpPr>
         <p:spPr>
           <a:xfrm>
-            <a:off x="9522459" y="3530600"/>
-            <a:ext cx="2098040" cy="152400"/>
+            <a:off x="9484360" y="3657600"/>
+            <a:ext cx="2072640" cy="203200"/>
           </a:xfrm>
           <a:prstGeom prst="rect">
             <a:avLst/>
@@ -5891,7 +5882,7 @@
               </a:spcAft>
             </a:pPr>
             <a:r>
-              <a:rPr sz="850" b="1">
+              <a:rPr sz="1500" b="1">
                 <a:solidFill>
                   <a:srgbClr val="4C8060"/>
                 </a:solidFill>
@@ -5910,8 +5901,8 @@
         </p:nvSpPr>
         <p:spPr>
           <a:xfrm>
-            <a:off x="9522459" y="3695700"/>
-            <a:ext cx="2098040" cy="139700"/>
+            <a:off x="9484360" y="3898900"/>
+            <a:ext cx="2072640" cy="177800"/>
           </a:xfrm>
           <a:prstGeom prst="rect">
             <a:avLst/>
@@ -5930,7 +5921,7 @@
               </a:spcAft>
             </a:pPr>
             <a:r>
-              <a:rPr sz="675" b="0">
+              <a:rPr sz="1100" b="0">
                 <a:solidFill>
                   <a:srgbClr val="4A5B6B"/>
                 </a:solidFill>
@@ -5949,8 +5940,8 @@
         </p:nvSpPr>
         <p:spPr>
           <a:xfrm>
-            <a:off x="571500" y="4038600"/>
-            <a:ext cx="5715000" cy="152400"/>
+            <a:off x="635000" y="4216400"/>
+            <a:ext cx="5715000" cy="190500"/>
           </a:xfrm>
           <a:prstGeom prst="rect">
             <a:avLst/>
@@ -5969,7 +5960,7 @@
               </a:spcAft>
             </a:pPr>
             <a:r>
-              <a:rPr sz="700" b="1">
+              <a:rPr sz="1200" b="1">
                 <a:solidFill>
                   <a:srgbClr val="8597A4"/>
                 </a:solidFill>
@@ -5988,12 +5979,12 @@
         </p:nvSpPr>
         <p:spPr>
           <a:xfrm>
-            <a:off x="571500" y="4241800"/>
-            <a:ext cx="2098040" cy="736600"/>
+            <a:off x="635000" y="4445000"/>
+            <a:ext cx="2072640" cy="749300"/>
           </a:xfrm>
           <a:prstGeom prst="roundRect">
             <a:avLst>
-              <a:gd name="adj" fmla="val 10344"/>
+              <a:gd name="adj" fmla="val 10169"/>
             </a:avLst>
           </a:prstGeom>
           <a:solidFill>
@@ -6036,8 +6027,8 @@
         </p:nvSpPr>
         <p:spPr>
           <a:xfrm>
-            <a:off x="673100" y="4343400"/>
-            <a:ext cx="57150" cy="57150"/>
+            <a:off x="749300" y="4559300"/>
+            <a:ext cx="69850" cy="69850"/>
           </a:xfrm>
           <a:prstGeom prst="ellipse">
             <a:avLst/>
@@ -6080,8 +6071,8 @@
         </p:nvSpPr>
         <p:spPr>
           <a:xfrm>
-            <a:off x="673100" y="4241800"/>
-            <a:ext cx="1894839" cy="736600"/>
+            <a:off x="749300" y="4445000"/>
+            <a:ext cx="1844040" cy="749300"/>
           </a:xfrm>
           <a:prstGeom prst="rect">
             <a:avLst/>
@@ -6100,7 +6091,7 @@
               </a:spcAft>
             </a:pPr>
             <a:r>
-              <a:rPr sz="800" b="0">
+              <a:rPr sz="1300" b="0">
                 <a:solidFill>
                   <a:srgbClr val="3A4A55"/>
                 </a:solidFill>
@@ -6119,12 +6110,12 @@
         </p:nvSpPr>
         <p:spPr>
           <a:xfrm>
-            <a:off x="2809239" y="4241800"/>
-            <a:ext cx="2098040" cy="736600"/>
+            <a:off x="2847340" y="4445000"/>
+            <a:ext cx="2072640" cy="749300"/>
           </a:xfrm>
           <a:prstGeom prst="roundRect">
             <a:avLst>
-              <a:gd name="adj" fmla="val 10344"/>
+              <a:gd name="adj" fmla="val 10169"/>
             </a:avLst>
           </a:prstGeom>
           <a:solidFill>
@@ -6167,8 +6158,8 @@
         </p:nvSpPr>
         <p:spPr>
           <a:xfrm>
-            <a:off x="2910840" y="4343400"/>
-            <a:ext cx="57150" cy="57150"/>
+            <a:off x="2961640" y="4559300"/>
+            <a:ext cx="69850" cy="69850"/>
           </a:xfrm>
           <a:prstGeom prst="ellipse">
             <a:avLst/>
@@ -6211,8 +6202,8 @@
         </p:nvSpPr>
         <p:spPr>
           <a:xfrm>
-            <a:off x="2910840" y="4241800"/>
-            <a:ext cx="1894839" cy="736600"/>
+            <a:off x="2961640" y="4445000"/>
+            <a:ext cx="1844040" cy="749300"/>
           </a:xfrm>
           <a:prstGeom prst="rect">
             <a:avLst/>
@@ -6231,7 +6222,7 @@
               </a:spcAft>
             </a:pPr>
             <a:r>
-              <a:rPr sz="800" b="0">
+              <a:rPr sz="1300" b="0">
                 <a:solidFill>
                   <a:srgbClr val="3A4A55"/>
                 </a:solidFill>
@@ -6250,12 +6241,12 @@
         </p:nvSpPr>
         <p:spPr>
           <a:xfrm>
-            <a:off x="5046979" y="4241800"/>
-            <a:ext cx="2098040" cy="736600"/>
+            <a:off x="5059680" y="4445000"/>
+            <a:ext cx="2072640" cy="749300"/>
           </a:xfrm>
           <a:prstGeom prst="roundRect">
             <a:avLst>
-              <a:gd name="adj" fmla="val 10344"/>
+              <a:gd name="adj" fmla="val 10169"/>
             </a:avLst>
           </a:prstGeom>
           <a:solidFill>
@@ -6298,8 +6289,8 @@
         </p:nvSpPr>
         <p:spPr>
           <a:xfrm>
-            <a:off x="5148580" y="4343400"/>
-            <a:ext cx="57150" cy="57150"/>
+            <a:off x="5173980" y="4559300"/>
+            <a:ext cx="69850" cy="69850"/>
           </a:xfrm>
           <a:prstGeom prst="ellipse">
             <a:avLst/>
@@ -6342,8 +6333,8 @@
         </p:nvSpPr>
         <p:spPr>
           <a:xfrm>
-            <a:off x="5148580" y="4241800"/>
-            <a:ext cx="1894839" cy="736600"/>
+            <a:off x="5173980" y="4445000"/>
+            <a:ext cx="1844040" cy="749300"/>
           </a:xfrm>
           <a:prstGeom prst="rect">
             <a:avLst/>
@@ -6362,7 +6353,7 @@
               </a:spcAft>
             </a:pPr>
             <a:r>
-              <a:rPr sz="800" b="0">
+              <a:rPr sz="1300" b="0">
                 <a:solidFill>
                   <a:srgbClr val="3A4A55"/>
                 </a:solidFill>
@@ -6381,12 +6372,12 @@
         </p:nvSpPr>
         <p:spPr>
           <a:xfrm>
-            <a:off x="7284719" y="4241800"/>
-            <a:ext cx="2098040" cy="736600"/>
+            <a:off x="7272019" y="4445000"/>
+            <a:ext cx="2072640" cy="749300"/>
           </a:xfrm>
           <a:prstGeom prst="roundRect">
             <a:avLst>
-              <a:gd name="adj" fmla="val 10344"/>
+              <a:gd name="adj" fmla="val 10169"/>
             </a:avLst>
           </a:prstGeom>
           <a:solidFill>
@@ -6429,8 +6420,8 @@
         </p:nvSpPr>
         <p:spPr>
           <a:xfrm>
-            <a:off x="7386319" y="4343400"/>
-            <a:ext cx="57150" cy="57150"/>
+            <a:off x="7386319" y="4559300"/>
+            <a:ext cx="69850" cy="69850"/>
           </a:xfrm>
           <a:prstGeom prst="ellipse">
             <a:avLst/>
@@ -6473,8 +6464,8 @@
         </p:nvSpPr>
         <p:spPr>
           <a:xfrm>
-            <a:off x="7386319" y="4241800"/>
-            <a:ext cx="1894839" cy="736600"/>
+            <a:off x="7386319" y="4445000"/>
+            <a:ext cx="1844040" cy="749300"/>
           </a:xfrm>
           <a:prstGeom prst="rect">
             <a:avLst/>
@@ -6493,7 +6484,7 @@
               </a:spcAft>
             </a:pPr>
             <a:r>
-              <a:rPr sz="800" b="0">
+              <a:rPr sz="1300" b="0">
                 <a:solidFill>
                   <a:srgbClr val="3A4A55"/>
                 </a:solidFill>
@@ -6512,12 +6503,12 @@
         </p:nvSpPr>
         <p:spPr>
           <a:xfrm>
-            <a:off x="9522459" y="4241800"/>
-            <a:ext cx="2098040" cy="736600"/>
+            <a:off x="9484360" y="4445000"/>
+            <a:ext cx="2072640" cy="749300"/>
           </a:xfrm>
           <a:prstGeom prst="roundRect">
             <a:avLst>
-              <a:gd name="adj" fmla="val 10344"/>
+              <a:gd name="adj" fmla="val 10169"/>
             </a:avLst>
           </a:prstGeom>
           <a:solidFill>
@@ -6560,8 +6551,8 @@
         </p:nvSpPr>
         <p:spPr>
           <a:xfrm>
-            <a:off x="9624059" y="4343400"/>
-            <a:ext cx="57150" cy="57150"/>
+            <a:off x="9598660" y="4559300"/>
+            <a:ext cx="69850" cy="69850"/>
           </a:xfrm>
           <a:prstGeom prst="ellipse">
             <a:avLst/>
@@ -6604,8 +6595,8 @@
         </p:nvSpPr>
         <p:spPr>
           <a:xfrm>
-            <a:off x="9624059" y="4241800"/>
-            <a:ext cx="1894839" cy="736600"/>
+            <a:off x="9598660" y="4445000"/>
+            <a:ext cx="1844040" cy="749300"/>
           </a:xfrm>
           <a:prstGeom prst="rect">
             <a:avLst/>
@@ -6624,7 +6615,7 @@
               </a:spcAft>
             </a:pPr>
             <a:r>
-              <a:rPr sz="800" b="0">
+              <a:rPr sz="1300" b="0">
                 <a:solidFill>
                   <a:srgbClr val="3A4A55"/>
                 </a:solidFill>
@@ -6643,8 +6634,8 @@
         </p:nvSpPr>
         <p:spPr>
           <a:xfrm>
-            <a:off x="571500" y="5156200"/>
-            <a:ext cx="5715000" cy="152400"/>
+            <a:off x="635000" y="5410200"/>
+            <a:ext cx="5715000" cy="190500"/>
           </a:xfrm>
           <a:prstGeom prst="rect">
             <a:avLst/>
@@ -6663,7 +6654,7 @@
               </a:spcAft>
             </a:pPr>
             <a:r>
-              <a:rPr sz="700" b="1">
+              <a:rPr sz="1200" b="1">
                 <a:solidFill>
                   <a:srgbClr val="8597A4"/>
                 </a:solidFill>
@@ -6682,12 +6673,12 @@
         </p:nvSpPr>
         <p:spPr>
           <a:xfrm>
-            <a:off x="584200" y="5359400"/>
-            <a:ext cx="571500" cy="31750"/>
+            <a:off x="647700" y="5638800"/>
+            <a:ext cx="635000" cy="38100"/>
           </a:xfrm>
           <a:prstGeom prst="roundRect">
             <a:avLst>
-              <a:gd name="adj" fmla="val 40000"/>
+              <a:gd name="adj" fmla="val 50000"/>
             </a:avLst>
           </a:prstGeom>
           <a:solidFill>
@@ -6728,8 +6719,8 @@
         </p:nvSpPr>
         <p:spPr>
           <a:xfrm>
-            <a:off x="571500" y="5448300"/>
-            <a:ext cx="5207000" cy="355600"/>
+            <a:off x="635000" y="5727700"/>
+            <a:ext cx="5461000" cy="444500"/>
           </a:xfrm>
           <a:prstGeom prst="rect">
             <a:avLst/>
@@ -6748,7 +6739,7 @@
               </a:spcAft>
             </a:pPr>
             <a:r>
-              <a:rPr sz="2100" b="1">
+              <a:rPr sz="3400" b="1">
                 <a:solidFill>
                   <a:srgbClr val="2D6A6E"/>
                 </a:solidFill>
@@ -6767,8 +6758,8 @@
         </p:nvSpPr>
         <p:spPr>
           <a:xfrm>
-            <a:off x="571500" y="5867400"/>
-            <a:ext cx="5207000" cy="190500"/>
+            <a:off x="635000" y="6235700"/>
+            <a:ext cx="5461000" cy="254000"/>
           </a:xfrm>
           <a:prstGeom prst="rect">
             <a:avLst/>
@@ -6787,7 +6778,7 @@
               </a:spcAft>
             </a:pPr>
             <a:r>
-              <a:rPr sz="900" b="0">
+              <a:rPr sz="1400" b="0">
                 <a:solidFill>
                   <a:srgbClr val="4A5B6B"/>
                 </a:solidFill>
@@ -6806,12 +6797,12 @@
         </p:nvSpPr>
         <p:spPr>
           <a:xfrm>
-            <a:off x="6362700" y="5359400"/>
-            <a:ext cx="571500" cy="31750"/>
+            <a:off x="6426200" y="5638800"/>
+            <a:ext cx="635000" cy="38100"/>
           </a:xfrm>
           <a:prstGeom prst="roundRect">
             <a:avLst>
-              <a:gd name="adj" fmla="val 40000"/>
+              <a:gd name="adj" fmla="val 50000"/>
             </a:avLst>
           </a:prstGeom>
           <a:solidFill>
@@ -6852,8 +6843,8 @@
         </p:nvSpPr>
         <p:spPr>
           <a:xfrm>
-            <a:off x="6350000" y="5448300"/>
-            <a:ext cx="5207000" cy="355600"/>
+            <a:off x="6413500" y="5727700"/>
+            <a:ext cx="5207000" cy="444500"/>
           </a:xfrm>
           <a:prstGeom prst="rect">
             <a:avLst/>
@@ -6872,7 +6863,7 @@
               </a:spcAft>
             </a:pPr>
             <a:r>
-              <a:rPr sz="2100" b="1">
+              <a:rPr sz="3400" b="1">
                 <a:solidFill>
                   <a:srgbClr val="2D6A6E"/>
                 </a:solidFill>
@@ -6891,8 +6882,8 @@
         </p:nvSpPr>
         <p:spPr>
           <a:xfrm>
-            <a:off x="6350000" y="5867400"/>
-            <a:ext cx="5207000" cy="190500"/>
+            <a:off x="6413500" y="6235700"/>
+            <a:ext cx="5270500" cy="254000"/>
           </a:xfrm>
           <a:prstGeom prst="rect">
             <a:avLst/>
@@ -6911,7 +6902,7 @@
               </a:spcAft>
             </a:pPr>
             <a:r>
-              <a:rPr sz="900" b="0">
+              <a:rPr sz="1400" b="0">
                 <a:solidFill>
                   <a:srgbClr val="4A5B6B"/>
                 </a:solidFill>
@@ -6930,8 +6921,8 @@
         </p:nvSpPr>
         <p:spPr>
           <a:xfrm>
-            <a:off x="571500" y="6604000"/>
-            <a:ext cx="5715000" cy="139700"/>
+            <a:off x="635000" y="6642100"/>
+            <a:ext cx="5715000" cy="165100"/>
           </a:xfrm>
           <a:prstGeom prst="rect">
             <a:avLst/>
@@ -6939,18 +6930,13 @@
           <a:noFill/>
         </p:spPr>
         <p:txBody>
-          <a:bodyPr wrap="square" anchor="t" lIns="25400" rIns="25400" tIns="25400" bIns="25400">
+          <a:bodyPr wrap="none">
             <a:spAutoFit/>
           </a:bodyPr>
           <a:lstStyle/>
           <a:p>
-            <a:pPr algn="l">
-              <a:spcAft>
-                <a:spcPts val="0"/>
-              </a:spcAft>
-            </a:pPr>
-            <a:r>
-              <a:rPr sz="600" b="0">
+            <a:r>
+              <a:rPr sz="1000">
                 <a:solidFill>
                   <a:srgbClr val="8597A4"/>
                 </a:solidFill>
@@ -6969,8 +6955,8 @@
         </p:nvSpPr>
         <p:spPr>
           <a:xfrm>
-            <a:off x="10414000" y="6604000"/>
-            <a:ext cx="1206500" cy="139700"/>
+            <a:off x="10287000" y="6642100"/>
+            <a:ext cx="1270000" cy="165100"/>
           </a:xfrm>
           <a:prstGeom prst="rect">
             <a:avLst/>
@@ -6978,18 +6964,14 @@
           <a:noFill/>
         </p:spPr>
         <p:txBody>
-          <a:bodyPr wrap="square" anchor="t" lIns="25400" rIns="25400" tIns="25400" bIns="25400">
+          <a:bodyPr wrap="none">
             <a:spAutoFit/>
           </a:bodyPr>
           <a:lstStyle/>
           <a:p>
-            <a:pPr algn="r">
-              <a:spcAft>
-                <a:spcPts val="0"/>
-              </a:spcAft>
-            </a:pPr>
-            <a:r>
-              <a:rPr sz="600" b="0">
+            <a:pPr algn="r"/>
+            <a:r>
+              <a:rPr sz="1000">
                 <a:solidFill>
                   <a:srgbClr val="8597A4"/>
                 </a:solidFill>
@@ -7070,8 +7052,8 @@
         </p:nvSpPr>
         <p:spPr>
           <a:xfrm>
-            <a:off x="571500" y="469899"/>
-            <a:ext cx="5715000" cy="165100"/>
+            <a:off x="635000" y="457200"/>
+            <a:ext cx="5715000" cy="203200"/>
           </a:xfrm>
           <a:prstGeom prst="rect">
             <a:avLst/>
@@ -7090,7 +7072,7 @@
               </a:spcAft>
             </a:pPr>
             <a:r>
-              <a:rPr sz="750" b="1">
+              <a:rPr sz="1200" b="1">
                 <a:solidFill>
                   <a:srgbClr val="8597A4"/>
                 </a:solidFill>
@@ -7109,8 +7091,8 @@
         </p:nvSpPr>
         <p:spPr>
           <a:xfrm>
-            <a:off x="571500" y="635000"/>
-            <a:ext cx="10160000" cy="381000"/>
+            <a:off x="635000" y="685800"/>
+            <a:ext cx="10414000" cy="508000"/>
           </a:xfrm>
           <a:prstGeom prst="rect">
             <a:avLst/>
@@ -7129,7 +7111,7 @@
               </a:spcAft>
             </a:pPr>
             <a:r>
-              <a:rPr sz="2000" b="1">
+              <a:rPr sz="3600" b="1">
                 <a:solidFill>
                   <a:srgbClr val="2D6A6E"/>
                 </a:solidFill>
@@ -7148,8 +7130,8 @@
         </p:nvSpPr>
         <p:spPr>
           <a:xfrm>
-            <a:off x="571500" y="1066800"/>
-            <a:ext cx="10541000" cy="317500"/>
+            <a:off x="635000" y="1358900"/>
+            <a:ext cx="10668000" cy="292100"/>
           </a:xfrm>
           <a:prstGeom prst="rect">
             <a:avLst/>
@@ -7168,73 +7150,27 @@
               </a:spcAft>
             </a:pPr>
             <a:r>
-              <a:rPr sz="950" b="0">
+              <a:rPr sz="1500" b="0">
                 <a:solidFill>
                   <a:srgbClr val="4A5B6B"/>
                 </a:solidFill>
                 <a:latin typeface="Inter"/>
               </a:rPr>
-              <a:t>The client's first 30 days as nine stages grouped into five phases — for each stage: what Sona does, and the surface that delivers it.</a:t>
-            </a:r>
-          </a:p>
-        </p:txBody>
-      </p:sp>
-      <p:sp>
-        <p:nvSpPr>
-          <p:cNvPr id="6" name="Rounded Rectangle 5"/>
-          <p:cNvSpPr/>
-          <p:nvPr/>
-        </p:nvSpPr>
-        <p:spPr>
-          <a:xfrm>
-            <a:off x="584200" y="1422400"/>
-            <a:ext cx="889000" cy="31750"/>
-          </a:xfrm>
-          <a:prstGeom prst="roundRect">
-            <a:avLst>
-              <a:gd name="adj" fmla="val 40000"/>
-            </a:avLst>
-          </a:prstGeom>
-          <a:solidFill>
-            <a:srgbClr val="F2A878"/>
-          </a:solidFill>
-          <a:ln>
-            <a:noFill/>
-          </a:ln>
-          <a:effectLst/>
-        </p:spPr>
-        <p:style>
-          <a:lnRef idx="1">
-            <a:schemeClr val="accent1"/>
-          </a:lnRef>
-          <a:fillRef idx="3">
-            <a:schemeClr val="accent1"/>
-          </a:fillRef>
-          <a:effectRef idx="2">
-            <a:schemeClr val="accent1"/>
-          </a:effectRef>
-          <a:fontRef idx="minor">
-            <a:schemeClr val="lt1"/>
-          </a:fontRef>
-        </p:style>
-        <p:txBody>
-          <a:bodyPr rtlCol="0" anchor="ctr"/>
-          <a:lstStyle/>
-          <a:p>
-            <a:pPr algn="ctr"/>
-          </a:p>
-        </p:txBody>
-      </p:sp>
-      <p:sp>
-        <p:nvSpPr>
-          <p:cNvPr id="7" name="TextBox 6"/>
+              <a:t>The first 30 days as nine stages grouped into five phases — what Sona does, and the surface that delivers it.</a:t>
+            </a:r>
+          </a:p>
+        </p:txBody>
+      </p:sp>
+      <p:sp>
+        <p:nvSpPr>
+          <p:cNvPr id="6" name="TextBox 5"/>
           <p:cNvSpPr txBox="1"/>
           <p:nvPr/>
         </p:nvSpPr>
         <p:spPr>
           <a:xfrm>
-            <a:off x="571500" y="1828800"/>
-            <a:ext cx="939799" cy="317500"/>
+            <a:off x="635000" y="1879599"/>
+            <a:ext cx="1117600" cy="355600"/>
           </a:xfrm>
           <a:prstGeom prst="rect">
             <a:avLst/>
@@ -7253,7 +7189,7 @@
               </a:spcAft>
             </a:pPr>
             <a:r>
-              <a:rPr sz="700" b="1">
+              <a:rPr sz="1300" b="1">
                 <a:solidFill>
                   <a:srgbClr val="4A5B6B"/>
                 </a:solidFill>
@@ -7266,14 +7202,14 @@
       </p:sp>
       <p:sp>
         <p:nvSpPr>
-          <p:cNvPr id="8" name="TextBox 7"/>
+          <p:cNvPr id="7" name="TextBox 6"/>
           <p:cNvSpPr txBox="1"/>
           <p:nvPr/>
         </p:nvSpPr>
         <p:spPr>
           <a:xfrm>
-            <a:off x="571500" y="2197100"/>
-            <a:ext cx="939799" cy="381000"/>
+            <a:off x="635000" y="2286000"/>
+            <a:ext cx="1117600" cy="419100"/>
           </a:xfrm>
           <a:prstGeom prst="rect">
             <a:avLst/>
@@ -7292,7 +7228,7 @@
               </a:spcAft>
             </a:pPr>
             <a:r>
-              <a:rPr sz="700" b="1">
+              <a:rPr sz="1300" b="1">
                 <a:solidFill>
                   <a:srgbClr val="4A5B6B"/>
                 </a:solidFill>
@@ -7305,14 +7241,14 @@
       </p:sp>
       <p:sp>
         <p:nvSpPr>
-          <p:cNvPr id="9" name="TextBox 8"/>
+          <p:cNvPr id="8" name="TextBox 7"/>
           <p:cNvSpPr txBox="1"/>
           <p:nvPr/>
         </p:nvSpPr>
         <p:spPr>
           <a:xfrm>
-            <a:off x="571500" y="2628900"/>
-            <a:ext cx="939799" cy="1143000"/>
+            <a:off x="635000" y="2755900"/>
+            <a:ext cx="1117600" cy="1333500"/>
           </a:xfrm>
           <a:prstGeom prst="rect">
             <a:avLst/>
@@ -7331,27 +7267,28 @@
               </a:spcAft>
             </a:pPr>
             <a:r>
-              <a:rPr sz="700" b="1">
+              <a:rPr sz="1300" b="1">
                 <a:solidFill>
                   <a:srgbClr val="4A5B6B"/>
                 </a:solidFill>
                 <a:latin typeface="Inter"/>
               </a:rPr>
-              <a:t>What Sona does</a:t>
-            </a:r>
-          </a:p>
-        </p:txBody>
-      </p:sp>
-      <p:sp>
-        <p:nvSpPr>
-          <p:cNvPr id="10" name="TextBox 9"/>
+              <a:t>What Sona
+does</a:t>
+            </a:r>
+          </a:p>
+        </p:txBody>
+      </p:sp>
+      <p:sp>
+        <p:nvSpPr>
+          <p:cNvPr id="9" name="TextBox 8"/>
           <p:cNvSpPr txBox="1"/>
           <p:nvPr/>
         </p:nvSpPr>
         <p:spPr>
           <a:xfrm>
-            <a:off x="571500" y="3822700"/>
-            <a:ext cx="939799" cy="762000"/>
+            <a:off x="635000" y="4140200"/>
+            <a:ext cx="1117600" cy="749300"/>
           </a:xfrm>
           <a:prstGeom prst="rect">
             <a:avLst/>
@@ -7370,31 +7307,32 @@
               </a:spcAft>
             </a:pPr>
             <a:r>
-              <a:rPr sz="700" b="1">
+              <a:rPr sz="1300" b="1">
                 <a:solidFill>
                   <a:srgbClr val="4A5B6B"/>
                 </a:solidFill>
                 <a:latin typeface="Inter"/>
               </a:rPr>
-              <a:t>Surface / owner</a:t>
-            </a:r>
-          </a:p>
-        </p:txBody>
-      </p:sp>
-      <p:sp>
-        <p:nvSpPr>
-          <p:cNvPr id="11" name="Rounded Rectangle 10"/>
+              <a:t>Surface /
+owner</a:t>
+            </a:r>
+          </a:p>
+        </p:txBody>
+      </p:sp>
+      <p:sp>
+        <p:nvSpPr>
+          <p:cNvPr id="10" name="Rounded Rectangle 9"/>
           <p:cNvSpPr/>
           <p:nvPr/>
         </p:nvSpPr>
         <p:spPr>
           <a:xfrm>
-            <a:off x="1587500" y="1828800"/>
-            <a:ext cx="1058333" cy="317500"/>
+            <a:off x="1841500" y="1879599"/>
+            <a:ext cx="1011766" cy="355600"/>
           </a:xfrm>
           <a:prstGeom prst="roundRect">
             <a:avLst>
-              <a:gd name="adj" fmla="val 20000"/>
+              <a:gd name="adj" fmla="val 17857"/>
             </a:avLst>
           </a:prstGeom>
           <a:solidFill>
@@ -7429,14 +7367,14 @@
       </p:sp>
       <p:sp>
         <p:nvSpPr>
-          <p:cNvPr id="12" name="TextBox 11"/>
+          <p:cNvPr id="11" name="TextBox 10"/>
           <p:cNvSpPr txBox="1"/>
           <p:nvPr/>
         </p:nvSpPr>
         <p:spPr>
           <a:xfrm>
-            <a:off x="1663700" y="1828800"/>
-            <a:ext cx="905933" cy="317500"/>
+            <a:off x="1930400" y="1879599"/>
+            <a:ext cx="833966" cy="355600"/>
           </a:xfrm>
           <a:prstGeom prst="rect">
             <a:avLst/>
@@ -7455,7 +7393,7 @@
               </a:spcAft>
             </a:pPr>
             <a:r>
-              <a:rPr sz="700" b="1">
+              <a:rPr sz="1300" b="1">
                 <a:solidFill>
                   <a:srgbClr val="FFFFFF"/>
                 </a:solidFill>
@@ -7468,18 +7406,18 @@
       </p:sp>
       <p:sp>
         <p:nvSpPr>
-          <p:cNvPr id="13" name="Rounded Rectangle 12"/>
+          <p:cNvPr id="12" name="Rounded Rectangle 11"/>
           <p:cNvSpPr/>
           <p:nvPr/>
         </p:nvSpPr>
         <p:spPr>
           <a:xfrm>
-            <a:off x="2709333" y="1828800"/>
-            <a:ext cx="2180166" cy="317500"/>
+            <a:off x="2929466" y="1879599"/>
+            <a:ext cx="2099733" cy="355600"/>
           </a:xfrm>
           <a:prstGeom prst="roundRect">
             <a:avLst>
-              <a:gd name="adj" fmla="val 20000"/>
+              <a:gd name="adj" fmla="val 17857"/>
             </a:avLst>
           </a:prstGeom>
           <a:solidFill>
@@ -7514,14 +7452,14 @@
       </p:sp>
       <p:sp>
         <p:nvSpPr>
-          <p:cNvPr id="14" name="TextBox 13"/>
+          <p:cNvPr id="13" name="TextBox 12"/>
           <p:cNvSpPr txBox="1"/>
           <p:nvPr/>
         </p:nvSpPr>
         <p:spPr>
           <a:xfrm>
-            <a:off x="2785533" y="1828800"/>
-            <a:ext cx="2027766" cy="317500"/>
+            <a:off x="3018366" y="1879599"/>
+            <a:ext cx="1921933" cy="355600"/>
           </a:xfrm>
           <a:prstGeom prst="rect">
             <a:avLst/>
@@ -7540,7 +7478,7 @@
               </a:spcAft>
             </a:pPr>
             <a:r>
-              <a:rPr sz="700" b="1">
+              <a:rPr sz="1300" b="1">
                 <a:solidFill>
                   <a:srgbClr val="FFFFFF"/>
                 </a:solidFill>
@@ -7553,18 +7491,18 @@
       </p:sp>
       <p:sp>
         <p:nvSpPr>
-          <p:cNvPr id="15" name="Rounded Rectangle 14"/>
+          <p:cNvPr id="14" name="Rounded Rectangle 13"/>
           <p:cNvSpPr/>
           <p:nvPr/>
         </p:nvSpPr>
         <p:spPr>
           <a:xfrm>
-            <a:off x="4953000" y="1828800"/>
-            <a:ext cx="3302000" cy="317500"/>
+            <a:off x="5105400" y="1879599"/>
+            <a:ext cx="3187700" cy="355600"/>
           </a:xfrm>
           <a:prstGeom prst="roundRect">
             <a:avLst>
-              <a:gd name="adj" fmla="val 20000"/>
+              <a:gd name="adj" fmla="val 17857"/>
             </a:avLst>
           </a:prstGeom>
           <a:solidFill>
@@ -7599,14 +7537,14 @@
       </p:sp>
       <p:sp>
         <p:nvSpPr>
-          <p:cNvPr id="16" name="TextBox 15"/>
+          <p:cNvPr id="15" name="TextBox 14"/>
           <p:cNvSpPr txBox="1"/>
           <p:nvPr/>
         </p:nvSpPr>
         <p:spPr>
           <a:xfrm>
-            <a:off x="5029200" y="1828800"/>
-            <a:ext cx="3149600" cy="317500"/>
+            <a:off x="5194300" y="1879599"/>
+            <a:ext cx="3009900" cy="355600"/>
           </a:xfrm>
           <a:prstGeom prst="rect">
             <a:avLst/>
@@ -7625,7 +7563,7 @@
               </a:spcAft>
             </a:pPr>
             <a:r>
-              <a:rPr sz="700" b="1">
+              <a:rPr sz="1300" b="1">
                 <a:solidFill>
                   <a:srgbClr val="FFFFFF"/>
                 </a:solidFill>
@@ -7638,18 +7576,18 @@
       </p:sp>
       <p:sp>
         <p:nvSpPr>
-          <p:cNvPr id="17" name="Rounded Rectangle 16"/>
+          <p:cNvPr id="16" name="Rounded Rectangle 15"/>
           <p:cNvSpPr/>
           <p:nvPr/>
         </p:nvSpPr>
         <p:spPr>
           <a:xfrm>
-            <a:off x="8318499" y="1828800"/>
-            <a:ext cx="2180166" cy="317500"/>
+            <a:off x="8369300" y="1879599"/>
+            <a:ext cx="2099733" cy="355600"/>
           </a:xfrm>
           <a:prstGeom prst="roundRect">
             <a:avLst>
-              <a:gd name="adj" fmla="val 20000"/>
+              <a:gd name="adj" fmla="val 17857"/>
             </a:avLst>
           </a:prstGeom>
           <a:solidFill>
@@ -7684,14 +7622,14 @@
       </p:sp>
       <p:sp>
         <p:nvSpPr>
-          <p:cNvPr id="18" name="TextBox 17"/>
+          <p:cNvPr id="17" name="TextBox 16"/>
           <p:cNvSpPr txBox="1"/>
           <p:nvPr/>
         </p:nvSpPr>
         <p:spPr>
           <a:xfrm>
-            <a:off x="8394700" y="1828800"/>
-            <a:ext cx="2027766" cy="317500"/>
+            <a:off x="8458200" y="1879599"/>
+            <a:ext cx="1921933" cy="355600"/>
           </a:xfrm>
           <a:prstGeom prst="rect">
             <a:avLst/>
@@ -7710,7 +7648,7 @@
               </a:spcAft>
             </a:pPr>
             <a:r>
-              <a:rPr sz="700" b="1">
+              <a:rPr sz="1300" b="1">
                 <a:solidFill>
                   <a:srgbClr val="FFFFFF"/>
                 </a:solidFill>
@@ -7723,18 +7661,18 @@
       </p:sp>
       <p:sp>
         <p:nvSpPr>
-          <p:cNvPr id="19" name="Rounded Rectangle 18"/>
+          <p:cNvPr id="18" name="Rounded Rectangle 17"/>
           <p:cNvSpPr/>
           <p:nvPr/>
         </p:nvSpPr>
         <p:spPr>
           <a:xfrm>
-            <a:off x="10562166" y="1828800"/>
-            <a:ext cx="1058333" cy="317500"/>
+            <a:off x="10545233" y="1879599"/>
+            <a:ext cx="1011766" cy="355600"/>
           </a:xfrm>
           <a:prstGeom prst="roundRect">
             <a:avLst>
-              <a:gd name="adj" fmla="val 20000"/>
+              <a:gd name="adj" fmla="val 17857"/>
             </a:avLst>
           </a:prstGeom>
           <a:solidFill>
@@ -7769,14 +7707,14 @@
       </p:sp>
       <p:sp>
         <p:nvSpPr>
-          <p:cNvPr id="20" name="TextBox 19"/>
+          <p:cNvPr id="19" name="TextBox 18"/>
           <p:cNvSpPr txBox="1"/>
           <p:nvPr/>
         </p:nvSpPr>
         <p:spPr>
           <a:xfrm>
-            <a:off x="10638366" y="1828800"/>
-            <a:ext cx="905933" cy="317500"/>
+            <a:off x="10634133" y="1879599"/>
+            <a:ext cx="833966" cy="355600"/>
           </a:xfrm>
           <a:prstGeom prst="rect">
             <a:avLst/>
@@ -7795,7 +7733,7 @@
               </a:spcAft>
             </a:pPr>
             <a:r>
-              <a:rPr sz="700" b="1">
+              <a:rPr sz="1300" b="1">
                 <a:solidFill>
                   <a:srgbClr val="FFFFFF"/>
                 </a:solidFill>
@@ -7808,18 +7746,18 @@
       </p:sp>
       <p:sp>
         <p:nvSpPr>
-          <p:cNvPr id="21" name="Rounded Rectangle 20"/>
+          <p:cNvPr id="20" name="Rounded Rectangle 19"/>
           <p:cNvSpPr/>
           <p:nvPr/>
         </p:nvSpPr>
         <p:spPr>
           <a:xfrm>
-            <a:off x="1587500" y="2197100"/>
-            <a:ext cx="1058333" cy="381000"/>
+            <a:off x="1841500" y="2286000"/>
+            <a:ext cx="1011766" cy="419100"/>
           </a:xfrm>
           <a:prstGeom prst="roundRect">
             <a:avLst>
-              <a:gd name="adj" fmla="val 16666"/>
+              <a:gd name="adj" fmla="val 15151"/>
             </a:avLst>
           </a:prstGeom>
           <a:solidFill>
@@ -7854,14 +7792,14 @@
       </p:sp>
       <p:sp>
         <p:nvSpPr>
-          <p:cNvPr id="22" name="TextBox 21"/>
+          <p:cNvPr id="21" name="TextBox 20"/>
           <p:cNvSpPr txBox="1"/>
           <p:nvPr/>
         </p:nvSpPr>
         <p:spPr>
           <a:xfrm>
-            <a:off x="1625600" y="2197100"/>
-            <a:ext cx="982133" cy="381000"/>
+            <a:off x="1879599" y="2286000"/>
+            <a:ext cx="935566" cy="419100"/>
           </a:xfrm>
           <a:prstGeom prst="rect">
             <a:avLst/>
@@ -7880,7 +7818,7 @@
               </a:spcAft>
             </a:pPr>
             <a:r>
-              <a:rPr sz="600" b="1">
+              <a:rPr sz="1100" b="1">
                 <a:solidFill>
                   <a:srgbClr val="FFFFFF"/>
                 </a:solidFill>
@@ -7893,18 +7831,18 @@
       </p:sp>
       <p:sp>
         <p:nvSpPr>
-          <p:cNvPr id="23" name="Rounded Rectangle 22"/>
+          <p:cNvPr id="22" name="Rounded Rectangle 21"/>
           <p:cNvSpPr/>
           <p:nvPr/>
         </p:nvSpPr>
         <p:spPr>
           <a:xfrm>
-            <a:off x="1587500" y="2628900"/>
-            <a:ext cx="1058333" cy="1143000"/>
+            <a:off x="1841500" y="2755900"/>
+            <a:ext cx="1011766" cy="1333500"/>
           </a:xfrm>
           <a:prstGeom prst="roundRect">
             <a:avLst>
-              <a:gd name="adj" fmla="val 6000"/>
+              <a:gd name="adj" fmla="val 6276"/>
             </a:avLst>
           </a:prstGeom>
           <a:solidFill>
@@ -7939,14 +7877,14 @@
       </p:sp>
       <p:sp>
         <p:nvSpPr>
-          <p:cNvPr id="24" name="TextBox 23"/>
+          <p:cNvPr id="23" name="TextBox 22"/>
           <p:cNvSpPr txBox="1"/>
           <p:nvPr/>
         </p:nvSpPr>
         <p:spPr>
           <a:xfrm>
-            <a:off x="1663700" y="2628900"/>
-            <a:ext cx="905933" cy="1143000"/>
+            <a:off x="1917700" y="2755900"/>
+            <a:ext cx="859366" cy="1333500"/>
           </a:xfrm>
           <a:prstGeom prst="rect">
             <a:avLst/>
@@ -7965,31 +7903,31 @@
               </a:spcAft>
             </a:pPr>
             <a:r>
-              <a:rPr sz="650" b="0">
+              <a:rPr sz="1150" b="0">
                 <a:solidFill>
                   <a:srgbClr val="142433"/>
                 </a:solidFill>
                 <a:latin typeface="Inter"/>
               </a:rPr>
-              <a:t>Capture every enquiry — one case record + audit trail.</a:t>
-            </a:r>
-          </a:p>
-        </p:txBody>
-      </p:sp>
-      <p:sp>
-        <p:nvSpPr>
-          <p:cNvPr id="25" name="Rounded Rectangle 24"/>
+              <a:t>Capture enquiry + audit trail</a:t>
+            </a:r>
+          </a:p>
+        </p:txBody>
+      </p:sp>
+      <p:sp>
+        <p:nvSpPr>
+          <p:cNvPr id="24" name="Rounded Rectangle 23"/>
           <p:cNvSpPr/>
           <p:nvPr/>
         </p:nvSpPr>
         <p:spPr>
           <a:xfrm>
-            <a:off x="1587500" y="3822700"/>
-            <a:ext cx="1058333" cy="762000"/>
+            <a:off x="1841500" y="4140200"/>
+            <a:ext cx="1011766" cy="749300"/>
           </a:xfrm>
           <a:prstGeom prst="roundRect">
             <a:avLst>
-              <a:gd name="adj" fmla="val 8333"/>
+              <a:gd name="adj" fmla="val 8474"/>
             </a:avLst>
           </a:prstGeom>
           <a:solidFill>
@@ -8024,14 +7962,14 @@
       </p:sp>
       <p:sp>
         <p:nvSpPr>
-          <p:cNvPr id="26" name="TextBox 25"/>
+          <p:cNvPr id="25" name="TextBox 24"/>
           <p:cNvSpPr txBox="1"/>
           <p:nvPr/>
         </p:nvSpPr>
         <p:spPr>
           <a:xfrm>
-            <a:off x="1663700" y="3822700"/>
-            <a:ext cx="905933" cy="762000"/>
+            <a:off x="1905000" y="4140200"/>
+            <a:ext cx="884766" cy="749300"/>
           </a:xfrm>
           <a:prstGeom prst="rect">
             <a:avLst/>
@@ -8050,31 +7988,31 @@
               </a:spcAft>
             </a:pPr>
             <a:r>
-              <a:rPr sz="625" b="0">
+              <a:rPr sz="1100" b="0">
                 <a:solidFill>
                   <a:srgbClr val="142433"/>
                 </a:solidFill>
                 <a:latin typeface="Inter"/>
               </a:rPr>
-              <a:t>Clinician web — enquiry queue</a:t>
-            </a:r>
-          </a:p>
-        </p:txBody>
-      </p:sp>
-      <p:sp>
-        <p:nvSpPr>
-          <p:cNvPr id="27" name="Rounded Rectangle 26"/>
+              <a:t>Clinician web</a:t>
+            </a:r>
+          </a:p>
+        </p:txBody>
+      </p:sp>
+      <p:sp>
+        <p:nvSpPr>
+          <p:cNvPr id="26" name="Rounded Rectangle 25"/>
           <p:cNvSpPr/>
           <p:nvPr/>
         </p:nvSpPr>
         <p:spPr>
           <a:xfrm>
-            <a:off x="2709333" y="2197100"/>
-            <a:ext cx="1058333" cy="381000"/>
+            <a:off x="2929466" y="2286000"/>
+            <a:ext cx="1011766" cy="419100"/>
           </a:xfrm>
           <a:prstGeom prst="roundRect">
             <a:avLst>
-              <a:gd name="adj" fmla="val 16666"/>
+              <a:gd name="adj" fmla="val 15151"/>
             </a:avLst>
           </a:prstGeom>
           <a:solidFill>
@@ -8109,14 +8047,14 @@
       </p:sp>
       <p:sp>
         <p:nvSpPr>
-          <p:cNvPr id="28" name="TextBox 27"/>
+          <p:cNvPr id="27" name="TextBox 26"/>
           <p:cNvSpPr txBox="1"/>
           <p:nvPr/>
         </p:nvSpPr>
         <p:spPr>
           <a:xfrm>
-            <a:off x="2747433" y="2197100"/>
-            <a:ext cx="982133" cy="381000"/>
+            <a:off x="2967566" y="2286000"/>
+            <a:ext cx="935566" cy="419100"/>
           </a:xfrm>
           <a:prstGeom prst="rect">
             <a:avLst/>
@@ -8135,7 +8073,7 @@
               </a:spcAft>
             </a:pPr>
             <a:r>
-              <a:rPr sz="600" b="1">
+              <a:rPr sz="1100" b="1">
                 <a:solidFill>
                   <a:srgbClr val="FFFFFF"/>
                 </a:solidFill>
@@ -8148,18 +8086,18 @@
       </p:sp>
       <p:sp>
         <p:nvSpPr>
-          <p:cNvPr id="29" name="Rounded Rectangle 28"/>
+          <p:cNvPr id="28" name="Rounded Rectangle 27"/>
           <p:cNvSpPr/>
           <p:nvPr/>
         </p:nvSpPr>
         <p:spPr>
           <a:xfrm>
-            <a:off x="2709333" y="2628900"/>
-            <a:ext cx="1058333" cy="1143000"/>
+            <a:off x="2929466" y="2755900"/>
+            <a:ext cx="1011766" cy="1333500"/>
           </a:xfrm>
           <a:prstGeom prst="roundRect">
             <a:avLst>
-              <a:gd name="adj" fmla="val 6000"/>
+              <a:gd name="adj" fmla="val 6276"/>
             </a:avLst>
           </a:prstGeom>
           <a:solidFill>
@@ -8194,14 +8132,14 @@
       </p:sp>
       <p:sp>
         <p:nvSpPr>
-          <p:cNvPr id="30" name="TextBox 29"/>
+          <p:cNvPr id="29" name="TextBox 28"/>
           <p:cNvSpPr txBox="1"/>
           <p:nvPr/>
         </p:nvSpPr>
         <p:spPr>
           <a:xfrm>
-            <a:off x="2785533" y="2628900"/>
-            <a:ext cx="905933" cy="1143000"/>
+            <a:off x="3005666" y="2755900"/>
+            <a:ext cx="859366" cy="1333500"/>
           </a:xfrm>
           <a:prstGeom prst="rect">
             <a:avLst/>
@@ -8220,31 +8158,31 @@
               </a:spcAft>
             </a:pPr>
             <a:r>
-              <a:rPr sz="650" b="0">
+              <a:rPr sz="1150" b="0">
                 <a:solidFill>
                   <a:srgbClr val="142433"/>
                 </a:solidFill>
                 <a:latin typeface="Inter"/>
               </a:rPr>
-              <a:t>Adaptive magic-link intake + live status + consent.</a:t>
-            </a:r>
-          </a:p>
-        </p:txBody>
-      </p:sp>
-      <p:sp>
-        <p:nvSpPr>
-          <p:cNvPr id="31" name="Rounded Rectangle 30"/>
+              <a:t>Adaptive intake + status + consent</a:t>
+            </a:r>
+          </a:p>
+        </p:txBody>
+      </p:sp>
+      <p:sp>
+        <p:nvSpPr>
+          <p:cNvPr id="30" name="Rounded Rectangle 29"/>
           <p:cNvSpPr/>
           <p:nvPr/>
         </p:nvSpPr>
         <p:spPr>
           <a:xfrm>
-            <a:off x="2709333" y="3822700"/>
-            <a:ext cx="1058333" cy="762000"/>
+            <a:off x="2929466" y="4140200"/>
+            <a:ext cx="1011766" cy="749300"/>
           </a:xfrm>
           <a:prstGeom prst="roundRect">
             <a:avLst>
-              <a:gd name="adj" fmla="val 8333"/>
+              <a:gd name="adj" fmla="val 8474"/>
             </a:avLst>
           </a:prstGeom>
           <a:solidFill>
@@ -8279,14 +8217,14 @@
       </p:sp>
       <p:sp>
         <p:nvSpPr>
-          <p:cNvPr id="32" name="TextBox 31"/>
+          <p:cNvPr id="31" name="TextBox 30"/>
           <p:cNvSpPr txBox="1"/>
           <p:nvPr/>
         </p:nvSpPr>
         <p:spPr>
           <a:xfrm>
-            <a:off x="2785533" y="3822700"/>
-            <a:ext cx="905933" cy="762000"/>
+            <a:off x="2992966" y="4140200"/>
+            <a:ext cx="884766" cy="749300"/>
           </a:xfrm>
           <a:prstGeom prst="rect">
             <a:avLst/>
@@ -8305,31 +8243,31 @@
               </a:spcAft>
             </a:pPr>
             <a:r>
-              <a:rPr sz="625" b="0">
+              <a:rPr sz="1100" b="0">
                 <a:solidFill>
                   <a:srgbClr val="142433"/>
                 </a:solidFill>
                 <a:latin typeface="Inter"/>
               </a:rPr>
-              <a:t>Family / client portal</a:t>
-            </a:r>
-          </a:p>
-        </p:txBody>
-      </p:sp>
-      <p:sp>
-        <p:nvSpPr>
-          <p:cNvPr id="33" name="Rounded Rectangle 32"/>
+              <a:t>Family / client app</a:t>
+            </a:r>
+          </a:p>
+        </p:txBody>
+      </p:sp>
+      <p:sp>
+        <p:nvSpPr>
+          <p:cNvPr id="32" name="Rounded Rectangle 31"/>
           <p:cNvSpPr/>
           <p:nvPr/>
         </p:nvSpPr>
         <p:spPr>
           <a:xfrm>
-            <a:off x="3831166" y="2197100"/>
-            <a:ext cx="1058333" cy="381000"/>
+            <a:off x="4017433" y="2286000"/>
+            <a:ext cx="1011766" cy="419100"/>
           </a:xfrm>
           <a:prstGeom prst="roundRect">
             <a:avLst>
-              <a:gd name="adj" fmla="val 16666"/>
+              <a:gd name="adj" fmla="val 15151"/>
             </a:avLst>
           </a:prstGeom>
           <a:solidFill>
@@ -8364,14 +8302,14 @@
       </p:sp>
       <p:sp>
         <p:nvSpPr>
-          <p:cNvPr id="34" name="TextBox 33"/>
+          <p:cNvPr id="33" name="TextBox 32"/>
           <p:cNvSpPr txBox="1"/>
           <p:nvPr/>
         </p:nvSpPr>
         <p:spPr>
           <a:xfrm>
-            <a:off x="3869266" y="2197100"/>
-            <a:ext cx="982133" cy="381000"/>
+            <a:off x="4055533" y="2286000"/>
+            <a:ext cx="935566" cy="419100"/>
           </a:xfrm>
           <a:prstGeom prst="rect">
             <a:avLst/>
@@ -8390,7 +8328,7 @@
               </a:spcAft>
             </a:pPr>
             <a:r>
-              <a:rPr sz="600" b="1">
+              <a:rPr sz="1100" b="1">
                 <a:solidFill>
                   <a:srgbClr val="FFFFFF"/>
                 </a:solidFill>
@@ -8403,18 +8341,18 @@
       </p:sp>
       <p:sp>
         <p:nvSpPr>
-          <p:cNvPr id="35" name="Rounded Rectangle 34"/>
+          <p:cNvPr id="34" name="Rounded Rectangle 33"/>
           <p:cNvSpPr/>
           <p:nvPr/>
         </p:nvSpPr>
         <p:spPr>
           <a:xfrm>
-            <a:off x="3831166" y="2628900"/>
-            <a:ext cx="1058333" cy="1143000"/>
+            <a:off x="4017433" y="2755900"/>
+            <a:ext cx="1011766" cy="1333500"/>
           </a:xfrm>
           <a:prstGeom prst="roundRect">
             <a:avLst>
-              <a:gd name="adj" fmla="val 6000"/>
+              <a:gd name="adj" fmla="val 6276"/>
             </a:avLst>
           </a:prstGeom>
           <a:solidFill>
@@ -8449,14 +8387,14 @@
       </p:sp>
       <p:sp>
         <p:nvSpPr>
-          <p:cNvPr id="36" name="TextBox 35"/>
+          <p:cNvPr id="35" name="TextBox 34"/>
           <p:cNvSpPr txBox="1"/>
           <p:nvPr/>
         </p:nvSpPr>
         <p:spPr>
           <a:xfrm>
-            <a:off x="3907366" y="2628900"/>
-            <a:ext cx="905933" cy="1143000"/>
+            <a:off x="4093633" y="2755900"/>
+            <a:ext cx="859366" cy="1333500"/>
           </a:xfrm>
           <a:prstGeom prst="rect">
             <a:avLst/>
@@ -8475,31 +8413,31 @@
               </a:spcAft>
             </a:pPr>
             <a:r>
-              <a:rPr sz="650" b="0">
+              <a:rPr sz="1150" b="0">
                 <a:solidFill>
                   <a:srgbClr val="142433"/>
                 </a:solidFill>
                 <a:latin typeface="Inter"/>
               </a:rPr>
-              <a:t>One-screen client overview / summary.</a:t>
-            </a:r>
-          </a:p>
-        </p:txBody>
-      </p:sp>
-      <p:sp>
-        <p:nvSpPr>
-          <p:cNvPr id="37" name="Rounded Rectangle 36"/>
+              <a:t>One-screen client overview</a:t>
+            </a:r>
+          </a:p>
+        </p:txBody>
+      </p:sp>
+      <p:sp>
+        <p:nvSpPr>
+          <p:cNvPr id="36" name="Rounded Rectangle 35"/>
           <p:cNvSpPr/>
           <p:nvPr/>
         </p:nvSpPr>
         <p:spPr>
           <a:xfrm>
-            <a:off x="3831166" y="3822700"/>
-            <a:ext cx="1058333" cy="762000"/>
+            <a:off x="4017433" y="4140200"/>
+            <a:ext cx="1011766" cy="749300"/>
           </a:xfrm>
           <a:prstGeom prst="roundRect">
             <a:avLst>
-              <a:gd name="adj" fmla="val 8333"/>
+              <a:gd name="adj" fmla="val 8474"/>
             </a:avLst>
           </a:prstGeom>
           <a:solidFill>
@@ -8534,14 +8472,14 @@
       </p:sp>
       <p:sp>
         <p:nvSpPr>
-          <p:cNvPr id="38" name="TextBox 37"/>
+          <p:cNvPr id="37" name="TextBox 36"/>
           <p:cNvSpPr txBox="1"/>
           <p:nvPr/>
         </p:nvSpPr>
         <p:spPr>
           <a:xfrm>
-            <a:off x="3907366" y="3822700"/>
-            <a:ext cx="905933" cy="762000"/>
+            <a:off x="4080933" y="4140200"/>
+            <a:ext cx="884766" cy="749300"/>
           </a:xfrm>
           <a:prstGeom prst="rect">
             <a:avLst/>
@@ -8560,7 +8498,7 @@
               </a:spcAft>
             </a:pPr>
             <a:r>
-              <a:rPr sz="625" b="0">
+              <a:rPr sz="1100" b="0">
                 <a:solidFill>
                   <a:srgbClr val="142433"/>
                 </a:solidFill>
@@ -8573,18 +8511,18 @@
       </p:sp>
       <p:sp>
         <p:nvSpPr>
-          <p:cNvPr id="39" name="Rounded Rectangle 38"/>
+          <p:cNvPr id="38" name="Rounded Rectangle 37"/>
           <p:cNvSpPr/>
           <p:nvPr/>
         </p:nvSpPr>
         <p:spPr>
           <a:xfrm>
-            <a:off x="4953000" y="2197100"/>
-            <a:ext cx="1058333" cy="381000"/>
+            <a:off x="5105400" y="2286000"/>
+            <a:ext cx="1011766" cy="419100"/>
           </a:xfrm>
           <a:prstGeom prst="roundRect">
             <a:avLst>
-              <a:gd name="adj" fmla="val 16666"/>
+              <a:gd name="adj" fmla="val 15151"/>
             </a:avLst>
           </a:prstGeom>
           <a:solidFill>
@@ -8619,14 +8557,14 @@
       </p:sp>
       <p:sp>
         <p:nvSpPr>
-          <p:cNvPr id="40" name="TextBox 39"/>
+          <p:cNvPr id="39" name="TextBox 38"/>
           <p:cNvSpPr txBox="1"/>
           <p:nvPr/>
         </p:nvSpPr>
         <p:spPr>
           <a:xfrm>
-            <a:off x="4991100" y="2197100"/>
-            <a:ext cx="982133" cy="381000"/>
+            <a:off x="5143500" y="2286000"/>
+            <a:ext cx="935566" cy="419100"/>
           </a:xfrm>
           <a:prstGeom prst="rect">
             <a:avLst/>
@@ -8645,7 +8583,7 @@
               </a:spcAft>
             </a:pPr>
             <a:r>
-              <a:rPr sz="600" b="1">
+              <a:rPr sz="1100" b="1">
                 <a:solidFill>
                   <a:srgbClr val="FFFFFF"/>
                 </a:solidFill>
@@ -8658,18 +8596,18 @@
       </p:sp>
       <p:sp>
         <p:nvSpPr>
-          <p:cNvPr id="41" name="Rounded Rectangle 40"/>
+          <p:cNvPr id="40" name="Rounded Rectangle 39"/>
           <p:cNvSpPr/>
           <p:nvPr/>
         </p:nvSpPr>
         <p:spPr>
           <a:xfrm>
-            <a:off x="4953000" y="2628900"/>
-            <a:ext cx="1058333" cy="1143000"/>
+            <a:off x="5105400" y="2755900"/>
+            <a:ext cx="1011766" cy="1333500"/>
           </a:xfrm>
           <a:prstGeom prst="roundRect">
             <a:avLst>
-              <a:gd name="adj" fmla="val 6000"/>
+              <a:gd name="adj" fmla="val 6276"/>
             </a:avLst>
           </a:prstGeom>
           <a:solidFill>
@@ -8704,14 +8642,14 @@
       </p:sp>
       <p:sp>
         <p:nvSpPr>
-          <p:cNvPr id="42" name="TextBox 41"/>
+          <p:cNvPr id="41" name="TextBox 40"/>
           <p:cNvSpPr txBox="1"/>
           <p:nvPr/>
         </p:nvSpPr>
         <p:spPr>
           <a:xfrm>
-            <a:off x="5029200" y="2628900"/>
-            <a:ext cx="905933" cy="1143000"/>
+            <a:off x="5181600" y="2755900"/>
+            <a:ext cx="859366" cy="1333500"/>
           </a:xfrm>
           <a:prstGeom prst="rect">
             <a:avLst/>
@@ -8730,31 +8668,31 @@
               </a:spcAft>
             </a:pPr>
             <a:r>
-              <a:rPr sz="650" b="0">
+              <a:rPr sz="1150" b="0">
                 <a:solidFill>
                   <a:srgbClr val="142433"/>
                 </a:solidFill>
                 <a:latin typeface="Inter"/>
               </a:rPr>
-              <a:t>AI prep brief — probes, red flags, references.</a:t>
-            </a:r>
-          </a:p>
-        </p:txBody>
-      </p:sp>
-      <p:sp>
-        <p:nvSpPr>
-          <p:cNvPr id="43" name="Rounded Rectangle 42"/>
+              <a:t>AI prep brief (DRAFT)</a:t>
+            </a:r>
+          </a:p>
+        </p:txBody>
+      </p:sp>
+      <p:sp>
+        <p:nvSpPr>
+          <p:cNvPr id="42" name="Rounded Rectangle 41"/>
           <p:cNvSpPr/>
           <p:nvPr/>
         </p:nvSpPr>
         <p:spPr>
           <a:xfrm>
-            <a:off x="4953000" y="3822700"/>
-            <a:ext cx="1058333" cy="762000"/>
+            <a:off x="5105400" y="4140200"/>
+            <a:ext cx="1011766" cy="749300"/>
           </a:xfrm>
           <a:prstGeom prst="roundRect">
             <a:avLst>
-              <a:gd name="adj" fmla="val 8333"/>
+              <a:gd name="adj" fmla="val 8474"/>
             </a:avLst>
           </a:prstGeom>
           <a:solidFill>
@@ -8789,14 +8727,14 @@
       </p:sp>
       <p:sp>
         <p:nvSpPr>
-          <p:cNvPr id="44" name="TextBox 43"/>
+          <p:cNvPr id="43" name="TextBox 42"/>
           <p:cNvSpPr txBox="1"/>
           <p:nvPr/>
         </p:nvSpPr>
         <p:spPr>
           <a:xfrm>
-            <a:off x="5029200" y="3822700"/>
-            <a:ext cx="905933" cy="762000"/>
+            <a:off x="5168900" y="4140200"/>
+            <a:ext cx="884766" cy="749300"/>
           </a:xfrm>
           <a:prstGeom prst="rect">
             <a:avLst/>
@@ -8815,7 +8753,7 @@
               </a:spcAft>
             </a:pPr>
             <a:r>
-              <a:rPr sz="625" b="0">
+              <a:rPr sz="1100" b="0">
                 <a:solidFill>
                   <a:srgbClr val="142433"/>
                 </a:solidFill>
@@ -8828,18 +8766,18 @@
       </p:sp>
       <p:sp>
         <p:nvSpPr>
-          <p:cNvPr id="45" name="Rounded Rectangle 44"/>
+          <p:cNvPr id="44" name="Rounded Rectangle 43"/>
           <p:cNvSpPr/>
           <p:nvPr/>
         </p:nvSpPr>
         <p:spPr>
           <a:xfrm>
-            <a:off x="6074833" y="2197100"/>
-            <a:ext cx="1058333" cy="381000"/>
+            <a:off x="6193366" y="2286000"/>
+            <a:ext cx="1011766" cy="419100"/>
           </a:xfrm>
           <a:prstGeom prst="roundRect">
             <a:avLst>
-              <a:gd name="adj" fmla="val 16666"/>
+              <a:gd name="adj" fmla="val 15151"/>
             </a:avLst>
           </a:prstGeom>
           <a:solidFill>
@@ -8874,14 +8812,14 @@
       </p:sp>
       <p:sp>
         <p:nvSpPr>
-          <p:cNvPr id="46" name="TextBox 45"/>
+          <p:cNvPr id="45" name="TextBox 44"/>
           <p:cNvSpPr txBox="1"/>
           <p:nvPr/>
         </p:nvSpPr>
         <p:spPr>
           <a:xfrm>
-            <a:off x="6112933" y="2197100"/>
-            <a:ext cx="982133" cy="381000"/>
+            <a:off x="6231466" y="2286000"/>
+            <a:ext cx="935566" cy="419100"/>
           </a:xfrm>
           <a:prstGeom prst="rect">
             <a:avLst/>
@@ -8900,7 +8838,7 @@
               </a:spcAft>
             </a:pPr>
             <a:r>
-              <a:rPr sz="600" b="1">
+              <a:rPr sz="1100" b="1">
                 <a:solidFill>
                   <a:srgbClr val="FFFFFF"/>
                 </a:solidFill>
@@ -8913,18 +8851,18 @@
       </p:sp>
       <p:sp>
         <p:nvSpPr>
-          <p:cNvPr id="47" name="Rounded Rectangle 46"/>
+          <p:cNvPr id="46" name="Rounded Rectangle 45"/>
           <p:cNvSpPr/>
           <p:nvPr/>
         </p:nvSpPr>
         <p:spPr>
           <a:xfrm>
-            <a:off x="6074833" y="2628900"/>
-            <a:ext cx="1058333" cy="1143000"/>
+            <a:off x="6193366" y="2755900"/>
+            <a:ext cx="1011766" cy="1333500"/>
           </a:xfrm>
           <a:prstGeom prst="roundRect">
             <a:avLst>
-              <a:gd name="adj" fmla="val 6000"/>
+              <a:gd name="adj" fmla="val 6276"/>
             </a:avLst>
           </a:prstGeom>
           <a:solidFill>
@@ -8959,14 +8897,14 @@
       </p:sp>
       <p:sp>
         <p:nvSpPr>
-          <p:cNvPr id="48" name="TextBox 47"/>
+          <p:cNvPr id="47" name="TextBox 46"/>
           <p:cNvSpPr txBox="1"/>
           <p:nvPr/>
         </p:nvSpPr>
         <p:spPr>
           <a:xfrm>
-            <a:off x="6151033" y="2628900"/>
-            <a:ext cx="905933" cy="1143000"/>
+            <a:off x="6269566" y="2755900"/>
+            <a:ext cx="859366" cy="1333500"/>
           </a:xfrm>
           <a:prstGeom prst="rect">
             <a:avLst/>
@@ -8985,31 +8923,31 @@
               </a:spcAft>
             </a:pPr>
             <a:r>
-              <a:rPr sz="650" b="0">
+              <a:rPr sz="1150" b="0">
                 <a:solidFill>
                   <a:srgbClr val="142433"/>
                 </a:solidFill>
                 <a:latin typeface="Inter"/>
               </a:rPr>
-              <a:t>Schedule the consult + calendar / video links.</a:t>
-            </a:r>
-          </a:p>
-        </p:txBody>
-      </p:sp>
-      <p:sp>
-        <p:nvSpPr>
-          <p:cNvPr id="49" name="Rounded Rectangle 48"/>
+              <a:t>Schedule consult + calendar / video</a:t>
+            </a:r>
+          </a:p>
+        </p:txBody>
+      </p:sp>
+      <p:sp>
+        <p:nvSpPr>
+          <p:cNvPr id="48" name="Rounded Rectangle 47"/>
           <p:cNvSpPr/>
           <p:nvPr/>
         </p:nvSpPr>
         <p:spPr>
           <a:xfrm>
-            <a:off x="6074833" y="3822700"/>
-            <a:ext cx="1058333" cy="762000"/>
+            <a:off x="6193366" y="4140200"/>
+            <a:ext cx="1011766" cy="749300"/>
           </a:xfrm>
           <a:prstGeom prst="roundRect">
             <a:avLst>
-              <a:gd name="adj" fmla="val 8333"/>
+              <a:gd name="adj" fmla="val 8474"/>
             </a:avLst>
           </a:prstGeom>
           <a:solidFill>
@@ -9044,14 +8982,14 @@
       </p:sp>
       <p:sp>
         <p:nvSpPr>
-          <p:cNvPr id="50" name="TextBox 49"/>
+          <p:cNvPr id="49" name="TextBox 48"/>
           <p:cNvSpPr txBox="1"/>
           <p:nvPr/>
         </p:nvSpPr>
         <p:spPr>
           <a:xfrm>
-            <a:off x="6151033" y="3822700"/>
-            <a:ext cx="905933" cy="762000"/>
+            <a:off x="6256866" y="4140200"/>
+            <a:ext cx="884766" cy="749300"/>
           </a:xfrm>
           <a:prstGeom prst="rect">
             <a:avLst/>
@@ -9070,31 +9008,31 @@
               </a:spcAft>
             </a:pPr>
             <a:r>
-              <a:rPr sz="625" b="0">
+              <a:rPr sz="1100" b="0">
                 <a:solidFill>
                   <a:srgbClr val="142433"/>
                 </a:solidFill>
                 <a:latin typeface="Inter"/>
               </a:rPr>
-              <a:t>Clinician web + calendar / video</a:t>
-            </a:r>
-          </a:p>
-        </p:txBody>
-      </p:sp>
-      <p:sp>
-        <p:nvSpPr>
-          <p:cNvPr id="51" name="Rounded Rectangle 50"/>
+              <a:t>Clinician web + calendar</a:t>
+            </a:r>
+          </a:p>
+        </p:txBody>
+      </p:sp>
+      <p:sp>
+        <p:nvSpPr>
+          <p:cNvPr id="50" name="Rounded Rectangle 49"/>
           <p:cNvSpPr/>
           <p:nvPr/>
         </p:nvSpPr>
         <p:spPr>
           <a:xfrm>
-            <a:off x="7196666" y="2197100"/>
-            <a:ext cx="1058333" cy="381000"/>
+            <a:off x="7281333" y="2286000"/>
+            <a:ext cx="1011766" cy="419100"/>
           </a:xfrm>
           <a:prstGeom prst="roundRect">
             <a:avLst>
-              <a:gd name="adj" fmla="val 16666"/>
+              <a:gd name="adj" fmla="val 15151"/>
             </a:avLst>
           </a:prstGeom>
           <a:solidFill>
@@ -9129,14 +9067,14 @@
       </p:sp>
       <p:sp>
         <p:nvSpPr>
-          <p:cNvPr id="52" name="TextBox 51"/>
+          <p:cNvPr id="51" name="TextBox 50"/>
           <p:cNvSpPr txBox="1"/>
           <p:nvPr/>
         </p:nvSpPr>
         <p:spPr>
           <a:xfrm>
-            <a:off x="7234766" y="2197100"/>
-            <a:ext cx="982133" cy="381000"/>
+            <a:off x="7319433" y="2286000"/>
+            <a:ext cx="935566" cy="419100"/>
           </a:xfrm>
           <a:prstGeom prst="rect">
             <a:avLst/>
@@ -9155,7 +9093,7 @@
               </a:spcAft>
             </a:pPr>
             <a:r>
-              <a:rPr sz="600" b="1">
+              <a:rPr sz="1100" b="1">
                 <a:solidFill>
                   <a:srgbClr val="FFFFFF"/>
                 </a:solidFill>
@@ -9168,18 +9106,18 @@
       </p:sp>
       <p:sp>
         <p:nvSpPr>
-          <p:cNvPr id="53" name="Rounded Rectangle 52"/>
+          <p:cNvPr id="52" name="Rounded Rectangle 51"/>
           <p:cNvSpPr/>
           <p:nvPr/>
         </p:nvSpPr>
         <p:spPr>
           <a:xfrm>
-            <a:off x="7196666" y="2628900"/>
-            <a:ext cx="1058333" cy="1143000"/>
+            <a:off x="7281333" y="2755900"/>
+            <a:ext cx="1011766" cy="1333500"/>
           </a:xfrm>
           <a:prstGeom prst="roundRect">
             <a:avLst>
-              <a:gd name="adj" fmla="val 6000"/>
+              <a:gd name="adj" fmla="val 6276"/>
             </a:avLst>
           </a:prstGeom>
           <a:solidFill>
@@ -9214,14 +9152,14 @@
       </p:sp>
       <p:sp>
         <p:nvSpPr>
-          <p:cNvPr id="54" name="TextBox 53"/>
+          <p:cNvPr id="53" name="TextBox 52"/>
           <p:cNvSpPr txBox="1"/>
           <p:nvPr/>
         </p:nvSpPr>
         <p:spPr>
           <a:xfrm>
-            <a:off x="7272866" y="2628900"/>
-            <a:ext cx="905933" cy="1143000"/>
+            <a:off x="7357533" y="2755900"/>
+            <a:ext cx="859366" cy="1333500"/>
           </a:xfrm>
           <a:prstGeom prst="rect">
             <a:avLst/>
@@ -9240,31 +9178,31 @@
               </a:spcAft>
             </a:pPr>
             <a:r>
-              <a:rPr sz="650" b="0">
+              <a:rPr sz="1150" b="0">
                 <a:solidFill>
                   <a:srgbClr val="142433"/>
                 </a:solidFill>
                 <a:latin typeface="Inter"/>
               </a:rPr>
-              <a:t>Capture triage outcome + rationale.</a:t>
-            </a:r>
-          </a:p>
-        </p:txBody>
-      </p:sp>
-      <p:sp>
-        <p:nvSpPr>
-          <p:cNvPr id="55" name="Rounded Rectangle 54"/>
+              <a:t>Capture triage + rationale</a:t>
+            </a:r>
+          </a:p>
+        </p:txBody>
+      </p:sp>
+      <p:sp>
+        <p:nvSpPr>
+          <p:cNvPr id="54" name="Rounded Rectangle 53"/>
           <p:cNvSpPr/>
           <p:nvPr/>
         </p:nvSpPr>
         <p:spPr>
           <a:xfrm>
-            <a:off x="7196666" y="3822700"/>
-            <a:ext cx="1058333" cy="762000"/>
+            <a:off x="7281333" y="4140200"/>
+            <a:ext cx="1011766" cy="749300"/>
           </a:xfrm>
           <a:prstGeom prst="roundRect">
             <a:avLst>
-              <a:gd name="adj" fmla="val 8333"/>
+              <a:gd name="adj" fmla="val 8474"/>
             </a:avLst>
           </a:prstGeom>
           <a:solidFill>
@@ -9299,14 +9237,14 @@
       </p:sp>
       <p:sp>
         <p:nvSpPr>
-          <p:cNvPr id="56" name="TextBox 55"/>
+          <p:cNvPr id="55" name="TextBox 54"/>
           <p:cNvSpPr txBox="1"/>
           <p:nvPr/>
         </p:nvSpPr>
         <p:spPr>
           <a:xfrm>
-            <a:off x="7272866" y="3822700"/>
-            <a:ext cx="905933" cy="762000"/>
+            <a:off x="7344833" y="4140200"/>
+            <a:ext cx="884766" cy="749300"/>
           </a:xfrm>
           <a:prstGeom prst="rect">
             <a:avLst/>
@@ -9325,31 +9263,31 @@
               </a:spcAft>
             </a:pPr>
             <a:r>
-              <a:rPr sz="625" b="0">
+              <a:rPr sz="1100" b="0">
                 <a:solidFill>
                   <a:srgbClr val="142433"/>
                 </a:solidFill>
                 <a:latin typeface="Inter"/>
               </a:rPr>
-              <a:t>Clinician web — triage</a:t>
-            </a:r>
-          </a:p>
-        </p:txBody>
-      </p:sp>
-      <p:sp>
-        <p:nvSpPr>
-          <p:cNvPr id="57" name="Rounded Rectangle 56"/>
+              <a:t>Clinician web</a:t>
+            </a:r>
+          </a:p>
+        </p:txBody>
+      </p:sp>
+      <p:sp>
+        <p:nvSpPr>
+          <p:cNvPr id="56" name="Rounded Rectangle 55"/>
           <p:cNvSpPr/>
           <p:nvPr/>
         </p:nvSpPr>
         <p:spPr>
           <a:xfrm>
-            <a:off x="8318499" y="2197100"/>
-            <a:ext cx="1058333" cy="381000"/>
+            <a:off x="8369300" y="2286000"/>
+            <a:ext cx="1011766" cy="419100"/>
           </a:xfrm>
           <a:prstGeom prst="roundRect">
             <a:avLst>
-              <a:gd name="adj" fmla="val 16666"/>
+              <a:gd name="adj" fmla="val 15151"/>
             </a:avLst>
           </a:prstGeom>
           <a:solidFill>
@@ -9384,14 +9322,14 @@
       </p:sp>
       <p:sp>
         <p:nvSpPr>
-          <p:cNvPr id="58" name="TextBox 57"/>
+          <p:cNvPr id="57" name="TextBox 56"/>
           <p:cNvSpPr txBox="1"/>
           <p:nvPr/>
         </p:nvSpPr>
         <p:spPr>
           <a:xfrm>
-            <a:off x="8356600" y="2197100"/>
-            <a:ext cx="982133" cy="381000"/>
+            <a:off x="8407400" y="2286000"/>
+            <a:ext cx="935566" cy="419100"/>
           </a:xfrm>
           <a:prstGeom prst="rect">
             <a:avLst/>
@@ -9410,7 +9348,7 @@
               </a:spcAft>
             </a:pPr>
             <a:r>
-              <a:rPr sz="600" b="1">
+              <a:rPr sz="1100" b="1">
                 <a:solidFill>
                   <a:srgbClr val="FFFFFF"/>
                 </a:solidFill>
@@ -9423,18 +9361,18 @@
       </p:sp>
       <p:sp>
         <p:nvSpPr>
-          <p:cNvPr id="59" name="Rounded Rectangle 58"/>
+          <p:cNvPr id="58" name="Rounded Rectangle 57"/>
           <p:cNvSpPr/>
           <p:nvPr/>
         </p:nvSpPr>
         <p:spPr>
           <a:xfrm>
-            <a:off x="8318499" y="2628900"/>
-            <a:ext cx="1058333" cy="1143000"/>
+            <a:off x="8369300" y="2755900"/>
+            <a:ext cx="1011766" cy="1333500"/>
           </a:xfrm>
           <a:prstGeom prst="roundRect">
             <a:avLst>
-              <a:gd name="adj" fmla="val 6000"/>
+              <a:gd name="adj" fmla="val 6276"/>
             </a:avLst>
           </a:prstGeom>
           <a:solidFill>
@@ -9469,14 +9407,14 @@
       </p:sp>
       <p:sp>
         <p:nvSpPr>
-          <p:cNvPr id="60" name="TextBox 59"/>
+          <p:cNvPr id="59" name="TextBox 58"/>
           <p:cNvSpPr txBox="1"/>
           <p:nvPr/>
         </p:nvSpPr>
         <p:spPr>
           <a:xfrm>
-            <a:off x="8394700" y="2628900"/>
-            <a:ext cx="905933" cy="1143000"/>
+            <a:off x="8445500" y="2755900"/>
+            <a:ext cx="859366" cy="1333500"/>
           </a:xfrm>
           <a:prstGeom prst="rect">
             <a:avLst/>
@@ -9495,31 +9433,31 @@
               </a:spcAft>
             </a:pPr>
             <a:r>
-              <a:rPr sz="650" b="0">
+              <a:rPr sz="1150" b="0">
                 <a:solidFill>
                   <a:srgbClr val="142433"/>
                 </a:solidFill>
                 <a:latin typeface="Inter"/>
               </a:rPr>
-              <a:t>AI-drafted, clinician-edited session plan.</a:t>
-            </a:r>
-          </a:p>
-        </p:txBody>
-      </p:sp>
-      <p:sp>
-        <p:nvSpPr>
-          <p:cNvPr id="61" name="Rounded Rectangle 60"/>
+              <a:t>AI session plan (DRAFT)</a:t>
+            </a:r>
+          </a:p>
+        </p:txBody>
+      </p:sp>
+      <p:sp>
+        <p:nvSpPr>
+          <p:cNvPr id="60" name="Rounded Rectangle 59"/>
           <p:cNvSpPr/>
           <p:nvPr/>
         </p:nvSpPr>
         <p:spPr>
           <a:xfrm>
-            <a:off x="8318499" y="3822700"/>
-            <a:ext cx="1058333" cy="762000"/>
+            <a:off x="8369300" y="4140200"/>
+            <a:ext cx="1011766" cy="749300"/>
           </a:xfrm>
           <a:prstGeom prst="roundRect">
             <a:avLst>
-              <a:gd name="adj" fmla="val 8333"/>
+              <a:gd name="adj" fmla="val 8474"/>
             </a:avLst>
           </a:prstGeom>
           <a:solidFill>
@@ -9554,14 +9492,14 @@
       </p:sp>
       <p:sp>
         <p:nvSpPr>
-          <p:cNvPr id="62" name="TextBox 61"/>
+          <p:cNvPr id="61" name="TextBox 60"/>
           <p:cNvSpPr txBox="1"/>
           <p:nvPr/>
         </p:nvSpPr>
         <p:spPr>
           <a:xfrm>
-            <a:off x="8394700" y="3822700"/>
-            <a:ext cx="905933" cy="762000"/>
+            <a:off x="8432800" y="4140200"/>
+            <a:ext cx="884766" cy="749300"/>
           </a:xfrm>
           <a:prstGeom prst="rect">
             <a:avLst/>
@@ -9580,7 +9518,7 @@
               </a:spcAft>
             </a:pPr>
             <a:r>
-              <a:rPr sz="625" b="0">
+              <a:rPr sz="1100" b="0">
                 <a:solidFill>
                   <a:srgbClr val="142433"/>
                 </a:solidFill>
@@ -9593,18 +9531,18 @@
       </p:sp>
       <p:sp>
         <p:nvSpPr>
-          <p:cNvPr id="63" name="Rounded Rectangle 62"/>
+          <p:cNvPr id="62" name="Rounded Rectangle 61"/>
           <p:cNvSpPr/>
           <p:nvPr/>
         </p:nvSpPr>
         <p:spPr>
           <a:xfrm>
-            <a:off x="9440333" y="2197100"/>
-            <a:ext cx="1058333" cy="381000"/>
+            <a:off x="9457266" y="2286000"/>
+            <a:ext cx="1011766" cy="419100"/>
           </a:xfrm>
           <a:prstGeom prst="roundRect">
             <a:avLst>
-              <a:gd name="adj" fmla="val 16666"/>
+              <a:gd name="adj" fmla="val 15151"/>
             </a:avLst>
           </a:prstGeom>
           <a:solidFill>
@@ -9639,14 +9577,14 @@
       </p:sp>
       <p:sp>
         <p:nvSpPr>
-          <p:cNvPr id="64" name="TextBox 63"/>
+          <p:cNvPr id="63" name="TextBox 62"/>
           <p:cNvSpPr txBox="1"/>
           <p:nvPr/>
         </p:nvSpPr>
         <p:spPr>
           <a:xfrm>
-            <a:off x="9478433" y="2197100"/>
-            <a:ext cx="982133" cy="381000"/>
+            <a:off x="9495366" y="2286000"/>
+            <a:ext cx="935566" cy="419100"/>
           </a:xfrm>
           <a:prstGeom prst="rect">
             <a:avLst/>
@@ -9665,7 +9603,7 @@
               </a:spcAft>
             </a:pPr>
             <a:r>
-              <a:rPr sz="600" b="1">
+              <a:rPr sz="1100" b="1">
                 <a:solidFill>
                   <a:srgbClr val="FFFFFF"/>
                 </a:solidFill>
@@ -9678,18 +9616,18 @@
       </p:sp>
       <p:sp>
         <p:nvSpPr>
-          <p:cNvPr id="65" name="Rounded Rectangle 64"/>
+          <p:cNvPr id="64" name="Rounded Rectangle 63"/>
           <p:cNvSpPr/>
           <p:nvPr/>
         </p:nvSpPr>
         <p:spPr>
           <a:xfrm>
-            <a:off x="9440333" y="2628900"/>
-            <a:ext cx="1058333" cy="1143000"/>
+            <a:off x="9457266" y="2755900"/>
+            <a:ext cx="1011766" cy="1333500"/>
           </a:xfrm>
           <a:prstGeom prst="roundRect">
             <a:avLst>
-              <a:gd name="adj" fmla="val 6000"/>
+              <a:gd name="adj" fmla="val 6276"/>
             </a:avLst>
           </a:prstGeom>
           <a:solidFill>
@@ -9724,14 +9662,14 @@
       </p:sp>
       <p:sp>
         <p:nvSpPr>
-          <p:cNvPr id="66" name="TextBox 65"/>
+          <p:cNvPr id="65" name="TextBox 64"/>
           <p:cNvSpPr txBox="1"/>
           <p:nvPr/>
         </p:nvSpPr>
         <p:spPr>
           <a:xfrm>
-            <a:off x="9516533" y="2628900"/>
-            <a:ext cx="905933" cy="1143000"/>
+            <a:off x="9533466" y="2755900"/>
+            <a:ext cx="859366" cy="1333500"/>
           </a:xfrm>
           <a:prstGeom prst="rect">
             <a:avLst/>
@@ -9750,31 +9688,31 @@
               </a:spcAft>
             </a:pPr>
             <a:r>
-              <a:rPr sz="650" b="0">
+              <a:rPr sz="1150" b="0">
                 <a:solidFill>
                   <a:srgbClr val="142433"/>
                 </a:solidFill>
                 <a:latin typeface="Inter"/>
               </a:rPr>
-              <a:t>Tone / reading-level client summary via portal.</a:t>
-            </a:r>
-          </a:p>
-        </p:txBody>
-      </p:sp>
-      <p:sp>
-        <p:nvSpPr>
-          <p:cNvPr id="67" name="Rounded Rectangle 66"/>
+              <a:t>Tone-adjusted client summary</a:t>
+            </a:r>
+          </a:p>
+        </p:txBody>
+      </p:sp>
+      <p:sp>
+        <p:nvSpPr>
+          <p:cNvPr id="66" name="Rounded Rectangle 65"/>
           <p:cNvSpPr/>
           <p:nvPr/>
         </p:nvSpPr>
         <p:spPr>
           <a:xfrm>
-            <a:off x="9440333" y="3822700"/>
-            <a:ext cx="1058333" cy="762000"/>
+            <a:off x="9457266" y="4140200"/>
+            <a:ext cx="1011766" cy="749300"/>
           </a:xfrm>
           <a:prstGeom prst="roundRect">
             <a:avLst>
-              <a:gd name="adj" fmla="val 8333"/>
+              <a:gd name="adj" fmla="val 8474"/>
             </a:avLst>
           </a:prstGeom>
           <a:solidFill>
@@ -9809,14 +9747,14 @@
       </p:sp>
       <p:sp>
         <p:nvSpPr>
-          <p:cNvPr id="68" name="TextBox 67"/>
+          <p:cNvPr id="67" name="TextBox 66"/>
           <p:cNvSpPr txBox="1"/>
           <p:nvPr/>
         </p:nvSpPr>
         <p:spPr>
           <a:xfrm>
-            <a:off x="9516533" y="3822700"/>
-            <a:ext cx="905933" cy="762000"/>
+            <a:off x="9520766" y="4140200"/>
+            <a:ext cx="884766" cy="749300"/>
           </a:xfrm>
           <a:prstGeom prst="rect">
             <a:avLst/>
@@ -9835,31 +9773,31 @@
               </a:spcAft>
             </a:pPr>
             <a:r>
-              <a:rPr sz="625" b="0">
+              <a:rPr sz="1100" b="0">
                 <a:solidFill>
                   <a:srgbClr val="142433"/>
                 </a:solidFill>
                 <a:latin typeface="Inter"/>
               </a:rPr>
-              <a:t>Client app / portal + AI</a:t>
-            </a:r>
-          </a:p>
-        </p:txBody>
-      </p:sp>
-      <p:sp>
-        <p:nvSpPr>
-          <p:cNvPr id="69" name="Rounded Rectangle 68"/>
+              <a:t>Client app + AI</a:t>
+            </a:r>
+          </a:p>
+        </p:txBody>
+      </p:sp>
+      <p:sp>
+        <p:nvSpPr>
+          <p:cNvPr id="68" name="Rounded Rectangle 67"/>
           <p:cNvSpPr/>
           <p:nvPr/>
         </p:nvSpPr>
         <p:spPr>
           <a:xfrm>
-            <a:off x="10562166" y="2197100"/>
-            <a:ext cx="1058333" cy="381000"/>
+            <a:off x="10545233" y="2286000"/>
+            <a:ext cx="1011766" cy="419100"/>
           </a:xfrm>
           <a:prstGeom prst="roundRect">
             <a:avLst>
-              <a:gd name="adj" fmla="val 16666"/>
+              <a:gd name="adj" fmla="val 15151"/>
             </a:avLst>
           </a:prstGeom>
           <a:solidFill>
@@ -9894,14 +9832,14 @@
       </p:sp>
       <p:sp>
         <p:nvSpPr>
-          <p:cNvPr id="70" name="TextBox 69"/>
+          <p:cNvPr id="69" name="TextBox 68"/>
           <p:cNvSpPr txBox="1"/>
           <p:nvPr/>
         </p:nvSpPr>
         <p:spPr>
           <a:xfrm>
-            <a:off x="10600266" y="2197100"/>
-            <a:ext cx="982133" cy="381000"/>
+            <a:off x="10583333" y="2286000"/>
+            <a:ext cx="935566" cy="419100"/>
           </a:xfrm>
           <a:prstGeom prst="rect">
             <a:avLst/>
@@ -9920,7 +9858,7 @@
               </a:spcAft>
             </a:pPr>
             <a:r>
-              <a:rPr sz="600" b="1">
+              <a:rPr sz="1100" b="1">
                 <a:solidFill>
                   <a:srgbClr val="FFFFFF"/>
                 </a:solidFill>
@@ -9933,18 +9871,18 @@
       </p:sp>
       <p:sp>
         <p:nvSpPr>
-          <p:cNvPr id="71" name="Rounded Rectangle 70"/>
+          <p:cNvPr id="70" name="Rounded Rectangle 69"/>
           <p:cNvSpPr/>
           <p:nvPr/>
         </p:nvSpPr>
         <p:spPr>
           <a:xfrm>
-            <a:off x="10562166" y="2628900"/>
-            <a:ext cx="1058333" cy="1143000"/>
+            <a:off x="10545233" y="2755900"/>
+            <a:ext cx="1011766" cy="1333500"/>
           </a:xfrm>
           <a:prstGeom prst="roundRect">
             <a:avLst>
-              <a:gd name="adj" fmla="val 6000"/>
+              <a:gd name="adj" fmla="val 6276"/>
             </a:avLst>
           </a:prstGeom>
           <a:solidFill>
@@ -9979,14 +9917,14 @@
       </p:sp>
       <p:sp>
         <p:nvSpPr>
-          <p:cNvPr id="72" name="TextBox 71"/>
+          <p:cNvPr id="71" name="TextBox 70"/>
           <p:cNvSpPr txBox="1"/>
           <p:nvPr/>
         </p:nvSpPr>
         <p:spPr>
           <a:xfrm>
-            <a:off x="10638366" y="2628900"/>
-            <a:ext cx="905933" cy="1143000"/>
+            <a:off x="10621433" y="2755900"/>
+            <a:ext cx="859366" cy="1333500"/>
           </a:xfrm>
           <a:prstGeom prst="rect">
             <a:avLst/>
@@ -10005,31 +9943,31 @@
               </a:spcAft>
             </a:pPr>
             <a:r>
-              <a:rPr sz="650" b="0">
+              <a:rPr sz="1150" b="0">
                 <a:solidFill>
                   <a:srgbClr val="142433"/>
                 </a:solidFill>
                 <a:latin typeface="Inter"/>
               </a:rPr>
-              <a:t>Resources, progress portal &amp; report loop.</a:t>
-            </a:r>
-          </a:p>
-        </p:txBody>
-      </p:sp>
-      <p:sp>
-        <p:nvSpPr>
-          <p:cNvPr id="73" name="Rounded Rectangle 72"/>
+              <a:t>Resources + progress portal</a:t>
+            </a:r>
+          </a:p>
+        </p:txBody>
+      </p:sp>
+      <p:sp>
+        <p:nvSpPr>
+          <p:cNvPr id="72" name="Rounded Rectangle 71"/>
           <p:cNvSpPr/>
           <p:nvPr/>
         </p:nvSpPr>
         <p:spPr>
           <a:xfrm>
-            <a:off x="10562166" y="3822700"/>
-            <a:ext cx="1058333" cy="762000"/>
+            <a:off x="10545233" y="4140200"/>
+            <a:ext cx="1011766" cy="749300"/>
           </a:xfrm>
           <a:prstGeom prst="roundRect">
             <a:avLst>
-              <a:gd name="adj" fmla="val 8333"/>
+              <a:gd name="adj" fmla="val 8474"/>
             </a:avLst>
           </a:prstGeom>
           <a:solidFill>
@@ -10064,14 +10002,14 @@
       </p:sp>
       <p:sp>
         <p:nvSpPr>
-          <p:cNvPr id="74" name="TextBox 73"/>
+          <p:cNvPr id="73" name="TextBox 72"/>
           <p:cNvSpPr txBox="1"/>
           <p:nvPr/>
         </p:nvSpPr>
         <p:spPr>
           <a:xfrm>
-            <a:off x="10638366" y="3822700"/>
-            <a:ext cx="905933" cy="762000"/>
+            <a:off x="10608733" y="4140200"/>
+            <a:ext cx="884766" cy="749300"/>
           </a:xfrm>
           <a:prstGeom prst="rect">
             <a:avLst/>
@@ -10090,27 +10028,27 @@
               </a:spcAft>
             </a:pPr>
             <a:r>
-              <a:rPr sz="625" b="0">
+              <a:rPr sz="1100" b="0">
                 <a:solidFill>
                   <a:srgbClr val="142433"/>
                 </a:solidFill>
                 <a:latin typeface="Inter"/>
               </a:rPr>
-              <a:t>Client app + clinician web</a:t>
-            </a:r>
-          </a:p>
-        </p:txBody>
-      </p:sp>
-      <p:sp>
-        <p:nvSpPr>
-          <p:cNvPr id="75" name="TextBox 74"/>
+              <a:t>Client app + web</a:t>
+            </a:r>
+          </a:p>
+        </p:txBody>
+      </p:sp>
+      <p:sp>
+        <p:nvSpPr>
+          <p:cNvPr id="74" name="TextBox 73"/>
           <p:cNvSpPr txBox="1"/>
           <p:nvPr/>
         </p:nvSpPr>
         <p:spPr>
           <a:xfrm>
-            <a:off x="571500" y="4902200"/>
-            <a:ext cx="5715000" cy="152400"/>
+            <a:off x="635000" y="5080000"/>
+            <a:ext cx="5715000" cy="190500"/>
           </a:xfrm>
           <a:prstGeom prst="rect">
             <a:avLst/>
@@ -10129,7 +10067,7 @@
               </a:spcAft>
             </a:pPr>
             <a:r>
-              <a:rPr sz="700" b="1">
+              <a:rPr sz="1200" b="1">
                 <a:solidFill>
                   <a:srgbClr val="8597A4"/>
                 </a:solidFill>
@@ -10142,18 +10080,18 @@
       </p:sp>
       <p:sp>
         <p:nvSpPr>
-          <p:cNvPr id="76" name="Rounded Rectangle 75"/>
+          <p:cNvPr id="75" name="Rounded Rectangle 74"/>
           <p:cNvSpPr/>
           <p:nvPr/>
         </p:nvSpPr>
         <p:spPr>
           <a:xfrm>
-            <a:off x="571500" y="5118100"/>
-            <a:ext cx="2667000" cy="520700"/>
+            <a:off x="635000" y="5308600"/>
+            <a:ext cx="2635250" cy="609600"/>
           </a:xfrm>
           <a:prstGeom prst="roundRect">
             <a:avLst>
-              <a:gd name="adj" fmla="val 14634"/>
+              <a:gd name="adj" fmla="val 12500"/>
             </a:avLst>
           </a:prstGeom>
           <a:solidFill>
@@ -10188,14 +10126,14 @@
       </p:sp>
       <p:sp>
         <p:nvSpPr>
-          <p:cNvPr id="77" name="TextBox 76"/>
+          <p:cNvPr id="76" name="TextBox 75"/>
           <p:cNvSpPr txBox="1"/>
           <p:nvPr/>
         </p:nvSpPr>
         <p:spPr>
           <a:xfrm>
-            <a:off x="673100" y="5118100"/>
-            <a:ext cx="2463800" cy="520700"/>
+            <a:off x="749300" y="5308600"/>
+            <a:ext cx="2406650" cy="609600"/>
           </a:xfrm>
           <a:prstGeom prst="rect">
             <a:avLst/>
@@ -10214,31 +10152,31 @@
               </a:spcAft>
             </a:pPr>
             <a:r>
-              <a:rPr sz="750" b="1">
+              <a:rPr sz="1200" b="1">
                 <a:solidFill>
                   <a:srgbClr val="2D6A6E"/>
                 </a:solidFill>
                 <a:latin typeface="Inter"/>
               </a:rPr>
-              <a:t>Own the first 30 days as one reviewed loop</a:t>
-            </a:r>
-          </a:p>
-        </p:txBody>
-      </p:sp>
-      <p:sp>
-        <p:nvSpPr>
-          <p:cNvPr id="78" name="Rounded Rectangle 77"/>
+              <a:t>Own the first 30 days as one loop</a:t>
+            </a:r>
+          </a:p>
+        </p:txBody>
+      </p:sp>
+      <p:sp>
+        <p:nvSpPr>
+          <p:cNvPr id="77" name="Rounded Rectangle 76"/>
           <p:cNvSpPr/>
           <p:nvPr/>
         </p:nvSpPr>
         <p:spPr>
           <a:xfrm>
-            <a:off x="3365500" y="5118100"/>
-            <a:ext cx="2667000" cy="520700"/>
+            <a:off x="3397250" y="5308600"/>
+            <a:ext cx="2635250" cy="609600"/>
           </a:xfrm>
           <a:prstGeom prst="roundRect">
             <a:avLst>
-              <a:gd name="adj" fmla="val 14634"/>
+              <a:gd name="adj" fmla="val 12500"/>
             </a:avLst>
           </a:prstGeom>
           <a:solidFill>
@@ -10273,14 +10211,14 @@
       </p:sp>
       <p:sp>
         <p:nvSpPr>
-          <p:cNvPr id="79" name="TextBox 78"/>
+          <p:cNvPr id="78" name="TextBox 77"/>
           <p:cNvSpPr txBox="1"/>
           <p:nvPr/>
         </p:nvSpPr>
         <p:spPr>
           <a:xfrm>
-            <a:off x="3467100" y="5118100"/>
-            <a:ext cx="2463800" cy="520700"/>
+            <a:off x="3511550" y="5308600"/>
+            <a:ext cx="2406650" cy="609600"/>
           </a:xfrm>
           <a:prstGeom prst="rect">
             <a:avLst/>
@@ -10299,31 +10237,31 @@
               </a:spcAft>
             </a:pPr>
             <a:r>
-              <a:rPr sz="750" b="1">
+              <a:rPr sz="1200" b="1">
                 <a:solidFill>
                   <a:srgbClr val="2D6A6E"/>
                 </a:solidFill>
                 <a:latin typeface="Inter"/>
               </a:rPr>
-              <a:t>Trust is the moat — clinician signs every AI draft</a:t>
-            </a:r>
-          </a:p>
-        </p:txBody>
-      </p:sp>
-      <p:sp>
-        <p:nvSpPr>
-          <p:cNvPr id="80" name="Rounded Rectangle 79"/>
+              <a:t>Trust is the moat — clinician signs every draft</a:t>
+            </a:r>
+          </a:p>
+        </p:txBody>
+      </p:sp>
+      <p:sp>
+        <p:nvSpPr>
+          <p:cNvPr id="79" name="Rounded Rectangle 78"/>
           <p:cNvSpPr/>
           <p:nvPr/>
         </p:nvSpPr>
         <p:spPr>
           <a:xfrm>
-            <a:off x="6159500" y="5118100"/>
-            <a:ext cx="2667000" cy="520700"/>
+            <a:off x="6159500" y="5308600"/>
+            <a:ext cx="2635250" cy="609600"/>
           </a:xfrm>
           <a:prstGeom prst="roundRect">
             <a:avLst>
-              <a:gd name="adj" fmla="val 14634"/>
+              <a:gd name="adj" fmla="val 12500"/>
             </a:avLst>
           </a:prstGeom>
           <a:solidFill>
@@ -10358,14 +10296,14 @@
       </p:sp>
       <p:sp>
         <p:nvSpPr>
-          <p:cNvPr id="81" name="TextBox 80"/>
+          <p:cNvPr id="80" name="TextBox 79"/>
           <p:cNvSpPr txBox="1"/>
           <p:nvPr/>
         </p:nvSpPr>
         <p:spPr>
           <a:xfrm>
-            <a:off x="6261100" y="5118100"/>
-            <a:ext cx="2463800" cy="520700"/>
+            <a:off x="6273800" y="5308600"/>
+            <a:ext cx="2406650" cy="609600"/>
           </a:xfrm>
           <a:prstGeom prst="rect">
             <a:avLst/>
@@ -10384,7 +10322,7 @@
               </a:spcAft>
             </a:pPr>
             <a:r>
-              <a:rPr sz="750" b="1">
+              <a:rPr sz="1200" b="1">
                 <a:solidFill>
                   <a:srgbClr val="2D6A6E"/>
                 </a:solidFill>
@@ -10397,18 +10335,18 @@
       </p:sp>
       <p:sp>
         <p:nvSpPr>
-          <p:cNvPr id="82" name="Rounded Rectangle 81"/>
+          <p:cNvPr id="81" name="Rounded Rectangle 80"/>
           <p:cNvSpPr/>
           <p:nvPr/>
         </p:nvSpPr>
         <p:spPr>
           <a:xfrm>
-            <a:off x="8953500" y="5118100"/>
-            <a:ext cx="2667000" cy="520700"/>
+            <a:off x="8921750" y="5308600"/>
+            <a:ext cx="2635250" cy="609600"/>
           </a:xfrm>
           <a:prstGeom prst="roundRect">
             <a:avLst>
-              <a:gd name="adj" fmla="val 14634"/>
+              <a:gd name="adj" fmla="val 12500"/>
             </a:avLst>
           </a:prstGeom>
           <a:solidFill>
@@ -10443,14 +10381,14 @@
       </p:sp>
       <p:sp>
         <p:nvSpPr>
-          <p:cNvPr id="83" name="TextBox 82"/>
+          <p:cNvPr id="82" name="TextBox 81"/>
           <p:cNvSpPr txBox="1"/>
           <p:nvPr/>
         </p:nvSpPr>
         <p:spPr>
           <a:xfrm>
-            <a:off x="9055100" y="5118100"/>
-            <a:ext cx="2463800" cy="520700"/>
+            <a:off x="9036050" y="5308600"/>
+            <a:ext cx="2406650" cy="609600"/>
           </a:xfrm>
           <a:prstGeom prst="rect">
             <a:avLst/>
@@ -10469,7 +10407,7 @@
               </a:spcAft>
             </a:pPr>
             <a:r>
-              <a:rPr sz="750" b="1">
+              <a:rPr sz="1200" b="1">
                 <a:solidFill>
                   <a:srgbClr val="2D6A6E"/>
                 </a:solidFill>
@@ -10482,14 +10420,14 @@
       </p:sp>
       <p:sp>
         <p:nvSpPr>
-          <p:cNvPr id="84" name="TextBox 83"/>
+          <p:cNvPr id="83" name="TextBox 82"/>
           <p:cNvSpPr txBox="1"/>
           <p:nvPr/>
         </p:nvSpPr>
         <p:spPr>
           <a:xfrm>
-            <a:off x="571500" y="6388100"/>
-            <a:ext cx="11049000" cy="139700"/>
+            <a:off x="635000" y="6070600"/>
+            <a:ext cx="10922000" cy="190500"/>
           </a:xfrm>
           <a:prstGeom prst="rect">
             <a:avLst/>
@@ -10508,7 +10446,7 @@
               </a:spcAft>
             </a:pPr>
             <a:r>
-              <a:rPr sz="625" b="0">
+              <a:rPr sz="1100" b="0">
                 <a:solidFill>
                   <a:srgbClr val="8597A4"/>
                 </a:solidFill>
@@ -10521,14 +10459,14 @@
       </p:sp>
       <p:sp>
         <p:nvSpPr>
-          <p:cNvPr id="85" name="TextBox 84"/>
+          <p:cNvPr id="84" name="TextBox 83"/>
           <p:cNvSpPr txBox="1"/>
           <p:nvPr/>
         </p:nvSpPr>
         <p:spPr>
           <a:xfrm>
-            <a:off x="571500" y="6604000"/>
-            <a:ext cx="5715000" cy="139700"/>
+            <a:off x="635000" y="6642100"/>
+            <a:ext cx="5715000" cy="165100"/>
           </a:xfrm>
           <a:prstGeom prst="rect">
             <a:avLst/>
@@ -10536,18 +10474,13 @@
           <a:noFill/>
         </p:spPr>
         <p:txBody>
-          <a:bodyPr wrap="square" anchor="t" lIns="25400" rIns="25400" tIns="25400" bIns="25400">
+          <a:bodyPr wrap="none">
             <a:spAutoFit/>
           </a:bodyPr>
           <a:lstStyle/>
           <a:p>
-            <a:pPr algn="l">
-              <a:spcAft>
-                <a:spcPts val="0"/>
-              </a:spcAft>
-            </a:pPr>
-            <a:r>
-              <a:rPr sz="600" b="0">
+            <a:r>
+              <a:rPr sz="1000">
                 <a:solidFill>
                   <a:srgbClr val="8597A4"/>
                 </a:solidFill>
@@ -10560,14 +10493,14 @@
       </p:sp>
       <p:sp>
         <p:nvSpPr>
-          <p:cNvPr id="86" name="TextBox 85"/>
+          <p:cNvPr id="85" name="TextBox 84"/>
           <p:cNvSpPr txBox="1"/>
           <p:nvPr/>
         </p:nvSpPr>
         <p:spPr>
           <a:xfrm>
-            <a:off x="10414000" y="6604000"/>
-            <a:ext cx="1206500" cy="139700"/>
+            <a:off x="10287000" y="6642100"/>
+            <a:ext cx="1270000" cy="165100"/>
           </a:xfrm>
           <a:prstGeom prst="rect">
             <a:avLst/>
@@ -10575,18 +10508,14 @@
           <a:noFill/>
         </p:spPr>
         <p:txBody>
-          <a:bodyPr wrap="square" anchor="t" lIns="25400" rIns="25400" tIns="25400" bIns="25400">
+          <a:bodyPr wrap="none">
             <a:spAutoFit/>
           </a:bodyPr>
           <a:lstStyle/>
           <a:p>
-            <a:pPr algn="r">
-              <a:spcAft>
-                <a:spcPts val="0"/>
-              </a:spcAft>
-            </a:pPr>
-            <a:r>
-              <a:rPr sz="600" b="0">
+            <a:pPr algn="r"/>
+            <a:r>
+              <a:rPr sz="1000">
                 <a:solidFill>
                   <a:srgbClr val="8597A4"/>
                 </a:solidFill>
@@ -10667,8 +10596,8 @@
         </p:nvSpPr>
         <p:spPr>
           <a:xfrm>
-            <a:off x="571500" y="406400"/>
-            <a:ext cx="5715000" cy="165100"/>
+            <a:off x="635000" y="406400"/>
+            <a:ext cx="5715000" cy="203200"/>
           </a:xfrm>
           <a:prstGeom prst="rect">
             <a:avLst/>
@@ -10687,7 +10616,7 @@
               </a:spcAft>
             </a:pPr>
             <a:r>
-              <a:rPr sz="750" b="1">
+              <a:rPr sz="1200" b="1">
                 <a:solidFill>
                   <a:srgbClr val="8597A4"/>
                 </a:solidFill>
@@ -10706,8 +10635,8 @@
         </p:nvSpPr>
         <p:spPr>
           <a:xfrm>
-            <a:off x="571500" y="571500"/>
-            <a:ext cx="9525000" cy="381000"/>
+            <a:off x="635000" y="635000"/>
+            <a:ext cx="9525000" cy="508000"/>
           </a:xfrm>
           <a:prstGeom prst="rect">
             <a:avLst/>
@@ -10726,7 +10655,7 @@
               </a:spcAft>
             </a:pPr>
             <a:r>
-              <a:rPr sz="2000" b="1">
+              <a:rPr sz="3500" b="1">
                 <a:solidFill>
                   <a:srgbClr val="2D6A6E"/>
                 </a:solidFill>
@@ -10745,7 +10674,7 @@
         </p:nvSpPr>
         <p:spPr>
           <a:xfrm>
-            <a:off x="571500" y="1003300"/>
+            <a:off x="635000" y="1270000"/>
             <a:ext cx="10922000" cy="254000"/>
           </a:xfrm>
           <a:prstGeom prst="rect">
@@ -10765,13 +10694,13 @@
               </a:spcAft>
             </a:pPr>
             <a:r>
-              <a:rPr sz="900" b="0">
+              <a:rPr sz="1500" b="0">
                 <a:solidFill>
                   <a:srgbClr val="4A5B6B"/>
                 </a:solidFill>
                 <a:latin typeface="Inter"/>
               </a:rPr>
-              <a:t>A swimlane map of the proposed process.</a:t>
+              <a:t>A swimlane map of the proposed (To-Be) process — the basis for prototypes and screens.</a:t>
             </a:r>
           </a:p>
         </p:txBody>
@@ -10784,8 +10713,8 @@
         </p:nvSpPr>
         <p:spPr>
           <a:xfrm>
-            <a:off x="1371600" y="1473200"/>
-            <a:ext cx="10439400" cy="1244600"/>
+            <a:off x="1714500" y="1752600"/>
+            <a:ext cx="9842500" cy="1143000"/>
           </a:xfrm>
           <a:prstGeom prst="rect">
             <a:avLst/>
@@ -10830,8 +10759,8 @@
         </p:nvSpPr>
         <p:spPr>
           <a:xfrm>
-            <a:off x="381000" y="1473200"/>
-            <a:ext cx="990599" cy="1244600"/>
+            <a:off x="635000" y="1752600"/>
+            <a:ext cx="1079500" cy="1143000"/>
           </a:xfrm>
           <a:prstGeom prst="rect">
             <a:avLst/>
@@ -10874,8 +10803,8 @@
         </p:nvSpPr>
         <p:spPr>
           <a:xfrm rot="16200000">
-            <a:off x="381000" y="1473200"/>
-            <a:ext cx="990599" cy="1244600"/>
+            <a:off x="635000" y="1752600"/>
+            <a:ext cx="1079500" cy="1143000"/>
           </a:xfrm>
           <a:prstGeom prst="rect">
             <a:avLst/>
@@ -10890,7 +10819,7 @@
           <a:p>
             <a:pPr algn="ctr"/>
             <a:r>
-              <a:rPr sz="700" b="1">
+              <a:rPr sz="1100" b="1">
                 <a:solidFill>
                   <a:srgbClr val="FFFFFF"/>
                 </a:solidFill>
@@ -10909,8 +10838,8 @@
         </p:nvSpPr>
         <p:spPr>
           <a:xfrm>
-            <a:off x="1371600" y="2717800"/>
-            <a:ext cx="10439400" cy="1244600"/>
+            <a:off x="1714500" y="2895600"/>
+            <a:ext cx="9842500" cy="1143000"/>
           </a:xfrm>
           <a:prstGeom prst="rect">
             <a:avLst/>
@@ -10955,8 +10884,8 @@
         </p:nvSpPr>
         <p:spPr>
           <a:xfrm>
-            <a:off x="381000" y="2717800"/>
-            <a:ext cx="990599" cy="1244600"/>
+            <a:off x="635000" y="2895600"/>
+            <a:ext cx="1079500" cy="1143000"/>
           </a:xfrm>
           <a:prstGeom prst="rect">
             <a:avLst/>
@@ -10999,8 +10928,8 @@
         </p:nvSpPr>
         <p:spPr>
           <a:xfrm rot="16200000">
-            <a:off x="381000" y="2717800"/>
-            <a:ext cx="990599" cy="1244600"/>
+            <a:off x="635000" y="2895600"/>
+            <a:ext cx="1079500" cy="1143000"/>
           </a:xfrm>
           <a:prstGeom prst="rect">
             <a:avLst/>
@@ -11015,7 +10944,7 @@
           <a:p>
             <a:pPr algn="ctr"/>
             <a:r>
-              <a:rPr sz="700" b="1">
+              <a:rPr sz="1100" b="1">
                 <a:solidFill>
                   <a:srgbClr val="FFFFFF"/>
                 </a:solidFill>
@@ -11034,8 +10963,8 @@
         </p:nvSpPr>
         <p:spPr>
           <a:xfrm>
-            <a:off x="1371600" y="3962399"/>
-            <a:ext cx="10439400" cy="1244600"/>
+            <a:off x="1714500" y="4038600"/>
+            <a:ext cx="9842500" cy="1143000"/>
           </a:xfrm>
           <a:prstGeom prst="rect">
             <a:avLst/>
@@ -11080,8 +11009,8 @@
         </p:nvSpPr>
         <p:spPr>
           <a:xfrm>
-            <a:off x="381000" y="3962399"/>
-            <a:ext cx="990599" cy="1244600"/>
+            <a:off x="635000" y="4038600"/>
+            <a:ext cx="1079500" cy="1143000"/>
           </a:xfrm>
           <a:prstGeom prst="rect">
             <a:avLst/>
@@ -11124,8 +11053,8 @@
         </p:nvSpPr>
         <p:spPr>
           <a:xfrm rot="16200000">
-            <a:off x="381000" y="3962399"/>
-            <a:ext cx="990599" cy="1244600"/>
+            <a:off x="635000" y="4038600"/>
+            <a:ext cx="1079500" cy="1143000"/>
           </a:xfrm>
           <a:prstGeom prst="rect">
             <a:avLst/>
@@ -11140,7 +11069,7 @@
           <a:p>
             <a:pPr algn="ctr"/>
             <a:r>
-              <a:rPr sz="700" b="1">
+              <a:rPr sz="1100" b="1">
                 <a:solidFill>
                   <a:srgbClr val="FFFFFF"/>
                 </a:solidFill>
@@ -11159,8 +11088,8 @@
         </p:nvSpPr>
         <p:spPr>
           <a:xfrm>
-            <a:off x="1371600" y="5207000"/>
-            <a:ext cx="10439400" cy="1244600"/>
+            <a:off x="1714500" y="5181600"/>
+            <a:ext cx="9842500" cy="1143000"/>
           </a:xfrm>
           <a:prstGeom prst="rect">
             <a:avLst/>
@@ -11205,8 +11134,8 @@
         </p:nvSpPr>
         <p:spPr>
           <a:xfrm>
-            <a:off x="381000" y="5207000"/>
-            <a:ext cx="990599" cy="1244600"/>
+            <a:off x="635000" y="5181600"/>
+            <a:ext cx="1079500" cy="1143000"/>
           </a:xfrm>
           <a:prstGeom prst="rect">
             <a:avLst/>
@@ -11249,8 +11178,8 @@
         </p:nvSpPr>
         <p:spPr>
           <a:xfrm rot="16200000">
-            <a:off x="381000" y="5207000"/>
-            <a:ext cx="990599" cy="1244600"/>
+            <a:off x="635000" y="5181600"/>
+            <a:ext cx="1079500" cy="1143000"/>
           </a:xfrm>
           <a:prstGeom prst="rect">
             <a:avLst/>
@@ -11265,7 +11194,7 @@
           <a:p>
             <a:pPr algn="ctr"/>
             <a:r>
-              <a:rPr sz="700" b="1">
+              <a:rPr sz="1100" b="1">
                 <a:solidFill>
                   <a:srgbClr val="FFFFFF"/>
                 </a:solidFill>
@@ -11284,8 +11213,8 @@
         </p:nvSpPr>
         <p:spPr>
           <a:xfrm>
-            <a:off x="1435100" y="1854200"/>
-            <a:ext cx="1041400" cy="482600"/>
+            <a:off x="1536700" y="2063750"/>
+            <a:ext cx="1117600" cy="520700"/>
           </a:xfrm>
           <a:prstGeom prst="roundRect">
             <a:avLst>
@@ -11332,8 +11261,8 @@
         </p:nvSpPr>
         <p:spPr>
           <a:xfrm>
-            <a:off x="1498600" y="1854200"/>
-            <a:ext cx="914400" cy="482600"/>
+            <a:off x="1600200" y="2063750"/>
+            <a:ext cx="990599" cy="520700"/>
           </a:xfrm>
           <a:prstGeom prst="rect">
             <a:avLst/>
@@ -11352,7 +11281,7 @@
               </a:spcAft>
             </a:pPr>
             <a:r>
-              <a:rPr sz="625" b="1">
+              <a:rPr sz="1100" b="1">
                 <a:solidFill>
                   <a:srgbClr val="142433"/>
                 </a:solidFill>
@@ -11371,8 +11300,8 @@
         </p:nvSpPr>
         <p:spPr>
           <a:xfrm>
-            <a:off x="10775950" y="1854200"/>
-            <a:ext cx="952500" cy="482600"/>
+            <a:off x="10509250" y="2063750"/>
+            <a:ext cx="1079500" cy="520700"/>
           </a:xfrm>
           <a:prstGeom prst="roundRect">
             <a:avLst>
@@ -11419,8 +11348,8 @@
         </p:nvSpPr>
         <p:spPr>
           <a:xfrm>
-            <a:off x="10839450" y="1854200"/>
-            <a:ext cx="825500" cy="482600"/>
+            <a:off x="10572750" y="2063750"/>
+            <a:ext cx="952500" cy="520700"/>
           </a:xfrm>
           <a:prstGeom prst="rect">
             <a:avLst/>
@@ -11439,7 +11368,7 @@
               </a:spcAft>
             </a:pPr>
             <a:r>
-              <a:rPr sz="625" b="1">
+              <a:rPr sz="1100" b="1">
                 <a:solidFill>
                   <a:srgbClr val="142433"/>
                 </a:solidFill>
@@ -11458,12 +11387,12 @@
         </p:nvSpPr>
         <p:spPr>
           <a:xfrm>
-            <a:off x="2540000" y="1873250"/>
-            <a:ext cx="1016000" cy="444500"/>
+            <a:off x="2730500" y="2082800"/>
+            <a:ext cx="1092200" cy="482600"/>
           </a:xfrm>
           <a:prstGeom prst="roundRect">
             <a:avLst>
-              <a:gd name="adj" fmla="val 17142"/>
+              <a:gd name="adj" fmla="val 15789"/>
             </a:avLst>
           </a:prstGeom>
           <a:solidFill>
@@ -11506,8 +11435,8 @@
         </p:nvSpPr>
         <p:spPr>
           <a:xfrm>
-            <a:off x="2603500" y="1873250"/>
-            <a:ext cx="889000" cy="444500"/>
+            <a:off x="2794000" y="2082800"/>
+            <a:ext cx="965200" cy="482600"/>
           </a:xfrm>
           <a:prstGeom prst="rect">
             <a:avLst/>
@@ -11526,7 +11455,7 @@
               </a:spcAft>
             </a:pPr>
             <a:r>
-              <a:rPr sz="625" b="0">
+              <a:rPr sz="1100" b="0">
                 <a:solidFill>
                   <a:srgbClr val="142433"/>
                 </a:solidFill>
@@ -11545,12 +11474,12 @@
         </p:nvSpPr>
         <p:spPr>
           <a:xfrm>
-            <a:off x="9626600" y="1873250"/>
-            <a:ext cx="1016000" cy="444500"/>
+            <a:off x="9334500" y="2082800"/>
+            <a:ext cx="1092200" cy="482600"/>
           </a:xfrm>
           <a:prstGeom prst="roundRect">
             <a:avLst>
-              <a:gd name="adj" fmla="val 17142"/>
+              <a:gd name="adj" fmla="val 15789"/>
             </a:avLst>
           </a:prstGeom>
           <a:solidFill>
@@ -11593,8 +11522,8 @@
         </p:nvSpPr>
         <p:spPr>
           <a:xfrm>
-            <a:off x="9690100" y="1873250"/>
-            <a:ext cx="889000" cy="444500"/>
+            <a:off x="9398000" y="2082800"/>
+            <a:ext cx="965200" cy="482600"/>
           </a:xfrm>
           <a:prstGeom prst="rect">
             <a:avLst/>
@@ -11613,7 +11542,7 @@
               </a:spcAft>
             </a:pPr>
             <a:r>
-              <a:rPr sz="625" b="0">
+              <a:rPr sz="1100" b="0">
                 <a:solidFill>
                   <a:srgbClr val="142433"/>
                 </a:solidFill>
@@ -11632,8 +11561,8 @@
         </p:nvSpPr>
         <p:spPr>
           <a:xfrm>
-            <a:off x="6038850" y="3009900"/>
-            <a:ext cx="1092200" cy="660400"/>
+            <a:off x="5880100" y="3124200"/>
+            <a:ext cx="1193800" cy="685800"/>
           </a:xfrm>
           <a:prstGeom prst="diamond">
             <a:avLst/>
@@ -11670,7 +11599,7 @@
           <a:p>
             <a:pPr algn="ctr"/>
             <a:r>
-              <a:rPr sz="625" b="1">
+              <a:rPr sz="1100" b="1">
                 <a:solidFill>
                   <a:srgbClr val="142433"/>
                 </a:solidFill>
@@ -11689,12 +11618,12 @@
         </p:nvSpPr>
         <p:spPr>
           <a:xfrm>
-            <a:off x="3613150" y="3117850"/>
-            <a:ext cx="1016000" cy="444500"/>
+            <a:off x="3721100" y="3225800"/>
+            <a:ext cx="1092200" cy="482600"/>
           </a:xfrm>
           <a:prstGeom prst="roundRect">
             <a:avLst>
-              <a:gd name="adj" fmla="val 17142"/>
+              <a:gd name="adj" fmla="val 15789"/>
             </a:avLst>
           </a:prstGeom>
           <a:solidFill>
@@ -11737,8 +11666,8 @@
         </p:nvSpPr>
         <p:spPr>
           <a:xfrm>
-            <a:off x="3676649" y="3117850"/>
-            <a:ext cx="889000" cy="444500"/>
+            <a:off x="3784600" y="3225800"/>
+            <a:ext cx="965200" cy="482600"/>
           </a:xfrm>
           <a:prstGeom prst="rect">
             <a:avLst/>
@@ -11757,7 +11686,7 @@
               </a:spcAft>
             </a:pPr>
             <a:r>
-              <a:rPr sz="625" b="0">
+              <a:rPr sz="1100" b="0">
                 <a:solidFill>
                   <a:srgbClr val="142433"/>
                 </a:solidFill>
@@ -11776,12 +11705,12 @@
         </p:nvSpPr>
         <p:spPr>
           <a:xfrm>
-            <a:off x="4826000" y="3117850"/>
-            <a:ext cx="1016000" cy="444500"/>
+            <a:off x="4876800" y="3225800"/>
+            <a:ext cx="1092200" cy="482600"/>
           </a:xfrm>
           <a:prstGeom prst="roundRect">
             <a:avLst>
-              <a:gd name="adj" fmla="val 17142"/>
+              <a:gd name="adj" fmla="val 15789"/>
             </a:avLst>
           </a:prstGeom>
           <a:solidFill>
@@ -11824,8 +11753,8 @@
         </p:nvSpPr>
         <p:spPr>
           <a:xfrm>
-            <a:off x="4889500" y="3117850"/>
-            <a:ext cx="889000" cy="444500"/>
+            <a:off x="4940300" y="3225800"/>
+            <a:ext cx="965200" cy="482600"/>
           </a:xfrm>
           <a:prstGeom prst="rect">
             <a:avLst/>
@@ -11844,7 +11773,7 @@
               </a:spcAft>
             </a:pPr>
             <a:r>
-              <a:rPr sz="625" b="0">
+              <a:rPr sz="1100" b="0">
                 <a:solidFill>
                   <a:srgbClr val="142433"/>
                 </a:solidFill>
@@ -11863,12 +11792,12 @@
         </p:nvSpPr>
         <p:spPr>
           <a:xfrm>
-            <a:off x="7454900" y="3117850"/>
-            <a:ext cx="1016000" cy="444500"/>
+            <a:off x="7327900" y="3225800"/>
+            <a:ext cx="1092200" cy="482600"/>
           </a:xfrm>
           <a:prstGeom prst="roundRect">
             <a:avLst>
-              <a:gd name="adj" fmla="val 17142"/>
+              <a:gd name="adj" fmla="val 15789"/>
             </a:avLst>
           </a:prstGeom>
           <a:solidFill>
@@ -11911,8 +11840,8 @@
         </p:nvSpPr>
         <p:spPr>
           <a:xfrm>
-            <a:off x="7518399" y="3117850"/>
-            <a:ext cx="889000" cy="444500"/>
+            <a:off x="7391400" y="3225800"/>
+            <a:ext cx="965200" cy="482600"/>
           </a:xfrm>
           <a:prstGeom prst="rect">
             <a:avLst/>
@@ -11931,7 +11860,7 @@
               </a:spcAft>
             </a:pPr>
             <a:r>
-              <a:rPr sz="625" b="0">
+              <a:rPr sz="1100" b="0">
                 <a:solidFill>
                   <a:srgbClr val="142433"/>
                 </a:solidFill>
@@ -11950,12 +11879,12 @@
         </p:nvSpPr>
         <p:spPr>
           <a:xfrm>
-            <a:off x="8940800" y="3117850"/>
-            <a:ext cx="1016000" cy="444500"/>
+            <a:off x="8674100" y="3225800"/>
+            <a:ext cx="1092200" cy="482600"/>
           </a:xfrm>
           <a:prstGeom prst="roundRect">
             <a:avLst>
-              <a:gd name="adj" fmla="val 17142"/>
+              <a:gd name="adj" fmla="val 15789"/>
             </a:avLst>
           </a:prstGeom>
           <a:solidFill>
@@ -11998,8 +11927,8 @@
         </p:nvSpPr>
         <p:spPr>
           <a:xfrm>
-            <a:off x="9004300" y="3117850"/>
-            <a:ext cx="889000" cy="444500"/>
+            <a:off x="8737600" y="3225800"/>
+            <a:ext cx="965200" cy="482600"/>
           </a:xfrm>
           <a:prstGeom prst="rect">
             <a:avLst/>
@@ -12018,7 +11947,7 @@
               </a:spcAft>
             </a:pPr>
             <a:r>
-              <a:rPr sz="625" b="0">
+              <a:rPr sz="1100" b="0">
                 <a:solidFill>
                   <a:srgbClr val="142433"/>
                 </a:solidFill>
@@ -12037,12 +11966,12 @@
         </p:nvSpPr>
         <p:spPr>
           <a:xfrm>
-            <a:off x="10083800" y="3117850"/>
-            <a:ext cx="1016000" cy="444500"/>
+            <a:off x="9893300" y="3225800"/>
+            <a:ext cx="1092200" cy="482600"/>
           </a:xfrm>
           <a:prstGeom prst="roundRect">
             <a:avLst>
-              <a:gd name="adj" fmla="val 17142"/>
+              <a:gd name="adj" fmla="val 15789"/>
             </a:avLst>
           </a:prstGeom>
           <a:solidFill>
@@ -12085,8 +12014,8 @@
         </p:nvSpPr>
         <p:spPr>
           <a:xfrm>
-            <a:off x="10147300" y="3117850"/>
-            <a:ext cx="889000" cy="444500"/>
+            <a:off x="9956800" y="3225800"/>
+            <a:ext cx="965200" cy="482600"/>
           </a:xfrm>
           <a:prstGeom prst="rect">
             <a:avLst/>
@@ -12105,7 +12034,7 @@
               </a:spcAft>
             </a:pPr>
             <a:r>
-              <a:rPr sz="625" b="0">
+              <a:rPr sz="1100" b="0">
                 <a:solidFill>
                   <a:srgbClr val="142433"/>
                 </a:solidFill>
@@ -12124,12 +12053,12 @@
         </p:nvSpPr>
         <p:spPr>
           <a:xfrm>
-            <a:off x="1435100" y="4362450"/>
-            <a:ext cx="1016000" cy="444500"/>
+            <a:off x="1536700" y="4368800"/>
+            <a:ext cx="1117600" cy="482600"/>
           </a:xfrm>
           <a:prstGeom prst="roundRect">
             <a:avLst>
-              <a:gd name="adj" fmla="val 17142"/>
+              <a:gd name="adj" fmla="val 15789"/>
             </a:avLst>
           </a:prstGeom>
           <a:solidFill>
@@ -12172,8 +12101,8 @@
         </p:nvSpPr>
         <p:spPr>
           <a:xfrm>
-            <a:off x="1498600" y="4362450"/>
-            <a:ext cx="889000" cy="444500"/>
+            <a:off x="1600200" y="4368800"/>
+            <a:ext cx="990599" cy="482600"/>
           </a:xfrm>
           <a:prstGeom prst="rect">
             <a:avLst/>
@@ -12192,7 +12121,7 @@
               </a:spcAft>
             </a:pPr>
             <a:r>
-              <a:rPr sz="625" b="0">
+              <a:rPr sz="1100" b="0">
                 <a:solidFill>
                   <a:srgbClr val="142433"/>
                 </a:solidFill>
@@ -12211,12 +12140,12 @@
         </p:nvSpPr>
         <p:spPr>
           <a:xfrm>
-            <a:off x="2762250" y="4362450"/>
-            <a:ext cx="1016000" cy="444500"/>
+            <a:off x="2882900" y="4368800"/>
+            <a:ext cx="1092200" cy="482600"/>
           </a:xfrm>
           <a:prstGeom prst="roundRect">
             <a:avLst>
-              <a:gd name="adj" fmla="val 17142"/>
+              <a:gd name="adj" fmla="val 15789"/>
             </a:avLst>
           </a:prstGeom>
           <a:solidFill>
@@ -12259,8 +12188,8 @@
         </p:nvSpPr>
         <p:spPr>
           <a:xfrm>
-            <a:off x="2825750" y="4362450"/>
-            <a:ext cx="889000" cy="444500"/>
+            <a:off x="2946400" y="4368800"/>
+            <a:ext cx="965200" cy="482600"/>
           </a:xfrm>
           <a:prstGeom prst="rect">
             <a:avLst/>
@@ -12279,7 +12208,7 @@
               </a:spcAft>
             </a:pPr>
             <a:r>
-              <a:rPr sz="625" b="0">
+              <a:rPr sz="1100" b="0">
                 <a:solidFill>
                   <a:srgbClr val="142433"/>
                 </a:solidFill>
@@ -12298,12 +12227,12 @@
         </p:nvSpPr>
         <p:spPr>
           <a:xfrm>
-            <a:off x="7188200" y="4362450"/>
-            <a:ext cx="1016000" cy="444500"/>
+            <a:off x="7048500" y="4368800"/>
+            <a:ext cx="1092200" cy="482600"/>
           </a:xfrm>
           <a:prstGeom prst="roundRect">
             <a:avLst>
-              <a:gd name="adj" fmla="val 17142"/>
+              <a:gd name="adj" fmla="val 15789"/>
             </a:avLst>
           </a:prstGeom>
           <a:solidFill>
@@ -12346,8 +12275,8 @@
         </p:nvSpPr>
         <p:spPr>
           <a:xfrm>
-            <a:off x="7251700" y="4362450"/>
-            <a:ext cx="889000" cy="444500"/>
+            <a:off x="7112000" y="4368800"/>
+            <a:ext cx="965200" cy="482600"/>
           </a:xfrm>
           <a:prstGeom prst="rect">
             <a:avLst/>
@@ -12366,7 +12295,7 @@
               </a:spcAft>
             </a:pPr>
             <a:r>
-              <a:rPr sz="625" b="0">
+              <a:rPr sz="1100" b="0">
                 <a:solidFill>
                   <a:srgbClr val="142433"/>
                 </a:solidFill>
@@ -12385,12 +12314,12 @@
         </p:nvSpPr>
         <p:spPr>
           <a:xfrm>
-            <a:off x="9118600" y="4362450"/>
-            <a:ext cx="1016000" cy="444500"/>
+            <a:off x="8674100" y="4368800"/>
+            <a:ext cx="1092200" cy="482600"/>
           </a:xfrm>
           <a:prstGeom prst="roundRect">
             <a:avLst>
-              <a:gd name="adj" fmla="val 17142"/>
+              <a:gd name="adj" fmla="val 15789"/>
             </a:avLst>
           </a:prstGeom>
           <a:solidFill>
@@ -12433,8 +12362,8 @@
         </p:nvSpPr>
         <p:spPr>
           <a:xfrm>
-            <a:off x="9182100" y="4362450"/>
-            <a:ext cx="889000" cy="444500"/>
+            <a:off x="8737600" y="4368800"/>
+            <a:ext cx="965200" cy="482600"/>
           </a:xfrm>
           <a:prstGeom prst="rect">
             <a:avLst/>
@@ -12453,7 +12382,7 @@
               </a:spcAft>
             </a:pPr>
             <a:r>
-              <a:rPr sz="625" b="0">
+              <a:rPr sz="1100" b="0">
                 <a:solidFill>
                   <a:srgbClr val="142433"/>
                 </a:solidFill>
@@ -12472,12 +12401,12 @@
         </p:nvSpPr>
         <p:spPr>
           <a:xfrm>
-            <a:off x="10363200" y="4362450"/>
-            <a:ext cx="1016000" cy="444500"/>
+            <a:off x="10058400" y="4368800"/>
+            <a:ext cx="1092200" cy="482600"/>
           </a:xfrm>
           <a:prstGeom prst="roundRect">
             <a:avLst>
-              <a:gd name="adj" fmla="val 17142"/>
+              <a:gd name="adj" fmla="val 15789"/>
             </a:avLst>
           </a:prstGeom>
           <a:solidFill>
@@ -12520,8 +12449,8 @@
         </p:nvSpPr>
         <p:spPr>
           <a:xfrm>
-            <a:off x="10426700" y="4362450"/>
-            <a:ext cx="889000" cy="444500"/>
+            <a:off x="10121900" y="4368800"/>
+            <a:ext cx="965200" cy="482600"/>
           </a:xfrm>
           <a:prstGeom prst="rect">
             <a:avLst/>
@@ -12540,7 +12469,7 @@
               </a:spcAft>
             </a:pPr>
             <a:r>
-              <a:rPr sz="625" b="0">
+              <a:rPr sz="1100" b="0">
                 <a:solidFill>
                   <a:srgbClr val="142433"/>
                 </a:solidFill>
@@ -12559,12 +12488,12 @@
         </p:nvSpPr>
         <p:spPr>
           <a:xfrm>
-            <a:off x="4292600" y="5607050"/>
-            <a:ext cx="1016000" cy="444500"/>
+            <a:off x="4343400" y="5511800"/>
+            <a:ext cx="1092200" cy="482600"/>
           </a:xfrm>
           <a:prstGeom prst="roundRect">
             <a:avLst>
-              <a:gd name="adj" fmla="val 17142"/>
+              <a:gd name="adj" fmla="val 15789"/>
             </a:avLst>
           </a:prstGeom>
           <a:solidFill>
@@ -12607,8 +12536,8 @@
         </p:nvSpPr>
         <p:spPr>
           <a:xfrm>
-            <a:off x="4356100" y="5607050"/>
-            <a:ext cx="889000" cy="444500"/>
+            <a:off x="4406900" y="5511800"/>
+            <a:ext cx="965200" cy="482600"/>
           </a:xfrm>
           <a:prstGeom prst="rect">
             <a:avLst/>
@@ -12627,7 +12556,7 @@
               </a:spcAft>
             </a:pPr>
             <a:r>
-              <a:rPr sz="625" b="0">
+              <a:rPr sz="1100" b="0">
                 <a:solidFill>
                   <a:srgbClr val="142433"/>
                 </a:solidFill>
@@ -12646,12 +12575,12 @@
         </p:nvSpPr>
         <p:spPr>
           <a:xfrm>
-            <a:off x="10363200" y="5613400"/>
-            <a:ext cx="1016000" cy="444500"/>
+            <a:off x="10058400" y="5511800"/>
+            <a:ext cx="1092200" cy="482600"/>
           </a:xfrm>
           <a:prstGeom prst="roundRect">
             <a:avLst>
-              <a:gd name="adj" fmla="val 17142"/>
+              <a:gd name="adj" fmla="val 15789"/>
             </a:avLst>
           </a:prstGeom>
           <a:solidFill>
@@ -12694,8 +12623,8 @@
         </p:nvSpPr>
         <p:spPr>
           <a:xfrm>
-            <a:off x="10426700" y="5613400"/>
-            <a:ext cx="889000" cy="444500"/>
+            <a:off x="10121900" y="5511800"/>
+            <a:ext cx="965200" cy="482600"/>
           </a:xfrm>
           <a:prstGeom prst="rect">
             <a:avLst/>
@@ -12714,7 +12643,7 @@
               </a:spcAft>
             </a:pPr>
             <a:r>
-              <a:rPr sz="625" b="0">
+              <a:rPr sz="1100" b="0">
                 <a:solidFill>
                   <a:srgbClr val="142433"/>
                 </a:solidFill>
@@ -12732,14 +12661,14 @@
           <p:nvPr/>
         </p:nvCxnSpPr>
         <p:spPr>
-          <a:xfrm flipH="1">
-            <a:off x="1943100" y="2336800"/>
-            <a:ext cx="12700" cy="2025650"/>
+          <a:xfrm>
+            <a:off x="2095499" y="2584450"/>
+            <a:ext cx="0" cy="1784350"/>
           </a:xfrm>
           <a:prstGeom prst="bentConnector3">
             <a:avLst/>
           </a:prstGeom>
-          <a:ln w="15875">
+          <a:ln w="19050">
             <a:solidFill>
               <a:srgbClr val="9AA7AD"/>
             </a:solidFill>
@@ -12770,13 +12699,13 @@
         </p:nvCxnSpPr>
         <p:spPr>
           <a:xfrm flipV="1">
-            <a:off x="1943100" y="2317750"/>
-            <a:ext cx="1104900" cy="2044700"/>
+            <a:off x="2095499" y="2565400"/>
+            <a:ext cx="1181101" cy="1803400"/>
           </a:xfrm>
           <a:prstGeom prst="bentConnector3">
             <a:avLst/>
           </a:prstGeom>
-          <a:ln w="15875">
+          <a:ln w="19050">
             <a:solidFill>
               <a:srgbClr val="9AA7AD"/>
             </a:solidFill>
@@ -12807,13 +12736,13 @@
         </p:nvCxnSpPr>
         <p:spPr>
           <a:xfrm>
-            <a:off x="3048000" y="2317750"/>
-            <a:ext cx="222250" cy="2044700"/>
+            <a:off x="3276600" y="2565400"/>
+            <a:ext cx="152400" cy="1803400"/>
           </a:xfrm>
           <a:prstGeom prst="bentConnector3">
             <a:avLst/>
           </a:prstGeom>
-          <a:ln w="15875">
+          <a:ln w="19050">
             <a:solidFill>
               <a:srgbClr val="9AA7AD"/>
             </a:solidFill>
@@ -12844,13 +12773,13 @@
         </p:nvCxnSpPr>
         <p:spPr>
           <a:xfrm flipV="1">
-            <a:off x="3270250" y="3562350"/>
-            <a:ext cx="850900" cy="800100"/>
+            <a:off x="3429000" y="3708400"/>
+            <a:ext cx="838200" cy="660400"/>
           </a:xfrm>
           <a:prstGeom prst="bentConnector3">
             <a:avLst/>
           </a:prstGeom>
-          <a:ln w="15875">
+          <a:ln w="19050">
             <a:solidFill>
               <a:srgbClr val="9AA7AD"/>
             </a:solidFill>
@@ -12881,13 +12810,13 @@
         </p:nvCxnSpPr>
         <p:spPr>
           <a:xfrm flipV="1">
-            <a:off x="4800600" y="3562350"/>
-            <a:ext cx="533400" cy="2044700"/>
+            <a:off x="4889500" y="3708400"/>
+            <a:ext cx="533400" cy="1803400"/>
           </a:xfrm>
           <a:prstGeom prst="bentConnector3">
             <a:avLst/>
           </a:prstGeom>
-          <a:ln w="15875">
+          <a:ln w="19050">
             <a:solidFill>
               <a:srgbClr val="9AA7AD"/>
             </a:solidFill>
@@ -12918,13 +12847,13 @@
         </p:nvCxnSpPr>
         <p:spPr>
           <a:xfrm>
-            <a:off x="4629150" y="3340100"/>
-            <a:ext cx="196850" cy="0"/>
+            <a:off x="4813300" y="3467100"/>
+            <a:ext cx="63500" cy="0"/>
           </a:xfrm>
           <a:prstGeom prst="bentConnector3">
             <a:avLst/>
           </a:prstGeom>
-          <a:ln w="15875">
+          <a:ln w="19050">
             <a:solidFill>
               <a:srgbClr val="9AA7AD"/>
             </a:solidFill>
@@ -12954,14 +12883,14 @@
           <p:nvPr/>
         </p:nvCxnSpPr>
         <p:spPr>
-          <a:xfrm>
-            <a:off x="5842000" y="3340100"/>
-            <a:ext cx="196850" cy="0"/>
+          <a:xfrm flipH="1">
+            <a:off x="5880100" y="3467100"/>
+            <a:ext cx="88900" cy="0"/>
           </a:xfrm>
           <a:prstGeom prst="bentConnector3">
             <a:avLst/>
           </a:prstGeom>
-          <a:ln w="15875">
+          <a:ln w="19050">
             <a:solidFill>
               <a:srgbClr val="9AA7AD"/>
             </a:solidFill>
@@ -12992,13 +12921,13 @@
         </p:nvCxnSpPr>
         <p:spPr>
           <a:xfrm>
-            <a:off x="6584950" y="3670300"/>
-            <a:ext cx="1111249" cy="692150"/>
+            <a:off x="6477000" y="3810000"/>
+            <a:ext cx="1117600" cy="558800"/>
           </a:xfrm>
           <a:prstGeom prst="bentConnector3">
             <a:avLst/>
           </a:prstGeom>
-          <a:ln w="15875">
+          <a:ln w="19050">
             <a:solidFill>
               <a:srgbClr val="9AA7AD"/>
             </a:solidFill>
@@ -13029,8 +12958,8 @@
         </p:nvSpPr>
         <p:spPr>
           <a:xfrm>
-            <a:off x="6950075" y="3876674"/>
-            <a:ext cx="381000" cy="139700"/>
+            <a:off x="6832600" y="3937000"/>
+            <a:ext cx="406400" cy="165100"/>
           </a:xfrm>
           <a:prstGeom prst="rect">
             <a:avLst/>
@@ -13045,7 +12974,7 @@
           <a:p>
             <a:pPr algn="ctr"/>
             <a:r>
-              <a:rPr sz="600" b="1">
+              <a:rPr sz="1100" b="1">
                 <a:solidFill>
                   <a:srgbClr val="4A5B6B"/>
                 </a:solidFill>
@@ -13064,13 +12993,13 @@
         </p:nvCxnSpPr>
         <p:spPr>
           <a:xfrm>
-            <a:off x="7131050" y="3340100"/>
-            <a:ext cx="323850" cy="0"/>
+            <a:off x="7073900" y="3467100"/>
+            <a:ext cx="254000" cy="0"/>
           </a:xfrm>
           <a:prstGeom prst="bentConnector3">
             <a:avLst/>
           </a:prstGeom>
-          <a:ln w="15875">
+          <a:ln w="19050">
             <a:solidFill>
               <a:srgbClr val="9AA7AD"/>
             </a:solidFill>
@@ -13101,8 +13030,8 @@
         </p:nvSpPr>
         <p:spPr>
           <a:xfrm>
-            <a:off x="7102475" y="3200400"/>
-            <a:ext cx="381000" cy="139700"/>
+            <a:off x="6997700" y="3314700"/>
+            <a:ext cx="406400" cy="165100"/>
           </a:xfrm>
           <a:prstGeom prst="rect">
             <a:avLst/>
@@ -13117,7 +13046,7 @@
           <a:p>
             <a:pPr algn="ctr"/>
             <a:r>
-              <a:rPr sz="600" b="1">
+              <a:rPr sz="1100" b="1">
                 <a:solidFill>
                   <a:srgbClr val="4A5B6B"/>
                 </a:solidFill>
@@ -13136,13 +13065,13 @@
         </p:nvCxnSpPr>
         <p:spPr>
           <a:xfrm flipV="1">
-            <a:off x="8204199" y="3340100"/>
-            <a:ext cx="736601" cy="1244600"/>
+            <a:off x="8140700" y="3467100"/>
+            <a:ext cx="533400" cy="1143000"/>
           </a:xfrm>
           <a:prstGeom prst="bentConnector3">
             <a:avLst/>
           </a:prstGeom>
-          <a:ln w="15875">
+          <a:ln w="19050">
             <a:solidFill>
               <a:srgbClr val="9AA7AD"/>
             </a:solidFill>
@@ -13173,13 +13102,13 @@
         </p:nvCxnSpPr>
         <p:spPr>
           <a:xfrm>
-            <a:off x="9448800" y="3562350"/>
-            <a:ext cx="177800" cy="800100"/>
+            <a:off x="9220200" y="3708400"/>
+            <a:ext cx="0" cy="660400"/>
           </a:xfrm>
           <a:prstGeom prst="bentConnector3">
             <a:avLst/>
           </a:prstGeom>
-          <a:ln w="15875">
+          <a:ln w="19050">
             <a:solidFill>
               <a:srgbClr val="9AA7AD"/>
             </a:solidFill>
@@ -13210,13 +13139,13 @@
         </p:nvCxnSpPr>
         <p:spPr>
           <a:xfrm>
-            <a:off x="8470900" y="3340100"/>
-            <a:ext cx="647700" cy="1244600"/>
+            <a:off x="8420100" y="3467100"/>
+            <a:ext cx="254000" cy="1143000"/>
           </a:xfrm>
           <a:prstGeom prst="bentConnector3">
             <a:avLst/>
           </a:prstGeom>
-          <a:ln w="15875">
+          <a:ln w="19050">
             <a:solidFill>
               <a:srgbClr val="9AA7AD"/>
             </a:solidFill>
@@ -13247,13 +13176,13 @@
         </p:nvCxnSpPr>
         <p:spPr>
           <a:xfrm flipV="1">
-            <a:off x="9626600" y="3562350"/>
-            <a:ext cx="965200" cy="800100"/>
+            <a:off x="9766300" y="3467100"/>
+            <a:ext cx="127000" cy="1143000"/>
           </a:xfrm>
           <a:prstGeom prst="bentConnector3">
             <a:avLst/>
           </a:prstGeom>
-          <a:ln w="15875">
+          <a:ln w="19050">
             <a:solidFill>
               <a:srgbClr val="9AA7AD"/>
             </a:solidFill>
@@ -13284,13 +13213,13 @@
         </p:nvCxnSpPr>
         <p:spPr>
           <a:xfrm flipH="1" flipV="1">
-            <a:off x="10134600" y="2317750"/>
-            <a:ext cx="457200" cy="800100"/>
+            <a:off x="9880600" y="2565400"/>
+            <a:ext cx="558800" cy="660400"/>
           </a:xfrm>
           <a:prstGeom prst="bentConnector3">
             <a:avLst/>
           </a:prstGeom>
-          <a:ln w="15875">
+          <a:ln w="19050">
             <a:solidFill>
               <a:srgbClr val="9AA7AD"/>
             </a:solidFill>
@@ -13321,13 +13250,13 @@
         </p:nvCxnSpPr>
         <p:spPr>
           <a:xfrm>
-            <a:off x="10591800" y="3562350"/>
-            <a:ext cx="279400" cy="800100"/>
+            <a:off x="10439400" y="3708400"/>
+            <a:ext cx="165100" cy="660400"/>
           </a:xfrm>
           <a:prstGeom prst="bentConnector3">
             <a:avLst/>
           </a:prstGeom>
-          <a:ln w="15875">
+          <a:ln w="19050">
             <a:solidFill>
               <a:srgbClr val="9AA7AD"/>
             </a:solidFill>
@@ -13358,13 +13287,13 @@
         </p:nvCxnSpPr>
         <p:spPr>
           <a:xfrm>
-            <a:off x="10642600" y="2095499"/>
-            <a:ext cx="133350" cy="0"/>
+            <a:off x="10426700" y="2324100"/>
+            <a:ext cx="82550" cy="0"/>
           </a:xfrm>
           <a:prstGeom prst="bentConnector3">
             <a:avLst/>
           </a:prstGeom>
-          <a:ln w="15875">
+          <a:ln w="19050">
             <a:solidFill>
               <a:srgbClr val="9AA7AD"/>
             </a:solidFill>
@@ -13395,13 +13324,13 @@
         </p:nvCxnSpPr>
         <p:spPr>
           <a:xfrm>
-            <a:off x="10871200" y="4806950"/>
-            <a:ext cx="0" cy="806450"/>
+            <a:off x="10604500" y="4851400"/>
+            <a:ext cx="0" cy="660400"/>
           </a:xfrm>
           <a:prstGeom prst="bentConnector3">
             <a:avLst/>
           </a:prstGeom>
-          <a:ln w="15875">
+          <a:ln w="19050">
             <a:solidFill>
               <a:srgbClr val="9AA7AD"/>
             </a:solidFill>
@@ -13432,8 +13361,8 @@
         </p:nvSpPr>
         <p:spPr>
           <a:xfrm>
-            <a:off x="1371600" y="6464300"/>
-            <a:ext cx="11049000" cy="139700"/>
+            <a:off x="1714500" y="6451600"/>
+            <a:ext cx="10922000" cy="190500"/>
           </a:xfrm>
           <a:prstGeom prst="rect">
             <a:avLst/>
@@ -13452,7 +13381,7 @@
               </a:spcAft>
             </a:pPr>
             <a:r>
-              <a:rPr sz="625" b="0">
+              <a:rPr sz="1100" b="0">
                 <a:solidFill>
                   <a:srgbClr val="8597A4"/>
                 </a:solidFill>
@@ -13471,8 +13400,8 @@
         </p:nvSpPr>
         <p:spPr>
           <a:xfrm>
-            <a:off x="571500" y="6654800"/>
-            <a:ext cx="5715000" cy="139700"/>
+            <a:off x="635000" y="6642100"/>
+            <a:ext cx="5715000" cy="165100"/>
           </a:xfrm>
           <a:prstGeom prst="rect">
             <a:avLst/>
@@ -13480,18 +13409,13 @@
           <a:noFill/>
         </p:spPr>
         <p:txBody>
-          <a:bodyPr wrap="square" anchor="t" lIns="25400" rIns="25400" tIns="25400" bIns="25400">
+          <a:bodyPr wrap="none">
             <a:spAutoFit/>
           </a:bodyPr>
           <a:lstStyle/>
           <a:p>
-            <a:pPr algn="l">
-              <a:spcAft>
-                <a:spcPts val="0"/>
-              </a:spcAft>
-            </a:pPr>
-            <a:r>
-              <a:rPr sz="600" b="0">
+            <a:r>
+              <a:rPr sz="1000">
                 <a:solidFill>
                   <a:srgbClr val="8597A4"/>
                 </a:solidFill>
@@ -13510,8 +13434,8 @@
         </p:nvSpPr>
         <p:spPr>
           <a:xfrm>
-            <a:off x="10414000" y="6654800"/>
-            <a:ext cx="1206500" cy="139700"/>
+            <a:off x="10287000" y="6642100"/>
+            <a:ext cx="1270000" cy="165100"/>
           </a:xfrm>
           <a:prstGeom prst="rect">
             <a:avLst/>
@@ -13519,18 +13443,14 @@
           <a:noFill/>
         </p:spPr>
         <p:txBody>
-          <a:bodyPr wrap="square" anchor="t" lIns="25400" rIns="25400" tIns="25400" bIns="25400">
+          <a:bodyPr wrap="none">
             <a:spAutoFit/>
           </a:bodyPr>
           <a:lstStyle/>
           <a:p>
-            <a:pPr algn="r">
-              <a:spcAft>
-                <a:spcPts val="0"/>
-              </a:spcAft>
-            </a:pPr>
-            <a:r>
-              <a:rPr sz="600" b="0">
+            <a:pPr algn="r"/>
+            <a:r>
+              <a:rPr sz="1000">
                 <a:solidFill>
                   <a:srgbClr val="8597A4"/>
                 </a:solidFill>

--- a/docs/design/Sona_Care_Journey_Deck.pptx
+++ b/docs/design/Sona_Care_Journey_Deck.pptx
@@ -3208,7 +3208,7 @@
                 </a:solidFill>
                 <a:latin typeface="Inter"/>
               </a:rPr>
-              <a:t>Sona — Care Journey &amp; Product Overview</a:t>
+              <a:t>Sona: Care Journey &amp; Product Overview</a:t>
             </a:r>
           </a:p>
         </p:txBody>
@@ -3247,7 +3247,7 @@
                 </a:solidFill>
                 <a:latin typeface="Inter"/>
               </a:rPr>
-              <a:t>An AI co-pilot that reduces admin burnout in UK private Speech &amp; Language Therapy (SLT) — giving clinicians more productive time for care across a client's first 30 days.</a:t>
+              <a:t>An AI practice partner that reduces admin burnout in UK private Speech &amp; Language Therapy (SLT), giving clinicians more productive time for care across a client's first 30 days.</a:t>
             </a:r>
           </a:p>
         </p:txBody>
@@ -3371,7 +3371,7 @@
                 </a:solidFill>
                 <a:latin typeface="Inter"/>
               </a:rPr>
-              <a:t>Sona is an AI co-pilot for UK private Speech &amp; Language Therapy (SLT) practices.</a:t>
+              <a:t>Sona is an AI practice partner for UK private Speech &amp; Language Therapy (SLT).</a:t>
             </a:r>
           </a:p>
           <a:p>
@@ -3390,7 +3390,7 @@
                 </a:solidFill>
                 <a:latin typeface="Inter"/>
               </a:rPr>
-              <a:t>It does the repetitive admin alongside the clinician — capturing the enquiry, smart intake, consult prep, the triage decision, the first session plan and the family summary, always as drafts for the clinician to review.</a:t>
+              <a:t>It does the repetitive admin alongside the clinician: intake, consult prep, triage, the first session plan and family summary, all as drafts the clinician reviews.</a:t>
             </a:r>
           </a:p>
           <a:p>
@@ -3409,7 +3409,7 @@
                 </a:solidFill>
                 <a:latin typeface="Inter"/>
               </a:rPr>
-              <a:t>Sona augments clinicians — it increases human productivity: less admin burnout, more time for care.</a:t>
+              <a:t>Sona augments clinicians; it increases human productivity: less admin burnout, more time for care.</a:t>
             </a:r>
           </a:p>
         </p:txBody>
@@ -3575,7 +3575,7 @@
                 </a:solidFill>
                 <a:latin typeface="Inter"/>
               </a:rPr>
-              <a:t>  —  the journey &amp; the value</a:t>
+              <a:t>:  the journey &amp; the value</a:t>
             </a:r>
           </a:p>
         </p:txBody>
@@ -3619,7 +3619,7 @@
                 </a:solidFill>
                 <a:latin typeface="Inter"/>
               </a:rPr>
-              <a:t>  —  the proposed solution</a:t>
+              <a:t>:  the proposed solution</a:t>
             </a:r>
           </a:p>
         </p:txBody>
@@ -3663,7 +3663,7 @@
                 </a:solidFill>
                 <a:latin typeface="Inter"/>
               </a:rPr>
-              <a:t>  —  the To-Be swimlane</a:t>
+              <a:t>:  the To-Be swimlane</a:t>
             </a:r>
           </a:p>
         </p:txBody>
@@ -3741,8 +3741,8 @@
                 </a:solidFill>
                 <a:latin typeface="Inter"/>
               </a:rPr>
-              <a:t>client / parent / carer — the family or adult client
-clinician / SLT — the therapist    ·    practice — the private clinic</a:t>
+              <a:t>client / parent / carer: the family or adult client
+clinician / SLT: the therapist    ·    practice: the private clinic</a:t>
             </a:r>
           </a:p>
         </p:txBody>
@@ -3840,8 +3840,8 @@
         </p:nvSpPr>
         <p:spPr>
           <a:xfrm>
-            <a:off x="838200" y="6273800"/>
-            <a:ext cx="2730500" cy="254000"/>
+            <a:off x="889000" y="6273800"/>
+            <a:ext cx="3302000" cy="254000"/>
           </a:xfrm>
           <a:prstGeom prst="rect">
             <a:avLst/>
@@ -3879,8 +3879,8 @@
         </p:nvSpPr>
         <p:spPr>
           <a:xfrm>
-            <a:off x="3568700" y="6273800"/>
-            <a:ext cx="2730500" cy="254000"/>
+            <a:off x="4527550" y="6273800"/>
+            <a:ext cx="3302000" cy="254000"/>
           </a:xfrm>
           <a:prstGeom prst="rect">
             <a:avLst/>
@@ -3905,7 +3905,7 @@
                 </a:solidFill>
                 <a:latin typeface="Inter"/>
               </a:rPr>
-              <a:t>No screen time for children</a:t>
+              <a:t>UK data residency + audit</a:t>
             </a:r>
           </a:p>
         </p:txBody>
@@ -3918,8 +3918,8 @@
         </p:nvSpPr>
         <p:spPr>
           <a:xfrm>
-            <a:off x="6299200" y="6273800"/>
-            <a:ext cx="2730500" cy="254000"/>
+            <a:off x="8172450" y="6273800"/>
+            <a:ext cx="3302000" cy="254000"/>
           </a:xfrm>
           <a:prstGeom prst="rect">
             <a:avLst/>
@@ -3944,45 +3944,6 @@
                 </a:solidFill>
                 <a:latin typeface="Inter"/>
               </a:rPr>
-              <a:t>UK data residency + audit</a:t>
-            </a:r>
-          </a:p>
-        </p:txBody>
-      </p:sp>
-      <p:sp>
-        <p:nvSpPr>
-          <p:cNvPr id="22" name="TextBox 21"/>
-          <p:cNvSpPr txBox="1"/>
-          <p:nvPr/>
-        </p:nvSpPr>
-        <p:spPr>
-          <a:xfrm>
-            <a:off x="8902700" y="6273800"/>
-            <a:ext cx="2730500" cy="254000"/>
-          </a:xfrm>
-          <a:prstGeom prst="rect">
-            <a:avLst/>
-          </a:prstGeom>
-          <a:noFill/>
-        </p:spPr>
-        <p:txBody>
-          <a:bodyPr wrap="square" anchor="t" lIns="25400" rIns="25400" tIns="25400" bIns="25400">
-            <a:spAutoFit/>
-          </a:bodyPr>
-          <a:lstStyle/>
-          <a:p>
-            <a:pPr algn="l">
-              <a:spcAft>
-                <a:spcPts val="0"/>
-              </a:spcAft>
-            </a:pPr>
-            <a:r>
-              <a:rPr sz="1300" b="0">
-                <a:solidFill>
-                  <a:srgbClr val="1E4A4D"/>
-                </a:solidFill>
-                <a:latin typeface="Inter"/>
-              </a:rPr>
               <a:t>Augment people, never replace</a:t>
             </a:r>
           </a:p>
@@ -3990,13 +3951,13 @@
       </p:sp>
       <p:sp>
         <p:nvSpPr>
-          <p:cNvPr id="23" name="Rectangle 22"/>
+          <p:cNvPr id="22" name="Rectangle 21"/>
           <p:cNvSpPr/>
           <p:nvPr/>
         </p:nvSpPr>
         <p:spPr>
           <a:xfrm>
-            <a:off x="3467100" y="6235700"/>
+            <a:off x="4273550" y="6235700"/>
             <a:ext cx="6350" cy="330200"/>
           </a:xfrm>
           <a:prstGeom prst="rect">
@@ -4034,13 +3995,13 @@
       </p:sp>
       <p:sp>
         <p:nvSpPr>
-          <p:cNvPr id="24" name="Rectangle 23"/>
+          <p:cNvPr id="23" name="Rectangle 22"/>
           <p:cNvSpPr/>
           <p:nvPr/>
         </p:nvSpPr>
         <p:spPr>
           <a:xfrm>
-            <a:off x="6197600" y="6235700"/>
+            <a:off x="7918449" y="6235700"/>
             <a:ext cx="6350" cy="330200"/>
           </a:xfrm>
           <a:prstGeom prst="rect">
@@ -4078,51 +4039,7 @@
       </p:sp>
       <p:sp>
         <p:nvSpPr>
-          <p:cNvPr id="25" name="Rectangle 24"/>
-          <p:cNvSpPr/>
-          <p:nvPr/>
-        </p:nvSpPr>
-        <p:spPr>
-          <a:xfrm>
-            <a:off x="8801100" y="6235700"/>
-            <a:ext cx="6350" cy="330200"/>
-          </a:xfrm>
-          <a:prstGeom prst="rect">
-            <a:avLst/>
-          </a:prstGeom>
-          <a:solidFill>
-            <a:srgbClr val="E5E7EB"/>
-          </a:solidFill>
-          <a:ln>
-            <a:noFill/>
-          </a:ln>
-          <a:effectLst/>
-        </p:spPr>
-        <p:style>
-          <a:lnRef idx="1">
-            <a:schemeClr val="accent1"/>
-          </a:lnRef>
-          <a:fillRef idx="3">
-            <a:schemeClr val="accent1"/>
-          </a:fillRef>
-          <a:effectRef idx="2">
-            <a:schemeClr val="accent1"/>
-          </a:effectRef>
-          <a:fontRef idx="minor">
-            <a:schemeClr val="lt1"/>
-          </a:fontRef>
-        </p:style>
-        <p:txBody>
-          <a:bodyPr rtlCol="0" anchor="ctr"/>
-          <a:lstStyle/>
-          <a:p>
-            <a:pPr algn="ctr"/>
-          </a:p>
-        </p:txBody>
-      </p:sp>
-      <p:sp>
-        <p:nvSpPr>
-          <p:cNvPr id="26" name="TextBox 25"/>
+          <p:cNvPr id="24" name="TextBox 23"/>
           <p:cNvSpPr txBox="1"/>
           <p:nvPr/>
         </p:nvSpPr>
@@ -4149,14 +4066,14 @@
                 </a:solidFill>
                 <a:latin typeface="Inter"/>
               </a:rPr>
-              <a:t>Sona — Care Journey &amp; Product Overview</a:t>
-            </a:r>
-          </a:p>
-        </p:txBody>
-      </p:sp>
-      <p:sp>
-        <p:nvSpPr>
-          <p:cNvPr id="27" name="TextBox 26"/>
+              <a:t>Sona: Care Journey &amp; Product Overview</a:t>
+            </a:r>
+          </a:p>
+        </p:txBody>
+      </p:sp>
+      <p:sp>
+        <p:nvSpPr>
+          <p:cNvPr id="25" name="TextBox 24"/>
           <p:cNvSpPr txBox="1"/>
           <p:nvPr/>
         </p:nvSpPr>
@@ -4363,7 +4280,7 @@
                 </a:solidFill>
                 <a:latin typeface="Inter"/>
               </a:rPr>
-              <a:t>How a new SLT case feels today, and where Sona reduces admin burnout and adds value — across five phases.</a:t>
+              <a:t>How a new SLT case feels today, and where Sona reduces admin burnout and adds value across five phases.</a:t>
             </a:r>
           </a:p>
         </p:txBody>
@@ -5966,7 +5883,7 @@
                 </a:solidFill>
                 <a:latin typeface="Inter"/>
               </a:rPr>
-              <a:t>TODAY'S PAIN — BY PHASE</a:t>
+              <a:t>TODAY'S PAIN · BY PHASE</a:t>
             </a:r>
           </a:p>
         </p:txBody>
@@ -6228,7 +6145,7 @@
                 </a:solidFill>
                 <a:latin typeface="Inter"/>
               </a:rPr>
-              <a:t>Chasing forms — everything is manual</a:t>
+              <a:t>Chasing forms; everything is manual</a:t>
             </a:r>
           </a:p>
         </p:txBody>
@@ -6942,7 +6859,7 @@
                 </a:solidFill>
                 <a:latin typeface="Inter"/>
               </a:rPr>
-              <a:t>Sona — Care Journey &amp; Product Overview</a:t>
+              <a:t>Sona: Care Journey &amp; Product Overview</a:t>
             </a:r>
           </a:p>
         </p:txBody>
@@ -7156,7 +7073,7 @@
                 </a:solidFill>
                 <a:latin typeface="Inter"/>
               </a:rPr>
-              <a:t>The first 30 days as nine stages grouped into five phases — what Sona does, and the surface that delivers it.</a:t>
+              <a:t>The first 30 days as nine stages grouped into five phases: what Sona does, and the surface that delivers it.</a:t>
             </a:r>
           </a:p>
         </p:txBody>
@@ -10243,7 +10160,7 @@
                 </a:solidFill>
                 <a:latin typeface="Inter"/>
               </a:rPr>
-              <a:t>Trust is the moat — clinician signs every draft</a:t>
+              <a:t>Trust is the moat; clinician signs every draft</a:t>
             </a:r>
           </a:p>
         </p:txBody>
@@ -10452,7 +10369,7 @@
                 </a:solidFill>
                 <a:latin typeface="Inter"/>
               </a:rPr>
-              <a:t>Colour groups the nine stages into their five phases.   ·   Generalized across SLTs (Pediatric &amp; Adult).</a:t>
+              <a:t>Colour groups the nine stages into their five phases.   ·   Generalised across SLTs (Paediatric &amp; Adult).</a:t>
             </a:r>
           </a:p>
         </p:txBody>
@@ -10486,7 +10403,7 @@
                 </a:solidFill>
                 <a:latin typeface="Inter"/>
               </a:rPr>
-              <a:t>Sona — Care Journey &amp; Product Overview</a:t>
+              <a:t>Sona: Care Journey &amp; Product Overview</a:t>
             </a:r>
           </a:p>
         </p:txBody>
@@ -10700,7 +10617,7 @@
                 </a:solidFill>
                 <a:latin typeface="Inter"/>
               </a:rPr>
-              <a:t>A swimlane map of the proposed (To-Be) process — the basis for prototypes and screens.</a:t>
+              <a:t>A swimlane map of the proposed (To-Be) process: the basis for prototypes and screens.</a:t>
             </a:r>
           </a:p>
         </p:txBody>
@@ -13421,7 +13338,7 @@
                 </a:solidFill>
                 <a:latin typeface="Inter"/>
               </a:rPr>
-              <a:t>Sona — Care Journey &amp; Product Overview</a:t>
+              <a:t>Sona: Care Journey &amp; Product Overview</a:t>
             </a:r>
           </a:p>
         </p:txBody>

--- a/docs/design/Sona_Care_Journey_Deck.pptx
+++ b/docs/design/Sona_Care_Journey_Deck.pptx
@@ -3247,7 +3247,7 @@
                 </a:solidFill>
                 <a:latin typeface="Inter"/>
               </a:rPr>
-              <a:t>An AI practice partner that reduces admin burnout in UK private Speech &amp; Language Therapy (SLT), giving clinicians more productive time for care across a client's first 30 days.</a:t>
+              <a:t>An AI practice partner that reduces admin burnout in UK private Speech and Language Therapy (SLT), giving clinicians more productive time for care across a client's first 30 days.</a:t>
             </a:r>
           </a:p>
         </p:txBody>
@@ -3371,7 +3371,7 @@
                 </a:solidFill>
                 <a:latin typeface="Inter"/>
               </a:rPr>
-              <a:t>Sona is an AI practice partner for UK private Speech &amp; Language Therapy (SLT).</a:t>
+              <a:t>Sona is an AI practice partner for UK private Speech and Language Therapy (SLT).</a:t>
             </a:r>
           </a:p>
           <a:p>
@@ -3531,7 +3531,7 @@
                 </a:solidFill>
                 <a:latin typeface="Inter"/>
               </a:rPr>
-              <a:t>Three views, read left → right:</a:t>
+              <a:t>Three views, read left to right:</a:t>
             </a:r>
           </a:p>
         </p:txBody>
@@ -3575,7 +3575,7 @@
                 </a:solidFill>
                 <a:latin typeface="Inter"/>
               </a:rPr>
-              <a:t>:  the journey &amp; the value</a:t>
+              <a:t>: the journey and the value</a:t>
             </a:r>
           </a:p>
         </p:txBody>
@@ -3619,7 +3619,7 @@
                 </a:solidFill>
                 <a:latin typeface="Inter"/>
               </a:rPr>
-              <a:t>:  the proposed solution</a:t>
+              <a:t>: the proposed solution</a:t>
             </a:r>
           </a:p>
         </p:txBody>
@@ -3663,7 +3663,7 @@
                 </a:solidFill>
                 <a:latin typeface="Inter"/>
               </a:rPr>
-              <a:t>:  the To-Be swimlane</a:t>
+              <a:t>: the To-Be swimlane</a:t>
             </a:r>
           </a:p>
         </p:txBody>
@@ -3741,8 +3741,8 @@
                 </a:solidFill>
                 <a:latin typeface="Inter"/>
               </a:rPr>
-              <a:t>client / parent / carer: the family or adult client
-clinician / SLT: the therapist    ·    practice: the private clinic</a:t>
+              <a:t>Client, parent or carer: the family or the adult client.
+Clinician (SLT): the therapist. Practice: the private clinic.</a:t>
             </a:r>
           </a:p>
         </p:txBody>
@@ -3866,7 +3866,7 @@
                 </a:solidFill>
                 <a:latin typeface="Inter"/>
               </a:rPr>
-              <a:t>AI drafts, clinician decides</a:t>
+              <a:t>AI drafts; clinician decides</a:t>
             </a:r>
           </a:p>
         </p:txBody>
@@ -3944,7 +3944,7 @@
                 </a:solidFill>
                 <a:latin typeface="Inter"/>
               </a:rPr>
-              <a:t>Augment people, never replace</a:t>
+              <a:t>Augment people, never replace them</a:t>
             </a:r>
           </a:p>
         </p:txBody>
@@ -4790,7 +4790,7 @@
                 </a:solidFill>
                 <a:latin typeface="Inter"/>
               </a:rPr>
-              <a:t>HOW EACH PHASE FEELS  ·  one point per phase, family + clinician</a:t>
+              <a:t>HOW EACH PHASE FEELS · one point per phase, family and clinician</a:t>
             </a:r>
           </a:p>
         </p:txBody>
@@ -5844,7 +5844,7 @@
                 </a:solidFill>
                 <a:latin typeface="Inter"/>
               </a:rPr>
-              <a:t>confident &amp; in control</a:t>
+              <a:t>confident and in control</a:t>
             </a:r>
           </a:p>
         </p:txBody>
@@ -6145,7 +6145,7 @@
                 </a:solidFill>
                 <a:latin typeface="Inter"/>
               </a:rPr>
-              <a:t>Chasing forms; everything is manual</a:t>
+              <a:t>Chasing families to finish the form</a:t>
             </a:r>
           </a:p>
         </p:txBody>
@@ -6407,7 +6407,7 @@
                 </a:solidFill>
                 <a:latin typeface="Inter"/>
               </a:rPr>
-              <a:t>Plans hand-built; reports take ~3 weeks</a:t>
+              <a:t>Plans are hand-built; reports take ~3 weeks</a:t>
             </a:r>
           </a:p>
         </p:txBody>
@@ -6538,7 +6538,7 @@
                 </a:solidFill>
                 <a:latin typeface="Inter"/>
               </a:rPr>
-              <a:t>Carryover is ad-hoc (email / WhatsApp)</a:t>
+              <a:t>Carryover is ad hoc (email or WhatsApp)</a:t>
             </a:r>
           </a:p>
         </p:txBody>
@@ -6662,7 +6662,7 @@
                 </a:solidFill>
                 <a:latin typeface="Inter"/>
               </a:rPr>
-              <a:t>≥ 4 hours / month</a:t>
+              <a:t>≥ 4 hours a month</a:t>
             </a:r>
           </a:p>
         </p:txBody>
@@ -6825,7 +6825,7 @@
                 </a:solidFill>
                 <a:latin typeface="Inter"/>
               </a:rPr>
-              <a:t>client summaries &amp; reports, vs the ~3-week manual baseline</a:t>
+              <a:t>client summaries and reports, versus the ~3-week manual baseline</a:t>
             </a:r>
           </a:p>
         </p:txBody>
@@ -7073,7 +7073,7 @@
                 </a:solidFill>
                 <a:latin typeface="Inter"/>
               </a:rPr>
-              <a:t>The first 30 days as nine stages grouped into five phases: what Sona does, and the surface that delivers it.</a:t>
+              <a:t>The first 30 days as nine stages grouped into five phases: what Sona does and the surface that delivers it.</a:t>
             </a:r>
           </a:p>
         </p:txBody>
@@ -8166,7 +8166,7 @@
                 </a:solidFill>
                 <a:latin typeface="Inter"/>
               </a:rPr>
-              <a:t>Family / client app</a:t>
+              <a:t>Family or client app</a:t>
             </a:r>
           </a:p>
         </p:txBody>
@@ -8846,7 +8846,7 @@
                 </a:solidFill>
                 <a:latin typeface="Inter"/>
               </a:rPr>
-              <a:t>Schedule consult + calendar / video</a:t>
+              <a:t>Schedule consult (calendar, video)</a:t>
             </a:r>
           </a:p>
         </p:txBody>
@@ -10160,7 +10160,7 @@
                 </a:solidFill>
                 <a:latin typeface="Inter"/>
               </a:rPr>
-              <a:t>Trust is the moat; clinician signs every draft</a:t>
+              <a:t>Trust is the moat; the clinician signs every draft</a:t>
             </a:r>
           </a:p>
         </p:txBody>
@@ -10369,7 +10369,7 @@
                 </a:solidFill>
                 <a:latin typeface="Inter"/>
               </a:rPr>
-              <a:t>Colour groups the nine stages into their five phases.   ·   Generalised across SLTs (Paediatric &amp; Adult).</a:t>
+              <a:t>Colour groups the nine stages into their five phases. · Generalised across SLTs (paediatric and adult).</a:t>
             </a:r>
           </a:p>
         </p:txBody>
@@ -10992,7 +10992,7 @@
                 </a:solidFill>
                 <a:latin typeface="Inter"/>
               </a:rPr>
-              <a:t>Sona  (app &amp; AI)</a:t>
+              <a:t>Sona (app &amp; AI)</a:t>
             </a:r>
           </a:p>
         </p:txBody>
@@ -11117,7 +11117,7 @@
                 </a:solidFill>
                 <a:latin typeface="Inter"/>
               </a:rPr>
-              <a:t>External  (calendar · PMS)</a:t>
+              <a:t>External (calendar and PMS)</a:t>
             </a:r>
           </a:p>
         </p:txBody>
@@ -12479,7 +12479,7 @@
                 </a:solidFill>
                 <a:latin typeface="Inter"/>
               </a:rPr>
-              <a:t>Calendar / video link</a:t>
+              <a:t>Calendar and video link</a:t>
             </a:r>
           </a:p>
         </p:txBody>
@@ -13304,7 +13304,7 @@
                 </a:solidFill>
                 <a:latin typeface="Inter"/>
               </a:rPr>
-              <a:t>Shapes:  rounded = task   ·   diamond = decision   ·   pill = start / end.    DRAFT = AI artifact the clinician reviews &amp; signs.</a:t>
+              <a:t>Shapes: rounded = task · diamond = decision · pill = start or end. DRAFT = AI artefact the clinician reviews and signs.</a:t>
             </a:r>
           </a:p>
         </p:txBody>
